--- a/slides/CLIMB_talk.pptx
+++ b/slides/CLIMB_talk.pptx
@@ -24,7 +24,6 @@
     <p:sldId id="272" r:id="rId24"/>
     <p:sldId id="273" r:id="rId25"/>
     <p:sldId id="274" r:id="rId26"/>
-    <p:sldId id="275" r:id="rId27"/>
   </p:sldIdLst>
   <p:sldSz cx="12192000" cy="6858000" type="screen4x3"/>
   <p:notesSz cx="6858000" cy="9144000"/>
@@ -591,7 +590,7 @@
           <a:lstStyle/>
           <a:p>
             <a:r>
-              <a:t>A natural shortcut is to pick a threshold by hand or by intuition. These rules can look fine on average but lose a lot on some settings. A fixed confidence threshold with the same average cost as CLIMB loses up to 16 points. Always using the single agent loses up to 9. CLIMB at a 5 point tolerance loses at most 2.8. In deployment, nothing tells you which setting is the bad one.</a:t>
+              <a:t>CLIMB turns this into a promise. You choose how much accuracy you can give up, say 5 points. CLIMB looks at a few hundred labelled tasks and returns the cheapest rule that keeps that promise, with 90 percent probability. If no cheaper rule qualifies, it simply calls the team every time, so the worst case is no savings, not lost accuracy.</a:t>
             </a:r>
           </a:p>
         </p:txBody>
@@ -661,7 +660,7 @@
           <a:lstStyle/>
           <a:p>
             <a:r>
-              <a:t>CLIMB turns this into a promise. You choose how much accuracy you can give up, say 5 points. CLIMB looks at a few hundred labelled tasks and returns the cheapest rule that keeps that promise, with 90 percent probability. If no cheaper rule qualifies, it simply calls the team every time, so the worst case is no savings, not lost accuracy.</a:t>
+              <a:t>Here is a real example: gpt-oss-120b on MuSiQue. Each dot is one possible threshold. On the left, almost everything goes to the team: safe but expensive. Moving right, more tasks stop early: cheaper but riskier. CLIMB tests them in this order and stops at the first one that fails. It deploys the cheapest one that passed, the star, at 57 percent of the tokens. Some grey dots are still under the line: the test is cautious, it needs evidence.</a:t>
             </a:r>
           </a:p>
         </p:txBody>
@@ -731,7 +730,7 @@
           <a:lstStyle/>
           <a:p>
             <a:r>
-              <a:t>Here is a real example: gpt-oss-120b on MuSiQue. Each dot is one possible threshold. On the left, almost everything goes to the team: safe but expensive. Moving right, more tasks stop early: cheaper but riskier. CLIMB tests them in this order and stops at the first one that fails. It deploys the cheapest one that passed, the star, at 57 percent of the tokens. Some grey dots are still under the line: the test is cautious, it needs evidence.</a:t>
+              <a:t>How does the test decide pass or fail? Think of a gambler who bets that skipping the team is harmless. Start with one dollar. For each calibration task, if skipping did no harm, the gambler wins a little. If it broke an answer, the gambler loses. If the wealth ever reaches 20 times the start, the rule passes. A safe rule makes the gambler rich fast. A rule that loses 6 points makes the gambler broke. The bet size adapts to how often skipping changes anything, which makes the test efficient.</a:t>
             </a:r>
           </a:p>
         </p:txBody>
@@ -801,7 +800,7 @@
           <a:lstStyle/>
           <a:p>
             <a:r>
-              <a:t>How does the test decide pass or fail? Think of a gambler who bets that skipping the team is harmless. Start with one dollar. For each calibration task, if skipping did no harm, the gambler wins a little. If it broke an answer, the gambler loses. If the wealth ever reaches 20 times the start, the rule passes. A safe rule makes the gambler rich fast. A rule that loses 6 points makes the gambler broke. The bet size adapts to how often skipping changes anything, which makes the test efficient.</a:t>
+              <a:t>One detail matters a lot. Skipping the team is not only a risk. Sometimes the cheap answer is right and the team would have broken it. Standard tests count only the losses. CLIMB counts both sides, so these saved answers offset the lost ones.</a:t>
             </a:r>
           </a:p>
         </p:txBody>
@@ -871,7 +870,7 @@
           <a:lstStyle/>
           <a:p>
             <a:r>
-              <a:t>One detail matters a lot. Skipping the team is not only a risk. Sometimes the cheap answer is right and the team would have broken it. Standard tests count only the losses. CLIMB counts both sides, so these saved answers offset the lost ones.</a:t>
+              <a:t>Does the choice of test matter? Every test here is valid, they differ only in how much they can certify. A worst-case bound certifies nothing cheaper than the team. Ignoring the saved answers keeps 79 percent of tokens. CLIMB's test, which counts both sides and adapts to the variance, keeps 62 percent.</a:t>
             </a:r>
           </a:p>
         </p:txBody>
@@ -941,7 +940,7 @@
           <a:lstStyle/>
           <a:p>
             <a:r>
-              <a:t>Does the choice of test matter? Every test here is valid, they differ only in how much they can certify. A worst-case bound certifies nothing cheaper than the team. Ignoring the saved answers keeps 79 percent of tokens. CLIMB's test, which counts both sides and adapts to the variance, keeps 62 percent.</a:t>
+              <a:t>We test on three open models and four benchmarks: math, two open-book question answering sets, and hard reasoning. We record every rung for every task once, then replay 200 random splits: half to calibrate CLIMB, half to evaluate it.</a:t>
             </a:r>
           </a:p>
         </p:txBody>
@@ -1011,7 +1010,7 @@
           <a:lstStyle/>
           <a:p>
             <a:r>
-              <a:t>We test on three open models and four benchmarks: math, two open-book question answering sets, and hard reasoning. We record every rung for every task once, then replay 200 random splits: half to calibrate CLIMB, half to evaluate it.</a:t>
+              <a:t>Does the promise hold? For each setting, the share of splits where CLIMB lost more than its tolerance. The guarantee allows up to 10 percent. We see at most 2 percent. A separate check with 5,000 random calibration draws per setting gives at most 3.4 percent.</a:t>
             </a:r>
           </a:p>
         </p:txBody>
@@ -1081,7 +1080,7 @@
           <a:lstStyle/>
           <a:p>
             <a:r>
-              <a:t>Does the promise hold? For each setting, the share of splits where CLIMB lost more than its tolerance. The guarantee allows up to 10 percent. We see at most 2 percent. A separate check with 5,000 random calibration draws per setting gives at most 3.4 percent.</a:t>
+              <a:t>How much does it save? Each bar is the share of the team's tokens CLIMB uses. At a 5 point tolerance it saves 38 percent on average, at 10 points 65 percent. Savings are smallest where confidence points the wrong way, on Gemma, and the guarantee still holds there: CLIMB just calls the team more often.</a:t>
             </a:r>
           </a:p>
         </p:txBody>
@@ -1151,7 +1150,7 @@
           <a:lstStyle/>
           <a:p>
             <a:r>
-              <a:t>How much does it save? Each bar is the share of the team's tokens CLIMB uses. At a 5 point tolerance it saves 38 percent on average, at 10 points 65 percent. Savings are smallest where confidence points the wrong way, on Gemma, and the guarantee still holds there: CLIMB just calls the team more often.</a:t>
+              <a:t>Why not just tune the threshold on the same data, without the test? It is cheaper on paper, but it breaks the promise: at 5 points it fails on 31 percent of splits on average, against at most 2 percent for CLIMB. A rule tuned to the edge on one sample tends to cross it on the next. The extra tokens CLIMB spends are the price of the guarantee.</a:t>
             </a:r>
           </a:p>
         </p:txBody>
@@ -1221,7 +1220,7 @@
           <a:lstStyle/>
           <a:p>
             <a:r>
-              <a:t>Why not just tune the threshold on the same data, without the test? It is cheaper on paper, but it breaks the promise: at 5 points it fails on 31 percent of splits on average, against at most 2 percent for CLIMB. A rule tuned to the edge on one sample tends to cross it on the next. The extra tokens CLIMB spends are the price of the guarantee.</a:t>
+              <a:t>To sum up. Agent teams are expensive and sometimes hurt. CLIMB calls them only when cheaper answers cannot be certified, keeps a user-chosen accuracy promise, and saves 38 to 65 percent of tokens. The guarantee assumes calibration tasks look like deployment tasks. Thank you.</a:t>
             </a:r>
           </a:p>
         </p:txBody>
@@ -1316,76 +1315,6 @@
 </p:notes>
 </file>
 
-<file path=ppt/notesSlides/notesSlide20.xml><?xml version="1.0" encoding="utf-8"?>
-<p:notes xmlns:a="http://schemas.openxmlformats.org/drawingml/2006/main" xmlns:p="http://schemas.openxmlformats.org/presentationml/2006/main" xmlns:r="http://schemas.openxmlformats.org/officeDocument/2006/relationships">
-  <p:cSld>
-    <p:spTree>
-      <p:nvGrpSpPr>
-        <p:cNvPr id="1" name=""/>
-        <p:cNvGrpSpPr/>
-        <p:nvPr/>
-      </p:nvGrpSpPr>
-      <p:grpSpPr>
-        <a:xfrm>
-          <a:off x="0" y="0"/>
-          <a:ext cx="0" cy="0"/>
-          <a:chOff x="0" y="0"/>
-          <a:chExt cx="0" cy="0"/>
-        </a:xfrm>
-      </p:grpSpPr>
-      <p:sp>
-        <p:nvSpPr>
-          <p:cNvPr id="2" name="Slide Image Placeholder 1"/>
-          <p:cNvSpPr>
-            <a:spLocks noGrp="1"/>
-          </p:cNvSpPr>
-          <p:nvPr>
-            <p:ph type="sldImg" idx="2"/>
-          </p:nvPr>
-        </p:nvSpPr>
-        <p:spPr/>
-      </p:sp>
-      <p:sp>
-        <p:nvSpPr>
-          <p:cNvPr id="3" name="Notes Placeholder 2"/>
-          <p:cNvSpPr>
-            <a:spLocks noGrp="1"/>
-          </p:cNvSpPr>
-          <p:nvPr>
-            <p:ph type="body" idx="3" sz="quarter"/>
-          </p:nvPr>
-        </p:nvSpPr>
-        <p:spPr/>
-        <p:txBody>
-          <a:bodyPr/>
-          <a:lstStyle/>
-          <a:p>
-            <a:r>
-              <a:t>To sum up. Agent teams are expensive and sometimes hurt. CLIMB calls them only when cheaper answers cannot be certified, keeps a user-chosen accuracy promise, and saves 38 to 65 percent of tokens. The guarantee assumes calibration tasks look like deployment tasks. Thank you.</a:t>
-            </a:r>
-          </a:p>
-        </p:txBody>
-      </p:sp>
-      <p:sp>
-        <p:nvSpPr>
-          <p:cNvPr id="4" name="Slide Number Placeholder 3"/>
-          <p:cNvSpPr>
-            <a:spLocks noGrp="1"/>
-          </p:cNvSpPr>
-          <p:nvPr>
-            <p:ph type="sldNum" idx="5" sz="quarter"/>
-          </p:nvPr>
-        </p:nvSpPr>
-        <p:spPr/>
-      </p:sp>
-    </p:spTree>
-  </p:cSld>
-  <p:clrMapOvr>
-    <a:masterClrMapping/>
-  </p:clrMapOvr>
-</p:notes>
-</file>
-
 <file path=ppt/notesSlides/notesSlide3.xml><?xml version="1.0" encoding="utf-8"?>
 <p:notes xmlns:a="http://schemas.openxmlformats.org/drawingml/2006/main" xmlns:p="http://schemas.openxmlformats.org/presentationml/2006/main" xmlns:r="http://schemas.openxmlformats.org/officeDocument/2006/relationships">
   <p:cSld>
@@ -1501,7 +1430,7 @@
           <a:lstStyle/>
           <a:p>
             <a:r>
-              <a:t>But this accuracy has a price. Each bar is one model on one benchmark. The team uses 1.3 to 6.3 times the tokens of a single agent answering on its own.</a:t>
+              <a:t>But the accuracy comes at a price, in two ways. Left: the team uses 1.3 to 6.3 times the tokens of a single agent, because planner, executor and reviewer each add calls, for up to five rounds. Right: against the single agent, green bars are wrong answers the team fixes, red bars are right answers it breaks, up to 9 percent of tasks. So the team is better on balance, but it is expensive and not uniformly better.</a:t>
             </a:r>
           </a:p>
         </p:txBody>
@@ -1571,7 +1500,7 @@
           <a:lstStyle/>
           <a:p>
             <a:r>
-              <a:t>And the gain is not free of losses. Green: tasks the single agent got wrong and the team fixed. Red: tasks the single agent got right and the team got wrong. The team wins on balance, but it also breaks answers, up to 9 percent of tasks.</a:t>
+              <a:t>Where do the broken answers come from? In 84 percent of them the executor's first draft is already wrong, and the reviewer accepts it. Reviewers accept 23 to 58 percent of wrong answers. This is not just noise: rerunning the team reproduces about half of these losses.</a:t>
             </a:r>
           </a:p>
         </p:txBody>
@@ -1641,7 +1570,7 @@
           <a:lstStyle/>
           <a:p>
             <a:r>
-              <a:t>Where do the broken answers come from? In 84 percent of them the executor's first draft is already wrong, and the reviewer accepts it. Reviewers accept 23 to 58 percent of wrong answers. This is not just noise: rerunning the team reproduces about half of these losses.</a:t>
+              <a:t>The idea is a ladder. Try the cheapest configuration first: a direct answer. If it looks reliable, stop. Otherwise try a single agent. Only if that also looks unreliable, call the full team. All three use the same model. The question is how to decide 'looks reliable'.</a:t>
             </a:r>
           </a:p>
         </p:txBody>
@@ -1711,7 +1640,7 @@
           <a:lstStyle/>
           <a:p>
             <a:r>
-              <a:t>The idea is a ladder. Try the cheapest configuration first: a direct answer. If it looks reliable, stop. Otherwise try a single agent. Only if that also looks unreliable, call the full team. All three use the same model. The question is how to decide 'looks reliable'.</a:t>
+              <a:t>How do we know a cheap answer is reliable? The first signal is free: the model's own confidence, its average token probability. Above the dashed line, confident answers are more often right. On three Gemma settings it points the wrong way: the model is confidently wrong. So any rule built on this signal must be checked, not trusted.</a:t>
             </a:r>
           </a:p>
         </p:txBody>
@@ -1781,7 +1710,7 @@
           <a:lstStyle/>
           <a:p>
             <a:r>
-              <a:t>How do we know a cheap answer is reliable? The first signal is free: the model's own confidence, its average token probability. Above the dashed line, confident answers are more often right. On three Gemma settings it points the wrong way: the model is confidently wrong. So any rule built on this signal must be checked, not trusted.</a:t>
+              <a:t>The second signal is also nearly free. The direct answer and the single agent answer independently. When they agree, the single agent is much more often right, for example 99 against 77 percent on gpt-oss-20b MATH. So CLIMB stops on agreeing tasks first.</a:t>
             </a:r>
           </a:p>
         </p:txBody>
@@ -1851,7 +1780,7 @@
           <a:lstStyle/>
           <a:p>
             <a:r>
-              <a:t>The second signal is also nearly free. The direct answer and the single agent answer independently. When they agree, the single agent is much more often right, for example 99 against 77 percent on gpt-oss-20b MATH. So CLIMB stops on agreeing tasks first.</a:t>
+              <a:t>A natural shortcut is to pick a threshold by hand or by intuition. These rules can look fine on average but lose a lot on some settings. A fixed confidence threshold with the same average cost as CLIMB loses up to 16 points. Always using the single agent loses up to 9. CLIMB at a 5 point tolerance loses at most 2.8. In deployment, nothing tells you which setting is the bad one.</a:t>
             </a:r>
           </a:p>
         </p:txBody>
@@ -5182,7 +5111,7 @@
                 </a:solidFill>
                 <a:latin typeface="Arial"/>
               </a:rPr>
-              <a:t>THE PROBLEM</a:t>
+              <a:t>CLIMB</a:t>
             </a:r>
           </a:p>
         </p:txBody>
@@ -5224,53 +5153,364 @@
                 </a:solidFill>
                 <a:latin typeface="Georgia"/>
               </a:rPr>
-              <a:t>Guessing a rule can go badly</a:t>
-            </a:r>
-          </a:p>
-        </p:txBody>
-      </p:sp>
-      <p:pic>
-        <p:nvPicPr>
-          <p:cNvPr id="5" name="Picture 4" descr="c_maxloss.png"/>
-          <p:cNvPicPr>
-            <a:picLocks noChangeAspect="1"/>
-          </p:cNvPicPr>
-          <p:nvPr/>
-        </p:nvPicPr>
-        <p:blipFill>
-          <a:blip r:embed="rId3"/>
-          <a:stretch>
-            <a:fillRect/>
-          </a:stretch>
-        </p:blipFill>
-        <p:spPr>
-          <a:xfrm>
-            <a:off x="812800" y="2379642"/>
-            <a:ext cx="7302500" cy="2987715"/>
-          </a:xfrm>
-          <a:prstGeom prst="rect">
-            <a:avLst/>
-          </a:prstGeom>
-        </p:spPr>
-      </p:pic>
-      <p:sp>
-        <p:nvSpPr>
-          <p:cNvPr id="6" name="Rounded Rectangle 5"/>
+              <a:t>What CLIMB promises</a:t>
+            </a:r>
+          </a:p>
+        </p:txBody>
+      </p:sp>
+      <p:sp>
+        <p:nvSpPr>
+          <p:cNvPr id="5" name="Rounded Rectangle 4"/>
           <p:cNvSpPr/>
           <p:nvPr/>
         </p:nvSpPr>
         <p:spPr>
           <a:xfrm>
-            <a:off x="8445500" y="2286000"/>
-            <a:ext cx="2933700" cy="1905000"/>
+            <a:off x="812800" y="2095500"/>
+            <a:ext cx="3111500" cy="2032000"/>
           </a:xfrm>
           <a:prstGeom prst="roundRect">
             <a:avLst>
-              <a:gd name="adj" fmla="val 6000"/>
+              <a:gd name="adj" fmla="val 5625"/>
             </a:avLst>
           </a:prstGeom>
           <a:solidFill>
-            <a:srgbClr val="F6E3E0"/>
+            <a:srgbClr val="F8E8DC"/>
+          </a:solidFill>
+          <a:ln w="31750">
+            <a:solidFill>
+              <a:srgbClr val="B4541A"/>
+            </a:solidFill>
+          </a:ln>
+          <a:effectLst/>
+        </p:spPr>
+        <p:style>
+          <a:lnRef idx="1">
+            <a:schemeClr val="accent1"/>
+          </a:lnRef>
+          <a:fillRef idx="3">
+            <a:schemeClr val="accent1"/>
+          </a:fillRef>
+          <a:effectRef idx="2">
+            <a:schemeClr val="accent1"/>
+          </a:effectRef>
+          <a:fontRef idx="minor">
+            <a:schemeClr val="lt1"/>
+          </a:fontRef>
+        </p:style>
+        <p:txBody>
+          <a:bodyPr rtlCol="0" anchor="ctr" wrap="square" lIns="152400" rIns="152400" tIns="152400" bIns="152400"/>
+          <a:lstStyle/>
+          <a:p>
+            <a:pPr algn="ctr">
+              <a:lnSpc>
+                <a:spcPct val="115000"/>
+              </a:lnSpc>
+              <a:spcAft>
+                <a:spcPts val="1200"/>
+              </a:spcAft>
+            </a:pPr>
+            <a:r>
+              <a:rPr sz="2400" b="1">
+                <a:solidFill>
+                  <a:srgbClr val="B4541A"/>
+                </a:solidFill>
+                <a:latin typeface="Arial"/>
+              </a:rPr>
+              <a:t>You choose</a:t>
+            </a:r>
+          </a:p>
+          <a:p>
+            <a:pPr algn="ctr">
+              <a:lnSpc>
+                <a:spcPct val="115000"/>
+              </a:lnSpc>
+              <a:spcAft>
+                <a:spcPts val="0"/>
+              </a:spcAft>
+            </a:pPr>
+            <a:r>
+              <a:rPr sz="1900" b="0">
+                <a:solidFill>
+                  <a:srgbClr val="14213D"/>
+                </a:solidFill>
+                <a:latin typeface="Arial"/>
+              </a:rPr>
+              <a:t>“I can lose at most 5 points of accuracy”</a:t>
+            </a:r>
+          </a:p>
+        </p:txBody>
+      </p:sp>
+      <p:sp>
+        <p:nvSpPr>
+          <p:cNvPr id="6" name="Right Arrow 5"/>
+          <p:cNvSpPr/>
+          <p:nvPr/>
+        </p:nvSpPr>
+        <p:spPr>
+          <a:xfrm>
+            <a:off x="4000500" y="2857500"/>
+            <a:ext cx="482600" cy="381000"/>
+          </a:xfrm>
+          <a:prstGeom prst="rightArrow">
+            <a:avLst/>
+          </a:prstGeom>
+          <a:solidFill>
+            <a:srgbClr val="6B7280"/>
+          </a:solidFill>
+          <a:ln>
+            <a:noFill/>
+          </a:ln>
+          <a:effectLst/>
+        </p:spPr>
+        <p:style>
+          <a:lnRef idx="1">
+            <a:schemeClr val="accent1"/>
+          </a:lnRef>
+          <a:fillRef idx="3">
+            <a:schemeClr val="accent1"/>
+          </a:fillRef>
+          <a:effectRef idx="2">
+            <a:schemeClr val="accent1"/>
+          </a:effectRef>
+          <a:fontRef idx="minor">
+            <a:schemeClr val="lt1"/>
+          </a:fontRef>
+        </p:style>
+        <p:txBody>
+          <a:bodyPr rtlCol="0" anchor="ctr"/>
+          <a:lstStyle/>
+          <a:p>
+            <a:pPr algn="ctr"/>
+          </a:p>
+        </p:txBody>
+      </p:sp>
+      <p:sp>
+        <p:nvSpPr>
+          <p:cNvPr id="7" name="Rounded Rectangle 6"/>
+          <p:cNvSpPr/>
+          <p:nvPr/>
+        </p:nvSpPr>
+        <p:spPr>
+          <a:xfrm>
+            <a:off x="4559300" y="2095500"/>
+            <a:ext cx="3111500" cy="2032000"/>
+          </a:xfrm>
+          <a:prstGeom prst="roundRect">
+            <a:avLst>
+              <a:gd name="adj" fmla="val 5625"/>
+            </a:avLst>
+          </a:prstGeom>
+          <a:solidFill>
+            <a:srgbClr val="14213D"/>
+          </a:solidFill>
+          <a:ln>
+            <a:noFill/>
+          </a:ln>
+          <a:effectLst/>
+        </p:spPr>
+        <p:style>
+          <a:lnRef idx="1">
+            <a:schemeClr val="accent1"/>
+          </a:lnRef>
+          <a:fillRef idx="3">
+            <a:schemeClr val="accent1"/>
+          </a:fillRef>
+          <a:effectRef idx="2">
+            <a:schemeClr val="accent1"/>
+          </a:effectRef>
+          <a:fontRef idx="minor">
+            <a:schemeClr val="lt1"/>
+          </a:fontRef>
+        </p:style>
+        <p:txBody>
+          <a:bodyPr rtlCol="0" anchor="ctr" wrap="square" lIns="152400" rIns="152400" tIns="152400" bIns="152400"/>
+          <a:lstStyle/>
+          <a:p>
+            <a:pPr algn="ctr">
+              <a:lnSpc>
+                <a:spcPct val="115000"/>
+              </a:lnSpc>
+              <a:spcAft>
+                <a:spcPts val="1200"/>
+              </a:spcAft>
+            </a:pPr>
+            <a:r>
+              <a:rPr sz="2400" b="1">
+                <a:solidFill>
+                  <a:srgbClr val="F0A66B"/>
+                </a:solidFill>
+                <a:latin typeface="Arial"/>
+              </a:rPr>
+              <a:t>CLIMB checks</a:t>
+            </a:r>
+          </a:p>
+          <a:p>
+            <a:pPr algn="ctr">
+              <a:lnSpc>
+                <a:spcPct val="115000"/>
+              </a:lnSpc>
+              <a:spcAft>
+                <a:spcPts val="0"/>
+              </a:spcAft>
+            </a:pPr>
+            <a:r>
+              <a:rPr sz="1900" b="0">
+                <a:solidFill>
+                  <a:srgbClr val="F7F6F2"/>
+                </a:solidFill>
+                <a:latin typeface="Arial"/>
+              </a:rPr>
+              <a:t>a few hundred labelled tasks</a:t>
+            </a:r>
+          </a:p>
+        </p:txBody>
+      </p:sp>
+      <p:sp>
+        <p:nvSpPr>
+          <p:cNvPr id="8" name="Right Arrow 7"/>
+          <p:cNvSpPr/>
+          <p:nvPr/>
+        </p:nvSpPr>
+        <p:spPr>
+          <a:xfrm>
+            <a:off x="7747000" y="2857500"/>
+            <a:ext cx="482600" cy="381000"/>
+          </a:xfrm>
+          <a:prstGeom prst="rightArrow">
+            <a:avLst/>
+          </a:prstGeom>
+          <a:solidFill>
+            <a:srgbClr val="6B7280"/>
+          </a:solidFill>
+          <a:ln>
+            <a:noFill/>
+          </a:ln>
+          <a:effectLst/>
+        </p:spPr>
+        <p:style>
+          <a:lnRef idx="1">
+            <a:schemeClr val="accent1"/>
+          </a:lnRef>
+          <a:fillRef idx="3">
+            <a:schemeClr val="accent1"/>
+          </a:fillRef>
+          <a:effectRef idx="2">
+            <a:schemeClr val="accent1"/>
+          </a:effectRef>
+          <a:fontRef idx="minor">
+            <a:schemeClr val="lt1"/>
+          </a:fontRef>
+        </p:style>
+        <p:txBody>
+          <a:bodyPr rtlCol="0" anchor="ctr"/>
+          <a:lstStyle/>
+          <a:p>
+            <a:pPr algn="ctr"/>
+          </a:p>
+        </p:txBody>
+      </p:sp>
+      <p:sp>
+        <p:nvSpPr>
+          <p:cNvPr id="9" name="Rounded Rectangle 8"/>
+          <p:cNvSpPr/>
+          <p:nvPr/>
+        </p:nvSpPr>
+        <p:spPr>
+          <a:xfrm>
+            <a:off x="8305800" y="2095500"/>
+            <a:ext cx="3111500" cy="2032000"/>
+          </a:xfrm>
+          <a:prstGeom prst="roundRect">
+            <a:avLst>
+              <a:gd name="adj" fmla="val 5625"/>
+            </a:avLst>
+          </a:prstGeom>
+          <a:solidFill>
+            <a:srgbClr val="E3ECE2"/>
+          </a:solidFill>
+          <a:ln w="31750">
+            <a:solidFill>
+              <a:srgbClr val="2F6B34"/>
+            </a:solidFill>
+          </a:ln>
+          <a:effectLst/>
+        </p:spPr>
+        <p:style>
+          <a:lnRef idx="1">
+            <a:schemeClr val="accent1"/>
+          </a:lnRef>
+          <a:fillRef idx="3">
+            <a:schemeClr val="accent1"/>
+          </a:fillRef>
+          <a:effectRef idx="2">
+            <a:schemeClr val="accent1"/>
+          </a:effectRef>
+          <a:fontRef idx="minor">
+            <a:schemeClr val="lt1"/>
+          </a:fontRef>
+        </p:style>
+        <p:txBody>
+          <a:bodyPr rtlCol="0" anchor="ctr" wrap="square" lIns="152400" rIns="152400" tIns="152400" bIns="152400"/>
+          <a:lstStyle/>
+          <a:p>
+            <a:pPr algn="ctr">
+              <a:lnSpc>
+                <a:spcPct val="115000"/>
+              </a:lnSpc>
+              <a:spcAft>
+                <a:spcPts val="1200"/>
+              </a:spcAft>
+            </a:pPr>
+            <a:r>
+              <a:rPr sz="2400" b="1">
+                <a:solidFill>
+                  <a:srgbClr val="2F6B34"/>
+                </a:solidFill>
+                <a:latin typeface="Arial"/>
+              </a:rPr>
+              <a:t>You get</a:t>
+            </a:r>
+          </a:p>
+          <a:p>
+            <a:pPr algn="ctr">
+              <a:lnSpc>
+                <a:spcPct val="115000"/>
+              </a:lnSpc>
+              <a:spcAft>
+                <a:spcPts val="0"/>
+              </a:spcAft>
+            </a:pPr>
+            <a:r>
+              <a:rPr sz="1900" b="0">
+                <a:solidFill>
+                  <a:srgbClr val="14213D"/>
+                </a:solidFill>
+                <a:latin typeface="Arial"/>
+              </a:rPr>
+              <a:t>the cheapest rule that keeps the promise, 9 times out of 10</a:t>
+            </a:r>
+          </a:p>
+        </p:txBody>
+      </p:sp>
+      <p:sp>
+        <p:nvSpPr>
+          <p:cNvPr id="10" name="Rounded Rectangle 9"/>
+          <p:cNvSpPr/>
+          <p:nvPr/>
+        </p:nvSpPr>
+        <p:spPr>
+          <a:xfrm>
+            <a:off x="812800" y="4572000"/>
+            <a:ext cx="10566400" cy="952500"/>
+          </a:xfrm>
+          <a:prstGeom prst="roundRect">
+            <a:avLst>
+              <a:gd name="adj" fmla="val 10000"/>
+            </a:avLst>
+          </a:prstGeom>
+          <a:solidFill>
+            <a:srgbClr val="FDFCF9"/>
           </a:solidFill>
           <a:ln w="12700">
             <a:solidFill>
@@ -5294,86 +5534,25 @@
           </a:fontRef>
         </p:style>
         <p:txBody>
-          <a:bodyPr rtlCol="0" anchor="ctr" wrap="square" lIns="190500" rIns="190500" tIns="190500" bIns="190500"/>
-          <a:lstStyle/>
-          <a:p>
-            <a:pPr algn="l">
-              <a:lnSpc>
-                <a:spcPct val="100000"/>
-              </a:lnSpc>
-              <a:spcAft>
-                <a:spcPts val="600"/>
-              </a:spcAft>
-            </a:pPr>
-            <a:r>
-              <a:rPr sz="3600" b="1">
-                <a:solidFill>
-                  <a:srgbClr val="B03A2E"/>
-                </a:solidFill>
-                <a:latin typeface="Georgia"/>
-              </a:rPr>
-              <a:t>16 points</a:t>
-            </a:r>
-          </a:p>
-          <a:p>
-            <a:pPr algn="l">
-              <a:lnSpc>
-                <a:spcPct val="115000"/>
-              </a:lnSpc>
-              <a:spcAft>
-                <a:spcPts val="0"/>
-              </a:spcAft>
-            </a:pPr>
-            <a:r>
-              <a:rPr sz="1700" b="0">
-                <a:solidFill>
-                  <a:srgbClr val="3A4150"/>
-                </a:solidFill>
-                <a:latin typeface="Arial"/>
-              </a:rPr>
-              <a:t>lost by a hand-picked threshold on one setting</a:t>
-            </a:r>
-          </a:p>
-        </p:txBody>
-      </p:sp>
-      <p:sp>
-        <p:nvSpPr>
-          <p:cNvPr id="7" name="TextBox 6"/>
-          <p:cNvSpPr txBox="1"/>
-          <p:nvPr/>
-        </p:nvSpPr>
-        <p:spPr>
-          <a:xfrm>
-            <a:off x="8445500" y="4445000"/>
-            <a:ext cx="2933700" cy="1270000"/>
-          </a:xfrm>
-          <a:prstGeom prst="rect">
-            <a:avLst/>
-          </a:prstGeom>
-          <a:noFill/>
-        </p:spPr>
-        <p:txBody>
-          <a:bodyPr wrap="square" lIns="0" rIns="0" tIns="0" bIns="0" anchor="t">
-            <a:spAutoFit/>
-          </a:bodyPr>
-          <a:lstStyle/>
-          <a:p>
-            <a:pPr algn="l">
-              <a:lnSpc>
-                <a:spcPct val="115000"/>
-              </a:lnSpc>
-              <a:spcAft>
-                <a:spcPts val="0"/>
-              </a:spcAft>
-            </a:pPr>
-            <a:r>
-              <a:rPr sz="1800" b="0">
-                <a:solidFill>
-                  <a:srgbClr val="6B7280"/>
-                </a:solidFill>
-                <a:latin typeface="Arial"/>
-              </a:rPr>
-              <a:t>Nothing at deployment says which setting will go wrong.</a:t>
+          <a:bodyPr rtlCol="0" anchor="ctr" wrap="square" lIns="203200" rIns="203200" tIns="203200" bIns="203200"/>
+          <a:lstStyle/>
+          <a:p>
+            <a:pPr algn="ctr">
+              <a:lnSpc>
+                <a:spcPct val="115000"/>
+              </a:lnSpc>
+              <a:spcAft>
+                <a:spcPts val="0"/>
+              </a:spcAft>
+            </a:pPr>
+            <a:r>
+              <a:rPr sz="2000" b="1">
+                <a:solidFill>
+                  <a:srgbClr val="14213D"/>
+                </a:solidFill>
+                <a:latin typeface="Arial"/>
+              </a:rPr>
+              <a:t>No cheaper rule passes?  →  call the team every time.  Worst case: no savings, not lost accuracy.</a:t>
             </a:r>
           </a:p>
         </p:txBody>
@@ -5483,7 +5662,7 @@
                 </a:solidFill>
                 <a:latin typeface="Arial"/>
               </a:rPr>
-              <a:t>CLIMB</a:t>
+              <a:t>HOW IT WORKS</a:t>
             </a:r>
           </a:p>
         </p:txBody>
@@ -5525,406 +5704,73 @@
                 </a:solidFill>
                 <a:latin typeface="Georgia"/>
               </a:rPr>
-              <a:t>What CLIMB promises</a:t>
-            </a:r>
-          </a:p>
-        </p:txBody>
-      </p:sp>
-      <p:sp>
-        <p:nvSpPr>
-          <p:cNvPr id="5" name="Rounded Rectangle 4"/>
-          <p:cNvSpPr/>
-          <p:nvPr/>
-        </p:nvSpPr>
-        <p:spPr>
-          <a:xfrm>
-            <a:off x="812800" y="2095500"/>
-            <a:ext cx="3111500" cy="2032000"/>
-          </a:xfrm>
-          <a:prstGeom prst="roundRect">
-            <a:avLst>
-              <a:gd name="adj" fmla="val 5625"/>
-            </a:avLst>
-          </a:prstGeom>
-          <a:solidFill>
-            <a:srgbClr val="F8E8DC"/>
-          </a:solidFill>
-          <a:ln w="31750">
-            <a:solidFill>
-              <a:srgbClr val="B4541A"/>
-            </a:solidFill>
-          </a:ln>
-          <a:effectLst/>
-        </p:spPr>
-        <p:style>
-          <a:lnRef idx="1">
-            <a:schemeClr val="accent1"/>
-          </a:lnRef>
-          <a:fillRef idx="3">
-            <a:schemeClr val="accent1"/>
-          </a:fillRef>
-          <a:effectRef idx="2">
-            <a:schemeClr val="accent1"/>
-          </a:effectRef>
-          <a:fontRef idx="minor">
-            <a:schemeClr val="lt1"/>
-          </a:fontRef>
-        </p:style>
-        <p:txBody>
-          <a:bodyPr rtlCol="0" anchor="ctr" wrap="square" lIns="152400" rIns="152400" tIns="152400" bIns="152400"/>
-          <a:lstStyle/>
-          <a:p>
-            <a:pPr algn="ctr">
-              <a:lnSpc>
-                <a:spcPct val="115000"/>
-              </a:lnSpc>
-              <a:spcAft>
-                <a:spcPts val="1200"/>
-              </a:spcAft>
-            </a:pPr>
-            <a:r>
-              <a:rPr sz="2400" b="1">
-                <a:solidFill>
-                  <a:srgbClr val="B4541A"/>
-                </a:solidFill>
-                <a:latin typeface="Arial"/>
-              </a:rPr>
-              <a:t>You choose</a:t>
-            </a:r>
-          </a:p>
-          <a:p>
-            <a:pPr algn="ctr">
-              <a:lnSpc>
-                <a:spcPct val="115000"/>
-              </a:lnSpc>
-              <a:spcAft>
-                <a:spcPts val="0"/>
-              </a:spcAft>
-            </a:pPr>
-            <a:r>
-              <a:rPr sz="1900" b="0">
-                <a:solidFill>
-                  <a:srgbClr val="14213D"/>
-                </a:solidFill>
-                <a:latin typeface="Arial"/>
-              </a:rPr>
-              <a:t>“I can lose at most 5 points of accuracy”</a:t>
-            </a:r>
-          </a:p>
-        </p:txBody>
-      </p:sp>
-      <p:sp>
-        <p:nvSpPr>
-          <p:cNvPr id="6" name="Right Arrow 5"/>
-          <p:cNvSpPr/>
-          <p:nvPr/>
-        </p:nvSpPr>
-        <p:spPr>
-          <a:xfrm>
-            <a:off x="4000500" y="2857500"/>
-            <a:ext cx="482600" cy="381000"/>
-          </a:xfrm>
-          <a:prstGeom prst="rightArrow">
+              <a:t>Keep the cheapest rule that passes</a:t>
+            </a:r>
+          </a:p>
+        </p:txBody>
+      </p:sp>
+      <p:pic>
+        <p:nvPicPr>
+          <p:cNvPr id="5" name="Picture 4" descr="c_sweep.png"/>
+          <p:cNvPicPr>
+            <a:picLocks noChangeAspect="1"/>
+          </p:cNvPicPr>
+          <p:nvPr/>
+        </p:nvPicPr>
+        <p:blipFill>
+          <a:blip r:embed="rId3"/>
+          <a:stretch>
+            <a:fillRect/>
+          </a:stretch>
+        </p:blipFill>
+        <p:spPr>
+          <a:xfrm>
+            <a:off x="2179492" y="1587500"/>
+            <a:ext cx="7833014" cy="4445000"/>
+          </a:xfrm>
+          <a:prstGeom prst="rect">
             <a:avLst/>
           </a:prstGeom>
-          <a:solidFill>
-            <a:srgbClr val="6B7280"/>
-          </a:solidFill>
-          <a:ln>
-            <a:noFill/>
-          </a:ln>
-          <a:effectLst/>
-        </p:spPr>
-        <p:style>
-          <a:lnRef idx="1">
-            <a:schemeClr val="accent1"/>
-          </a:lnRef>
-          <a:fillRef idx="3">
-            <a:schemeClr val="accent1"/>
-          </a:fillRef>
-          <a:effectRef idx="2">
-            <a:schemeClr val="accent1"/>
-          </a:effectRef>
-          <a:fontRef idx="minor">
-            <a:schemeClr val="lt1"/>
-          </a:fontRef>
-        </p:style>
-        <p:txBody>
-          <a:bodyPr rtlCol="0" anchor="ctr"/>
-          <a:lstStyle/>
-          <a:p>
-            <a:pPr algn="ctr"/>
-          </a:p>
-        </p:txBody>
-      </p:sp>
-      <p:sp>
-        <p:nvSpPr>
-          <p:cNvPr id="7" name="Rounded Rectangle 6"/>
-          <p:cNvSpPr/>
-          <p:nvPr/>
-        </p:nvSpPr>
-        <p:spPr>
-          <a:xfrm>
-            <a:off x="4559300" y="2095500"/>
-            <a:ext cx="3111500" cy="2032000"/>
-          </a:xfrm>
-          <a:prstGeom prst="roundRect">
-            <a:avLst>
-              <a:gd name="adj" fmla="val 5625"/>
-            </a:avLst>
-          </a:prstGeom>
-          <a:solidFill>
-            <a:srgbClr val="14213D"/>
-          </a:solidFill>
-          <a:ln>
-            <a:noFill/>
-          </a:ln>
-          <a:effectLst/>
-        </p:spPr>
-        <p:style>
-          <a:lnRef idx="1">
-            <a:schemeClr val="accent1"/>
-          </a:lnRef>
-          <a:fillRef idx="3">
-            <a:schemeClr val="accent1"/>
-          </a:fillRef>
-          <a:effectRef idx="2">
-            <a:schemeClr val="accent1"/>
-          </a:effectRef>
-          <a:fontRef idx="minor">
-            <a:schemeClr val="lt1"/>
-          </a:fontRef>
-        </p:style>
-        <p:txBody>
-          <a:bodyPr rtlCol="0" anchor="ctr" wrap="square" lIns="152400" rIns="152400" tIns="152400" bIns="152400"/>
-          <a:lstStyle/>
-          <a:p>
-            <a:pPr algn="ctr">
-              <a:lnSpc>
-                <a:spcPct val="115000"/>
-              </a:lnSpc>
-              <a:spcAft>
-                <a:spcPts val="1200"/>
-              </a:spcAft>
-            </a:pPr>
-            <a:r>
-              <a:rPr sz="2400" b="1">
-                <a:solidFill>
-                  <a:srgbClr val="F0A66B"/>
-                </a:solidFill>
-                <a:latin typeface="Arial"/>
-              </a:rPr>
-              <a:t>CLIMB checks</a:t>
-            </a:r>
-          </a:p>
-          <a:p>
-            <a:pPr algn="ctr">
-              <a:lnSpc>
-                <a:spcPct val="115000"/>
-              </a:lnSpc>
-              <a:spcAft>
-                <a:spcPts val="0"/>
-              </a:spcAft>
-            </a:pPr>
-            <a:r>
-              <a:rPr sz="1900" b="0">
-                <a:solidFill>
-                  <a:srgbClr val="F7F6F2"/>
-                </a:solidFill>
-                <a:latin typeface="Arial"/>
-              </a:rPr>
-              <a:t>a few hundred labelled tasks</a:t>
-            </a:r>
-          </a:p>
-        </p:txBody>
-      </p:sp>
-      <p:sp>
-        <p:nvSpPr>
-          <p:cNvPr id="8" name="Right Arrow 7"/>
-          <p:cNvSpPr/>
-          <p:nvPr/>
-        </p:nvSpPr>
-        <p:spPr>
-          <a:xfrm>
-            <a:off x="7747000" y="2857500"/>
-            <a:ext cx="482600" cy="381000"/>
-          </a:xfrm>
-          <a:prstGeom prst="rightArrow">
+        </p:spPr>
+      </p:pic>
+      <p:sp>
+        <p:nvSpPr>
+          <p:cNvPr id="6" name="TextBox 5"/>
+          <p:cNvSpPr txBox="1"/>
+          <p:nvPr/>
+        </p:nvSpPr>
+        <p:spPr>
+          <a:xfrm>
+            <a:off x="812800" y="6096000"/>
+            <a:ext cx="10566400" cy="254000"/>
+          </a:xfrm>
+          <a:prstGeom prst="rect">
             <a:avLst/>
           </a:prstGeom>
-          <a:solidFill>
-            <a:srgbClr val="6B7280"/>
-          </a:solidFill>
-          <a:ln>
-            <a:noFill/>
-          </a:ln>
-          <a:effectLst/>
-        </p:spPr>
-        <p:style>
-          <a:lnRef idx="1">
-            <a:schemeClr val="accent1"/>
-          </a:lnRef>
-          <a:fillRef idx="3">
-            <a:schemeClr val="accent1"/>
-          </a:fillRef>
-          <a:effectRef idx="2">
-            <a:schemeClr val="accent1"/>
-          </a:effectRef>
-          <a:fontRef idx="minor">
-            <a:schemeClr val="lt1"/>
-          </a:fontRef>
-        </p:style>
-        <p:txBody>
-          <a:bodyPr rtlCol="0" anchor="ctr"/>
-          <a:lstStyle/>
-          <a:p>
-            <a:pPr algn="ctr"/>
-          </a:p>
-        </p:txBody>
-      </p:sp>
-      <p:sp>
-        <p:nvSpPr>
-          <p:cNvPr id="9" name="Rounded Rectangle 8"/>
-          <p:cNvSpPr/>
-          <p:nvPr/>
-        </p:nvSpPr>
-        <p:spPr>
-          <a:xfrm>
-            <a:off x="8305800" y="2095500"/>
-            <a:ext cx="3111500" cy="2032000"/>
-          </a:xfrm>
-          <a:prstGeom prst="roundRect">
-            <a:avLst>
-              <a:gd name="adj" fmla="val 5625"/>
-            </a:avLst>
-          </a:prstGeom>
-          <a:solidFill>
-            <a:srgbClr val="E3ECE2"/>
-          </a:solidFill>
-          <a:ln w="31750">
-            <a:solidFill>
-              <a:srgbClr val="2F6B34"/>
-            </a:solidFill>
-          </a:ln>
-          <a:effectLst/>
-        </p:spPr>
-        <p:style>
-          <a:lnRef idx="1">
-            <a:schemeClr val="accent1"/>
-          </a:lnRef>
-          <a:fillRef idx="3">
-            <a:schemeClr val="accent1"/>
-          </a:fillRef>
-          <a:effectRef idx="2">
-            <a:schemeClr val="accent1"/>
-          </a:effectRef>
-          <a:fontRef idx="minor">
-            <a:schemeClr val="lt1"/>
-          </a:fontRef>
-        </p:style>
-        <p:txBody>
-          <a:bodyPr rtlCol="0" anchor="ctr" wrap="square" lIns="152400" rIns="152400" tIns="152400" bIns="152400"/>
-          <a:lstStyle/>
-          <a:p>
-            <a:pPr algn="ctr">
-              <a:lnSpc>
-                <a:spcPct val="115000"/>
-              </a:lnSpc>
-              <a:spcAft>
-                <a:spcPts val="1200"/>
-              </a:spcAft>
-            </a:pPr>
-            <a:r>
-              <a:rPr sz="2400" b="1">
-                <a:solidFill>
-                  <a:srgbClr val="2F6B34"/>
-                </a:solidFill>
-                <a:latin typeface="Arial"/>
-              </a:rPr>
-              <a:t>You get</a:t>
-            </a:r>
-          </a:p>
-          <a:p>
-            <a:pPr algn="ctr">
-              <a:lnSpc>
-                <a:spcPct val="115000"/>
-              </a:lnSpc>
-              <a:spcAft>
-                <a:spcPts val="0"/>
-              </a:spcAft>
-            </a:pPr>
-            <a:r>
-              <a:rPr sz="1900" b="0">
-                <a:solidFill>
-                  <a:srgbClr val="14213D"/>
-                </a:solidFill>
-                <a:latin typeface="Arial"/>
-              </a:rPr>
-              <a:t>the cheapest rule that keeps the promise, 9 times out of 10</a:t>
-            </a:r>
-          </a:p>
-        </p:txBody>
-      </p:sp>
-      <p:sp>
-        <p:nvSpPr>
-          <p:cNvPr id="10" name="Rounded Rectangle 9"/>
-          <p:cNvSpPr/>
-          <p:nvPr/>
-        </p:nvSpPr>
-        <p:spPr>
-          <a:xfrm>
-            <a:off x="812800" y="4572000"/>
-            <a:ext cx="10566400" cy="952500"/>
-          </a:xfrm>
-          <a:prstGeom prst="roundRect">
-            <a:avLst>
-              <a:gd name="adj" fmla="val 10000"/>
-            </a:avLst>
-          </a:prstGeom>
-          <a:solidFill>
-            <a:srgbClr val="FDFCF9"/>
-          </a:solidFill>
-          <a:ln w="12700">
-            <a:solidFill>
-              <a:srgbClr val="DDD8CC"/>
-            </a:solidFill>
-          </a:ln>
-          <a:effectLst/>
-        </p:spPr>
-        <p:style>
-          <a:lnRef idx="1">
-            <a:schemeClr val="accent1"/>
-          </a:lnRef>
-          <a:fillRef idx="3">
-            <a:schemeClr val="accent1"/>
-          </a:fillRef>
-          <a:effectRef idx="2">
-            <a:schemeClr val="accent1"/>
-          </a:effectRef>
-          <a:fontRef idx="minor">
-            <a:schemeClr val="lt1"/>
-          </a:fontRef>
-        </p:style>
-        <p:txBody>
-          <a:bodyPr rtlCol="0" anchor="ctr" wrap="square" lIns="203200" rIns="203200" tIns="203200" bIns="203200"/>
-          <a:lstStyle/>
-          <a:p>
-            <a:pPr algn="ctr">
-              <a:lnSpc>
-                <a:spcPct val="115000"/>
-              </a:lnSpc>
-              <a:spcAft>
-                <a:spcPts val="0"/>
-              </a:spcAft>
-            </a:pPr>
-            <a:r>
-              <a:rPr sz="2000" b="1">
-                <a:solidFill>
-                  <a:srgbClr val="14213D"/>
-                </a:solidFill>
-                <a:latin typeface="Arial"/>
-              </a:rPr>
-              <a:t>No cheaper rule passes?  →  call the team every time.  Worst case: no savings, not lost accuracy.</a:t>
+          <a:noFill/>
+        </p:spPr>
+        <p:txBody>
+          <a:bodyPr wrap="square" lIns="0" rIns="0" tIns="0" bIns="0" anchor="t">
+            <a:spAutoFit/>
+          </a:bodyPr>
+          <a:lstStyle/>
+          <a:p>
+            <a:pPr algn="l">
+              <a:lnSpc>
+                <a:spcPct val="115000"/>
+              </a:lnSpc>
+              <a:spcAft>
+                <a:spcPts val="0"/>
+              </a:spcAft>
+            </a:pPr>
+            <a:r>
+              <a:rPr sz="1500" b="0">
+                <a:solidFill>
+                  <a:srgbClr val="6B7280"/>
+                </a:solidFill>
+                <a:latin typeface="Arial"/>
+              </a:rPr>
+              <a:t>gpt-oss-120b on MuSiQue, thresholds on the direct answer’s confidence, one calibration half.</a:t>
             </a:r>
           </a:p>
         </p:txBody>
@@ -6076,14 +5922,14 @@
                 </a:solidFill>
                 <a:latin typeface="Georgia"/>
               </a:rPr>
-              <a:t>Keep the cheapest rule that passes</a:t>
+              <a:t>The test is a betting game</a:t>
             </a:r>
           </a:p>
         </p:txBody>
       </p:sp>
       <p:pic>
         <p:nvPicPr>
-          <p:cNvPr id="5" name="Picture 4" descr="c_sweep.png"/>
+          <p:cNvPr id="5" name="Picture 4" descr="c_wealth.png"/>
           <p:cNvPicPr>
             <a:picLocks noChangeAspect="1"/>
           </p:cNvPicPr>
@@ -6097,8 +5943,8 @@
         </p:blipFill>
         <p:spPr>
           <a:xfrm>
-            <a:off x="2179492" y="1587500"/>
-            <a:ext cx="7833014" cy="4445000"/>
+            <a:off x="812800" y="1915559"/>
+            <a:ext cx="6985000" cy="3788881"/>
           </a:xfrm>
           <a:prstGeom prst="rect">
             <a:avLst/>
@@ -6107,14 +5953,74 @@
       </p:pic>
       <p:sp>
         <p:nvSpPr>
-          <p:cNvPr id="6" name="TextBox 5"/>
+          <p:cNvPr id="6" name="Oval 5"/>
+          <p:cNvSpPr/>
+          <p:nvPr/>
+        </p:nvSpPr>
+        <p:spPr>
+          <a:xfrm>
+            <a:off x="8191500" y="1841500"/>
+            <a:ext cx="444500" cy="444500"/>
+          </a:xfrm>
+          <a:prstGeom prst="ellipse">
+            <a:avLst/>
+          </a:prstGeom>
+          <a:solidFill>
+            <a:srgbClr val="B4541A"/>
+          </a:solidFill>
+          <a:ln>
+            <a:noFill/>
+          </a:ln>
+          <a:effectLst/>
+        </p:spPr>
+        <p:style>
+          <a:lnRef idx="1">
+            <a:schemeClr val="accent1"/>
+          </a:lnRef>
+          <a:fillRef idx="3">
+            <a:schemeClr val="accent1"/>
+          </a:fillRef>
+          <a:effectRef idx="2">
+            <a:schemeClr val="accent1"/>
+          </a:effectRef>
+          <a:fontRef idx="minor">
+            <a:schemeClr val="lt1"/>
+          </a:fontRef>
+        </p:style>
+        <p:txBody>
+          <a:bodyPr rtlCol="0" anchor="ctr" wrap="square" lIns="0" rIns="0" tIns="0" bIns="0"/>
+          <a:lstStyle/>
+          <a:p>
+            <a:pPr algn="ctr">
+              <a:lnSpc>
+                <a:spcPct val="115000"/>
+              </a:lnSpc>
+              <a:spcAft>
+                <a:spcPts val="0"/>
+              </a:spcAft>
+            </a:pPr>
+            <a:r>
+              <a:rPr sz="2800" b="1">
+                <a:solidFill>
+                  <a:srgbClr val="F7F6F2"/>
+                </a:solidFill>
+                <a:latin typeface="Arial"/>
+              </a:rPr>
+              <a:t>1</a:t>
+            </a:r>
+          </a:p>
+        </p:txBody>
+      </p:sp>
+      <p:sp>
+        <p:nvSpPr>
+          <p:cNvPr id="7" name="TextBox 6"/>
           <p:cNvSpPr txBox="1"/>
           <p:nvPr/>
         </p:nvSpPr>
         <p:spPr>
           <a:xfrm>
-            <a:off x="812800" y="6096000"/>
-            <a:ext cx="10566400" cy="254000"/>
+            <a:off x="8794750" y="1866900"/>
+            <a:ext cx="2584450" cy="1016000"/>
           </a:xfrm>
           <a:prstGeom prst="rect">
             <a:avLst/>
@@ -6136,13 +6042,319 @@
               </a:spcAft>
             </a:pPr>
             <a:r>
-              <a:rPr sz="1500" b="0">
-                <a:solidFill>
-                  <a:srgbClr val="6B7280"/>
-                </a:solidFill>
-                <a:latin typeface="Arial"/>
-              </a:rPr>
-              <a:t>gpt-oss-120b on MuSiQue, thresholds on the direct answer’s confidence, one calibration half.</a:t>
+              <a:rPr sz="1900" b="0">
+                <a:solidFill>
+                  <a:srgbClr val="3A4150"/>
+                </a:solidFill>
+                <a:latin typeface="Arial"/>
+              </a:rPr>
+              <a:t>Start with $1.</a:t>
+            </a:r>
+          </a:p>
+        </p:txBody>
+      </p:sp>
+      <p:sp>
+        <p:nvSpPr>
+          <p:cNvPr id="8" name="Oval 7"/>
+          <p:cNvSpPr/>
+          <p:nvPr/>
+        </p:nvSpPr>
+        <p:spPr>
+          <a:xfrm>
+            <a:off x="8191500" y="2921000"/>
+            <a:ext cx="444500" cy="444500"/>
+          </a:xfrm>
+          <a:prstGeom prst="ellipse">
+            <a:avLst/>
+          </a:prstGeom>
+          <a:solidFill>
+            <a:srgbClr val="B4541A"/>
+          </a:solidFill>
+          <a:ln>
+            <a:noFill/>
+          </a:ln>
+          <a:effectLst/>
+        </p:spPr>
+        <p:style>
+          <a:lnRef idx="1">
+            <a:schemeClr val="accent1"/>
+          </a:lnRef>
+          <a:fillRef idx="3">
+            <a:schemeClr val="accent1"/>
+          </a:fillRef>
+          <a:effectRef idx="2">
+            <a:schemeClr val="accent1"/>
+          </a:effectRef>
+          <a:fontRef idx="minor">
+            <a:schemeClr val="lt1"/>
+          </a:fontRef>
+        </p:style>
+        <p:txBody>
+          <a:bodyPr rtlCol="0" anchor="ctr" wrap="square" lIns="0" rIns="0" tIns="0" bIns="0"/>
+          <a:lstStyle/>
+          <a:p>
+            <a:pPr algn="ctr">
+              <a:lnSpc>
+                <a:spcPct val="115000"/>
+              </a:lnSpc>
+              <a:spcAft>
+                <a:spcPts val="0"/>
+              </a:spcAft>
+            </a:pPr>
+            <a:r>
+              <a:rPr sz="2800" b="1">
+                <a:solidFill>
+                  <a:srgbClr val="F7F6F2"/>
+                </a:solidFill>
+                <a:latin typeface="Arial"/>
+              </a:rPr>
+              <a:t>2</a:t>
+            </a:r>
+          </a:p>
+        </p:txBody>
+      </p:sp>
+      <p:sp>
+        <p:nvSpPr>
+          <p:cNvPr id="9" name="TextBox 8"/>
+          <p:cNvSpPr txBox="1"/>
+          <p:nvPr/>
+        </p:nvSpPr>
+        <p:spPr>
+          <a:xfrm>
+            <a:off x="8794750" y="2946400"/>
+            <a:ext cx="2584450" cy="1016000"/>
+          </a:xfrm>
+          <a:prstGeom prst="rect">
+            <a:avLst/>
+          </a:prstGeom>
+          <a:noFill/>
+        </p:spPr>
+        <p:txBody>
+          <a:bodyPr wrap="square" lIns="0" rIns="0" tIns="0" bIns="0" anchor="t">
+            <a:spAutoFit/>
+          </a:bodyPr>
+          <a:lstStyle/>
+          <a:p>
+            <a:pPr algn="l">
+              <a:lnSpc>
+                <a:spcPct val="115000"/>
+              </a:lnSpc>
+              <a:spcAft>
+                <a:spcPts val="0"/>
+              </a:spcAft>
+            </a:pPr>
+            <a:r>
+              <a:rPr sz="1900" b="0">
+                <a:solidFill>
+                  <a:srgbClr val="3A4150"/>
+                </a:solidFill>
+                <a:latin typeface="Arial"/>
+              </a:rPr>
+              <a:t>Each task: bet that skipping the team does no harm.</a:t>
+            </a:r>
+          </a:p>
+        </p:txBody>
+      </p:sp>
+      <p:sp>
+        <p:nvSpPr>
+          <p:cNvPr id="10" name="Oval 9"/>
+          <p:cNvSpPr/>
+          <p:nvPr/>
+        </p:nvSpPr>
+        <p:spPr>
+          <a:xfrm>
+            <a:off x="8191500" y="4000500"/>
+            <a:ext cx="444500" cy="444500"/>
+          </a:xfrm>
+          <a:prstGeom prst="ellipse">
+            <a:avLst/>
+          </a:prstGeom>
+          <a:solidFill>
+            <a:srgbClr val="B4541A"/>
+          </a:solidFill>
+          <a:ln>
+            <a:noFill/>
+          </a:ln>
+          <a:effectLst/>
+        </p:spPr>
+        <p:style>
+          <a:lnRef idx="1">
+            <a:schemeClr val="accent1"/>
+          </a:lnRef>
+          <a:fillRef idx="3">
+            <a:schemeClr val="accent1"/>
+          </a:fillRef>
+          <a:effectRef idx="2">
+            <a:schemeClr val="accent1"/>
+          </a:effectRef>
+          <a:fontRef idx="minor">
+            <a:schemeClr val="lt1"/>
+          </a:fontRef>
+        </p:style>
+        <p:txBody>
+          <a:bodyPr rtlCol="0" anchor="ctr" wrap="square" lIns="0" rIns="0" tIns="0" bIns="0"/>
+          <a:lstStyle/>
+          <a:p>
+            <a:pPr algn="ctr">
+              <a:lnSpc>
+                <a:spcPct val="115000"/>
+              </a:lnSpc>
+              <a:spcAft>
+                <a:spcPts val="0"/>
+              </a:spcAft>
+            </a:pPr>
+            <a:r>
+              <a:rPr sz="2800" b="1">
+                <a:solidFill>
+                  <a:srgbClr val="F7F6F2"/>
+                </a:solidFill>
+                <a:latin typeface="Arial"/>
+              </a:rPr>
+              <a:t>3</a:t>
+            </a:r>
+          </a:p>
+        </p:txBody>
+      </p:sp>
+      <p:sp>
+        <p:nvSpPr>
+          <p:cNvPr id="11" name="TextBox 10"/>
+          <p:cNvSpPr txBox="1"/>
+          <p:nvPr/>
+        </p:nvSpPr>
+        <p:spPr>
+          <a:xfrm>
+            <a:off x="8794750" y="4025900"/>
+            <a:ext cx="2584450" cy="1016000"/>
+          </a:xfrm>
+          <a:prstGeom prst="rect">
+            <a:avLst/>
+          </a:prstGeom>
+          <a:noFill/>
+        </p:spPr>
+        <p:txBody>
+          <a:bodyPr wrap="square" lIns="0" rIns="0" tIns="0" bIns="0" anchor="t">
+            <a:spAutoFit/>
+          </a:bodyPr>
+          <a:lstStyle/>
+          <a:p>
+            <a:pPr algn="l">
+              <a:lnSpc>
+                <a:spcPct val="115000"/>
+              </a:lnSpc>
+              <a:spcAft>
+                <a:spcPts val="0"/>
+              </a:spcAft>
+            </a:pPr>
+            <a:r>
+              <a:rPr sz="1900" b="0">
+                <a:solidFill>
+                  <a:srgbClr val="3A4150"/>
+                </a:solidFill>
+                <a:latin typeface="Arial"/>
+              </a:rPr>
+              <a:t>No harm: win a little. Broken answer: lose.</a:t>
+            </a:r>
+          </a:p>
+        </p:txBody>
+      </p:sp>
+      <p:sp>
+        <p:nvSpPr>
+          <p:cNvPr id="12" name="Oval 11"/>
+          <p:cNvSpPr/>
+          <p:nvPr/>
+        </p:nvSpPr>
+        <p:spPr>
+          <a:xfrm>
+            <a:off x="8191500" y="5080000"/>
+            <a:ext cx="444500" cy="444500"/>
+          </a:xfrm>
+          <a:prstGeom prst="ellipse">
+            <a:avLst/>
+          </a:prstGeom>
+          <a:solidFill>
+            <a:srgbClr val="B4541A"/>
+          </a:solidFill>
+          <a:ln>
+            <a:noFill/>
+          </a:ln>
+          <a:effectLst/>
+        </p:spPr>
+        <p:style>
+          <a:lnRef idx="1">
+            <a:schemeClr val="accent1"/>
+          </a:lnRef>
+          <a:fillRef idx="3">
+            <a:schemeClr val="accent1"/>
+          </a:fillRef>
+          <a:effectRef idx="2">
+            <a:schemeClr val="accent1"/>
+          </a:effectRef>
+          <a:fontRef idx="minor">
+            <a:schemeClr val="lt1"/>
+          </a:fontRef>
+        </p:style>
+        <p:txBody>
+          <a:bodyPr rtlCol="0" anchor="ctr" wrap="square" lIns="0" rIns="0" tIns="0" bIns="0"/>
+          <a:lstStyle/>
+          <a:p>
+            <a:pPr algn="ctr">
+              <a:lnSpc>
+                <a:spcPct val="115000"/>
+              </a:lnSpc>
+              <a:spcAft>
+                <a:spcPts val="0"/>
+              </a:spcAft>
+            </a:pPr>
+            <a:r>
+              <a:rPr sz="2800" b="1">
+                <a:solidFill>
+                  <a:srgbClr val="F7F6F2"/>
+                </a:solidFill>
+                <a:latin typeface="Arial"/>
+              </a:rPr>
+              <a:t>4</a:t>
+            </a:r>
+          </a:p>
+        </p:txBody>
+      </p:sp>
+      <p:sp>
+        <p:nvSpPr>
+          <p:cNvPr id="13" name="TextBox 12"/>
+          <p:cNvSpPr txBox="1"/>
+          <p:nvPr/>
+        </p:nvSpPr>
+        <p:spPr>
+          <a:xfrm>
+            <a:off x="8794750" y="5105400"/>
+            <a:ext cx="2584450" cy="1016000"/>
+          </a:xfrm>
+          <a:prstGeom prst="rect">
+            <a:avLst/>
+          </a:prstGeom>
+          <a:noFill/>
+        </p:spPr>
+        <p:txBody>
+          <a:bodyPr wrap="square" lIns="0" rIns="0" tIns="0" bIns="0" anchor="t">
+            <a:spAutoFit/>
+          </a:bodyPr>
+          <a:lstStyle/>
+          <a:p>
+            <a:pPr algn="l">
+              <a:lnSpc>
+                <a:spcPct val="115000"/>
+              </a:lnSpc>
+              <a:spcAft>
+                <a:spcPts val="0"/>
+              </a:spcAft>
+            </a:pPr>
+            <a:r>
+              <a:rPr sz="1900" b="0">
+                <a:solidFill>
+                  <a:srgbClr val="3A4150"/>
+                </a:solidFill>
+                <a:latin typeface="Arial"/>
+              </a:rPr>
+              <a:t>Reach $20: the rule passes.</a:t>
             </a:r>
           </a:p>
         </p:txBody>
@@ -6294,54 +6506,34 @@
                 </a:solidFill>
                 <a:latin typeface="Georgia"/>
               </a:rPr>
-              <a:t>The test is a betting game</a:t>
-            </a:r>
-          </a:p>
-        </p:txBody>
-      </p:sp>
-      <p:pic>
-        <p:nvPicPr>
-          <p:cNvPr id="5" name="Picture 4" descr="c_wealth.png"/>
-          <p:cNvPicPr>
-            <a:picLocks noChangeAspect="1"/>
-          </p:cNvPicPr>
-          <p:nvPr/>
-        </p:nvPicPr>
-        <p:blipFill>
-          <a:blip r:embed="rId3"/>
-          <a:stretch>
-            <a:fillRect/>
-          </a:stretch>
-        </p:blipFill>
-        <p:spPr>
-          <a:xfrm>
-            <a:off x="812800" y="1915559"/>
-            <a:ext cx="6985000" cy="3788881"/>
-          </a:xfrm>
-          <a:prstGeom prst="rect">
-            <a:avLst/>
-          </a:prstGeom>
-        </p:spPr>
-      </p:pic>
-      <p:sp>
-        <p:nvSpPr>
-          <p:cNvPr id="6" name="Oval 5"/>
+              <a:t>Skipping the team can also save answers</a:t>
+            </a:r>
+          </a:p>
+        </p:txBody>
+      </p:sp>
+      <p:sp>
+        <p:nvSpPr>
+          <p:cNvPr id="5" name="Rounded Rectangle 4"/>
           <p:cNvSpPr/>
           <p:nvPr/>
         </p:nvSpPr>
         <p:spPr>
           <a:xfrm>
-            <a:off x="8191500" y="1841500"/>
-            <a:ext cx="444500" cy="444500"/>
-          </a:xfrm>
-          <a:prstGeom prst="ellipse">
-            <a:avLst/>
+            <a:off x="812800" y="2095500"/>
+            <a:ext cx="3384550" cy="2286000"/>
+          </a:xfrm>
+          <a:prstGeom prst="roundRect">
+            <a:avLst>
+              <a:gd name="adj" fmla="val 5000"/>
+            </a:avLst>
           </a:prstGeom>
           <a:solidFill>
-            <a:srgbClr val="B4541A"/>
+            <a:srgbClr val="F6E3E0"/>
           </a:solidFill>
-          <a:ln>
-            <a:noFill/>
+          <a:ln w="31750">
+            <a:solidFill>
+              <a:srgbClr val="B03A2E"/>
+            </a:solidFill>
           </a:ln>
           <a:effectLst/>
         </p:spPr>
@@ -6360,7 +6552,7 @@
           </a:fontRef>
         </p:style>
         <p:txBody>
-          <a:bodyPr rtlCol="0" anchor="ctr" wrap="square" lIns="0" rIns="0" tIns="0" bIns="0"/>
+          <a:bodyPr rtlCol="0" anchor="ctr" wrap="square" lIns="203200" rIns="203200" tIns="203200" bIns="203200"/>
           <a:lstStyle/>
           <a:p>
             <a:pPr algn="ctr">
@@ -6368,82 +6560,64 @@
                 <a:spcPct val="115000"/>
               </a:lnSpc>
               <a:spcAft>
-                <a:spcPts val="0"/>
-              </a:spcAft>
-            </a:pPr>
-            <a:r>
-              <a:rPr sz="2800" b="1">
-                <a:solidFill>
-                  <a:srgbClr val="F7F6F2"/>
-                </a:solidFill>
-                <a:latin typeface="Arial"/>
-              </a:rPr>
-              <a:t>1</a:t>
-            </a:r>
-          </a:p>
-        </p:txBody>
-      </p:sp>
-      <p:sp>
-        <p:nvSpPr>
-          <p:cNvPr id="7" name="TextBox 6"/>
-          <p:cNvSpPr txBox="1"/>
-          <p:nvPr/>
-        </p:nvSpPr>
-        <p:spPr>
-          <a:xfrm>
-            <a:off x="8794750" y="1866900"/>
-            <a:ext cx="2584450" cy="1016000"/>
-          </a:xfrm>
-          <a:prstGeom prst="rect">
-            <a:avLst/>
-          </a:prstGeom>
-          <a:noFill/>
-        </p:spPr>
-        <p:txBody>
-          <a:bodyPr wrap="square" lIns="0" rIns="0" tIns="0" bIns="0" anchor="t">
-            <a:spAutoFit/>
-          </a:bodyPr>
-          <a:lstStyle/>
-          <a:p>
-            <a:pPr algn="l">
-              <a:lnSpc>
-                <a:spcPct val="115000"/>
-              </a:lnSpc>
-              <a:spcAft>
-                <a:spcPts val="0"/>
-              </a:spcAft>
-            </a:pPr>
-            <a:r>
-              <a:rPr sz="1900" b="0">
-                <a:solidFill>
-                  <a:srgbClr val="3A4150"/>
-                </a:solidFill>
-                <a:latin typeface="Arial"/>
-              </a:rPr>
-              <a:t>Start with $1.</a:t>
-            </a:r>
-          </a:p>
-        </p:txBody>
-      </p:sp>
-      <p:sp>
-        <p:nvSpPr>
-          <p:cNvPr id="8" name="Oval 7"/>
+                <a:spcPts val="2000"/>
+              </a:spcAft>
+            </a:pPr>
+            <a:r>
+              <a:rPr sz="2600" b="1">
+                <a:solidFill>
+                  <a:srgbClr val="14213D"/>
+                </a:solidFill>
+                <a:latin typeface="Arial"/>
+              </a:rPr>
+              <a:t>Cheap answer wrong,
+team right</a:t>
+            </a:r>
+          </a:p>
+          <a:p>
+            <a:pPr algn="ctr">
+              <a:lnSpc>
+                <a:spcPct val="115000"/>
+              </a:lnSpc>
+              <a:spcAft>
+                <a:spcPts val="0"/>
+              </a:spcAft>
+            </a:pPr>
+            <a:r>
+              <a:rPr sz="2400" b="1">
+                <a:solidFill>
+                  <a:srgbClr val="B03A2E"/>
+                </a:solidFill>
+                <a:latin typeface="Arial"/>
+              </a:rPr>
+              <a:t>we lose a point</a:t>
+            </a:r>
+          </a:p>
+        </p:txBody>
+      </p:sp>
+      <p:sp>
+        <p:nvSpPr>
+          <p:cNvPr id="6" name="Rounded Rectangle 5"/>
           <p:cNvSpPr/>
           <p:nvPr/>
         </p:nvSpPr>
         <p:spPr>
           <a:xfrm>
-            <a:off x="8191500" y="2921000"/>
-            <a:ext cx="444500" cy="444500"/>
-          </a:xfrm>
-          <a:prstGeom prst="ellipse">
-            <a:avLst/>
+            <a:off x="4400550" y="2095500"/>
+            <a:ext cx="3384550" cy="2286000"/>
+          </a:xfrm>
+          <a:prstGeom prst="roundRect">
+            <a:avLst>
+              <a:gd name="adj" fmla="val 5000"/>
+            </a:avLst>
           </a:prstGeom>
           <a:solidFill>
-            <a:srgbClr val="B4541A"/>
+            <a:srgbClr val="ECEAE3"/>
           </a:solidFill>
-          <a:ln>
-            <a:noFill/>
+          <a:ln w="31750">
+            <a:solidFill>
+              <a:srgbClr val="6B7280"/>
+            </a:solidFill>
           </a:ln>
           <a:effectLst/>
         </p:spPr>
@@ -6462,7 +6636,7 @@
           </a:fontRef>
         </p:style>
         <p:txBody>
-          <a:bodyPr rtlCol="0" anchor="ctr" wrap="square" lIns="0" rIns="0" tIns="0" bIns="0"/>
+          <a:bodyPr rtlCol="0" anchor="ctr" wrap="square" lIns="203200" rIns="203200" tIns="203200" bIns="203200"/>
           <a:lstStyle/>
           <a:p>
             <a:pPr algn="ctr">
@@ -6470,82 +6644,64 @@
                 <a:spcPct val="115000"/>
               </a:lnSpc>
               <a:spcAft>
-                <a:spcPts val="0"/>
-              </a:spcAft>
-            </a:pPr>
-            <a:r>
-              <a:rPr sz="2800" b="1">
-                <a:solidFill>
-                  <a:srgbClr val="F7F6F2"/>
-                </a:solidFill>
-                <a:latin typeface="Arial"/>
-              </a:rPr>
-              <a:t>2</a:t>
-            </a:r>
-          </a:p>
-        </p:txBody>
-      </p:sp>
-      <p:sp>
-        <p:nvSpPr>
-          <p:cNvPr id="9" name="TextBox 8"/>
-          <p:cNvSpPr txBox="1"/>
-          <p:nvPr/>
-        </p:nvSpPr>
-        <p:spPr>
-          <a:xfrm>
-            <a:off x="8794750" y="2946400"/>
-            <a:ext cx="2584450" cy="1016000"/>
-          </a:xfrm>
-          <a:prstGeom prst="rect">
-            <a:avLst/>
-          </a:prstGeom>
-          <a:noFill/>
-        </p:spPr>
-        <p:txBody>
-          <a:bodyPr wrap="square" lIns="0" rIns="0" tIns="0" bIns="0" anchor="t">
-            <a:spAutoFit/>
-          </a:bodyPr>
-          <a:lstStyle/>
-          <a:p>
-            <a:pPr algn="l">
-              <a:lnSpc>
-                <a:spcPct val="115000"/>
-              </a:lnSpc>
-              <a:spcAft>
-                <a:spcPts val="0"/>
-              </a:spcAft>
-            </a:pPr>
-            <a:r>
-              <a:rPr sz="1900" b="0">
-                <a:solidFill>
-                  <a:srgbClr val="3A4150"/>
-                </a:solidFill>
-                <a:latin typeface="Arial"/>
-              </a:rPr>
-              <a:t>Each task: bet that skipping the team does no harm.</a:t>
-            </a:r>
-          </a:p>
-        </p:txBody>
-      </p:sp>
-      <p:sp>
-        <p:nvSpPr>
-          <p:cNvPr id="10" name="Oval 9"/>
+                <a:spcPts val="2000"/>
+              </a:spcAft>
+            </a:pPr>
+            <a:r>
+              <a:rPr sz="2600" b="1">
+                <a:solidFill>
+                  <a:srgbClr val="14213D"/>
+                </a:solidFill>
+                <a:latin typeface="Arial"/>
+              </a:rPr>
+              <a:t>Both right,
+or both wrong</a:t>
+            </a:r>
+          </a:p>
+          <a:p>
+            <a:pPr algn="ctr">
+              <a:lnSpc>
+                <a:spcPct val="115000"/>
+              </a:lnSpc>
+              <a:spcAft>
+                <a:spcPts val="0"/>
+              </a:spcAft>
+            </a:pPr>
+            <a:r>
+              <a:rPr sz="2400" b="1">
+                <a:solidFill>
+                  <a:srgbClr val="6B7280"/>
+                </a:solidFill>
+                <a:latin typeface="Arial"/>
+              </a:rPr>
+              <a:t>no change (most tasks)</a:t>
+            </a:r>
+          </a:p>
+        </p:txBody>
+      </p:sp>
+      <p:sp>
+        <p:nvSpPr>
+          <p:cNvPr id="7" name="Rounded Rectangle 6"/>
           <p:cNvSpPr/>
           <p:nvPr/>
         </p:nvSpPr>
         <p:spPr>
           <a:xfrm>
-            <a:off x="8191500" y="4000500"/>
-            <a:ext cx="444500" cy="444500"/>
-          </a:xfrm>
-          <a:prstGeom prst="ellipse">
-            <a:avLst/>
+            <a:off x="7988300" y="2095500"/>
+            <a:ext cx="3384550" cy="2286000"/>
+          </a:xfrm>
+          <a:prstGeom prst="roundRect">
+            <a:avLst>
+              <a:gd name="adj" fmla="val 5000"/>
+            </a:avLst>
           </a:prstGeom>
           <a:solidFill>
-            <a:srgbClr val="B4541A"/>
+            <a:srgbClr val="E3ECE2"/>
           </a:solidFill>
-          <a:ln>
-            <a:noFill/>
+          <a:ln w="31750">
+            <a:solidFill>
+              <a:srgbClr val="2F6B34"/>
+            </a:solidFill>
           </a:ln>
           <a:effectLst/>
         </p:spPr>
@@ -6564,7 +6720,7 @@
           </a:fontRef>
         </p:style>
         <p:txBody>
-          <a:bodyPr rtlCol="0" anchor="ctr" wrap="square" lIns="0" rIns="0" tIns="0" bIns="0"/>
+          <a:bodyPr rtlCol="0" anchor="ctr" wrap="square" lIns="203200" rIns="203200" tIns="203200" bIns="203200"/>
           <a:lstStyle/>
           <a:p>
             <a:pPr algn="ctr">
@@ -6572,82 +6728,64 @@
                 <a:spcPct val="115000"/>
               </a:lnSpc>
               <a:spcAft>
-                <a:spcPts val="0"/>
-              </a:spcAft>
-            </a:pPr>
-            <a:r>
-              <a:rPr sz="2800" b="1">
-                <a:solidFill>
-                  <a:srgbClr val="F7F6F2"/>
-                </a:solidFill>
-                <a:latin typeface="Arial"/>
-              </a:rPr>
-              <a:t>3</a:t>
-            </a:r>
-          </a:p>
-        </p:txBody>
-      </p:sp>
-      <p:sp>
-        <p:nvSpPr>
-          <p:cNvPr id="11" name="TextBox 10"/>
-          <p:cNvSpPr txBox="1"/>
-          <p:nvPr/>
-        </p:nvSpPr>
-        <p:spPr>
-          <a:xfrm>
-            <a:off x="8794750" y="4025900"/>
-            <a:ext cx="2584450" cy="1016000"/>
-          </a:xfrm>
-          <a:prstGeom prst="rect">
-            <a:avLst/>
-          </a:prstGeom>
-          <a:noFill/>
-        </p:spPr>
-        <p:txBody>
-          <a:bodyPr wrap="square" lIns="0" rIns="0" tIns="0" bIns="0" anchor="t">
-            <a:spAutoFit/>
-          </a:bodyPr>
-          <a:lstStyle/>
-          <a:p>
-            <a:pPr algn="l">
-              <a:lnSpc>
-                <a:spcPct val="115000"/>
-              </a:lnSpc>
-              <a:spcAft>
-                <a:spcPts val="0"/>
-              </a:spcAft>
-            </a:pPr>
-            <a:r>
-              <a:rPr sz="1900" b="0">
-                <a:solidFill>
-                  <a:srgbClr val="3A4150"/>
-                </a:solidFill>
-                <a:latin typeface="Arial"/>
-              </a:rPr>
-              <a:t>No harm: win a little. Broken answer: lose.</a:t>
-            </a:r>
-          </a:p>
-        </p:txBody>
-      </p:sp>
-      <p:sp>
-        <p:nvSpPr>
-          <p:cNvPr id="12" name="Oval 11"/>
+                <a:spcPts val="2000"/>
+              </a:spcAft>
+            </a:pPr>
+            <a:r>
+              <a:rPr sz="2600" b="1">
+                <a:solidFill>
+                  <a:srgbClr val="14213D"/>
+                </a:solidFill>
+                <a:latin typeface="Arial"/>
+              </a:rPr>
+              <a:t>Cheap answer right,
+team wrong</a:t>
+            </a:r>
+          </a:p>
+          <a:p>
+            <a:pPr algn="ctr">
+              <a:lnSpc>
+                <a:spcPct val="115000"/>
+              </a:lnSpc>
+              <a:spcAft>
+                <a:spcPts val="0"/>
+              </a:spcAft>
+            </a:pPr>
+            <a:r>
+              <a:rPr sz="2400" b="1">
+                <a:solidFill>
+                  <a:srgbClr val="2F6B34"/>
+                </a:solidFill>
+                <a:latin typeface="Arial"/>
+              </a:rPr>
+              <a:t>we save a point</a:t>
+            </a:r>
+          </a:p>
+        </p:txBody>
+      </p:sp>
+      <p:sp>
+        <p:nvSpPr>
+          <p:cNvPr id="8" name="Rounded Rectangle 7"/>
           <p:cNvSpPr/>
           <p:nvPr/>
         </p:nvSpPr>
         <p:spPr>
           <a:xfrm>
-            <a:off x="8191500" y="5080000"/>
-            <a:ext cx="444500" cy="444500"/>
-          </a:xfrm>
-          <a:prstGeom prst="ellipse">
-            <a:avLst/>
+            <a:off x="812800" y="4826000"/>
+            <a:ext cx="10566400" cy="825500"/>
+          </a:xfrm>
+          <a:prstGeom prst="roundRect">
+            <a:avLst>
+              <a:gd name="adj" fmla="val 10000"/>
+            </a:avLst>
           </a:prstGeom>
           <a:solidFill>
-            <a:srgbClr val="B4541A"/>
+            <a:srgbClr val="FDFCF9"/>
           </a:solidFill>
-          <a:ln>
-            <a:noFill/>
+          <a:ln w="12700">
+            <a:solidFill>
+              <a:srgbClr val="DDD8CC"/>
+            </a:solidFill>
           </a:ln>
           <a:effectLst/>
         </p:spPr>
@@ -6666,7 +6804,7 @@
           </a:fontRef>
         </p:style>
         <p:txBody>
-          <a:bodyPr rtlCol="0" anchor="ctr" wrap="square" lIns="0" rIns="0" tIns="0" bIns="0"/>
+          <a:bodyPr rtlCol="0" anchor="ctr" wrap="square" lIns="203200" rIns="203200" tIns="203200" bIns="203200"/>
           <a:lstStyle/>
           <a:p>
             <a:pPr algn="ctr">
@@ -6678,55 +6816,13 @@
               </a:spcAft>
             </a:pPr>
             <a:r>
-              <a:rPr sz="2800" b="1">
-                <a:solidFill>
-                  <a:srgbClr val="F7F6F2"/>
-                </a:solidFill>
-                <a:latin typeface="Arial"/>
-              </a:rPr>
-              <a:t>4</a:t>
-            </a:r>
-          </a:p>
-        </p:txBody>
-      </p:sp>
-      <p:sp>
-        <p:nvSpPr>
-          <p:cNvPr id="13" name="TextBox 12"/>
-          <p:cNvSpPr txBox="1"/>
-          <p:nvPr/>
-        </p:nvSpPr>
-        <p:spPr>
-          <a:xfrm>
-            <a:off x="8794750" y="5105400"/>
-            <a:ext cx="2584450" cy="1016000"/>
-          </a:xfrm>
-          <a:prstGeom prst="rect">
-            <a:avLst/>
-          </a:prstGeom>
-          <a:noFill/>
-        </p:spPr>
-        <p:txBody>
-          <a:bodyPr wrap="square" lIns="0" rIns="0" tIns="0" bIns="0" anchor="t">
-            <a:spAutoFit/>
-          </a:bodyPr>
-          <a:lstStyle/>
-          <a:p>
-            <a:pPr algn="l">
-              <a:lnSpc>
-                <a:spcPct val="115000"/>
-              </a:lnSpc>
-              <a:spcAft>
-                <a:spcPts val="0"/>
-              </a:spcAft>
-            </a:pPr>
-            <a:r>
-              <a:rPr sz="1900" b="0">
-                <a:solidFill>
-                  <a:srgbClr val="3A4150"/>
-                </a:solidFill>
-                <a:latin typeface="Arial"/>
-              </a:rPr>
-              <a:t>Reach $20: the rule passes.</a:t>
+              <a:rPr sz="2400" b="1">
+                <a:solidFill>
+                  <a:srgbClr val="14213D"/>
+                </a:solidFill>
+                <a:latin typeface="Arial"/>
+              </a:rPr>
+              <a:t>Usual tests count only the left box. CLIMB counts both sides.</a:t>
             </a:r>
           </a:p>
         </p:txBody>
@@ -6878,281 +6974,53 @@
                 </a:solidFill>
                 <a:latin typeface="Georgia"/>
               </a:rPr>
-              <a:t>Skipping the team can also save answers</a:t>
-            </a:r>
-          </a:p>
-        </p:txBody>
-      </p:sp>
-      <p:sp>
-        <p:nvSpPr>
-          <p:cNvPr id="5" name="Rounded Rectangle 4"/>
+              <a:t>Counting both sides certifies much more</a:t>
+            </a:r>
+          </a:p>
+        </p:txBody>
+      </p:sp>
+      <p:pic>
+        <p:nvPicPr>
+          <p:cNvPr id="5" name="Picture 4" descr="c_tests.png"/>
+          <p:cNvPicPr>
+            <a:picLocks noChangeAspect="1"/>
+          </p:cNvPicPr>
+          <p:nvPr/>
+        </p:nvPicPr>
+        <p:blipFill>
+          <a:blip r:embed="rId3"/>
+          <a:stretch>
+            <a:fillRect/>
+          </a:stretch>
+        </p:blipFill>
+        <p:spPr>
+          <a:xfrm>
+            <a:off x="812800" y="2331170"/>
+            <a:ext cx="7302500" cy="2830659"/>
+          </a:xfrm>
+          <a:prstGeom prst="rect">
+            <a:avLst/>
+          </a:prstGeom>
+        </p:spPr>
+      </p:pic>
+      <p:sp>
+        <p:nvSpPr>
+          <p:cNvPr id="6" name="Rounded Rectangle 5"/>
           <p:cNvSpPr/>
           <p:nvPr/>
         </p:nvSpPr>
         <p:spPr>
           <a:xfrm>
-            <a:off x="812800" y="2095500"/>
-            <a:ext cx="3384550" cy="2286000"/>
+            <a:off x="8445500" y="2286000"/>
+            <a:ext cx="2933700" cy="1905000"/>
           </a:xfrm>
           <a:prstGeom prst="roundRect">
             <a:avLst>
-              <a:gd name="adj" fmla="val 5000"/>
-            </a:avLst>
-          </a:prstGeom>
-          <a:solidFill>
-            <a:srgbClr val="F6E3E0"/>
-          </a:solidFill>
-          <a:ln w="31750">
-            <a:solidFill>
-              <a:srgbClr val="B03A2E"/>
-            </a:solidFill>
-          </a:ln>
-          <a:effectLst/>
-        </p:spPr>
-        <p:style>
-          <a:lnRef idx="1">
-            <a:schemeClr val="accent1"/>
-          </a:lnRef>
-          <a:fillRef idx="3">
-            <a:schemeClr val="accent1"/>
-          </a:fillRef>
-          <a:effectRef idx="2">
-            <a:schemeClr val="accent1"/>
-          </a:effectRef>
-          <a:fontRef idx="minor">
-            <a:schemeClr val="lt1"/>
-          </a:fontRef>
-        </p:style>
-        <p:txBody>
-          <a:bodyPr rtlCol="0" anchor="ctr" wrap="square" lIns="203200" rIns="203200" tIns="203200" bIns="203200"/>
-          <a:lstStyle/>
-          <a:p>
-            <a:pPr algn="ctr">
-              <a:lnSpc>
-                <a:spcPct val="115000"/>
-              </a:lnSpc>
-              <a:spcAft>
-                <a:spcPts val="2000"/>
-              </a:spcAft>
-            </a:pPr>
-            <a:r>
-              <a:rPr sz="2600" b="1">
-                <a:solidFill>
-                  <a:srgbClr val="14213D"/>
-                </a:solidFill>
-                <a:latin typeface="Arial"/>
-              </a:rPr>
-              <a:t>Cheap answer wrong,
-team right</a:t>
-            </a:r>
-          </a:p>
-          <a:p>
-            <a:pPr algn="ctr">
-              <a:lnSpc>
-                <a:spcPct val="115000"/>
-              </a:lnSpc>
-              <a:spcAft>
-                <a:spcPts val="0"/>
-              </a:spcAft>
-            </a:pPr>
-            <a:r>
-              <a:rPr sz="2400" b="1">
-                <a:solidFill>
-                  <a:srgbClr val="B03A2E"/>
-                </a:solidFill>
-                <a:latin typeface="Arial"/>
-              </a:rPr>
-              <a:t>we lose a point</a:t>
-            </a:r>
-          </a:p>
-        </p:txBody>
-      </p:sp>
-      <p:sp>
-        <p:nvSpPr>
-          <p:cNvPr id="6" name="Rounded Rectangle 5"/>
-          <p:cNvSpPr/>
-          <p:nvPr/>
-        </p:nvSpPr>
-        <p:spPr>
-          <a:xfrm>
-            <a:off x="4400550" y="2095500"/>
-            <a:ext cx="3384550" cy="2286000"/>
-          </a:xfrm>
-          <a:prstGeom prst="roundRect">
-            <a:avLst>
-              <a:gd name="adj" fmla="val 5000"/>
-            </a:avLst>
-          </a:prstGeom>
-          <a:solidFill>
-            <a:srgbClr val="ECEAE3"/>
-          </a:solidFill>
-          <a:ln w="31750">
-            <a:solidFill>
-              <a:srgbClr val="6B7280"/>
-            </a:solidFill>
-          </a:ln>
-          <a:effectLst/>
-        </p:spPr>
-        <p:style>
-          <a:lnRef idx="1">
-            <a:schemeClr val="accent1"/>
-          </a:lnRef>
-          <a:fillRef idx="3">
-            <a:schemeClr val="accent1"/>
-          </a:fillRef>
-          <a:effectRef idx="2">
-            <a:schemeClr val="accent1"/>
-          </a:effectRef>
-          <a:fontRef idx="minor">
-            <a:schemeClr val="lt1"/>
-          </a:fontRef>
-        </p:style>
-        <p:txBody>
-          <a:bodyPr rtlCol="0" anchor="ctr" wrap="square" lIns="203200" rIns="203200" tIns="203200" bIns="203200"/>
-          <a:lstStyle/>
-          <a:p>
-            <a:pPr algn="ctr">
-              <a:lnSpc>
-                <a:spcPct val="115000"/>
-              </a:lnSpc>
-              <a:spcAft>
-                <a:spcPts val="2000"/>
-              </a:spcAft>
-            </a:pPr>
-            <a:r>
-              <a:rPr sz="2600" b="1">
-                <a:solidFill>
-                  <a:srgbClr val="14213D"/>
-                </a:solidFill>
-                <a:latin typeface="Arial"/>
-              </a:rPr>
-              <a:t>Both right,
-or both wrong</a:t>
-            </a:r>
-          </a:p>
-          <a:p>
-            <a:pPr algn="ctr">
-              <a:lnSpc>
-                <a:spcPct val="115000"/>
-              </a:lnSpc>
-              <a:spcAft>
-                <a:spcPts val="0"/>
-              </a:spcAft>
-            </a:pPr>
-            <a:r>
-              <a:rPr sz="2400" b="1">
-                <a:solidFill>
-                  <a:srgbClr val="6B7280"/>
-                </a:solidFill>
-                <a:latin typeface="Arial"/>
-              </a:rPr>
-              <a:t>no change (most tasks)</a:t>
-            </a:r>
-          </a:p>
-        </p:txBody>
-      </p:sp>
-      <p:sp>
-        <p:nvSpPr>
-          <p:cNvPr id="7" name="Rounded Rectangle 6"/>
-          <p:cNvSpPr/>
-          <p:nvPr/>
-        </p:nvSpPr>
-        <p:spPr>
-          <a:xfrm>
-            <a:off x="7988300" y="2095500"/>
-            <a:ext cx="3384550" cy="2286000"/>
-          </a:xfrm>
-          <a:prstGeom prst="roundRect">
-            <a:avLst>
-              <a:gd name="adj" fmla="val 5000"/>
+              <a:gd name="adj" fmla="val 6000"/>
             </a:avLst>
           </a:prstGeom>
           <a:solidFill>
             <a:srgbClr val="E3ECE2"/>
-          </a:solidFill>
-          <a:ln w="31750">
-            <a:solidFill>
-              <a:srgbClr val="2F6B34"/>
-            </a:solidFill>
-          </a:ln>
-          <a:effectLst/>
-        </p:spPr>
-        <p:style>
-          <a:lnRef idx="1">
-            <a:schemeClr val="accent1"/>
-          </a:lnRef>
-          <a:fillRef idx="3">
-            <a:schemeClr val="accent1"/>
-          </a:fillRef>
-          <a:effectRef idx="2">
-            <a:schemeClr val="accent1"/>
-          </a:effectRef>
-          <a:fontRef idx="minor">
-            <a:schemeClr val="lt1"/>
-          </a:fontRef>
-        </p:style>
-        <p:txBody>
-          <a:bodyPr rtlCol="0" anchor="ctr" wrap="square" lIns="203200" rIns="203200" tIns="203200" bIns="203200"/>
-          <a:lstStyle/>
-          <a:p>
-            <a:pPr algn="ctr">
-              <a:lnSpc>
-                <a:spcPct val="115000"/>
-              </a:lnSpc>
-              <a:spcAft>
-                <a:spcPts val="2000"/>
-              </a:spcAft>
-            </a:pPr>
-            <a:r>
-              <a:rPr sz="2600" b="1">
-                <a:solidFill>
-                  <a:srgbClr val="14213D"/>
-                </a:solidFill>
-                <a:latin typeface="Arial"/>
-              </a:rPr>
-              <a:t>Cheap answer right,
-team wrong</a:t>
-            </a:r>
-          </a:p>
-          <a:p>
-            <a:pPr algn="ctr">
-              <a:lnSpc>
-                <a:spcPct val="115000"/>
-              </a:lnSpc>
-              <a:spcAft>
-                <a:spcPts val="0"/>
-              </a:spcAft>
-            </a:pPr>
-            <a:r>
-              <a:rPr sz="2400" b="1">
-                <a:solidFill>
-                  <a:srgbClr val="2F6B34"/>
-                </a:solidFill>
-                <a:latin typeface="Arial"/>
-              </a:rPr>
-              <a:t>we save a point</a:t>
-            </a:r>
-          </a:p>
-        </p:txBody>
-      </p:sp>
-      <p:sp>
-        <p:nvSpPr>
-          <p:cNvPr id="8" name="Rounded Rectangle 7"/>
-          <p:cNvSpPr/>
-          <p:nvPr/>
-        </p:nvSpPr>
-        <p:spPr>
-          <a:xfrm>
-            <a:off x="812800" y="4826000"/>
-            <a:ext cx="10566400" cy="825500"/>
-          </a:xfrm>
-          <a:prstGeom prst="roundRect">
-            <a:avLst>
-              <a:gd name="adj" fmla="val 10000"/>
-            </a:avLst>
-          </a:prstGeom>
-          <a:solidFill>
-            <a:srgbClr val="FDFCF9"/>
           </a:solidFill>
           <a:ln w="12700">
             <a:solidFill>
@@ -7176,25 +7044,44 @@
           </a:fontRef>
         </p:style>
         <p:txBody>
-          <a:bodyPr rtlCol="0" anchor="ctr" wrap="square" lIns="203200" rIns="203200" tIns="203200" bIns="203200"/>
-          <a:lstStyle/>
-          <a:p>
-            <a:pPr algn="ctr">
-              <a:lnSpc>
-                <a:spcPct val="115000"/>
-              </a:lnSpc>
-              <a:spcAft>
-                <a:spcPts val="0"/>
-              </a:spcAft>
-            </a:pPr>
-            <a:r>
-              <a:rPr sz="2400" b="1">
-                <a:solidFill>
-                  <a:srgbClr val="14213D"/>
-                </a:solidFill>
-                <a:latin typeface="Arial"/>
-              </a:rPr>
-              <a:t>Usual tests count only the left box. CLIMB counts both sides.</a:t>
+          <a:bodyPr rtlCol="0" anchor="ctr" wrap="square" lIns="190500" rIns="190500" tIns="190500" bIns="190500"/>
+          <a:lstStyle/>
+          <a:p>
+            <a:pPr algn="l">
+              <a:lnSpc>
+                <a:spcPct val="100000"/>
+              </a:lnSpc>
+              <a:spcAft>
+                <a:spcPts val="600"/>
+              </a:spcAft>
+            </a:pPr>
+            <a:r>
+              <a:rPr sz="3600" b="1">
+                <a:solidFill>
+                  <a:srgbClr val="2F6B34"/>
+                </a:solidFill>
+                <a:latin typeface="Georgia"/>
+              </a:rPr>
+              <a:t>62%</a:t>
+            </a:r>
+          </a:p>
+          <a:p>
+            <a:pPr algn="l">
+              <a:lnSpc>
+                <a:spcPct val="115000"/>
+              </a:lnSpc>
+              <a:spcAft>
+                <a:spcPts val="0"/>
+              </a:spcAft>
+            </a:pPr>
+            <a:r>
+              <a:rPr sz="1700" b="0">
+                <a:solidFill>
+                  <a:srgbClr val="3A4150"/>
+                </a:solidFill>
+                <a:latin typeface="Arial"/>
+              </a:rPr>
+              <a:t>of the team’s tokens with CLIMB’s test. A worst-case bound: 100%.</a:t>
             </a:r>
           </a:p>
         </p:txBody>
@@ -7304,7 +7191,7 @@
                 </a:solidFill>
                 <a:latin typeface="Arial"/>
               </a:rPr>
-              <a:t>HOW IT WORKS</a:t>
+              <a:t>EXPERIMENTS</a:t>
             </a:r>
           </a:p>
         </p:txBody>
@@ -7346,53 +7233,315 @@
                 </a:solidFill>
                 <a:latin typeface="Georgia"/>
               </a:rPr>
-              <a:t>Counting both sides certifies much more</a:t>
-            </a:r>
-          </a:p>
-        </p:txBody>
-      </p:sp>
-      <p:pic>
-        <p:nvPicPr>
-          <p:cNvPr id="5" name="Picture 4" descr="c_tests.png"/>
-          <p:cNvPicPr>
-            <a:picLocks noChangeAspect="1"/>
-          </p:cNvPicPr>
-          <p:nvPr/>
-        </p:nvPicPr>
-        <p:blipFill>
-          <a:blip r:embed="rId3"/>
-          <a:stretch>
-            <a:fillRect/>
-          </a:stretch>
-        </p:blipFill>
-        <p:spPr>
-          <a:xfrm>
-            <a:off x="812800" y="2331170"/>
-            <a:ext cx="7302500" cy="2830659"/>
+              <a:t>3 models × 4 benchmarks = 12 settings</a:t>
+            </a:r>
+          </a:p>
+        </p:txBody>
+      </p:sp>
+      <p:sp>
+        <p:nvSpPr>
+          <p:cNvPr id="5" name="TextBox 4"/>
+          <p:cNvSpPr txBox="1"/>
+          <p:nvPr/>
+        </p:nvSpPr>
+        <p:spPr>
+          <a:xfrm>
+            <a:off x="3048000" y="1841500"/>
+            <a:ext cx="1905000" cy="508000"/>
           </a:xfrm>
           <a:prstGeom prst="rect">
             <a:avLst/>
           </a:prstGeom>
-        </p:spPr>
-      </p:pic>
-      <p:sp>
-        <p:nvSpPr>
-          <p:cNvPr id="6" name="Rounded Rectangle 5"/>
+          <a:noFill/>
+        </p:spPr>
+        <p:txBody>
+          <a:bodyPr wrap="square" lIns="0" rIns="0" tIns="0" bIns="0" anchor="t">
+            <a:spAutoFit/>
+          </a:bodyPr>
+          <a:lstStyle/>
+          <a:p>
+            <a:pPr algn="ctr">
+              <a:lnSpc>
+                <a:spcPct val="115000"/>
+              </a:lnSpc>
+              <a:spcAft>
+                <a:spcPts val="0"/>
+              </a:spcAft>
+            </a:pPr>
+            <a:r>
+              <a:rPr sz="2200" b="1">
+                <a:solidFill>
+                  <a:srgbClr val="14213D"/>
+                </a:solidFill>
+                <a:latin typeface="Arial"/>
+              </a:rPr>
+              <a:t>MATH</a:t>
+            </a:r>
+          </a:p>
+          <a:p>
+            <a:pPr algn="ctr">
+              <a:lnSpc>
+                <a:spcPct val="115000"/>
+              </a:lnSpc>
+              <a:spcAft>
+                <a:spcPts val="0"/>
+              </a:spcAft>
+            </a:pPr>
+            <a:r>
+              <a:rPr sz="1600" b="0">
+                <a:solidFill>
+                  <a:srgbClr val="6B7280"/>
+                </a:solidFill>
+                <a:latin typeface="Arial"/>
+              </a:rPr>
+              <a:t>math</a:t>
+            </a:r>
+          </a:p>
+        </p:txBody>
+      </p:sp>
+      <p:sp>
+        <p:nvSpPr>
+          <p:cNvPr id="6" name="TextBox 5"/>
+          <p:cNvSpPr txBox="1"/>
+          <p:nvPr/>
+        </p:nvSpPr>
+        <p:spPr>
+          <a:xfrm>
+            <a:off x="5080000" y="1841500"/>
+            <a:ext cx="1905000" cy="508000"/>
+          </a:xfrm>
+          <a:prstGeom prst="rect">
+            <a:avLst/>
+          </a:prstGeom>
+          <a:noFill/>
+        </p:spPr>
+        <p:txBody>
+          <a:bodyPr wrap="square" lIns="0" rIns="0" tIns="0" bIns="0" anchor="t">
+            <a:spAutoFit/>
+          </a:bodyPr>
+          <a:lstStyle/>
+          <a:p>
+            <a:pPr algn="ctr">
+              <a:lnSpc>
+                <a:spcPct val="115000"/>
+              </a:lnSpc>
+              <a:spcAft>
+                <a:spcPts val="0"/>
+              </a:spcAft>
+            </a:pPr>
+            <a:r>
+              <a:rPr sz="2200" b="1">
+                <a:solidFill>
+                  <a:srgbClr val="14213D"/>
+                </a:solidFill>
+                <a:latin typeface="Arial"/>
+              </a:rPr>
+              <a:t>FRAMES</a:t>
+            </a:r>
+          </a:p>
+          <a:p>
+            <a:pPr algn="ctr">
+              <a:lnSpc>
+                <a:spcPct val="115000"/>
+              </a:lnSpc>
+              <a:spcAft>
+                <a:spcPts val="0"/>
+              </a:spcAft>
+            </a:pPr>
+            <a:r>
+              <a:rPr sz="1600" b="0">
+                <a:solidFill>
+                  <a:srgbClr val="6B7280"/>
+                </a:solidFill>
+                <a:latin typeface="Arial"/>
+              </a:rPr>
+              <a:t>open-book QA</a:t>
+            </a:r>
+          </a:p>
+        </p:txBody>
+      </p:sp>
+      <p:sp>
+        <p:nvSpPr>
+          <p:cNvPr id="7" name="TextBox 6"/>
+          <p:cNvSpPr txBox="1"/>
+          <p:nvPr/>
+        </p:nvSpPr>
+        <p:spPr>
+          <a:xfrm>
+            <a:off x="7112000" y="1841500"/>
+            <a:ext cx="1905000" cy="508000"/>
+          </a:xfrm>
+          <a:prstGeom prst="rect">
+            <a:avLst/>
+          </a:prstGeom>
+          <a:noFill/>
+        </p:spPr>
+        <p:txBody>
+          <a:bodyPr wrap="square" lIns="0" rIns="0" tIns="0" bIns="0" anchor="t">
+            <a:spAutoFit/>
+          </a:bodyPr>
+          <a:lstStyle/>
+          <a:p>
+            <a:pPr algn="ctr">
+              <a:lnSpc>
+                <a:spcPct val="115000"/>
+              </a:lnSpc>
+              <a:spcAft>
+                <a:spcPts val="0"/>
+              </a:spcAft>
+            </a:pPr>
+            <a:r>
+              <a:rPr sz="2200" b="1">
+                <a:solidFill>
+                  <a:srgbClr val="14213D"/>
+                </a:solidFill>
+                <a:latin typeface="Arial"/>
+              </a:rPr>
+              <a:t>MuSiQue</a:t>
+            </a:r>
+          </a:p>
+          <a:p>
+            <a:pPr algn="ctr">
+              <a:lnSpc>
+                <a:spcPct val="115000"/>
+              </a:lnSpc>
+              <a:spcAft>
+                <a:spcPts val="0"/>
+              </a:spcAft>
+            </a:pPr>
+            <a:r>
+              <a:rPr sz="1600" b="0">
+                <a:solidFill>
+                  <a:srgbClr val="6B7280"/>
+                </a:solidFill>
+                <a:latin typeface="Arial"/>
+              </a:rPr>
+              <a:t>open-book QA</a:t>
+            </a:r>
+          </a:p>
+        </p:txBody>
+      </p:sp>
+      <p:sp>
+        <p:nvSpPr>
+          <p:cNvPr id="8" name="TextBox 7"/>
+          <p:cNvSpPr txBox="1"/>
+          <p:nvPr/>
+        </p:nvSpPr>
+        <p:spPr>
+          <a:xfrm>
+            <a:off x="9144000" y="1841500"/>
+            <a:ext cx="1905000" cy="508000"/>
+          </a:xfrm>
+          <a:prstGeom prst="rect">
+            <a:avLst/>
+          </a:prstGeom>
+          <a:noFill/>
+        </p:spPr>
+        <p:txBody>
+          <a:bodyPr wrap="square" lIns="0" rIns="0" tIns="0" bIns="0" anchor="t">
+            <a:spAutoFit/>
+          </a:bodyPr>
+          <a:lstStyle/>
+          <a:p>
+            <a:pPr algn="ctr">
+              <a:lnSpc>
+                <a:spcPct val="115000"/>
+              </a:lnSpc>
+              <a:spcAft>
+                <a:spcPts val="0"/>
+              </a:spcAft>
+            </a:pPr>
+            <a:r>
+              <a:rPr sz="2200" b="1">
+                <a:solidFill>
+                  <a:srgbClr val="14213D"/>
+                </a:solidFill>
+                <a:latin typeface="Arial"/>
+              </a:rPr>
+              <a:t>BBEH</a:t>
+            </a:r>
+          </a:p>
+          <a:p>
+            <a:pPr algn="ctr">
+              <a:lnSpc>
+                <a:spcPct val="115000"/>
+              </a:lnSpc>
+              <a:spcAft>
+                <a:spcPts val="0"/>
+              </a:spcAft>
+            </a:pPr>
+            <a:r>
+              <a:rPr sz="1600" b="0">
+                <a:solidFill>
+                  <a:srgbClr val="6B7280"/>
+                </a:solidFill>
+                <a:latin typeface="Arial"/>
+              </a:rPr>
+              <a:t>hard reasoning</a:t>
+            </a:r>
+          </a:p>
+        </p:txBody>
+      </p:sp>
+      <p:sp>
+        <p:nvSpPr>
+          <p:cNvPr id="9" name="TextBox 8"/>
+          <p:cNvSpPr txBox="1"/>
+          <p:nvPr/>
+        </p:nvSpPr>
+        <p:spPr>
+          <a:xfrm>
+            <a:off x="812800" y="2508250"/>
+            <a:ext cx="2032000" cy="762000"/>
+          </a:xfrm>
+          <a:prstGeom prst="rect">
+            <a:avLst/>
+          </a:prstGeom>
+          <a:noFill/>
+        </p:spPr>
+        <p:txBody>
+          <a:bodyPr wrap="square" lIns="0" rIns="0" tIns="0" bIns="0" anchor="ctr">
+            <a:spAutoFit/>
+          </a:bodyPr>
+          <a:lstStyle/>
+          <a:p>
+            <a:pPr algn="l">
+              <a:lnSpc>
+                <a:spcPct val="115000"/>
+              </a:lnSpc>
+              <a:spcAft>
+                <a:spcPts val="0"/>
+              </a:spcAft>
+            </a:pPr>
+            <a:r>
+              <a:rPr sz="2200" b="1">
+                <a:solidFill>
+                  <a:srgbClr val="14213D"/>
+                </a:solidFill>
+                <a:latin typeface="Arial"/>
+              </a:rPr>
+              <a:t>gpt-oss-20b</a:t>
+            </a:r>
+          </a:p>
+        </p:txBody>
+      </p:sp>
+      <p:sp>
+        <p:nvSpPr>
+          <p:cNvPr id="10" name="Rounded Rectangle 9"/>
           <p:cNvSpPr/>
           <p:nvPr/>
         </p:nvSpPr>
         <p:spPr>
           <a:xfrm>
-            <a:off x="8445500" y="2286000"/>
-            <a:ext cx="2933700" cy="1905000"/>
+            <a:off x="3048000" y="2508250"/>
+            <a:ext cx="1905000" cy="762000"/>
           </a:xfrm>
           <a:prstGeom prst="roundRect">
             <a:avLst>
-              <a:gd name="adj" fmla="val 6000"/>
+              <a:gd name="adj" fmla="val 10000"/>
             </a:avLst>
           </a:prstGeom>
           <a:solidFill>
-            <a:srgbClr val="E3ECE2"/>
+            <a:srgbClr val="E2EAF5"/>
           </a:solidFill>
           <a:ln w="12700">
             <a:solidFill>
@@ -7416,27 +7565,692 @@
           </a:fontRef>
         </p:style>
         <p:txBody>
-          <a:bodyPr rtlCol="0" anchor="ctr" wrap="square" lIns="190500" rIns="190500" tIns="190500" bIns="190500"/>
+          <a:bodyPr rtlCol="0" anchor="ctr" wrap="square" lIns="50800" rIns="50800" tIns="50800" bIns="50800"/>
+          <a:lstStyle/>
+          <a:p>
+            <a:pPr algn="ctr">
+              <a:lnSpc>
+                <a:spcPct val="115000"/>
+              </a:lnSpc>
+              <a:spcAft>
+                <a:spcPts val="0"/>
+              </a:spcAft>
+            </a:pPr>
+            <a:r>
+              <a:rPr sz="2400" b="1">
+                <a:solidFill>
+                  <a:srgbClr val="14213D"/>
+                </a:solidFill>
+                <a:latin typeface="Arial"/>
+              </a:rPr>
+              <a:t>94.8%</a:t>
+            </a:r>
+          </a:p>
+          <a:p>
+            <a:pPr algn="ctr">
+              <a:lnSpc>
+                <a:spcPct val="115000"/>
+              </a:lnSpc>
+              <a:spcAft>
+                <a:spcPts val="0"/>
+              </a:spcAft>
+            </a:pPr>
+            <a:r>
+              <a:rPr sz="1300" b="0">
+                <a:solidFill>
+                  <a:srgbClr val="6B7280"/>
+                </a:solidFill>
+                <a:latin typeface="Arial"/>
+              </a:rPr>
+              <a:t>team accuracy</a:t>
+            </a:r>
+          </a:p>
+        </p:txBody>
+      </p:sp>
+      <p:sp>
+        <p:nvSpPr>
+          <p:cNvPr id="11" name="Rounded Rectangle 10"/>
+          <p:cNvSpPr/>
+          <p:nvPr/>
+        </p:nvSpPr>
+        <p:spPr>
+          <a:xfrm>
+            <a:off x="5080000" y="2508250"/>
+            <a:ext cx="1905000" cy="762000"/>
+          </a:xfrm>
+          <a:prstGeom prst="roundRect">
+            <a:avLst>
+              <a:gd name="adj" fmla="val 10000"/>
+            </a:avLst>
+          </a:prstGeom>
+          <a:solidFill>
+            <a:srgbClr val="E2EAF5"/>
+          </a:solidFill>
+          <a:ln w="12700">
+            <a:solidFill>
+              <a:srgbClr val="DDD8CC"/>
+            </a:solidFill>
+          </a:ln>
+          <a:effectLst/>
+        </p:spPr>
+        <p:style>
+          <a:lnRef idx="1">
+            <a:schemeClr val="accent1"/>
+          </a:lnRef>
+          <a:fillRef idx="3">
+            <a:schemeClr val="accent1"/>
+          </a:fillRef>
+          <a:effectRef idx="2">
+            <a:schemeClr val="accent1"/>
+          </a:effectRef>
+          <a:fontRef idx="minor">
+            <a:schemeClr val="lt1"/>
+          </a:fontRef>
+        </p:style>
+        <p:txBody>
+          <a:bodyPr rtlCol="0" anchor="ctr" wrap="square" lIns="50800" rIns="50800" tIns="50800" bIns="50800"/>
+          <a:lstStyle/>
+          <a:p>
+            <a:pPr algn="ctr">
+              <a:lnSpc>
+                <a:spcPct val="115000"/>
+              </a:lnSpc>
+              <a:spcAft>
+                <a:spcPts val="0"/>
+              </a:spcAft>
+            </a:pPr>
+            <a:r>
+              <a:rPr sz="2400" b="1">
+                <a:solidFill>
+                  <a:srgbClr val="14213D"/>
+                </a:solidFill>
+                <a:latin typeface="Arial"/>
+              </a:rPr>
+              <a:t>76.1%</a:t>
+            </a:r>
+          </a:p>
+          <a:p>
+            <a:pPr algn="ctr">
+              <a:lnSpc>
+                <a:spcPct val="115000"/>
+              </a:lnSpc>
+              <a:spcAft>
+                <a:spcPts val="0"/>
+              </a:spcAft>
+            </a:pPr>
+            <a:r>
+              <a:rPr sz="1300" b="0">
+                <a:solidFill>
+                  <a:srgbClr val="6B7280"/>
+                </a:solidFill>
+                <a:latin typeface="Arial"/>
+              </a:rPr>
+              <a:t>team accuracy</a:t>
+            </a:r>
+          </a:p>
+        </p:txBody>
+      </p:sp>
+      <p:sp>
+        <p:nvSpPr>
+          <p:cNvPr id="12" name="Rounded Rectangle 11"/>
+          <p:cNvSpPr/>
+          <p:nvPr/>
+        </p:nvSpPr>
+        <p:spPr>
+          <a:xfrm>
+            <a:off x="7112000" y="2508250"/>
+            <a:ext cx="1905000" cy="762000"/>
+          </a:xfrm>
+          <a:prstGeom prst="roundRect">
+            <a:avLst>
+              <a:gd name="adj" fmla="val 10000"/>
+            </a:avLst>
+          </a:prstGeom>
+          <a:solidFill>
+            <a:srgbClr val="E2EAF5"/>
+          </a:solidFill>
+          <a:ln w="12700">
+            <a:solidFill>
+              <a:srgbClr val="DDD8CC"/>
+            </a:solidFill>
+          </a:ln>
+          <a:effectLst/>
+        </p:spPr>
+        <p:style>
+          <a:lnRef idx="1">
+            <a:schemeClr val="accent1"/>
+          </a:lnRef>
+          <a:fillRef idx="3">
+            <a:schemeClr val="accent1"/>
+          </a:fillRef>
+          <a:effectRef idx="2">
+            <a:schemeClr val="accent1"/>
+          </a:effectRef>
+          <a:fontRef idx="minor">
+            <a:schemeClr val="lt1"/>
+          </a:fontRef>
+        </p:style>
+        <p:txBody>
+          <a:bodyPr rtlCol="0" anchor="ctr" wrap="square" lIns="50800" rIns="50800" tIns="50800" bIns="50800"/>
+          <a:lstStyle/>
+          <a:p>
+            <a:pPr algn="ctr">
+              <a:lnSpc>
+                <a:spcPct val="115000"/>
+              </a:lnSpc>
+              <a:spcAft>
+                <a:spcPts val="0"/>
+              </a:spcAft>
+            </a:pPr>
+            <a:r>
+              <a:rPr sz="2400" b="1">
+                <a:solidFill>
+                  <a:srgbClr val="14213D"/>
+                </a:solidFill>
+                <a:latin typeface="Arial"/>
+              </a:rPr>
+              <a:t>64.9%</a:t>
+            </a:r>
+          </a:p>
+          <a:p>
+            <a:pPr algn="ctr">
+              <a:lnSpc>
+                <a:spcPct val="115000"/>
+              </a:lnSpc>
+              <a:spcAft>
+                <a:spcPts val="0"/>
+              </a:spcAft>
+            </a:pPr>
+            <a:r>
+              <a:rPr sz="1300" b="0">
+                <a:solidFill>
+                  <a:srgbClr val="6B7280"/>
+                </a:solidFill>
+                <a:latin typeface="Arial"/>
+              </a:rPr>
+              <a:t>team accuracy</a:t>
+            </a:r>
+          </a:p>
+        </p:txBody>
+      </p:sp>
+      <p:sp>
+        <p:nvSpPr>
+          <p:cNvPr id="13" name="Rounded Rectangle 12"/>
+          <p:cNvSpPr/>
+          <p:nvPr/>
+        </p:nvSpPr>
+        <p:spPr>
+          <a:xfrm>
+            <a:off x="9144000" y="2508250"/>
+            <a:ext cx="1905000" cy="762000"/>
+          </a:xfrm>
+          <a:prstGeom prst="roundRect">
+            <a:avLst>
+              <a:gd name="adj" fmla="val 10000"/>
+            </a:avLst>
+          </a:prstGeom>
+          <a:solidFill>
+            <a:srgbClr val="E2EAF5"/>
+          </a:solidFill>
+          <a:ln w="12700">
+            <a:solidFill>
+              <a:srgbClr val="DDD8CC"/>
+            </a:solidFill>
+          </a:ln>
+          <a:effectLst/>
+        </p:spPr>
+        <p:style>
+          <a:lnRef idx="1">
+            <a:schemeClr val="accent1"/>
+          </a:lnRef>
+          <a:fillRef idx="3">
+            <a:schemeClr val="accent1"/>
+          </a:fillRef>
+          <a:effectRef idx="2">
+            <a:schemeClr val="accent1"/>
+          </a:effectRef>
+          <a:fontRef idx="minor">
+            <a:schemeClr val="lt1"/>
+          </a:fontRef>
+        </p:style>
+        <p:txBody>
+          <a:bodyPr rtlCol="0" anchor="ctr" wrap="square" lIns="50800" rIns="50800" tIns="50800" bIns="50800"/>
+          <a:lstStyle/>
+          <a:p>
+            <a:pPr algn="ctr">
+              <a:lnSpc>
+                <a:spcPct val="115000"/>
+              </a:lnSpc>
+              <a:spcAft>
+                <a:spcPts val="0"/>
+              </a:spcAft>
+            </a:pPr>
+            <a:r>
+              <a:rPr sz="2400" b="1">
+                <a:solidFill>
+                  <a:srgbClr val="14213D"/>
+                </a:solidFill>
+                <a:latin typeface="Arial"/>
+              </a:rPr>
+              <a:t>28.0%</a:t>
+            </a:r>
+          </a:p>
+          <a:p>
+            <a:pPr algn="ctr">
+              <a:lnSpc>
+                <a:spcPct val="115000"/>
+              </a:lnSpc>
+              <a:spcAft>
+                <a:spcPts val="0"/>
+              </a:spcAft>
+            </a:pPr>
+            <a:r>
+              <a:rPr sz="1300" b="0">
+                <a:solidFill>
+                  <a:srgbClr val="6B7280"/>
+                </a:solidFill>
+                <a:latin typeface="Arial"/>
+              </a:rPr>
+              <a:t>team accuracy</a:t>
+            </a:r>
+          </a:p>
+        </p:txBody>
+      </p:sp>
+      <p:sp>
+        <p:nvSpPr>
+          <p:cNvPr id="14" name="TextBox 13"/>
+          <p:cNvSpPr txBox="1"/>
+          <p:nvPr/>
+        </p:nvSpPr>
+        <p:spPr>
+          <a:xfrm>
+            <a:off x="812800" y="3460750"/>
+            <a:ext cx="2032000" cy="762000"/>
+          </a:xfrm>
+          <a:prstGeom prst="rect">
+            <a:avLst/>
+          </a:prstGeom>
+          <a:noFill/>
+        </p:spPr>
+        <p:txBody>
+          <a:bodyPr wrap="square" lIns="0" rIns="0" tIns="0" bIns="0" anchor="ctr">
+            <a:spAutoFit/>
+          </a:bodyPr>
           <a:lstStyle/>
           <a:p>
             <a:pPr algn="l">
               <a:lnSpc>
-                <a:spcPct val="100000"/>
-              </a:lnSpc>
-              <a:spcAft>
-                <a:spcPts val="600"/>
-              </a:spcAft>
-            </a:pPr>
-            <a:r>
-              <a:rPr sz="3600" b="1">
-                <a:solidFill>
-                  <a:srgbClr val="2F6B34"/>
-                </a:solidFill>
-                <a:latin typeface="Georgia"/>
-              </a:rPr>
-              <a:t>62%</a:t>
-            </a:r>
-          </a:p>
+                <a:spcPct val="115000"/>
+              </a:lnSpc>
+              <a:spcAft>
+                <a:spcPts val="0"/>
+              </a:spcAft>
+            </a:pPr>
+            <a:r>
+              <a:rPr sz="2200" b="1">
+                <a:solidFill>
+                  <a:srgbClr val="14213D"/>
+                </a:solidFill>
+                <a:latin typeface="Arial"/>
+              </a:rPr>
+              <a:t>gpt-oss-120b</a:t>
+            </a:r>
+          </a:p>
+        </p:txBody>
+      </p:sp>
+      <p:sp>
+        <p:nvSpPr>
+          <p:cNvPr id="15" name="Rounded Rectangle 14"/>
+          <p:cNvSpPr/>
+          <p:nvPr/>
+        </p:nvSpPr>
+        <p:spPr>
+          <a:xfrm>
+            <a:off x="3048000" y="3460750"/>
+            <a:ext cx="1905000" cy="762000"/>
+          </a:xfrm>
+          <a:prstGeom prst="roundRect">
+            <a:avLst>
+              <a:gd name="adj" fmla="val 10000"/>
+            </a:avLst>
+          </a:prstGeom>
+          <a:solidFill>
+            <a:srgbClr val="E2EAF5"/>
+          </a:solidFill>
+          <a:ln w="12700">
+            <a:solidFill>
+              <a:srgbClr val="DDD8CC"/>
+            </a:solidFill>
+          </a:ln>
+          <a:effectLst/>
+        </p:spPr>
+        <p:style>
+          <a:lnRef idx="1">
+            <a:schemeClr val="accent1"/>
+          </a:lnRef>
+          <a:fillRef idx="3">
+            <a:schemeClr val="accent1"/>
+          </a:fillRef>
+          <a:effectRef idx="2">
+            <a:schemeClr val="accent1"/>
+          </a:effectRef>
+          <a:fontRef idx="minor">
+            <a:schemeClr val="lt1"/>
+          </a:fontRef>
+        </p:style>
+        <p:txBody>
+          <a:bodyPr rtlCol="0" anchor="ctr" wrap="square" lIns="50800" rIns="50800" tIns="50800" bIns="50800"/>
+          <a:lstStyle/>
+          <a:p>
+            <a:pPr algn="ctr">
+              <a:lnSpc>
+                <a:spcPct val="115000"/>
+              </a:lnSpc>
+              <a:spcAft>
+                <a:spcPts val="0"/>
+              </a:spcAft>
+            </a:pPr>
+            <a:r>
+              <a:rPr sz="2400" b="1">
+                <a:solidFill>
+                  <a:srgbClr val="14213D"/>
+                </a:solidFill>
+                <a:latin typeface="Arial"/>
+              </a:rPr>
+              <a:t>97.0%</a:t>
+            </a:r>
+          </a:p>
+          <a:p>
+            <a:pPr algn="ctr">
+              <a:lnSpc>
+                <a:spcPct val="115000"/>
+              </a:lnSpc>
+              <a:spcAft>
+                <a:spcPts val="0"/>
+              </a:spcAft>
+            </a:pPr>
+            <a:r>
+              <a:rPr sz="1300" b="0">
+                <a:solidFill>
+                  <a:srgbClr val="6B7280"/>
+                </a:solidFill>
+                <a:latin typeface="Arial"/>
+              </a:rPr>
+              <a:t>team accuracy</a:t>
+            </a:r>
+          </a:p>
+        </p:txBody>
+      </p:sp>
+      <p:sp>
+        <p:nvSpPr>
+          <p:cNvPr id="16" name="Rounded Rectangle 15"/>
+          <p:cNvSpPr/>
+          <p:nvPr/>
+        </p:nvSpPr>
+        <p:spPr>
+          <a:xfrm>
+            <a:off x="5080000" y="3460750"/>
+            <a:ext cx="1905000" cy="762000"/>
+          </a:xfrm>
+          <a:prstGeom prst="roundRect">
+            <a:avLst>
+              <a:gd name="adj" fmla="val 10000"/>
+            </a:avLst>
+          </a:prstGeom>
+          <a:solidFill>
+            <a:srgbClr val="E2EAF5"/>
+          </a:solidFill>
+          <a:ln w="12700">
+            <a:solidFill>
+              <a:srgbClr val="DDD8CC"/>
+            </a:solidFill>
+          </a:ln>
+          <a:effectLst/>
+        </p:spPr>
+        <p:style>
+          <a:lnRef idx="1">
+            <a:schemeClr val="accent1"/>
+          </a:lnRef>
+          <a:fillRef idx="3">
+            <a:schemeClr val="accent1"/>
+          </a:fillRef>
+          <a:effectRef idx="2">
+            <a:schemeClr val="accent1"/>
+          </a:effectRef>
+          <a:fontRef idx="minor">
+            <a:schemeClr val="lt1"/>
+          </a:fontRef>
+        </p:style>
+        <p:txBody>
+          <a:bodyPr rtlCol="0" anchor="ctr" wrap="square" lIns="50800" rIns="50800" tIns="50800" bIns="50800"/>
+          <a:lstStyle/>
+          <a:p>
+            <a:pPr algn="ctr">
+              <a:lnSpc>
+                <a:spcPct val="115000"/>
+              </a:lnSpc>
+              <a:spcAft>
+                <a:spcPts val="0"/>
+              </a:spcAft>
+            </a:pPr>
+            <a:r>
+              <a:rPr sz="2400" b="1">
+                <a:solidFill>
+                  <a:srgbClr val="14213D"/>
+                </a:solidFill>
+                <a:latin typeface="Arial"/>
+              </a:rPr>
+              <a:t>79.8%</a:t>
+            </a:r>
+          </a:p>
+          <a:p>
+            <a:pPr algn="ctr">
+              <a:lnSpc>
+                <a:spcPct val="115000"/>
+              </a:lnSpc>
+              <a:spcAft>
+                <a:spcPts val="0"/>
+              </a:spcAft>
+            </a:pPr>
+            <a:r>
+              <a:rPr sz="1300" b="0">
+                <a:solidFill>
+                  <a:srgbClr val="6B7280"/>
+                </a:solidFill>
+                <a:latin typeface="Arial"/>
+              </a:rPr>
+              <a:t>team accuracy</a:t>
+            </a:r>
+          </a:p>
+        </p:txBody>
+      </p:sp>
+      <p:sp>
+        <p:nvSpPr>
+          <p:cNvPr id="17" name="Rounded Rectangle 16"/>
+          <p:cNvSpPr/>
+          <p:nvPr/>
+        </p:nvSpPr>
+        <p:spPr>
+          <a:xfrm>
+            <a:off x="7112000" y="3460750"/>
+            <a:ext cx="1905000" cy="762000"/>
+          </a:xfrm>
+          <a:prstGeom prst="roundRect">
+            <a:avLst>
+              <a:gd name="adj" fmla="val 10000"/>
+            </a:avLst>
+          </a:prstGeom>
+          <a:solidFill>
+            <a:srgbClr val="E2EAF5"/>
+          </a:solidFill>
+          <a:ln w="12700">
+            <a:solidFill>
+              <a:srgbClr val="DDD8CC"/>
+            </a:solidFill>
+          </a:ln>
+          <a:effectLst/>
+        </p:spPr>
+        <p:style>
+          <a:lnRef idx="1">
+            <a:schemeClr val="accent1"/>
+          </a:lnRef>
+          <a:fillRef idx="3">
+            <a:schemeClr val="accent1"/>
+          </a:fillRef>
+          <a:effectRef idx="2">
+            <a:schemeClr val="accent1"/>
+          </a:effectRef>
+          <a:fontRef idx="minor">
+            <a:schemeClr val="lt1"/>
+          </a:fontRef>
+        </p:style>
+        <p:txBody>
+          <a:bodyPr rtlCol="0" anchor="ctr" wrap="square" lIns="50800" rIns="50800" tIns="50800" bIns="50800"/>
+          <a:lstStyle/>
+          <a:p>
+            <a:pPr algn="ctr">
+              <a:lnSpc>
+                <a:spcPct val="115000"/>
+              </a:lnSpc>
+              <a:spcAft>
+                <a:spcPts val="0"/>
+              </a:spcAft>
+            </a:pPr>
+            <a:r>
+              <a:rPr sz="2400" b="1">
+                <a:solidFill>
+                  <a:srgbClr val="14213D"/>
+                </a:solidFill>
+                <a:latin typeface="Arial"/>
+              </a:rPr>
+              <a:t>71.1%</a:t>
+            </a:r>
+          </a:p>
+          <a:p>
+            <a:pPr algn="ctr">
+              <a:lnSpc>
+                <a:spcPct val="115000"/>
+              </a:lnSpc>
+              <a:spcAft>
+                <a:spcPts val="0"/>
+              </a:spcAft>
+            </a:pPr>
+            <a:r>
+              <a:rPr sz="1300" b="0">
+                <a:solidFill>
+                  <a:srgbClr val="6B7280"/>
+                </a:solidFill>
+                <a:latin typeface="Arial"/>
+              </a:rPr>
+              <a:t>team accuracy</a:t>
+            </a:r>
+          </a:p>
+        </p:txBody>
+      </p:sp>
+      <p:sp>
+        <p:nvSpPr>
+          <p:cNvPr id="18" name="Rounded Rectangle 17"/>
+          <p:cNvSpPr/>
+          <p:nvPr/>
+        </p:nvSpPr>
+        <p:spPr>
+          <a:xfrm>
+            <a:off x="9144000" y="3460750"/>
+            <a:ext cx="1905000" cy="762000"/>
+          </a:xfrm>
+          <a:prstGeom prst="roundRect">
+            <a:avLst>
+              <a:gd name="adj" fmla="val 10000"/>
+            </a:avLst>
+          </a:prstGeom>
+          <a:solidFill>
+            <a:srgbClr val="E2EAF5"/>
+          </a:solidFill>
+          <a:ln w="12700">
+            <a:solidFill>
+              <a:srgbClr val="DDD8CC"/>
+            </a:solidFill>
+          </a:ln>
+          <a:effectLst/>
+        </p:spPr>
+        <p:style>
+          <a:lnRef idx="1">
+            <a:schemeClr val="accent1"/>
+          </a:lnRef>
+          <a:fillRef idx="3">
+            <a:schemeClr val="accent1"/>
+          </a:fillRef>
+          <a:effectRef idx="2">
+            <a:schemeClr val="accent1"/>
+          </a:effectRef>
+          <a:fontRef idx="minor">
+            <a:schemeClr val="lt1"/>
+          </a:fontRef>
+        </p:style>
+        <p:txBody>
+          <a:bodyPr rtlCol="0" anchor="ctr" wrap="square" lIns="50800" rIns="50800" tIns="50800" bIns="50800"/>
+          <a:lstStyle/>
+          <a:p>
+            <a:pPr algn="ctr">
+              <a:lnSpc>
+                <a:spcPct val="115000"/>
+              </a:lnSpc>
+              <a:spcAft>
+                <a:spcPts val="0"/>
+              </a:spcAft>
+            </a:pPr>
+            <a:r>
+              <a:rPr sz="2400" b="1">
+                <a:solidFill>
+                  <a:srgbClr val="14213D"/>
+                </a:solidFill>
+                <a:latin typeface="Arial"/>
+              </a:rPr>
+              <a:t>45.1%</a:t>
+            </a:r>
+          </a:p>
+          <a:p>
+            <a:pPr algn="ctr">
+              <a:lnSpc>
+                <a:spcPct val="115000"/>
+              </a:lnSpc>
+              <a:spcAft>
+                <a:spcPts val="0"/>
+              </a:spcAft>
+            </a:pPr>
+            <a:r>
+              <a:rPr sz="1300" b="0">
+                <a:solidFill>
+                  <a:srgbClr val="6B7280"/>
+                </a:solidFill>
+                <a:latin typeface="Arial"/>
+              </a:rPr>
+              <a:t>team accuracy</a:t>
+            </a:r>
+          </a:p>
+        </p:txBody>
+      </p:sp>
+      <p:sp>
+        <p:nvSpPr>
+          <p:cNvPr id="19" name="TextBox 18"/>
+          <p:cNvSpPr txBox="1"/>
+          <p:nvPr/>
+        </p:nvSpPr>
+        <p:spPr>
+          <a:xfrm>
+            <a:off x="812800" y="4413250"/>
+            <a:ext cx="2032000" cy="762000"/>
+          </a:xfrm>
+          <a:prstGeom prst="rect">
+            <a:avLst/>
+          </a:prstGeom>
+          <a:noFill/>
+        </p:spPr>
+        <p:txBody>
+          <a:bodyPr wrap="square" lIns="0" rIns="0" tIns="0" bIns="0" anchor="ctr">
+            <a:spAutoFit/>
+          </a:bodyPr>
+          <a:lstStyle/>
           <a:p>
             <a:pPr algn="l">
               <a:lnSpc>
@@ -7447,13 +8261,425 @@
               </a:spcAft>
             </a:pPr>
             <a:r>
-              <a:rPr sz="1700" b="0">
-                <a:solidFill>
-                  <a:srgbClr val="3A4150"/>
-                </a:solidFill>
-                <a:latin typeface="Arial"/>
-              </a:rPr>
-              <a:t>of the team’s tokens with CLIMB’s test. A worst-case bound: 100%.</a:t>
+              <a:rPr sz="2200" b="1">
+                <a:solidFill>
+                  <a:srgbClr val="14213D"/>
+                </a:solidFill>
+                <a:latin typeface="Arial"/>
+              </a:rPr>
+              <a:t>Gemma-4-26B</a:t>
+            </a:r>
+          </a:p>
+        </p:txBody>
+      </p:sp>
+      <p:sp>
+        <p:nvSpPr>
+          <p:cNvPr id="20" name="Rounded Rectangle 19"/>
+          <p:cNvSpPr/>
+          <p:nvPr/>
+        </p:nvSpPr>
+        <p:spPr>
+          <a:xfrm>
+            <a:off x="3048000" y="4413250"/>
+            <a:ext cx="1905000" cy="762000"/>
+          </a:xfrm>
+          <a:prstGeom prst="roundRect">
+            <a:avLst>
+              <a:gd name="adj" fmla="val 10000"/>
+            </a:avLst>
+          </a:prstGeom>
+          <a:solidFill>
+            <a:srgbClr val="F8E8DC"/>
+          </a:solidFill>
+          <a:ln w="12700">
+            <a:solidFill>
+              <a:srgbClr val="DDD8CC"/>
+            </a:solidFill>
+          </a:ln>
+          <a:effectLst/>
+        </p:spPr>
+        <p:style>
+          <a:lnRef idx="1">
+            <a:schemeClr val="accent1"/>
+          </a:lnRef>
+          <a:fillRef idx="3">
+            <a:schemeClr val="accent1"/>
+          </a:fillRef>
+          <a:effectRef idx="2">
+            <a:schemeClr val="accent1"/>
+          </a:effectRef>
+          <a:fontRef idx="minor">
+            <a:schemeClr val="lt1"/>
+          </a:fontRef>
+        </p:style>
+        <p:txBody>
+          <a:bodyPr rtlCol="0" anchor="ctr" wrap="square" lIns="50800" rIns="50800" tIns="50800" bIns="50800"/>
+          <a:lstStyle/>
+          <a:p>
+            <a:pPr algn="ctr">
+              <a:lnSpc>
+                <a:spcPct val="115000"/>
+              </a:lnSpc>
+              <a:spcAft>
+                <a:spcPts val="0"/>
+              </a:spcAft>
+            </a:pPr>
+            <a:r>
+              <a:rPr sz="2400" b="1">
+                <a:solidFill>
+                  <a:srgbClr val="14213D"/>
+                </a:solidFill>
+                <a:latin typeface="Arial"/>
+              </a:rPr>
+              <a:t>99.8%</a:t>
+            </a:r>
+          </a:p>
+          <a:p>
+            <a:pPr algn="ctr">
+              <a:lnSpc>
+                <a:spcPct val="115000"/>
+              </a:lnSpc>
+              <a:spcAft>
+                <a:spcPts val="0"/>
+              </a:spcAft>
+            </a:pPr>
+            <a:r>
+              <a:rPr sz="1300" b="0">
+                <a:solidFill>
+                  <a:srgbClr val="6B7280"/>
+                </a:solidFill>
+                <a:latin typeface="Arial"/>
+              </a:rPr>
+              <a:t>team accuracy</a:t>
+            </a:r>
+          </a:p>
+        </p:txBody>
+      </p:sp>
+      <p:sp>
+        <p:nvSpPr>
+          <p:cNvPr id="21" name="Rounded Rectangle 20"/>
+          <p:cNvSpPr/>
+          <p:nvPr/>
+        </p:nvSpPr>
+        <p:spPr>
+          <a:xfrm>
+            <a:off x="5080000" y="4413250"/>
+            <a:ext cx="1905000" cy="762000"/>
+          </a:xfrm>
+          <a:prstGeom prst="roundRect">
+            <a:avLst>
+              <a:gd name="adj" fmla="val 10000"/>
+            </a:avLst>
+          </a:prstGeom>
+          <a:solidFill>
+            <a:srgbClr val="F8E8DC"/>
+          </a:solidFill>
+          <a:ln w="12700">
+            <a:solidFill>
+              <a:srgbClr val="DDD8CC"/>
+            </a:solidFill>
+          </a:ln>
+          <a:effectLst/>
+        </p:spPr>
+        <p:style>
+          <a:lnRef idx="1">
+            <a:schemeClr val="accent1"/>
+          </a:lnRef>
+          <a:fillRef idx="3">
+            <a:schemeClr val="accent1"/>
+          </a:fillRef>
+          <a:effectRef idx="2">
+            <a:schemeClr val="accent1"/>
+          </a:effectRef>
+          <a:fontRef idx="minor">
+            <a:schemeClr val="lt1"/>
+          </a:fontRef>
+        </p:style>
+        <p:txBody>
+          <a:bodyPr rtlCol="0" anchor="ctr" wrap="square" lIns="50800" rIns="50800" tIns="50800" bIns="50800"/>
+          <a:lstStyle/>
+          <a:p>
+            <a:pPr algn="ctr">
+              <a:lnSpc>
+                <a:spcPct val="115000"/>
+              </a:lnSpc>
+              <a:spcAft>
+                <a:spcPts val="0"/>
+              </a:spcAft>
+            </a:pPr>
+            <a:r>
+              <a:rPr sz="2400" b="1">
+                <a:solidFill>
+                  <a:srgbClr val="14213D"/>
+                </a:solidFill>
+                <a:latin typeface="Arial"/>
+              </a:rPr>
+              <a:t>67.9%</a:t>
+            </a:r>
+          </a:p>
+          <a:p>
+            <a:pPr algn="ctr">
+              <a:lnSpc>
+                <a:spcPct val="115000"/>
+              </a:lnSpc>
+              <a:spcAft>
+                <a:spcPts val="0"/>
+              </a:spcAft>
+            </a:pPr>
+            <a:r>
+              <a:rPr sz="1300" b="0">
+                <a:solidFill>
+                  <a:srgbClr val="6B7280"/>
+                </a:solidFill>
+                <a:latin typeface="Arial"/>
+              </a:rPr>
+              <a:t>team accuracy</a:t>
+            </a:r>
+          </a:p>
+        </p:txBody>
+      </p:sp>
+      <p:sp>
+        <p:nvSpPr>
+          <p:cNvPr id="22" name="Rounded Rectangle 21"/>
+          <p:cNvSpPr/>
+          <p:nvPr/>
+        </p:nvSpPr>
+        <p:spPr>
+          <a:xfrm>
+            <a:off x="7112000" y="4413250"/>
+            <a:ext cx="1905000" cy="762000"/>
+          </a:xfrm>
+          <a:prstGeom prst="roundRect">
+            <a:avLst>
+              <a:gd name="adj" fmla="val 10000"/>
+            </a:avLst>
+          </a:prstGeom>
+          <a:solidFill>
+            <a:srgbClr val="F8E8DC"/>
+          </a:solidFill>
+          <a:ln w="12700">
+            <a:solidFill>
+              <a:srgbClr val="DDD8CC"/>
+            </a:solidFill>
+          </a:ln>
+          <a:effectLst/>
+        </p:spPr>
+        <p:style>
+          <a:lnRef idx="1">
+            <a:schemeClr val="accent1"/>
+          </a:lnRef>
+          <a:fillRef idx="3">
+            <a:schemeClr val="accent1"/>
+          </a:fillRef>
+          <a:effectRef idx="2">
+            <a:schemeClr val="accent1"/>
+          </a:effectRef>
+          <a:fontRef idx="minor">
+            <a:schemeClr val="lt1"/>
+          </a:fontRef>
+        </p:style>
+        <p:txBody>
+          <a:bodyPr rtlCol="0" anchor="ctr" wrap="square" lIns="50800" rIns="50800" tIns="50800" bIns="50800"/>
+          <a:lstStyle/>
+          <a:p>
+            <a:pPr algn="ctr">
+              <a:lnSpc>
+                <a:spcPct val="115000"/>
+              </a:lnSpc>
+              <a:spcAft>
+                <a:spcPts val="0"/>
+              </a:spcAft>
+            </a:pPr>
+            <a:r>
+              <a:rPr sz="2400" b="1">
+                <a:solidFill>
+                  <a:srgbClr val="14213D"/>
+                </a:solidFill>
+                <a:latin typeface="Arial"/>
+              </a:rPr>
+              <a:t>65.3%</a:t>
+            </a:r>
+          </a:p>
+          <a:p>
+            <a:pPr algn="ctr">
+              <a:lnSpc>
+                <a:spcPct val="115000"/>
+              </a:lnSpc>
+              <a:spcAft>
+                <a:spcPts val="0"/>
+              </a:spcAft>
+            </a:pPr>
+            <a:r>
+              <a:rPr sz="1300" b="0">
+                <a:solidFill>
+                  <a:srgbClr val="6B7280"/>
+                </a:solidFill>
+                <a:latin typeface="Arial"/>
+              </a:rPr>
+              <a:t>team accuracy</a:t>
+            </a:r>
+          </a:p>
+        </p:txBody>
+      </p:sp>
+      <p:sp>
+        <p:nvSpPr>
+          <p:cNvPr id="23" name="Rounded Rectangle 22"/>
+          <p:cNvSpPr/>
+          <p:nvPr/>
+        </p:nvSpPr>
+        <p:spPr>
+          <a:xfrm>
+            <a:off x="9144000" y="4413250"/>
+            <a:ext cx="1905000" cy="762000"/>
+          </a:xfrm>
+          <a:prstGeom prst="roundRect">
+            <a:avLst>
+              <a:gd name="adj" fmla="val 10000"/>
+            </a:avLst>
+          </a:prstGeom>
+          <a:solidFill>
+            <a:srgbClr val="F8E8DC"/>
+          </a:solidFill>
+          <a:ln w="12700">
+            <a:solidFill>
+              <a:srgbClr val="DDD8CC"/>
+            </a:solidFill>
+          </a:ln>
+          <a:effectLst/>
+        </p:spPr>
+        <p:style>
+          <a:lnRef idx="1">
+            <a:schemeClr val="accent1"/>
+          </a:lnRef>
+          <a:fillRef idx="3">
+            <a:schemeClr val="accent1"/>
+          </a:fillRef>
+          <a:effectRef idx="2">
+            <a:schemeClr val="accent1"/>
+          </a:effectRef>
+          <a:fontRef idx="minor">
+            <a:schemeClr val="lt1"/>
+          </a:fontRef>
+        </p:style>
+        <p:txBody>
+          <a:bodyPr rtlCol="0" anchor="ctr" wrap="square" lIns="50800" rIns="50800" tIns="50800" bIns="50800"/>
+          <a:lstStyle/>
+          <a:p>
+            <a:pPr algn="ctr">
+              <a:lnSpc>
+                <a:spcPct val="115000"/>
+              </a:lnSpc>
+              <a:spcAft>
+                <a:spcPts val="0"/>
+              </a:spcAft>
+            </a:pPr>
+            <a:r>
+              <a:rPr sz="2400" b="1">
+                <a:solidFill>
+                  <a:srgbClr val="14213D"/>
+                </a:solidFill>
+                <a:latin typeface="Arial"/>
+              </a:rPr>
+              <a:t>36.4%</a:t>
+            </a:r>
+          </a:p>
+          <a:p>
+            <a:pPr algn="ctr">
+              <a:lnSpc>
+                <a:spcPct val="115000"/>
+              </a:lnSpc>
+              <a:spcAft>
+                <a:spcPts val="0"/>
+              </a:spcAft>
+            </a:pPr>
+            <a:r>
+              <a:rPr sz="1300" b="0">
+                <a:solidFill>
+                  <a:srgbClr val="6B7280"/>
+                </a:solidFill>
+                <a:latin typeface="Arial"/>
+              </a:rPr>
+              <a:t>team accuracy</a:t>
+            </a:r>
+          </a:p>
+        </p:txBody>
+      </p:sp>
+      <p:sp>
+        <p:nvSpPr>
+          <p:cNvPr id="24" name="Rounded Rectangle 23"/>
+          <p:cNvSpPr/>
+          <p:nvPr/>
+        </p:nvSpPr>
+        <p:spPr>
+          <a:xfrm>
+            <a:off x="812800" y="5524500"/>
+            <a:ext cx="10566400" cy="635000"/>
+          </a:xfrm>
+          <a:prstGeom prst="roundRect">
+            <a:avLst>
+              <a:gd name="adj" fmla="val 10000"/>
+            </a:avLst>
+          </a:prstGeom>
+          <a:solidFill>
+            <a:srgbClr val="14213D"/>
+          </a:solidFill>
+          <a:ln>
+            <a:noFill/>
+          </a:ln>
+          <a:effectLst/>
+        </p:spPr>
+        <p:style>
+          <a:lnRef idx="1">
+            <a:schemeClr val="accent1"/>
+          </a:lnRef>
+          <a:fillRef idx="3">
+            <a:schemeClr val="accent1"/>
+          </a:fillRef>
+          <a:effectRef idx="2">
+            <a:schemeClr val="accent1"/>
+          </a:effectRef>
+          <a:fontRef idx="minor">
+            <a:schemeClr val="lt1"/>
+          </a:fontRef>
+        </p:style>
+        <p:txBody>
+          <a:bodyPr rtlCol="0" anchor="ctr" wrap="square" lIns="203200" rIns="203200" tIns="203200" bIns="203200"/>
+          <a:lstStyle/>
+          <a:p>
+            <a:pPr algn="ctr">
+              <a:lnSpc>
+                <a:spcPct val="115000"/>
+              </a:lnSpc>
+              <a:spcAft>
+                <a:spcPts val="0"/>
+              </a:spcAft>
+            </a:pPr>
+            <a:r>
+              <a:rPr sz="1800" b="0">
+                <a:solidFill>
+                  <a:srgbClr val="F7F6F2"/>
+                </a:solidFill>
+                <a:latin typeface="Arial"/>
+              </a:rPr>
+              <a:t>Record every task once, then replay </a:t>
+            </a:r>
+            <a:r>
+              <a:rPr sz="1800" b="1">
+                <a:solidFill>
+                  <a:srgbClr val="F0A66B"/>
+                </a:solidFill>
+                <a:latin typeface="Arial"/>
+              </a:rPr>
+              <a:t>200 random splits</a:t>
+            </a:r>
+            <a:r>
+              <a:rPr sz="1800" b="0">
+                <a:solidFill>
+                  <a:srgbClr val="F7F6F2"/>
+                </a:solidFill>
+                <a:latin typeface="Arial"/>
+              </a:rPr>
+              <a:t>: half to calibrate CLIMB, half to test it.</a:t>
             </a:r>
           </a:p>
         </p:txBody>
@@ -7563,7 +8789,7 @@
                 </a:solidFill>
                 <a:latin typeface="Arial"/>
               </a:rPr>
-              <a:t>EXPERIMENTS</a:t>
+              <a:t>RESULTS</a:t>
             </a:r>
           </a:p>
         </p:txBody>
@@ -7605,315 +8831,53 @@
                 </a:solidFill>
                 <a:latin typeface="Georgia"/>
               </a:rPr>
-              <a:t>3 models × 4 benchmarks = 12 settings</a:t>
-            </a:r>
-          </a:p>
-        </p:txBody>
-      </p:sp>
-      <p:sp>
-        <p:nvSpPr>
-          <p:cNvPr id="5" name="TextBox 4"/>
-          <p:cNvSpPr txBox="1"/>
-          <p:nvPr/>
-        </p:nvSpPr>
-        <p:spPr>
-          <a:xfrm>
-            <a:off x="3048000" y="1841500"/>
-            <a:ext cx="1905000" cy="508000"/>
+              <a:t>The promise holds on every setting</a:t>
+            </a:r>
+          </a:p>
+        </p:txBody>
+      </p:sp>
+      <p:pic>
+        <p:nvPicPr>
+          <p:cNvPr id="5" name="Picture 4" descr="c_viol.png"/>
+          <p:cNvPicPr>
+            <a:picLocks noChangeAspect="1"/>
+          </p:cNvPicPr>
+          <p:nvPr/>
+        </p:nvPicPr>
+        <p:blipFill>
+          <a:blip r:embed="rId3"/>
+          <a:stretch>
+            <a:fillRect/>
+          </a:stretch>
+        </p:blipFill>
+        <p:spPr>
+          <a:xfrm>
+            <a:off x="812800" y="1999442"/>
+            <a:ext cx="7302500" cy="3748115"/>
           </a:xfrm>
           <a:prstGeom prst="rect">
             <a:avLst/>
           </a:prstGeom>
-          <a:noFill/>
-        </p:spPr>
-        <p:txBody>
-          <a:bodyPr wrap="square" lIns="0" rIns="0" tIns="0" bIns="0" anchor="t">
-            <a:spAutoFit/>
-          </a:bodyPr>
-          <a:lstStyle/>
-          <a:p>
-            <a:pPr algn="ctr">
-              <a:lnSpc>
-                <a:spcPct val="115000"/>
-              </a:lnSpc>
-              <a:spcAft>
-                <a:spcPts val="0"/>
-              </a:spcAft>
-            </a:pPr>
-            <a:r>
-              <a:rPr sz="2200" b="1">
-                <a:solidFill>
-                  <a:srgbClr val="14213D"/>
-                </a:solidFill>
-                <a:latin typeface="Arial"/>
-              </a:rPr>
-              <a:t>MATH</a:t>
-            </a:r>
-          </a:p>
-          <a:p>
-            <a:pPr algn="ctr">
-              <a:lnSpc>
-                <a:spcPct val="115000"/>
-              </a:lnSpc>
-              <a:spcAft>
-                <a:spcPts val="0"/>
-              </a:spcAft>
-            </a:pPr>
-            <a:r>
-              <a:rPr sz="1600" b="0">
-                <a:solidFill>
-                  <a:srgbClr val="6B7280"/>
-                </a:solidFill>
-                <a:latin typeface="Arial"/>
-              </a:rPr>
-              <a:t>math</a:t>
-            </a:r>
-          </a:p>
-        </p:txBody>
-      </p:sp>
-      <p:sp>
-        <p:nvSpPr>
-          <p:cNvPr id="6" name="TextBox 5"/>
-          <p:cNvSpPr txBox="1"/>
-          <p:nvPr/>
-        </p:nvSpPr>
-        <p:spPr>
-          <a:xfrm>
-            <a:off x="5080000" y="1841500"/>
-            <a:ext cx="1905000" cy="508000"/>
-          </a:xfrm>
-          <a:prstGeom prst="rect">
-            <a:avLst/>
-          </a:prstGeom>
-          <a:noFill/>
-        </p:spPr>
-        <p:txBody>
-          <a:bodyPr wrap="square" lIns="0" rIns="0" tIns="0" bIns="0" anchor="t">
-            <a:spAutoFit/>
-          </a:bodyPr>
-          <a:lstStyle/>
-          <a:p>
-            <a:pPr algn="ctr">
-              <a:lnSpc>
-                <a:spcPct val="115000"/>
-              </a:lnSpc>
-              <a:spcAft>
-                <a:spcPts val="0"/>
-              </a:spcAft>
-            </a:pPr>
-            <a:r>
-              <a:rPr sz="2200" b="1">
-                <a:solidFill>
-                  <a:srgbClr val="14213D"/>
-                </a:solidFill>
-                <a:latin typeface="Arial"/>
-              </a:rPr>
-              <a:t>FRAMES</a:t>
-            </a:r>
-          </a:p>
-          <a:p>
-            <a:pPr algn="ctr">
-              <a:lnSpc>
-                <a:spcPct val="115000"/>
-              </a:lnSpc>
-              <a:spcAft>
-                <a:spcPts val="0"/>
-              </a:spcAft>
-            </a:pPr>
-            <a:r>
-              <a:rPr sz="1600" b="0">
-                <a:solidFill>
-                  <a:srgbClr val="6B7280"/>
-                </a:solidFill>
-                <a:latin typeface="Arial"/>
-              </a:rPr>
-              <a:t>open-book QA</a:t>
-            </a:r>
-          </a:p>
-        </p:txBody>
-      </p:sp>
-      <p:sp>
-        <p:nvSpPr>
-          <p:cNvPr id="7" name="TextBox 6"/>
-          <p:cNvSpPr txBox="1"/>
-          <p:nvPr/>
-        </p:nvSpPr>
-        <p:spPr>
-          <a:xfrm>
-            <a:off x="7112000" y="1841500"/>
-            <a:ext cx="1905000" cy="508000"/>
-          </a:xfrm>
-          <a:prstGeom prst="rect">
-            <a:avLst/>
-          </a:prstGeom>
-          <a:noFill/>
-        </p:spPr>
-        <p:txBody>
-          <a:bodyPr wrap="square" lIns="0" rIns="0" tIns="0" bIns="0" anchor="t">
-            <a:spAutoFit/>
-          </a:bodyPr>
-          <a:lstStyle/>
-          <a:p>
-            <a:pPr algn="ctr">
-              <a:lnSpc>
-                <a:spcPct val="115000"/>
-              </a:lnSpc>
-              <a:spcAft>
-                <a:spcPts val="0"/>
-              </a:spcAft>
-            </a:pPr>
-            <a:r>
-              <a:rPr sz="2200" b="1">
-                <a:solidFill>
-                  <a:srgbClr val="14213D"/>
-                </a:solidFill>
-                <a:latin typeface="Arial"/>
-              </a:rPr>
-              <a:t>MuSiQue</a:t>
-            </a:r>
-          </a:p>
-          <a:p>
-            <a:pPr algn="ctr">
-              <a:lnSpc>
-                <a:spcPct val="115000"/>
-              </a:lnSpc>
-              <a:spcAft>
-                <a:spcPts val="0"/>
-              </a:spcAft>
-            </a:pPr>
-            <a:r>
-              <a:rPr sz="1600" b="0">
-                <a:solidFill>
-                  <a:srgbClr val="6B7280"/>
-                </a:solidFill>
-                <a:latin typeface="Arial"/>
-              </a:rPr>
-              <a:t>open-book QA</a:t>
-            </a:r>
-          </a:p>
-        </p:txBody>
-      </p:sp>
-      <p:sp>
-        <p:nvSpPr>
-          <p:cNvPr id="8" name="TextBox 7"/>
-          <p:cNvSpPr txBox="1"/>
-          <p:nvPr/>
-        </p:nvSpPr>
-        <p:spPr>
-          <a:xfrm>
-            <a:off x="9144000" y="1841500"/>
-            <a:ext cx="1905000" cy="508000"/>
-          </a:xfrm>
-          <a:prstGeom prst="rect">
-            <a:avLst/>
-          </a:prstGeom>
-          <a:noFill/>
-        </p:spPr>
-        <p:txBody>
-          <a:bodyPr wrap="square" lIns="0" rIns="0" tIns="0" bIns="0" anchor="t">
-            <a:spAutoFit/>
-          </a:bodyPr>
-          <a:lstStyle/>
-          <a:p>
-            <a:pPr algn="ctr">
-              <a:lnSpc>
-                <a:spcPct val="115000"/>
-              </a:lnSpc>
-              <a:spcAft>
-                <a:spcPts val="0"/>
-              </a:spcAft>
-            </a:pPr>
-            <a:r>
-              <a:rPr sz="2200" b="1">
-                <a:solidFill>
-                  <a:srgbClr val="14213D"/>
-                </a:solidFill>
-                <a:latin typeface="Arial"/>
-              </a:rPr>
-              <a:t>BBEH</a:t>
-            </a:r>
-          </a:p>
-          <a:p>
-            <a:pPr algn="ctr">
-              <a:lnSpc>
-                <a:spcPct val="115000"/>
-              </a:lnSpc>
-              <a:spcAft>
-                <a:spcPts val="0"/>
-              </a:spcAft>
-            </a:pPr>
-            <a:r>
-              <a:rPr sz="1600" b="0">
-                <a:solidFill>
-                  <a:srgbClr val="6B7280"/>
-                </a:solidFill>
-                <a:latin typeface="Arial"/>
-              </a:rPr>
-              <a:t>hard reasoning</a:t>
-            </a:r>
-          </a:p>
-        </p:txBody>
-      </p:sp>
-      <p:sp>
-        <p:nvSpPr>
-          <p:cNvPr id="9" name="TextBox 8"/>
-          <p:cNvSpPr txBox="1"/>
-          <p:nvPr/>
-        </p:nvSpPr>
-        <p:spPr>
-          <a:xfrm>
-            <a:off x="812800" y="2508250"/>
-            <a:ext cx="2032000" cy="762000"/>
-          </a:xfrm>
-          <a:prstGeom prst="rect">
-            <a:avLst/>
-          </a:prstGeom>
-          <a:noFill/>
-        </p:spPr>
-        <p:txBody>
-          <a:bodyPr wrap="square" lIns="0" rIns="0" tIns="0" bIns="0" anchor="ctr">
-            <a:spAutoFit/>
-          </a:bodyPr>
-          <a:lstStyle/>
-          <a:p>
-            <a:pPr algn="l">
-              <a:lnSpc>
-                <a:spcPct val="115000"/>
-              </a:lnSpc>
-              <a:spcAft>
-                <a:spcPts val="0"/>
-              </a:spcAft>
-            </a:pPr>
-            <a:r>
-              <a:rPr sz="2200" b="1">
-                <a:solidFill>
-                  <a:srgbClr val="14213D"/>
-                </a:solidFill>
-                <a:latin typeface="Arial"/>
-              </a:rPr>
-              <a:t>gpt-oss-20b</a:t>
-            </a:r>
-          </a:p>
-        </p:txBody>
-      </p:sp>
-      <p:sp>
-        <p:nvSpPr>
-          <p:cNvPr id="10" name="Rounded Rectangle 9"/>
+        </p:spPr>
+      </p:pic>
+      <p:sp>
+        <p:nvSpPr>
+          <p:cNvPr id="6" name="Rounded Rectangle 5"/>
           <p:cNvSpPr/>
           <p:nvPr/>
         </p:nvSpPr>
         <p:spPr>
           <a:xfrm>
-            <a:off x="3048000" y="2508250"/>
-            <a:ext cx="1905000" cy="762000"/>
+            <a:off x="8445500" y="2286000"/>
+            <a:ext cx="2933700" cy="1905000"/>
           </a:xfrm>
           <a:prstGeom prst="roundRect">
             <a:avLst>
-              <a:gd name="adj" fmla="val 10000"/>
+              <a:gd name="adj" fmla="val 6000"/>
             </a:avLst>
           </a:prstGeom>
           <a:solidFill>
-            <a:srgbClr val="E2EAF5"/>
+            <a:srgbClr val="E3ECE2"/>
           </a:solidFill>
           <a:ln w="12700">
             <a:solidFill>
@@ -7937,692 +8901,27 @@
           </a:fontRef>
         </p:style>
         <p:txBody>
-          <a:bodyPr rtlCol="0" anchor="ctr" wrap="square" lIns="50800" rIns="50800" tIns="50800" bIns="50800"/>
-          <a:lstStyle/>
-          <a:p>
-            <a:pPr algn="ctr">
-              <a:lnSpc>
-                <a:spcPct val="115000"/>
-              </a:lnSpc>
-              <a:spcAft>
-                <a:spcPts val="0"/>
-              </a:spcAft>
-            </a:pPr>
-            <a:r>
-              <a:rPr sz="2400" b="1">
-                <a:solidFill>
-                  <a:srgbClr val="14213D"/>
-                </a:solidFill>
-                <a:latin typeface="Arial"/>
-              </a:rPr>
-              <a:t>94.8%</a:t>
-            </a:r>
-          </a:p>
-          <a:p>
-            <a:pPr algn="ctr">
-              <a:lnSpc>
-                <a:spcPct val="115000"/>
-              </a:lnSpc>
-              <a:spcAft>
-                <a:spcPts val="0"/>
-              </a:spcAft>
-            </a:pPr>
-            <a:r>
-              <a:rPr sz="1300" b="0">
-                <a:solidFill>
-                  <a:srgbClr val="6B7280"/>
-                </a:solidFill>
-                <a:latin typeface="Arial"/>
-              </a:rPr>
-              <a:t>team accuracy</a:t>
-            </a:r>
-          </a:p>
-        </p:txBody>
-      </p:sp>
-      <p:sp>
-        <p:nvSpPr>
-          <p:cNvPr id="11" name="Rounded Rectangle 10"/>
-          <p:cNvSpPr/>
-          <p:nvPr/>
-        </p:nvSpPr>
-        <p:spPr>
-          <a:xfrm>
-            <a:off x="5080000" y="2508250"/>
-            <a:ext cx="1905000" cy="762000"/>
-          </a:xfrm>
-          <a:prstGeom prst="roundRect">
-            <a:avLst>
-              <a:gd name="adj" fmla="val 10000"/>
-            </a:avLst>
-          </a:prstGeom>
-          <a:solidFill>
-            <a:srgbClr val="E2EAF5"/>
-          </a:solidFill>
-          <a:ln w="12700">
-            <a:solidFill>
-              <a:srgbClr val="DDD8CC"/>
-            </a:solidFill>
-          </a:ln>
-          <a:effectLst/>
-        </p:spPr>
-        <p:style>
-          <a:lnRef idx="1">
-            <a:schemeClr val="accent1"/>
-          </a:lnRef>
-          <a:fillRef idx="3">
-            <a:schemeClr val="accent1"/>
-          </a:fillRef>
-          <a:effectRef idx="2">
-            <a:schemeClr val="accent1"/>
-          </a:effectRef>
-          <a:fontRef idx="minor">
-            <a:schemeClr val="lt1"/>
-          </a:fontRef>
-        </p:style>
-        <p:txBody>
-          <a:bodyPr rtlCol="0" anchor="ctr" wrap="square" lIns="50800" rIns="50800" tIns="50800" bIns="50800"/>
-          <a:lstStyle/>
-          <a:p>
-            <a:pPr algn="ctr">
-              <a:lnSpc>
-                <a:spcPct val="115000"/>
-              </a:lnSpc>
-              <a:spcAft>
-                <a:spcPts val="0"/>
-              </a:spcAft>
-            </a:pPr>
-            <a:r>
-              <a:rPr sz="2400" b="1">
-                <a:solidFill>
-                  <a:srgbClr val="14213D"/>
-                </a:solidFill>
-                <a:latin typeface="Arial"/>
-              </a:rPr>
-              <a:t>76.1%</a:t>
-            </a:r>
-          </a:p>
-          <a:p>
-            <a:pPr algn="ctr">
-              <a:lnSpc>
-                <a:spcPct val="115000"/>
-              </a:lnSpc>
-              <a:spcAft>
-                <a:spcPts val="0"/>
-              </a:spcAft>
-            </a:pPr>
-            <a:r>
-              <a:rPr sz="1300" b="0">
-                <a:solidFill>
-                  <a:srgbClr val="6B7280"/>
-                </a:solidFill>
-                <a:latin typeface="Arial"/>
-              </a:rPr>
-              <a:t>team accuracy</a:t>
-            </a:r>
-          </a:p>
-        </p:txBody>
-      </p:sp>
-      <p:sp>
-        <p:nvSpPr>
-          <p:cNvPr id="12" name="Rounded Rectangle 11"/>
-          <p:cNvSpPr/>
-          <p:nvPr/>
-        </p:nvSpPr>
-        <p:spPr>
-          <a:xfrm>
-            <a:off x="7112000" y="2508250"/>
-            <a:ext cx="1905000" cy="762000"/>
-          </a:xfrm>
-          <a:prstGeom prst="roundRect">
-            <a:avLst>
-              <a:gd name="adj" fmla="val 10000"/>
-            </a:avLst>
-          </a:prstGeom>
-          <a:solidFill>
-            <a:srgbClr val="E2EAF5"/>
-          </a:solidFill>
-          <a:ln w="12700">
-            <a:solidFill>
-              <a:srgbClr val="DDD8CC"/>
-            </a:solidFill>
-          </a:ln>
-          <a:effectLst/>
-        </p:spPr>
-        <p:style>
-          <a:lnRef idx="1">
-            <a:schemeClr val="accent1"/>
-          </a:lnRef>
-          <a:fillRef idx="3">
-            <a:schemeClr val="accent1"/>
-          </a:fillRef>
-          <a:effectRef idx="2">
-            <a:schemeClr val="accent1"/>
-          </a:effectRef>
-          <a:fontRef idx="minor">
-            <a:schemeClr val="lt1"/>
-          </a:fontRef>
-        </p:style>
-        <p:txBody>
-          <a:bodyPr rtlCol="0" anchor="ctr" wrap="square" lIns="50800" rIns="50800" tIns="50800" bIns="50800"/>
-          <a:lstStyle/>
-          <a:p>
-            <a:pPr algn="ctr">
-              <a:lnSpc>
-                <a:spcPct val="115000"/>
-              </a:lnSpc>
-              <a:spcAft>
-                <a:spcPts val="0"/>
-              </a:spcAft>
-            </a:pPr>
-            <a:r>
-              <a:rPr sz="2400" b="1">
-                <a:solidFill>
-                  <a:srgbClr val="14213D"/>
-                </a:solidFill>
-                <a:latin typeface="Arial"/>
-              </a:rPr>
-              <a:t>64.9%</a:t>
-            </a:r>
-          </a:p>
-          <a:p>
-            <a:pPr algn="ctr">
-              <a:lnSpc>
-                <a:spcPct val="115000"/>
-              </a:lnSpc>
-              <a:spcAft>
-                <a:spcPts val="0"/>
-              </a:spcAft>
-            </a:pPr>
-            <a:r>
-              <a:rPr sz="1300" b="0">
-                <a:solidFill>
-                  <a:srgbClr val="6B7280"/>
-                </a:solidFill>
-                <a:latin typeface="Arial"/>
-              </a:rPr>
-              <a:t>team accuracy</a:t>
-            </a:r>
-          </a:p>
-        </p:txBody>
-      </p:sp>
-      <p:sp>
-        <p:nvSpPr>
-          <p:cNvPr id="13" name="Rounded Rectangle 12"/>
-          <p:cNvSpPr/>
-          <p:nvPr/>
-        </p:nvSpPr>
-        <p:spPr>
-          <a:xfrm>
-            <a:off x="9144000" y="2508250"/>
-            <a:ext cx="1905000" cy="762000"/>
-          </a:xfrm>
-          <a:prstGeom prst="roundRect">
-            <a:avLst>
-              <a:gd name="adj" fmla="val 10000"/>
-            </a:avLst>
-          </a:prstGeom>
-          <a:solidFill>
-            <a:srgbClr val="E2EAF5"/>
-          </a:solidFill>
-          <a:ln w="12700">
-            <a:solidFill>
-              <a:srgbClr val="DDD8CC"/>
-            </a:solidFill>
-          </a:ln>
-          <a:effectLst/>
-        </p:spPr>
-        <p:style>
-          <a:lnRef idx="1">
-            <a:schemeClr val="accent1"/>
-          </a:lnRef>
-          <a:fillRef idx="3">
-            <a:schemeClr val="accent1"/>
-          </a:fillRef>
-          <a:effectRef idx="2">
-            <a:schemeClr val="accent1"/>
-          </a:effectRef>
-          <a:fontRef idx="minor">
-            <a:schemeClr val="lt1"/>
-          </a:fontRef>
-        </p:style>
-        <p:txBody>
-          <a:bodyPr rtlCol="0" anchor="ctr" wrap="square" lIns="50800" rIns="50800" tIns="50800" bIns="50800"/>
-          <a:lstStyle/>
-          <a:p>
-            <a:pPr algn="ctr">
-              <a:lnSpc>
-                <a:spcPct val="115000"/>
-              </a:lnSpc>
-              <a:spcAft>
-                <a:spcPts val="0"/>
-              </a:spcAft>
-            </a:pPr>
-            <a:r>
-              <a:rPr sz="2400" b="1">
-                <a:solidFill>
-                  <a:srgbClr val="14213D"/>
-                </a:solidFill>
-                <a:latin typeface="Arial"/>
-              </a:rPr>
-              <a:t>28.0%</a:t>
-            </a:r>
-          </a:p>
-          <a:p>
-            <a:pPr algn="ctr">
-              <a:lnSpc>
-                <a:spcPct val="115000"/>
-              </a:lnSpc>
-              <a:spcAft>
-                <a:spcPts val="0"/>
-              </a:spcAft>
-            </a:pPr>
-            <a:r>
-              <a:rPr sz="1300" b="0">
-                <a:solidFill>
-                  <a:srgbClr val="6B7280"/>
-                </a:solidFill>
-                <a:latin typeface="Arial"/>
-              </a:rPr>
-              <a:t>team accuracy</a:t>
-            </a:r>
-          </a:p>
-        </p:txBody>
-      </p:sp>
-      <p:sp>
-        <p:nvSpPr>
-          <p:cNvPr id="14" name="TextBox 13"/>
-          <p:cNvSpPr txBox="1"/>
-          <p:nvPr/>
-        </p:nvSpPr>
-        <p:spPr>
-          <a:xfrm>
-            <a:off x="812800" y="3460750"/>
-            <a:ext cx="2032000" cy="762000"/>
-          </a:xfrm>
-          <a:prstGeom prst="rect">
-            <a:avLst/>
-          </a:prstGeom>
-          <a:noFill/>
-        </p:spPr>
-        <p:txBody>
-          <a:bodyPr wrap="square" lIns="0" rIns="0" tIns="0" bIns="0" anchor="ctr">
-            <a:spAutoFit/>
-          </a:bodyPr>
+          <a:bodyPr rtlCol="0" anchor="ctr" wrap="square" lIns="190500" rIns="190500" tIns="190500" bIns="190500"/>
           <a:lstStyle/>
           <a:p>
             <a:pPr algn="l">
               <a:lnSpc>
-                <a:spcPct val="115000"/>
-              </a:lnSpc>
-              <a:spcAft>
-                <a:spcPts val="0"/>
-              </a:spcAft>
-            </a:pPr>
-            <a:r>
-              <a:rPr sz="2200" b="1">
-                <a:solidFill>
-                  <a:srgbClr val="14213D"/>
-                </a:solidFill>
-                <a:latin typeface="Arial"/>
-              </a:rPr>
-              <a:t>gpt-oss-120b</a:t>
-            </a:r>
-          </a:p>
-        </p:txBody>
-      </p:sp>
-      <p:sp>
-        <p:nvSpPr>
-          <p:cNvPr id="15" name="Rounded Rectangle 14"/>
-          <p:cNvSpPr/>
-          <p:nvPr/>
-        </p:nvSpPr>
-        <p:spPr>
-          <a:xfrm>
-            <a:off x="3048000" y="3460750"/>
-            <a:ext cx="1905000" cy="762000"/>
-          </a:xfrm>
-          <a:prstGeom prst="roundRect">
-            <a:avLst>
-              <a:gd name="adj" fmla="val 10000"/>
-            </a:avLst>
-          </a:prstGeom>
-          <a:solidFill>
-            <a:srgbClr val="E2EAF5"/>
-          </a:solidFill>
-          <a:ln w="12700">
-            <a:solidFill>
-              <a:srgbClr val="DDD8CC"/>
-            </a:solidFill>
-          </a:ln>
-          <a:effectLst/>
-        </p:spPr>
-        <p:style>
-          <a:lnRef idx="1">
-            <a:schemeClr val="accent1"/>
-          </a:lnRef>
-          <a:fillRef idx="3">
-            <a:schemeClr val="accent1"/>
-          </a:fillRef>
-          <a:effectRef idx="2">
-            <a:schemeClr val="accent1"/>
-          </a:effectRef>
-          <a:fontRef idx="minor">
-            <a:schemeClr val="lt1"/>
-          </a:fontRef>
-        </p:style>
-        <p:txBody>
-          <a:bodyPr rtlCol="0" anchor="ctr" wrap="square" lIns="50800" rIns="50800" tIns="50800" bIns="50800"/>
-          <a:lstStyle/>
-          <a:p>
-            <a:pPr algn="ctr">
-              <a:lnSpc>
-                <a:spcPct val="115000"/>
-              </a:lnSpc>
-              <a:spcAft>
-                <a:spcPts val="0"/>
-              </a:spcAft>
-            </a:pPr>
-            <a:r>
-              <a:rPr sz="2400" b="1">
-                <a:solidFill>
-                  <a:srgbClr val="14213D"/>
-                </a:solidFill>
-                <a:latin typeface="Arial"/>
-              </a:rPr>
-              <a:t>97.0%</a:t>
-            </a:r>
-          </a:p>
-          <a:p>
-            <a:pPr algn="ctr">
-              <a:lnSpc>
-                <a:spcPct val="115000"/>
-              </a:lnSpc>
-              <a:spcAft>
-                <a:spcPts val="0"/>
-              </a:spcAft>
-            </a:pPr>
-            <a:r>
-              <a:rPr sz="1300" b="0">
-                <a:solidFill>
-                  <a:srgbClr val="6B7280"/>
-                </a:solidFill>
-                <a:latin typeface="Arial"/>
-              </a:rPr>
-              <a:t>team accuracy</a:t>
-            </a:r>
-          </a:p>
-        </p:txBody>
-      </p:sp>
-      <p:sp>
-        <p:nvSpPr>
-          <p:cNvPr id="16" name="Rounded Rectangle 15"/>
-          <p:cNvSpPr/>
-          <p:nvPr/>
-        </p:nvSpPr>
-        <p:spPr>
-          <a:xfrm>
-            <a:off x="5080000" y="3460750"/>
-            <a:ext cx="1905000" cy="762000"/>
-          </a:xfrm>
-          <a:prstGeom prst="roundRect">
-            <a:avLst>
-              <a:gd name="adj" fmla="val 10000"/>
-            </a:avLst>
-          </a:prstGeom>
-          <a:solidFill>
-            <a:srgbClr val="E2EAF5"/>
-          </a:solidFill>
-          <a:ln w="12700">
-            <a:solidFill>
-              <a:srgbClr val="DDD8CC"/>
-            </a:solidFill>
-          </a:ln>
-          <a:effectLst/>
-        </p:spPr>
-        <p:style>
-          <a:lnRef idx="1">
-            <a:schemeClr val="accent1"/>
-          </a:lnRef>
-          <a:fillRef idx="3">
-            <a:schemeClr val="accent1"/>
-          </a:fillRef>
-          <a:effectRef idx="2">
-            <a:schemeClr val="accent1"/>
-          </a:effectRef>
-          <a:fontRef idx="minor">
-            <a:schemeClr val="lt1"/>
-          </a:fontRef>
-        </p:style>
-        <p:txBody>
-          <a:bodyPr rtlCol="0" anchor="ctr" wrap="square" lIns="50800" rIns="50800" tIns="50800" bIns="50800"/>
-          <a:lstStyle/>
-          <a:p>
-            <a:pPr algn="ctr">
-              <a:lnSpc>
-                <a:spcPct val="115000"/>
-              </a:lnSpc>
-              <a:spcAft>
-                <a:spcPts val="0"/>
-              </a:spcAft>
-            </a:pPr>
-            <a:r>
-              <a:rPr sz="2400" b="1">
-                <a:solidFill>
-                  <a:srgbClr val="14213D"/>
-                </a:solidFill>
-                <a:latin typeface="Arial"/>
-              </a:rPr>
-              <a:t>79.8%</a:t>
-            </a:r>
-          </a:p>
-          <a:p>
-            <a:pPr algn="ctr">
-              <a:lnSpc>
-                <a:spcPct val="115000"/>
-              </a:lnSpc>
-              <a:spcAft>
-                <a:spcPts val="0"/>
-              </a:spcAft>
-            </a:pPr>
-            <a:r>
-              <a:rPr sz="1300" b="0">
-                <a:solidFill>
-                  <a:srgbClr val="6B7280"/>
-                </a:solidFill>
-                <a:latin typeface="Arial"/>
-              </a:rPr>
-              <a:t>team accuracy</a:t>
-            </a:r>
-          </a:p>
-        </p:txBody>
-      </p:sp>
-      <p:sp>
-        <p:nvSpPr>
-          <p:cNvPr id="17" name="Rounded Rectangle 16"/>
-          <p:cNvSpPr/>
-          <p:nvPr/>
-        </p:nvSpPr>
-        <p:spPr>
-          <a:xfrm>
-            <a:off x="7112000" y="3460750"/>
-            <a:ext cx="1905000" cy="762000"/>
-          </a:xfrm>
-          <a:prstGeom prst="roundRect">
-            <a:avLst>
-              <a:gd name="adj" fmla="val 10000"/>
-            </a:avLst>
-          </a:prstGeom>
-          <a:solidFill>
-            <a:srgbClr val="E2EAF5"/>
-          </a:solidFill>
-          <a:ln w="12700">
-            <a:solidFill>
-              <a:srgbClr val="DDD8CC"/>
-            </a:solidFill>
-          </a:ln>
-          <a:effectLst/>
-        </p:spPr>
-        <p:style>
-          <a:lnRef idx="1">
-            <a:schemeClr val="accent1"/>
-          </a:lnRef>
-          <a:fillRef idx="3">
-            <a:schemeClr val="accent1"/>
-          </a:fillRef>
-          <a:effectRef idx="2">
-            <a:schemeClr val="accent1"/>
-          </a:effectRef>
-          <a:fontRef idx="minor">
-            <a:schemeClr val="lt1"/>
-          </a:fontRef>
-        </p:style>
-        <p:txBody>
-          <a:bodyPr rtlCol="0" anchor="ctr" wrap="square" lIns="50800" rIns="50800" tIns="50800" bIns="50800"/>
-          <a:lstStyle/>
-          <a:p>
-            <a:pPr algn="ctr">
-              <a:lnSpc>
-                <a:spcPct val="115000"/>
-              </a:lnSpc>
-              <a:spcAft>
-                <a:spcPts val="0"/>
-              </a:spcAft>
-            </a:pPr>
-            <a:r>
-              <a:rPr sz="2400" b="1">
-                <a:solidFill>
-                  <a:srgbClr val="14213D"/>
-                </a:solidFill>
-                <a:latin typeface="Arial"/>
-              </a:rPr>
-              <a:t>71.1%</a:t>
-            </a:r>
-          </a:p>
-          <a:p>
-            <a:pPr algn="ctr">
-              <a:lnSpc>
-                <a:spcPct val="115000"/>
-              </a:lnSpc>
-              <a:spcAft>
-                <a:spcPts val="0"/>
-              </a:spcAft>
-            </a:pPr>
-            <a:r>
-              <a:rPr sz="1300" b="0">
-                <a:solidFill>
-                  <a:srgbClr val="6B7280"/>
-                </a:solidFill>
-                <a:latin typeface="Arial"/>
-              </a:rPr>
-              <a:t>team accuracy</a:t>
-            </a:r>
-          </a:p>
-        </p:txBody>
-      </p:sp>
-      <p:sp>
-        <p:nvSpPr>
-          <p:cNvPr id="18" name="Rounded Rectangle 17"/>
-          <p:cNvSpPr/>
-          <p:nvPr/>
-        </p:nvSpPr>
-        <p:spPr>
-          <a:xfrm>
-            <a:off x="9144000" y="3460750"/>
-            <a:ext cx="1905000" cy="762000"/>
-          </a:xfrm>
-          <a:prstGeom prst="roundRect">
-            <a:avLst>
-              <a:gd name="adj" fmla="val 10000"/>
-            </a:avLst>
-          </a:prstGeom>
-          <a:solidFill>
-            <a:srgbClr val="E2EAF5"/>
-          </a:solidFill>
-          <a:ln w="12700">
-            <a:solidFill>
-              <a:srgbClr val="DDD8CC"/>
-            </a:solidFill>
-          </a:ln>
-          <a:effectLst/>
-        </p:spPr>
-        <p:style>
-          <a:lnRef idx="1">
-            <a:schemeClr val="accent1"/>
-          </a:lnRef>
-          <a:fillRef idx="3">
-            <a:schemeClr val="accent1"/>
-          </a:fillRef>
-          <a:effectRef idx="2">
-            <a:schemeClr val="accent1"/>
-          </a:effectRef>
-          <a:fontRef idx="minor">
-            <a:schemeClr val="lt1"/>
-          </a:fontRef>
-        </p:style>
-        <p:txBody>
-          <a:bodyPr rtlCol="0" anchor="ctr" wrap="square" lIns="50800" rIns="50800" tIns="50800" bIns="50800"/>
-          <a:lstStyle/>
-          <a:p>
-            <a:pPr algn="ctr">
-              <a:lnSpc>
-                <a:spcPct val="115000"/>
-              </a:lnSpc>
-              <a:spcAft>
-                <a:spcPts val="0"/>
-              </a:spcAft>
-            </a:pPr>
-            <a:r>
-              <a:rPr sz="2400" b="1">
-                <a:solidFill>
-                  <a:srgbClr val="14213D"/>
-                </a:solidFill>
-                <a:latin typeface="Arial"/>
-              </a:rPr>
-              <a:t>45.1%</a:t>
-            </a:r>
-          </a:p>
-          <a:p>
-            <a:pPr algn="ctr">
-              <a:lnSpc>
-                <a:spcPct val="115000"/>
-              </a:lnSpc>
-              <a:spcAft>
-                <a:spcPts val="0"/>
-              </a:spcAft>
-            </a:pPr>
-            <a:r>
-              <a:rPr sz="1300" b="0">
-                <a:solidFill>
-                  <a:srgbClr val="6B7280"/>
-                </a:solidFill>
-                <a:latin typeface="Arial"/>
-              </a:rPr>
-              <a:t>team accuracy</a:t>
-            </a:r>
-          </a:p>
-        </p:txBody>
-      </p:sp>
-      <p:sp>
-        <p:nvSpPr>
-          <p:cNvPr id="19" name="TextBox 18"/>
-          <p:cNvSpPr txBox="1"/>
-          <p:nvPr/>
-        </p:nvSpPr>
-        <p:spPr>
-          <a:xfrm>
-            <a:off x="812800" y="4413250"/>
-            <a:ext cx="2032000" cy="762000"/>
-          </a:xfrm>
-          <a:prstGeom prst="rect">
-            <a:avLst/>
-          </a:prstGeom>
-          <a:noFill/>
-        </p:spPr>
-        <p:txBody>
-          <a:bodyPr wrap="square" lIns="0" rIns="0" tIns="0" bIns="0" anchor="ctr">
-            <a:spAutoFit/>
-          </a:bodyPr>
-          <a:lstStyle/>
+                <a:spcPct val="100000"/>
+              </a:lnSpc>
+              <a:spcAft>
+                <a:spcPts val="600"/>
+              </a:spcAft>
+            </a:pPr>
+            <a:r>
+              <a:rPr sz="3600" b="1">
+                <a:solidFill>
+                  <a:srgbClr val="2F6B34"/>
+                </a:solidFill>
+                <a:latin typeface="Georgia"/>
+              </a:rPr>
+              <a:t>≤ 2%</a:t>
+            </a:r>
+          </a:p>
           <a:p>
             <a:pPr algn="l">
               <a:lnSpc>
@@ -8633,425 +8932,13 @@
               </a:spcAft>
             </a:pPr>
             <a:r>
-              <a:rPr sz="2200" b="1">
-                <a:solidFill>
-                  <a:srgbClr val="14213D"/>
-                </a:solidFill>
-                <a:latin typeface="Arial"/>
-              </a:rPr>
-              <a:t>Gemma-4-26B</a:t>
-            </a:r>
-          </a:p>
-        </p:txBody>
-      </p:sp>
-      <p:sp>
-        <p:nvSpPr>
-          <p:cNvPr id="20" name="Rounded Rectangle 19"/>
-          <p:cNvSpPr/>
-          <p:nvPr/>
-        </p:nvSpPr>
-        <p:spPr>
-          <a:xfrm>
-            <a:off x="3048000" y="4413250"/>
-            <a:ext cx="1905000" cy="762000"/>
-          </a:xfrm>
-          <a:prstGeom prst="roundRect">
-            <a:avLst>
-              <a:gd name="adj" fmla="val 10000"/>
-            </a:avLst>
-          </a:prstGeom>
-          <a:solidFill>
-            <a:srgbClr val="F8E8DC"/>
-          </a:solidFill>
-          <a:ln w="12700">
-            <a:solidFill>
-              <a:srgbClr val="DDD8CC"/>
-            </a:solidFill>
-          </a:ln>
-          <a:effectLst/>
-        </p:spPr>
-        <p:style>
-          <a:lnRef idx="1">
-            <a:schemeClr val="accent1"/>
-          </a:lnRef>
-          <a:fillRef idx="3">
-            <a:schemeClr val="accent1"/>
-          </a:fillRef>
-          <a:effectRef idx="2">
-            <a:schemeClr val="accent1"/>
-          </a:effectRef>
-          <a:fontRef idx="minor">
-            <a:schemeClr val="lt1"/>
-          </a:fontRef>
-        </p:style>
-        <p:txBody>
-          <a:bodyPr rtlCol="0" anchor="ctr" wrap="square" lIns="50800" rIns="50800" tIns="50800" bIns="50800"/>
-          <a:lstStyle/>
-          <a:p>
-            <a:pPr algn="ctr">
-              <a:lnSpc>
-                <a:spcPct val="115000"/>
-              </a:lnSpc>
-              <a:spcAft>
-                <a:spcPts val="0"/>
-              </a:spcAft>
-            </a:pPr>
-            <a:r>
-              <a:rPr sz="2400" b="1">
-                <a:solidFill>
-                  <a:srgbClr val="14213D"/>
-                </a:solidFill>
-                <a:latin typeface="Arial"/>
-              </a:rPr>
-              <a:t>99.8%</a:t>
-            </a:r>
-          </a:p>
-          <a:p>
-            <a:pPr algn="ctr">
-              <a:lnSpc>
-                <a:spcPct val="115000"/>
-              </a:lnSpc>
-              <a:spcAft>
-                <a:spcPts val="0"/>
-              </a:spcAft>
-            </a:pPr>
-            <a:r>
-              <a:rPr sz="1300" b="0">
-                <a:solidFill>
-                  <a:srgbClr val="6B7280"/>
-                </a:solidFill>
-                <a:latin typeface="Arial"/>
-              </a:rPr>
-              <a:t>team accuracy</a:t>
-            </a:r>
-          </a:p>
-        </p:txBody>
-      </p:sp>
-      <p:sp>
-        <p:nvSpPr>
-          <p:cNvPr id="21" name="Rounded Rectangle 20"/>
-          <p:cNvSpPr/>
-          <p:nvPr/>
-        </p:nvSpPr>
-        <p:spPr>
-          <a:xfrm>
-            <a:off x="5080000" y="4413250"/>
-            <a:ext cx="1905000" cy="762000"/>
-          </a:xfrm>
-          <a:prstGeom prst="roundRect">
-            <a:avLst>
-              <a:gd name="adj" fmla="val 10000"/>
-            </a:avLst>
-          </a:prstGeom>
-          <a:solidFill>
-            <a:srgbClr val="F8E8DC"/>
-          </a:solidFill>
-          <a:ln w="12700">
-            <a:solidFill>
-              <a:srgbClr val="DDD8CC"/>
-            </a:solidFill>
-          </a:ln>
-          <a:effectLst/>
-        </p:spPr>
-        <p:style>
-          <a:lnRef idx="1">
-            <a:schemeClr val="accent1"/>
-          </a:lnRef>
-          <a:fillRef idx="3">
-            <a:schemeClr val="accent1"/>
-          </a:fillRef>
-          <a:effectRef idx="2">
-            <a:schemeClr val="accent1"/>
-          </a:effectRef>
-          <a:fontRef idx="minor">
-            <a:schemeClr val="lt1"/>
-          </a:fontRef>
-        </p:style>
-        <p:txBody>
-          <a:bodyPr rtlCol="0" anchor="ctr" wrap="square" lIns="50800" rIns="50800" tIns="50800" bIns="50800"/>
-          <a:lstStyle/>
-          <a:p>
-            <a:pPr algn="ctr">
-              <a:lnSpc>
-                <a:spcPct val="115000"/>
-              </a:lnSpc>
-              <a:spcAft>
-                <a:spcPts val="0"/>
-              </a:spcAft>
-            </a:pPr>
-            <a:r>
-              <a:rPr sz="2400" b="1">
-                <a:solidFill>
-                  <a:srgbClr val="14213D"/>
-                </a:solidFill>
-                <a:latin typeface="Arial"/>
-              </a:rPr>
-              <a:t>67.9%</a:t>
-            </a:r>
-          </a:p>
-          <a:p>
-            <a:pPr algn="ctr">
-              <a:lnSpc>
-                <a:spcPct val="115000"/>
-              </a:lnSpc>
-              <a:spcAft>
-                <a:spcPts val="0"/>
-              </a:spcAft>
-            </a:pPr>
-            <a:r>
-              <a:rPr sz="1300" b="0">
-                <a:solidFill>
-                  <a:srgbClr val="6B7280"/>
-                </a:solidFill>
-                <a:latin typeface="Arial"/>
-              </a:rPr>
-              <a:t>team accuracy</a:t>
-            </a:r>
-          </a:p>
-        </p:txBody>
-      </p:sp>
-      <p:sp>
-        <p:nvSpPr>
-          <p:cNvPr id="22" name="Rounded Rectangle 21"/>
-          <p:cNvSpPr/>
-          <p:nvPr/>
-        </p:nvSpPr>
-        <p:spPr>
-          <a:xfrm>
-            <a:off x="7112000" y="4413250"/>
-            <a:ext cx="1905000" cy="762000"/>
-          </a:xfrm>
-          <a:prstGeom prst="roundRect">
-            <a:avLst>
-              <a:gd name="adj" fmla="val 10000"/>
-            </a:avLst>
-          </a:prstGeom>
-          <a:solidFill>
-            <a:srgbClr val="F8E8DC"/>
-          </a:solidFill>
-          <a:ln w="12700">
-            <a:solidFill>
-              <a:srgbClr val="DDD8CC"/>
-            </a:solidFill>
-          </a:ln>
-          <a:effectLst/>
-        </p:spPr>
-        <p:style>
-          <a:lnRef idx="1">
-            <a:schemeClr val="accent1"/>
-          </a:lnRef>
-          <a:fillRef idx="3">
-            <a:schemeClr val="accent1"/>
-          </a:fillRef>
-          <a:effectRef idx="2">
-            <a:schemeClr val="accent1"/>
-          </a:effectRef>
-          <a:fontRef idx="minor">
-            <a:schemeClr val="lt1"/>
-          </a:fontRef>
-        </p:style>
-        <p:txBody>
-          <a:bodyPr rtlCol="0" anchor="ctr" wrap="square" lIns="50800" rIns="50800" tIns="50800" bIns="50800"/>
-          <a:lstStyle/>
-          <a:p>
-            <a:pPr algn="ctr">
-              <a:lnSpc>
-                <a:spcPct val="115000"/>
-              </a:lnSpc>
-              <a:spcAft>
-                <a:spcPts val="0"/>
-              </a:spcAft>
-            </a:pPr>
-            <a:r>
-              <a:rPr sz="2400" b="1">
-                <a:solidFill>
-                  <a:srgbClr val="14213D"/>
-                </a:solidFill>
-                <a:latin typeface="Arial"/>
-              </a:rPr>
-              <a:t>65.3%</a:t>
-            </a:r>
-          </a:p>
-          <a:p>
-            <a:pPr algn="ctr">
-              <a:lnSpc>
-                <a:spcPct val="115000"/>
-              </a:lnSpc>
-              <a:spcAft>
-                <a:spcPts val="0"/>
-              </a:spcAft>
-            </a:pPr>
-            <a:r>
-              <a:rPr sz="1300" b="0">
-                <a:solidFill>
-                  <a:srgbClr val="6B7280"/>
-                </a:solidFill>
-                <a:latin typeface="Arial"/>
-              </a:rPr>
-              <a:t>team accuracy</a:t>
-            </a:r>
-          </a:p>
-        </p:txBody>
-      </p:sp>
-      <p:sp>
-        <p:nvSpPr>
-          <p:cNvPr id="23" name="Rounded Rectangle 22"/>
-          <p:cNvSpPr/>
-          <p:nvPr/>
-        </p:nvSpPr>
-        <p:spPr>
-          <a:xfrm>
-            <a:off x="9144000" y="4413250"/>
-            <a:ext cx="1905000" cy="762000"/>
-          </a:xfrm>
-          <a:prstGeom prst="roundRect">
-            <a:avLst>
-              <a:gd name="adj" fmla="val 10000"/>
-            </a:avLst>
-          </a:prstGeom>
-          <a:solidFill>
-            <a:srgbClr val="F8E8DC"/>
-          </a:solidFill>
-          <a:ln w="12700">
-            <a:solidFill>
-              <a:srgbClr val="DDD8CC"/>
-            </a:solidFill>
-          </a:ln>
-          <a:effectLst/>
-        </p:spPr>
-        <p:style>
-          <a:lnRef idx="1">
-            <a:schemeClr val="accent1"/>
-          </a:lnRef>
-          <a:fillRef idx="3">
-            <a:schemeClr val="accent1"/>
-          </a:fillRef>
-          <a:effectRef idx="2">
-            <a:schemeClr val="accent1"/>
-          </a:effectRef>
-          <a:fontRef idx="minor">
-            <a:schemeClr val="lt1"/>
-          </a:fontRef>
-        </p:style>
-        <p:txBody>
-          <a:bodyPr rtlCol="0" anchor="ctr" wrap="square" lIns="50800" rIns="50800" tIns="50800" bIns="50800"/>
-          <a:lstStyle/>
-          <a:p>
-            <a:pPr algn="ctr">
-              <a:lnSpc>
-                <a:spcPct val="115000"/>
-              </a:lnSpc>
-              <a:spcAft>
-                <a:spcPts val="0"/>
-              </a:spcAft>
-            </a:pPr>
-            <a:r>
-              <a:rPr sz="2400" b="1">
-                <a:solidFill>
-                  <a:srgbClr val="14213D"/>
-                </a:solidFill>
-                <a:latin typeface="Arial"/>
-              </a:rPr>
-              <a:t>36.4%</a:t>
-            </a:r>
-          </a:p>
-          <a:p>
-            <a:pPr algn="ctr">
-              <a:lnSpc>
-                <a:spcPct val="115000"/>
-              </a:lnSpc>
-              <a:spcAft>
-                <a:spcPts val="0"/>
-              </a:spcAft>
-            </a:pPr>
-            <a:r>
-              <a:rPr sz="1300" b="0">
-                <a:solidFill>
-                  <a:srgbClr val="6B7280"/>
-                </a:solidFill>
-                <a:latin typeface="Arial"/>
-              </a:rPr>
-              <a:t>team accuracy</a:t>
-            </a:r>
-          </a:p>
-        </p:txBody>
-      </p:sp>
-      <p:sp>
-        <p:nvSpPr>
-          <p:cNvPr id="24" name="Rounded Rectangle 23"/>
-          <p:cNvSpPr/>
-          <p:nvPr/>
-        </p:nvSpPr>
-        <p:spPr>
-          <a:xfrm>
-            <a:off x="812800" y="5524500"/>
-            <a:ext cx="10566400" cy="635000"/>
-          </a:xfrm>
-          <a:prstGeom prst="roundRect">
-            <a:avLst>
-              <a:gd name="adj" fmla="val 10000"/>
-            </a:avLst>
-          </a:prstGeom>
-          <a:solidFill>
-            <a:srgbClr val="14213D"/>
-          </a:solidFill>
-          <a:ln>
-            <a:noFill/>
-          </a:ln>
-          <a:effectLst/>
-        </p:spPr>
-        <p:style>
-          <a:lnRef idx="1">
-            <a:schemeClr val="accent1"/>
-          </a:lnRef>
-          <a:fillRef idx="3">
-            <a:schemeClr val="accent1"/>
-          </a:fillRef>
-          <a:effectRef idx="2">
-            <a:schemeClr val="accent1"/>
-          </a:effectRef>
-          <a:fontRef idx="minor">
-            <a:schemeClr val="lt1"/>
-          </a:fontRef>
-        </p:style>
-        <p:txBody>
-          <a:bodyPr rtlCol="0" anchor="ctr" wrap="square" lIns="203200" rIns="203200" tIns="203200" bIns="203200"/>
-          <a:lstStyle/>
-          <a:p>
-            <a:pPr algn="ctr">
-              <a:lnSpc>
-                <a:spcPct val="115000"/>
-              </a:lnSpc>
-              <a:spcAft>
-                <a:spcPts val="0"/>
-              </a:spcAft>
-            </a:pPr>
-            <a:r>
-              <a:rPr sz="1800" b="0">
-                <a:solidFill>
-                  <a:srgbClr val="F7F6F2"/>
-                </a:solidFill>
-                <a:latin typeface="Arial"/>
-              </a:rPr>
-              <a:t>Record every task once, then replay </a:t>
-            </a:r>
-            <a:r>
-              <a:rPr sz="1800" b="1">
-                <a:solidFill>
-                  <a:srgbClr val="F0A66B"/>
-                </a:solidFill>
-                <a:latin typeface="Arial"/>
-              </a:rPr>
-              <a:t>200 random splits</a:t>
-            </a:r>
-            <a:r>
-              <a:rPr sz="1800" b="0">
-                <a:solidFill>
-                  <a:srgbClr val="F7F6F2"/>
-                </a:solidFill>
-                <a:latin typeface="Arial"/>
-              </a:rPr>
-              <a:t>: half to calibrate CLIMB, half to test it.</a:t>
+              <a:rPr sz="1700" b="0">
+                <a:solidFill>
+                  <a:srgbClr val="3A4150"/>
+                </a:solidFill>
+                <a:latin typeface="Arial"/>
+              </a:rPr>
+              <a:t>of splits broke the promise. Allowed: 10%.</a:t>
             </a:r>
           </a:p>
         </p:txBody>
@@ -9203,14 +9090,14 @@
                 </a:solidFill>
                 <a:latin typeface="Georgia"/>
               </a:rPr>
-              <a:t>The promise holds on every setting</a:t>
+              <a:t>How much it saves</a:t>
             </a:r>
           </a:p>
         </p:txBody>
       </p:sp>
       <p:pic>
         <p:nvPicPr>
-          <p:cNvPr id="5" name="Picture 4" descr="c_viol.png"/>
+          <p:cNvPr id="5" name="Picture 4" descr="c_savings.png"/>
           <p:cNvPicPr>
             <a:picLocks noChangeAspect="1"/>
           </p:cNvPicPr>
@@ -9224,8 +9111,8 @@
         </p:blipFill>
         <p:spPr>
           <a:xfrm>
-            <a:off x="812800" y="1999442"/>
-            <a:ext cx="7302500" cy="3748115"/>
+            <a:off x="812800" y="1997499"/>
+            <a:ext cx="7302500" cy="3752001"/>
           </a:xfrm>
           <a:prstGeom prst="rect">
             <a:avLst/>
@@ -9240,16 +9127,16 @@
         </p:nvSpPr>
         <p:spPr>
           <a:xfrm>
-            <a:off x="8445500" y="2286000"/>
-            <a:ext cx="2933700" cy="1905000"/>
+            <a:off x="8445500" y="2095500"/>
+            <a:ext cx="2933700" cy="1651000"/>
           </a:xfrm>
           <a:prstGeom prst="roundRect">
             <a:avLst>
-              <a:gd name="adj" fmla="val 6000"/>
+              <a:gd name="adj" fmla="val 6923"/>
             </a:avLst>
           </a:prstGeom>
           <a:solidFill>
-            <a:srgbClr val="E3ECE2"/>
+            <a:srgbClr val="E2EAF5"/>
           </a:solidFill>
           <a:ln w="12700">
             <a:solidFill>
@@ -9287,11 +9174,11 @@
             <a:r>
               <a:rPr sz="3600" b="1">
                 <a:solidFill>
-                  <a:srgbClr val="2F6B34"/>
+                  <a:srgbClr val="2E5C99"/>
                 </a:solidFill>
                 <a:latin typeface="Georgia"/>
               </a:rPr>
-              <a:t>≤ 2%</a:t>
+              <a:t>38% saved</a:t>
             </a:r>
           </a:p>
           <a:p>
@@ -9310,7 +9197,90 @@
                 </a:solidFill>
                 <a:latin typeface="Arial"/>
               </a:rPr>
-              <a:t>of splits broke the promise. Allowed: 10%.</a:t>
+              <a:t>allowing 5 points of loss</a:t>
+            </a:r>
+          </a:p>
+        </p:txBody>
+      </p:sp>
+      <p:sp>
+        <p:nvSpPr>
+          <p:cNvPr id="7" name="Rounded Rectangle 6"/>
+          <p:cNvSpPr/>
+          <p:nvPr/>
+        </p:nvSpPr>
+        <p:spPr>
+          <a:xfrm>
+            <a:off x="8445500" y="4000500"/>
+            <a:ext cx="2933700" cy="1651000"/>
+          </a:xfrm>
+          <a:prstGeom prst="roundRect">
+            <a:avLst>
+              <a:gd name="adj" fmla="val 6923"/>
+            </a:avLst>
+          </a:prstGeom>
+          <a:solidFill>
+            <a:srgbClr val="E2EAF5"/>
+          </a:solidFill>
+          <a:ln w="12700">
+            <a:solidFill>
+              <a:srgbClr val="DDD8CC"/>
+            </a:solidFill>
+          </a:ln>
+          <a:effectLst/>
+        </p:spPr>
+        <p:style>
+          <a:lnRef idx="1">
+            <a:schemeClr val="accent1"/>
+          </a:lnRef>
+          <a:fillRef idx="3">
+            <a:schemeClr val="accent1"/>
+          </a:fillRef>
+          <a:effectRef idx="2">
+            <a:schemeClr val="accent1"/>
+          </a:effectRef>
+          <a:fontRef idx="minor">
+            <a:schemeClr val="lt1"/>
+          </a:fontRef>
+        </p:style>
+        <p:txBody>
+          <a:bodyPr rtlCol="0" anchor="ctr" wrap="square" lIns="190500" rIns="190500" tIns="190500" bIns="190500"/>
+          <a:lstStyle/>
+          <a:p>
+            <a:pPr algn="l">
+              <a:lnSpc>
+                <a:spcPct val="100000"/>
+              </a:lnSpc>
+              <a:spcAft>
+                <a:spcPts val="600"/>
+              </a:spcAft>
+            </a:pPr>
+            <a:r>
+              <a:rPr sz="3600" b="1">
+                <a:solidFill>
+                  <a:srgbClr val="2E5C99"/>
+                </a:solidFill>
+                <a:latin typeface="Georgia"/>
+              </a:rPr>
+              <a:t>65% saved</a:t>
+            </a:r>
+          </a:p>
+          <a:p>
+            <a:pPr algn="l">
+              <a:lnSpc>
+                <a:spcPct val="115000"/>
+              </a:lnSpc>
+              <a:spcAft>
+                <a:spcPts val="0"/>
+              </a:spcAft>
+            </a:pPr>
+            <a:r>
+              <a:rPr sz="1700" b="0">
+                <a:solidFill>
+                  <a:srgbClr val="3A4150"/>
+                </a:solidFill>
+                <a:latin typeface="Arial"/>
+              </a:rPr>
+              <a:t>allowing 10 points of loss</a:t>
             </a:r>
           </a:p>
         </p:txBody>
@@ -9462,14 +9432,14 @@
                 </a:solidFill>
                 <a:latin typeface="Georgia"/>
               </a:rPr>
-              <a:t>How much it saves</a:t>
+              <a:t>Without the test, the promise breaks</a:t>
             </a:r>
           </a:p>
         </p:txBody>
       </p:sp>
       <p:pic>
         <p:nvPicPr>
-          <p:cNvPr id="5" name="Picture 4" descr="c_savings.png"/>
+          <p:cNvPr id="5" name="Picture 4" descr="c_tuned.png"/>
           <p:cNvPicPr>
             <a:picLocks noChangeAspect="1"/>
           </p:cNvPicPr>
@@ -9483,8 +9453,8 @@
         </p:blipFill>
         <p:spPr>
           <a:xfrm>
-            <a:off x="812800" y="1997499"/>
-            <a:ext cx="7302500" cy="3752001"/>
+            <a:off x="812800" y="1721371"/>
+            <a:ext cx="7302500" cy="4304257"/>
           </a:xfrm>
           <a:prstGeom prst="rect">
             <a:avLst/>
@@ -9499,16 +9469,16 @@
         </p:nvSpPr>
         <p:spPr>
           <a:xfrm>
-            <a:off x="8445500" y="2095500"/>
-            <a:ext cx="2933700" cy="1651000"/>
+            <a:off x="8445500" y="2286000"/>
+            <a:ext cx="2933700" cy="1905000"/>
           </a:xfrm>
           <a:prstGeom prst="roundRect">
             <a:avLst>
-              <a:gd name="adj" fmla="val 6923"/>
+              <a:gd name="adj" fmla="val 6000"/>
             </a:avLst>
           </a:prstGeom>
           <a:solidFill>
-            <a:srgbClr val="E2EAF5"/>
+            <a:srgbClr val="F6E3E0"/>
           </a:solidFill>
           <a:ln w="12700">
             <a:solidFill>
@@ -9546,11 +9516,11 @@
             <a:r>
               <a:rPr sz="3600" b="1">
                 <a:solidFill>
-                  <a:srgbClr val="2E5C99"/>
+                  <a:srgbClr val="B03A2E"/>
                 </a:solidFill>
                 <a:latin typeface="Georgia"/>
               </a:rPr>
-              <a:t>38% saved</a:t>
+              <a:t>31%</a:t>
             </a:r>
           </a:p>
           <a:p>
@@ -9569,90 +9539,7 @@
                 </a:solidFill>
                 <a:latin typeface="Arial"/>
               </a:rPr>
-              <a:t>allowing 5 points of loss</a:t>
-            </a:r>
-          </a:p>
-        </p:txBody>
-      </p:sp>
-      <p:sp>
-        <p:nvSpPr>
-          <p:cNvPr id="7" name="Rounded Rectangle 6"/>
-          <p:cNvSpPr/>
-          <p:nvPr/>
-        </p:nvSpPr>
-        <p:spPr>
-          <a:xfrm>
-            <a:off x="8445500" y="4000500"/>
-            <a:ext cx="2933700" cy="1651000"/>
-          </a:xfrm>
-          <a:prstGeom prst="roundRect">
-            <a:avLst>
-              <a:gd name="adj" fmla="val 6923"/>
-            </a:avLst>
-          </a:prstGeom>
-          <a:solidFill>
-            <a:srgbClr val="E2EAF5"/>
-          </a:solidFill>
-          <a:ln w="12700">
-            <a:solidFill>
-              <a:srgbClr val="DDD8CC"/>
-            </a:solidFill>
-          </a:ln>
-          <a:effectLst/>
-        </p:spPr>
-        <p:style>
-          <a:lnRef idx="1">
-            <a:schemeClr val="accent1"/>
-          </a:lnRef>
-          <a:fillRef idx="3">
-            <a:schemeClr val="accent1"/>
-          </a:fillRef>
-          <a:effectRef idx="2">
-            <a:schemeClr val="accent1"/>
-          </a:effectRef>
-          <a:fontRef idx="minor">
-            <a:schemeClr val="lt1"/>
-          </a:fontRef>
-        </p:style>
-        <p:txBody>
-          <a:bodyPr rtlCol="0" anchor="ctr" wrap="square" lIns="190500" rIns="190500" tIns="190500" bIns="190500"/>
-          <a:lstStyle/>
-          <a:p>
-            <a:pPr algn="l">
-              <a:lnSpc>
-                <a:spcPct val="100000"/>
-              </a:lnSpc>
-              <a:spcAft>
-                <a:spcPts val="600"/>
-              </a:spcAft>
-            </a:pPr>
-            <a:r>
-              <a:rPr sz="3600" b="1">
-                <a:solidFill>
-                  <a:srgbClr val="2E5C99"/>
-                </a:solidFill>
-                <a:latin typeface="Georgia"/>
-              </a:rPr>
-              <a:t>65% saved</a:t>
-            </a:r>
-          </a:p>
-          <a:p>
-            <a:pPr algn="l">
-              <a:lnSpc>
-                <a:spcPct val="115000"/>
-              </a:lnSpc>
-              <a:spcAft>
-                <a:spcPts val="0"/>
-              </a:spcAft>
-            </a:pPr>
-            <a:r>
-              <a:rPr sz="1700" b="0">
-                <a:solidFill>
-                  <a:srgbClr val="3A4150"/>
-                </a:solidFill>
-                <a:latin typeface="Arial"/>
-              </a:rPr>
-              <a:t>allowing 10 points of loss</a:t>
+              <a:t>of splits broken at ε = 5 by the tuned rule. CLIMB: 0.6%.</a:t>
             </a:r>
           </a:p>
         </p:txBody>
@@ -9671,7 +9558,7 @@
     <p:bg>
       <p:bgPr>
         <a:solidFill>
-          <a:srgbClr val="F7F6F2"/>
+          <a:srgbClr val="14213D"/>
         </a:solidFill>
         <a:effectLst/>
       </p:bgPr>
@@ -9716,7 +9603,7 @@
             <a:r>
               <a:rPr sz="1200" b="0">
                 <a:solidFill>
-                  <a:srgbClr val="6B7280"/>
+                  <a:srgbClr val="8B97AE"/>
                 </a:solidFill>
                 <a:latin typeface="Arial"/>
               </a:rPr>
@@ -9758,11 +9645,11 @@
             <a:r>
               <a:rPr sz="1300" b="1">
                 <a:solidFill>
-                  <a:srgbClr val="B4541A"/>
-                </a:solidFill>
-                <a:latin typeface="Arial"/>
-              </a:rPr>
-              <a:t>RESULTS</a:t>
+                  <a:srgbClr val="F0A66B"/>
+                </a:solidFill>
+                <a:latin typeface="Arial"/>
+              </a:rPr>
+              <a:t>TAKEAWAYS</a:t>
             </a:r>
           </a:p>
         </p:txBody>
@@ -9798,64 +9685,36 @@
               </a:spcAft>
             </a:pPr>
             <a:r>
-              <a:rPr sz="3000" b="1">
-                <a:solidFill>
-                  <a:srgbClr val="14213D"/>
+              <a:rPr sz="3600" b="1">
+                <a:solidFill>
+                  <a:srgbClr val="F7F6F2"/>
                 </a:solidFill>
                 <a:latin typeface="Georgia"/>
               </a:rPr>
-              <a:t>Without the test, the promise breaks</a:t>
-            </a:r>
-          </a:p>
-        </p:txBody>
-      </p:sp>
-      <p:pic>
-        <p:nvPicPr>
-          <p:cNvPr id="5" name="Picture 4" descr="c_tuned.png"/>
-          <p:cNvPicPr>
-            <a:picLocks noChangeAspect="1"/>
-          </p:cNvPicPr>
-          <p:nvPr/>
-        </p:nvPicPr>
-        <p:blipFill>
-          <a:blip r:embed="rId3"/>
-          <a:stretch>
-            <a:fillRect/>
-          </a:stretch>
-        </p:blipFill>
-        <p:spPr>
-          <a:xfrm>
-            <a:off x="812800" y="1721371"/>
-            <a:ext cx="7302500" cy="4304257"/>
+              <a:t>Call the team only when you must</a:t>
+            </a:r>
+          </a:p>
+        </p:txBody>
+      </p:sp>
+      <p:sp>
+        <p:nvSpPr>
+          <p:cNvPr id="5" name="Rectangle 4"/>
+          <p:cNvSpPr/>
+          <p:nvPr/>
+        </p:nvSpPr>
+        <p:spPr>
+          <a:xfrm>
+            <a:off x="812800" y="2095500"/>
+            <a:ext cx="3384550" cy="38100"/>
           </a:xfrm>
           <a:prstGeom prst="rect">
             <a:avLst/>
           </a:prstGeom>
-        </p:spPr>
-      </p:pic>
-      <p:sp>
-        <p:nvSpPr>
-          <p:cNvPr id="6" name="Rounded Rectangle 5"/>
-          <p:cNvSpPr/>
-          <p:nvPr/>
-        </p:nvSpPr>
-        <p:spPr>
-          <a:xfrm>
-            <a:off x="8445500" y="2286000"/>
-            <a:ext cx="2933700" cy="1905000"/>
-          </a:xfrm>
-          <a:prstGeom prst="roundRect">
-            <a:avLst>
-              <a:gd name="adj" fmla="val 6000"/>
-            </a:avLst>
-          </a:prstGeom>
           <a:solidFill>
-            <a:srgbClr val="F6E3E0"/>
+            <a:srgbClr val="F0A66B"/>
           </a:solidFill>
-          <a:ln w="12700">
-            <a:solidFill>
-              <a:srgbClr val="DDD8CC"/>
-            </a:solidFill>
+          <a:ln>
+            <a:noFill/>
           </a:ln>
           <a:effectLst/>
         </p:spPr>
@@ -9874,44 +9733,364 @@
           </a:fontRef>
         </p:style>
         <p:txBody>
-          <a:bodyPr rtlCol="0" anchor="ctr" wrap="square" lIns="190500" rIns="190500" tIns="190500" bIns="190500"/>
+          <a:bodyPr rtlCol="0" anchor="ctr"/>
+          <a:lstStyle/>
+          <a:p>
+            <a:pPr algn="ctr"/>
+          </a:p>
+        </p:txBody>
+      </p:sp>
+      <p:sp>
+        <p:nvSpPr>
+          <p:cNvPr id="6" name="TextBox 5"/>
+          <p:cNvSpPr txBox="1"/>
+          <p:nvPr/>
+        </p:nvSpPr>
+        <p:spPr>
+          <a:xfrm>
+            <a:off x="812800" y="2286000"/>
+            <a:ext cx="3384550" cy="1651000"/>
+          </a:xfrm>
+          <a:prstGeom prst="rect">
+            <a:avLst/>
+          </a:prstGeom>
+          <a:noFill/>
+        </p:spPr>
+        <p:txBody>
+          <a:bodyPr wrap="square" lIns="0" rIns="0" tIns="0" bIns="0" anchor="t">
+            <a:spAutoFit/>
+          </a:bodyPr>
           <a:lstStyle/>
           <a:p>
             <a:pPr algn="l">
               <a:lnSpc>
-                <a:spcPct val="100000"/>
-              </a:lnSpc>
-              <a:spcAft>
-                <a:spcPts val="600"/>
+                <a:spcPct val="115000"/>
+              </a:lnSpc>
+              <a:spcAft>
+                <a:spcPts val="1000"/>
+              </a:spcAft>
+            </a:pPr>
+            <a:r>
+              <a:rPr sz="2800" b="1">
+                <a:solidFill>
+                  <a:srgbClr val="F7F6F2"/>
+                </a:solidFill>
+                <a:latin typeface="Georgia"/>
+              </a:rPr>
+              <a:t>Teams are costly</a:t>
+            </a:r>
+          </a:p>
+          <a:p>
+            <a:pPr algn="l">
+              <a:lnSpc>
+                <a:spcPct val="115000"/>
+              </a:lnSpc>
+              <a:spcAft>
+                <a:spcPts val="0"/>
+              </a:spcAft>
+            </a:pPr>
+            <a:r>
+              <a:rPr sz="2000" b="0">
+                <a:solidFill>
+                  <a:srgbClr val="C9D1E0"/>
+                </a:solidFill>
+                <a:latin typeface="Arial"/>
+              </a:rPr>
+              <a:t>and sometimes break right answers.</a:t>
+            </a:r>
+          </a:p>
+        </p:txBody>
+      </p:sp>
+      <p:sp>
+        <p:nvSpPr>
+          <p:cNvPr id="7" name="Rectangle 6"/>
+          <p:cNvSpPr/>
+          <p:nvPr/>
+        </p:nvSpPr>
+        <p:spPr>
+          <a:xfrm>
+            <a:off x="4400550" y="2095500"/>
+            <a:ext cx="3384550" cy="38100"/>
+          </a:xfrm>
+          <a:prstGeom prst="rect">
+            <a:avLst/>
+          </a:prstGeom>
+          <a:solidFill>
+            <a:srgbClr val="F0A66B"/>
+          </a:solidFill>
+          <a:ln>
+            <a:noFill/>
+          </a:ln>
+          <a:effectLst/>
+        </p:spPr>
+        <p:style>
+          <a:lnRef idx="1">
+            <a:schemeClr val="accent1"/>
+          </a:lnRef>
+          <a:fillRef idx="3">
+            <a:schemeClr val="accent1"/>
+          </a:fillRef>
+          <a:effectRef idx="2">
+            <a:schemeClr val="accent1"/>
+          </a:effectRef>
+          <a:fontRef idx="minor">
+            <a:schemeClr val="lt1"/>
+          </a:fontRef>
+        </p:style>
+        <p:txBody>
+          <a:bodyPr rtlCol="0" anchor="ctr"/>
+          <a:lstStyle/>
+          <a:p>
+            <a:pPr algn="ctr"/>
+          </a:p>
+        </p:txBody>
+      </p:sp>
+      <p:sp>
+        <p:nvSpPr>
+          <p:cNvPr id="8" name="TextBox 7"/>
+          <p:cNvSpPr txBox="1"/>
+          <p:nvPr/>
+        </p:nvSpPr>
+        <p:spPr>
+          <a:xfrm>
+            <a:off x="4400550" y="2286000"/>
+            <a:ext cx="3384550" cy="1651000"/>
+          </a:xfrm>
+          <a:prstGeom prst="rect">
+            <a:avLst/>
+          </a:prstGeom>
+          <a:noFill/>
+        </p:spPr>
+        <p:txBody>
+          <a:bodyPr wrap="square" lIns="0" rIns="0" tIns="0" bIns="0" anchor="t">
+            <a:spAutoFit/>
+          </a:bodyPr>
+          <a:lstStyle/>
+          <a:p>
+            <a:pPr algn="l">
+              <a:lnSpc>
+                <a:spcPct val="115000"/>
+              </a:lnSpc>
+              <a:spcAft>
+                <a:spcPts val="1000"/>
+              </a:spcAft>
+            </a:pPr>
+            <a:r>
+              <a:rPr sz="2800" b="1">
+                <a:solidFill>
+                  <a:srgbClr val="F7F6F2"/>
+                </a:solidFill>
+                <a:latin typeface="Georgia"/>
+              </a:rPr>
+              <a:t>CLIMB keeps a promise</a:t>
+            </a:r>
+          </a:p>
+          <a:p>
+            <a:pPr algn="l">
+              <a:lnSpc>
+                <a:spcPct val="115000"/>
+              </a:lnSpc>
+              <a:spcAft>
+                <a:spcPts val="0"/>
+              </a:spcAft>
+            </a:pPr>
+            <a:r>
+              <a:rPr sz="2000" b="0">
+                <a:solidFill>
+                  <a:srgbClr val="C9D1E0"/>
+                </a:solidFill>
+                <a:latin typeface="Arial"/>
+              </a:rPr>
+              <a:t>you choose the accuracy loss, it finds the cheapest safe rule.</a:t>
+            </a:r>
+          </a:p>
+        </p:txBody>
+      </p:sp>
+      <p:sp>
+        <p:nvSpPr>
+          <p:cNvPr id="9" name="Rectangle 8"/>
+          <p:cNvSpPr/>
+          <p:nvPr/>
+        </p:nvSpPr>
+        <p:spPr>
+          <a:xfrm>
+            <a:off x="7988300" y="2095500"/>
+            <a:ext cx="3384550" cy="38100"/>
+          </a:xfrm>
+          <a:prstGeom prst="rect">
+            <a:avLst/>
+          </a:prstGeom>
+          <a:solidFill>
+            <a:srgbClr val="F0A66B"/>
+          </a:solidFill>
+          <a:ln>
+            <a:noFill/>
+          </a:ln>
+          <a:effectLst/>
+        </p:spPr>
+        <p:style>
+          <a:lnRef idx="1">
+            <a:schemeClr val="accent1"/>
+          </a:lnRef>
+          <a:fillRef idx="3">
+            <a:schemeClr val="accent1"/>
+          </a:fillRef>
+          <a:effectRef idx="2">
+            <a:schemeClr val="accent1"/>
+          </a:effectRef>
+          <a:fontRef idx="minor">
+            <a:schemeClr val="lt1"/>
+          </a:fontRef>
+        </p:style>
+        <p:txBody>
+          <a:bodyPr rtlCol="0" anchor="ctr"/>
+          <a:lstStyle/>
+          <a:p>
+            <a:pPr algn="ctr"/>
+          </a:p>
+        </p:txBody>
+      </p:sp>
+      <p:sp>
+        <p:nvSpPr>
+          <p:cNvPr id="10" name="TextBox 9"/>
+          <p:cNvSpPr txBox="1"/>
+          <p:nvPr/>
+        </p:nvSpPr>
+        <p:spPr>
+          <a:xfrm>
+            <a:off x="7988300" y="2286000"/>
+            <a:ext cx="3384550" cy="1651000"/>
+          </a:xfrm>
+          <a:prstGeom prst="rect">
+            <a:avLst/>
+          </a:prstGeom>
+          <a:noFill/>
+        </p:spPr>
+        <p:txBody>
+          <a:bodyPr wrap="square" lIns="0" rIns="0" tIns="0" bIns="0" anchor="t">
+            <a:spAutoFit/>
+          </a:bodyPr>
+          <a:lstStyle/>
+          <a:p>
+            <a:pPr algn="l">
+              <a:lnSpc>
+                <a:spcPct val="115000"/>
+              </a:lnSpc>
+              <a:spcAft>
+                <a:spcPts val="1000"/>
+              </a:spcAft>
+            </a:pPr>
+            <a:r>
+              <a:rPr sz="2800" b="1">
+                <a:solidFill>
+                  <a:srgbClr val="F7F6F2"/>
+                </a:solidFill>
+                <a:latin typeface="Georgia"/>
+              </a:rPr>
+              <a:t>38–65% saved</a:t>
+            </a:r>
+          </a:p>
+          <a:p>
+            <a:pPr algn="l">
+              <a:lnSpc>
+                <a:spcPct val="115000"/>
+              </a:lnSpc>
+              <a:spcAft>
+                <a:spcPts val="0"/>
+              </a:spcAft>
+            </a:pPr>
+            <a:r>
+              <a:rPr sz="2000" b="0">
+                <a:solidFill>
+                  <a:srgbClr val="C9D1E0"/>
+                </a:solidFill>
+                <a:latin typeface="Arial"/>
+              </a:rPr>
+              <a:t>at 5 and 10 points, with the promise kept.</a:t>
+            </a:r>
+          </a:p>
+        </p:txBody>
+      </p:sp>
+      <p:sp>
+        <p:nvSpPr>
+          <p:cNvPr id="11" name="TextBox 10"/>
+          <p:cNvSpPr txBox="1"/>
+          <p:nvPr/>
+        </p:nvSpPr>
+        <p:spPr>
+          <a:xfrm>
+            <a:off x="812800" y="4699000"/>
+            <a:ext cx="10566400" cy="508000"/>
+          </a:xfrm>
+          <a:prstGeom prst="rect">
+            <a:avLst/>
+          </a:prstGeom>
+          <a:noFill/>
+        </p:spPr>
+        <p:txBody>
+          <a:bodyPr wrap="square" lIns="0" rIns="0" tIns="0" bIns="0" anchor="t">
+            <a:spAutoFit/>
+          </a:bodyPr>
+          <a:lstStyle/>
+          <a:p>
+            <a:pPr algn="l">
+              <a:lnSpc>
+                <a:spcPct val="115000"/>
+              </a:lnSpc>
+              <a:spcAft>
+                <a:spcPts val="0"/>
+              </a:spcAft>
+            </a:pPr>
+            <a:r>
+              <a:rPr sz="1800" b="0">
+                <a:solidFill>
+                  <a:srgbClr val="C9D1E0"/>
+                </a:solidFill>
+                <a:latin typeface="Arial"/>
+              </a:rPr>
+              <a:t>Assumes calibration tasks resemble deployment tasks. Recalibrating takes under a second.</a:t>
+            </a:r>
+          </a:p>
+        </p:txBody>
+      </p:sp>
+      <p:sp>
+        <p:nvSpPr>
+          <p:cNvPr id="12" name="TextBox 11"/>
+          <p:cNvSpPr txBox="1"/>
+          <p:nvPr/>
+        </p:nvSpPr>
+        <p:spPr>
+          <a:xfrm>
+            <a:off x="812800" y="5397500"/>
+            <a:ext cx="10566400" cy="571500"/>
+          </a:xfrm>
+          <a:prstGeom prst="rect">
+            <a:avLst/>
+          </a:prstGeom>
+          <a:noFill/>
+        </p:spPr>
+        <p:txBody>
+          <a:bodyPr wrap="square" lIns="0" rIns="0" tIns="0" bIns="0" anchor="t">
+            <a:spAutoFit/>
+          </a:bodyPr>
+          <a:lstStyle/>
+          <a:p>
+            <a:pPr algn="l">
+              <a:lnSpc>
+                <a:spcPct val="115000"/>
+              </a:lnSpc>
+              <a:spcAft>
+                <a:spcPts val="0"/>
               </a:spcAft>
             </a:pPr>
             <a:r>
               <a:rPr sz="3600" b="1">
                 <a:solidFill>
-                  <a:srgbClr val="B03A2E"/>
+                  <a:srgbClr val="F0A66B"/>
                 </a:solidFill>
                 <a:latin typeface="Georgia"/>
               </a:rPr>
-              <a:t>31%</a:t>
-            </a:r>
-          </a:p>
-          <a:p>
-            <a:pPr algn="l">
-              <a:lnSpc>
-                <a:spcPct val="115000"/>
-              </a:lnSpc>
-              <a:spcAft>
-                <a:spcPts val="0"/>
-              </a:spcAft>
-            </a:pPr>
-            <a:r>
-              <a:rPr sz="1700" b="0">
-                <a:solidFill>
-                  <a:srgbClr val="3A4150"/>
-                </a:solidFill>
-                <a:latin typeface="Arial"/>
-              </a:rPr>
-              <a:t>of splits broken at ε = 5 by the tuned rule. CLIMB: 0.6%.</a:t>
+              <a:t>Thank you. Questions?</a:t>
             </a:r>
           </a:p>
         </p:txBody>
@@ -11098,557 +11277,6 @@
 </p:sld>
 </file>
 
-<file path=ppt/slides/slide20.xml><?xml version="1.0" encoding="utf-8"?>
-<p:sld xmlns:a="http://schemas.openxmlformats.org/drawingml/2006/main" xmlns:p="http://schemas.openxmlformats.org/presentationml/2006/main" xmlns:r="http://schemas.openxmlformats.org/officeDocument/2006/relationships">
-  <p:cSld>
-    <p:bg>
-      <p:bgPr>
-        <a:solidFill>
-          <a:srgbClr val="14213D"/>
-        </a:solidFill>
-        <a:effectLst/>
-      </p:bgPr>
-    </p:bg>
-    <p:spTree>
-      <p:nvGrpSpPr>
-        <p:cNvPr id="1" name=""/>
-        <p:cNvGrpSpPr/>
-        <p:nvPr/>
-      </p:nvGrpSpPr>
-      <p:grpSpPr/>
-      <p:sp>
-        <p:nvSpPr>
-          <p:cNvPr id="2" name="TextBox 1"/>
-          <p:cNvSpPr txBox="1"/>
-          <p:nvPr/>
-        </p:nvSpPr>
-        <p:spPr>
-          <a:xfrm>
-            <a:off x="812800" y="6413500"/>
-            <a:ext cx="10566400" cy="215900"/>
-          </a:xfrm>
-          <a:prstGeom prst="rect">
-            <a:avLst/>
-          </a:prstGeom>
-          <a:noFill/>
-        </p:spPr>
-        <p:txBody>
-          <a:bodyPr wrap="square" lIns="0" rIns="0" tIns="0" bIns="0" anchor="t">
-            <a:spAutoFit/>
-          </a:bodyPr>
-          <a:lstStyle/>
-          <a:p>
-            <a:pPr algn="r">
-              <a:lnSpc>
-                <a:spcPct val="115000"/>
-              </a:lnSpc>
-              <a:spcAft>
-                <a:spcPts val="0"/>
-              </a:spcAft>
-            </a:pPr>
-            <a:r>
-              <a:rPr sz="1200" b="0">
-                <a:solidFill>
-                  <a:srgbClr val="8B97AE"/>
-                </a:solidFill>
-                <a:latin typeface="Arial"/>
-              </a:rPr>
-              <a:t>20</a:t>
-            </a:r>
-          </a:p>
-        </p:txBody>
-      </p:sp>
-      <p:sp>
-        <p:nvSpPr>
-          <p:cNvPr id="3" name="TextBox 2"/>
-          <p:cNvSpPr txBox="1"/>
-          <p:nvPr/>
-        </p:nvSpPr>
-        <p:spPr>
-          <a:xfrm>
-            <a:off x="812800" y="635000"/>
-            <a:ext cx="10566400" cy="254000"/>
-          </a:xfrm>
-          <a:prstGeom prst="rect">
-            <a:avLst/>
-          </a:prstGeom>
-          <a:noFill/>
-        </p:spPr>
-        <p:txBody>
-          <a:bodyPr wrap="square" lIns="0" rIns="0" tIns="0" bIns="0" anchor="t">
-            <a:spAutoFit/>
-          </a:bodyPr>
-          <a:lstStyle/>
-          <a:p>
-            <a:pPr algn="l">
-              <a:lnSpc>
-                <a:spcPct val="115000"/>
-              </a:lnSpc>
-              <a:spcAft>
-                <a:spcPts val="0"/>
-              </a:spcAft>
-            </a:pPr>
-            <a:r>
-              <a:rPr sz="1300" b="1">
-                <a:solidFill>
-                  <a:srgbClr val="F0A66B"/>
-                </a:solidFill>
-                <a:latin typeface="Arial"/>
-              </a:rPr>
-              <a:t>TAKEAWAYS</a:t>
-            </a:r>
-          </a:p>
-        </p:txBody>
-      </p:sp>
-      <p:sp>
-        <p:nvSpPr>
-          <p:cNvPr id="4" name="TextBox 3"/>
-          <p:cNvSpPr txBox="1"/>
-          <p:nvPr/>
-        </p:nvSpPr>
-        <p:spPr>
-          <a:xfrm>
-            <a:off x="812800" y="889000"/>
-            <a:ext cx="10566400" cy="571500"/>
-          </a:xfrm>
-          <a:prstGeom prst="rect">
-            <a:avLst/>
-          </a:prstGeom>
-          <a:noFill/>
-        </p:spPr>
-        <p:txBody>
-          <a:bodyPr wrap="square" lIns="0" rIns="0" tIns="0" bIns="0" anchor="t">
-            <a:spAutoFit/>
-          </a:bodyPr>
-          <a:lstStyle/>
-          <a:p>
-            <a:pPr algn="l">
-              <a:lnSpc>
-                <a:spcPct val="105000"/>
-              </a:lnSpc>
-              <a:spcAft>
-                <a:spcPts val="0"/>
-              </a:spcAft>
-            </a:pPr>
-            <a:r>
-              <a:rPr sz="3600" b="1">
-                <a:solidFill>
-                  <a:srgbClr val="F7F6F2"/>
-                </a:solidFill>
-                <a:latin typeface="Georgia"/>
-              </a:rPr>
-              <a:t>Call the team only when you must</a:t>
-            </a:r>
-          </a:p>
-        </p:txBody>
-      </p:sp>
-      <p:sp>
-        <p:nvSpPr>
-          <p:cNvPr id="5" name="Rectangle 4"/>
-          <p:cNvSpPr/>
-          <p:nvPr/>
-        </p:nvSpPr>
-        <p:spPr>
-          <a:xfrm>
-            <a:off x="812800" y="2095500"/>
-            <a:ext cx="3384550" cy="38100"/>
-          </a:xfrm>
-          <a:prstGeom prst="rect">
-            <a:avLst/>
-          </a:prstGeom>
-          <a:solidFill>
-            <a:srgbClr val="F0A66B"/>
-          </a:solidFill>
-          <a:ln>
-            <a:noFill/>
-          </a:ln>
-          <a:effectLst/>
-        </p:spPr>
-        <p:style>
-          <a:lnRef idx="1">
-            <a:schemeClr val="accent1"/>
-          </a:lnRef>
-          <a:fillRef idx="3">
-            <a:schemeClr val="accent1"/>
-          </a:fillRef>
-          <a:effectRef idx="2">
-            <a:schemeClr val="accent1"/>
-          </a:effectRef>
-          <a:fontRef idx="minor">
-            <a:schemeClr val="lt1"/>
-          </a:fontRef>
-        </p:style>
-        <p:txBody>
-          <a:bodyPr rtlCol="0" anchor="ctr"/>
-          <a:lstStyle/>
-          <a:p>
-            <a:pPr algn="ctr"/>
-          </a:p>
-        </p:txBody>
-      </p:sp>
-      <p:sp>
-        <p:nvSpPr>
-          <p:cNvPr id="6" name="TextBox 5"/>
-          <p:cNvSpPr txBox="1"/>
-          <p:nvPr/>
-        </p:nvSpPr>
-        <p:spPr>
-          <a:xfrm>
-            <a:off x="812800" y="2286000"/>
-            <a:ext cx="3384550" cy="1651000"/>
-          </a:xfrm>
-          <a:prstGeom prst="rect">
-            <a:avLst/>
-          </a:prstGeom>
-          <a:noFill/>
-        </p:spPr>
-        <p:txBody>
-          <a:bodyPr wrap="square" lIns="0" rIns="0" tIns="0" bIns="0" anchor="t">
-            <a:spAutoFit/>
-          </a:bodyPr>
-          <a:lstStyle/>
-          <a:p>
-            <a:pPr algn="l">
-              <a:lnSpc>
-                <a:spcPct val="115000"/>
-              </a:lnSpc>
-              <a:spcAft>
-                <a:spcPts val="1000"/>
-              </a:spcAft>
-            </a:pPr>
-            <a:r>
-              <a:rPr sz="2800" b="1">
-                <a:solidFill>
-                  <a:srgbClr val="F7F6F2"/>
-                </a:solidFill>
-                <a:latin typeface="Georgia"/>
-              </a:rPr>
-              <a:t>Teams are costly</a:t>
-            </a:r>
-          </a:p>
-          <a:p>
-            <a:pPr algn="l">
-              <a:lnSpc>
-                <a:spcPct val="115000"/>
-              </a:lnSpc>
-              <a:spcAft>
-                <a:spcPts val="0"/>
-              </a:spcAft>
-            </a:pPr>
-            <a:r>
-              <a:rPr sz="2000" b="0">
-                <a:solidFill>
-                  <a:srgbClr val="C9D1E0"/>
-                </a:solidFill>
-                <a:latin typeface="Arial"/>
-              </a:rPr>
-              <a:t>and sometimes break right answers.</a:t>
-            </a:r>
-          </a:p>
-        </p:txBody>
-      </p:sp>
-      <p:sp>
-        <p:nvSpPr>
-          <p:cNvPr id="7" name="Rectangle 6"/>
-          <p:cNvSpPr/>
-          <p:nvPr/>
-        </p:nvSpPr>
-        <p:spPr>
-          <a:xfrm>
-            <a:off x="4400550" y="2095500"/>
-            <a:ext cx="3384550" cy="38100"/>
-          </a:xfrm>
-          <a:prstGeom prst="rect">
-            <a:avLst/>
-          </a:prstGeom>
-          <a:solidFill>
-            <a:srgbClr val="F0A66B"/>
-          </a:solidFill>
-          <a:ln>
-            <a:noFill/>
-          </a:ln>
-          <a:effectLst/>
-        </p:spPr>
-        <p:style>
-          <a:lnRef idx="1">
-            <a:schemeClr val="accent1"/>
-          </a:lnRef>
-          <a:fillRef idx="3">
-            <a:schemeClr val="accent1"/>
-          </a:fillRef>
-          <a:effectRef idx="2">
-            <a:schemeClr val="accent1"/>
-          </a:effectRef>
-          <a:fontRef idx="minor">
-            <a:schemeClr val="lt1"/>
-          </a:fontRef>
-        </p:style>
-        <p:txBody>
-          <a:bodyPr rtlCol="0" anchor="ctr"/>
-          <a:lstStyle/>
-          <a:p>
-            <a:pPr algn="ctr"/>
-          </a:p>
-        </p:txBody>
-      </p:sp>
-      <p:sp>
-        <p:nvSpPr>
-          <p:cNvPr id="8" name="TextBox 7"/>
-          <p:cNvSpPr txBox="1"/>
-          <p:nvPr/>
-        </p:nvSpPr>
-        <p:spPr>
-          <a:xfrm>
-            <a:off x="4400550" y="2286000"/>
-            <a:ext cx="3384550" cy="1651000"/>
-          </a:xfrm>
-          <a:prstGeom prst="rect">
-            <a:avLst/>
-          </a:prstGeom>
-          <a:noFill/>
-        </p:spPr>
-        <p:txBody>
-          <a:bodyPr wrap="square" lIns="0" rIns="0" tIns="0" bIns="0" anchor="t">
-            <a:spAutoFit/>
-          </a:bodyPr>
-          <a:lstStyle/>
-          <a:p>
-            <a:pPr algn="l">
-              <a:lnSpc>
-                <a:spcPct val="115000"/>
-              </a:lnSpc>
-              <a:spcAft>
-                <a:spcPts val="1000"/>
-              </a:spcAft>
-            </a:pPr>
-            <a:r>
-              <a:rPr sz="2800" b="1">
-                <a:solidFill>
-                  <a:srgbClr val="F7F6F2"/>
-                </a:solidFill>
-                <a:latin typeface="Georgia"/>
-              </a:rPr>
-              <a:t>CLIMB keeps a promise</a:t>
-            </a:r>
-          </a:p>
-          <a:p>
-            <a:pPr algn="l">
-              <a:lnSpc>
-                <a:spcPct val="115000"/>
-              </a:lnSpc>
-              <a:spcAft>
-                <a:spcPts val="0"/>
-              </a:spcAft>
-            </a:pPr>
-            <a:r>
-              <a:rPr sz="2000" b="0">
-                <a:solidFill>
-                  <a:srgbClr val="C9D1E0"/>
-                </a:solidFill>
-                <a:latin typeface="Arial"/>
-              </a:rPr>
-              <a:t>you choose the accuracy loss, it finds the cheapest safe rule.</a:t>
-            </a:r>
-          </a:p>
-        </p:txBody>
-      </p:sp>
-      <p:sp>
-        <p:nvSpPr>
-          <p:cNvPr id="9" name="Rectangle 8"/>
-          <p:cNvSpPr/>
-          <p:nvPr/>
-        </p:nvSpPr>
-        <p:spPr>
-          <a:xfrm>
-            <a:off x="7988300" y="2095500"/>
-            <a:ext cx="3384550" cy="38100"/>
-          </a:xfrm>
-          <a:prstGeom prst="rect">
-            <a:avLst/>
-          </a:prstGeom>
-          <a:solidFill>
-            <a:srgbClr val="F0A66B"/>
-          </a:solidFill>
-          <a:ln>
-            <a:noFill/>
-          </a:ln>
-          <a:effectLst/>
-        </p:spPr>
-        <p:style>
-          <a:lnRef idx="1">
-            <a:schemeClr val="accent1"/>
-          </a:lnRef>
-          <a:fillRef idx="3">
-            <a:schemeClr val="accent1"/>
-          </a:fillRef>
-          <a:effectRef idx="2">
-            <a:schemeClr val="accent1"/>
-          </a:effectRef>
-          <a:fontRef idx="minor">
-            <a:schemeClr val="lt1"/>
-          </a:fontRef>
-        </p:style>
-        <p:txBody>
-          <a:bodyPr rtlCol="0" anchor="ctr"/>
-          <a:lstStyle/>
-          <a:p>
-            <a:pPr algn="ctr"/>
-          </a:p>
-        </p:txBody>
-      </p:sp>
-      <p:sp>
-        <p:nvSpPr>
-          <p:cNvPr id="10" name="TextBox 9"/>
-          <p:cNvSpPr txBox="1"/>
-          <p:nvPr/>
-        </p:nvSpPr>
-        <p:spPr>
-          <a:xfrm>
-            <a:off x="7988300" y="2286000"/>
-            <a:ext cx="3384550" cy="1651000"/>
-          </a:xfrm>
-          <a:prstGeom prst="rect">
-            <a:avLst/>
-          </a:prstGeom>
-          <a:noFill/>
-        </p:spPr>
-        <p:txBody>
-          <a:bodyPr wrap="square" lIns="0" rIns="0" tIns="0" bIns="0" anchor="t">
-            <a:spAutoFit/>
-          </a:bodyPr>
-          <a:lstStyle/>
-          <a:p>
-            <a:pPr algn="l">
-              <a:lnSpc>
-                <a:spcPct val="115000"/>
-              </a:lnSpc>
-              <a:spcAft>
-                <a:spcPts val="1000"/>
-              </a:spcAft>
-            </a:pPr>
-            <a:r>
-              <a:rPr sz="2800" b="1">
-                <a:solidFill>
-                  <a:srgbClr val="F7F6F2"/>
-                </a:solidFill>
-                <a:latin typeface="Georgia"/>
-              </a:rPr>
-              <a:t>38–65% saved</a:t>
-            </a:r>
-          </a:p>
-          <a:p>
-            <a:pPr algn="l">
-              <a:lnSpc>
-                <a:spcPct val="115000"/>
-              </a:lnSpc>
-              <a:spcAft>
-                <a:spcPts val="0"/>
-              </a:spcAft>
-            </a:pPr>
-            <a:r>
-              <a:rPr sz="2000" b="0">
-                <a:solidFill>
-                  <a:srgbClr val="C9D1E0"/>
-                </a:solidFill>
-                <a:latin typeface="Arial"/>
-              </a:rPr>
-              <a:t>at 5 and 10 points, with the promise kept.</a:t>
-            </a:r>
-          </a:p>
-        </p:txBody>
-      </p:sp>
-      <p:sp>
-        <p:nvSpPr>
-          <p:cNvPr id="11" name="TextBox 10"/>
-          <p:cNvSpPr txBox="1"/>
-          <p:nvPr/>
-        </p:nvSpPr>
-        <p:spPr>
-          <a:xfrm>
-            <a:off x="812800" y="4699000"/>
-            <a:ext cx="10566400" cy="508000"/>
-          </a:xfrm>
-          <a:prstGeom prst="rect">
-            <a:avLst/>
-          </a:prstGeom>
-          <a:noFill/>
-        </p:spPr>
-        <p:txBody>
-          <a:bodyPr wrap="square" lIns="0" rIns="0" tIns="0" bIns="0" anchor="t">
-            <a:spAutoFit/>
-          </a:bodyPr>
-          <a:lstStyle/>
-          <a:p>
-            <a:pPr algn="l">
-              <a:lnSpc>
-                <a:spcPct val="115000"/>
-              </a:lnSpc>
-              <a:spcAft>
-                <a:spcPts val="0"/>
-              </a:spcAft>
-            </a:pPr>
-            <a:r>
-              <a:rPr sz="1800" b="0">
-                <a:solidFill>
-                  <a:srgbClr val="C9D1E0"/>
-                </a:solidFill>
-                <a:latin typeface="Arial"/>
-              </a:rPr>
-              <a:t>Assumes calibration tasks resemble deployment tasks. Recalibrating takes under a second.</a:t>
-            </a:r>
-          </a:p>
-        </p:txBody>
-      </p:sp>
-      <p:sp>
-        <p:nvSpPr>
-          <p:cNvPr id="12" name="TextBox 11"/>
-          <p:cNvSpPr txBox="1"/>
-          <p:nvPr/>
-        </p:nvSpPr>
-        <p:spPr>
-          <a:xfrm>
-            <a:off x="812800" y="5397500"/>
-            <a:ext cx="10566400" cy="571500"/>
-          </a:xfrm>
-          <a:prstGeom prst="rect">
-            <a:avLst/>
-          </a:prstGeom>
-          <a:noFill/>
-        </p:spPr>
-        <p:txBody>
-          <a:bodyPr wrap="square" lIns="0" rIns="0" tIns="0" bIns="0" anchor="t">
-            <a:spAutoFit/>
-          </a:bodyPr>
-          <a:lstStyle/>
-          <a:p>
-            <a:pPr algn="l">
-              <a:lnSpc>
-                <a:spcPct val="115000"/>
-              </a:lnSpc>
-              <a:spcAft>
-                <a:spcPts val="0"/>
-              </a:spcAft>
-            </a:pPr>
-            <a:r>
-              <a:rPr sz="3600" b="1">
-                <a:solidFill>
-                  <a:srgbClr val="F0A66B"/>
-                </a:solidFill>
-                <a:latin typeface="Georgia"/>
-              </a:rPr>
-              <a:t>Thank you. Questions?</a:t>
-            </a:r>
-          </a:p>
-        </p:txBody>
-      </p:sp>
-    </p:spTree>
-  </p:cSld>
-  <p:clrMapOvr>
-    <a:masterClrMapping/>
-  </p:clrMapOvr>
-</p:sld>
-</file>
-
 <file path=ppt/slides/slide3.xml><?xml version="1.0" encoding="utf-8"?>
 <p:sld xmlns:a="http://schemas.openxmlformats.org/drawingml/2006/main" xmlns:p="http://schemas.openxmlformats.org/presentationml/2006/main" xmlns:r="http://schemas.openxmlformats.org/officeDocument/2006/relationships">
   <p:cSld>
@@ -12130,14 +11758,74 @@
                 </a:solidFill>
                 <a:latin typeface="Georgia"/>
               </a:rPr>
-              <a:t>Teams cost several times more</a:t>
+              <a:t>But teams are costly, and sometimes harmful</a:t>
+            </a:r>
+          </a:p>
+        </p:txBody>
+      </p:sp>
+      <p:sp>
+        <p:nvSpPr>
+          <p:cNvPr id="5" name="TextBox 4"/>
+          <p:cNvSpPr txBox="1"/>
+          <p:nvPr/>
+        </p:nvSpPr>
+        <p:spPr>
+          <a:xfrm>
+            <a:off x="812800" y="1714500"/>
+            <a:ext cx="5080000" cy="317500"/>
+          </a:xfrm>
+          <a:prstGeom prst="rect">
+            <a:avLst/>
+          </a:prstGeom>
+          <a:noFill/>
+        </p:spPr>
+        <p:txBody>
+          <a:bodyPr wrap="square" lIns="0" rIns="0" tIns="0" bIns="0" anchor="t">
+            <a:spAutoFit/>
+          </a:bodyPr>
+          <a:lstStyle/>
+          <a:p>
+            <a:pPr algn="l">
+              <a:lnSpc>
+                <a:spcPct val="115000"/>
+              </a:lnSpc>
+              <a:spcAft>
+                <a:spcPts val="0"/>
+              </a:spcAft>
+            </a:pPr>
+            <a:r>
+              <a:rPr sz="2400" b="1">
+                <a:solidFill>
+                  <a:srgbClr val="14213D"/>
+                </a:solidFill>
+                <a:latin typeface="Arial"/>
+              </a:rPr>
+              <a:t>Cost: up to </a:t>
+            </a:r>
+            <a:r>
+              <a:rPr sz="2400" b="1">
+                <a:solidFill>
+                  <a:srgbClr val="B4541A"/>
+                </a:solidFill>
+                <a:latin typeface="Arial"/>
+              </a:rPr>
+              <a:t>6.3×</a:t>
+            </a:r>
+            <a:r>
+              <a:rPr sz="2400" b="1">
+                <a:solidFill>
+                  <a:srgbClr val="14213D"/>
+                </a:solidFill>
+                <a:latin typeface="Arial"/>
+              </a:rPr>
+              <a:t> a single agent</a:t>
             </a:r>
           </a:p>
         </p:txBody>
       </p:sp>
       <p:pic>
         <p:nvPicPr>
-          <p:cNvPr id="5" name="Picture 4" descr="c_cost.png"/>
+          <p:cNvPr id="6" name="Picture 5" descr="c_cost_n.png"/>
           <p:cNvPicPr>
             <a:picLocks noChangeAspect="1"/>
           </p:cNvPicPr>
@@ -12151,8 +11839,8 @@
         </p:blipFill>
         <p:spPr>
           <a:xfrm>
-            <a:off x="812800" y="1937672"/>
-            <a:ext cx="7302500" cy="3871655"/>
+            <a:off x="925882" y="2159000"/>
+            <a:ext cx="4853835" cy="3937000"/>
           </a:xfrm>
           <a:prstGeom prst="rect">
             <a:avLst/>
@@ -12161,97 +11849,14 @@
       </p:pic>
       <p:sp>
         <p:nvSpPr>
-          <p:cNvPr id="6" name="Rounded Rectangle 5"/>
-          <p:cNvSpPr/>
-          <p:nvPr/>
-        </p:nvSpPr>
-        <p:spPr>
-          <a:xfrm>
-            <a:off x="8445500" y="2286000"/>
-            <a:ext cx="2933700" cy="1905000"/>
-          </a:xfrm>
-          <a:prstGeom prst="roundRect">
-            <a:avLst>
-              <a:gd name="adj" fmla="val 6000"/>
-            </a:avLst>
-          </a:prstGeom>
-          <a:solidFill>
-            <a:srgbClr val="FDFCF9"/>
-          </a:solidFill>
-          <a:ln w="12700">
-            <a:solidFill>
-              <a:srgbClr val="DDD8CC"/>
-            </a:solidFill>
-          </a:ln>
-          <a:effectLst/>
-        </p:spPr>
-        <p:style>
-          <a:lnRef idx="1">
-            <a:schemeClr val="accent1"/>
-          </a:lnRef>
-          <a:fillRef idx="3">
-            <a:schemeClr val="accent1"/>
-          </a:fillRef>
-          <a:effectRef idx="2">
-            <a:schemeClr val="accent1"/>
-          </a:effectRef>
-          <a:fontRef idx="minor">
-            <a:schemeClr val="lt1"/>
-          </a:fontRef>
-        </p:style>
-        <p:txBody>
-          <a:bodyPr rtlCol="0" anchor="ctr" wrap="square" lIns="190500" rIns="190500" tIns="190500" bIns="190500"/>
-          <a:lstStyle/>
-          <a:p>
-            <a:pPr algn="l">
-              <a:lnSpc>
-                <a:spcPct val="100000"/>
-              </a:lnSpc>
-              <a:spcAft>
-                <a:spcPts val="600"/>
-              </a:spcAft>
-            </a:pPr>
-            <a:r>
-              <a:rPr sz="3600" b="1">
-                <a:solidFill>
-                  <a:srgbClr val="B4541A"/>
-                </a:solidFill>
-                <a:latin typeface="Georgia"/>
-              </a:rPr>
-              <a:t>up to 6.3×</a:t>
-            </a:r>
-          </a:p>
-          <a:p>
-            <a:pPr algn="l">
-              <a:lnSpc>
-                <a:spcPct val="115000"/>
-              </a:lnSpc>
-              <a:spcAft>
-                <a:spcPts val="0"/>
-              </a:spcAft>
-            </a:pPr>
-            <a:r>
-              <a:rPr sz="1700" b="0">
-                <a:solidFill>
-                  <a:srgbClr val="3A4150"/>
-                </a:solidFill>
-                <a:latin typeface="Arial"/>
-              </a:rPr>
-              <a:t>the tokens of one agent answering alone</a:t>
-            </a:r>
-          </a:p>
-        </p:txBody>
-      </p:sp>
-      <p:sp>
-        <p:nvSpPr>
           <p:cNvPr id="7" name="TextBox 6"/>
           <p:cNvSpPr txBox="1"/>
           <p:nvPr/>
         </p:nvSpPr>
         <p:spPr>
           <a:xfrm>
-            <a:off x="8445500" y="4445000"/>
-            <a:ext cx="2933700" cy="1270000"/>
+            <a:off x="6299200" y="1714500"/>
+            <a:ext cx="5080000" cy="317500"/>
           </a:xfrm>
           <a:prstGeom prst="rect">
             <a:avLst/>
@@ -12273,17 +11878,59 @@
               </a:spcAft>
             </a:pPr>
             <a:r>
-              <a:rPr sz="1800" b="0">
-                <a:solidFill>
-                  <a:srgbClr val="6B7280"/>
-                </a:solidFill>
-                <a:latin typeface="Arial"/>
-              </a:rPr>
-              <a:t>Planner, executor and reviewer each add calls, for up to 5 rounds.</a:t>
-            </a:r>
-          </a:p>
-        </p:txBody>
-      </p:sp>
+              <a:rPr sz="2400" b="1">
+                <a:solidFill>
+                  <a:srgbClr val="14213D"/>
+                </a:solidFill>
+                <a:latin typeface="Arial"/>
+              </a:rPr>
+              <a:t>Harm: up to </a:t>
+            </a:r>
+            <a:r>
+              <a:rPr sz="2400" b="1">
+                <a:solidFill>
+                  <a:srgbClr val="B03A2E"/>
+                </a:solidFill>
+                <a:latin typeface="Arial"/>
+              </a:rPr>
+              <a:t>9%</a:t>
+            </a:r>
+            <a:r>
+              <a:rPr sz="2400" b="1">
+                <a:solidFill>
+                  <a:srgbClr val="14213D"/>
+                </a:solidFill>
+                <a:latin typeface="Arial"/>
+              </a:rPr>
+              <a:t> of tasks broken</a:t>
+            </a:r>
+          </a:p>
+        </p:txBody>
+      </p:sp>
+      <p:pic>
+        <p:nvPicPr>
+          <p:cNvPr id="8" name="Picture 7" descr="c_flows_n.png"/>
+          <p:cNvPicPr>
+            <a:picLocks noChangeAspect="1"/>
+          </p:cNvPicPr>
+          <p:nvPr/>
+        </p:nvPicPr>
+        <p:blipFill>
+          <a:blip r:embed="rId4"/>
+          <a:stretch>
+            <a:fillRect/>
+          </a:stretch>
+        </p:blipFill>
+        <p:spPr>
+          <a:xfrm>
+            <a:off x="6299200" y="2168345"/>
+            <a:ext cx="5080000" cy="3918309"/>
+          </a:xfrm>
+          <a:prstGeom prst="rect">
+            <a:avLst/>
+          </a:prstGeom>
+        </p:spPr>
+      </p:pic>
     </p:spTree>
   </p:cSld>
   <p:clrMapOvr>
@@ -12389,7 +12036,7 @@
                 </a:solidFill>
                 <a:latin typeface="Arial"/>
               </a:rPr>
-              <a:t>BUT…</a:t>
+              <a:t>THE PROBLEM</a:t>
             </a:r>
           </a:p>
         </p:txBody>
@@ -12431,53 +12078,493 @@
                 </a:solidFill>
                 <a:latin typeface="Georgia"/>
               </a:rPr>
-              <a:t>…and sometimes break right answers</a:t>
-            </a:r>
-          </a:p>
-        </p:txBody>
-      </p:sp>
-      <p:pic>
-        <p:nvPicPr>
-          <p:cNvPr id="5" name="Picture 4" descr="c_flows.png"/>
-          <p:cNvPicPr>
-            <a:picLocks noChangeAspect="1"/>
-          </p:cNvPicPr>
-          <p:nvPr/>
-        </p:nvPicPr>
-        <p:blipFill>
-          <a:blip r:embed="rId3"/>
-          <a:stretch>
-            <a:fillRect/>
-          </a:stretch>
-        </p:blipFill>
-        <p:spPr>
-          <a:xfrm>
-            <a:off x="812800" y="1946618"/>
-            <a:ext cx="7302500" cy="3853763"/>
-          </a:xfrm>
-          <a:prstGeom prst="rect">
-            <a:avLst/>
-          </a:prstGeom>
-        </p:spPr>
-      </p:pic>
-      <p:sp>
-        <p:nvSpPr>
-          <p:cNvPr id="6" name="Rounded Rectangle 5"/>
+              <a:t>Why does the team break right answers?</a:t>
+            </a:r>
+          </a:p>
+        </p:txBody>
+      </p:sp>
+      <p:sp>
+        <p:nvSpPr>
+          <p:cNvPr id="5" name="Rounded Rectangle 4"/>
           <p:cNvSpPr/>
           <p:nvPr/>
         </p:nvSpPr>
         <p:spPr>
           <a:xfrm>
-            <a:off x="8445500" y="2095500"/>
-            <a:ext cx="2933700" cy="1651000"/>
+            <a:off x="812800" y="2095500"/>
+            <a:ext cx="2159000" cy="1397000"/>
           </a:xfrm>
           <a:prstGeom prst="roundRect">
             <a:avLst>
-              <a:gd name="adj" fmla="val 6923"/>
+              <a:gd name="adj" fmla="val 8181"/>
             </a:avLst>
           </a:prstGeom>
           <a:solidFill>
-            <a:srgbClr val="E3ECE2"/>
+            <a:srgbClr val="E2EAF5"/>
+          </a:solidFill>
+          <a:ln w="31750">
+            <a:solidFill>
+              <a:srgbClr val="2E5C99"/>
+            </a:solidFill>
+          </a:ln>
+          <a:effectLst/>
+        </p:spPr>
+        <p:style>
+          <a:lnRef idx="1">
+            <a:schemeClr val="accent1"/>
+          </a:lnRef>
+          <a:fillRef idx="3">
+            <a:schemeClr val="accent1"/>
+          </a:fillRef>
+          <a:effectRef idx="2">
+            <a:schemeClr val="accent1"/>
+          </a:effectRef>
+          <a:fontRef idx="minor">
+            <a:schemeClr val="lt1"/>
+          </a:fontRef>
+        </p:style>
+        <p:txBody>
+          <a:bodyPr rtlCol="0" anchor="ctr" wrap="square" lIns="101600" rIns="101600" tIns="101600" bIns="101600"/>
+          <a:lstStyle/>
+          <a:p>
+            <a:pPr algn="ctr">
+              <a:lnSpc>
+                <a:spcPct val="115000"/>
+              </a:lnSpc>
+              <a:spcAft>
+                <a:spcPts val="800"/>
+              </a:spcAft>
+            </a:pPr>
+            <a:r>
+              <a:rPr sz="2200" b="1">
+                <a:solidFill>
+                  <a:srgbClr val="14213D"/>
+                </a:solidFill>
+                <a:latin typeface="Arial"/>
+              </a:rPr>
+              <a:t>Planner</a:t>
+            </a:r>
+          </a:p>
+          <a:p>
+            <a:pPr algn="ctr">
+              <a:lnSpc>
+                <a:spcPct val="115000"/>
+              </a:lnSpc>
+              <a:spcAft>
+                <a:spcPts val="0"/>
+              </a:spcAft>
+            </a:pPr>
+            <a:r>
+              <a:rPr sz="1700" b="1">
+                <a:solidFill>
+                  <a:srgbClr val="2E5C99"/>
+                </a:solidFill>
+                <a:latin typeface="Arial"/>
+              </a:rPr>
+              <a:t>writes a plan</a:t>
+            </a:r>
+          </a:p>
+        </p:txBody>
+      </p:sp>
+      <p:sp>
+        <p:nvSpPr>
+          <p:cNvPr id="6" name="Right Arrow 5"/>
+          <p:cNvSpPr/>
+          <p:nvPr/>
+        </p:nvSpPr>
+        <p:spPr>
+          <a:xfrm>
+            <a:off x="3048000" y="2635250"/>
+            <a:ext cx="419100" cy="317500"/>
+          </a:xfrm>
+          <a:prstGeom prst="rightArrow">
+            <a:avLst/>
+          </a:prstGeom>
+          <a:solidFill>
+            <a:srgbClr val="6B7280"/>
+          </a:solidFill>
+          <a:ln>
+            <a:noFill/>
+          </a:ln>
+          <a:effectLst/>
+        </p:spPr>
+        <p:style>
+          <a:lnRef idx="1">
+            <a:schemeClr val="accent1"/>
+          </a:lnRef>
+          <a:fillRef idx="3">
+            <a:schemeClr val="accent1"/>
+          </a:fillRef>
+          <a:effectRef idx="2">
+            <a:schemeClr val="accent1"/>
+          </a:effectRef>
+          <a:fontRef idx="minor">
+            <a:schemeClr val="lt1"/>
+          </a:fontRef>
+        </p:style>
+        <p:txBody>
+          <a:bodyPr rtlCol="0" anchor="ctr"/>
+          <a:lstStyle/>
+          <a:p>
+            <a:pPr algn="ctr"/>
+          </a:p>
+        </p:txBody>
+      </p:sp>
+      <p:sp>
+        <p:nvSpPr>
+          <p:cNvPr id="7" name="Rounded Rectangle 6"/>
+          <p:cNvSpPr/>
+          <p:nvPr/>
+        </p:nvSpPr>
+        <p:spPr>
+          <a:xfrm>
+            <a:off x="3543300" y="2095500"/>
+            <a:ext cx="2159000" cy="1397000"/>
+          </a:xfrm>
+          <a:prstGeom prst="roundRect">
+            <a:avLst>
+              <a:gd name="adj" fmla="val 8181"/>
+            </a:avLst>
+          </a:prstGeom>
+          <a:solidFill>
+            <a:srgbClr val="F6E3E0"/>
+          </a:solidFill>
+          <a:ln w="31750">
+            <a:solidFill>
+              <a:srgbClr val="B03A2E"/>
+            </a:solidFill>
+          </a:ln>
+          <a:effectLst/>
+        </p:spPr>
+        <p:style>
+          <a:lnRef idx="1">
+            <a:schemeClr val="accent1"/>
+          </a:lnRef>
+          <a:fillRef idx="3">
+            <a:schemeClr val="accent1"/>
+          </a:fillRef>
+          <a:effectRef idx="2">
+            <a:schemeClr val="accent1"/>
+          </a:effectRef>
+          <a:fontRef idx="minor">
+            <a:schemeClr val="lt1"/>
+          </a:fontRef>
+        </p:style>
+        <p:txBody>
+          <a:bodyPr rtlCol="0" anchor="ctr" wrap="square" lIns="101600" rIns="101600" tIns="101600" bIns="101600"/>
+          <a:lstStyle/>
+          <a:p>
+            <a:pPr algn="ctr">
+              <a:lnSpc>
+                <a:spcPct val="115000"/>
+              </a:lnSpc>
+              <a:spcAft>
+                <a:spcPts val="800"/>
+              </a:spcAft>
+            </a:pPr>
+            <a:r>
+              <a:rPr sz="2200" b="1">
+                <a:solidFill>
+                  <a:srgbClr val="14213D"/>
+                </a:solidFill>
+                <a:latin typeface="Arial"/>
+              </a:rPr>
+              <a:t>Executor</a:t>
+            </a:r>
+          </a:p>
+          <a:p>
+            <a:pPr algn="ctr">
+              <a:lnSpc>
+                <a:spcPct val="115000"/>
+              </a:lnSpc>
+              <a:spcAft>
+                <a:spcPts val="0"/>
+              </a:spcAft>
+            </a:pPr>
+            <a:r>
+              <a:rPr sz="1700" b="1">
+                <a:solidFill>
+                  <a:srgbClr val="B03A2E"/>
+                </a:solidFill>
+                <a:latin typeface="Arial"/>
+              </a:rPr>
+              <a:t>first draft is WRONG</a:t>
+            </a:r>
+          </a:p>
+        </p:txBody>
+      </p:sp>
+      <p:sp>
+        <p:nvSpPr>
+          <p:cNvPr id="8" name="Right Arrow 7"/>
+          <p:cNvSpPr/>
+          <p:nvPr/>
+        </p:nvSpPr>
+        <p:spPr>
+          <a:xfrm>
+            <a:off x="5778500" y="2635250"/>
+            <a:ext cx="419100" cy="317500"/>
+          </a:xfrm>
+          <a:prstGeom prst="rightArrow">
+            <a:avLst/>
+          </a:prstGeom>
+          <a:solidFill>
+            <a:srgbClr val="6B7280"/>
+          </a:solidFill>
+          <a:ln>
+            <a:noFill/>
+          </a:ln>
+          <a:effectLst/>
+        </p:spPr>
+        <p:style>
+          <a:lnRef idx="1">
+            <a:schemeClr val="accent1"/>
+          </a:lnRef>
+          <a:fillRef idx="3">
+            <a:schemeClr val="accent1"/>
+          </a:fillRef>
+          <a:effectRef idx="2">
+            <a:schemeClr val="accent1"/>
+          </a:effectRef>
+          <a:fontRef idx="minor">
+            <a:schemeClr val="lt1"/>
+          </a:fontRef>
+        </p:style>
+        <p:txBody>
+          <a:bodyPr rtlCol="0" anchor="ctr"/>
+          <a:lstStyle/>
+          <a:p>
+            <a:pPr algn="ctr"/>
+          </a:p>
+        </p:txBody>
+      </p:sp>
+      <p:sp>
+        <p:nvSpPr>
+          <p:cNvPr id="9" name="Rounded Rectangle 8"/>
+          <p:cNvSpPr/>
+          <p:nvPr/>
+        </p:nvSpPr>
+        <p:spPr>
+          <a:xfrm>
+            <a:off x="6273800" y="2095500"/>
+            <a:ext cx="2159000" cy="1397000"/>
+          </a:xfrm>
+          <a:prstGeom prst="roundRect">
+            <a:avLst>
+              <a:gd name="adj" fmla="val 8181"/>
+            </a:avLst>
+          </a:prstGeom>
+          <a:solidFill>
+            <a:srgbClr val="E2EAF5"/>
+          </a:solidFill>
+          <a:ln w="31750">
+            <a:solidFill>
+              <a:srgbClr val="2E5C99"/>
+            </a:solidFill>
+          </a:ln>
+          <a:effectLst/>
+        </p:spPr>
+        <p:style>
+          <a:lnRef idx="1">
+            <a:schemeClr val="accent1"/>
+          </a:lnRef>
+          <a:fillRef idx="3">
+            <a:schemeClr val="accent1"/>
+          </a:fillRef>
+          <a:effectRef idx="2">
+            <a:schemeClr val="accent1"/>
+          </a:effectRef>
+          <a:fontRef idx="minor">
+            <a:schemeClr val="lt1"/>
+          </a:fontRef>
+        </p:style>
+        <p:txBody>
+          <a:bodyPr rtlCol="0" anchor="ctr" wrap="square" lIns="101600" rIns="101600" tIns="101600" bIns="101600"/>
+          <a:lstStyle/>
+          <a:p>
+            <a:pPr algn="ctr">
+              <a:lnSpc>
+                <a:spcPct val="115000"/>
+              </a:lnSpc>
+              <a:spcAft>
+                <a:spcPts val="800"/>
+              </a:spcAft>
+            </a:pPr>
+            <a:r>
+              <a:rPr sz="2200" b="1">
+                <a:solidFill>
+                  <a:srgbClr val="14213D"/>
+                </a:solidFill>
+                <a:latin typeface="Arial"/>
+              </a:rPr>
+              <a:t>Reviewer</a:t>
+            </a:r>
+          </a:p>
+          <a:p>
+            <a:pPr algn="ctr">
+              <a:lnSpc>
+                <a:spcPct val="115000"/>
+              </a:lnSpc>
+              <a:spcAft>
+                <a:spcPts val="0"/>
+              </a:spcAft>
+            </a:pPr>
+            <a:r>
+              <a:rPr sz="1700" b="1">
+                <a:solidFill>
+                  <a:srgbClr val="2E5C99"/>
+                </a:solidFill>
+                <a:latin typeface="Arial"/>
+              </a:rPr>
+              <a:t>“Looks good” ACCEPTED</a:t>
+            </a:r>
+          </a:p>
+        </p:txBody>
+      </p:sp>
+      <p:sp>
+        <p:nvSpPr>
+          <p:cNvPr id="10" name="Right Arrow 9"/>
+          <p:cNvSpPr/>
+          <p:nvPr/>
+        </p:nvSpPr>
+        <p:spPr>
+          <a:xfrm>
+            <a:off x="8509000" y="2635250"/>
+            <a:ext cx="419100" cy="317500"/>
+          </a:xfrm>
+          <a:prstGeom prst="rightArrow">
+            <a:avLst/>
+          </a:prstGeom>
+          <a:solidFill>
+            <a:srgbClr val="6B7280"/>
+          </a:solidFill>
+          <a:ln>
+            <a:noFill/>
+          </a:ln>
+          <a:effectLst/>
+        </p:spPr>
+        <p:style>
+          <a:lnRef idx="1">
+            <a:schemeClr val="accent1"/>
+          </a:lnRef>
+          <a:fillRef idx="3">
+            <a:schemeClr val="accent1"/>
+          </a:fillRef>
+          <a:effectRef idx="2">
+            <a:schemeClr val="accent1"/>
+          </a:effectRef>
+          <a:fontRef idx="minor">
+            <a:schemeClr val="lt1"/>
+          </a:fontRef>
+        </p:style>
+        <p:txBody>
+          <a:bodyPr rtlCol="0" anchor="ctr"/>
+          <a:lstStyle/>
+          <a:p>
+            <a:pPr algn="ctr"/>
+          </a:p>
+        </p:txBody>
+      </p:sp>
+      <p:sp>
+        <p:nvSpPr>
+          <p:cNvPr id="11" name="Rounded Rectangle 10"/>
+          <p:cNvSpPr/>
+          <p:nvPr/>
+        </p:nvSpPr>
+        <p:spPr>
+          <a:xfrm>
+            <a:off x="9004300" y="2095500"/>
+            <a:ext cx="2159000" cy="1397000"/>
+          </a:xfrm>
+          <a:prstGeom prst="roundRect">
+            <a:avLst>
+              <a:gd name="adj" fmla="val 8181"/>
+            </a:avLst>
+          </a:prstGeom>
+          <a:solidFill>
+            <a:srgbClr val="F6E3E0"/>
+          </a:solidFill>
+          <a:ln w="31750">
+            <a:solidFill>
+              <a:srgbClr val="B03A2E"/>
+            </a:solidFill>
+          </a:ln>
+          <a:effectLst/>
+        </p:spPr>
+        <p:style>
+          <a:lnRef idx="1">
+            <a:schemeClr val="accent1"/>
+          </a:lnRef>
+          <a:fillRef idx="3">
+            <a:schemeClr val="accent1"/>
+          </a:fillRef>
+          <a:effectRef idx="2">
+            <a:schemeClr val="accent1"/>
+          </a:effectRef>
+          <a:fontRef idx="minor">
+            <a:schemeClr val="lt1"/>
+          </a:fontRef>
+        </p:style>
+        <p:txBody>
+          <a:bodyPr rtlCol="0" anchor="ctr" wrap="square" lIns="101600" rIns="101600" tIns="101600" bIns="101600"/>
+          <a:lstStyle/>
+          <a:p>
+            <a:pPr algn="ctr">
+              <a:lnSpc>
+                <a:spcPct val="115000"/>
+              </a:lnSpc>
+              <a:spcAft>
+                <a:spcPts val="800"/>
+              </a:spcAft>
+            </a:pPr>
+            <a:r>
+              <a:rPr sz="2200" b="1">
+                <a:solidFill>
+                  <a:srgbClr val="14213D"/>
+                </a:solidFill>
+                <a:latin typeface="Arial"/>
+              </a:rPr>
+              <a:t>Final answer</a:t>
+            </a:r>
+          </a:p>
+          <a:p>
+            <a:pPr algn="ctr">
+              <a:lnSpc>
+                <a:spcPct val="115000"/>
+              </a:lnSpc>
+              <a:spcAft>
+                <a:spcPts val="0"/>
+              </a:spcAft>
+            </a:pPr>
+            <a:r>
+              <a:rPr sz="1700" b="1">
+                <a:solidFill>
+                  <a:srgbClr val="B03A2E"/>
+                </a:solidFill>
+                <a:latin typeface="Arial"/>
+              </a:rPr>
+              <a:t>WRONG</a:t>
+            </a:r>
+          </a:p>
+        </p:txBody>
+      </p:sp>
+      <p:sp>
+        <p:nvSpPr>
+          <p:cNvPr id="12" name="Rounded Rectangle 11"/>
+          <p:cNvSpPr/>
+          <p:nvPr/>
+        </p:nvSpPr>
+        <p:spPr>
+          <a:xfrm>
+            <a:off x="812800" y="4064000"/>
+            <a:ext cx="5080000" cy="1587500"/>
+          </a:xfrm>
+          <a:prstGeom prst="roundRect">
+            <a:avLst>
+              <a:gd name="adj" fmla="val 7199"/>
+            </a:avLst>
+          </a:prstGeom>
+          <a:solidFill>
+            <a:srgbClr val="FDFCF9"/>
           </a:solidFill>
           <a:ln w="12700">
             <a:solidFill>
@@ -12515,11 +12602,11 @@
             <a:r>
               <a:rPr sz="3600" b="1">
                 <a:solidFill>
-                  <a:srgbClr val="2F6B34"/>
+                  <a:srgbClr val="B03A2E"/>
                 </a:solidFill>
                 <a:latin typeface="Georgia"/>
               </a:rPr>
-              <a:t>up to 15%</a:t>
+              <a:t>84%</a:t>
             </a:r>
           </a:p>
           <a:p>
@@ -12538,29 +12625,29 @@
                 </a:solidFill>
                 <a:latin typeface="Arial"/>
               </a:rPr>
-              <a:t>of tasks: the team fixes a wrong answer</a:t>
-            </a:r>
-          </a:p>
-        </p:txBody>
-      </p:sp>
-      <p:sp>
-        <p:nvSpPr>
-          <p:cNvPr id="7" name="Rounded Rectangle 6"/>
+              <a:t>of broken answers start as a wrong first draft the reviewer did not catch</a:t>
+            </a:r>
+          </a:p>
+        </p:txBody>
+      </p:sp>
+      <p:sp>
+        <p:nvSpPr>
+          <p:cNvPr id="13" name="Rounded Rectangle 12"/>
           <p:cNvSpPr/>
           <p:nvPr/>
         </p:nvSpPr>
         <p:spPr>
           <a:xfrm>
-            <a:off x="8445500" y="4000500"/>
-            <a:ext cx="2933700" cy="1651000"/>
+            <a:off x="6299200" y="4064000"/>
+            <a:ext cx="5080000" cy="1587500"/>
           </a:xfrm>
           <a:prstGeom prst="roundRect">
             <a:avLst>
-              <a:gd name="adj" fmla="val 6923"/>
+              <a:gd name="adj" fmla="val 7199"/>
             </a:avLst>
           </a:prstGeom>
           <a:solidFill>
-            <a:srgbClr val="F6E3E0"/>
+            <a:srgbClr val="FDFCF9"/>
           </a:solidFill>
           <a:ln w="12700">
             <a:solidFill>
@@ -12602,7 +12689,7 @@
                 </a:solidFill>
                 <a:latin typeface="Georgia"/>
               </a:rPr>
-              <a:t>up to 9%</a:t>
+              <a:t>23–58%</a:t>
             </a:r>
           </a:p>
           <a:p>
@@ -12621,7 +12708,7 @@
                 </a:solidFill>
                 <a:latin typeface="Arial"/>
               </a:rPr>
-              <a:t>of tasks: the team breaks a right answer</a:t>
+              <a:t>of wrong answers are accepted by the reviewer</a:t>
             </a:r>
           </a:p>
         </p:txBody>
@@ -12731,7 +12818,7 @@
                 </a:solidFill>
                 <a:latin typeface="Arial"/>
               </a:rPr>
-              <a:t>THE PROBLEM</a:t>
+              <a:t>THE IDEA</a:t>
             </a:r>
           </a:p>
         </p:txBody>
@@ -12773,26 +12860,24 @@
                 </a:solidFill>
                 <a:latin typeface="Georgia"/>
               </a:rPr>
-              <a:t>Why does the team break right answers?</a:t>
-            </a:r>
-          </a:p>
-        </p:txBody>
-      </p:sp>
-      <p:sp>
-        <p:nvSpPr>
-          <p:cNvPr id="5" name="Rounded Rectangle 4"/>
+              <a:t>Climb a ladder: call the team only when needed</a:t>
+            </a:r>
+          </a:p>
+        </p:txBody>
+      </p:sp>
+      <p:sp>
+        <p:nvSpPr>
+          <p:cNvPr id="5" name="Rectangle 4"/>
           <p:cNvSpPr/>
           <p:nvPr/>
         </p:nvSpPr>
         <p:spPr>
           <a:xfrm>
-            <a:off x="812800" y="2095500"/>
-            <a:ext cx="2159000" cy="1397000"/>
-          </a:xfrm>
-          <a:prstGeom prst="roundRect">
-            <a:avLst>
-              <a:gd name="adj" fmla="val 8181"/>
-            </a:avLst>
+            <a:off x="1016000" y="4127500"/>
+            <a:ext cx="2540000" cy="1587500"/>
+          </a:xfrm>
+          <a:prstGeom prst="rect">
+            <a:avLst/>
           </a:prstGeom>
           <a:solidFill>
             <a:srgbClr val="E2EAF5"/>
@@ -12819,7 +12904,7 @@
           </a:fontRef>
         </p:style>
         <p:txBody>
-          <a:bodyPr rtlCol="0" anchor="ctr" wrap="square" lIns="101600" rIns="101600" tIns="101600" bIns="101600"/>
+          <a:bodyPr rtlCol="0" anchor="ctr" wrap="square" lIns="76200" rIns="76200" tIns="76200" bIns="76200"/>
           <a:lstStyle/>
           <a:p>
             <a:pPr algn="ctr">
@@ -12827,17 +12912,17 @@
                 <a:spcPct val="115000"/>
               </a:lnSpc>
               <a:spcAft>
-                <a:spcPts val="800"/>
-              </a:spcAft>
-            </a:pPr>
-            <a:r>
-              <a:rPr sz="2200" b="1">
+                <a:spcPts val="600"/>
+              </a:spcAft>
+            </a:pPr>
+            <a:r>
+              <a:rPr sz="2400" b="1">
                 <a:solidFill>
                   <a:srgbClr val="14213D"/>
                 </a:solidFill>
                 <a:latin typeface="Arial"/>
               </a:rPr>
-              <a:t>Planner</a:t>
+              <a:t>Direct answer</a:t>
             </a:r>
           </a:p>
           <a:p>
@@ -12850,27 +12935,70 @@
               </a:spcAft>
             </a:pPr>
             <a:r>
-              <a:rPr sz="1700" b="1">
+              <a:rPr sz="1800" b="1">
                 <a:solidFill>
                   <a:srgbClr val="2E5C99"/>
                 </a:solidFill>
                 <a:latin typeface="Arial"/>
               </a:rPr>
-              <a:t>writes a plan</a:t>
-            </a:r>
-          </a:p>
-        </p:txBody>
-      </p:sp>
-      <p:sp>
-        <p:nvSpPr>
-          <p:cNvPr id="6" name="Right Arrow 5"/>
+              <a:t>cheapest</a:t>
+            </a:r>
+          </a:p>
+        </p:txBody>
+      </p:sp>
+      <p:sp>
+        <p:nvSpPr>
+          <p:cNvPr id="6" name="TextBox 5"/>
+          <p:cNvSpPr txBox="1"/>
+          <p:nvPr/>
+        </p:nvSpPr>
+        <p:spPr>
+          <a:xfrm>
+            <a:off x="3556000" y="4064000"/>
+            <a:ext cx="1016000" cy="381000"/>
+          </a:xfrm>
+          <a:prstGeom prst="rect">
+            <a:avLst/>
+          </a:prstGeom>
+          <a:noFill/>
+        </p:spPr>
+        <p:txBody>
+          <a:bodyPr wrap="square" lIns="0" rIns="0" tIns="0" bIns="0" anchor="t">
+            <a:spAutoFit/>
+          </a:bodyPr>
+          <a:lstStyle/>
+          <a:p>
+            <a:pPr algn="ctr">
+              <a:lnSpc>
+                <a:spcPct val="115000"/>
+              </a:lnSpc>
+              <a:spcAft>
+                <a:spcPts val="0"/>
+              </a:spcAft>
+            </a:pPr>
+            <a:r>
+              <a:rPr sz="1500" b="1">
+                <a:solidFill>
+                  <a:srgbClr val="6B7280"/>
+                </a:solidFill>
+                <a:latin typeface="Arial"/>
+              </a:rPr>
+              <a:t>not sure?
+go up</a:t>
+            </a:r>
+          </a:p>
+        </p:txBody>
+      </p:sp>
+      <p:sp>
+        <p:nvSpPr>
+          <p:cNvPr id="7" name="Right Arrow 6"/>
           <p:cNvSpPr/>
           <p:nvPr/>
         </p:nvSpPr>
         <p:spPr>
           <a:xfrm>
-            <a:off x="3048000" y="2635250"/>
-            <a:ext cx="419100" cy="317500"/>
+            <a:off x="3651250" y="4572000"/>
+            <a:ext cx="825500" cy="279400"/>
           </a:xfrm>
           <a:prstGeom prst="rightArrow">
             <a:avLst/>
@@ -12907,146 +13035,17 @@
       </p:sp>
       <p:sp>
         <p:nvSpPr>
-          <p:cNvPr id="7" name="Rounded Rectangle 6"/>
+          <p:cNvPr id="8" name="Rectangle 7"/>
           <p:cNvSpPr/>
           <p:nvPr/>
         </p:nvSpPr>
         <p:spPr>
           <a:xfrm>
-            <a:off x="3543300" y="2095500"/>
-            <a:ext cx="2159000" cy="1397000"/>
-          </a:xfrm>
-          <a:prstGeom prst="roundRect">
-            <a:avLst>
-              <a:gd name="adj" fmla="val 8181"/>
-            </a:avLst>
-          </a:prstGeom>
-          <a:solidFill>
-            <a:srgbClr val="F6E3E0"/>
-          </a:solidFill>
-          <a:ln w="31750">
-            <a:solidFill>
-              <a:srgbClr val="B03A2E"/>
-            </a:solidFill>
-          </a:ln>
-          <a:effectLst/>
-        </p:spPr>
-        <p:style>
-          <a:lnRef idx="1">
-            <a:schemeClr val="accent1"/>
-          </a:lnRef>
-          <a:fillRef idx="3">
-            <a:schemeClr val="accent1"/>
-          </a:fillRef>
-          <a:effectRef idx="2">
-            <a:schemeClr val="accent1"/>
-          </a:effectRef>
-          <a:fontRef idx="minor">
-            <a:schemeClr val="lt1"/>
-          </a:fontRef>
-        </p:style>
-        <p:txBody>
-          <a:bodyPr rtlCol="0" anchor="ctr" wrap="square" lIns="101600" rIns="101600" tIns="101600" bIns="101600"/>
-          <a:lstStyle/>
-          <a:p>
-            <a:pPr algn="ctr">
-              <a:lnSpc>
-                <a:spcPct val="115000"/>
-              </a:lnSpc>
-              <a:spcAft>
-                <a:spcPts val="800"/>
-              </a:spcAft>
-            </a:pPr>
-            <a:r>
-              <a:rPr sz="2200" b="1">
-                <a:solidFill>
-                  <a:srgbClr val="14213D"/>
-                </a:solidFill>
-                <a:latin typeface="Arial"/>
-              </a:rPr>
-              <a:t>Executor</a:t>
-            </a:r>
-          </a:p>
-          <a:p>
-            <a:pPr algn="ctr">
-              <a:lnSpc>
-                <a:spcPct val="115000"/>
-              </a:lnSpc>
-              <a:spcAft>
-                <a:spcPts val="0"/>
-              </a:spcAft>
-            </a:pPr>
-            <a:r>
-              <a:rPr sz="1700" b="1">
-                <a:solidFill>
-                  <a:srgbClr val="B03A2E"/>
-                </a:solidFill>
-                <a:latin typeface="Arial"/>
-              </a:rPr>
-              <a:t>first draft is WRONG</a:t>
-            </a:r>
-          </a:p>
-        </p:txBody>
-      </p:sp>
-      <p:sp>
-        <p:nvSpPr>
-          <p:cNvPr id="8" name="Right Arrow 7"/>
-          <p:cNvSpPr/>
-          <p:nvPr/>
-        </p:nvSpPr>
-        <p:spPr>
-          <a:xfrm>
-            <a:off x="5778500" y="2635250"/>
-            <a:ext cx="419100" cy="317500"/>
-          </a:xfrm>
-          <a:prstGeom prst="rightArrow">
+            <a:off x="4572000" y="3238500"/>
+            <a:ext cx="2540000" cy="2476500"/>
+          </a:xfrm>
+          <a:prstGeom prst="rect">
             <a:avLst/>
-          </a:prstGeom>
-          <a:solidFill>
-            <a:srgbClr val="6B7280"/>
-          </a:solidFill>
-          <a:ln>
-            <a:noFill/>
-          </a:ln>
-          <a:effectLst/>
-        </p:spPr>
-        <p:style>
-          <a:lnRef idx="1">
-            <a:schemeClr val="accent1"/>
-          </a:lnRef>
-          <a:fillRef idx="3">
-            <a:schemeClr val="accent1"/>
-          </a:fillRef>
-          <a:effectRef idx="2">
-            <a:schemeClr val="accent1"/>
-          </a:effectRef>
-          <a:fontRef idx="minor">
-            <a:schemeClr val="lt1"/>
-          </a:fontRef>
-        </p:style>
-        <p:txBody>
-          <a:bodyPr rtlCol="0" anchor="ctr"/>
-          <a:lstStyle/>
-          <a:p>
-            <a:pPr algn="ctr"/>
-          </a:p>
-        </p:txBody>
-      </p:sp>
-      <p:sp>
-        <p:nvSpPr>
-          <p:cNvPr id="9" name="Rounded Rectangle 8"/>
-          <p:cNvSpPr/>
-          <p:nvPr/>
-        </p:nvSpPr>
-        <p:spPr>
-          <a:xfrm>
-            <a:off x="6273800" y="2095500"/>
-            <a:ext cx="2159000" cy="1397000"/>
-          </a:xfrm>
-          <a:prstGeom prst="roundRect">
-            <a:avLst>
-              <a:gd name="adj" fmla="val 8181"/>
-            </a:avLst>
           </a:prstGeom>
           <a:solidFill>
             <a:srgbClr val="E2EAF5"/>
@@ -13073,7 +13072,7 @@
           </a:fontRef>
         </p:style>
         <p:txBody>
-          <a:bodyPr rtlCol="0" anchor="ctr" wrap="square" lIns="101600" rIns="101600" tIns="101600" bIns="101600"/>
+          <a:bodyPr rtlCol="0" anchor="ctr" wrap="square" lIns="76200" rIns="76200" tIns="76200" bIns="76200"/>
           <a:lstStyle/>
           <a:p>
             <a:pPr algn="ctr">
@@ -13081,17 +13080,17 @@
                 <a:spcPct val="115000"/>
               </a:lnSpc>
               <a:spcAft>
-                <a:spcPts val="800"/>
-              </a:spcAft>
-            </a:pPr>
-            <a:r>
-              <a:rPr sz="2200" b="1">
+                <a:spcPts val="600"/>
+              </a:spcAft>
+            </a:pPr>
+            <a:r>
+              <a:rPr sz="2400" b="1">
                 <a:solidFill>
                   <a:srgbClr val="14213D"/>
                 </a:solidFill>
                 <a:latin typeface="Arial"/>
               </a:rPr>
-              <a:t>Reviewer</a:t>
+              <a:t>Single agent</a:t>
             </a:r>
           </a:p>
           <a:p>
@@ -13104,13 +13103,56 @@
               </a:spcAft>
             </a:pPr>
             <a:r>
-              <a:rPr sz="1700" b="1">
+              <a:rPr sz="1800" b="1">
                 <a:solidFill>
                   <a:srgbClr val="2E5C99"/>
                 </a:solidFill>
                 <a:latin typeface="Arial"/>
               </a:rPr>
-              <a:t>“Looks good” ACCEPTED</a:t>
+              <a:t>medium</a:t>
+            </a:r>
+          </a:p>
+        </p:txBody>
+      </p:sp>
+      <p:sp>
+        <p:nvSpPr>
+          <p:cNvPr id="9" name="TextBox 8"/>
+          <p:cNvSpPr txBox="1"/>
+          <p:nvPr/>
+        </p:nvSpPr>
+        <p:spPr>
+          <a:xfrm>
+            <a:off x="7112000" y="3175000"/>
+            <a:ext cx="1016000" cy="381000"/>
+          </a:xfrm>
+          <a:prstGeom prst="rect">
+            <a:avLst/>
+          </a:prstGeom>
+          <a:noFill/>
+        </p:spPr>
+        <p:txBody>
+          <a:bodyPr wrap="square" lIns="0" rIns="0" tIns="0" bIns="0" anchor="t">
+            <a:spAutoFit/>
+          </a:bodyPr>
+          <a:lstStyle/>
+          <a:p>
+            <a:pPr algn="ctr">
+              <a:lnSpc>
+                <a:spcPct val="115000"/>
+              </a:lnSpc>
+              <a:spcAft>
+                <a:spcPts val="0"/>
+              </a:spcAft>
+            </a:pPr>
+            <a:r>
+              <a:rPr sz="1500" b="1">
+                <a:solidFill>
+                  <a:srgbClr val="6B7280"/>
+                </a:solidFill>
+                <a:latin typeface="Arial"/>
+              </a:rPr>
+              <a:t>not sure?
+go up</a:t>
             </a:r>
           </a:p>
         </p:txBody>
@@ -13123,8 +13165,8 @@
         </p:nvSpPr>
         <p:spPr>
           <a:xfrm>
-            <a:off x="8509000" y="2635250"/>
-            <a:ext cx="419100" cy="317500"/>
+            <a:off x="7207250" y="3683000"/>
+            <a:ext cx="825500" cy="279400"/>
           </a:xfrm>
           <a:prstGeom prst="rightArrow">
             <a:avLst/>
@@ -13161,26 +13203,24 @@
       </p:sp>
       <p:sp>
         <p:nvSpPr>
-          <p:cNvPr id="11" name="Rounded Rectangle 10"/>
+          <p:cNvPr id="11" name="Rectangle 10"/>
           <p:cNvSpPr/>
           <p:nvPr/>
         </p:nvSpPr>
         <p:spPr>
           <a:xfrm>
-            <a:off x="9004300" y="2095500"/>
-            <a:ext cx="2159000" cy="1397000"/>
-          </a:xfrm>
-          <a:prstGeom prst="roundRect">
-            <a:avLst>
-              <a:gd name="adj" fmla="val 8181"/>
-            </a:avLst>
+            <a:off x="8128000" y="2349500"/>
+            <a:ext cx="2540000" cy="3365500"/>
+          </a:xfrm>
+          <a:prstGeom prst="rect">
+            <a:avLst/>
           </a:prstGeom>
           <a:solidFill>
-            <a:srgbClr val="F6E3E0"/>
+            <a:srgbClr val="F8E8DC"/>
           </a:solidFill>
           <a:ln w="31750">
             <a:solidFill>
-              <a:srgbClr val="B03A2E"/>
+              <a:srgbClr val="B4541A"/>
             </a:solidFill>
           </a:ln>
           <a:effectLst/>
@@ -13200,7 +13240,7 @@
           </a:fontRef>
         </p:style>
         <p:txBody>
-          <a:bodyPr rtlCol="0" anchor="ctr" wrap="square" lIns="101600" rIns="101600" tIns="101600" bIns="101600"/>
+          <a:bodyPr rtlCol="0" anchor="ctr" wrap="square" lIns="76200" rIns="76200" tIns="76200" bIns="76200"/>
           <a:lstStyle/>
           <a:p>
             <a:pPr algn="ctr">
@@ -13208,17 +13248,17 @@
                 <a:spcPct val="115000"/>
               </a:lnSpc>
               <a:spcAft>
-                <a:spcPts val="800"/>
-              </a:spcAft>
-            </a:pPr>
-            <a:r>
-              <a:rPr sz="2200" b="1">
+                <a:spcPts val="600"/>
+              </a:spcAft>
+            </a:pPr>
+            <a:r>
+              <a:rPr sz="2400" b="1">
                 <a:solidFill>
                   <a:srgbClr val="14213D"/>
                 </a:solidFill>
                 <a:latin typeface="Arial"/>
               </a:rPr>
-              <a:t>Final answer</a:t>
+              <a:t>Agent team</a:t>
             </a:r>
           </a:p>
           <a:p>
@@ -13231,179 +13271,139 @@
               </a:spcAft>
             </a:pPr>
             <a:r>
+              <a:rPr sz="1800" b="1">
+                <a:solidFill>
+                  <a:srgbClr val="B4541A"/>
+                </a:solidFill>
+                <a:latin typeface="Arial"/>
+              </a:rPr>
+              <a:t>most expensive</a:t>
+            </a:r>
+          </a:p>
+        </p:txBody>
+      </p:sp>
+      <p:sp>
+        <p:nvSpPr>
+          <p:cNvPr id="12" name="TextBox 11"/>
+          <p:cNvSpPr txBox="1"/>
+          <p:nvPr/>
+        </p:nvSpPr>
+        <p:spPr>
+          <a:xfrm>
+            <a:off x="1016000" y="5842000"/>
+            <a:ext cx="2540000" cy="317500"/>
+          </a:xfrm>
+          <a:prstGeom prst="rect">
+            <a:avLst/>
+          </a:prstGeom>
+          <a:noFill/>
+        </p:spPr>
+        <p:txBody>
+          <a:bodyPr wrap="square" lIns="0" rIns="0" tIns="0" bIns="0" anchor="t">
+            <a:spAutoFit/>
+          </a:bodyPr>
+          <a:lstStyle/>
+          <a:p>
+            <a:pPr algn="ctr">
+              <a:lnSpc>
+                <a:spcPct val="115000"/>
+              </a:lnSpc>
+              <a:spcAft>
+                <a:spcPts val="0"/>
+              </a:spcAft>
+            </a:pPr>
+            <a:r>
               <a:rPr sz="1700" b="1">
                 <a:solidFill>
-                  <a:srgbClr val="B03A2E"/>
-                </a:solidFill>
-                <a:latin typeface="Arial"/>
-              </a:rPr>
-              <a:t>WRONG</a:t>
-            </a:r>
-          </a:p>
-        </p:txBody>
-      </p:sp>
-      <p:sp>
-        <p:nvSpPr>
-          <p:cNvPr id="12" name="Rounded Rectangle 11"/>
-          <p:cNvSpPr/>
-          <p:nvPr/>
-        </p:nvSpPr>
-        <p:spPr>
-          <a:xfrm>
-            <a:off x="812800" y="4064000"/>
-            <a:ext cx="5080000" cy="1587500"/>
-          </a:xfrm>
-          <a:prstGeom prst="roundRect">
-            <a:avLst>
-              <a:gd name="adj" fmla="val 7199"/>
-            </a:avLst>
-          </a:prstGeom>
-          <a:solidFill>
-            <a:srgbClr val="FDFCF9"/>
-          </a:solidFill>
-          <a:ln w="12700">
-            <a:solidFill>
-              <a:srgbClr val="DDD8CC"/>
-            </a:solidFill>
-          </a:ln>
-          <a:effectLst/>
-        </p:spPr>
-        <p:style>
-          <a:lnRef idx="1">
-            <a:schemeClr val="accent1"/>
-          </a:lnRef>
-          <a:fillRef idx="3">
-            <a:schemeClr val="accent1"/>
-          </a:fillRef>
-          <a:effectRef idx="2">
-            <a:schemeClr val="accent1"/>
-          </a:effectRef>
-          <a:fontRef idx="minor">
-            <a:schemeClr val="lt1"/>
-          </a:fontRef>
-        </p:style>
-        <p:txBody>
-          <a:bodyPr rtlCol="0" anchor="ctr" wrap="square" lIns="190500" rIns="190500" tIns="190500" bIns="190500"/>
-          <a:lstStyle/>
-          <a:p>
-            <a:pPr algn="l">
-              <a:lnSpc>
-                <a:spcPct val="100000"/>
-              </a:lnSpc>
-              <a:spcAft>
-                <a:spcPts val="600"/>
-              </a:spcAft>
-            </a:pPr>
-            <a:r>
-              <a:rPr sz="3600" b="1">
-                <a:solidFill>
-                  <a:srgbClr val="B03A2E"/>
-                </a:solidFill>
-                <a:latin typeface="Georgia"/>
-              </a:rPr>
-              <a:t>84%</a:t>
-            </a:r>
-          </a:p>
-          <a:p>
-            <a:pPr algn="l">
-              <a:lnSpc>
-                <a:spcPct val="115000"/>
-              </a:lnSpc>
-              <a:spcAft>
-                <a:spcPts val="0"/>
-              </a:spcAft>
-            </a:pPr>
-            <a:r>
-              <a:rPr sz="1700" b="0">
-                <a:solidFill>
-                  <a:srgbClr val="3A4150"/>
-                </a:solidFill>
-                <a:latin typeface="Arial"/>
-              </a:rPr>
-              <a:t>of broken answers start as a wrong first draft the reviewer did not catch</a:t>
-            </a:r>
-          </a:p>
-        </p:txBody>
-      </p:sp>
-      <p:sp>
-        <p:nvSpPr>
-          <p:cNvPr id="13" name="Rounded Rectangle 12"/>
-          <p:cNvSpPr/>
-          <p:nvPr/>
-        </p:nvSpPr>
-        <p:spPr>
-          <a:xfrm>
-            <a:off x="6299200" y="4064000"/>
-            <a:ext cx="5080000" cy="1587500"/>
-          </a:xfrm>
-          <a:prstGeom prst="roundRect">
-            <a:avLst>
-              <a:gd name="adj" fmla="val 7199"/>
-            </a:avLst>
-          </a:prstGeom>
-          <a:solidFill>
-            <a:srgbClr val="FDFCF9"/>
-          </a:solidFill>
-          <a:ln w="12700">
-            <a:solidFill>
-              <a:srgbClr val="DDD8CC"/>
-            </a:solidFill>
-          </a:ln>
-          <a:effectLst/>
-        </p:spPr>
-        <p:style>
-          <a:lnRef idx="1">
-            <a:schemeClr val="accent1"/>
-          </a:lnRef>
-          <a:fillRef idx="3">
-            <a:schemeClr val="accent1"/>
-          </a:fillRef>
-          <a:effectRef idx="2">
-            <a:schemeClr val="accent1"/>
-          </a:effectRef>
-          <a:fontRef idx="minor">
-            <a:schemeClr val="lt1"/>
-          </a:fontRef>
-        </p:style>
-        <p:txBody>
-          <a:bodyPr rtlCol="0" anchor="ctr" wrap="square" lIns="190500" rIns="190500" tIns="190500" bIns="190500"/>
-          <a:lstStyle/>
-          <a:p>
-            <a:pPr algn="l">
-              <a:lnSpc>
-                <a:spcPct val="100000"/>
-              </a:lnSpc>
-              <a:spcAft>
-                <a:spcPts val="600"/>
-              </a:spcAft>
-            </a:pPr>
-            <a:r>
-              <a:rPr sz="3600" b="1">
-                <a:solidFill>
-                  <a:srgbClr val="B03A2E"/>
-                </a:solidFill>
-                <a:latin typeface="Georgia"/>
-              </a:rPr>
-              <a:t>23–58%</a:t>
-            </a:r>
-          </a:p>
-          <a:p>
-            <a:pPr algn="l">
-              <a:lnSpc>
-                <a:spcPct val="115000"/>
-              </a:lnSpc>
-              <a:spcAft>
-                <a:spcPts val="0"/>
-              </a:spcAft>
-            </a:pPr>
-            <a:r>
-              <a:rPr sz="1700" b="0">
-                <a:solidFill>
-                  <a:srgbClr val="3A4150"/>
-                </a:solidFill>
-                <a:latin typeface="Arial"/>
-              </a:rPr>
-              <a:t>of wrong answers are accepted by the reviewer</a:t>
+                  <a:srgbClr val="2F6B34"/>
+                </a:solidFill>
+                <a:latin typeface="Arial"/>
+              </a:rPr>
+              <a:t>sure? stop and answer</a:t>
+            </a:r>
+          </a:p>
+        </p:txBody>
+      </p:sp>
+      <p:sp>
+        <p:nvSpPr>
+          <p:cNvPr id="13" name="TextBox 12"/>
+          <p:cNvSpPr txBox="1"/>
+          <p:nvPr/>
+        </p:nvSpPr>
+        <p:spPr>
+          <a:xfrm>
+            <a:off x="4572000" y="5842000"/>
+            <a:ext cx="2540000" cy="317500"/>
+          </a:xfrm>
+          <a:prstGeom prst="rect">
+            <a:avLst/>
+          </a:prstGeom>
+          <a:noFill/>
+        </p:spPr>
+        <p:txBody>
+          <a:bodyPr wrap="square" lIns="0" rIns="0" tIns="0" bIns="0" anchor="t">
+            <a:spAutoFit/>
+          </a:bodyPr>
+          <a:lstStyle/>
+          <a:p>
+            <a:pPr algn="ctr">
+              <a:lnSpc>
+                <a:spcPct val="115000"/>
+              </a:lnSpc>
+              <a:spcAft>
+                <a:spcPts val="0"/>
+              </a:spcAft>
+            </a:pPr>
+            <a:r>
+              <a:rPr sz="1700" b="1">
+                <a:solidFill>
+                  <a:srgbClr val="2F6B34"/>
+                </a:solidFill>
+                <a:latin typeface="Arial"/>
+              </a:rPr>
+              <a:t>sure? stop and answer</a:t>
+            </a:r>
+          </a:p>
+        </p:txBody>
+      </p:sp>
+      <p:sp>
+        <p:nvSpPr>
+          <p:cNvPr id="14" name="TextBox 13"/>
+          <p:cNvSpPr txBox="1"/>
+          <p:nvPr/>
+        </p:nvSpPr>
+        <p:spPr>
+          <a:xfrm>
+            <a:off x="8128000" y="5842000"/>
+            <a:ext cx="2540000" cy="317500"/>
+          </a:xfrm>
+          <a:prstGeom prst="rect">
+            <a:avLst/>
+          </a:prstGeom>
+          <a:noFill/>
+        </p:spPr>
+        <p:txBody>
+          <a:bodyPr wrap="square" lIns="0" rIns="0" tIns="0" bIns="0" anchor="t">
+            <a:spAutoFit/>
+          </a:bodyPr>
+          <a:lstStyle/>
+          <a:p>
+            <a:pPr algn="ctr">
+              <a:lnSpc>
+                <a:spcPct val="115000"/>
+              </a:lnSpc>
+              <a:spcAft>
+                <a:spcPts val="0"/>
+              </a:spcAft>
+            </a:pPr>
+            <a:r>
+              <a:rPr sz="1700" b="1">
+                <a:solidFill>
+                  <a:srgbClr val="B4541A"/>
+                </a:solidFill>
+                <a:latin typeface="Arial"/>
+              </a:rPr>
+              <a:t>always answers</a:t>
             </a:r>
           </a:p>
         </p:txBody>
@@ -13513,7 +13513,7 @@
                 </a:solidFill>
                 <a:latin typeface="Arial"/>
               </a:rPr>
-              <a:t>THE IDEA</a:t>
+              <a:t>SIGNALS</a:t>
             </a:r>
           </a:p>
         </p:txBody>
@@ -13555,31 +13555,57 @@
                 </a:solidFill>
                 <a:latin typeface="Georgia"/>
               </a:rPr>
-              <a:t>Climb a ladder: call the team only when needed</a:t>
-            </a:r>
-          </a:p>
-        </p:txBody>
-      </p:sp>
-      <p:sp>
-        <p:nvSpPr>
-          <p:cNvPr id="5" name="Rectangle 4"/>
-          <p:cNvSpPr/>
-          <p:nvPr/>
-        </p:nvSpPr>
-        <p:spPr>
-          <a:xfrm>
-            <a:off x="1016000" y="4127500"/>
-            <a:ext cx="2540000" cy="1587500"/>
+              <a:t>Signal 1: how confident is the direct answer?</a:t>
+            </a:r>
+          </a:p>
+        </p:txBody>
+      </p:sp>
+      <p:pic>
+        <p:nvPicPr>
+          <p:cNvPr id="5" name="Picture 4" descr="c_auroc.png"/>
+          <p:cNvPicPr>
+            <a:picLocks noChangeAspect="1"/>
+          </p:cNvPicPr>
+          <p:nvPr/>
+        </p:nvPicPr>
+        <p:blipFill>
+          <a:blip r:embed="rId3"/>
+          <a:stretch>
+            <a:fillRect/>
+          </a:stretch>
+        </p:blipFill>
+        <p:spPr>
+          <a:xfrm>
+            <a:off x="812800" y="2046894"/>
+            <a:ext cx="7302500" cy="3653211"/>
           </a:xfrm>
           <a:prstGeom prst="rect">
             <a:avLst/>
+          </a:prstGeom>
+        </p:spPr>
+      </p:pic>
+      <p:sp>
+        <p:nvSpPr>
+          <p:cNvPr id="6" name="Rounded Rectangle 5"/>
+          <p:cNvSpPr/>
+          <p:nvPr/>
+        </p:nvSpPr>
+        <p:spPr>
+          <a:xfrm>
+            <a:off x="8445500" y="2095500"/>
+            <a:ext cx="2933700" cy="1651000"/>
+          </a:xfrm>
+          <a:prstGeom prst="roundRect">
+            <a:avLst>
+              <a:gd name="adj" fmla="val 6923"/>
+            </a:avLst>
           </a:prstGeom>
           <a:solidFill>
             <a:srgbClr val="E2EAF5"/>
           </a:solidFill>
-          <a:ln w="31750">
+          <a:ln w="12700">
             <a:solidFill>
-              <a:srgbClr val="2E5C99"/>
+              <a:srgbClr val="DDD8CC"/>
             </a:solidFill>
           </a:ln>
           <a:effectLst/>
@@ -13599,110 +13625,71 @@
           </a:fontRef>
         </p:style>
         <p:txBody>
-          <a:bodyPr rtlCol="0" anchor="ctr" wrap="square" lIns="76200" rIns="76200" tIns="76200" bIns="76200"/>
-          <a:lstStyle/>
-          <a:p>
-            <a:pPr algn="ctr">
-              <a:lnSpc>
-                <a:spcPct val="115000"/>
+          <a:bodyPr rtlCol="0" anchor="ctr" wrap="square" lIns="190500" rIns="190500" tIns="190500" bIns="190500"/>
+          <a:lstStyle/>
+          <a:p>
+            <a:pPr algn="l">
+              <a:lnSpc>
+                <a:spcPct val="100000"/>
               </a:lnSpc>
               <a:spcAft>
                 <a:spcPts val="600"/>
               </a:spcAft>
             </a:pPr>
             <a:r>
-              <a:rPr sz="2400" b="1">
-                <a:solidFill>
-                  <a:srgbClr val="14213D"/>
-                </a:solidFill>
-                <a:latin typeface="Arial"/>
-              </a:rPr>
-              <a:t>Direct answer</a:t>
-            </a:r>
-          </a:p>
-          <a:p>
-            <a:pPr algn="ctr">
-              <a:lnSpc>
-                <a:spcPct val="115000"/>
-              </a:lnSpc>
-              <a:spcAft>
-                <a:spcPts val="0"/>
-              </a:spcAft>
-            </a:pPr>
-            <a:r>
-              <a:rPr sz="1800" b="1">
+              <a:rPr sz="3600" b="1">
                 <a:solidFill>
                   <a:srgbClr val="2E5C99"/>
                 </a:solidFill>
-                <a:latin typeface="Arial"/>
-              </a:rPr>
-              <a:t>cheapest</a:t>
-            </a:r>
-          </a:p>
-        </p:txBody>
-      </p:sp>
-      <p:sp>
-        <p:nvSpPr>
-          <p:cNvPr id="6" name="TextBox 5"/>
-          <p:cNvSpPr txBox="1"/>
-          <p:nvPr/>
-        </p:nvSpPr>
-        <p:spPr>
-          <a:xfrm>
-            <a:off x="3556000" y="4064000"/>
-            <a:ext cx="1016000" cy="381000"/>
-          </a:xfrm>
-          <a:prstGeom prst="rect">
-            <a:avLst/>
-          </a:prstGeom>
-          <a:noFill/>
-        </p:spPr>
-        <p:txBody>
-          <a:bodyPr wrap="square" lIns="0" rIns="0" tIns="0" bIns="0" anchor="t">
-            <a:spAutoFit/>
-          </a:bodyPr>
-          <a:lstStyle/>
-          <a:p>
-            <a:pPr algn="ctr">
-              <a:lnSpc>
-                <a:spcPct val="115000"/>
-              </a:lnSpc>
-              <a:spcAft>
-                <a:spcPts val="0"/>
-              </a:spcAft>
-            </a:pPr>
-            <a:r>
-              <a:rPr sz="1500" b="1">
-                <a:solidFill>
-                  <a:srgbClr val="6B7280"/>
-                </a:solidFill>
-                <a:latin typeface="Arial"/>
-              </a:rPr>
-              <a:t>not sure?
-go up</a:t>
-            </a:r>
-          </a:p>
-        </p:txBody>
-      </p:sp>
-      <p:sp>
-        <p:nvSpPr>
-          <p:cNvPr id="7" name="Right Arrow 6"/>
+                <a:latin typeface="Georgia"/>
+              </a:rPr>
+              <a:t>usually helps</a:t>
+            </a:r>
+          </a:p>
+          <a:p>
+            <a:pPr algn="l">
+              <a:lnSpc>
+                <a:spcPct val="115000"/>
+              </a:lnSpc>
+              <a:spcAft>
+                <a:spcPts val="0"/>
+              </a:spcAft>
+            </a:pPr>
+            <a:r>
+              <a:rPr sz="1700" b="0">
+                <a:solidFill>
+                  <a:srgbClr val="3A4150"/>
+                </a:solidFill>
+                <a:latin typeface="Arial"/>
+              </a:rPr>
+              <a:t>confident answers tend to be right</a:t>
+            </a:r>
+          </a:p>
+        </p:txBody>
+      </p:sp>
+      <p:sp>
+        <p:nvSpPr>
+          <p:cNvPr id="7" name="Rounded Rectangle 6"/>
           <p:cNvSpPr/>
           <p:nvPr/>
         </p:nvSpPr>
         <p:spPr>
           <a:xfrm>
-            <a:off x="3651250" y="4572000"/>
-            <a:ext cx="825500" cy="279400"/>
-          </a:xfrm>
-          <a:prstGeom prst="rightArrow">
-            <a:avLst/>
+            <a:off x="8445500" y="4000500"/>
+            <a:ext cx="2933700" cy="1651000"/>
+          </a:xfrm>
+          <a:prstGeom prst="roundRect">
+            <a:avLst>
+              <a:gd name="adj" fmla="val 6923"/>
+            </a:avLst>
           </a:prstGeom>
           <a:solidFill>
-            <a:srgbClr val="6B7280"/>
+            <a:srgbClr val="F6E3E0"/>
           </a:solidFill>
-          <a:ln>
-            <a:noFill/>
+          <a:ln w="12700">
+            <a:solidFill>
+              <a:srgbClr val="DDD8CC"/>
+            </a:solidFill>
           </a:ln>
           <a:effectLst/>
         </p:spPr>
@@ -13721,384 +13708,44 @@
           </a:fontRef>
         </p:style>
         <p:txBody>
-          <a:bodyPr rtlCol="0" anchor="ctr"/>
-          <a:lstStyle/>
-          <a:p>
-            <a:pPr algn="ctr"/>
-          </a:p>
-        </p:txBody>
-      </p:sp>
-      <p:sp>
-        <p:nvSpPr>
-          <p:cNvPr id="8" name="Rectangle 7"/>
-          <p:cNvSpPr/>
-          <p:nvPr/>
-        </p:nvSpPr>
-        <p:spPr>
-          <a:xfrm>
-            <a:off x="4572000" y="3238500"/>
-            <a:ext cx="2540000" cy="2476500"/>
-          </a:xfrm>
-          <a:prstGeom prst="rect">
-            <a:avLst/>
-          </a:prstGeom>
-          <a:solidFill>
-            <a:srgbClr val="E2EAF5"/>
-          </a:solidFill>
-          <a:ln w="31750">
-            <a:solidFill>
-              <a:srgbClr val="2E5C99"/>
-            </a:solidFill>
-          </a:ln>
-          <a:effectLst/>
-        </p:spPr>
-        <p:style>
-          <a:lnRef idx="1">
-            <a:schemeClr val="accent1"/>
-          </a:lnRef>
-          <a:fillRef idx="3">
-            <a:schemeClr val="accent1"/>
-          </a:fillRef>
-          <a:effectRef idx="2">
-            <a:schemeClr val="accent1"/>
-          </a:effectRef>
-          <a:fontRef idx="minor">
-            <a:schemeClr val="lt1"/>
-          </a:fontRef>
-        </p:style>
-        <p:txBody>
-          <a:bodyPr rtlCol="0" anchor="ctr" wrap="square" lIns="76200" rIns="76200" tIns="76200" bIns="76200"/>
-          <a:lstStyle/>
-          <a:p>
-            <a:pPr algn="ctr">
-              <a:lnSpc>
-                <a:spcPct val="115000"/>
+          <a:bodyPr rtlCol="0" anchor="ctr" wrap="square" lIns="190500" rIns="190500" tIns="190500" bIns="190500"/>
+          <a:lstStyle/>
+          <a:p>
+            <a:pPr algn="l">
+              <a:lnSpc>
+                <a:spcPct val="100000"/>
               </a:lnSpc>
               <a:spcAft>
                 <a:spcPts val="600"/>
               </a:spcAft>
             </a:pPr>
             <a:r>
-              <a:rPr sz="2400" b="1">
-                <a:solidFill>
-                  <a:srgbClr val="14213D"/>
-                </a:solidFill>
-                <a:latin typeface="Arial"/>
-              </a:rPr>
-              <a:t>Single agent</a:t>
-            </a:r>
-          </a:p>
-          <a:p>
-            <a:pPr algn="ctr">
-              <a:lnSpc>
-                <a:spcPct val="115000"/>
-              </a:lnSpc>
-              <a:spcAft>
-                <a:spcPts val="0"/>
-              </a:spcAft>
-            </a:pPr>
-            <a:r>
-              <a:rPr sz="1800" b="1">
-                <a:solidFill>
-                  <a:srgbClr val="2E5C99"/>
-                </a:solidFill>
-                <a:latin typeface="Arial"/>
-              </a:rPr>
-              <a:t>medium</a:t>
-            </a:r>
-          </a:p>
-        </p:txBody>
-      </p:sp>
-      <p:sp>
-        <p:nvSpPr>
-          <p:cNvPr id="9" name="TextBox 8"/>
-          <p:cNvSpPr txBox="1"/>
-          <p:nvPr/>
-        </p:nvSpPr>
-        <p:spPr>
-          <a:xfrm>
-            <a:off x="7112000" y="3175000"/>
-            <a:ext cx="1016000" cy="381000"/>
-          </a:xfrm>
-          <a:prstGeom prst="rect">
-            <a:avLst/>
-          </a:prstGeom>
-          <a:noFill/>
-        </p:spPr>
-        <p:txBody>
-          <a:bodyPr wrap="square" lIns="0" rIns="0" tIns="0" bIns="0" anchor="t">
-            <a:spAutoFit/>
-          </a:bodyPr>
-          <a:lstStyle/>
-          <a:p>
-            <a:pPr algn="ctr">
-              <a:lnSpc>
-                <a:spcPct val="115000"/>
-              </a:lnSpc>
-              <a:spcAft>
-                <a:spcPts val="0"/>
-              </a:spcAft>
-            </a:pPr>
-            <a:r>
-              <a:rPr sz="1500" b="1">
-                <a:solidFill>
-                  <a:srgbClr val="6B7280"/>
-                </a:solidFill>
-                <a:latin typeface="Arial"/>
-              </a:rPr>
-              <a:t>not sure?
-go up</a:t>
-            </a:r>
-          </a:p>
-        </p:txBody>
-      </p:sp>
-      <p:sp>
-        <p:nvSpPr>
-          <p:cNvPr id="10" name="Right Arrow 9"/>
-          <p:cNvSpPr/>
-          <p:nvPr/>
-        </p:nvSpPr>
-        <p:spPr>
-          <a:xfrm>
-            <a:off x="7207250" y="3683000"/>
-            <a:ext cx="825500" cy="279400"/>
-          </a:xfrm>
-          <a:prstGeom prst="rightArrow">
-            <a:avLst/>
-          </a:prstGeom>
-          <a:solidFill>
-            <a:srgbClr val="6B7280"/>
-          </a:solidFill>
-          <a:ln>
-            <a:noFill/>
-          </a:ln>
-          <a:effectLst/>
-        </p:spPr>
-        <p:style>
-          <a:lnRef idx="1">
-            <a:schemeClr val="accent1"/>
-          </a:lnRef>
-          <a:fillRef idx="3">
-            <a:schemeClr val="accent1"/>
-          </a:fillRef>
-          <a:effectRef idx="2">
-            <a:schemeClr val="accent1"/>
-          </a:effectRef>
-          <a:fontRef idx="minor">
-            <a:schemeClr val="lt1"/>
-          </a:fontRef>
-        </p:style>
-        <p:txBody>
-          <a:bodyPr rtlCol="0" anchor="ctr"/>
-          <a:lstStyle/>
-          <a:p>
-            <a:pPr algn="ctr"/>
-          </a:p>
-        </p:txBody>
-      </p:sp>
-      <p:sp>
-        <p:nvSpPr>
-          <p:cNvPr id="11" name="Rectangle 10"/>
-          <p:cNvSpPr/>
-          <p:nvPr/>
-        </p:nvSpPr>
-        <p:spPr>
-          <a:xfrm>
-            <a:off x="8128000" y="2349500"/>
-            <a:ext cx="2540000" cy="3365500"/>
-          </a:xfrm>
-          <a:prstGeom prst="rect">
-            <a:avLst/>
-          </a:prstGeom>
-          <a:solidFill>
-            <a:srgbClr val="F8E8DC"/>
-          </a:solidFill>
-          <a:ln w="31750">
-            <a:solidFill>
-              <a:srgbClr val="B4541A"/>
-            </a:solidFill>
-          </a:ln>
-          <a:effectLst/>
-        </p:spPr>
-        <p:style>
-          <a:lnRef idx="1">
-            <a:schemeClr val="accent1"/>
-          </a:lnRef>
-          <a:fillRef idx="3">
-            <a:schemeClr val="accent1"/>
-          </a:fillRef>
-          <a:effectRef idx="2">
-            <a:schemeClr val="accent1"/>
-          </a:effectRef>
-          <a:fontRef idx="minor">
-            <a:schemeClr val="lt1"/>
-          </a:fontRef>
-        </p:style>
-        <p:txBody>
-          <a:bodyPr rtlCol="0" anchor="ctr" wrap="square" lIns="76200" rIns="76200" tIns="76200" bIns="76200"/>
-          <a:lstStyle/>
-          <a:p>
-            <a:pPr algn="ctr">
-              <a:lnSpc>
-                <a:spcPct val="115000"/>
-              </a:lnSpc>
-              <a:spcAft>
-                <a:spcPts val="600"/>
-              </a:spcAft>
-            </a:pPr>
-            <a:r>
-              <a:rPr sz="2400" b="1">
-                <a:solidFill>
-                  <a:srgbClr val="14213D"/>
-                </a:solidFill>
-                <a:latin typeface="Arial"/>
-              </a:rPr>
-              <a:t>Agent team</a:t>
-            </a:r>
-          </a:p>
-          <a:p>
-            <a:pPr algn="ctr">
-              <a:lnSpc>
-                <a:spcPct val="115000"/>
-              </a:lnSpc>
-              <a:spcAft>
-                <a:spcPts val="0"/>
-              </a:spcAft>
-            </a:pPr>
-            <a:r>
-              <a:rPr sz="1800" b="1">
-                <a:solidFill>
-                  <a:srgbClr val="B4541A"/>
-                </a:solidFill>
-                <a:latin typeface="Arial"/>
-              </a:rPr>
-              <a:t>most expensive</a:t>
-            </a:r>
-          </a:p>
-        </p:txBody>
-      </p:sp>
-      <p:sp>
-        <p:nvSpPr>
-          <p:cNvPr id="12" name="TextBox 11"/>
-          <p:cNvSpPr txBox="1"/>
-          <p:nvPr/>
-        </p:nvSpPr>
-        <p:spPr>
-          <a:xfrm>
-            <a:off x="1016000" y="5842000"/>
-            <a:ext cx="2540000" cy="317500"/>
-          </a:xfrm>
-          <a:prstGeom prst="rect">
-            <a:avLst/>
-          </a:prstGeom>
-          <a:noFill/>
-        </p:spPr>
-        <p:txBody>
-          <a:bodyPr wrap="square" lIns="0" rIns="0" tIns="0" bIns="0" anchor="t">
-            <a:spAutoFit/>
-          </a:bodyPr>
-          <a:lstStyle/>
-          <a:p>
-            <a:pPr algn="ctr">
-              <a:lnSpc>
-                <a:spcPct val="115000"/>
-              </a:lnSpc>
-              <a:spcAft>
-                <a:spcPts val="0"/>
-              </a:spcAft>
-            </a:pPr>
-            <a:r>
-              <a:rPr sz="1700" b="1">
-                <a:solidFill>
-                  <a:srgbClr val="2F6B34"/>
-                </a:solidFill>
-                <a:latin typeface="Arial"/>
-              </a:rPr>
-              <a:t>sure? stop and answer</a:t>
-            </a:r>
-          </a:p>
-        </p:txBody>
-      </p:sp>
-      <p:sp>
-        <p:nvSpPr>
-          <p:cNvPr id="13" name="TextBox 12"/>
-          <p:cNvSpPr txBox="1"/>
-          <p:nvPr/>
-        </p:nvSpPr>
-        <p:spPr>
-          <a:xfrm>
-            <a:off x="4572000" y="5842000"/>
-            <a:ext cx="2540000" cy="317500"/>
-          </a:xfrm>
-          <a:prstGeom prst="rect">
-            <a:avLst/>
-          </a:prstGeom>
-          <a:noFill/>
-        </p:spPr>
-        <p:txBody>
-          <a:bodyPr wrap="square" lIns="0" rIns="0" tIns="0" bIns="0" anchor="t">
-            <a:spAutoFit/>
-          </a:bodyPr>
-          <a:lstStyle/>
-          <a:p>
-            <a:pPr algn="ctr">
-              <a:lnSpc>
-                <a:spcPct val="115000"/>
-              </a:lnSpc>
-              <a:spcAft>
-                <a:spcPts val="0"/>
-              </a:spcAft>
-            </a:pPr>
-            <a:r>
-              <a:rPr sz="1700" b="1">
-                <a:solidFill>
-                  <a:srgbClr val="2F6B34"/>
-                </a:solidFill>
-                <a:latin typeface="Arial"/>
-              </a:rPr>
-              <a:t>sure? stop and answer</a:t>
-            </a:r>
-          </a:p>
-        </p:txBody>
-      </p:sp>
-      <p:sp>
-        <p:nvSpPr>
-          <p:cNvPr id="14" name="TextBox 13"/>
-          <p:cNvSpPr txBox="1"/>
-          <p:nvPr/>
-        </p:nvSpPr>
-        <p:spPr>
-          <a:xfrm>
-            <a:off x="8128000" y="5842000"/>
-            <a:ext cx="2540000" cy="317500"/>
-          </a:xfrm>
-          <a:prstGeom prst="rect">
-            <a:avLst/>
-          </a:prstGeom>
-          <a:noFill/>
-        </p:spPr>
-        <p:txBody>
-          <a:bodyPr wrap="square" lIns="0" rIns="0" tIns="0" bIns="0" anchor="t">
-            <a:spAutoFit/>
-          </a:bodyPr>
-          <a:lstStyle/>
-          <a:p>
-            <a:pPr algn="ctr">
-              <a:lnSpc>
-                <a:spcPct val="115000"/>
-              </a:lnSpc>
-              <a:spcAft>
-                <a:spcPts val="0"/>
-              </a:spcAft>
-            </a:pPr>
-            <a:r>
-              <a:rPr sz="1700" b="1">
-                <a:solidFill>
-                  <a:srgbClr val="B4541A"/>
-                </a:solidFill>
-                <a:latin typeface="Arial"/>
-              </a:rPr>
-              <a:t>always answers</a:t>
+              <a:rPr sz="3600" b="1">
+                <a:solidFill>
+                  <a:srgbClr val="B03A2E"/>
+                </a:solidFill>
+                <a:latin typeface="Georgia"/>
+              </a:rPr>
+              <a:t>3 of 12</a:t>
+            </a:r>
+          </a:p>
+          <a:p>
+            <a:pPr algn="l">
+              <a:lnSpc>
+                <a:spcPct val="115000"/>
+              </a:lnSpc>
+              <a:spcAft>
+                <a:spcPts val="0"/>
+              </a:spcAft>
+            </a:pPr>
+            <a:r>
+              <a:rPr sz="1700" b="0">
+                <a:solidFill>
+                  <a:srgbClr val="3A4150"/>
+                </a:solidFill>
+                <a:latin typeface="Arial"/>
+              </a:rPr>
+              <a:t>settings where it points the wrong way</a:t>
             </a:r>
           </a:p>
         </p:txBody>
@@ -14250,14 +13897,14 @@
                 </a:solidFill>
                 <a:latin typeface="Georgia"/>
               </a:rPr>
-              <a:t>Signal 1: how confident is the direct answer?</a:t>
+              <a:t>Signal 2: do two cheap answers agree?</a:t>
             </a:r>
           </a:p>
         </p:txBody>
       </p:sp>
       <p:pic>
         <p:nvPicPr>
-          <p:cNvPr id="5" name="Picture 4" descr="c_auroc.png"/>
+          <p:cNvPr id="5" name="Picture 4" descr="c_agree.png"/>
           <p:cNvPicPr>
             <a:picLocks noChangeAspect="1"/>
           </p:cNvPicPr>
@@ -14271,8 +13918,8 @@
         </p:blipFill>
         <p:spPr>
           <a:xfrm>
-            <a:off x="812800" y="2046894"/>
-            <a:ext cx="7302500" cy="3653211"/>
+            <a:off x="812800" y="1922942"/>
+            <a:ext cx="7302500" cy="3901114"/>
           </a:xfrm>
           <a:prstGeom prst="rect">
             <a:avLst/>
@@ -14287,16 +13934,16 @@
         </p:nvSpPr>
         <p:spPr>
           <a:xfrm>
-            <a:off x="8445500" y="2095500"/>
-            <a:ext cx="2933700" cy="1651000"/>
+            <a:off x="8445500" y="2286000"/>
+            <a:ext cx="2933700" cy="1905000"/>
           </a:xfrm>
           <a:prstGeom prst="roundRect">
             <a:avLst>
-              <a:gd name="adj" fmla="val 6923"/>
+              <a:gd name="adj" fmla="val 6000"/>
             </a:avLst>
           </a:prstGeom>
           <a:solidFill>
-            <a:srgbClr val="E2EAF5"/>
+            <a:srgbClr val="E3ECE2"/>
           </a:solidFill>
           <a:ln w="12700">
             <a:solidFill>
@@ -14334,11 +13981,11 @@
             <a:r>
               <a:rPr sz="3600" b="1">
                 <a:solidFill>
-                  <a:srgbClr val="2E5C99"/>
+                  <a:srgbClr val="2F6B34"/>
                 </a:solidFill>
                 <a:latin typeface="Georgia"/>
               </a:rPr>
-              <a:t>usually helps</a:t>
+              <a:t>agree</a:t>
             </a:r>
           </a:p>
           <a:p>
@@ -14357,90 +14004,49 @@
                 </a:solidFill>
                 <a:latin typeface="Arial"/>
               </a:rPr>
-              <a:t>confident answers tend to be right</a:t>
-            </a:r>
-          </a:p>
-        </p:txBody>
-      </p:sp>
-      <p:sp>
-        <p:nvSpPr>
-          <p:cNvPr id="7" name="Rounded Rectangle 6"/>
-          <p:cNvSpPr/>
-          <p:nvPr/>
-        </p:nvSpPr>
-        <p:spPr>
-          <a:xfrm>
-            <a:off x="8445500" y="4000500"/>
-            <a:ext cx="2933700" cy="1651000"/>
-          </a:xfrm>
-          <a:prstGeom prst="roundRect">
-            <a:avLst>
-              <a:gd name="adj" fmla="val 6923"/>
-            </a:avLst>
-          </a:prstGeom>
-          <a:solidFill>
-            <a:srgbClr val="F6E3E0"/>
-          </a:solidFill>
-          <a:ln w="12700">
-            <a:solidFill>
-              <a:srgbClr val="DDD8CC"/>
-            </a:solidFill>
-          </a:ln>
-          <a:effectLst/>
-        </p:spPr>
-        <p:style>
-          <a:lnRef idx="1">
-            <a:schemeClr val="accent1"/>
-          </a:lnRef>
-          <a:fillRef idx="3">
-            <a:schemeClr val="accent1"/>
-          </a:fillRef>
-          <a:effectRef idx="2">
-            <a:schemeClr val="accent1"/>
-          </a:effectRef>
-          <a:fontRef idx="minor">
-            <a:schemeClr val="lt1"/>
-          </a:fontRef>
-        </p:style>
-        <p:txBody>
-          <a:bodyPr rtlCol="0" anchor="ctr" wrap="square" lIns="190500" rIns="190500" tIns="190500" bIns="190500"/>
+              <a:t>→ the single agent is usually right</a:t>
+            </a:r>
+          </a:p>
+        </p:txBody>
+      </p:sp>
+      <p:sp>
+        <p:nvSpPr>
+          <p:cNvPr id="7" name="TextBox 6"/>
+          <p:cNvSpPr txBox="1"/>
+          <p:nvPr/>
+        </p:nvSpPr>
+        <p:spPr>
+          <a:xfrm>
+            <a:off x="8445500" y="4445000"/>
+            <a:ext cx="2933700" cy="1270000"/>
+          </a:xfrm>
+          <a:prstGeom prst="rect">
+            <a:avLst/>
+          </a:prstGeom>
+          <a:noFill/>
+        </p:spPr>
+        <p:txBody>
+          <a:bodyPr wrap="square" lIns="0" rIns="0" tIns="0" bIns="0" anchor="t">
+            <a:spAutoFit/>
+          </a:bodyPr>
           <a:lstStyle/>
           <a:p>
             <a:pPr algn="l">
               <a:lnSpc>
-                <a:spcPct val="100000"/>
-              </a:lnSpc>
-              <a:spcAft>
-                <a:spcPts val="600"/>
-              </a:spcAft>
-            </a:pPr>
-            <a:r>
-              <a:rPr sz="3600" b="1">
-                <a:solidFill>
-                  <a:srgbClr val="B03A2E"/>
-                </a:solidFill>
-                <a:latin typeface="Georgia"/>
-              </a:rPr>
-              <a:t>3 of 12</a:t>
-            </a:r>
-          </a:p>
-          <a:p>
-            <a:pPr algn="l">
-              <a:lnSpc>
-                <a:spcPct val="115000"/>
-              </a:lnSpc>
-              <a:spcAft>
-                <a:spcPts val="0"/>
-              </a:spcAft>
-            </a:pPr>
-            <a:r>
-              <a:rPr sz="1700" b="0">
-                <a:solidFill>
-                  <a:srgbClr val="3A4150"/>
-                </a:solidFill>
-                <a:latin typeface="Arial"/>
-              </a:rPr>
-              <a:t>settings where it points the wrong way</a:t>
+                <a:spcPct val="115000"/>
+              </a:lnSpc>
+              <a:spcAft>
+                <a:spcPts val="0"/>
+              </a:spcAft>
+            </a:pPr>
+            <a:r>
+              <a:rPr sz="1800" b="0">
+                <a:solidFill>
+                  <a:srgbClr val="6B7280"/>
+                </a:solidFill>
+                <a:latin typeface="Arial"/>
+              </a:rPr>
+              <a:t>Neither answer sees the other, so agreement costs nothing extra.</a:t>
             </a:r>
           </a:p>
         </p:txBody>
@@ -14550,7 +14156,7 @@
                 </a:solidFill>
                 <a:latin typeface="Arial"/>
               </a:rPr>
-              <a:t>SIGNALS</a:t>
+              <a:t>THE PROBLEM</a:t>
             </a:r>
           </a:p>
         </p:txBody>
@@ -14592,14 +14198,14 @@
                 </a:solidFill>
                 <a:latin typeface="Georgia"/>
               </a:rPr>
-              <a:t>Signal 2: do two cheap answers agree?</a:t>
+              <a:t>Guessing a rule can go badly</a:t>
             </a:r>
           </a:p>
         </p:txBody>
       </p:sp>
       <p:pic>
         <p:nvPicPr>
-          <p:cNvPr id="5" name="Picture 4" descr="c_agree.png"/>
+          <p:cNvPr id="5" name="Picture 4" descr="c_maxloss.png"/>
           <p:cNvPicPr>
             <a:picLocks noChangeAspect="1"/>
           </p:cNvPicPr>
@@ -14613,8 +14219,8 @@
         </p:blipFill>
         <p:spPr>
           <a:xfrm>
-            <a:off x="812800" y="1922942"/>
-            <a:ext cx="7302500" cy="3901114"/>
+            <a:off x="812800" y="2379642"/>
+            <a:ext cx="7302500" cy="2987715"/>
           </a:xfrm>
           <a:prstGeom prst="rect">
             <a:avLst/>
@@ -14638,7 +14244,7 @@
             </a:avLst>
           </a:prstGeom>
           <a:solidFill>
-            <a:srgbClr val="E3ECE2"/>
+            <a:srgbClr val="F6E3E0"/>
           </a:solidFill>
           <a:ln w="12700">
             <a:solidFill>
@@ -14676,11 +14282,11 @@
             <a:r>
               <a:rPr sz="3600" b="1">
                 <a:solidFill>
-                  <a:srgbClr val="2F6B34"/>
+                  <a:srgbClr val="B03A2E"/>
                 </a:solidFill>
                 <a:latin typeface="Georgia"/>
               </a:rPr>
-              <a:t>agree</a:t>
+              <a:t>16 points</a:t>
             </a:r>
           </a:p>
           <a:p>
@@ -14699,7 +14305,7 @@
                 </a:solidFill>
                 <a:latin typeface="Arial"/>
               </a:rPr>
-              <a:t>→ the single agent is usually right</a:t>
+              <a:t>lost by a hand-picked threshold on one setting</a:t>
             </a:r>
           </a:p>
         </p:txBody>
@@ -14741,7 +14347,7 @@
                 </a:solidFill>
                 <a:latin typeface="Arial"/>
               </a:rPr>
-              <a:t>Neither answer sees the other, so agreement costs nothing extra.</a:t>
+              <a:t>Nothing at deployment says which setting will go wrong.</a:t>
             </a:r>
           </a:p>
         </p:txBody>

--- a/slides/CLIMB_talk.pptx
+++ b/slides/CLIMB_talk.pptx
@@ -24,6 +24,7 @@
     <p:sldId id="272" r:id="rId24"/>
     <p:sldId id="273" r:id="rId25"/>
     <p:sldId id="274" r:id="rId26"/>
+    <p:sldId id="275" r:id="rId27"/>
   </p:sldIdLst>
   <p:sldSz cx="12192000" cy="6858000" type="screen4x3"/>
   <p:notesSz cx="6858000" cy="9144000"/>
@@ -590,7 +591,7 @@
           <a:lstStyle/>
           <a:p>
             <a:r>
-              <a:t>CLIMB turns this into a promise. You choose how much accuracy you can give up, say 5 points. CLIMB looks at a few hundred labelled tasks and returns the cheapest rule that keeps that promise, with 90 percent probability. If no cheaper rule qualifies, it simply calls the team every time, so the worst case is no savings, not lost accuracy.</a:t>
+              <a:t>Question two: where do we draw the line? A rule stops the task when its score is above a threshold. The natural shortcut is to pick the threshold by hand. Such rules can look fine on average but lose a lot on some settings. A fixed confidence threshold with the same average cost as CLIMB loses up to 16 points. Always using the single agent loses up to 9. CLIMB at a 5 point tolerance loses at most 2.8. And nothing at deployment tells you which setting is the bad one.</a:t>
             </a:r>
           </a:p>
         </p:txBody>
@@ -660,7 +661,7 @@
           <a:lstStyle/>
           <a:p>
             <a:r>
-              <a:t>Here is a real example: gpt-oss-120b on MuSiQue. Each dot is one possible threshold. On the left, almost everything goes to the team: safe but expensive. Moving right, more tasks stop early: cheaper but riskier. CLIMB tests them in this order and stops at the first one that fails. It deploys the cheapest one that passed, the star, at 57 percent of the tokens. Some grey dots are still under the line: the test is cautious, it needs evidence.</a:t>
+              <a:t>Question three: how do we know a line is safe? CLIMB turns this into a promise. You choose how much accuracy you can give up, say 5 points. CLIMB checks candidate rules on a few hundred labelled tasks and returns the cheapest rule that keeps the promise, with 90 percent probability. If no cheaper rule qualifies, it always calls the team, so the worst case is no savings, not lost accuracy.</a:t>
             </a:r>
           </a:p>
         </p:txBody>
@@ -730,7 +731,7 @@
           <a:lstStyle/>
           <a:p>
             <a:r>
-              <a:t>How does the test decide pass or fail? Think of a gambler who bets that skipping the team is harmless. Start with one dollar. For each calibration task, if skipping did no harm, the gambler wins a little. If it broke an answer, the gambler loses. If the wealth ever reaches 20 times the start, the rule passes. A safe rule makes the gambler rich fast. A rule that loses 6 points makes the gambler broke. The bet size adapts to how often skipping changes anything, which makes the test efficient.</a:t>
+              <a:t>Here is how the check runs, on real data: gpt-oss-120b on MuSiQue. Each dot is one candidate threshold. On the left, almost everything goes to the team: safe but expensive. Moving right, more tasks stop early: cheaper but riskier. CLIMB tests them in this order and stops at the first one that fails. It deploys the cheapest one that passed, the star, at 57 percent of the tokens. Some grey dots are still under the line: the test is cautious, it needs evidence.</a:t>
             </a:r>
           </a:p>
         </p:txBody>
@@ -800,7 +801,7 @@
           <a:lstStyle/>
           <a:p>
             <a:r>
-              <a:t>One detail matters a lot. Skipping the team is not only a risk. Sometimes the cheap answer is right and the team would have broken it. Standard tests count only the losses. CLIMB counts both sides, so these saved answers offset the lost ones.</a:t>
+              <a:t>How does the test decide pass or fail for one threshold? Think of a gambler who bets that skipping the team is harmless. Start with one dollar. For each calibration task, if skipping did no harm, the gambler wins a little. If it broke an answer, the gambler loses. If the wealth ever reaches 20 times the start, the rule passes. A safe rule makes the gambler rich fast. A rule that loses 6 points makes the gambler broke. The bet size adapts to how often skipping changes anything, which makes the test efficient.</a:t>
             </a:r>
           </a:p>
         </p:txBody>
@@ -870,7 +871,7 @@
           <a:lstStyle/>
           <a:p>
             <a:r>
-              <a:t>Does the choice of test matter? Every test here is valid, they differ only in how much they can certify. A worst-case bound certifies nothing cheaper than the team. Ignoring the saved answers keeps 79 percent of tokens. CLIMB's test, which counts both sides and adapts to the variance, keeps 62 percent.</a:t>
+              <a:t>One detail makes the check much sharper. Skipping the team is not only a risk: sometimes the cheap answer is right and the team would have broken it. Usual tests count only the losses. CLIMB's bet counts both sides, so saved answers offset lost ones. On the right, every test is valid, but they certify very different savings: a worst-case bound certifies nothing, ignoring saved answers keeps 79 percent of tokens, CLIMB's test 62.</a:t>
             </a:r>
           </a:p>
         </p:txBody>
@@ -940,7 +941,7 @@
           <a:lstStyle/>
           <a:p>
             <a:r>
-              <a:t>We test on three open models and four benchmarks: math, two open-book question answering sets, and hard reasoning. We record every rung for every task once, then replay 200 random splits: half to calibrate CLIMB, half to evaluate it.</a:t>
+              <a:t>Question four: how far up the ladder should we look before deciding? Option A stops after the direct answer when it is confident. Option B also runs the single agent and stops when the two agree. Which is cheaper depends on the model and the task, so CLIMB checks both on the calibration data and deploys the cheaper one that passes, splitting the error budget between them. If neither passes, it always calls the team.</a:t>
             </a:r>
           </a:p>
         </p:txBody>
@@ -1010,7 +1011,7 @@
           <a:lstStyle/>
           <a:p>
             <a:r>
-              <a:t>Does the promise hold? For each setting, the share of splits where CLIMB lost more than its tolerance. The guarantee allows up to 10 percent. We see at most 2 percent. A separate check with 5,000 random calibration draws per setting gives at most 3.4 percent.</a:t>
+              <a:t>We test on three open models and four benchmarks: math, two open-book question answering sets, and hard reasoning. We record every rung for every task once, then replay 200 random splits: half to calibrate CLIMB, half to evaluate it.</a:t>
             </a:r>
           </a:p>
         </p:txBody>
@@ -1080,7 +1081,7 @@
           <a:lstStyle/>
           <a:p>
             <a:r>
-              <a:t>How much does it save? Each bar is the share of the team's tokens CLIMB uses. At a 5 point tolerance it saves 38 percent on average, at 10 points 65 percent. Savings are smallest where confidence points the wrong way, on Gemma, and the guarantee still holds there: CLIMB just calls the team more often.</a:t>
+              <a:t>Does the promise hold? For each setting, the share of splits where CLIMB lost more than its tolerance. The guarantee allows up to 10 percent. We see at most 2 percent. A separate check with 5,000 random calibration draws per setting gives at most 3.4 percent.</a:t>
             </a:r>
           </a:p>
         </p:txBody>
@@ -1150,7 +1151,7 @@
           <a:lstStyle/>
           <a:p>
             <a:r>
-              <a:t>Why not just tune the threshold on the same data, without the test? It is cheaper on paper, but it breaks the promise: at 5 points it fails on 31 percent of splits on average, against at most 2 percent for CLIMB. A rule tuned to the edge on one sample tends to cross it on the next. The extra tokens CLIMB spends are the price of the guarantee.</a:t>
+              <a:t>How much does it save? Each bar is the share of the team's tokens CLIMB uses. At a 5 point tolerance it saves 38 percent on average, at 10 points 65 percent. Savings are smallest where confidence points the wrong way, on Gemma, and the guarantee still holds there: CLIMB just calls the team more often.</a:t>
             </a:r>
           </a:p>
         </p:txBody>
@@ -1220,7 +1221,7 @@
           <a:lstStyle/>
           <a:p>
             <a:r>
-              <a:t>To sum up. Agent teams are expensive and sometimes hurt. CLIMB calls them only when cheaper answers cannot be certified, keeps a user-chosen accuracy promise, and saves 38 to 65 percent of tokens. The guarantee assumes calibration tasks look like deployment tasks. Thank you.</a:t>
+              <a:t>Why not just tune the threshold on the same data, without the test? It is cheaper on paper, but it breaks the promise: at 5 points it fails on 31 percent of splits on average, against at most 2 percent for CLIMB. A rule tuned to the edge on one sample tends to cross it on the next. The extra tokens CLIMB spends are the price of the guarantee.</a:t>
             </a:r>
           </a:p>
         </p:txBody>
@@ -1315,6 +1316,76 @@
 </p:notes>
 </file>
 
+<file path=ppt/notesSlides/notesSlide20.xml><?xml version="1.0" encoding="utf-8"?>
+<p:notes xmlns:a="http://schemas.openxmlformats.org/drawingml/2006/main" xmlns:p="http://schemas.openxmlformats.org/presentationml/2006/main" xmlns:r="http://schemas.openxmlformats.org/officeDocument/2006/relationships">
+  <p:cSld>
+    <p:spTree>
+      <p:nvGrpSpPr>
+        <p:cNvPr id="1" name=""/>
+        <p:cNvGrpSpPr/>
+        <p:nvPr/>
+      </p:nvGrpSpPr>
+      <p:grpSpPr>
+        <a:xfrm>
+          <a:off x="0" y="0"/>
+          <a:ext cx="0" cy="0"/>
+          <a:chOff x="0" y="0"/>
+          <a:chExt cx="0" cy="0"/>
+        </a:xfrm>
+      </p:grpSpPr>
+      <p:sp>
+        <p:nvSpPr>
+          <p:cNvPr id="2" name="Slide Image Placeholder 1"/>
+          <p:cNvSpPr>
+            <a:spLocks noGrp="1"/>
+          </p:cNvSpPr>
+          <p:nvPr>
+            <p:ph type="sldImg" idx="2"/>
+          </p:nvPr>
+        </p:nvSpPr>
+        <p:spPr/>
+      </p:sp>
+      <p:sp>
+        <p:nvSpPr>
+          <p:cNvPr id="3" name="Notes Placeholder 2"/>
+          <p:cNvSpPr>
+            <a:spLocks noGrp="1"/>
+          </p:cNvSpPr>
+          <p:nvPr>
+            <p:ph type="body" idx="3" sz="quarter"/>
+          </p:nvPr>
+        </p:nvSpPr>
+        <p:spPr/>
+        <p:txBody>
+          <a:bodyPr/>
+          <a:lstStyle/>
+          <a:p>
+            <a:r>
+              <a:t>To sum up. Agent teams are expensive and sometimes hurt. CLIMB calls them only when cheaper answers cannot be certified, keeps a user-chosen accuracy promise, and saves 38 to 65 percent of tokens. The guarantee assumes calibration tasks look like deployment tasks. Thank you.</a:t>
+            </a:r>
+          </a:p>
+        </p:txBody>
+      </p:sp>
+      <p:sp>
+        <p:nvSpPr>
+          <p:cNvPr id="4" name="Slide Number Placeholder 3"/>
+          <p:cNvSpPr>
+            <a:spLocks noGrp="1"/>
+          </p:cNvSpPr>
+          <p:nvPr>
+            <p:ph type="sldNum" idx="5" sz="quarter"/>
+          </p:nvPr>
+        </p:nvSpPr>
+        <p:spPr/>
+      </p:sp>
+    </p:spTree>
+  </p:cSld>
+  <p:clrMapOvr>
+    <a:masterClrMapping/>
+  </p:clrMapOvr>
+</p:notes>
+</file>
+
 <file path=ppt/notesSlides/notesSlide3.xml><?xml version="1.0" encoding="utf-8"?>
 <p:notes xmlns:a="http://schemas.openxmlformats.org/drawingml/2006/main" xmlns:p="http://schemas.openxmlformats.org/presentationml/2006/main" xmlns:r="http://schemas.openxmlformats.org/officeDocument/2006/relationships">
   <p:cSld>
@@ -1570,7 +1641,7 @@
           <a:lstStyle/>
           <a:p>
             <a:r>
-              <a:t>The idea is a ladder. Try the cheapest configuration first: a direct answer. If it looks reliable, stop. Otherwise try a single agent. Only if that also looks unreliable, call the full team. All three use the same model. The question is how to decide 'looks reliable'.</a:t>
+              <a:t>Since the team is expensive and not always better, the idea is a ladder. Try the cheapest configuration first, a direct answer. If it looks right, stop. Otherwise try a single agent. Only if that also looks unreliable, call the full team. All three use the same model. The ladder itself is simple. The real question, and the rest of the method, is when a task should climb.</a:t>
             </a:r>
           </a:p>
         </p:txBody>
@@ -1640,7 +1711,7 @@
           <a:lstStyle/>
           <a:p>
             <a:r>
-              <a:t>How do we know a cheap answer is reliable? The first signal is free: the model's own confidence, its average token probability. Above the dashed line, confident answers are more often right. On three Gemma settings it points the wrong way: the model is confidently wrong. So any rule built on this signal must be checked, not trusted.</a:t>
+              <a:t>Deciding when to climb breaks into four questions, and the rest of the method answers them in order. First, a signal: does the cheap answer look right? Second, a rule: where do we draw the line on that signal? Third, a check: how do we know the line is safe? Fourth, how far up the ladder to look before deciding. And if no rule passes the check, we simply always call the team.</a:t>
             </a:r>
           </a:p>
         </p:txBody>
@@ -1710,7 +1781,7 @@
           <a:lstStyle/>
           <a:p>
             <a:r>
-              <a:t>The second signal is also nearly free. The direct answer and the single agent answer independently. When they agree, the single agent is much more often right, for example 99 against 77 percent on gpt-oss-20b MATH. So CLIMB stops on agreeing tasks first.</a:t>
+              <a:t>Question one: what tells us a cheap answer is right? The first signal is free: the model's own confidence, its average token probability. Above the dashed line, confident answers are more often right. On three Gemma settings it points the wrong way: the model is confidently wrong. So any rule built on this signal must be checked, not trusted.</a:t>
             </a:r>
           </a:p>
         </p:txBody>
@@ -1780,7 +1851,7 @@
           <a:lstStyle/>
           <a:p>
             <a:r>
-              <a:t>A natural shortcut is to pick a threshold by hand or by intuition. These rules can look fine on average but lose a lot on some settings. A fixed confidence threshold with the same average cost as CLIMB loses up to 16 points. Always using the single agent loses up to 9. CLIMB at a 5 point tolerance loses at most 2.8. In deployment, nothing tells you which setting is the bad one.</a:t>
+              <a:t>The second signal is also nearly free. The direct answer and the single agent answer independently. When they agree, the single agent is much more often right, for example 99 against 77 percent on gpt-oss-20b MATH. CLIMB combines the two into one score: agreeing tasks rank first, then by confidence.</a:t>
             </a:r>
           </a:p>
         </p:txBody>
@@ -5111,7 +5182,7 @@
                 </a:solidFill>
                 <a:latin typeface="Arial"/>
               </a:rPr>
-              <a:t>CLIMB</a:t>
+              <a:t>HOW TO CLIMB · 2 RULE</a:t>
             </a:r>
           </a:p>
         </p:txBody>
@@ -5153,364 +5224,53 @@
                 </a:solidFill>
                 <a:latin typeface="Georgia"/>
               </a:rPr>
-              <a:t>What CLIMB promises</a:t>
-            </a:r>
-          </a:p>
-        </p:txBody>
-      </p:sp>
-      <p:sp>
-        <p:nvSpPr>
-          <p:cNvPr id="5" name="Rounded Rectangle 4"/>
+              <a:t>Where to draw the line? Guessing can go badly</a:t>
+            </a:r>
+          </a:p>
+        </p:txBody>
+      </p:sp>
+      <p:pic>
+        <p:nvPicPr>
+          <p:cNvPr id="5" name="Picture 4" descr="c_maxloss.png"/>
+          <p:cNvPicPr>
+            <a:picLocks noChangeAspect="1"/>
+          </p:cNvPicPr>
+          <p:nvPr/>
+        </p:nvPicPr>
+        <p:blipFill>
+          <a:blip r:embed="rId3"/>
+          <a:stretch>
+            <a:fillRect/>
+          </a:stretch>
+        </p:blipFill>
+        <p:spPr>
+          <a:xfrm>
+            <a:off x="812800" y="2379642"/>
+            <a:ext cx="7302500" cy="2987715"/>
+          </a:xfrm>
+          <a:prstGeom prst="rect">
+            <a:avLst/>
+          </a:prstGeom>
+        </p:spPr>
+      </p:pic>
+      <p:sp>
+        <p:nvSpPr>
+          <p:cNvPr id="6" name="Rounded Rectangle 5"/>
           <p:cNvSpPr/>
           <p:nvPr/>
         </p:nvSpPr>
         <p:spPr>
           <a:xfrm>
-            <a:off x="812800" y="2095500"/>
-            <a:ext cx="3111500" cy="2032000"/>
+            <a:off x="8445500" y="2286000"/>
+            <a:ext cx="2933700" cy="1905000"/>
           </a:xfrm>
           <a:prstGeom prst="roundRect">
             <a:avLst>
-              <a:gd name="adj" fmla="val 5625"/>
+              <a:gd name="adj" fmla="val 6000"/>
             </a:avLst>
           </a:prstGeom>
           <a:solidFill>
-            <a:srgbClr val="F8E8DC"/>
-          </a:solidFill>
-          <a:ln w="31750">
-            <a:solidFill>
-              <a:srgbClr val="B4541A"/>
-            </a:solidFill>
-          </a:ln>
-          <a:effectLst/>
-        </p:spPr>
-        <p:style>
-          <a:lnRef idx="1">
-            <a:schemeClr val="accent1"/>
-          </a:lnRef>
-          <a:fillRef idx="3">
-            <a:schemeClr val="accent1"/>
-          </a:fillRef>
-          <a:effectRef idx="2">
-            <a:schemeClr val="accent1"/>
-          </a:effectRef>
-          <a:fontRef idx="minor">
-            <a:schemeClr val="lt1"/>
-          </a:fontRef>
-        </p:style>
-        <p:txBody>
-          <a:bodyPr rtlCol="0" anchor="ctr" wrap="square" lIns="152400" rIns="152400" tIns="152400" bIns="152400"/>
-          <a:lstStyle/>
-          <a:p>
-            <a:pPr algn="ctr">
-              <a:lnSpc>
-                <a:spcPct val="115000"/>
-              </a:lnSpc>
-              <a:spcAft>
-                <a:spcPts val="1200"/>
-              </a:spcAft>
-            </a:pPr>
-            <a:r>
-              <a:rPr sz="2400" b="1">
-                <a:solidFill>
-                  <a:srgbClr val="B4541A"/>
-                </a:solidFill>
-                <a:latin typeface="Arial"/>
-              </a:rPr>
-              <a:t>You choose</a:t>
-            </a:r>
-          </a:p>
-          <a:p>
-            <a:pPr algn="ctr">
-              <a:lnSpc>
-                <a:spcPct val="115000"/>
-              </a:lnSpc>
-              <a:spcAft>
-                <a:spcPts val="0"/>
-              </a:spcAft>
-            </a:pPr>
-            <a:r>
-              <a:rPr sz="1900" b="0">
-                <a:solidFill>
-                  <a:srgbClr val="14213D"/>
-                </a:solidFill>
-                <a:latin typeface="Arial"/>
-              </a:rPr>
-              <a:t>“I can lose at most 5 points of accuracy”</a:t>
-            </a:r>
-          </a:p>
-        </p:txBody>
-      </p:sp>
-      <p:sp>
-        <p:nvSpPr>
-          <p:cNvPr id="6" name="Right Arrow 5"/>
-          <p:cNvSpPr/>
-          <p:nvPr/>
-        </p:nvSpPr>
-        <p:spPr>
-          <a:xfrm>
-            <a:off x="4000500" y="2857500"/>
-            <a:ext cx="482600" cy="381000"/>
-          </a:xfrm>
-          <a:prstGeom prst="rightArrow">
-            <a:avLst/>
-          </a:prstGeom>
-          <a:solidFill>
-            <a:srgbClr val="6B7280"/>
-          </a:solidFill>
-          <a:ln>
-            <a:noFill/>
-          </a:ln>
-          <a:effectLst/>
-        </p:spPr>
-        <p:style>
-          <a:lnRef idx="1">
-            <a:schemeClr val="accent1"/>
-          </a:lnRef>
-          <a:fillRef idx="3">
-            <a:schemeClr val="accent1"/>
-          </a:fillRef>
-          <a:effectRef idx="2">
-            <a:schemeClr val="accent1"/>
-          </a:effectRef>
-          <a:fontRef idx="minor">
-            <a:schemeClr val="lt1"/>
-          </a:fontRef>
-        </p:style>
-        <p:txBody>
-          <a:bodyPr rtlCol="0" anchor="ctr"/>
-          <a:lstStyle/>
-          <a:p>
-            <a:pPr algn="ctr"/>
-          </a:p>
-        </p:txBody>
-      </p:sp>
-      <p:sp>
-        <p:nvSpPr>
-          <p:cNvPr id="7" name="Rounded Rectangle 6"/>
-          <p:cNvSpPr/>
-          <p:nvPr/>
-        </p:nvSpPr>
-        <p:spPr>
-          <a:xfrm>
-            <a:off x="4559300" y="2095500"/>
-            <a:ext cx="3111500" cy="2032000"/>
-          </a:xfrm>
-          <a:prstGeom prst="roundRect">
-            <a:avLst>
-              <a:gd name="adj" fmla="val 5625"/>
-            </a:avLst>
-          </a:prstGeom>
-          <a:solidFill>
-            <a:srgbClr val="14213D"/>
-          </a:solidFill>
-          <a:ln>
-            <a:noFill/>
-          </a:ln>
-          <a:effectLst/>
-        </p:spPr>
-        <p:style>
-          <a:lnRef idx="1">
-            <a:schemeClr val="accent1"/>
-          </a:lnRef>
-          <a:fillRef idx="3">
-            <a:schemeClr val="accent1"/>
-          </a:fillRef>
-          <a:effectRef idx="2">
-            <a:schemeClr val="accent1"/>
-          </a:effectRef>
-          <a:fontRef idx="minor">
-            <a:schemeClr val="lt1"/>
-          </a:fontRef>
-        </p:style>
-        <p:txBody>
-          <a:bodyPr rtlCol="0" anchor="ctr" wrap="square" lIns="152400" rIns="152400" tIns="152400" bIns="152400"/>
-          <a:lstStyle/>
-          <a:p>
-            <a:pPr algn="ctr">
-              <a:lnSpc>
-                <a:spcPct val="115000"/>
-              </a:lnSpc>
-              <a:spcAft>
-                <a:spcPts val="1200"/>
-              </a:spcAft>
-            </a:pPr>
-            <a:r>
-              <a:rPr sz="2400" b="1">
-                <a:solidFill>
-                  <a:srgbClr val="F0A66B"/>
-                </a:solidFill>
-                <a:latin typeface="Arial"/>
-              </a:rPr>
-              <a:t>CLIMB checks</a:t>
-            </a:r>
-          </a:p>
-          <a:p>
-            <a:pPr algn="ctr">
-              <a:lnSpc>
-                <a:spcPct val="115000"/>
-              </a:lnSpc>
-              <a:spcAft>
-                <a:spcPts val="0"/>
-              </a:spcAft>
-            </a:pPr>
-            <a:r>
-              <a:rPr sz="1900" b="0">
-                <a:solidFill>
-                  <a:srgbClr val="F7F6F2"/>
-                </a:solidFill>
-                <a:latin typeface="Arial"/>
-              </a:rPr>
-              <a:t>a few hundred labelled tasks</a:t>
-            </a:r>
-          </a:p>
-        </p:txBody>
-      </p:sp>
-      <p:sp>
-        <p:nvSpPr>
-          <p:cNvPr id="8" name="Right Arrow 7"/>
-          <p:cNvSpPr/>
-          <p:nvPr/>
-        </p:nvSpPr>
-        <p:spPr>
-          <a:xfrm>
-            <a:off x="7747000" y="2857500"/>
-            <a:ext cx="482600" cy="381000"/>
-          </a:xfrm>
-          <a:prstGeom prst="rightArrow">
-            <a:avLst/>
-          </a:prstGeom>
-          <a:solidFill>
-            <a:srgbClr val="6B7280"/>
-          </a:solidFill>
-          <a:ln>
-            <a:noFill/>
-          </a:ln>
-          <a:effectLst/>
-        </p:spPr>
-        <p:style>
-          <a:lnRef idx="1">
-            <a:schemeClr val="accent1"/>
-          </a:lnRef>
-          <a:fillRef idx="3">
-            <a:schemeClr val="accent1"/>
-          </a:fillRef>
-          <a:effectRef idx="2">
-            <a:schemeClr val="accent1"/>
-          </a:effectRef>
-          <a:fontRef idx="minor">
-            <a:schemeClr val="lt1"/>
-          </a:fontRef>
-        </p:style>
-        <p:txBody>
-          <a:bodyPr rtlCol="0" anchor="ctr"/>
-          <a:lstStyle/>
-          <a:p>
-            <a:pPr algn="ctr"/>
-          </a:p>
-        </p:txBody>
-      </p:sp>
-      <p:sp>
-        <p:nvSpPr>
-          <p:cNvPr id="9" name="Rounded Rectangle 8"/>
-          <p:cNvSpPr/>
-          <p:nvPr/>
-        </p:nvSpPr>
-        <p:spPr>
-          <a:xfrm>
-            <a:off x="8305800" y="2095500"/>
-            <a:ext cx="3111500" cy="2032000"/>
-          </a:xfrm>
-          <a:prstGeom prst="roundRect">
-            <a:avLst>
-              <a:gd name="adj" fmla="val 5625"/>
-            </a:avLst>
-          </a:prstGeom>
-          <a:solidFill>
-            <a:srgbClr val="E3ECE2"/>
-          </a:solidFill>
-          <a:ln w="31750">
-            <a:solidFill>
-              <a:srgbClr val="2F6B34"/>
-            </a:solidFill>
-          </a:ln>
-          <a:effectLst/>
-        </p:spPr>
-        <p:style>
-          <a:lnRef idx="1">
-            <a:schemeClr val="accent1"/>
-          </a:lnRef>
-          <a:fillRef idx="3">
-            <a:schemeClr val="accent1"/>
-          </a:fillRef>
-          <a:effectRef idx="2">
-            <a:schemeClr val="accent1"/>
-          </a:effectRef>
-          <a:fontRef idx="minor">
-            <a:schemeClr val="lt1"/>
-          </a:fontRef>
-        </p:style>
-        <p:txBody>
-          <a:bodyPr rtlCol="0" anchor="ctr" wrap="square" lIns="152400" rIns="152400" tIns="152400" bIns="152400"/>
-          <a:lstStyle/>
-          <a:p>
-            <a:pPr algn="ctr">
-              <a:lnSpc>
-                <a:spcPct val="115000"/>
-              </a:lnSpc>
-              <a:spcAft>
-                <a:spcPts val="1200"/>
-              </a:spcAft>
-            </a:pPr>
-            <a:r>
-              <a:rPr sz="2400" b="1">
-                <a:solidFill>
-                  <a:srgbClr val="2F6B34"/>
-                </a:solidFill>
-                <a:latin typeface="Arial"/>
-              </a:rPr>
-              <a:t>You get</a:t>
-            </a:r>
-          </a:p>
-          <a:p>
-            <a:pPr algn="ctr">
-              <a:lnSpc>
-                <a:spcPct val="115000"/>
-              </a:lnSpc>
-              <a:spcAft>
-                <a:spcPts val="0"/>
-              </a:spcAft>
-            </a:pPr>
-            <a:r>
-              <a:rPr sz="1900" b="0">
-                <a:solidFill>
-                  <a:srgbClr val="14213D"/>
-                </a:solidFill>
-                <a:latin typeface="Arial"/>
-              </a:rPr>
-              <a:t>the cheapest rule that keeps the promise, 9 times out of 10</a:t>
-            </a:r>
-          </a:p>
-        </p:txBody>
-      </p:sp>
-      <p:sp>
-        <p:nvSpPr>
-          <p:cNvPr id="10" name="Rounded Rectangle 9"/>
-          <p:cNvSpPr/>
-          <p:nvPr/>
-        </p:nvSpPr>
-        <p:spPr>
-          <a:xfrm>
-            <a:off x="812800" y="4572000"/>
-            <a:ext cx="10566400" cy="952500"/>
-          </a:xfrm>
-          <a:prstGeom prst="roundRect">
-            <a:avLst>
-              <a:gd name="adj" fmla="val 10000"/>
-            </a:avLst>
-          </a:prstGeom>
-          <a:solidFill>
-            <a:srgbClr val="FDFCF9"/>
+            <a:srgbClr val="F6E3E0"/>
           </a:solidFill>
           <a:ln w="12700">
             <a:solidFill>
@@ -5534,25 +5294,86 @@
           </a:fontRef>
         </p:style>
         <p:txBody>
-          <a:bodyPr rtlCol="0" anchor="ctr" wrap="square" lIns="203200" rIns="203200" tIns="203200" bIns="203200"/>
-          <a:lstStyle/>
-          <a:p>
-            <a:pPr algn="ctr">
-              <a:lnSpc>
-                <a:spcPct val="115000"/>
-              </a:lnSpc>
-              <a:spcAft>
-                <a:spcPts val="0"/>
-              </a:spcAft>
-            </a:pPr>
-            <a:r>
-              <a:rPr sz="2000" b="1">
-                <a:solidFill>
-                  <a:srgbClr val="14213D"/>
-                </a:solidFill>
-                <a:latin typeface="Arial"/>
-              </a:rPr>
-              <a:t>No cheaper rule passes?  →  call the team every time.  Worst case: no savings, not lost accuracy.</a:t>
+          <a:bodyPr rtlCol="0" anchor="ctr" wrap="square" lIns="190500" rIns="190500" tIns="190500" bIns="190500"/>
+          <a:lstStyle/>
+          <a:p>
+            <a:pPr algn="l">
+              <a:lnSpc>
+                <a:spcPct val="100000"/>
+              </a:lnSpc>
+              <a:spcAft>
+                <a:spcPts val="600"/>
+              </a:spcAft>
+            </a:pPr>
+            <a:r>
+              <a:rPr sz="3600" b="1">
+                <a:solidFill>
+                  <a:srgbClr val="B03A2E"/>
+                </a:solidFill>
+                <a:latin typeface="Georgia"/>
+              </a:rPr>
+              <a:t>16 points</a:t>
+            </a:r>
+          </a:p>
+          <a:p>
+            <a:pPr algn="l">
+              <a:lnSpc>
+                <a:spcPct val="115000"/>
+              </a:lnSpc>
+              <a:spcAft>
+                <a:spcPts val="0"/>
+              </a:spcAft>
+            </a:pPr>
+            <a:r>
+              <a:rPr sz="1700" b="0">
+                <a:solidFill>
+                  <a:srgbClr val="3A4150"/>
+                </a:solidFill>
+                <a:latin typeface="Arial"/>
+              </a:rPr>
+              <a:t>lost by a hand-picked threshold on one setting</a:t>
+            </a:r>
+          </a:p>
+        </p:txBody>
+      </p:sp>
+      <p:sp>
+        <p:nvSpPr>
+          <p:cNvPr id="7" name="TextBox 6"/>
+          <p:cNvSpPr txBox="1"/>
+          <p:nvPr/>
+        </p:nvSpPr>
+        <p:spPr>
+          <a:xfrm>
+            <a:off x="8445500" y="4445000"/>
+            <a:ext cx="2933700" cy="1270000"/>
+          </a:xfrm>
+          <a:prstGeom prst="rect">
+            <a:avLst/>
+          </a:prstGeom>
+          <a:noFill/>
+        </p:spPr>
+        <p:txBody>
+          <a:bodyPr wrap="square" lIns="0" rIns="0" tIns="0" bIns="0" anchor="t">
+            <a:spAutoFit/>
+          </a:bodyPr>
+          <a:lstStyle/>
+          <a:p>
+            <a:pPr algn="l">
+              <a:lnSpc>
+                <a:spcPct val="115000"/>
+              </a:lnSpc>
+              <a:spcAft>
+                <a:spcPts val="0"/>
+              </a:spcAft>
+            </a:pPr>
+            <a:r>
+              <a:rPr sz="1800" b="0">
+                <a:solidFill>
+                  <a:srgbClr val="6B7280"/>
+                </a:solidFill>
+                <a:latin typeface="Arial"/>
+              </a:rPr>
+              <a:t>Nothing at deployment says which setting will go wrong.</a:t>
             </a:r>
           </a:p>
         </p:txBody>
@@ -5662,7 +5483,7 @@
                 </a:solidFill>
                 <a:latin typeface="Arial"/>
               </a:rPr>
-              <a:t>HOW IT WORKS</a:t>
+              <a:t>HOW TO CLIMB · 3 CHECK</a:t>
             </a:r>
           </a:p>
         </p:txBody>
@@ -5704,73 +5525,406 @@
                 </a:solidFill>
                 <a:latin typeface="Georgia"/>
               </a:rPr>
-              <a:t>Keep the cheapest rule that passes</a:t>
-            </a:r>
-          </a:p>
-        </p:txBody>
-      </p:sp>
-      <p:pic>
-        <p:nvPicPr>
-          <p:cNvPr id="5" name="Picture 4" descr="c_sweep.png"/>
-          <p:cNvPicPr>
-            <a:picLocks noChangeAspect="1"/>
-          </p:cNvPicPr>
-          <p:nvPr/>
-        </p:nvPicPr>
-        <p:blipFill>
-          <a:blip r:embed="rId3"/>
-          <a:stretch>
-            <a:fillRect/>
-          </a:stretch>
-        </p:blipFill>
-        <p:spPr>
-          <a:xfrm>
-            <a:off x="2179492" y="1587500"/>
-            <a:ext cx="7833014" cy="4445000"/>
-          </a:xfrm>
-          <a:prstGeom prst="rect">
+              <a:t>Replace guessing with a promise</a:t>
+            </a:r>
+          </a:p>
+        </p:txBody>
+      </p:sp>
+      <p:sp>
+        <p:nvSpPr>
+          <p:cNvPr id="5" name="Rounded Rectangle 4"/>
+          <p:cNvSpPr/>
+          <p:nvPr/>
+        </p:nvSpPr>
+        <p:spPr>
+          <a:xfrm>
+            <a:off x="812800" y="2095500"/>
+            <a:ext cx="3111500" cy="2032000"/>
+          </a:xfrm>
+          <a:prstGeom prst="roundRect">
+            <a:avLst>
+              <a:gd name="adj" fmla="val 5625"/>
+            </a:avLst>
+          </a:prstGeom>
+          <a:solidFill>
+            <a:srgbClr val="F8E8DC"/>
+          </a:solidFill>
+          <a:ln w="31750">
+            <a:solidFill>
+              <a:srgbClr val="B4541A"/>
+            </a:solidFill>
+          </a:ln>
+          <a:effectLst/>
+        </p:spPr>
+        <p:style>
+          <a:lnRef idx="1">
+            <a:schemeClr val="accent1"/>
+          </a:lnRef>
+          <a:fillRef idx="3">
+            <a:schemeClr val="accent1"/>
+          </a:fillRef>
+          <a:effectRef idx="2">
+            <a:schemeClr val="accent1"/>
+          </a:effectRef>
+          <a:fontRef idx="minor">
+            <a:schemeClr val="lt1"/>
+          </a:fontRef>
+        </p:style>
+        <p:txBody>
+          <a:bodyPr rtlCol="0" anchor="ctr" wrap="square" lIns="152400" rIns="152400" tIns="152400" bIns="152400"/>
+          <a:lstStyle/>
+          <a:p>
+            <a:pPr algn="ctr">
+              <a:lnSpc>
+                <a:spcPct val="115000"/>
+              </a:lnSpc>
+              <a:spcAft>
+                <a:spcPts val="1200"/>
+              </a:spcAft>
+            </a:pPr>
+            <a:r>
+              <a:rPr sz="2400" b="1">
+                <a:solidFill>
+                  <a:srgbClr val="B4541A"/>
+                </a:solidFill>
+                <a:latin typeface="Arial"/>
+              </a:rPr>
+              <a:t>You choose</a:t>
+            </a:r>
+          </a:p>
+          <a:p>
+            <a:pPr algn="ctr">
+              <a:lnSpc>
+                <a:spcPct val="115000"/>
+              </a:lnSpc>
+              <a:spcAft>
+                <a:spcPts val="0"/>
+              </a:spcAft>
+            </a:pPr>
+            <a:r>
+              <a:rPr sz="1900" b="0">
+                <a:solidFill>
+                  <a:srgbClr val="14213D"/>
+                </a:solidFill>
+                <a:latin typeface="Arial"/>
+              </a:rPr>
+              <a:t>“I can lose at most 5 points of accuracy”</a:t>
+            </a:r>
+          </a:p>
+        </p:txBody>
+      </p:sp>
+      <p:sp>
+        <p:nvSpPr>
+          <p:cNvPr id="6" name="Right Arrow 5"/>
+          <p:cNvSpPr/>
+          <p:nvPr/>
+        </p:nvSpPr>
+        <p:spPr>
+          <a:xfrm>
+            <a:off x="4000500" y="2857500"/>
+            <a:ext cx="482600" cy="381000"/>
+          </a:xfrm>
+          <a:prstGeom prst="rightArrow">
             <a:avLst/>
           </a:prstGeom>
-        </p:spPr>
-      </p:pic>
-      <p:sp>
-        <p:nvSpPr>
-          <p:cNvPr id="6" name="TextBox 5"/>
-          <p:cNvSpPr txBox="1"/>
-          <p:nvPr/>
-        </p:nvSpPr>
-        <p:spPr>
-          <a:xfrm>
-            <a:off x="812800" y="6096000"/>
-            <a:ext cx="10566400" cy="254000"/>
-          </a:xfrm>
-          <a:prstGeom prst="rect">
+          <a:solidFill>
+            <a:srgbClr val="6B7280"/>
+          </a:solidFill>
+          <a:ln>
+            <a:noFill/>
+          </a:ln>
+          <a:effectLst/>
+        </p:spPr>
+        <p:style>
+          <a:lnRef idx="1">
+            <a:schemeClr val="accent1"/>
+          </a:lnRef>
+          <a:fillRef idx="3">
+            <a:schemeClr val="accent1"/>
+          </a:fillRef>
+          <a:effectRef idx="2">
+            <a:schemeClr val="accent1"/>
+          </a:effectRef>
+          <a:fontRef idx="minor">
+            <a:schemeClr val="lt1"/>
+          </a:fontRef>
+        </p:style>
+        <p:txBody>
+          <a:bodyPr rtlCol="0" anchor="ctr"/>
+          <a:lstStyle/>
+          <a:p>
+            <a:pPr algn="ctr"/>
+          </a:p>
+        </p:txBody>
+      </p:sp>
+      <p:sp>
+        <p:nvSpPr>
+          <p:cNvPr id="7" name="Rounded Rectangle 6"/>
+          <p:cNvSpPr/>
+          <p:nvPr/>
+        </p:nvSpPr>
+        <p:spPr>
+          <a:xfrm>
+            <a:off x="4559300" y="2095500"/>
+            <a:ext cx="3111500" cy="2032000"/>
+          </a:xfrm>
+          <a:prstGeom prst="roundRect">
+            <a:avLst>
+              <a:gd name="adj" fmla="val 5625"/>
+            </a:avLst>
+          </a:prstGeom>
+          <a:solidFill>
+            <a:srgbClr val="14213D"/>
+          </a:solidFill>
+          <a:ln>
+            <a:noFill/>
+          </a:ln>
+          <a:effectLst/>
+        </p:spPr>
+        <p:style>
+          <a:lnRef idx="1">
+            <a:schemeClr val="accent1"/>
+          </a:lnRef>
+          <a:fillRef idx="3">
+            <a:schemeClr val="accent1"/>
+          </a:fillRef>
+          <a:effectRef idx="2">
+            <a:schemeClr val="accent1"/>
+          </a:effectRef>
+          <a:fontRef idx="minor">
+            <a:schemeClr val="lt1"/>
+          </a:fontRef>
+        </p:style>
+        <p:txBody>
+          <a:bodyPr rtlCol="0" anchor="ctr" wrap="square" lIns="152400" rIns="152400" tIns="152400" bIns="152400"/>
+          <a:lstStyle/>
+          <a:p>
+            <a:pPr algn="ctr">
+              <a:lnSpc>
+                <a:spcPct val="115000"/>
+              </a:lnSpc>
+              <a:spcAft>
+                <a:spcPts val="1200"/>
+              </a:spcAft>
+            </a:pPr>
+            <a:r>
+              <a:rPr sz="2400" b="1">
+                <a:solidFill>
+                  <a:srgbClr val="F0A66B"/>
+                </a:solidFill>
+                <a:latin typeface="Arial"/>
+              </a:rPr>
+              <a:t>CLIMB checks</a:t>
+            </a:r>
+          </a:p>
+          <a:p>
+            <a:pPr algn="ctr">
+              <a:lnSpc>
+                <a:spcPct val="115000"/>
+              </a:lnSpc>
+              <a:spcAft>
+                <a:spcPts val="0"/>
+              </a:spcAft>
+            </a:pPr>
+            <a:r>
+              <a:rPr sz="1900" b="0">
+                <a:solidFill>
+                  <a:srgbClr val="F7F6F2"/>
+                </a:solidFill>
+                <a:latin typeface="Arial"/>
+              </a:rPr>
+              <a:t>candidate rules on a few hundred labelled tasks</a:t>
+            </a:r>
+          </a:p>
+        </p:txBody>
+      </p:sp>
+      <p:sp>
+        <p:nvSpPr>
+          <p:cNvPr id="8" name="Right Arrow 7"/>
+          <p:cNvSpPr/>
+          <p:nvPr/>
+        </p:nvSpPr>
+        <p:spPr>
+          <a:xfrm>
+            <a:off x="7747000" y="2857500"/>
+            <a:ext cx="482600" cy="381000"/>
+          </a:xfrm>
+          <a:prstGeom prst="rightArrow">
             <a:avLst/>
           </a:prstGeom>
-          <a:noFill/>
-        </p:spPr>
-        <p:txBody>
-          <a:bodyPr wrap="square" lIns="0" rIns="0" tIns="0" bIns="0" anchor="t">
-            <a:spAutoFit/>
-          </a:bodyPr>
-          <a:lstStyle/>
-          <a:p>
-            <a:pPr algn="l">
-              <a:lnSpc>
-                <a:spcPct val="115000"/>
-              </a:lnSpc>
-              <a:spcAft>
-                <a:spcPts val="0"/>
-              </a:spcAft>
-            </a:pPr>
-            <a:r>
-              <a:rPr sz="1500" b="0">
-                <a:solidFill>
-                  <a:srgbClr val="6B7280"/>
-                </a:solidFill>
-                <a:latin typeface="Arial"/>
-              </a:rPr>
-              <a:t>gpt-oss-120b on MuSiQue, thresholds on the direct answer’s confidence, one calibration half.</a:t>
+          <a:solidFill>
+            <a:srgbClr val="6B7280"/>
+          </a:solidFill>
+          <a:ln>
+            <a:noFill/>
+          </a:ln>
+          <a:effectLst/>
+        </p:spPr>
+        <p:style>
+          <a:lnRef idx="1">
+            <a:schemeClr val="accent1"/>
+          </a:lnRef>
+          <a:fillRef idx="3">
+            <a:schemeClr val="accent1"/>
+          </a:fillRef>
+          <a:effectRef idx="2">
+            <a:schemeClr val="accent1"/>
+          </a:effectRef>
+          <a:fontRef idx="minor">
+            <a:schemeClr val="lt1"/>
+          </a:fontRef>
+        </p:style>
+        <p:txBody>
+          <a:bodyPr rtlCol="0" anchor="ctr"/>
+          <a:lstStyle/>
+          <a:p>
+            <a:pPr algn="ctr"/>
+          </a:p>
+        </p:txBody>
+      </p:sp>
+      <p:sp>
+        <p:nvSpPr>
+          <p:cNvPr id="9" name="Rounded Rectangle 8"/>
+          <p:cNvSpPr/>
+          <p:nvPr/>
+        </p:nvSpPr>
+        <p:spPr>
+          <a:xfrm>
+            <a:off x="8305800" y="2095500"/>
+            <a:ext cx="3111500" cy="2032000"/>
+          </a:xfrm>
+          <a:prstGeom prst="roundRect">
+            <a:avLst>
+              <a:gd name="adj" fmla="val 5625"/>
+            </a:avLst>
+          </a:prstGeom>
+          <a:solidFill>
+            <a:srgbClr val="E3ECE2"/>
+          </a:solidFill>
+          <a:ln w="31750">
+            <a:solidFill>
+              <a:srgbClr val="2F6B34"/>
+            </a:solidFill>
+          </a:ln>
+          <a:effectLst/>
+        </p:spPr>
+        <p:style>
+          <a:lnRef idx="1">
+            <a:schemeClr val="accent1"/>
+          </a:lnRef>
+          <a:fillRef idx="3">
+            <a:schemeClr val="accent1"/>
+          </a:fillRef>
+          <a:effectRef idx="2">
+            <a:schemeClr val="accent1"/>
+          </a:effectRef>
+          <a:fontRef idx="minor">
+            <a:schemeClr val="lt1"/>
+          </a:fontRef>
+        </p:style>
+        <p:txBody>
+          <a:bodyPr rtlCol="0" anchor="ctr" wrap="square" lIns="152400" rIns="152400" tIns="152400" bIns="152400"/>
+          <a:lstStyle/>
+          <a:p>
+            <a:pPr algn="ctr">
+              <a:lnSpc>
+                <a:spcPct val="115000"/>
+              </a:lnSpc>
+              <a:spcAft>
+                <a:spcPts val="1200"/>
+              </a:spcAft>
+            </a:pPr>
+            <a:r>
+              <a:rPr sz="2400" b="1">
+                <a:solidFill>
+                  <a:srgbClr val="2F6B34"/>
+                </a:solidFill>
+                <a:latin typeface="Arial"/>
+              </a:rPr>
+              <a:t>You get</a:t>
+            </a:r>
+          </a:p>
+          <a:p>
+            <a:pPr algn="ctr">
+              <a:lnSpc>
+                <a:spcPct val="115000"/>
+              </a:lnSpc>
+              <a:spcAft>
+                <a:spcPts val="0"/>
+              </a:spcAft>
+            </a:pPr>
+            <a:r>
+              <a:rPr sz="1900" b="0">
+                <a:solidFill>
+                  <a:srgbClr val="14213D"/>
+                </a:solidFill>
+                <a:latin typeface="Arial"/>
+              </a:rPr>
+              <a:t>the cheapest rule that keeps the promise, 9 times out of 10</a:t>
+            </a:r>
+          </a:p>
+        </p:txBody>
+      </p:sp>
+      <p:sp>
+        <p:nvSpPr>
+          <p:cNvPr id="10" name="Rounded Rectangle 9"/>
+          <p:cNvSpPr/>
+          <p:nvPr/>
+        </p:nvSpPr>
+        <p:spPr>
+          <a:xfrm>
+            <a:off x="812800" y="4572000"/>
+            <a:ext cx="10566400" cy="952500"/>
+          </a:xfrm>
+          <a:prstGeom prst="roundRect">
+            <a:avLst>
+              <a:gd name="adj" fmla="val 10000"/>
+            </a:avLst>
+          </a:prstGeom>
+          <a:solidFill>
+            <a:srgbClr val="FDFCF9"/>
+          </a:solidFill>
+          <a:ln w="12700">
+            <a:solidFill>
+              <a:srgbClr val="DDD8CC"/>
+            </a:solidFill>
+          </a:ln>
+          <a:effectLst/>
+        </p:spPr>
+        <p:style>
+          <a:lnRef idx="1">
+            <a:schemeClr val="accent1"/>
+          </a:lnRef>
+          <a:fillRef idx="3">
+            <a:schemeClr val="accent1"/>
+          </a:fillRef>
+          <a:effectRef idx="2">
+            <a:schemeClr val="accent1"/>
+          </a:effectRef>
+          <a:fontRef idx="minor">
+            <a:schemeClr val="lt1"/>
+          </a:fontRef>
+        </p:style>
+        <p:txBody>
+          <a:bodyPr rtlCol="0" anchor="ctr" wrap="square" lIns="203200" rIns="203200" tIns="203200" bIns="203200"/>
+          <a:lstStyle/>
+          <a:p>
+            <a:pPr algn="ctr">
+              <a:lnSpc>
+                <a:spcPct val="115000"/>
+              </a:lnSpc>
+              <a:spcAft>
+                <a:spcPts val="0"/>
+              </a:spcAft>
+            </a:pPr>
+            <a:r>
+              <a:rPr sz="2000" b="1">
+                <a:solidFill>
+                  <a:srgbClr val="14213D"/>
+                </a:solidFill>
+                <a:latin typeface="Arial"/>
+              </a:rPr>
+              <a:t>No cheaper rule passes?  →  call the team every time.  Worst case: no savings, not lost accuracy.</a:t>
             </a:r>
           </a:p>
         </p:txBody>
@@ -5880,7 +6034,7 @@
                 </a:solidFill>
                 <a:latin typeface="Arial"/>
               </a:rPr>
-              <a:t>HOW IT WORKS</a:t>
+              <a:t>HOW TO CLIMB · 3 CHECK</a:t>
             </a:r>
           </a:p>
         </p:txBody>
@@ -5922,14 +6076,14 @@
                 </a:solidFill>
                 <a:latin typeface="Georgia"/>
               </a:rPr>
-              <a:t>The test is a betting game</a:t>
+              <a:t>Test from safe to risky, keep the cheapest that passes</a:t>
             </a:r>
           </a:p>
         </p:txBody>
       </p:sp>
       <p:pic>
         <p:nvPicPr>
-          <p:cNvPr id="5" name="Picture 4" descr="c_wealth.png"/>
+          <p:cNvPr id="5" name="Picture 4" descr="c_sweep.png"/>
           <p:cNvPicPr>
             <a:picLocks noChangeAspect="1"/>
           </p:cNvPicPr>
@@ -5943,8 +6097,8 @@
         </p:blipFill>
         <p:spPr>
           <a:xfrm>
-            <a:off x="812800" y="1915559"/>
-            <a:ext cx="6985000" cy="3788881"/>
+            <a:off x="2179492" y="1587500"/>
+            <a:ext cx="7833014" cy="4445000"/>
           </a:xfrm>
           <a:prstGeom prst="rect">
             <a:avLst/>
@@ -5953,74 +6107,14 @@
       </p:pic>
       <p:sp>
         <p:nvSpPr>
-          <p:cNvPr id="6" name="Oval 5"/>
-          <p:cNvSpPr/>
-          <p:nvPr/>
-        </p:nvSpPr>
-        <p:spPr>
-          <a:xfrm>
-            <a:off x="8191500" y="1841500"/>
-            <a:ext cx="444500" cy="444500"/>
-          </a:xfrm>
-          <a:prstGeom prst="ellipse">
-            <a:avLst/>
-          </a:prstGeom>
-          <a:solidFill>
-            <a:srgbClr val="B4541A"/>
-          </a:solidFill>
-          <a:ln>
-            <a:noFill/>
-          </a:ln>
-          <a:effectLst/>
-        </p:spPr>
-        <p:style>
-          <a:lnRef idx="1">
-            <a:schemeClr val="accent1"/>
-          </a:lnRef>
-          <a:fillRef idx="3">
-            <a:schemeClr val="accent1"/>
-          </a:fillRef>
-          <a:effectRef idx="2">
-            <a:schemeClr val="accent1"/>
-          </a:effectRef>
-          <a:fontRef idx="minor">
-            <a:schemeClr val="lt1"/>
-          </a:fontRef>
-        </p:style>
-        <p:txBody>
-          <a:bodyPr rtlCol="0" anchor="ctr" wrap="square" lIns="0" rIns="0" tIns="0" bIns="0"/>
-          <a:lstStyle/>
-          <a:p>
-            <a:pPr algn="ctr">
-              <a:lnSpc>
-                <a:spcPct val="115000"/>
-              </a:lnSpc>
-              <a:spcAft>
-                <a:spcPts val="0"/>
-              </a:spcAft>
-            </a:pPr>
-            <a:r>
-              <a:rPr sz="2800" b="1">
-                <a:solidFill>
-                  <a:srgbClr val="F7F6F2"/>
-                </a:solidFill>
-                <a:latin typeface="Arial"/>
-              </a:rPr>
-              <a:t>1</a:t>
-            </a:r>
-          </a:p>
-        </p:txBody>
-      </p:sp>
-      <p:sp>
-        <p:nvSpPr>
-          <p:cNvPr id="7" name="TextBox 6"/>
+          <p:cNvPr id="6" name="TextBox 5"/>
           <p:cNvSpPr txBox="1"/>
           <p:nvPr/>
         </p:nvSpPr>
         <p:spPr>
           <a:xfrm>
-            <a:off x="8794750" y="1866900"/>
-            <a:ext cx="2584450" cy="1016000"/>
+            <a:off x="812800" y="6096000"/>
+            <a:ext cx="10566400" cy="254000"/>
           </a:xfrm>
           <a:prstGeom prst="rect">
             <a:avLst/>
@@ -6042,319 +6136,13 @@
               </a:spcAft>
             </a:pPr>
             <a:r>
-              <a:rPr sz="1900" b="0">
-                <a:solidFill>
-                  <a:srgbClr val="3A4150"/>
-                </a:solidFill>
-                <a:latin typeface="Arial"/>
-              </a:rPr>
-              <a:t>Start with $1.</a:t>
-            </a:r>
-          </a:p>
-        </p:txBody>
-      </p:sp>
-      <p:sp>
-        <p:nvSpPr>
-          <p:cNvPr id="8" name="Oval 7"/>
-          <p:cNvSpPr/>
-          <p:nvPr/>
-        </p:nvSpPr>
-        <p:spPr>
-          <a:xfrm>
-            <a:off x="8191500" y="2921000"/>
-            <a:ext cx="444500" cy="444500"/>
-          </a:xfrm>
-          <a:prstGeom prst="ellipse">
-            <a:avLst/>
-          </a:prstGeom>
-          <a:solidFill>
-            <a:srgbClr val="B4541A"/>
-          </a:solidFill>
-          <a:ln>
-            <a:noFill/>
-          </a:ln>
-          <a:effectLst/>
-        </p:spPr>
-        <p:style>
-          <a:lnRef idx="1">
-            <a:schemeClr val="accent1"/>
-          </a:lnRef>
-          <a:fillRef idx="3">
-            <a:schemeClr val="accent1"/>
-          </a:fillRef>
-          <a:effectRef idx="2">
-            <a:schemeClr val="accent1"/>
-          </a:effectRef>
-          <a:fontRef idx="minor">
-            <a:schemeClr val="lt1"/>
-          </a:fontRef>
-        </p:style>
-        <p:txBody>
-          <a:bodyPr rtlCol="0" anchor="ctr" wrap="square" lIns="0" rIns="0" tIns="0" bIns="0"/>
-          <a:lstStyle/>
-          <a:p>
-            <a:pPr algn="ctr">
-              <a:lnSpc>
-                <a:spcPct val="115000"/>
-              </a:lnSpc>
-              <a:spcAft>
-                <a:spcPts val="0"/>
-              </a:spcAft>
-            </a:pPr>
-            <a:r>
-              <a:rPr sz="2800" b="1">
-                <a:solidFill>
-                  <a:srgbClr val="F7F6F2"/>
-                </a:solidFill>
-                <a:latin typeface="Arial"/>
-              </a:rPr>
-              <a:t>2</a:t>
-            </a:r>
-          </a:p>
-        </p:txBody>
-      </p:sp>
-      <p:sp>
-        <p:nvSpPr>
-          <p:cNvPr id="9" name="TextBox 8"/>
-          <p:cNvSpPr txBox="1"/>
-          <p:nvPr/>
-        </p:nvSpPr>
-        <p:spPr>
-          <a:xfrm>
-            <a:off x="8794750" y="2946400"/>
-            <a:ext cx="2584450" cy="1016000"/>
-          </a:xfrm>
-          <a:prstGeom prst="rect">
-            <a:avLst/>
-          </a:prstGeom>
-          <a:noFill/>
-        </p:spPr>
-        <p:txBody>
-          <a:bodyPr wrap="square" lIns="0" rIns="0" tIns="0" bIns="0" anchor="t">
-            <a:spAutoFit/>
-          </a:bodyPr>
-          <a:lstStyle/>
-          <a:p>
-            <a:pPr algn="l">
-              <a:lnSpc>
-                <a:spcPct val="115000"/>
-              </a:lnSpc>
-              <a:spcAft>
-                <a:spcPts val="0"/>
-              </a:spcAft>
-            </a:pPr>
-            <a:r>
-              <a:rPr sz="1900" b="0">
-                <a:solidFill>
-                  <a:srgbClr val="3A4150"/>
-                </a:solidFill>
-                <a:latin typeface="Arial"/>
-              </a:rPr>
-              <a:t>Each task: bet that skipping the team does no harm.</a:t>
-            </a:r>
-          </a:p>
-        </p:txBody>
-      </p:sp>
-      <p:sp>
-        <p:nvSpPr>
-          <p:cNvPr id="10" name="Oval 9"/>
-          <p:cNvSpPr/>
-          <p:nvPr/>
-        </p:nvSpPr>
-        <p:spPr>
-          <a:xfrm>
-            <a:off x="8191500" y="4000500"/>
-            <a:ext cx="444500" cy="444500"/>
-          </a:xfrm>
-          <a:prstGeom prst="ellipse">
-            <a:avLst/>
-          </a:prstGeom>
-          <a:solidFill>
-            <a:srgbClr val="B4541A"/>
-          </a:solidFill>
-          <a:ln>
-            <a:noFill/>
-          </a:ln>
-          <a:effectLst/>
-        </p:spPr>
-        <p:style>
-          <a:lnRef idx="1">
-            <a:schemeClr val="accent1"/>
-          </a:lnRef>
-          <a:fillRef idx="3">
-            <a:schemeClr val="accent1"/>
-          </a:fillRef>
-          <a:effectRef idx="2">
-            <a:schemeClr val="accent1"/>
-          </a:effectRef>
-          <a:fontRef idx="minor">
-            <a:schemeClr val="lt1"/>
-          </a:fontRef>
-        </p:style>
-        <p:txBody>
-          <a:bodyPr rtlCol="0" anchor="ctr" wrap="square" lIns="0" rIns="0" tIns="0" bIns="0"/>
-          <a:lstStyle/>
-          <a:p>
-            <a:pPr algn="ctr">
-              <a:lnSpc>
-                <a:spcPct val="115000"/>
-              </a:lnSpc>
-              <a:spcAft>
-                <a:spcPts val="0"/>
-              </a:spcAft>
-            </a:pPr>
-            <a:r>
-              <a:rPr sz="2800" b="1">
-                <a:solidFill>
-                  <a:srgbClr val="F7F6F2"/>
-                </a:solidFill>
-                <a:latin typeface="Arial"/>
-              </a:rPr>
-              <a:t>3</a:t>
-            </a:r>
-          </a:p>
-        </p:txBody>
-      </p:sp>
-      <p:sp>
-        <p:nvSpPr>
-          <p:cNvPr id="11" name="TextBox 10"/>
-          <p:cNvSpPr txBox="1"/>
-          <p:nvPr/>
-        </p:nvSpPr>
-        <p:spPr>
-          <a:xfrm>
-            <a:off x="8794750" y="4025900"/>
-            <a:ext cx="2584450" cy="1016000"/>
-          </a:xfrm>
-          <a:prstGeom prst="rect">
-            <a:avLst/>
-          </a:prstGeom>
-          <a:noFill/>
-        </p:spPr>
-        <p:txBody>
-          <a:bodyPr wrap="square" lIns="0" rIns="0" tIns="0" bIns="0" anchor="t">
-            <a:spAutoFit/>
-          </a:bodyPr>
-          <a:lstStyle/>
-          <a:p>
-            <a:pPr algn="l">
-              <a:lnSpc>
-                <a:spcPct val="115000"/>
-              </a:lnSpc>
-              <a:spcAft>
-                <a:spcPts val="0"/>
-              </a:spcAft>
-            </a:pPr>
-            <a:r>
-              <a:rPr sz="1900" b="0">
-                <a:solidFill>
-                  <a:srgbClr val="3A4150"/>
-                </a:solidFill>
-                <a:latin typeface="Arial"/>
-              </a:rPr>
-              <a:t>No harm: win a little. Broken answer: lose.</a:t>
-            </a:r>
-          </a:p>
-        </p:txBody>
-      </p:sp>
-      <p:sp>
-        <p:nvSpPr>
-          <p:cNvPr id="12" name="Oval 11"/>
-          <p:cNvSpPr/>
-          <p:nvPr/>
-        </p:nvSpPr>
-        <p:spPr>
-          <a:xfrm>
-            <a:off x="8191500" y="5080000"/>
-            <a:ext cx="444500" cy="444500"/>
-          </a:xfrm>
-          <a:prstGeom prst="ellipse">
-            <a:avLst/>
-          </a:prstGeom>
-          <a:solidFill>
-            <a:srgbClr val="B4541A"/>
-          </a:solidFill>
-          <a:ln>
-            <a:noFill/>
-          </a:ln>
-          <a:effectLst/>
-        </p:spPr>
-        <p:style>
-          <a:lnRef idx="1">
-            <a:schemeClr val="accent1"/>
-          </a:lnRef>
-          <a:fillRef idx="3">
-            <a:schemeClr val="accent1"/>
-          </a:fillRef>
-          <a:effectRef idx="2">
-            <a:schemeClr val="accent1"/>
-          </a:effectRef>
-          <a:fontRef idx="minor">
-            <a:schemeClr val="lt1"/>
-          </a:fontRef>
-        </p:style>
-        <p:txBody>
-          <a:bodyPr rtlCol="0" anchor="ctr" wrap="square" lIns="0" rIns="0" tIns="0" bIns="0"/>
-          <a:lstStyle/>
-          <a:p>
-            <a:pPr algn="ctr">
-              <a:lnSpc>
-                <a:spcPct val="115000"/>
-              </a:lnSpc>
-              <a:spcAft>
-                <a:spcPts val="0"/>
-              </a:spcAft>
-            </a:pPr>
-            <a:r>
-              <a:rPr sz="2800" b="1">
-                <a:solidFill>
-                  <a:srgbClr val="F7F6F2"/>
-                </a:solidFill>
-                <a:latin typeface="Arial"/>
-              </a:rPr>
-              <a:t>4</a:t>
-            </a:r>
-          </a:p>
-        </p:txBody>
-      </p:sp>
-      <p:sp>
-        <p:nvSpPr>
-          <p:cNvPr id="13" name="TextBox 12"/>
-          <p:cNvSpPr txBox="1"/>
-          <p:nvPr/>
-        </p:nvSpPr>
-        <p:spPr>
-          <a:xfrm>
-            <a:off x="8794750" y="5105400"/>
-            <a:ext cx="2584450" cy="1016000"/>
-          </a:xfrm>
-          <a:prstGeom prst="rect">
-            <a:avLst/>
-          </a:prstGeom>
-          <a:noFill/>
-        </p:spPr>
-        <p:txBody>
-          <a:bodyPr wrap="square" lIns="0" rIns="0" tIns="0" bIns="0" anchor="t">
-            <a:spAutoFit/>
-          </a:bodyPr>
-          <a:lstStyle/>
-          <a:p>
-            <a:pPr algn="l">
-              <a:lnSpc>
-                <a:spcPct val="115000"/>
-              </a:lnSpc>
-              <a:spcAft>
-                <a:spcPts val="0"/>
-              </a:spcAft>
-            </a:pPr>
-            <a:r>
-              <a:rPr sz="1900" b="0">
-                <a:solidFill>
-                  <a:srgbClr val="3A4150"/>
-                </a:solidFill>
-                <a:latin typeface="Arial"/>
-              </a:rPr>
-              <a:t>Reach $20: the rule passes.</a:t>
+              <a:rPr sz="1500" b="0">
+                <a:solidFill>
+                  <a:srgbClr val="6B7280"/>
+                </a:solidFill>
+                <a:latin typeface="Arial"/>
+              </a:rPr>
+              <a:t>gpt-oss-120b on MuSiQue, thresholds on the direct answer’s confidence, one calibration half.</a:t>
             </a:r>
           </a:p>
         </p:txBody>
@@ -6464,7 +6252,7 @@
                 </a:solidFill>
                 <a:latin typeface="Arial"/>
               </a:rPr>
-              <a:t>HOW IT WORKS</a:t>
+              <a:t>HOW TO CLIMB · 3 CHECK</a:t>
             </a:r>
           </a:p>
         </p:txBody>
@@ -6506,34 +6294,54 @@
                 </a:solidFill>
                 <a:latin typeface="Georgia"/>
               </a:rPr>
-              <a:t>Skipping the team can also save answers</a:t>
-            </a:r>
-          </a:p>
-        </p:txBody>
-      </p:sp>
-      <p:sp>
-        <p:nvSpPr>
-          <p:cNvPr id="5" name="Rounded Rectangle 4"/>
+              <a:t>Each test is a betting game</a:t>
+            </a:r>
+          </a:p>
+        </p:txBody>
+      </p:sp>
+      <p:pic>
+        <p:nvPicPr>
+          <p:cNvPr id="5" name="Picture 4" descr="c_wealth.png"/>
+          <p:cNvPicPr>
+            <a:picLocks noChangeAspect="1"/>
+          </p:cNvPicPr>
+          <p:nvPr/>
+        </p:nvPicPr>
+        <p:blipFill>
+          <a:blip r:embed="rId3"/>
+          <a:stretch>
+            <a:fillRect/>
+          </a:stretch>
+        </p:blipFill>
+        <p:spPr>
+          <a:xfrm>
+            <a:off x="812800" y="1915559"/>
+            <a:ext cx="6985000" cy="3788881"/>
+          </a:xfrm>
+          <a:prstGeom prst="rect">
+            <a:avLst/>
+          </a:prstGeom>
+        </p:spPr>
+      </p:pic>
+      <p:sp>
+        <p:nvSpPr>
+          <p:cNvPr id="6" name="Oval 5"/>
           <p:cNvSpPr/>
           <p:nvPr/>
         </p:nvSpPr>
         <p:spPr>
           <a:xfrm>
-            <a:off x="812800" y="2095500"/>
-            <a:ext cx="3384550" cy="2286000"/>
-          </a:xfrm>
-          <a:prstGeom prst="roundRect">
-            <a:avLst>
-              <a:gd name="adj" fmla="val 5000"/>
-            </a:avLst>
+            <a:off x="8191500" y="1841500"/>
+            <a:ext cx="444500" cy="444500"/>
+          </a:xfrm>
+          <a:prstGeom prst="ellipse">
+            <a:avLst/>
           </a:prstGeom>
           <a:solidFill>
-            <a:srgbClr val="F6E3E0"/>
+            <a:srgbClr val="B4541A"/>
           </a:solidFill>
-          <a:ln w="31750">
-            <a:solidFill>
-              <a:srgbClr val="B03A2E"/>
-            </a:solidFill>
+          <a:ln>
+            <a:noFill/>
           </a:ln>
           <a:effectLst/>
         </p:spPr>
@@ -6552,7 +6360,7 @@
           </a:fontRef>
         </p:style>
         <p:txBody>
-          <a:bodyPr rtlCol="0" anchor="ctr" wrap="square" lIns="203200" rIns="203200" tIns="203200" bIns="203200"/>
+          <a:bodyPr rtlCol="0" anchor="ctr" wrap="square" lIns="0" rIns="0" tIns="0" bIns="0"/>
           <a:lstStyle/>
           <a:p>
             <a:pPr algn="ctr">
@@ -6560,64 +6368,82 @@
                 <a:spcPct val="115000"/>
               </a:lnSpc>
               <a:spcAft>
-                <a:spcPts val="2000"/>
-              </a:spcAft>
-            </a:pPr>
-            <a:r>
-              <a:rPr sz="2600" b="1">
-                <a:solidFill>
-                  <a:srgbClr val="14213D"/>
-                </a:solidFill>
-                <a:latin typeface="Arial"/>
-              </a:rPr>
-              <a:t>Cheap answer wrong,
-team right</a:t>
-            </a:r>
-          </a:p>
-          <a:p>
-            <a:pPr algn="ctr">
-              <a:lnSpc>
-                <a:spcPct val="115000"/>
-              </a:lnSpc>
-              <a:spcAft>
-                <a:spcPts val="0"/>
-              </a:spcAft>
-            </a:pPr>
-            <a:r>
-              <a:rPr sz="2400" b="1">
-                <a:solidFill>
-                  <a:srgbClr val="B03A2E"/>
-                </a:solidFill>
-                <a:latin typeface="Arial"/>
-              </a:rPr>
-              <a:t>we lose a point</a:t>
-            </a:r>
-          </a:p>
-        </p:txBody>
-      </p:sp>
-      <p:sp>
-        <p:nvSpPr>
-          <p:cNvPr id="6" name="Rounded Rectangle 5"/>
+                <a:spcPts val="0"/>
+              </a:spcAft>
+            </a:pPr>
+            <a:r>
+              <a:rPr sz="2800" b="1">
+                <a:solidFill>
+                  <a:srgbClr val="F7F6F2"/>
+                </a:solidFill>
+                <a:latin typeface="Arial"/>
+              </a:rPr>
+              <a:t>1</a:t>
+            </a:r>
+          </a:p>
+        </p:txBody>
+      </p:sp>
+      <p:sp>
+        <p:nvSpPr>
+          <p:cNvPr id="7" name="TextBox 6"/>
+          <p:cNvSpPr txBox="1"/>
+          <p:nvPr/>
+        </p:nvSpPr>
+        <p:spPr>
+          <a:xfrm>
+            <a:off x="8794750" y="1866900"/>
+            <a:ext cx="2584450" cy="1016000"/>
+          </a:xfrm>
+          <a:prstGeom prst="rect">
+            <a:avLst/>
+          </a:prstGeom>
+          <a:noFill/>
+        </p:spPr>
+        <p:txBody>
+          <a:bodyPr wrap="square" lIns="0" rIns="0" tIns="0" bIns="0" anchor="t">
+            <a:spAutoFit/>
+          </a:bodyPr>
+          <a:lstStyle/>
+          <a:p>
+            <a:pPr algn="l">
+              <a:lnSpc>
+                <a:spcPct val="115000"/>
+              </a:lnSpc>
+              <a:spcAft>
+                <a:spcPts val="0"/>
+              </a:spcAft>
+            </a:pPr>
+            <a:r>
+              <a:rPr sz="1900" b="0">
+                <a:solidFill>
+                  <a:srgbClr val="3A4150"/>
+                </a:solidFill>
+                <a:latin typeface="Arial"/>
+              </a:rPr>
+              <a:t>Start with $1.</a:t>
+            </a:r>
+          </a:p>
+        </p:txBody>
+      </p:sp>
+      <p:sp>
+        <p:nvSpPr>
+          <p:cNvPr id="8" name="Oval 7"/>
           <p:cNvSpPr/>
           <p:nvPr/>
         </p:nvSpPr>
         <p:spPr>
           <a:xfrm>
-            <a:off x="4400550" y="2095500"/>
-            <a:ext cx="3384550" cy="2286000"/>
-          </a:xfrm>
-          <a:prstGeom prst="roundRect">
-            <a:avLst>
-              <a:gd name="adj" fmla="val 5000"/>
-            </a:avLst>
+            <a:off x="8191500" y="2921000"/>
+            <a:ext cx="444500" cy="444500"/>
+          </a:xfrm>
+          <a:prstGeom prst="ellipse">
+            <a:avLst/>
           </a:prstGeom>
           <a:solidFill>
-            <a:srgbClr val="ECEAE3"/>
+            <a:srgbClr val="B4541A"/>
           </a:solidFill>
-          <a:ln w="31750">
-            <a:solidFill>
-              <a:srgbClr val="6B7280"/>
-            </a:solidFill>
+          <a:ln>
+            <a:noFill/>
           </a:ln>
           <a:effectLst/>
         </p:spPr>
@@ -6636,7 +6462,7 @@
           </a:fontRef>
         </p:style>
         <p:txBody>
-          <a:bodyPr rtlCol="0" anchor="ctr" wrap="square" lIns="203200" rIns="203200" tIns="203200" bIns="203200"/>
+          <a:bodyPr rtlCol="0" anchor="ctr" wrap="square" lIns="0" rIns="0" tIns="0" bIns="0"/>
           <a:lstStyle/>
           <a:p>
             <a:pPr algn="ctr">
@@ -6644,64 +6470,82 @@
                 <a:spcPct val="115000"/>
               </a:lnSpc>
               <a:spcAft>
-                <a:spcPts val="2000"/>
-              </a:spcAft>
-            </a:pPr>
-            <a:r>
-              <a:rPr sz="2600" b="1">
-                <a:solidFill>
-                  <a:srgbClr val="14213D"/>
-                </a:solidFill>
-                <a:latin typeface="Arial"/>
-              </a:rPr>
-              <a:t>Both right,
-or both wrong</a:t>
-            </a:r>
-          </a:p>
-          <a:p>
-            <a:pPr algn="ctr">
-              <a:lnSpc>
-                <a:spcPct val="115000"/>
-              </a:lnSpc>
-              <a:spcAft>
-                <a:spcPts val="0"/>
-              </a:spcAft>
-            </a:pPr>
-            <a:r>
-              <a:rPr sz="2400" b="1">
-                <a:solidFill>
-                  <a:srgbClr val="6B7280"/>
-                </a:solidFill>
-                <a:latin typeface="Arial"/>
-              </a:rPr>
-              <a:t>no change (most tasks)</a:t>
-            </a:r>
-          </a:p>
-        </p:txBody>
-      </p:sp>
-      <p:sp>
-        <p:nvSpPr>
-          <p:cNvPr id="7" name="Rounded Rectangle 6"/>
+                <a:spcPts val="0"/>
+              </a:spcAft>
+            </a:pPr>
+            <a:r>
+              <a:rPr sz="2800" b="1">
+                <a:solidFill>
+                  <a:srgbClr val="F7F6F2"/>
+                </a:solidFill>
+                <a:latin typeface="Arial"/>
+              </a:rPr>
+              <a:t>2</a:t>
+            </a:r>
+          </a:p>
+        </p:txBody>
+      </p:sp>
+      <p:sp>
+        <p:nvSpPr>
+          <p:cNvPr id="9" name="TextBox 8"/>
+          <p:cNvSpPr txBox="1"/>
+          <p:nvPr/>
+        </p:nvSpPr>
+        <p:spPr>
+          <a:xfrm>
+            <a:off x="8794750" y="2946400"/>
+            <a:ext cx="2584450" cy="1016000"/>
+          </a:xfrm>
+          <a:prstGeom prst="rect">
+            <a:avLst/>
+          </a:prstGeom>
+          <a:noFill/>
+        </p:spPr>
+        <p:txBody>
+          <a:bodyPr wrap="square" lIns="0" rIns="0" tIns="0" bIns="0" anchor="t">
+            <a:spAutoFit/>
+          </a:bodyPr>
+          <a:lstStyle/>
+          <a:p>
+            <a:pPr algn="l">
+              <a:lnSpc>
+                <a:spcPct val="115000"/>
+              </a:lnSpc>
+              <a:spcAft>
+                <a:spcPts val="0"/>
+              </a:spcAft>
+            </a:pPr>
+            <a:r>
+              <a:rPr sz="1900" b="0">
+                <a:solidFill>
+                  <a:srgbClr val="3A4150"/>
+                </a:solidFill>
+                <a:latin typeface="Arial"/>
+              </a:rPr>
+              <a:t>Each task: bet that skipping the team does no harm.</a:t>
+            </a:r>
+          </a:p>
+        </p:txBody>
+      </p:sp>
+      <p:sp>
+        <p:nvSpPr>
+          <p:cNvPr id="10" name="Oval 9"/>
           <p:cNvSpPr/>
           <p:nvPr/>
         </p:nvSpPr>
         <p:spPr>
           <a:xfrm>
-            <a:off x="7988300" y="2095500"/>
-            <a:ext cx="3384550" cy="2286000"/>
-          </a:xfrm>
-          <a:prstGeom prst="roundRect">
-            <a:avLst>
-              <a:gd name="adj" fmla="val 5000"/>
-            </a:avLst>
+            <a:off x="8191500" y="4000500"/>
+            <a:ext cx="444500" cy="444500"/>
+          </a:xfrm>
+          <a:prstGeom prst="ellipse">
+            <a:avLst/>
           </a:prstGeom>
           <a:solidFill>
-            <a:srgbClr val="E3ECE2"/>
+            <a:srgbClr val="B4541A"/>
           </a:solidFill>
-          <a:ln w="31750">
-            <a:solidFill>
-              <a:srgbClr val="2F6B34"/>
-            </a:solidFill>
+          <a:ln>
+            <a:noFill/>
           </a:ln>
           <a:effectLst/>
         </p:spPr>
@@ -6720,7 +6564,7 @@
           </a:fontRef>
         </p:style>
         <p:txBody>
-          <a:bodyPr rtlCol="0" anchor="ctr" wrap="square" lIns="203200" rIns="203200" tIns="203200" bIns="203200"/>
+          <a:bodyPr rtlCol="0" anchor="ctr" wrap="square" lIns="0" rIns="0" tIns="0" bIns="0"/>
           <a:lstStyle/>
           <a:p>
             <a:pPr algn="ctr">
@@ -6728,64 +6572,82 @@
                 <a:spcPct val="115000"/>
               </a:lnSpc>
               <a:spcAft>
-                <a:spcPts val="2000"/>
-              </a:spcAft>
-            </a:pPr>
-            <a:r>
-              <a:rPr sz="2600" b="1">
-                <a:solidFill>
-                  <a:srgbClr val="14213D"/>
-                </a:solidFill>
-                <a:latin typeface="Arial"/>
-              </a:rPr>
-              <a:t>Cheap answer right,
-team wrong</a:t>
-            </a:r>
-          </a:p>
-          <a:p>
-            <a:pPr algn="ctr">
-              <a:lnSpc>
-                <a:spcPct val="115000"/>
-              </a:lnSpc>
-              <a:spcAft>
-                <a:spcPts val="0"/>
-              </a:spcAft>
-            </a:pPr>
-            <a:r>
-              <a:rPr sz="2400" b="1">
-                <a:solidFill>
-                  <a:srgbClr val="2F6B34"/>
-                </a:solidFill>
-                <a:latin typeface="Arial"/>
-              </a:rPr>
-              <a:t>we save a point</a:t>
-            </a:r>
-          </a:p>
-        </p:txBody>
-      </p:sp>
-      <p:sp>
-        <p:nvSpPr>
-          <p:cNvPr id="8" name="Rounded Rectangle 7"/>
+                <a:spcPts val="0"/>
+              </a:spcAft>
+            </a:pPr>
+            <a:r>
+              <a:rPr sz="2800" b="1">
+                <a:solidFill>
+                  <a:srgbClr val="F7F6F2"/>
+                </a:solidFill>
+                <a:latin typeface="Arial"/>
+              </a:rPr>
+              <a:t>3</a:t>
+            </a:r>
+          </a:p>
+        </p:txBody>
+      </p:sp>
+      <p:sp>
+        <p:nvSpPr>
+          <p:cNvPr id="11" name="TextBox 10"/>
+          <p:cNvSpPr txBox="1"/>
+          <p:nvPr/>
+        </p:nvSpPr>
+        <p:spPr>
+          <a:xfrm>
+            <a:off x="8794750" y="4025900"/>
+            <a:ext cx="2584450" cy="1016000"/>
+          </a:xfrm>
+          <a:prstGeom prst="rect">
+            <a:avLst/>
+          </a:prstGeom>
+          <a:noFill/>
+        </p:spPr>
+        <p:txBody>
+          <a:bodyPr wrap="square" lIns="0" rIns="0" tIns="0" bIns="0" anchor="t">
+            <a:spAutoFit/>
+          </a:bodyPr>
+          <a:lstStyle/>
+          <a:p>
+            <a:pPr algn="l">
+              <a:lnSpc>
+                <a:spcPct val="115000"/>
+              </a:lnSpc>
+              <a:spcAft>
+                <a:spcPts val="0"/>
+              </a:spcAft>
+            </a:pPr>
+            <a:r>
+              <a:rPr sz="1900" b="0">
+                <a:solidFill>
+                  <a:srgbClr val="3A4150"/>
+                </a:solidFill>
+                <a:latin typeface="Arial"/>
+              </a:rPr>
+              <a:t>No harm: win a little. Broken answer: lose.</a:t>
+            </a:r>
+          </a:p>
+        </p:txBody>
+      </p:sp>
+      <p:sp>
+        <p:nvSpPr>
+          <p:cNvPr id="12" name="Oval 11"/>
           <p:cNvSpPr/>
           <p:nvPr/>
         </p:nvSpPr>
         <p:spPr>
           <a:xfrm>
-            <a:off x="812800" y="4826000"/>
-            <a:ext cx="10566400" cy="825500"/>
-          </a:xfrm>
-          <a:prstGeom prst="roundRect">
-            <a:avLst>
-              <a:gd name="adj" fmla="val 10000"/>
-            </a:avLst>
+            <a:off x="8191500" y="5080000"/>
+            <a:ext cx="444500" cy="444500"/>
+          </a:xfrm>
+          <a:prstGeom prst="ellipse">
+            <a:avLst/>
           </a:prstGeom>
           <a:solidFill>
-            <a:srgbClr val="FDFCF9"/>
+            <a:srgbClr val="B4541A"/>
           </a:solidFill>
-          <a:ln w="12700">
-            <a:solidFill>
-              <a:srgbClr val="DDD8CC"/>
-            </a:solidFill>
+          <a:ln>
+            <a:noFill/>
           </a:ln>
           <a:effectLst/>
         </p:spPr>
@@ -6804,7 +6666,7 @@
           </a:fontRef>
         </p:style>
         <p:txBody>
-          <a:bodyPr rtlCol="0" anchor="ctr" wrap="square" lIns="203200" rIns="203200" tIns="203200" bIns="203200"/>
+          <a:bodyPr rtlCol="0" anchor="ctr" wrap="square" lIns="0" rIns="0" tIns="0" bIns="0"/>
           <a:lstStyle/>
           <a:p>
             <a:pPr algn="ctr">
@@ -6816,13 +6678,55 @@
               </a:spcAft>
             </a:pPr>
             <a:r>
-              <a:rPr sz="2400" b="1">
-                <a:solidFill>
-                  <a:srgbClr val="14213D"/>
-                </a:solidFill>
-                <a:latin typeface="Arial"/>
-              </a:rPr>
-              <a:t>Usual tests count only the left box. CLIMB counts both sides.</a:t>
+              <a:rPr sz="2800" b="1">
+                <a:solidFill>
+                  <a:srgbClr val="F7F6F2"/>
+                </a:solidFill>
+                <a:latin typeface="Arial"/>
+              </a:rPr>
+              <a:t>4</a:t>
+            </a:r>
+          </a:p>
+        </p:txBody>
+      </p:sp>
+      <p:sp>
+        <p:nvSpPr>
+          <p:cNvPr id="13" name="TextBox 12"/>
+          <p:cNvSpPr txBox="1"/>
+          <p:nvPr/>
+        </p:nvSpPr>
+        <p:spPr>
+          <a:xfrm>
+            <a:off x="8794750" y="5105400"/>
+            <a:ext cx="2584450" cy="1016000"/>
+          </a:xfrm>
+          <a:prstGeom prst="rect">
+            <a:avLst/>
+          </a:prstGeom>
+          <a:noFill/>
+        </p:spPr>
+        <p:txBody>
+          <a:bodyPr wrap="square" lIns="0" rIns="0" tIns="0" bIns="0" anchor="t">
+            <a:spAutoFit/>
+          </a:bodyPr>
+          <a:lstStyle/>
+          <a:p>
+            <a:pPr algn="l">
+              <a:lnSpc>
+                <a:spcPct val="115000"/>
+              </a:lnSpc>
+              <a:spcAft>
+                <a:spcPts val="0"/>
+              </a:spcAft>
+            </a:pPr>
+            <a:r>
+              <a:rPr sz="1900" b="0">
+                <a:solidFill>
+                  <a:srgbClr val="3A4150"/>
+                </a:solidFill>
+                <a:latin typeface="Arial"/>
+              </a:rPr>
+              <a:t>Reach $20: the rule passes.</a:t>
             </a:r>
           </a:p>
         </p:txBody>
@@ -6932,7 +6836,7 @@
                 </a:solidFill>
                 <a:latin typeface="Arial"/>
               </a:rPr>
-              <a:t>HOW IT WORKS</a:t>
+              <a:t>HOW TO CLIMB · 3 CHECK</a:t>
             </a:r>
           </a:p>
         </p:txBody>
@@ -6974,14 +6878,263 @@
                 </a:solidFill>
                 <a:latin typeface="Georgia"/>
               </a:rPr>
-              <a:t>Counting both sides certifies much more</a:t>
+              <a:t>Count the answers skipping saves, too</a:t>
+            </a:r>
+          </a:p>
+        </p:txBody>
+      </p:sp>
+      <p:sp>
+        <p:nvSpPr>
+          <p:cNvPr id="5" name="Rounded Rectangle 4"/>
+          <p:cNvSpPr/>
+          <p:nvPr/>
+        </p:nvSpPr>
+        <p:spPr>
+          <a:xfrm>
+            <a:off x="812800" y="1841500"/>
+            <a:ext cx="3810000" cy="1016000"/>
+          </a:xfrm>
+          <a:prstGeom prst="roundRect">
+            <a:avLst>
+              <a:gd name="adj" fmla="val 10000"/>
+            </a:avLst>
+          </a:prstGeom>
+          <a:solidFill>
+            <a:srgbClr val="F6E3E0"/>
+          </a:solidFill>
+          <a:ln w="31750">
+            <a:solidFill>
+              <a:srgbClr val="B03A2E"/>
+            </a:solidFill>
+          </a:ln>
+          <a:effectLst/>
+        </p:spPr>
+        <p:style>
+          <a:lnRef idx="1">
+            <a:schemeClr val="accent1"/>
+          </a:lnRef>
+          <a:fillRef idx="3">
+            <a:schemeClr val="accent1"/>
+          </a:fillRef>
+          <a:effectRef idx="2">
+            <a:schemeClr val="accent1"/>
+          </a:effectRef>
+          <a:fontRef idx="minor">
+            <a:schemeClr val="lt1"/>
+          </a:fontRef>
+        </p:style>
+        <p:txBody>
+          <a:bodyPr rtlCol="0" anchor="ctr" wrap="square" lIns="76200" rIns="76200" tIns="76200" bIns="76200"/>
+          <a:lstStyle/>
+          <a:p>
+            <a:pPr algn="ctr">
+              <a:lnSpc>
+                <a:spcPct val="115000"/>
+              </a:lnSpc>
+              <a:spcAft>
+                <a:spcPts val="600"/>
+              </a:spcAft>
+            </a:pPr>
+            <a:r>
+              <a:rPr sz="2200" b="1">
+                <a:solidFill>
+                  <a:srgbClr val="14213D"/>
+                </a:solidFill>
+                <a:latin typeface="Arial"/>
+              </a:rPr>
+              <a:t>Cheap wrong, team right</a:t>
+            </a:r>
+          </a:p>
+          <a:p>
+            <a:pPr algn="ctr">
+              <a:lnSpc>
+                <a:spcPct val="115000"/>
+              </a:lnSpc>
+              <a:spcAft>
+                <a:spcPts val="0"/>
+              </a:spcAft>
+            </a:pPr>
+            <a:r>
+              <a:rPr sz="2000" b="1">
+                <a:solidFill>
+                  <a:srgbClr val="B03A2E"/>
+                </a:solidFill>
+                <a:latin typeface="Arial"/>
+              </a:rPr>
+              <a:t>lose a point</a:t>
+            </a:r>
+          </a:p>
+        </p:txBody>
+      </p:sp>
+      <p:sp>
+        <p:nvSpPr>
+          <p:cNvPr id="6" name="Rounded Rectangle 5"/>
+          <p:cNvSpPr/>
+          <p:nvPr/>
+        </p:nvSpPr>
+        <p:spPr>
+          <a:xfrm>
+            <a:off x="812800" y="3048000"/>
+            <a:ext cx="3810000" cy="1016000"/>
+          </a:xfrm>
+          <a:prstGeom prst="roundRect">
+            <a:avLst>
+              <a:gd name="adj" fmla="val 10000"/>
+            </a:avLst>
+          </a:prstGeom>
+          <a:solidFill>
+            <a:srgbClr val="ECEAE3"/>
+          </a:solidFill>
+          <a:ln w="31750">
+            <a:solidFill>
+              <a:srgbClr val="6B7280"/>
+            </a:solidFill>
+          </a:ln>
+          <a:effectLst/>
+        </p:spPr>
+        <p:style>
+          <a:lnRef idx="1">
+            <a:schemeClr val="accent1"/>
+          </a:lnRef>
+          <a:fillRef idx="3">
+            <a:schemeClr val="accent1"/>
+          </a:fillRef>
+          <a:effectRef idx="2">
+            <a:schemeClr val="accent1"/>
+          </a:effectRef>
+          <a:fontRef idx="minor">
+            <a:schemeClr val="lt1"/>
+          </a:fontRef>
+        </p:style>
+        <p:txBody>
+          <a:bodyPr rtlCol="0" anchor="ctr" wrap="square" lIns="76200" rIns="76200" tIns="76200" bIns="76200"/>
+          <a:lstStyle/>
+          <a:p>
+            <a:pPr algn="ctr">
+              <a:lnSpc>
+                <a:spcPct val="115000"/>
+              </a:lnSpc>
+              <a:spcAft>
+                <a:spcPts val="600"/>
+              </a:spcAft>
+            </a:pPr>
+            <a:r>
+              <a:rPr sz="2200" b="1">
+                <a:solidFill>
+                  <a:srgbClr val="14213D"/>
+                </a:solidFill>
+                <a:latin typeface="Arial"/>
+              </a:rPr>
+              <a:t>Same result</a:t>
+            </a:r>
+          </a:p>
+          <a:p>
+            <a:pPr algn="ctr">
+              <a:lnSpc>
+                <a:spcPct val="115000"/>
+              </a:lnSpc>
+              <a:spcAft>
+                <a:spcPts val="0"/>
+              </a:spcAft>
+            </a:pPr>
+            <a:r>
+              <a:rPr sz="2000" b="1">
+                <a:solidFill>
+                  <a:srgbClr val="6B7280"/>
+                </a:solidFill>
+                <a:latin typeface="Arial"/>
+              </a:rPr>
+              <a:t>no change (most tasks)</a:t>
+            </a:r>
+          </a:p>
+        </p:txBody>
+      </p:sp>
+      <p:sp>
+        <p:nvSpPr>
+          <p:cNvPr id="7" name="Rounded Rectangle 6"/>
+          <p:cNvSpPr/>
+          <p:nvPr/>
+        </p:nvSpPr>
+        <p:spPr>
+          <a:xfrm>
+            <a:off x="812800" y="4254500"/>
+            <a:ext cx="3810000" cy="1016000"/>
+          </a:xfrm>
+          <a:prstGeom prst="roundRect">
+            <a:avLst>
+              <a:gd name="adj" fmla="val 10000"/>
+            </a:avLst>
+          </a:prstGeom>
+          <a:solidFill>
+            <a:srgbClr val="E3ECE2"/>
+          </a:solidFill>
+          <a:ln w="31750">
+            <a:solidFill>
+              <a:srgbClr val="2F6B34"/>
+            </a:solidFill>
+          </a:ln>
+          <a:effectLst/>
+        </p:spPr>
+        <p:style>
+          <a:lnRef idx="1">
+            <a:schemeClr val="accent1"/>
+          </a:lnRef>
+          <a:fillRef idx="3">
+            <a:schemeClr val="accent1"/>
+          </a:fillRef>
+          <a:effectRef idx="2">
+            <a:schemeClr val="accent1"/>
+          </a:effectRef>
+          <a:fontRef idx="minor">
+            <a:schemeClr val="lt1"/>
+          </a:fontRef>
+        </p:style>
+        <p:txBody>
+          <a:bodyPr rtlCol="0" anchor="ctr" wrap="square" lIns="76200" rIns="76200" tIns="76200" bIns="76200"/>
+          <a:lstStyle/>
+          <a:p>
+            <a:pPr algn="ctr">
+              <a:lnSpc>
+                <a:spcPct val="115000"/>
+              </a:lnSpc>
+              <a:spcAft>
+                <a:spcPts val="600"/>
+              </a:spcAft>
+            </a:pPr>
+            <a:r>
+              <a:rPr sz="2200" b="1">
+                <a:solidFill>
+                  <a:srgbClr val="14213D"/>
+                </a:solidFill>
+                <a:latin typeface="Arial"/>
+              </a:rPr>
+              <a:t>Cheap right, team wrong</a:t>
+            </a:r>
+          </a:p>
+          <a:p>
+            <a:pPr algn="ctr">
+              <a:lnSpc>
+                <a:spcPct val="115000"/>
+              </a:lnSpc>
+              <a:spcAft>
+                <a:spcPts val="0"/>
+              </a:spcAft>
+            </a:pPr>
+            <a:r>
+              <a:rPr sz="2000" b="1">
+                <a:solidFill>
+                  <a:srgbClr val="2F6B34"/>
+                </a:solidFill>
+                <a:latin typeface="Arial"/>
+              </a:rPr>
+              <a:t>save a point</a:t>
             </a:r>
           </a:p>
         </p:txBody>
       </p:sp>
       <p:pic>
         <p:nvPicPr>
-          <p:cNvPr id="5" name="Picture 4" descr="c_tests.png"/>
+          <p:cNvPr id="8" name="Picture 7" descr="c_tests.png"/>
           <p:cNvPicPr>
             <a:picLocks noChangeAspect="1"/>
           </p:cNvPicPr>
@@ -6995,8 +7148,8 @@
         </p:blipFill>
         <p:spPr>
           <a:xfrm>
-            <a:off x="812800" y="2331170"/>
-            <a:ext cx="7302500" cy="2830659"/>
+            <a:off x="5016500" y="2322816"/>
+            <a:ext cx="6362700" cy="2466366"/>
           </a:xfrm>
           <a:prstGeom prst="rect">
             <a:avLst/>
@@ -7005,69 +7158,28 @@
       </p:pic>
       <p:sp>
         <p:nvSpPr>
-          <p:cNvPr id="6" name="Rounded Rectangle 5"/>
-          <p:cNvSpPr/>
-          <p:nvPr/>
-        </p:nvSpPr>
-        <p:spPr>
-          <a:xfrm>
-            <a:off x="8445500" y="2286000"/>
-            <a:ext cx="2933700" cy="1905000"/>
-          </a:xfrm>
-          <a:prstGeom prst="roundRect">
-            <a:avLst>
-              <a:gd name="adj" fmla="val 6000"/>
-            </a:avLst>
-          </a:prstGeom>
-          <a:solidFill>
-            <a:srgbClr val="E3ECE2"/>
-          </a:solidFill>
-          <a:ln w="12700">
-            <a:solidFill>
-              <a:srgbClr val="DDD8CC"/>
-            </a:solidFill>
-          </a:ln>
-          <a:effectLst/>
-        </p:spPr>
-        <p:style>
-          <a:lnRef idx="1">
-            <a:schemeClr val="accent1"/>
-          </a:lnRef>
-          <a:fillRef idx="3">
-            <a:schemeClr val="accent1"/>
-          </a:fillRef>
-          <a:effectRef idx="2">
-            <a:schemeClr val="accent1"/>
-          </a:effectRef>
-          <a:fontRef idx="minor">
-            <a:schemeClr val="lt1"/>
-          </a:fontRef>
-        </p:style>
-        <p:txBody>
-          <a:bodyPr rtlCol="0" anchor="ctr" wrap="square" lIns="190500" rIns="190500" tIns="190500" bIns="190500"/>
+          <p:cNvPr id="9" name="TextBox 8"/>
+          <p:cNvSpPr txBox="1"/>
+          <p:nvPr/>
+        </p:nvSpPr>
+        <p:spPr>
+          <a:xfrm>
+            <a:off x="5016500" y="5334000"/>
+            <a:ext cx="6362700" cy="508000"/>
+          </a:xfrm>
+          <a:prstGeom prst="rect">
+            <a:avLst/>
+          </a:prstGeom>
+          <a:noFill/>
+        </p:spPr>
+        <p:txBody>
+          <a:bodyPr wrap="square" lIns="0" rIns="0" tIns="0" bIns="0" anchor="t">
+            <a:spAutoFit/>
+          </a:bodyPr>
           <a:lstStyle/>
           <a:p>
             <a:pPr algn="l">
               <a:lnSpc>
-                <a:spcPct val="100000"/>
-              </a:lnSpc>
-              <a:spcAft>
-                <a:spcPts val="600"/>
-              </a:spcAft>
-            </a:pPr>
-            <a:r>
-              <a:rPr sz="3600" b="1">
-                <a:solidFill>
-                  <a:srgbClr val="2F6B34"/>
-                </a:solidFill>
-                <a:latin typeface="Georgia"/>
-              </a:rPr>
-              <a:t>62%</a:t>
-            </a:r>
-          </a:p>
-          <a:p>
-            <a:pPr algn="l">
-              <a:lnSpc>
                 <a:spcPct val="115000"/>
               </a:lnSpc>
               <a:spcAft>
@@ -7077,11 +7189,11 @@
             <a:r>
               <a:rPr sz="1700" b="0">
                 <a:solidFill>
-                  <a:srgbClr val="3A4150"/>
-                </a:solidFill>
-                <a:latin typeface="Arial"/>
-              </a:rPr>
-              <a:t>of the team’s tokens with CLIMB’s test. A worst-case bound: 100%.</a:t>
+                  <a:srgbClr val="6B7280"/>
+                </a:solidFill>
+                <a:latin typeface="Arial"/>
+              </a:rPr>
+              <a:t>Tokens each valid test can certify at ε = 5. Lower is better.</a:t>
             </a:r>
           </a:p>
         </p:txBody>
@@ -7191,7 +7303,7 @@
                 </a:solidFill>
                 <a:latin typeface="Arial"/>
               </a:rPr>
-              <a:t>EXPERIMENTS</a:t>
+              <a:t>HOW TO CLIMB · 4 DEPTH</a:t>
             </a:r>
           </a:p>
         </p:txBody>
@@ -7233,7 +7345,7 @@
                 </a:solidFill>
                 <a:latin typeface="Georgia"/>
               </a:rPr>
-              <a:t>3 models × 4 benchmarks = 12 settings</a:t>
+              <a:t>One rung or two? The data decides</a:t>
             </a:r>
           </a:p>
         </p:txBody>
@@ -7246,8 +7358,8 @@
         </p:nvSpPr>
         <p:spPr>
           <a:xfrm>
-            <a:off x="3048000" y="1841500"/>
-            <a:ext cx="1905000" cy="508000"/>
+            <a:off x="812800" y="1778000"/>
+            <a:ext cx="5715000" cy="317500"/>
           </a:xfrm>
           <a:prstGeom prst="rect">
             <a:avLst/>
@@ -7260,7 +7372,7 @@
           </a:bodyPr>
           <a:lstStyle/>
           <a:p>
-            <a:pPr algn="ctr">
+            <a:pPr algn="l">
               <a:lnSpc>
                 <a:spcPct val="115000"/>
               </a:lnSpc>
@@ -7275,265 +7387,21 @@
                 </a:solidFill>
                 <a:latin typeface="Arial"/>
               </a:rPr>
-              <a:t>MATH</a:t>
-            </a:r>
-          </a:p>
-          <a:p>
-            <a:pPr algn="ctr">
-              <a:lnSpc>
-                <a:spcPct val="115000"/>
-              </a:lnSpc>
-              <a:spcAft>
-                <a:spcPts val="0"/>
-              </a:spcAft>
-            </a:pPr>
-            <a:r>
-              <a:rPr sz="1600" b="0">
-                <a:solidFill>
-                  <a:srgbClr val="6B7280"/>
-                </a:solidFill>
-                <a:latin typeface="Arial"/>
-              </a:rPr>
-              <a:t>math</a:t>
-            </a:r>
-          </a:p>
-        </p:txBody>
-      </p:sp>
-      <p:sp>
-        <p:nvSpPr>
-          <p:cNvPr id="6" name="TextBox 5"/>
-          <p:cNvSpPr txBox="1"/>
-          <p:nvPr/>
-        </p:nvSpPr>
-        <p:spPr>
-          <a:xfrm>
-            <a:off x="5080000" y="1841500"/>
-            <a:ext cx="1905000" cy="508000"/>
-          </a:xfrm>
-          <a:prstGeom prst="rect">
-            <a:avLst/>
-          </a:prstGeom>
-          <a:noFill/>
-        </p:spPr>
-        <p:txBody>
-          <a:bodyPr wrap="square" lIns="0" rIns="0" tIns="0" bIns="0" anchor="t">
-            <a:spAutoFit/>
-          </a:bodyPr>
-          <a:lstStyle/>
-          <a:p>
-            <a:pPr algn="ctr">
-              <a:lnSpc>
-                <a:spcPct val="115000"/>
-              </a:lnSpc>
-              <a:spcAft>
-                <a:spcPts val="0"/>
-              </a:spcAft>
-            </a:pPr>
-            <a:r>
-              <a:rPr sz="2200" b="1">
-                <a:solidFill>
-                  <a:srgbClr val="14213D"/>
-                </a:solidFill>
-                <a:latin typeface="Arial"/>
-              </a:rPr>
-              <a:t>FRAMES</a:t>
-            </a:r>
-          </a:p>
-          <a:p>
-            <a:pPr algn="ctr">
-              <a:lnSpc>
-                <a:spcPct val="115000"/>
-              </a:lnSpc>
-              <a:spcAft>
-                <a:spcPts val="0"/>
-              </a:spcAft>
-            </a:pPr>
-            <a:r>
-              <a:rPr sz="1600" b="0">
-                <a:solidFill>
-                  <a:srgbClr val="6B7280"/>
-                </a:solidFill>
-                <a:latin typeface="Arial"/>
-              </a:rPr>
-              <a:t>open-book QA</a:t>
-            </a:r>
-          </a:p>
-        </p:txBody>
-      </p:sp>
-      <p:sp>
-        <p:nvSpPr>
-          <p:cNvPr id="7" name="TextBox 6"/>
-          <p:cNvSpPr txBox="1"/>
-          <p:nvPr/>
-        </p:nvSpPr>
-        <p:spPr>
-          <a:xfrm>
-            <a:off x="7112000" y="1841500"/>
-            <a:ext cx="1905000" cy="508000"/>
-          </a:xfrm>
-          <a:prstGeom prst="rect">
-            <a:avLst/>
-          </a:prstGeom>
-          <a:noFill/>
-        </p:spPr>
-        <p:txBody>
-          <a:bodyPr wrap="square" lIns="0" rIns="0" tIns="0" bIns="0" anchor="t">
-            <a:spAutoFit/>
-          </a:bodyPr>
-          <a:lstStyle/>
-          <a:p>
-            <a:pPr algn="ctr">
-              <a:lnSpc>
-                <a:spcPct val="115000"/>
-              </a:lnSpc>
-              <a:spcAft>
-                <a:spcPts val="0"/>
-              </a:spcAft>
-            </a:pPr>
-            <a:r>
-              <a:rPr sz="2200" b="1">
-                <a:solidFill>
-                  <a:srgbClr val="14213D"/>
-                </a:solidFill>
-                <a:latin typeface="Arial"/>
-              </a:rPr>
-              <a:t>MuSiQue</a:t>
-            </a:r>
-          </a:p>
-          <a:p>
-            <a:pPr algn="ctr">
-              <a:lnSpc>
-                <a:spcPct val="115000"/>
-              </a:lnSpc>
-              <a:spcAft>
-                <a:spcPts val="0"/>
-              </a:spcAft>
-            </a:pPr>
-            <a:r>
-              <a:rPr sz="1600" b="0">
-                <a:solidFill>
-                  <a:srgbClr val="6B7280"/>
-                </a:solidFill>
-                <a:latin typeface="Arial"/>
-              </a:rPr>
-              <a:t>open-book QA</a:t>
-            </a:r>
-          </a:p>
-        </p:txBody>
-      </p:sp>
-      <p:sp>
-        <p:nvSpPr>
-          <p:cNvPr id="8" name="TextBox 7"/>
-          <p:cNvSpPr txBox="1"/>
-          <p:nvPr/>
-        </p:nvSpPr>
-        <p:spPr>
-          <a:xfrm>
-            <a:off x="9144000" y="1841500"/>
-            <a:ext cx="1905000" cy="508000"/>
-          </a:xfrm>
-          <a:prstGeom prst="rect">
-            <a:avLst/>
-          </a:prstGeom>
-          <a:noFill/>
-        </p:spPr>
-        <p:txBody>
-          <a:bodyPr wrap="square" lIns="0" rIns="0" tIns="0" bIns="0" anchor="t">
-            <a:spAutoFit/>
-          </a:bodyPr>
-          <a:lstStyle/>
-          <a:p>
-            <a:pPr algn="ctr">
-              <a:lnSpc>
-                <a:spcPct val="115000"/>
-              </a:lnSpc>
-              <a:spcAft>
-                <a:spcPts val="0"/>
-              </a:spcAft>
-            </a:pPr>
-            <a:r>
-              <a:rPr sz="2200" b="1">
-                <a:solidFill>
-                  <a:srgbClr val="14213D"/>
-                </a:solidFill>
-                <a:latin typeface="Arial"/>
-              </a:rPr>
-              <a:t>BBEH</a:t>
-            </a:r>
-          </a:p>
-          <a:p>
-            <a:pPr algn="ctr">
-              <a:lnSpc>
-                <a:spcPct val="115000"/>
-              </a:lnSpc>
-              <a:spcAft>
-                <a:spcPts val="0"/>
-              </a:spcAft>
-            </a:pPr>
-            <a:r>
-              <a:rPr sz="1600" b="0">
-                <a:solidFill>
-                  <a:srgbClr val="6B7280"/>
-                </a:solidFill>
-                <a:latin typeface="Arial"/>
-              </a:rPr>
-              <a:t>hard reasoning</a:t>
-            </a:r>
-          </a:p>
-        </p:txBody>
-      </p:sp>
-      <p:sp>
-        <p:nvSpPr>
-          <p:cNvPr id="9" name="TextBox 8"/>
-          <p:cNvSpPr txBox="1"/>
-          <p:nvPr/>
-        </p:nvSpPr>
-        <p:spPr>
-          <a:xfrm>
-            <a:off x="812800" y="2508250"/>
-            <a:ext cx="2032000" cy="762000"/>
-          </a:xfrm>
-          <a:prstGeom prst="rect">
-            <a:avLst/>
-          </a:prstGeom>
-          <a:noFill/>
-        </p:spPr>
-        <p:txBody>
-          <a:bodyPr wrap="square" lIns="0" rIns="0" tIns="0" bIns="0" anchor="ctr">
-            <a:spAutoFit/>
-          </a:bodyPr>
-          <a:lstStyle/>
-          <a:p>
-            <a:pPr algn="l">
-              <a:lnSpc>
-                <a:spcPct val="115000"/>
-              </a:lnSpc>
-              <a:spcAft>
-                <a:spcPts val="0"/>
-              </a:spcAft>
-            </a:pPr>
-            <a:r>
-              <a:rPr sz="2200" b="1">
-                <a:solidFill>
-                  <a:srgbClr val="14213D"/>
-                </a:solidFill>
-                <a:latin typeface="Arial"/>
-              </a:rPr>
-              <a:t>gpt-oss-20b</a:t>
-            </a:r>
-          </a:p>
-        </p:txBody>
-      </p:sp>
-      <p:sp>
-        <p:nvSpPr>
-          <p:cNvPr id="10" name="Rounded Rectangle 9"/>
+              <a:t>Option A: one rung</a:t>
+            </a:r>
+          </a:p>
+        </p:txBody>
+      </p:sp>
+      <p:sp>
+        <p:nvSpPr>
+          <p:cNvPr id="6" name="Rounded Rectangle 5"/>
           <p:cNvSpPr/>
           <p:nvPr/>
         </p:nvSpPr>
         <p:spPr>
           <a:xfrm>
-            <a:off x="3048000" y="2508250"/>
-            <a:ext cx="1905000" cy="762000"/>
+            <a:off x="812800" y="2159000"/>
+            <a:ext cx="2667000" cy="952500"/>
           </a:xfrm>
           <a:prstGeom prst="roundRect">
             <a:avLst>
@@ -7543,9 +7411,9 @@
           <a:solidFill>
             <a:srgbClr val="E2EAF5"/>
           </a:solidFill>
-          <a:ln w="12700">
+          <a:ln w="25400">
             <a:solidFill>
-              <a:srgbClr val="DDD8CC"/>
+              <a:srgbClr val="2E5C99"/>
             </a:solidFill>
           </a:ln>
           <a:effectLst/>
@@ -7565,7 +7433,7 @@
           </a:fontRef>
         </p:style>
         <p:txBody>
-          <a:bodyPr rtlCol="0" anchor="ctr" wrap="square" lIns="50800" rIns="50800" tIns="50800" bIns="50800"/>
+          <a:bodyPr rtlCol="0" anchor="ctr" wrap="square" lIns="88900" rIns="88900" tIns="88900" bIns="88900"/>
           <a:lstStyle/>
           <a:p>
             <a:pPr algn="ctr">
@@ -7577,59 +7445,36 @@
               </a:spcAft>
             </a:pPr>
             <a:r>
-              <a:rPr sz="2400" b="1">
+              <a:rPr sz="2100" b="1">
                 <a:solidFill>
                   <a:srgbClr val="14213D"/>
                 </a:solidFill>
                 <a:latin typeface="Arial"/>
               </a:rPr>
-              <a:t>94.8%</a:t>
-            </a:r>
-          </a:p>
-          <a:p>
-            <a:pPr algn="ctr">
-              <a:lnSpc>
-                <a:spcPct val="115000"/>
-              </a:lnSpc>
-              <a:spcAft>
-                <a:spcPts val="0"/>
-              </a:spcAft>
-            </a:pPr>
-            <a:r>
-              <a:rPr sz="1300" b="0">
-                <a:solidFill>
-                  <a:srgbClr val="6B7280"/>
-                </a:solidFill>
-                <a:latin typeface="Arial"/>
-              </a:rPr>
-              <a:t>team accuracy</a:t>
-            </a:r>
-          </a:p>
-        </p:txBody>
-      </p:sp>
-      <p:sp>
-        <p:nvSpPr>
-          <p:cNvPr id="11" name="Rounded Rectangle 10"/>
+              <a:t>Direct answer</a:t>
+            </a:r>
+          </a:p>
+        </p:txBody>
+      </p:sp>
+      <p:sp>
+        <p:nvSpPr>
+          <p:cNvPr id="7" name="Right Arrow 6"/>
           <p:cNvSpPr/>
           <p:nvPr/>
         </p:nvSpPr>
         <p:spPr>
           <a:xfrm>
-            <a:off x="5080000" y="2508250"/>
-            <a:ext cx="1905000" cy="762000"/>
-          </a:xfrm>
-          <a:prstGeom prst="roundRect">
-            <a:avLst>
-              <a:gd name="adj" fmla="val 10000"/>
-            </a:avLst>
+            <a:off x="3556000" y="2476500"/>
+            <a:ext cx="444500" cy="317500"/>
+          </a:xfrm>
+          <a:prstGeom prst="rightArrow">
+            <a:avLst/>
           </a:prstGeom>
           <a:solidFill>
-            <a:srgbClr val="E2EAF5"/>
+            <a:srgbClr val="6B7280"/>
           </a:solidFill>
-          <a:ln w="12700">
-            <a:solidFill>
-              <a:srgbClr val="DDD8CC"/>
-            </a:solidFill>
+          <a:ln>
+            <a:noFill/>
           </a:ln>
           <a:effectLst/>
         </p:spPr>
@@ -7648,58 +7493,23 @@
           </a:fontRef>
         </p:style>
         <p:txBody>
-          <a:bodyPr rtlCol="0" anchor="ctr" wrap="square" lIns="50800" rIns="50800" tIns="50800" bIns="50800"/>
-          <a:lstStyle/>
-          <a:p>
-            <a:pPr algn="ctr">
-              <a:lnSpc>
-                <a:spcPct val="115000"/>
-              </a:lnSpc>
-              <a:spcAft>
-                <a:spcPts val="0"/>
-              </a:spcAft>
-            </a:pPr>
-            <a:r>
-              <a:rPr sz="2400" b="1">
-                <a:solidFill>
-                  <a:srgbClr val="14213D"/>
-                </a:solidFill>
-                <a:latin typeface="Arial"/>
-              </a:rPr>
-              <a:t>76.1%</a:t>
-            </a:r>
-          </a:p>
-          <a:p>
-            <a:pPr algn="ctr">
-              <a:lnSpc>
-                <a:spcPct val="115000"/>
-              </a:lnSpc>
-              <a:spcAft>
-                <a:spcPts val="0"/>
-              </a:spcAft>
-            </a:pPr>
-            <a:r>
-              <a:rPr sz="1300" b="0">
-                <a:solidFill>
-                  <a:srgbClr val="6B7280"/>
-                </a:solidFill>
-                <a:latin typeface="Arial"/>
-              </a:rPr>
-              <a:t>team accuracy</a:t>
-            </a:r>
-          </a:p>
-        </p:txBody>
-      </p:sp>
-      <p:sp>
-        <p:nvSpPr>
-          <p:cNvPr id="12" name="Rounded Rectangle 11"/>
+          <a:bodyPr rtlCol="0" anchor="ctr"/>
+          <a:lstStyle/>
+          <a:p>
+            <a:pPr algn="ctr"/>
+          </a:p>
+        </p:txBody>
+      </p:sp>
+      <p:sp>
+        <p:nvSpPr>
+          <p:cNvPr id="8" name="Rounded Rectangle 7"/>
           <p:cNvSpPr/>
           <p:nvPr/>
         </p:nvSpPr>
         <p:spPr>
           <a:xfrm>
-            <a:off x="7112000" y="2508250"/>
-            <a:ext cx="1905000" cy="762000"/>
+            <a:off x="4095750" y="2159000"/>
+            <a:ext cx="2667000" cy="952500"/>
           </a:xfrm>
           <a:prstGeom prst="roundRect">
             <a:avLst>
@@ -7707,11 +7517,11 @@
             </a:avLst>
           </a:prstGeom>
           <a:solidFill>
-            <a:srgbClr val="E2EAF5"/>
+            <a:srgbClr val="E3ECE2"/>
           </a:solidFill>
-          <a:ln w="12700">
+          <a:ln w="25400">
             <a:solidFill>
-              <a:srgbClr val="DDD8CC"/>
+              <a:srgbClr val="2F6B34"/>
             </a:solidFill>
           </a:ln>
           <a:effectLst/>
@@ -7731,7 +7541,7 @@
           </a:fontRef>
         </p:style>
         <p:txBody>
-          <a:bodyPr rtlCol="0" anchor="ctr" wrap="square" lIns="50800" rIns="50800" tIns="50800" bIns="50800"/>
+          <a:bodyPr rtlCol="0" anchor="ctr" wrap="square" lIns="88900" rIns="88900" tIns="88900" bIns="88900"/>
           <a:lstStyle/>
           <a:p>
             <a:pPr algn="ctr">
@@ -7743,46 +7553,111 @@
               </a:spcAft>
             </a:pPr>
             <a:r>
-              <a:rPr sz="2400" b="1">
+              <a:rPr sz="2100" b="1">
+                <a:solidFill>
+                  <a:srgbClr val="2F6B34"/>
+                </a:solidFill>
+                <a:latin typeface="Arial"/>
+              </a:rPr>
+              <a:t>confident? stop</a:t>
+            </a:r>
+          </a:p>
+        </p:txBody>
+      </p:sp>
+      <p:sp>
+        <p:nvSpPr>
+          <p:cNvPr id="9" name="TextBox 8"/>
+          <p:cNvSpPr txBox="1"/>
+          <p:nvPr/>
+        </p:nvSpPr>
+        <p:spPr>
+          <a:xfrm>
+            <a:off x="6889750" y="2444750"/>
+            <a:ext cx="1587500" cy="381000"/>
+          </a:xfrm>
+          <a:prstGeom prst="rect">
+            <a:avLst/>
+          </a:prstGeom>
+          <a:noFill/>
+        </p:spPr>
+        <p:txBody>
+          <a:bodyPr wrap="square" lIns="0" rIns="0" tIns="0" bIns="0" anchor="t">
+            <a:spAutoFit/>
+          </a:bodyPr>
+          <a:lstStyle/>
+          <a:p>
+            <a:pPr algn="l">
+              <a:lnSpc>
+                <a:spcPct val="115000"/>
+              </a:lnSpc>
+              <a:spcAft>
+                <a:spcPts val="0"/>
+              </a:spcAft>
+            </a:pPr>
+            <a:r>
+              <a:rPr sz="1900" b="1">
+                <a:solidFill>
+                  <a:srgbClr val="B4541A"/>
+                </a:solidFill>
+                <a:latin typeface="Arial"/>
+              </a:rPr>
+              <a:t>otherwise → team</a:t>
+            </a:r>
+          </a:p>
+        </p:txBody>
+      </p:sp>
+      <p:sp>
+        <p:nvSpPr>
+          <p:cNvPr id="10" name="TextBox 9"/>
+          <p:cNvSpPr txBox="1"/>
+          <p:nvPr/>
+        </p:nvSpPr>
+        <p:spPr>
+          <a:xfrm>
+            <a:off x="812800" y="3429000"/>
+            <a:ext cx="5715000" cy="317500"/>
+          </a:xfrm>
+          <a:prstGeom prst="rect">
+            <a:avLst/>
+          </a:prstGeom>
+          <a:noFill/>
+        </p:spPr>
+        <p:txBody>
+          <a:bodyPr wrap="square" lIns="0" rIns="0" tIns="0" bIns="0" anchor="t">
+            <a:spAutoFit/>
+          </a:bodyPr>
+          <a:lstStyle/>
+          <a:p>
+            <a:pPr algn="l">
+              <a:lnSpc>
+                <a:spcPct val="115000"/>
+              </a:lnSpc>
+              <a:spcAft>
+                <a:spcPts val="0"/>
+              </a:spcAft>
+            </a:pPr>
+            <a:r>
+              <a:rPr sz="2200" b="1">
                 <a:solidFill>
                   <a:srgbClr val="14213D"/>
                 </a:solidFill>
                 <a:latin typeface="Arial"/>
               </a:rPr>
-              <a:t>64.9%</a:t>
-            </a:r>
-          </a:p>
-          <a:p>
-            <a:pPr algn="ctr">
-              <a:lnSpc>
-                <a:spcPct val="115000"/>
-              </a:lnSpc>
-              <a:spcAft>
-                <a:spcPts val="0"/>
-              </a:spcAft>
-            </a:pPr>
-            <a:r>
-              <a:rPr sz="1300" b="0">
-                <a:solidFill>
-                  <a:srgbClr val="6B7280"/>
-                </a:solidFill>
-                <a:latin typeface="Arial"/>
-              </a:rPr>
-              <a:t>team accuracy</a:t>
-            </a:r>
-          </a:p>
-        </p:txBody>
-      </p:sp>
-      <p:sp>
-        <p:nvSpPr>
-          <p:cNvPr id="13" name="Rounded Rectangle 12"/>
+              <a:t>Option B: two rungs</a:t>
+            </a:r>
+          </a:p>
+        </p:txBody>
+      </p:sp>
+      <p:sp>
+        <p:nvSpPr>
+          <p:cNvPr id="11" name="Rounded Rectangle 10"/>
           <p:cNvSpPr/>
           <p:nvPr/>
         </p:nvSpPr>
         <p:spPr>
           <a:xfrm>
-            <a:off x="9144000" y="2508250"/>
-            <a:ext cx="1905000" cy="762000"/>
+            <a:off x="812800" y="3810000"/>
+            <a:ext cx="2667000" cy="952500"/>
           </a:xfrm>
           <a:prstGeom prst="roundRect">
             <a:avLst>
@@ -7792,9 +7667,9 @@
           <a:solidFill>
             <a:srgbClr val="E2EAF5"/>
           </a:solidFill>
-          <a:ln w="12700">
+          <a:ln w="25400">
             <a:solidFill>
-              <a:srgbClr val="DDD8CC"/>
+              <a:srgbClr val="2E5C99"/>
             </a:solidFill>
           </a:ln>
           <a:effectLst/>
@@ -7814,7 +7689,7 @@
           </a:fontRef>
         </p:style>
         <p:txBody>
-          <a:bodyPr rtlCol="0" anchor="ctr" wrap="square" lIns="50800" rIns="50800" tIns="50800" bIns="50800"/>
+          <a:bodyPr rtlCol="0" anchor="ctr" wrap="square" lIns="88900" rIns="88900" tIns="88900" bIns="88900"/>
           <a:lstStyle/>
           <a:p>
             <a:pPr algn="ctr">
@@ -7826,101 +7701,36 @@
               </a:spcAft>
             </a:pPr>
             <a:r>
-              <a:rPr sz="2400" b="1">
+              <a:rPr sz="2100" b="1">
                 <a:solidFill>
                   <a:srgbClr val="14213D"/>
                 </a:solidFill>
                 <a:latin typeface="Arial"/>
               </a:rPr>
-              <a:t>28.0%</a:t>
-            </a:r>
-          </a:p>
-          <a:p>
-            <a:pPr algn="ctr">
-              <a:lnSpc>
-                <a:spcPct val="115000"/>
-              </a:lnSpc>
-              <a:spcAft>
-                <a:spcPts val="0"/>
-              </a:spcAft>
-            </a:pPr>
-            <a:r>
-              <a:rPr sz="1300" b="0">
-                <a:solidFill>
-                  <a:srgbClr val="6B7280"/>
-                </a:solidFill>
-                <a:latin typeface="Arial"/>
-              </a:rPr>
-              <a:t>team accuracy</a:t>
-            </a:r>
-          </a:p>
-        </p:txBody>
-      </p:sp>
-      <p:sp>
-        <p:nvSpPr>
-          <p:cNvPr id="14" name="TextBox 13"/>
-          <p:cNvSpPr txBox="1"/>
-          <p:nvPr/>
-        </p:nvSpPr>
-        <p:spPr>
-          <a:xfrm>
-            <a:off x="812800" y="3460750"/>
-            <a:ext cx="2032000" cy="762000"/>
-          </a:xfrm>
-          <a:prstGeom prst="rect">
+              <a:t>Direct answer + single agent</a:t>
+            </a:r>
+          </a:p>
+        </p:txBody>
+      </p:sp>
+      <p:sp>
+        <p:nvSpPr>
+          <p:cNvPr id="12" name="Right Arrow 11"/>
+          <p:cNvSpPr/>
+          <p:nvPr/>
+        </p:nvSpPr>
+        <p:spPr>
+          <a:xfrm>
+            <a:off x="3556000" y="4127500"/>
+            <a:ext cx="444500" cy="317500"/>
+          </a:xfrm>
+          <a:prstGeom prst="rightArrow">
             <a:avLst/>
           </a:prstGeom>
-          <a:noFill/>
-        </p:spPr>
-        <p:txBody>
-          <a:bodyPr wrap="square" lIns="0" rIns="0" tIns="0" bIns="0" anchor="ctr">
-            <a:spAutoFit/>
-          </a:bodyPr>
-          <a:lstStyle/>
-          <a:p>
-            <a:pPr algn="l">
-              <a:lnSpc>
-                <a:spcPct val="115000"/>
-              </a:lnSpc>
-              <a:spcAft>
-                <a:spcPts val="0"/>
-              </a:spcAft>
-            </a:pPr>
-            <a:r>
-              <a:rPr sz="2200" b="1">
-                <a:solidFill>
-                  <a:srgbClr val="14213D"/>
-                </a:solidFill>
-                <a:latin typeface="Arial"/>
-              </a:rPr>
-              <a:t>gpt-oss-120b</a:t>
-            </a:r>
-          </a:p>
-        </p:txBody>
-      </p:sp>
-      <p:sp>
-        <p:nvSpPr>
-          <p:cNvPr id="15" name="Rounded Rectangle 14"/>
-          <p:cNvSpPr/>
-          <p:nvPr/>
-        </p:nvSpPr>
-        <p:spPr>
-          <a:xfrm>
-            <a:off x="3048000" y="3460750"/>
-            <a:ext cx="1905000" cy="762000"/>
-          </a:xfrm>
-          <a:prstGeom prst="roundRect">
-            <a:avLst>
-              <a:gd name="adj" fmla="val 10000"/>
-            </a:avLst>
-          </a:prstGeom>
           <a:solidFill>
-            <a:srgbClr val="E2EAF5"/>
+            <a:srgbClr val="6B7280"/>
           </a:solidFill>
-          <a:ln w="12700">
-            <a:solidFill>
-              <a:srgbClr val="DDD8CC"/>
-            </a:solidFill>
+          <a:ln>
+            <a:noFill/>
           </a:ln>
           <a:effectLst/>
         </p:spPr>
@@ -7939,58 +7749,23 @@
           </a:fontRef>
         </p:style>
         <p:txBody>
-          <a:bodyPr rtlCol="0" anchor="ctr" wrap="square" lIns="50800" rIns="50800" tIns="50800" bIns="50800"/>
-          <a:lstStyle/>
-          <a:p>
-            <a:pPr algn="ctr">
-              <a:lnSpc>
-                <a:spcPct val="115000"/>
-              </a:lnSpc>
-              <a:spcAft>
-                <a:spcPts val="0"/>
-              </a:spcAft>
-            </a:pPr>
-            <a:r>
-              <a:rPr sz="2400" b="1">
-                <a:solidFill>
-                  <a:srgbClr val="14213D"/>
-                </a:solidFill>
-                <a:latin typeface="Arial"/>
-              </a:rPr>
-              <a:t>97.0%</a:t>
-            </a:r>
-          </a:p>
-          <a:p>
-            <a:pPr algn="ctr">
-              <a:lnSpc>
-                <a:spcPct val="115000"/>
-              </a:lnSpc>
-              <a:spcAft>
-                <a:spcPts val="0"/>
-              </a:spcAft>
-            </a:pPr>
-            <a:r>
-              <a:rPr sz="1300" b="0">
-                <a:solidFill>
-                  <a:srgbClr val="6B7280"/>
-                </a:solidFill>
-                <a:latin typeface="Arial"/>
-              </a:rPr>
-              <a:t>team accuracy</a:t>
-            </a:r>
-          </a:p>
-        </p:txBody>
-      </p:sp>
-      <p:sp>
-        <p:nvSpPr>
-          <p:cNvPr id="16" name="Rounded Rectangle 15"/>
+          <a:bodyPr rtlCol="0" anchor="ctr"/>
+          <a:lstStyle/>
+          <a:p>
+            <a:pPr algn="ctr"/>
+          </a:p>
+        </p:txBody>
+      </p:sp>
+      <p:sp>
+        <p:nvSpPr>
+          <p:cNvPr id="13" name="Rounded Rectangle 12"/>
           <p:cNvSpPr/>
           <p:nvPr/>
         </p:nvSpPr>
         <p:spPr>
           <a:xfrm>
-            <a:off x="5080000" y="3460750"/>
-            <a:ext cx="1905000" cy="762000"/>
+            <a:off x="4095750" y="3810000"/>
+            <a:ext cx="2667000" cy="952500"/>
           </a:xfrm>
           <a:prstGeom prst="roundRect">
             <a:avLst>
@@ -7998,11 +7773,11 @@
             </a:avLst>
           </a:prstGeom>
           <a:solidFill>
-            <a:srgbClr val="E2EAF5"/>
+            <a:srgbClr val="E3ECE2"/>
           </a:solidFill>
-          <a:ln w="12700">
+          <a:ln w="25400">
             <a:solidFill>
-              <a:srgbClr val="DDD8CC"/>
+              <a:srgbClr val="2F6B34"/>
             </a:solidFill>
           </a:ln>
           <a:effectLst/>
@@ -8022,7 +7797,7 @@
           </a:fontRef>
         </p:style>
         <p:txBody>
-          <a:bodyPr rtlCol="0" anchor="ctr" wrap="square" lIns="50800" rIns="50800" tIns="50800" bIns="50800"/>
+          <a:bodyPr rtlCol="0" anchor="ctr" wrap="square" lIns="88900" rIns="88900" tIns="88900" bIns="88900"/>
           <a:lstStyle/>
           <a:p>
             <a:pPr algn="ctr">
@@ -8034,590 +7809,73 @@
               </a:spcAft>
             </a:pPr>
             <a:r>
-              <a:rPr sz="2400" b="1">
-                <a:solidFill>
-                  <a:srgbClr val="14213D"/>
-                </a:solidFill>
-                <a:latin typeface="Arial"/>
-              </a:rPr>
-              <a:t>79.8%</a:t>
-            </a:r>
-          </a:p>
-          <a:p>
-            <a:pPr algn="ctr">
-              <a:lnSpc>
-                <a:spcPct val="115000"/>
-              </a:lnSpc>
-              <a:spcAft>
-                <a:spcPts val="0"/>
-              </a:spcAft>
-            </a:pPr>
-            <a:r>
-              <a:rPr sz="1300" b="0">
-                <a:solidFill>
-                  <a:srgbClr val="6B7280"/>
-                </a:solidFill>
-                <a:latin typeface="Arial"/>
-              </a:rPr>
-              <a:t>team accuracy</a:t>
-            </a:r>
-          </a:p>
-        </p:txBody>
-      </p:sp>
-      <p:sp>
-        <p:nvSpPr>
-          <p:cNvPr id="17" name="Rounded Rectangle 16"/>
+              <a:rPr sz="2100" b="1">
+                <a:solidFill>
+                  <a:srgbClr val="2F6B34"/>
+                </a:solidFill>
+                <a:latin typeface="Arial"/>
+              </a:rPr>
+              <a:t>agree and confident? stop</a:t>
+            </a:r>
+          </a:p>
+        </p:txBody>
+      </p:sp>
+      <p:sp>
+        <p:nvSpPr>
+          <p:cNvPr id="14" name="TextBox 13"/>
+          <p:cNvSpPr txBox="1"/>
+          <p:nvPr/>
+        </p:nvSpPr>
+        <p:spPr>
+          <a:xfrm>
+            <a:off x="6889750" y="4095750"/>
+            <a:ext cx="1587500" cy="381000"/>
+          </a:xfrm>
+          <a:prstGeom prst="rect">
+            <a:avLst/>
+          </a:prstGeom>
+          <a:noFill/>
+        </p:spPr>
+        <p:txBody>
+          <a:bodyPr wrap="square" lIns="0" rIns="0" tIns="0" bIns="0" anchor="t">
+            <a:spAutoFit/>
+          </a:bodyPr>
+          <a:lstStyle/>
+          <a:p>
+            <a:pPr algn="l">
+              <a:lnSpc>
+                <a:spcPct val="115000"/>
+              </a:lnSpc>
+              <a:spcAft>
+                <a:spcPts val="0"/>
+              </a:spcAft>
+            </a:pPr>
+            <a:r>
+              <a:rPr sz="1900" b="1">
+                <a:solidFill>
+                  <a:srgbClr val="B4541A"/>
+                </a:solidFill>
+                <a:latin typeface="Arial"/>
+              </a:rPr>
+              <a:t>otherwise → team</a:t>
+            </a:r>
+          </a:p>
+        </p:txBody>
+      </p:sp>
+      <p:sp>
+        <p:nvSpPr>
+          <p:cNvPr id="15" name="Rounded Rectangle 14"/>
           <p:cNvSpPr/>
           <p:nvPr/>
         </p:nvSpPr>
         <p:spPr>
           <a:xfrm>
-            <a:off x="7112000" y="3460750"/>
-            <a:ext cx="1905000" cy="762000"/>
+            <a:off x="8763000" y="1905000"/>
+            <a:ext cx="2616200" cy="3175000"/>
           </a:xfrm>
           <a:prstGeom prst="roundRect">
             <a:avLst>
-              <a:gd name="adj" fmla="val 10000"/>
-            </a:avLst>
-          </a:prstGeom>
-          <a:solidFill>
-            <a:srgbClr val="E2EAF5"/>
-          </a:solidFill>
-          <a:ln w="12700">
-            <a:solidFill>
-              <a:srgbClr val="DDD8CC"/>
-            </a:solidFill>
-          </a:ln>
-          <a:effectLst/>
-        </p:spPr>
-        <p:style>
-          <a:lnRef idx="1">
-            <a:schemeClr val="accent1"/>
-          </a:lnRef>
-          <a:fillRef idx="3">
-            <a:schemeClr val="accent1"/>
-          </a:fillRef>
-          <a:effectRef idx="2">
-            <a:schemeClr val="accent1"/>
-          </a:effectRef>
-          <a:fontRef idx="minor">
-            <a:schemeClr val="lt1"/>
-          </a:fontRef>
-        </p:style>
-        <p:txBody>
-          <a:bodyPr rtlCol="0" anchor="ctr" wrap="square" lIns="50800" rIns="50800" tIns="50800" bIns="50800"/>
-          <a:lstStyle/>
-          <a:p>
-            <a:pPr algn="ctr">
-              <a:lnSpc>
-                <a:spcPct val="115000"/>
-              </a:lnSpc>
-              <a:spcAft>
-                <a:spcPts val="0"/>
-              </a:spcAft>
-            </a:pPr>
-            <a:r>
-              <a:rPr sz="2400" b="1">
-                <a:solidFill>
-                  <a:srgbClr val="14213D"/>
-                </a:solidFill>
-                <a:latin typeface="Arial"/>
-              </a:rPr>
-              <a:t>71.1%</a:t>
-            </a:r>
-          </a:p>
-          <a:p>
-            <a:pPr algn="ctr">
-              <a:lnSpc>
-                <a:spcPct val="115000"/>
-              </a:lnSpc>
-              <a:spcAft>
-                <a:spcPts val="0"/>
-              </a:spcAft>
-            </a:pPr>
-            <a:r>
-              <a:rPr sz="1300" b="0">
-                <a:solidFill>
-                  <a:srgbClr val="6B7280"/>
-                </a:solidFill>
-                <a:latin typeface="Arial"/>
-              </a:rPr>
-              <a:t>team accuracy</a:t>
-            </a:r>
-          </a:p>
-        </p:txBody>
-      </p:sp>
-      <p:sp>
-        <p:nvSpPr>
-          <p:cNvPr id="18" name="Rounded Rectangle 17"/>
-          <p:cNvSpPr/>
-          <p:nvPr/>
-        </p:nvSpPr>
-        <p:spPr>
-          <a:xfrm>
-            <a:off x="9144000" y="3460750"/>
-            <a:ext cx="1905000" cy="762000"/>
-          </a:xfrm>
-          <a:prstGeom prst="roundRect">
-            <a:avLst>
-              <a:gd name="adj" fmla="val 10000"/>
-            </a:avLst>
-          </a:prstGeom>
-          <a:solidFill>
-            <a:srgbClr val="E2EAF5"/>
-          </a:solidFill>
-          <a:ln w="12700">
-            <a:solidFill>
-              <a:srgbClr val="DDD8CC"/>
-            </a:solidFill>
-          </a:ln>
-          <a:effectLst/>
-        </p:spPr>
-        <p:style>
-          <a:lnRef idx="1">
-            <a:schemeClr val="accent1"/>
-          </a:lnRef>
-          <a:fillRef idx="3">
-            <a:schemeClr val="accent1"/>
-          </a:fillRef>
-          <a:effectRef idx="2">
-            <a:schemeClr val="accent1"/>
-          </a:effectRef>
-          <a:fontRef idx="minor">
-            <a:schemeClr val="lt1"/>
-          </a:fontRef>
-        </p:style>
-        <p:txBody>
-          <a:bodyPr rtlCol="0" anchor="ctr" wrap="square" lIns="50800" rIns="50800" tIns="50800" bIns="50800"/>
-          <a:lstStyle/>
-          <a:p>
-            <a:pPr algn="ctr">
-              <a:lnSpc>
-                <a:spcPct val="115000"/>
-              </a:lnSpc>
-              <a:spcAft>
-                <a:spcPts val="0"/>
-              </a:spcAft>
-            </a:pPr>
-            <a:r>
-              <a:rPr sz="2400" b="1">
-                <a:solidFill>
-                  <a:srgbClr val="14213D"/>
-                </a:solidFill>
-                <a:latin typeface="Arial"/>
-              </a:rPr>
-              <a:t>45.1%</a:t>
-            </a:r>
-          </a:p>
-          <a:p>
-            <a:pPr algn="ctr">
-              <a:lnSpc>
-                <a:spcPct val="115000"/>
-              </a:lnSpc>
-              <a:spcAft>
-                <a:spcPts val="0"/>
-              </a:spcAft>
-            </a:pPr>
-            <a:r>
-              <a:rPr sz="1300" b="0">
-                <a:solidFill>
-                  <a:srgbClr val="6B7280"/>
-                </a:solidFill>
-                <a:latin typeface="Arial"/>
-              </a:rPr>
-              <a:t>team accuracy</a:t>
-            </a:r>
-          </a:p>
-        </p:txBody>
-      </p:sp>
-      <p:sp>
-        <p:nvSpPr>
-          <p:cNvPr id="19" name="TextBox 18"/>
-          <p:cNvSpPr txBox="1"/>
-          <p:nvPr/>
-        </p:nvSpPr>
-        <p:spPr>
-          <a:xfrm>
-            <a:off x="812800" y="4413250"/>
-            <a:ext cx="2032000" cy="762000"/>
-          </a:xfrm>
-          <a:prstGeom prst="rect">
-            <a:avLst/>
-          </a:prstGeom>
-          <a:noFill/>
-        </p:spPr>
-        <p:txBody>
-          <a:bodyPr wrap="square" lIns="0" rIns="0" tIns="0" bIns="0" anchor="ctr">
-            <a:spAutoFit/>
-          </a:bodyPr>
-          <a:lstStyle/>
-          <a:p>
-            <a:pPr algn="l">
-              <a:lnSpc>
-                <a:spcPct val="115000"/>
-              </a:lnSpc>
-              <a:spcAft>
-                <a:spcPts val="0"/>
-              </a:spcAft>
-            </a:pPr>
-            <a:r>
-              <a:rPr sz="2200" b="1">
-                <a:solidFill>
-                  <a:srgbClr val="14213D"/>
-                </a:solidFill>
-                <a:latin typeface="Arial"/>
-              </a:rPr>
-              <a:t>Gemma-4-26B</a:t>
-            </a:r>
-          </a:p>
-        </p:txBody>
-      </p:sp>
-      <p:sp>
-        <p:nvSpPr>
-          <p:cNvPr id="20" name="Rounded Rectangle 19"/>
-          <p:cNvSpPr/>
-          <p:nvPr/>
-        </p:nvSpPr>
-        <p:spPr>
-          <a:xfrm>
-            <a:off x="3048000" y="4413250"/>
-            <a:ext cx="1905000" cy="762000"/>
-          </a:xfrm>
-          <a:prstGeom prst="roundRect">
-            <a:avLst>
-              <a:gd name="adj" fmla="val 10000"/>
-            </a:avLst>
-          </a:prstGeom>
-          <a:solidFill>
-            <a:srgbClr val="F8E8DC"/>
-          </a:solidFill>
-          <a:ln w="12700">
-            <a:solidFill>
-              <a:srgbClr val="DDD8CC"/>
-            </a:solidFill>
-          </a:ln>
-          <a:effectLst/>
-        </p:spPr>
-        <p:style>
-          <a:lnRef idx="1">
-            <a:schemeClr val="accent1"/>
-          </a:lnRef>
-          <a:fillRef idx="3">
-            <a:schemeClr val="accent1"/>
-          </a:fillRef>
-          <a:effectRef idx="2">
-            <a:schemeClr val="accent1"/>
-          </a:effectRef>
-          <a:fontRef idx="minor">
-            <a:schemeClr val="lt1"/>
-          </a:fontRef>
-        </p:style>
-        <p:txBody>
-          <a:bodyPr rtlCol="0" anchor="ctr" wrap="square" lIns="50800" rIns="50800" tIns="50800" bIns="50800"/>
-          <a:lstStyle/>
-          <a:p>
-            <a:pPr algn="ctr">
-              <a:lnSpc>
-                <a:spcPct val="115000"/>
-              </a:lnSpc>
-              <a:spcAft>
-                <a:spcPts val="0"/>
-              </a:spcAft>
-            </a:pPr>
-            <a:r>
-              <a:rPr sz="2400" b="1">
-                <a:solidFill>
-                  <a:srgbClr val="14213D"/>
-                </a:solidFill>
-                <a:latin typeface="Arial"/>
-              </a:rPr>
-              <a:t>99.8%</a:t>
-            </a:r>
-          </a:p>
-          <a:p>
-            <a:pPr algn="ctr">
-              <a:lnSpc>
-                <a:spcPct val="115000"/>
-              </a:lnSpc>
-              <a:spcAft>
-                <a:spcPts val="0"/>
-              </a:spcAft>
-            </a:pPr>
-            <a:r>
-              <a:rPr sz="1300" b="0">
-                <a:solidFill>
-                  <a:srgbClr val="6B7280"/>
-                </a:solidFill>
-                <a:latin typeface="Arial"/>
-              </a:rPr>
-              <a:t>team accuracy</a:t>
-            </a:r>
-          </a:p>
-        </p:txBody>
-      </p:sp>
-      <p:sp>
-        <p:nvSpPr>
-          <p:cNvPr id="21" name="Rounded Rectangle 20"/>
-          <p:cNvSpPr/>
-          <p:nvPr/>
-        </p:nvSpPr>
-        <p:spPr>
-          <a:xfrm>
-            <a:off x="5080000" y="4413250"/>
-            <a:ext cx="1905000" cy="762000"/>
-          </a:xfrm>
-          <a:prstGeom prst="roundRect">
-            <a:avLst>
-              <a:gd name="adj" fmla="val 10000"/>
-            </a:avLst>
-          </a:prstGeom>
-          <a:solidFill>
-            <a:srgbClr val="F8E8DC"/>
-          </a:solidFill>
-          <a:ln w="12700">
-            <a:solidFill>
-              <a:srgbClr val="DDD8CC"/>
-            </a:solidFill>
-          </a:ln>
-          <a:effectLst/>
-        </p:spPr>
-        <p:style>
-          <a:lnRef idx="1">
-            <a:schemeClr val="accent1"/>
-          </a:lnRef>
-          <a:fillRef idx="3">
-            <a:schemeClr val="accent1"/>
-          </a:fillRef>
-          <a:effectRef idx="2">
-            <a:schemeClr val="accent1"/>
-          </a:effectRef>
-          <a:fontRef idx="minor">
-            <a:schemeClr val="lt1"/>
-          </a:fontRef>
-        </p:style>
-        <p:txBody>
-          <a:bodyPr rtlCol="0" anchor="ctr" wrap="square" lIns="50800" rIns="50800" tIns="50800" bIns="50800"/>
-          <a:lstStyle/>
-          <a:p>
-            <a:pPr algn="ctr">
-              <a:lnSpc>
-                <a:spcPct val="115000"/>
-              </a:lnSpc>
-              <a:spcAft>
-                <a:spcPts val="0"/>
-              </a:spcAft>
-            </a:pPr>
-            <a:r>
-              <a:rPr sz="2400" b="1">
-                <a:solidFill>
-                  <a:srgbClr val="14213D"/>
-                </a:solidFill>
-                <a:latin typeface="Arial"/>
-              </a:rPr>
-              <a:t>67.9%</a:t>
-            </a:r>
-          </a:p>
-          <a:p>
-            <a:pPr algn="ctr">
-              <a:lnSpc>
-                <a:spcPct val="115000"/>
-              </a:lnSpc>
-              <a:spcAft>
-                <a:spcPts val="0"/>
-              </a:spcAft>
-            </a:pPr>
-            <a:r>
-              <a:rPr sz="1300" b="0">
-                <a:solidFill>
-                  <a:srgbClr val="6B7280"/>
-                </a:solidFill>
-                <a:latin typeface="Arial"/>
-              </a:rPr>
-              <a:t>team accuracy</a:t>
-            </a:r>
-          </a:p>
-        </p:txBody>
-      </p:sp>
-      <p:sp>
-        <p:nvSpPr>
-          <p:cNvPr id="22" name="Rounded Rectangle 21"/>
-          <p:cNvSpPr/>
-          <p:nvPr/>
-        </p:nvSpPr>
-        <p:spPr>
-          <a:xfrm>
-            <a:off x="7112000" y="4413250"/>
-            <a:ext cx="1905000" cy="762000"/>
-          </a:xfrm>
-          <a:prstGeom prst="roundRect">
-            <a:avLst>
-              <a:gd name="adj" fmla="val 10000"/>
-            </a:avLst>
-          </a:prstGeom>
-          <a:solidFill>
-            <a:srgbClr val="F8E8DC"/>
-          </a:solidFill>
-          <a:ln w="12700">
-            <a:solidFill>
-              <a:srgbClr val="DDD8CC"/>
-            </a:solidFill>
-          </a:ln>
-          <a:effectLst/>
-        </p:spPr>
-        <p:style>
-          <a:lnRef idx="1">
-            <a:schemeClr val="accent1"/>
-          </a:lnRef>
-          <a:fillRef idx="3">
-            <a:schemeClr val="accent1"/>
-          </a:fillRef>
-          <a:effectRef idx="2">
-            <a:schemeClr val="accent1"/>
-          </a:effectRef>
-          <a:fontRef idx="minor">
-            <a:schemeClr val="lt1"/>
-          </a:fontRef>
-        </p:style>
-        <p:txBody>
-          <a:bodyPr rtlCol="0" anchor="ctr" wrap="square" lIns="50800" rIns="50800" tIns="50800" bIns="50800"/>
-          <a:lstStyle/>
-          <a:p>
-            <a:pPr algn="ctr">
-              <a:lnSpc>
-                <a:spcPct val="115000"/>
-              </a:lnSpc>
-              <a:spcAft>
-                <a:spcPts val="0"/>
-              </a:spcAft>
-            </a:pPr>
-            <a:r>
-              <a:rPr sz="2400" b="1">
-                <a:solidFill>
-                  <a:srgbClr val="14213D"/>
-                </a:solidFill>
-                <a:latin typeface="Arial"/>
-              </a:rPr>
-              <a:t>65.3%</a:t>
-            </a:r>
-          </a:p>
-          <a:p>
-            <a:pPr algn="ctr">
-              <a:lnSpc>
-                <a:spcPct val="115000"/>
-              </a:lnSpc>
-              <a:spcAft>
-                <a:spcPts val="0"/>
-              </a:spcAft>
-            </a:pPr>
-            <a:r>
-              <a:rPr sz="1300" b="0">
-                <a:solidFill>
-                  <a:srgbClr val="6B7280"/>
-                </a:solidFill>
-                <a:latin typeface="Arial"/>
-              </a:rPr>
-              <a:t>team accuracy</a:t>
-            </a:r>
-          </a:p>
-        </p:txBody>
-      </p:sp>
-      <p:sp>
-        <p:nvSpPr>
-          <p:cNvPr id="23" name="Rounded Rectangle 22"/>
-          <p:cNvSpPr/>
-          <p:nvPr/>
-        </p:nvSpPr>
-        <p:spPr>
-          <a:xfrm>
-            <a:off x="9144000" y="4413250"/>
-            <a:ext cx="1905000" cy="762000"/>
-          </a:xfrm>
-          <a:prstGeom prst="roundRect">
-            <a:avLst>
-              <a:gd name="adj" fmla="val 10000"/>
-            </a:avLst>
-          </a:prstGeom>
-          <a:solidFill>
-            <a:srgbClr val="F8E8DC"/>
-          </a:solidFill>
-          <a:ln w="12700">
-            <a:solidFill>
-              <a:srgbClr val="DDD8CC"/>
-            </a:solidFill>
-          </a:ln>
-          <a:effectLst/>
-        </p:spPr>
-        <p:style>
-          <a:lnRef idx="1">
-            <a:schemeClr val="accent1"/>
-          </a:lnRef>
-          <a:fillRef idx="3">
-            <a:schemeClr val="accent1"/>
-          </a:fillRef>
-          <a:effectRef idx="2">
-            <a:schemeClr val="accent1"/>
-          </a:effectRef>
-          <a:fontRef idx="minor">
-            <a:schemeClr val="lt1"/>
-          </a:fontRef>
-        </p:style>
-        <p:txBody>
-          <a:bodyPr rtlCol="0" anchor="ctr" wrap="square" lIns="50800" rIns="50800" tIns="50800" bIns="50800"/>
-          <a:lstStyle/>
-          <a:p>
-            <a:pPr algn="ctr">
-              <a:lnSpc>
-                <a:spcPct val="115000"/>
-              </a:lnSpc>
-              <a:spcAft>
-                <a:spcPts val="0"/>
-              </a:spcAft>
-            </a:pPr>
-            <a:r>
-              <a:rPr sz="2400" b="1">
-                <a:solidFill>
-                  <a:srgbClr val="14213D"/>
-                </a:solidFill>
-                <a:latin typeface="Arial"/>
-              </a:rPr>
-              <a:t>36.4%</a:t>
-            </a:r>
-          </a:p>
-          <a:p>
-            <a:pPr algn="ctr">
-              <a:lnSpc>
-                <a:spcPct val="115000"/>
-              </a:lnSpc>
-              <a:spcAft>
-                <a:spcPts val="0"/>
-              </a:spcAft>
-            </a:pPr>
-            <a:r>
-              <a:rPr sz="1300" b="0">
-                <a:solidFill>
-                  <a:srgbClr val="6B7280"/>
-                </a:solidFill>
-                <a:latin typeface="Arial"/>
-              </a:rPr>
-              <a:t>team accuracy</a:t>
-            </a:r>
-          </a:p>
-        </p:txBody>
-      </p:sp>
-      <p:sp>
-        <p:nvSpPr>
-          <p:cNvPr id="24" name="Rounded Rectangle 23"/>
-          <p:cNvSpPr/>
-          <p:nvPr/>
-        </p:nvSpPr>
-        <p:spPr>
-          <a:xfrm>
-            <a:off x="812800" y="5524500"/>
-            <a:ext cx="10566400" cy="635000"/>
-          </a:xfrm>
-          <a:prstGeom prst="roundRect">
-            <a:avLst>
-              <a:gd name="adj" fmla="val 10000"/>
+              <a:gd name="adj" fmla="val 4368"/>
             </a:avLst>
           </a:prstGeom>
           <a:solidFill>
@@ -8643,15 +7901,34 @@
           </a:fontRef>
         </p:style>
         <p:txBody>
-          <a:bodyPr rtlCol="0" anchor="ctr" wrap="square" lIns="203200" rIns="203200" tIns="203200" bIns="203200"/>
-          <a:lstStyle/>
-          <a:p>
-            <a:pPr algn="ctr">
-              <a:lnSpc>
-                <a:spcPct val="115000"/>
-              </a:lnSpc>
-              <a:spcAft>
-                <a:spcPts val="0"/>
+          <a:bodyPr rtlCol="0" anchor="ctr" wrap="square" lIns="177800" rIns="177800" tIns="177800" bIns="177800"/>
+          <a:lstStyle/>
+          <a:p>
+            <a:pPr algn="l">
+              <a:lnSpc>
+                <a:spcPct val="115000"/>
+              </a:lnSpc>
+              <a:spcAft>
+                <a:spcPts val="1200"/>
+              </a:spcAft>
+            </a:pPr>
+            <a:r>
+              <a:rPr sz="2400" b="1">
+                <a:solidFill>
+                  <a:srgbClr val="F0A66B"/>
+                </a:solidFill>
+                <a:latin typeface="Arial"/>
+              </a:rPr>
+              <a:t>Check both</a:t>
+            </a:r>
+          </a:p>
+          <a:p>
+            <a:pPr algn="l">
+              <a:lnSpc>
+                <a:spcPct val="115000"/>
+              </a:lnSpc>
+              <a:spcAft>
+                <a:spcPts val="1200"/>
               </a:spcAft>
             </a:pPr>
             <a:r>
@@ -8661,25 +7938,26 @@
                 </a:solidFill>
                 <a:latin typeface="Arial"/>
               </a:rPr>
-              <a:t>Record every task once, then replay </a:t>
-            </a:r>
-            <a:r>
-              <a:rPr sz="1800" b="1">
-                <a:solidFill>
-                  <a:srgbClr val="F0A66B"/>
-                </a:solidFill>
-                <a:latin typeface="Arial"/>
-              </a:rPr>
-              <a:t>200 random splits</a:t>
-            </a:r>
+              <a:t>on calibration data, then deploy the cheaper one that passes.</a:t>
+            </a:r>
+          </a:p>
+          <a:p>
+            <a:pPr algn="l">
+              <a:lnSpc>
+                <a:spcPct val="115000"/>
+              </a:lnSpc>
+              <a:spcAft>
+                <a:spcPts val="0"/>
+              </a:spcAft>
+            </a:pPr>
             <a:r>
               <a:rPr sz="1800" b="0">
                 <a:solidFill>
-                  <a:srgbClr val="F7F6F2"/>
-                </a:solidFill>
-                <a:latin typeface="Arial"/>
-              </a:rPr>
-              <a:t>: half to calibrate CLIMB, half to test it.</a:t>
+                  <a:srgbClr val="C9D1E0"/>
+                </a:solidFill>
+                <a:latin typeface="Arial"/>
+              </a:rPr>
+              <a:t>Neither passes? Always call the team.</a:t>
             </a:r>
           </a:p>
         </p:txBody>
@@ -8789,7 +8067,7 @@
                 </a:solidFill>
                 <a:latin typeface="Arial"/>
               </a:rPr>
-              <a:t>RESULTS</a:t>
+              <a:t>EXPERIMENTS</a:t>
             </a:r>
           </a:p>
         </p:txBody>
@@ -8831,53 +8109,315 @@
                 </a:solidFill>
                 <a:latin typeface="Georgia"/>
               </a:rPr>
-              <a:t>The promise holds on every setting</a:t>
-            </a:r>
-          </a:p>
-        </p:txBody>
-      </p:sp>
-      <p:pic>
-        <p:nvPicPr>
-          <p:cNvPr id="5" name="Picture 4" descr="c_viol.png"/>
-          <p:cNvPicPr>
-            <a:picLocks noChangeAspect="1"/>
-          </p:cNvPicPr>
-          <p:nvPr/>
-        </p:nvPicPr>
-        <p:blipFill>
-          <a:blip r:embed="rId3"/>
-          <a:stretch>
-            <a:fillRect/>
-          </a:stretch>
-        </p:blipFill>
-        <p:spPr>
-          <a:xfrm>
-            <a:off x="812800" y="1999442"/>
-            <a:ext cx="7302500" cy="3748115"/>
+              <a:t>3 models × 4 benchmarks = 12 settings</a:t>
+            </a:r>
+          </a:p>
+        </p:txBody>
+      </p:sp>
+      <p:sp>
+        <p:nvSpPr>
+          <p:cNvPr id="5" name="TextBox 4"/>
+          <p:cNvSpPr txBox="1"/>
+          <p:nvPr/>
+        </p:nvSpPr>
+        <p:spPr>
+          <a:xfrm>
+            <a:off x="3048000" y="1841500"/>
+            <a:ext cx="1905000" cy="508000"/>
           </a:xfrm>
           <a:prstGeom prst="rect">
             <a:avLst/>
           </a:prstGeom>
-        </p:spPr>
-      </p:pic>
-      <p:sp>
-        <p:nvSpPr>
-          <p:cNvPr id="6" name="Rounded Rectangle 5"/>
+          <a:noFill/>
+        </p:spPr>
+        <p:txBody>
+          <a:bodyPr wrap="square" lIns="0" rIns="0" tIns="0" bIns="0" anchor="t">
+            <a:spAutoFit/>
+          </a:bodyPr>
+          <a:lstStyle/>
+          <a:p>
+            <a:pPr algn="ctr">
+              <a:lnSpc>
+                <a:spcPct val="115000"/>
+              </a:lnSpc>
+              <a:spcAft>
+                <a:spcPts val="0"/>
+              </a:spcAft>
+            </a:pPr>
+            <a:r>
+              <a:rPr sz="2200" b="1">
+                <a:solidFill>
+                  <a:srgbClr val="14213D"/>
+                </a:solidFill>
+                <a:latin typeface="Arial"/>
+              </a:rPr>
+              <a:t>MATH</a:t>
+            </a:r>
+          </a:p>
+          <a:p>
+            <a:pPr algn="ctr">
+              <a:lnSpc>
+                <a:spcPct val="115000"/>
+              </a:lnSpc>
+              <a:spcAft>
+                <a:spcPts val="0"/>
+              </a:spcAft>
+            </a:pPr>
+            <a:r>
+              <a:rPr sz="1600" b="0">
+                <a:solidFill>
+                  <a:srgbClr val="6B7280"/>
+                </a:solidFill>
+                <a:latin typeface="Arial"/>
+              </a:rPr>
+              <a:t>math</a:t>
+            </a:r>
+          </a:p>
+        </p:txBody>
+      </p:sp>
+      <p:sp>
+        <p:nvSpPr>
+          <p:cNvPr id="6" name="TextBox 5"/>
+          <p:cNvSpPr txBox="1"/>
+          <p:nvPr/>
+        </p:nvSpPr>
+        <p:spPr>
+          <a:xfrm>
+            <a:off x="5080000" y="1841500"/>
+            <a:ext cx="1905000" cy="508000"/>
+          </a:xfrm>
+          <a:prstGeom prst="rect">
+            <a:avLst/>
+          </a:prstGeom>
+          <a:noFill/>
+        </p:spPr>
+        <p:txBody>
+          <a:bodyPr wrap="square" lIns="0" rIns="0" tIns="0" bIns="0" anchor="t">
+            <a:spAutoFit/>
+          </a:bodyPr>
+          <a:lstStyle/>
+          <a:p>
+            <a:pPr algn="ctr">
+              <a:lnSpc>
+                <a:spcPct val="115000"/>
+              </a:lnSpc>
+              <a:spcAft>
+                <a:spcPts val="0"/>
+              </a:spcAft>
+            </a:pPr>
+            <a:r>
+              <a:rPr sz="2200" b="1">
+                <a:solidFill>
+                  <a:srgbClr val="14213D"/>
+                </a:solidFill>
+                <a:latin typeface="Arial"/>
+              </a:rPr>
+              <a:t>FRAMES</a:t>
+            </a:r>
+          </a:p>
+          <a:p>
+            <a:pPr algn="ctr">
+              <a:lnSpc>
+                <a:spcPct val="115000"/>
+              </a:lnSpc>
+              <a:spcAft>
+                <a:spcPts val="0"/>
+              </a:spcAft>
+            </a:pPr>
+            <a:r>
+              <a:rPr sz="1600" b="0">
+                <a:solidFill>
+                  <a:srgbClr val="6B7280"/>
+                </a:solidFill>
+                <a:latin typeface="Arial"/>
+              </a:rPr>
+              <a:t>open-book QA</a:t>
+            </a:r>
+          </a:p>
+        </p:txBody>
+      </p:sp>
+      <p:sp>
+        <p:nvSpPr>
+          <p:cNvPr id="7" name="TextBox 6"/>
+          <p:cNvSpPr txBox="1"/>
+          <p:nvPr/>
+        </p:nvSpPr>
+        <p:spPr>
+          <a:xfrm>
+            <a:off x="7112000" y="1841500"/>
+            <a:ext cx="1905000" cy="508000"/>
+          </a:xfrm>
+          <a:prstGeom prst="rect">
+            <a:avLst/>
+          </a:prstGeom>
+          <a:noFill/>
+        </p:spPr>
+        <p:txBody>
+          <a:bodyPr wrap="square" lIns="0" rIns="0" tIns="0" bIns="0" anchor="t">
+            <a:spAutoFit/>
+          </a:bodyPr>
+          <a:lstStyle/>
+          <a:p>
+            <a:pPr algn="ctr">
+              <a:lnSpc>
+                <a:spcPct val="115000"/>
+              </a:lnSpc>
+              <a:spcAft>
+                <a:spcPts val="0"/>
+              </a:spcAft>
+            </a:pPr>
+            <a:r>
+              <a:rPr sz="2200" b="1">
+                <a:solidFill>
+                  <a:srgbClr val="14213D"/>
+                </a:solidFill>
+                <a:latin typeface="Arial"/>
+              </a:rPr>
+              <a:t>MuSiQue</a:t>
+            </a:r>
+          </a:p>
+          <a:p>
+            <a:pPr algn="ctr">
+              <a:lnSpc>
+                <a:spcPct val="115000"/>
+              </a:lnSpc>
+              <a:spcAft>
+                <a:spcPts val="0"/>
+              </a:spcAft>
+            </a:pPr>
+            <a:r>
+              <a:rPr sz="1600" b="0">
+                <a:solidFill>
+                  <a:srgbClr val="6B7280"/>
+                </a:solidFill>
+                <a:latin typeface="Arial"/>
+              </a:rPr>
+              <a:t>open-book QA</a:t>
+            </a:r>
+          </a:p>
+        </p:txBody>
+      </p:sp>
+      <p:sp>
+        <p:nvSpPr>
+          <p:cNvPr id="8" name="TextBox 7"/>
+          <p:cNvSpPr txBox="1"/>
+          <p:nvPr/>
+        </p:nvSpPr>
+        <p:spPr>
+          <a:xfrm>
+            <a:off x="9144000" y="1841500"/>
+            <a:ext cx="1905000" cy="508000"/>
+          </a:xfrm>
+          <a:prstGeom prst="rect">
+            <a:avLst/>
+          </a:prstGeom>
+          <a:noFill/>
+        </p:spPr>
+        <p:txBody>
+          <a:bodyPr wrap="square" lIns="0" rIns="0" tIns="0" bIns="0" anchor="t">
+            <a:spAutoFit/>
+          </a:bodyPr>
+          <a:lstStyle/>
+          <a:p>
+            <a:pPr algn="ctr">
+              <a:lnSpc>
+                <a:spcPct val="115000"/>
+              </a:lnSpc>
+              <a:spcAft>
+                <a:spcPts val="0"/>
+              </a:spcAft>
+            </a:pPr>
+            <a:r>
+              <a:rPr sz="2200" b="1">
+                <a:solidFill>
+                  <a:srgbClr val="14213D"/>
+                </a:solidFill>
+                <a:latin typeface="Arial"/>
+              </a:rPr>
+              <a:t>BBEH</a:t>
+            </a:r>
+          </a:p>
+          <a:p>
+            <a:pPr algn="ctr">
+              <a:lnSpc>
+                <a:spcPct val="115000"/>
+              </a:lnSpc>
+              <a:spcAft>
+                <a:spcPts val="0"/>
+              </a:spcAft>
+            </a:pPr>
+            <a:r>
+              <a:rPr sz="1600" b="0">
+                <a:solidFill>
+                  <a:srgbClr val="6B7280"/>
+                </a:solidFill>
+                <a:latin typeface="Arial"/>
+              </a:rPr>
+              <a:t>hard reasoning</a:t>
+            </a:r>
+          </a:p>
+        </p:txBody>
+      </p:sp>
+      <p:sp>
+        <p:nvSpPr>
+          <p:cNvPr id="9" name="TextBox 8"/>
+          <p:cNvSpPr txBox="1"/>
+          <p:nvPr/>
+        </p:nvSpPr>
+        <p:spPr>
+          <a:xfrm>
+            <a:off x="812800" y="2508250"/>
+            <a:ext cx="2032000" cy="762000"/>
+          </a:xfrm>
+          <a:prstGeom prst="rect">
+            <a:avLst/>
+          </a:prstGeom>
+          <a:noFill/>
+        </p:spPr>
+        <p:txBody>
+          <a:bodyPr wrap="square" lIns="0" rIns="0" tIns="0" bIns="0" anchor="ctr">
+            <a:spAutoFit/>
+          </a:bodyPr>
+          <a:lstStyle/>
+          <a:p>
+            <a:pPr algn="l">
+              <a:lnSpc>
+                <a:spcPct val="115000"/>
+              </a:lnSpc>
+              <a:spcAft>
+                <a:spcPts val="0"/>
+              </a:spcAft>
+            </a:pPr>
+            <a:r>
+              <a:rPr sz="2200" b="1">
+                <a:solidFill>
+                  <a:srgbClr val="14213D"/>
+                </a:solidFill>
+                <a:latin typeface="Arial"/>
+              </a:rPr>
+              <a:t>gpt-oss-20b</a:t>
+            </a:r>
+          </a:p>
+        </p:txBody>
+      </p:sp>
+      <p:sp>
+        <p:nvSpPr>
+          <p:cNvPr id="10" name="Rounded Rectangle 9"/>
           <p:cNvSpPr/>
           <p:nvPr/>
         </p:nvSpPr>
         <p:spPr>
           <a:xfrm>
-            <a:off x="8445500" y="2286000"/>
-            <a:ext cx="2933700" cy="1905000"/>
+            <a:off x="3048000" y="2508250"/>
+            <a:ext cx="1905000" cy="762000"/>
           </a:xfrm>
           <a:prstGeom prst="roundRect">
             <a:avLst>
-              <a:gd name="adj" fmla="val 6000"/>
+              <a:gd name="adj" fmla="val 10000"/>
             </a:avLst>
           </a:prstGeom>
           <a:solidFill>
-            <a:srgbClr val="E3ECE2"/>
+            <a:srgbClr val="E2EAF5"/>
           </a:solidFill>
           <a:ln w="12700">
             <a:solidFill>
@@ -8901,27 +8441,692 @@
           </a:fontRef>
         </p:style>
         <p:txBody>
-          <a:bodyPr rtlCol="0" anchor="ctr" wrap="square" lIns="190500" rIns="190500" tIns="190500" bIns="190500"/>
+          <a:bodyPr rtlCol="0" anchor="ctr" wrap="square" lIns="50800" rIns="50800" tIns="50800" bIns="50800"/>
+          <a:lstStyle/>
+          <a:p>
+            <a:pPr algn="ctr">
+              <a:lnSpc>
+                <a:spcPct val="115000"/>
+              </a:lnSpc>
+              <a:spcAft>
+                <a:spcPts val="0"/>
+              </a:spcAft>
+            </a:pPr>
+            <a:r>
+              <a:rPr sz="2400" b="1">
+                <a:solidFill>
+                  <a:srgbClr val="14213D"/>
+                </a:solidFill>
+                <a:latin typeface="Arial"/>
+              </a:rPr>
+              <a:t>94.8%</a:t>
+            </a:r>
+          </a:p>
+          <a:p>
+            <a:pPr algn="ctr">
+              <a:lnSpc>
+                <a:spcPct val="115000"/>
+              </a:lnSpc>
+              <a:spcAft>
+                <a:spcPts val="0"/>
+              </a:spcAft>
+            </a:pPr>
+            <a:r>
+              <a:rPr sz="1300" b="0">
+                <a:solidFill>
+                  <a:srgbClr val="6B7280"/>
+                </a:solidFill>
+                <a:latin typeface="Arial"/>
+              </a:rPr>
+              <a:t>team accuracy</a:t>
+            </a:r>
+          </a:p>
+        </p:txBody>
+      </p:sp>
+      <p:sp>
+        <p:nvSpPr>
+          <p:cNvPr id="11" name="Rounded Rectangle 10"/>
+          <p:cNvSpPr/>
+          <p:nvPr/>
+        </p:nvSpPr>
+        <p:spPr>
+          <a:xfrm>
+            <a:off x="5080000" y="2508250"/>
+            <a:ext cx="1905000" cy="762000"/>
+          </a:xfrm>
+          <a:prstGeom prst="roundRect">
+            <a:avLst>
+              <a:gd name="adj" fmla="val 10000"/>
+            </a:avLst>
+          </a:prstGeom>
+          <a:solidFill>
+            <a:srgbClr val="E2EAF5"/>
+          </a:solidFill>
+          <a:ln w="12700">
+            <a:solidFill>
+              <a:srgbClr val="DDD8CC"/>
+            </a:solidFill>
+          </a:ln>
+          <a:effectLst/>
+        </p:spPr>
+        <p:style>
+          <a:lnRef idx="1">
+            <a:schemeClr val="accent1"/>
+          </a:lnRef>
+          <a:fillRef idx="3">
+            <a:schemeClr val="accent1"/>
+          </a:fillRef>
+          <a:effectRef idx="2">
+            <a:schemeClr val="accent1"/>
+          </a:effectRef>
+          <a:fontRef idx="minor">
+            <a:schemeClr val="lt1"/>
+          </a:fontRef>
+        </p:style>
+        <p:txBody>
+          <a:bodyPr rtlCol="0" anchor="ctr" wrap="square" lIns="50800" rIns="50800" tIns="50800" bIns="50800"/>
+          <a:lstStyle/>
+          <a:p>
+            <a:pPr algn="ctr">
+              <a:lnSpc>
+                <a:spcPct val="115000"/>
+              </a:lnSpc>
+              <a:spcAft>
+                <a:spcPts val="0"/>
+              </a:spcAft>
+            </a:pPr>
+            <a:r>
+              <a:rPr sz="2400" b="1">
+                <a:solidFill>
+                  <a:srgbClr val="14213D"/>
+                </a:solidFill>
+                <a:latin typeface="Arial"/>
+              </a:rPr>
+              <a:t>76.1%</a:t>
+            </a:r>
+          </a:p>
+          <a:p>
+            <a:pPr algn="ctr">
+              <a:lnSpc>
+                <a:spcPct val="115000"/>
+              </a:lnSpc>
+              <a:spcAft>
+                <a:spcPts val="0"/>
+              </a:spcAft>
+            </a:pPr>
+            <a:r>
+              <a:rPr sz="1300" b="0">
+                <a:solidFill>
+                  <a:srgbClr val="6B7280"/>
+                </a:solidFill>
+                <a:latin typeface="Arial"/>
+              </a:rPr>
+              <a:t>team accuracy</a:t>
+            </a:r>
+          </a:p>
+        </p:txBody>
+      </p:sp>
+      <p:sp>
+        <p:nvSpPr>
+          <p:cNvPr id="12" name="Rounded Rectangle 11"/>
+          <p:cNvSpPr/>
+          <p:nvPr/>
+        </p:nvSpPr>
+        <p:spPr>
+          <a:xfrm>
+            <a:off x="7112000" y="2508250"/>
+            <a:ext cx="1905000" cy="762000"/>
+          </a:xfrm>
+          <a:prstGeom prst="roundRect">
+            <a:avLst>
+              <a:gd name="adj" fmla="val 10000"/>
+            </a:avLst>
+          </a:prstGeom>
+          <a:solidFill>
+            <a:srgbClr val="E2EAF5"/>
+          </a:solidFill>
+          <a:ln w="12700">
+            <a:solidFill>
+              <a:srgbClr val="DDD8CC"/>
+            </a:solidFill>
+          </a:ln>
+          <a:effectLst/>
+        </p:spPr>
+        <p:style>
+          <a:lnRef idx="1">
+            <a:schemeClr val="accent1"/>
+          </a:lnRef>
+          <a:fillRef idx="3">
+            <a:schemeClr val="accent1"/>
+          </a:fillRef>
+          <a:effectRef idx="2">
+            <a:schemeClr val="accent1"/>
+          </a:effectRef>
+          <a:fontRef idx="minor">
+            <a:schemeClr val="lt1"/>
+          </a:fontRef>
+        </p:style>
+        <p:txBody>
+          <a:bodyPr rtlCol="0" anchor="ctr" wrap="square" lIns="50800" rIns="50800" tIns="50800" bIns="50800"/>
+          <a:lstStyle/>
+          <a:p>
+            <a:pPr algn="ctr">
+              <a:lnSpc>
+                <a:spcPct val="115000"/>
+              </a:lnSpc>
+              <a:spcAft>
+                <a:spcPts val="0"/>
+              </a:spcAft>
+            </a:pPr>
+            <a:r>
+              <a:rPr sz="2400" b="1">
+                <a:solidFill>
+                  <a:srgbClr val="14213D"/>
+                </a:solidFill>
+                <a:latin typeface="Arial"/>
+              </a:rPr>
+              <a:t>64.9%</a:t>
+            </a:r>
+          </a:p>
+          <a:p>
+            <a:pPr algn="ctr">
+              <a:lnSpc>
+                <a:spcPct val="115000"/>
+              </a:lnSpc>
+              <a:spcAft>
+                <a:spcPts val="0"/>
+              </a:spcAft>
+            </a:pPr>
+            <a:r>
+              <a:rPr sz="1300" b="0">
+                <a:solidFill>
+                  <a:srgbClr val="6B7280"/>
+                </a:solidFill>
+                <a:latin typeface="Arial"/>
+              </a:rPr>
+              <a:t>team accuracy</a:t>
+            </a:r>
+          </a:p>
+        </p:txBody>
+      </p:sp>
+      <p:sp>
+        <p:nvSpPr>
+          <p:cNvPr id="13" name="Rounded Rectangle 12"/>
+          <p:cNvSpPr/>
+          <p:nvPr/>
+        </p:nvSpPr>
+        <p:spPr>
+          <a:xfrm>
+            <a:off x="9144000" y="2508250"/>
+            <a:ext cx="1905000" cy="762000"/>
+          </a:xfrm>
+          <a:prstGeom prst="roundRect">
+            <a:avLst>
+              <a:gd name="adj" fmla="val 10000"/>
+            </a:avLst>
+          </a:prstGeom>
+          <a:solidFill>
+            <a:srgbClr val="E2EAF5"/>
+          </a:solidFill>
+          <a:ln w="12700">
+            <a:solidFill>
+              <a:srgbClr val="DDD8CC"/>
+            </a:solidFill>
+          </a:ln>
+          <a:effectLst/>
+        </p:spPr>
+        <p:style>
+          <a:lnRef idx="1">
+            <a:schemeClr val="accent1"/>
+          </a:lnRef>
+          <a:fillRef idx="3">
+            <a:schemeClr val="accent1"/>
+          </a:fillRef>
+          <a:effectRef idx="2">
+            <a:schemeClr val="accent1"/>
+          </a:effectRef>
+          <a:fontRef idx="minor">
+            <a:schemeClr val="lt1"/>
+          </a:fontRef>
+        </p:style>
+        <p:txBody>
+          <a:bodyPr rtlCol="0" anchor="ctr" wrap="square" lIns="50800" rIns="50800" tIns="50800" bIns="50800"/>
+          <a:lstStyle/>
+          <a:p>
+            <a:pPr algn="ctr">
+              <a:lnSpc>
+                <a:spcPct val="115000"/>
+              </a:lnSpc>
+              <a:spcAft>
+                <a:spcPts val="0"/>
+              </a:spcAft>
+            </a:pPr>
+            <a:r>
+              <a:rPr sz="2400" b="1">
+                <a:solidFill>
+                  <a:srgbClr val="14213D"/>
+                </a:solidFill>
+                <a:latin typeface="Arial"/>
+              </a:rPr>
+              <a:t>28.0%</a:t>
+            </a:r>
+          </a:p>
+          <a:p>
+            <a:pPr algn="ctr">
+              <a:lnSpc>
+                <a:spcPct val="115000"/>
+              </a:lnSpc>
+              <a:spcAft>
+                <a:spcPts val="0"/>
+              </a:spcAft>
+            </a:pPr>
+            <a:r>
+              <a:rPr sz="1300" b="0">
+                <a:solidFill>
+                  <a:srgbClr val="6B7280"/>
+                </a:solidFill>
+                <a:latin typeface="Arial"/>
+              </a:rPr>
+              <a:t>team accuracy</a:t>
+            </a:r>
+          </a:p>
+        </p:txBody>
+      </p:sp>
+      <p:sp>
+        <p:nvSpPr>
+          <p:cNvPr id="14" name="TextBox 13"/>
+          <p:cNvSpPr txBox="1"/>
+          <p:nvPr/>
+        </p:nvSpPr>
+        <p:spPr>
+          <a:xfrm>
+            <a:off x="812800" y="3460750"/>
+            <a:ext cx="2032000" cy="762000"/>
+          </a:xfrm>
+          <a:prstGeom prst="rect">
+            <a:avLst/>
+          </a:prstGeom>
+          <a:noFill/>
+        </p:spPr>
+        <p:txBody>
+          <a:bodyPr wrap="square" lIns="0" rIns="0" tIns="0" bIns="0" anchor="ctr">
+            <a:spAutoFit/>
+          </a:bodyPr>
           <a:lstStyle/>
           <a:p>
             <a:pPr algn="l">
               <a:lnSpc>
-                <a:spcPct val="100000"/>
-              </a:lnSpc>
-              <a:spcAft>
-                <a:spcPts val="600"/>
-              </a:spcAft>
-            </a:pPr>
-            <a:r>
-              <a:rPr sz="3600" b="1">
-                <a:solidFill>
-                  <a:srgbClr val="2F6B34"/>
-                </a:solidFill>
-                <a:latin typeface="Georgia"/>
-              </a:rPr>
-              <a:t>≤ 2%</a:t>
-            </a:r>
-          </a:p>
+                <a:spcPct val="115000"/>
+              </a:lnSpc>
+              <a:spcAft>
+                <a:spcPts val="0"/>
+              </a:spcAft>
+            </a:pPr>
+            <a:r>
+              <a:rPr sz="2200" b="1">
+                <a:solidFill>
+                  <a:srgbClr val="14213D"/>
+                </a:solidFill>
+                <a:latin typeface="Arial"/>
+              </a:rPr>
+              <a:t>gpt-oss-120b</a:t>
+            </a:r>
+          </a:p>
+        </p:txBody>
+      </p:sp>
+      <p:sp>
+        <p:nvSpPr>
+          <p:cNvPr id="15" name="Rounded Rectangle 14"/>
+          <p:cNvSpPr/>
+          <p:nvPr/>
+        </p:nvSpPr>
+        <p:spPr>
+          <a:xfrm>
+            <a:off x="3048000" y="3460750"/>
+            <a:ext cx="1905000" cy="762000"/>
+          </a:xfrm>
+          <a:prstGeom prst="roundRect">
+            <a:avLst>
+              <a:gd name="adj" fmla="val 10000"/>
+            </a:avLst>
+          </a:prstGeom>
+          <a:solidFill>
+            <a:srgbClr val="E2EAF5"/>
+          </a:solidFill>
+          <a:ln w="12700">
+            <a:solidFill>
+              <a:srgbClr val="DDD8CC"/>
+            </a:solidFill>
+          </a:ln>
+          <a:effectLst/>
+        </p:spPr>
+        <p:style>
+          <a:lnRef idx="1">
+            <a:schemeClr val="accent1"/>
+          </a:lnRef>
+          <a:fillRef idx="3">
+            <a:schemeClr val="accent1"/>
+          </a:fillRef>
+          <a:effectRef idx="2">
+            <a:schemeClr val="accent1"/>
+          </a:effectRef>
+          <a:fontRef idx="minor">
+            <a:schemeClr val="lt1"/>
+          </a:fontRef>
+        </p:style>
+        <p:txBody>
+          <a:bodyPr rtlCol="0" anchor="ctr" wrap="square" lIns="50800" rIns="50800" tIns="50800" bIns="50800"/>
+          <a:lstStyle/>
+          <a:p>
+            <a:pPr algn="ctr">
+              <a:lnSpc>
+                <a:spcPct val="115000"/>
+              </a:lnSpc>
+              <a:spcAft>
+                <a:spcPts val="0"/>
+              </a:spcAft>
+            </a:pPr>
+            <a:r>
+              <a:rPr sz="2400" b="1">
+                <a:solidFill>
+                  <a:srgbClr val="14213D"/>
+                </a:solidFill>
+                <a:latin typeface="Arial"/>
+              </a:rPr>
+              <a:t>97.0%</a:t>
+            </a:r>
+          </a:p>
+          <a:p>
+            <a:pPr algn="ctr">
+              <a:lnSpc>
+                <a:spcPct val="115000"/>
+              </a:lnSpc>
+              <a:spcAft>
+                <a:spcPts val="0"/>
+              </a:spcAft>
+            </a:pPr>
+            <a:r>
+              <a:rPr sz="1300" b="0">
+                <a:solidFill>
+                  <a:srgbClr val="6B7280"/>
+                </a:solidFill>
+                <a:latin typeface="Arial"/>
+              </a:rPr>
+              <a:t>team accuracy</a:t>
+            </a:r>
+          </a:p>
+        </p:txBody>
+      </p:sp>
+      <p:sp>
+        <p:nvSpPr>
+          <p:cNvPr id="16" name="Rounded Rectangle 15"/>
+          <p:cNvSpPr/>
+          <p:nvPr/>
+        </p:nvSpPr>
+        <p:spPr>
+          <a:xfrm>
+            <a:off x="5080000" y="3460750"/>
+            <a:ext cx="1905000" cy="762000"/>
+          </a:xfrm>
+          <a:prstGeom prst="roundRect">
+            <a:avLst>
+              <a:gd name="adj" fmla="val 10000"/>
+            </a:avLst>
+          </a:prstGeom>
+          <a:solidFill>
+            <a:srgbClr val="E2EAF5"/>
+          </a:solidFill>
+          <a:ln w="12700">
+            <a:solidFill>
+              <a:srgbClr val="DDD8CC"/>
+            </a:solidFill>
+          </a:ln>
+          <a:effectLst/>
+        </p:spPr>
+        <p:style>
+          <a:lnRef idx="1">
+            <a:schemeClr val="accent1"/>
+          </a:lnRef>
+          <a:fillRef idx="3">
+            <a:schemeClr val="accent1"/>
+          </a:fillRef>
+          <a:effectRef idx="2">
+            <a:schemeClr val="accent1"/>
+          </a:effectRef>
+          <a:fontRef idx="minor">
+            <a:schemeClr val="lt1"/>
+          </a:fontRef>
+        </p:style>
+        <p:txBody>
+          <a:bodyPr rtlCol="0" anchor="ctr" wrap="square" lIns="50800" rIns="50800" tIns="50800" bIns="50800"/>
+          <a:lstStyle/>
+          <a:p>
+            <a:pPr algn="ctr">
+              <a:lnSpc>
+                <a:spcPct val="115000"/>
+              </a:lnSpc>
+              <a:spcAft>
+                <a:spcPts val="0"/>
+              </a:spcAft>
+            </a:pPr>
+            <a:r>
+              <a:rPr sz="2400" b="1">
+                <a:solidFill>
+                  <a:srgbClr val="14213D"/>
+                </a:solidFill>
+                <a:latin typeface="Arial"/>
+              </a:rPr>
+              <a:t>79.8%</a:t>
+            </a:r>
+          </a:p>
+          <a:p>
+            <a:pPr algn="ctr">
+              <a:lnSpc>
+                <a:spcPct val="115000"/>
+              </a:lnSpc>
+              <a:spcAft>
+                <a:spcPts val="0"/>
+              </a:spcAft>
+            </a:pPr>
+            <a:r>
+              <a:rPr sz="1300" b="0">
+                <a:solidFill>
+                  <a:srgbClr val="6B7280"/>
+                </a:solidFill>
+                <a:latin typeface="Arial"/>
+              </a:rPr>
+              <a:t>team accuracy</a:t>
+            </a:r>
+          </a:p>
+        </p:txBody>
+      </p:sp>
+      <p:sp>
+        <p:nvSpPr>
+          <p:cNvPr id="17" name="Rounded Rectangle 16"/>
+          <p:cNvSpPr/>
+          <p:nvPr/>
+        </p:nvSpPr>
+        <p:spPr>
+          <a:xfrm>
+            <a:off x="7112000" y="3460750"/>
+            <a:ext cx="1905000" cy="762000"/>
+          </a:xfrm>
+          <a:prstGeom prst="roundRect">
+            <a:avLst>
+              <a:gd name="adj" fmla="val 10000"/>
+            </a:avLst>
+          </a:prstGeom>
+          <a:solidFill>
+            <a:srgbClr val="E2EAF5"/>
+          </a:solidFill>
+          <a:ln w="12700">
+            <a:solidFill>
+              <a:srgbClr val="DDD8CC"/>
+            </a:solidFill>
+          </a:ln>
+          <a:effectLst/>
+        </p:spPr>
+        <p:style>
+          <a:lnRef idx="1">
+            <a:schemeClr val="accent1"/>
+          </a:lnRef>
+          <a:fillRef idx="3">
+            <a:schemeClr val="accent1"/>
+          </a:fillRef>
+          <a:effectRef idx="2">
+            <a:schemeClr val="accent1"/>
+          </a:effectRef>
+          <a:fontRef idx="minor">
+            <a:schemeClr val="lt1"/>
+          </a:fontRef>
+        </p:style>
+        <p:txBody>
+          <a:bodyPr rtlCol="0" anchor="ctr" wrap="square" lIns="50800" rIns="50800" tIns="50800" bIns="50800"/>
+          <a:lstStyle/>
+          <a:p>
+            <a:pPr algn="ctr">
+              <a:lnSpc>
+                <a:spcPct val="115000"/>
+              </a:lnSpc>
+              <a:spcAft>
+                <a:spcPts val="0"/>
+              </a:spcAft>
+            </a:pPr>
+            <a:r>
+              <a:rPr sz="2400" b="1">
+                <a:solidFill>
+                  <a:srgbClr val="14213D"/>
+                </a:solidFill>
+                <a:latin typeface="Arial"/>
+              </a:rPr>
+              <a:t>71.1%</a:t>
+            </a:r>
+          </a:p>
+          <a:p>
+            <a:pPr algn="ctr">
+              <a:lnSpc>
+                <a:spcPct val="115000"/>
+              </a:lnSpc>
+              <a:spcAft>
+                <a:spcPts val="0"/>
+              </a:spcAft>
+            </a:pPr>
+            <a:r>
+              <a:rPr sz="1300" b="0">
+                <a:solidFill>
+                  <a:srgbClr val="6B7280"/>
+                </a:solidFill>
+                <a:latin typeface="Arial"/>
+              </a:rPr>
+              <a:t>team accuracy</a:t>
+            </a:r>
+          </a:p>
+        </p:txBody>
+      </p:sp>
+      <p:sp>
+        <p:nvSpPr>
+          <p:cNvPr id="18" name="Rounded Rectangle 17"/>
+          <p:cNvSpPr/>
+          <p:nvPr/>
+        </p:nvSpPr>
+        <p:spPr>
+          <a:xfrm>
+            <a:off x="9144000" y="3460750"/>
+            <a:ext cx="1905000" cy="762000"/>
+          </a:xfrm>
+          <a:prstGeom prst="roundRect">
+            <a:avLst>
+              <a:gd name="adj" fmla="val 10000"/>
+            </a:avLst>
+          </a:prstGeom>
+          <a:solidFill>
+            <a:srgbClr val="E2EAF5"/>
+          </a:solidFill>
+          <a:ln w="12700">
+            <a:solidFill>
+              <a:srgbClr val="DDD8CC"/>
+            </a:solidFill>
+          </a:ln>
+          <a:effectLst/>
+        </p:spPr>
+        <p:style>
+          <a:lnRef idx="1">
+            <a:schemeClr val="accent1"/>
+          </a:lnRef>
+          <a:fillRef idx="3">
+            <a:schemeClr val="accent1"/>
+          </a:fillRef>
+          <a:effectRef idx="2">
+            <a:schemeClr val="accent1"/>
+          </a:effectRef>
+          <a:fontRef idx="minor">
+            <a:schemeClr val="lt1"/>
+          </a:fontRef>
+        </p:style>
+        <p:txBody>
+          <a:bodyPr rtlCol="0" anchor="ctr" wrap="square" lIns="50800" rIns="50800" tIns="50800" bIns="50800"/>
+          <a:lstStyle/>
+          <a:p>
+            <a:pPr algn="ctr">
+              <a:lnSpc>
+                <a:spcPct val="115000"/>
+              </a:lnSpc>
+              <a:spcAft>
+                <a:spcPts val="0"/>
+              </a:spcAft>
+            </a:pPr>
+            <a:r>
+              <a:rPr sz="2400" b="1">
+                <a:solidFill>
+                  <a:srgbClr val="14213D"/>
+                </a:solidFill>
+                <a:latin typeface="Arial"/>
+              </a:rPr>
+              <a:t>45.1%</a:t>
+            </a:r>
+          </a:p>
+          <a:p>
+            <a:pPr algn="ctr">
+              <a:lnSpc>
+                <a:spcPct val="115000"/>
+              </a:lnSpc>
+              <a:spcAft>
+                <a:spcPts val="0"/>
+              </a:spcAft>
+            </a:pPr>
+            <a:r>
+              <a:rPr sz="1300" b="0">
+                <a:solidFill>
+                  <a:srgbClr val="6B7280"/>
+                </a:solidFill>
+                <a:latin typeface="Arial"/>
+              </a:rPr>
+              <a:t>team accuracy</a:t>
+            </a:r>
+          </a:p>
+        </p:txBody>
+      </p:sp>
+      <p:sp>
+        <p:nvSpPr>
+          <p:cNvPr id="19" name="TextBox 18"/>
+          <p:cNvSpPr txBox="1"/>
+          <p:nvPr/>
+        </p:nvSpPr>
+        <p:spPr>
+          <a:xfrm>
+            <a:off x="812800" y="4413250"/>
+            <a:ext cx="2032000" cy="762000"/>
+          </a:xfrm>
+          <a:prstGeom prst="rect">
+            <a:avLst/>
+          </a:prstGeom>
+          <a:noFill/>
+        </p:spPr>
+        <p:txBody>
+          <a:bodyPr wrap="square" lIns="0" rIns="0" tIns="0" bIns="0" anchor="ctr">
+            <a:spAutoFit/>
+          </a:bodyPr>
+          <a:lstStyle/>
           <a:p>
             <a:pPr algn="l">
               <a:lnSpc>
@@ -8932,13 +9137,425 @@
               </a:spcAft>
             </a:pPr>
             <a:r>
-              <a:rPr sz="1700" b="0">
-                <a:solidFill>
-                  <a:srgbClr val="3A4150"/>
-                </a:solidFill>
-                <a:latin typeface="Arial"/>
-              </a:rPr>
-              <a:t>of splits broke the promise. Allowed: 10%.</a:t>
+              <a:rPr sz="2200" b="1">
+                <a:solidFill>
+                  <a:srgbClr val="14213D"/>
+                </a:solidFill>
+                <a:latin typeface="Arial"/>
+              </a:rPr>
+              <a:t>Gemma-4-26B</a:t>
+            </a:r>
+          </a:p>
+        </p:txBody>
+      </p:sp>
+      <p:sp>
+        <p:nvSpPr>
+          <p:cNvPr id="20" name="Rounded Rectangle 19"/>
+          <p:cNvSpPr/>
+          <p:nvPr/>
+        </p:nvSpPr>
+        <p:spPr>
+          <a:xfrm>
+            <a:off x="3048000" y="4413250"/>
+            <a:ext cx="1905000" cy="762000"/>
+          </a:xfrm>
+          <a:prstGeom prst="roundRect">
+            <a:avLst>
+              <a:gd name="adj" fmla="val 10000"/>
+            </a:avLst>
+          </a:prstGeom>
+          <a:solidFill>
+            <a:srgbClr val="F8E8DC"/>
+          </a:solidFill>
+          <a:ln w="12700">
+            <a:solidFill>
+              <a:srgbClr val="DDD8CC"/>
+            </a:solidFill>
+          </a:ln>
+          <a:effectLst/>
+        </p:spPr>
+        <p:style>
+          <a:lnRef idx="1">
+            <a:schemeClr val="accent1"/>
+          </a:lnRef>
+          <a:fillRef idx="3">
+            <a:schemeClr val="accent1"/>
+          </a:fillRef>
+          <a:effectRef idx="2">
+            <a:schemeClr val="accent1"/>
+          </a:effectRef>
+          <a:fontRef idx="minor">
+            <a:schemeClr val="lt1"/>
+          </a:fontRef>
+        </p:style>
+        <p:txBody>
+          <a:bodyPr rtlCol="0" anchor="ctr" wrap="square" lIns="50800" rIns="50800" tIns="50800" bIns="50800"/>
+          <a:lstStyle/>
+          <a:p>
+            <a:pPr algn="ctr">
+              <a:lnSpc>
+                <a:spcPct val="115000"/>
+              </a:lnSpc>
+              <a:spcAft>
+                <a:spcPts val="0"/>
+              </a:spcAft>
+            </a:pPr>
+            <a:r>
+              <a:rPr sz="2400" b="1">
+                <a:solidFill>
+                  <a:srgbClr val="14213D"/>
+                </a:solidFill>
+                <a:latin typeface="Arial"/>
+              </a:rPr>
+              <a:t>99.8%</a:t>
+            </a:r>
+          </a:p>
+          <a:p>
+            <a:pPr algn="ctr">
+              <a:lnSpc>
+                <a:spcPct val="115000"/>
+              </a:lnSpc>
+              <a:spcAft>
+                <a:spcPts val="0"/>
+              </a:spcAft>
+            </a:pPr>
+            <a:r>
+              <a:rPr sz="1300" b="0">
+                <a:solidFill>
+                  <a:srgbClr val="6B7280"/>
+                </a:solidFill>
+                <a:latin typeface="Arial"/>
+              </a:rPr>
+              <a:t>team accuracy</a:t>
+            </a:r>
+          </a:p>
+        </p:txBody>
+      </p:sp>
+      <p:sp>
+        <p:nvSpPr>
+          <p:cNvPr id="21" name="Rounded Rectangle 20"/>
+          <p:cNvSpPr/>
+          <p:nvPr/>
+        </p:nvSpPr>
+        <p:spPr>
+          <a:xfrm>
+            <a:off x="5080000" y="4413250"/>
+            <a:ext cx="1905000" cy="762000"/>
+          </a:xfrm>
+          <a:prstGeom prst="roundRect">
+            <a:avLst>
+              <a:gd name="adj" fmla="val 10000"/>
+            </a:avLst>
+          </a:prstGeom>
+          <a:solidFill>
+            <a:srgbClr val="F8E8DC"/>
+          </a:solidFill>
+          <a:ln w="12700">
+            <a:solidFill>
+              <a:srgbClr val="DDD8CC"/>
+            </a:solidFill>
+          </a:ln>
+          <a:effectLst/>
+        </p:spPr>
+        <p:style>
+          <a:lnRef idx="1">
+            <a:schemeClr val="accent1"/>
+          </a:lnRef>
+          <a:fillRef idx="3">
+            <a:schemeClr val="accent1"/>
+          </a:fillRef>
+          <a:effectRef idx="2">
+            <a:schemeClr val="accent1"/>
+          </a:effectRef>
+          <a:fontRef idx="minor">
+            <a:schemeClr val="lt1"/>
+          </a:fontRef>
+        </p:style>
+        <p:txBody>
+          <a:bodyPr rtlCol="0" anchor="ctr" wrap="square" lIns="50800" rIns="50800" tIns="50800" bIns="50800"/>
+          <a:lstStyle/>
+          <a:p>
+            <a:pPr algn="ctr">
+              <a:lnSpc>
+                <a:spcPct val="115000"/>
+              </a:lnSpc>
+              <a:spcAft>
+                <a:spcPts val="0"/>
+              </a:spcAft>
+            </a:pPr>
+            <a:r>
+              <a:rPr sz="2400" b="1">
+                <a:solidFill>
+                  <a:srgbClr val="14213D"/>
+                </a:solidFill>
+                <a:latin typeface="Arial"/>
+              </a:rPr>
+              <a:t>67.9%</a:t>
+            </a:r>
+          </a:p>
+          <a:p>
+            <a:pPr algn="ctr">
+              <a:lnSpc>
+                <a:spcPct val="115000"/>
+              </a:lnSpc>
+              <a:spcAft>
+                <a:spcPts val="0"/>
+              </a:spcAft>
+            </a:pPr>
+            <a:r>
+              <a:rPr sz="1300" b="0">
+                <a:solidFill>
+                  <a:srgbClr val="6B7280"/>
+                </a:solidFill>
+                <a:latin typeface="Arial"/>
+              </a:rPr>
+              <a:t>team accuracy</a:t>
+            </a:r>
+          </a:p>
+        </p:txBody>
+      </p:sp>
+      <p:sp>
+        <p:nvSpPr>
+          <p:cNvPr id="22" name="Rounded Rectangle 21"/>
+          <p:cNvSpPr/>
+          <p:nvPr/>
+        </p:nvSpPr>
+        <p:spPr>
+          <a:xfrm>
+            <a:off x="7112000" y="4413250"/>
+            <a:ext cx="1905000" cy="762000"/>
+          </a:xfrm>
+          <a:prstGeom prst="roundRect">
+            <a:avLst>
+              <a:gd name="adj" fmla="val 10000"/>
+            </a:avLst>
+          </a:prstGeom>
+          <a:solidFill>
+            <a:srgbClr val="F8E8DC"/>
+          </a:solidFill>
+          <a:ln w="12700">
+            <a:solidFill>
+              <a:srgbClr val="DDD8CC"/>
+            </a:solidFill>
+          </a:ln>
+          <a:effectLst/>
+        </p:spPr>
+        <p:style>
+          <a:lnRef idx="1">
+            <a:schemeClr val="accent1"/>
+          </a:lnRef>
+          <a:fillRef idx="3">
+            <a:schemeClr val="accent1"/>
+          </a:fillRef>
+          <a:effectRef idx="2">
+            <a:schemeClr val="accent1"/>
+          </a:effectRef>
+          <a:fontRef idx="minor">
+            <a:schemeClr val="lt1"/>
+          </a:fontRef>
+        </p:style>
+        <p:txBody>
+          <a:bodyPr rtlCol="0" anchor="ctr" wrap="square" lIns="50800" rIns="50800" tIns="50800" bIns="50800"/>
+          <a:lstStyle/>
+          <a:p>
+            <a:pPr algn="ctr">
+              <a:lnSpc>
+                <a:spcPct val="115000"/>
+              </a:lnSpc>
+              <a:spcAft>
+                <a:spcPts val="0"/>
+              </a:spcAft>
+            </a:pPr>
+            <a:r>
+              <a:rPr sz="2400" b="1">
+                <a:solidFill>
+                  <a:srgbClr val="14213D"/>
+                </a:solidFill>
+                <a:latin typeface="Arial"/>
+              </a:rPr>
+              <a:t>65.3%</a:t>
+            </a:r>
+          </a:p>
+          <a:p>
+            <a:pPr algn="ctr">
+              <a:lnSpc>
+                <a:spcPct val="115000"/>
+              </a:lnSpc>
+              <a:spcAft>
+                <a:spcPts val="0"/>
+              </a:spcAft>
+            </a:pPr>
+            <a:r>
+              <a:rPr sz="1300" b="0">
+                <a:solidFill>
+                  <a:srgbClr val="6B7280"/>
+                </a:solidFill>
+                <a:latin typeface="Arial"/>
+              </a:rPr>
+              <a:t>team accuracy</a:t>
+            </a:r>
+          </a:p>
+        </p:txBody>
+      </p:sp>
+      <p:sp>
+        <p:nvSpPr>
+          <p:cNvPr id="23" name="Rounded Rectangle 22"/>
+          <p:cNvSpPr/>
+          <p:nvPr/>
+        </p:nvSpPr>
+        <p:spPr>
+          <a:xfrm>
+            <a:off x="9144000" y="4413250"/>
+            <a:ext cx="1905000" cy="762000"/>
+          </a:xfrm>
+          <a:prstGeom prst="roundRect">
+            <a:avLst>
+              <a:gd name="adj" fmla="val 10000"/>
+            </a:avLst>
+          </a:prstGeom>
+          <a:solidFill>
+            <a:srgbClr val="F8E8DC"/>
+          </a:solidFill>
+          <a:ln w="12700">
+            <a:solidFill>
+              <a:srgbClr val="DDD8CC"/>
+            </a:solidFill>
+          </a:ln>
+          <a:effectLst/>
+        </p:spPr>
+        <p:style>
+          <a:lnRef idx="1">
+            <a:schemeClr val="accent1"/>
+          </a:lnRef>
+          <a:fillRef idx="3">
+            <a:schemeClr val="accent1"/>
+          </a:fillRef>
+          <a:effectRef idx="2">
+            <a:schemeClr val="accent1"/>
+          </a:effectRef>
+          <a:fontRef idx="minor">
+            <a:schemeClr val="lt1"/>
+          </a:fontRef>
+        </p:style>
+        <p:txBody>
+          <a:bodyPr rtlCol="0" anchor="ctr" wrap="square" lIns="50800" rIns="50800" tIns="50800" bIns="50800"/>
+          <a:lstStyle/>
+          <a:p>
+            <a:pPr algn="ctr">
+              <a:lnSpc>
+                <a:spcPct val="115000"/>
+              </a:lnSpc>
+              <a:spcAft>
+                <a:spcPts val="0"/>
+              </a:spcAft>
+            </a:pPr>
+            <a:r>
+              <a:rPr sz="2400" b="1">
+                <a:solidFill>
+                  <a:srgbClr val="14213D"/>
+                </a:solidFill>
+                <a:latin typeface="Arial"/>
+              </a:rPr>
+              <a:t>36.4%</a:t>
+            </a:r>
+          </a:p>
+          <a:p>
+            <a:pPr algn="ctr">
+              <a:lnSpc>
+                <a:spcPct val="115000"/>
+              </a:lnSpc>
+              <a:spcAft>
+                <a:spcPts val="0"/>
+              </a:spcAft>
+            </a:pPr>
+            <a:r>
+              <a:rPr sz="1300" b="0">
+                <a:solidFill>
+                  <a:srgbClr val="6B7280"/>
+                </a:solidFill>
+                <a:latin typeface="Arial"/>
+              </a:rPr>
+              <a:t>team accuracy</a:t>
+            </a:r>
+          </a:p>
+        </p:txBody>
+      </p:sp>
+      <p:sp>
+        <p:nvSpPr>
+          <p:cNvPr id="24" name="Rounded Rectangle 23"/>
+          <p:cNvSpPr/>
+          <p:nvPr/>
+        </p:nvSpPr>
+        <p:spPr>
+          <a:xfrm>
+            <a:off x="812800" y="5524500"/>
+            <a:ext cx="10566400" cy="635000"/>
+          </a:xfrm>
+          <a:prstGeom prst="roundRect">
+            <a:avLst>
+              <a:gd name="adj" fmla="val 10000"/>
+            </a:avLst>
+          </a:prstGeom>
+          <a:solidFill>
+            <a:srgbClr val="14213D"/>
+          </a:solidFill>
+          <a:ln>
+            <a:noFill/>
+          </a:ln>
+          <a:effectLst/>
+        </p:spPr>
+        <p:style>
+          <a:lnRef idx="1">
+            <a:schemeClr val="accent1"/>
+          </a:lnRef>
+          <a:fillRef idx="3">
+            <a:schemeClr val="accent1"/>
+          </a:fillRef>
+          <a:effectRef idx="2">
+            <a:schemeClr val="accent1"/>
+          </a:effectRef>
+          <a:fontRef idx="minor">
+            <a:schemeClr val="lt1"/>
+          </a:fontRef>
+        </p:style>
+        <p:txBody>
+          <a:bodyPr rtlCol="0" anchor="ctr" wrap="square" lIns="203200" rIns="203200" tIns="203200" bIns="203200"/>
+          <a:lstStyle/>
+          <a:p>
+            <a:pPr algn="ctr">
+              <a:lnSpc>
+                <a:spcPct val="115000"/>
+              </a:lnSpc>
+              <a:spcAft>
+                <a:spcPts val="0"/>
+              </a:spcAft>
+            </a:pPr>
+            <a:r>
+              <a:rPr sz="1800" b="0">
+                <a:solidFill>
+                  <a:srgbClr val="F7F6F2"/>
+                </a:solidFill>
+                <a:latin typeface="Arial"/>
+              </a:rPr>
+              <a:t>Record every task once, then replay </a:t>
+            </a:r>
+            <a:r>
+              <a:rPr sz="1800" b="1">
+                <a:solidFill>
+                  <a:srgbClr val="F0A66B"/>
+                </a:solidFill>
+                <a:latin typeface="Arial"/>
+              </a:rPr>
+              <a:t>200 random splits</a:t>
+            </a:r>
+            <a:r>
+              <a:rPr sz="1800" b="0">
+                <a:solidFill>
+                  <a:srgbClr val="F7F6F2"/>
+                </a:solidFill>
+                <a:latin typeface="Arial"/>
+              </a:rPr>
+              <a:t>: half to calibrate CLIMB, half to test it.</a:t>
             </a:r>
           </a:p>
         </p:txBody>
@@ -9090,14 +9707,14 @@
                 </a:solidFill>
                 <a:latin typeface="Georgia"/>
               </a:rPr>
-              <a:t>How much it saves</a:t>
+              <a:t>The promise holds on every setting</a:t>
             </a:r>
           </a:p>
         </p:txBody>
       </p:sp>
       <p:pic>
         <p:nvPicPr>
-          <p:cNvPr id="5" name="Picture 4" descr="c_savings.png"/>
+          <p:cNvPr id="5" name="Picture 4" descr="c_viol.png"/>
           <p:cNvPicPr>
             <a:picLocks noChangeAspect="1"/>
           </p:cNvPicPr>
@@ -9111,8 +9728,8 @@
         </p:blipFill>
         <p:spPr>
           <a:xfrm>
-            <a:off x="812800" y="1997499"/>
-            <a:ext cx="7302500" cy="3752001"/>
+            <a:off x="812800" y="1999442"/>
+            <a:ext cx="7302500" cy="3748115"/>
           </a:xfrm>
           <a:prstGeom prst="rect">
             <a:avLst/>
@@ -9127,16 +9744,16 @@
         </p:nvSpPr>
         <p:spPr>
           <a:xfrm>
-            <a:off x="8445500" y="2095500"/>
-            <a:ext cx="2933700" cy="1651000"/>
+            <a:off x="8445500" y="2286000"/>
+            <a:ext cx="2933700" cy="1905000"/>
           </a:xfrm>
           <a:prstGeom prst="roundRect">
             <a:avLst>
-              <a:gd name="adj" fmla="val 6923"/>
+              <a:gd name="adj" fmla="val 6000"/>
             </a:avLst>
           </a:prstGeom>
           <a:solidFill>
-            <a:srgbClr val="E2EAF5"/>
+            <a:srgbClr val="E3ECE2"/>
           </a:solidFill>
           <a:ln w="12700">
             <a:solidFill>
@@ -9174,11 +9791,11 @@
             <a:r>
               <a:rPr sz="3600" b="1">
                 <a:solidFill>
-                  <a:srgbClr val="2E5C99"/>
+                  <a:srgbClr val="2F6B34"/>
                 </a:solidFill>
                 <a:latin typeface="Georgia"/>
               </a:rPr>
-              <a:t>38% saved</a:t>
+              <a:t>≤ 2%</a:t>
             </a:r>
           </a:p>
           <a:p>
@@ -9197,90 +9814,7 @@
                 </a:solidFill>
                 <a:latin typeface="Arial"/>
               </a:rPr>
-              <a:t>allowing 5 points of loss</a:t>
-            </a:r>
-          </a:p>
-        </p:txBody>
-      </p:sp>
-      <p:sp>
-        <p:nvSpPr>
-          <p:cNvPr id="7" name="Rounded Rectangle 6"/>
-          <p:cNvSpPr/>
-          <p:nvPr/>
-        </p:nvSpPr>
-        <p:spPr>
-          <a:xfrm>
-            <a:off x="8445500" y="4000500"/>
-            <a:ext cx="2933700" cy="1651000"/>
-          </a:xfrm>
-          <a:prstGeom prst="roundRect">
-            <a:avLst>
-              <a:gd name="adj" fmla="val 6923"/>
-            </a:avLst>
-          </a:prstGeom>
-          <a:solidFill>
-            <a:srgbClr val="E2EAF5"/>
-          </a:solidFill>
-          <a:ln w="12700">
-            <a:solidFill>
-              <a:srgbClr val="DDD8CC"/>
-            </a:solidFill>
-          </a:ln>
-          <a:effectLst/>
-        </p:spPr>
-        <p:style>
-          <a:lnRef idx="1">
-            <a:schemeClr val="accent1"/>
-          </a:lnRef>
-          <a:fillRef idx="3">
-            <a:schemeClr val="accent1"/>
-          </a:fillRef>
-          <a:effectRef idx="2">
-            <a:schemeClr val="accent1"/>
-          </a:effectRef>
-          <a:fontRef idx="minor">
-            <a:schemeClr val="lt1"/>
-          </a:fontRef>
-        </p:style>
-        <p:txBody>
-          <a:bodyPr rtlCol="0" anchor="ctr" wrap="square" lIns="190500" rIns="190500" tIns="190500" bIns="190500"/>
-          <a:lstStyle/>
-          <a:p>
-            <a:pPr algn="l">
-              <a:lnSpc>
-                <a:spcPct val="100000"/>
-              </a:lnSpc>
-              <a:spcAft>
-                <a:spcPts val="600"/>
-              </a:spcAft>
-            </a:pPr>
-            <a:r>
-              <a:rPr sz="3600" b="1">
-                <a:solidFill>
-                  <a:srgbClr val="2E5C99"/>
-                </a:solidFill>
-                <a:latin typeface="Georgia"/>
-              </a:rPr>
-              <a:t>65% saved</a:t>
-            </a:r>
-          </a:p>
-          <a:p>
-            <a:pPr algn="l">
-              <a:lnSpc>
-                <a:spcPct val="115000"/>
-              </a:lnSpc>
-              <a:spcAft>
-                <a:spcPts val="0"/>
-              </a:spcAft>
-            </a:pPr>
-            <a:r>
-              <a:rPr sz="1700" b="0">
-                <a:solidFill>
-                  <a:srgbClr val="3A4150"/>
-                </a:solidFill>
-                <a:latin typeface="Arial"/>
-              </a:rPr>
-              <a:t>allowing 10 points of loss</a:t>
+              <a:t>of splits broke the promise. Allowed: 10%.</a:t>
             </a:r>
           </a:p>
         </p:txBody>
@@ -9432,14 +9966,14 @@
                 </a:solidFill>
                 <a:latin typeface="Georgia"/>
               </a:rPr>
-              <a:t>Without the test, the promise breaks</a:t>
+              <a:t>How much it saves</a:t>
             </a:r>
           </a:p>
         </p:txBody>
       </p:sp>
       <p:pic>
         <p:nvPicPr>
-          <p:cNvPr id="5" name="Picture 4" descr="c_tuned.png"/>
+          <p:cNvPr id="5" name="Picture 4" descr="c_savings.png"/>
           <p:cNvPicPr>
             <a:picLocks noChangeAspect="1"/>
           </p:cNvPicPr>
@@ -9453,8 +9987,8 @@
         </p:blipFill>
         <p:spPr>
           <a:xfrm>
-            <a:off x="812800" y="1721371"/>
-            <a:ext cx="7302500" cy="4304257"/>
+            <a:off x="812800" y="1997499"/>
+            <a:ext cx="7302500" cy="3752001"/>
           </a:xfrm>
           <a:prstGeom prst="rect">
             <a:avLst/>
@@ -9469,16 +10003,16 @@
         </p:nvSpPr>
         <p:spPr>
           <a:xfrm>
-            <a:off x="8445500" y="2286000"/>
-            <a:ext cx="2933700" cy="1905000"/>
+            <a:off x="8445500" y="2095500"/>
+            <a:ext cx="2933700" cy="1651000"/>
           </a:xfrm>
           <a:prstGeom prst="roundRect">
             <a:avLst>
-              <a:gd name="adj" fmla="val 6000"/>
+              <a:gd name="adj" fmla="val 6923"/>
             </a:avLst>
           </a:prstGeom>
           <a:solidFill>
-            <a:srgbClr val="F6E3E0"/>
+            <a:srgbClr val="E2EAF5"/>
           </a:solidFill>
           <a:ln w="12700">
             <a:solidFill>
@@ -9516,11 +10050,11 @@
             <a:r>
               <a:rPr sz="3600" b="1">
                 <a:solidFill>
-                  <a:srgbClr val="B03A2E"/>
+                  <a:srgbClr val="2E5C99"/>
                 </a:solidFill>
                 <a:latin typeface="Georgia"/>
               </a:rPr>
-              <a:t>31%</a:t>
+              <a:t>38% saved</a:t>
             </a:r>
           </a:p>
           <a:p>
@@ -9539,7 +10073,90 @@
                 </a:solidFill>
                 <a:latin typeface="Arial"/>
               </a:rPr>
-              <a:t>of splits broken at ε = 5 by the tuned rule. CLIMB: 0.6%.</a:t>
+              <a:t>allowing 5 points of loss</a:t>
+            </a:r>
+          </a:p>
+        </p:txBody>
+      </p:sp>
+      <p:sp>
+        <p:nvSpPr>
+          <p:cNvPr id="7" name="Rounded Rectangle 6"/>
+          <p:cNvSpPr/>
+          <p:nvPr/>
+        </p:nvSpPr>
+        <p:spPr>
+          <a:xfrm>
+            <a:off x="8445500" y="4000500"/>
+            <a:ext cx="2933700" cy="1651000"/>
+          </a:xfrm>
+          <a:prstGeom prst="roundRect">
+            <a:avLst>
+              <a:gd name="adj" fmla="val 6923"/>
+            </a:avLst>
+          </a:prstGeom>
+          <a:solidFill>
+            <a:srgbClr val="E2EAF5"/>
+          </a:solidFill>
+          <a:ln w="12700">
+            <a:solidFill>
+              <a:srgbClr val="DDD8CC"/>
+            </a:solidFill>
+          </a:ln>
+          <a:effectLst/>
+        </p:spPr>
+        <p:style>
+          <a:lnRef idx="1">
+            <a:schemeClr val="accent1"/>
+          </a:lnRef>
+          <a:fillRef idx="3">
+            <a:schemeClr val="accent1"/>
+          </a:fillRef>
+          <a:effectRef idx="2">
+            <a:schemeClr val="accent1"/>
+          </a:effectRef>
+          <a:fontRef idx="minor">
+            <a:schemeClr val="lt1"/>
+          </a:fontRef>
+        </p:style>
+        <p:txBody>
+          <a:bodyPr rtlCol="0" anchor="ctr" wrap="square" lIns="190500" rIns="190500" tIns="190500" bIns="190500"/>
+          <a:lstStyle/>
+          <a:p>
+            <a:pPr algn="l">
+              <a:lnSpc>
+                <a:spcPct val="100000"/>
+              </a:lnSpc>
+              <a:spcAft>
+                <a:spcPts val="600"/>
+              </a:spcAft>
+            </a:pPr>
+            <a:r>
+              <a:rPr sz="3600" b="1">
+                <a:solidFill>
+                  <a:srgbClr val="2E5C99"/>
+                </a:solidFill>
+                <a:latin typeface="Georgia"/>
+              </a:rPr>
+              <a:t>65% saved</a:t>
+            </a:r>
+          </a:p>
+          <a:p>
+            <a:pPr algn="l">
+              <a:lnSpc>
+                <a:spcPct val="115000"/>
+              </a:lnSpc>
+              <a:spcAft>
+                <a:spcPts val="0"/>
+              </a:spcAft>
+            </a:pPr>
+            <a:r>
+              <a:rPr sz="1700" b="0">
+                <a:solidFill>
+                  <a:srgbClr val="3A4150"/>
+                </a:solidFill>
+                <a:latin typeface="Arial"/>
+              </a:rPr>
+              <a:t>allowing 10 points of loss</a:t>
             </a:r>
           </a:p>
         </p:txBody>
@@ -9558,7 +10175,7 @@
     <p:bg>
       <p:bgPr>
         <a:solidFill>
-          <a:srgbClr val="14213D"/>
+          <a:srgbClr val="F7F6F2"/>
         </a:solidFill>
         <a:effectLst/>
       </p:bgPr>
@@ -9603,7 +10220,7 @@
             <a:r>
               <a:rPr sz="1200" b="0">
                 <a:solidFill>
-                  <a:srgbClr val="8B97AE"/>
+                  <a:srgbClr val="6B7280"/>
                 </a:solidFill>
                 <a:latin typeface="Arial"/>
               </a:rPr>
@@ -9645,11 +10262,11 @@
             <a:r>
               <a:rPr sz="1300" b="1">
                 <a:solidFill>
-                  <a:srgbClr val="F0A66B"/>
-                </a:solidFill>
-                <a:latin typeface="Arial"/>
-              </a:rPr>
-              <a:t>TAKEAWAYS</a:t>
+                  <a:srgbClr val="B4541A"/>
+                </a:solidFill>
+                <a:latin typeface="Arial"/>
+              </a:rPr>
+              <a:t>RESULTS</a:t>
             </a:r>
           </a:p>
         </p:txBody>
@@ -9685,36 +10302,64 @@
               </a:spcAft>
             </a:pPr>
             <a:r>
-              <a:rPr sz="3600" b="1">
-                <a:solidFill>
-                  <a:srgbClr val="F7F6F2"/>
+              <a:rPr sz="3000" b="1">
+                <a:solidFill>
+                  <a:srgbClr val="14213D"/>
                 </a:solidFill>
                 <a:latin typeface="Georgia"/>
               </a:rPr>
-              <a:t>Call the team only when you must</a:t>
-            </a:r>
-          </a:p>
-        </p:txBody>
-      </p:sp>
-      <p:sp>
-        <p:nvSpPr>
-          <p:cNvPr id="5" name="Rectangle 4"/>
-          <p:cNvSpPr/>
-          <p:nvPr/>
-        </p:nvSpPr>
-        <p:spPr>
-          <a:xfrm>
-            <a:off x="812800" y="2095500"/>
-            <a:ext cx="3384550" cy="38100"/>
+              <a:t>Without the test, the promise breaks</a:t>
+            </a:r>
+          </a:p>
+        </p:txBody>
+      </p:sp>
+      <p:pic>
+        <p:nvPicPr>
+          <p:cNvPr id="5" name="Picture 4" descr="c_tuned.png"/>
+          <p:cNvPicPr>
+            <a:picLocks noChangeAspect="1"/>
+          </p:cNvPicPr>
+          <p:nvPr/>
+        </p:nvPicPr>
+        <p:blipFill>
+          <a:blip r:embed="rId3"/>
+          <a:stretch>
+            <a:fillRect/>
+          </a:stretch>
+        </p:blipFill>
+        <p:spPr>
+          <a:xfrm>
+            <a:off x="812800" y="1721371"/>
+            <a:ext cx="7302500" cy="4304257"/>
           </a:xfrm>
           <a:prstGeom prst="rect">
             <a:avLst/>
           </a:prstGeom>
+        </p:spPr>
+      </p:pic>
+      <p:sp>
+        <p:nvSpPr>
+          <p:cNvPr id="6" name="Rounded Rectangle 5"/>
+          <p:cNvSpPr/>
+          <p:nvPr/>
+        </p:nvSpPr>
+        <p:spPr>
+          <a:xfrm>
+            <a:off x="8445500" y="2286000"/>
+            <a:ext cx="2933700" cy="1905000"/>
+          </a:xfrm>
+          <a:prstGeom prst="roundRect">
+            <a:avLst>
+              <a:gd name="adj" fmla="val 6000"/>
+            </a:avLst>
+          </a:prstGeom>
           <a:solidFill>
-            <a:srgbClr val="F0A66B"/>
+            <a:srgbClr val="F6E3E0"/>
           </a:solidFill>
-          <a:ln>
-            <a:noFill/>
+          <a:ln w="12700">
+            <a:solidFill>
+              <a:srgbClr val="DDD8CC"/>
+            </a:solidFill>
           </a:ln>
           <a:effectLst/>
         </p:spPr>
@@ -9733,51 +10378,25 @@
           </a:fontRef>
         </p:style>
         <p:txBody>
-          <a:bodyPr rtlCol="0" anchor="ctr"/>
-          <a:lstStyle/>
-          <a:p>
-            <a:pPr algn="ctr"/>
-          </a:p>
-        </p:txBody>
-      </p:sp>
-      <p:sp>
-        <p:nvSpPr>
-          <p:cNvPr id="6" name="TextBox 5"/>
-          <p:cNvSpPr txBox="1"/>
-          <p:nvPr/>
-        </p:nvSpPr>
-        <p:spPr>
-          <a:xfrm>
-            <a:off x="812800" y="2286000"/>
-            <a:ext cx="3384550" cy="1651000"/>
-          </a:xfrm>
-          <a:prstGeom prst="rect">
-            <a:avLst/>
-          </a:prstGeom>
-          <a:noFill/>
-        </p:spPr>
-        <p:txBody>
-          <a:bodyPr wrap="square" lIns="0" rIns="0" tIns="0" bIns="0" anchor="t">
-            <a:spAutoFit/>
-          </a:bodyPr>
+          <a:bodyPr rtlCol="0" anchor="ctr" wrap="square" lIns="190500" rIns="190500" tIns="190500" bIns="190500"/>
           <a:lstStyle/>
           <a:p>
             <a:pPr algn="l">
               <a:lnSpc>
-                <a:spcPct val="115000"/>
-              </a:lnSpc>
-              <a:spcAft>
-                <a:spcPts val="1000"/>
-              </a:spcAft>
-            </a:pPr>
-            <a:r>
-              <a:rPr sz="2800" b="1">
-                <a:solidFill>
-                  <a:srgbClr val="F7F6F2"/>
+                <a:spcPct val="100000"/>
+              </a:lnSpc>
+              <a:spcAft>
+                <a:spcPts val="600"/>
+              </a:spcAft>
+            </a:pPr>
+            <a:r>
+              <a:rPr sz="3600" b="1">
+                <a:solidFill>
+                  <a:srgbClr val="B03A2E"/>
                 </a:solidFill>
                 <a:latin typeface="Georgia"/>
               </a:rPr>
-              <a:t>Teams are costly</a:t>
+              <a:t>31%</a:t>
             </a:r>
           </a:p>
           <a:p>
@@ -9790,307 +10409,13 @@
               </a:spcAft>
             </a:pPr>
             <a:r>
-              <a:rPr sz="2000" b="0">
-                <a:solidFill>
-                  <a:srgbClr val="C9D1E0"/>
-                </a:solidFill>
-                <a:latin typeface="Arial"/>
-              </a:rPr>
-              <a:t>and sometimes break right answers.</a:t>
-            </a:r>
-          </a:p>
-        </p:txBody>
-      </p:sp>
-      <p:sp>
-        <p:nvSpPr>
-          <p:cNvPr id="7" name="Rectangle 6"/>
-          <p:cNvSpPr/>
-          <p:nvPr/>
-        </p:nvSpPr>
-        <p:spPr>
-          <a:xfrm>
-            <a:off x="4400550" y="2095500"/>
-            <a:ext cx="3384550" cy="38100"/>
-          </a:xfrm>
-          <a:prstGeom prst="rect">
-            <a:avLst/>
-          </a:prstGeom>
-          <a:solidFill>
-            <a:srgbClr val="F0A66B"/>
-          </a:solidFill>
-          <a:ln>
-            <a:noFill/>
-          </a:ln>
-          <a:effectLst/>
-        </p:spPr>
-        <p:style>
-          <a:lnRef idx="1">
-            <a:schemeClr val="accent1"/>
-          </a:lnRef>
-          <a:fillRef idx="3">
-            <a:schemeClr val="accent1"/>
-          </a:fillRef>
-          <a:effectRef idx="2">
-            <a:schemeClr val="accent1"/>
-          </a:effectRef>
-          <a:fontRef idx="minor">
-            <a:schemeClr val="lt1"/>
-          </a:fontRef>
-        </p:style>
-        <p:txBody>
-          <a:bodyPr rtlCol="0" anchor="ctr"/>
-          <a:lstStyle/>
-          <a:p>
-            <a:pPr algn="ctr"/>
-          </a:p>
-        </p:txBody>
-      </p:sp>
-      <p:sp>
-        <p:nvSpPr>
-          <p:cNvPr id="8" name="TextBox 7"/>
-          <p:cNvSpPr txBox="1"/>
-          <p:nvPr/>
-        </p:nvSpPr>
-        <p:spPr>
-          <a:xfrm>
-            <a:off x="4400550" y="2286000"/>
-            <a:ext cx="3384550" cy="1651000"/>
-          </a:xfrm>
-          <a:prstGeom prst="rect">
-            <a:avLst/>
-          </a:prstGeom>
-          <a:noFill/>
-        </p:spPr>
-        <p:txBody>
-          <a:bodyPr wrap="square" lIns="0" rIns="0" tIns="0" bIns="0" anchor="t">
-            <a:spAutoFit/>
-          </a:bodyPr>
-          <a:lstStyle/>
-          <a:p>
-            <a:pPr algn="l">
-              <a:lnSpc>
-                <a:spcPct val="115000"/>
-              </a:lnSpc>
-              <a:spcAft>
-                <a:spcPts val="1000"/>
-              </a:spcAft>
-            </a:pPr>
-            <a:r>
-              <a:rPr sz="2800" b="1">
-                <a:solidFill>
-                  <a:srgbClr val="F7F6F2"/>
-                </a:solidFill>
-                <a:latin typeface="Georgia"/>
-              </a:rPr>
-              <a:t>CLIMB keeps a promise</a:t>
-            </a:r>
-          </a:p>
-          <a:p>
-            <a:pPr algn="l">
-              <a:lnSpc>
-                <a:spcPct val="115000"/>
-              </a:lnSpc>
-              <a:spcAft>
-                <a:spcPts val="0"/>
-              </a:spcAft>
-            </a:pPr>
-            <a:r>
-              <a:rPr sz="2000" b="0">
-                <a:solidFill>
-                  <a:srgbClr val="C9D1E0"/>
-                </a:solidFill>
-                <a:latin typeface="Arial"/>
-              </a:rPr>
-              <a:t>you choose the accuracy loss, it finds the cheapest safe rule.</a:t>
-            </a:r>
-          </a:p>
-        </p:txBody>
-      </p:sp>
-      <p:sp>
-        <p:nvSpPr>
-          <p:cNvPr id="9" name="Rectangle 8"/>
-          <p:cNvSpPr/>
-          <p:nvPr/>
-        </p:nvSpPr>
-        <p:spPr>
-          <a:xfrm>
-            <a:off x="7988300" y="2095500"/>
-            <a:ext cx="3384550" cy="38100"/>
-          </a:xfrm>
-          <a:prstGeom prst="rect">
-            <a:avLst/>
-          </a:prstGeom>
-          <a:solidFill>
-            <a:srgbClr val="F0A66B"/>
-          </a:solidFill>
-          <a:ln>
-            <a:noFill/>
-          </a:ln>
-          <a:effectLst/>
-        </p:spPr>
-        <p:style>
-          <a:lnRef idx="1">
-            <a:schemeClr val="accent1"/>
-          </a:lnRef>
-          <a:fillRef idx="3">
-            <a:schemeClr val="accent1"/>
-          </a:fillRef>
-          <a:effectRef idx="2">
-            <a:schemeClr val="accent1"/>
-          </a:effectRef>
-          <a:fontRef idx="minor">
-            <a:schemeClr val="lt1"/>
-          </a:fontRef>
-        </p:style>
-        <p:txBody>
-          <a:bodyPr rtlCol="0" anchor="ctr"/>
-          <a:lstStyle/>
-          <a:p>
-            <a:pPr algn="ctr"/>
-          </a:p>
-        </p:txBody>
-      </p:sp>
-      <p:sp>
-        <p:nvSpPr>
-          <p:cNvPr id="10" name="TextBox 9"/>
-          <p:cNvSpPr txBox="1"/>
-          <p:nvPr/>
-        </p:nvSpPr>
-        <p:spPr>
-          <a:xfrm>
-            <a:off x="7988300" y="2286000"/>
-            <a:ext cx="3384550" cy="1651000"/>
-          </a:xfrm>
-          <a:prstGeom prst="rect">
-            <a:avLst/>
-          </a:prstGeom>
-          <a:noFill/>
-        </p:spPr>
-        <p:txBody>
-          <a:bodyPr wrap="square" lIns="0" rIns="0" tIns="0" bIns="0" anchor="t">
-            <a:spAutoFit/>
-          </a:bodyPr>
-          <a:lstStyle/>
-          <a:p>
-            <a:pPr algn="l">
-              <a:lnSpc>
-                <a:spcPct val="115000"/>
-              </a:lnSpc>
-              <a:spcAft>
-                <a:spcPts val="1000"/>
-              </a:spcAft>
-            </a:pPr>
-            <a:r>
-              <a:rPr sz="2800" b="1">
-                <a:solidFill>
-                  <a:srgbClr val="F7F6F2"/>
-                </a:solidFill>
-                <a:latin typeface="Georgia"/>
-              </a:rPr>
-              <a:t>38–65% saved</a:t>
-            </a:r>
-          </a:p>
-          <a:p>
-            <a:pPr algn="l">
-              <a:lnSpc>
-                <a:spcPct val="115000"/>
-              </a:lnSpc>
-              <a:spcAft>
-                <a:spcPts val="0"/>
-              </a:spcAft>
-            </a:pPr>
-            <a:r>
-              <a:rPr sz="2000" b="0">
-                <a:solidFill>
-                  <a:srgbClr val="C9D1E0"/>
-                </a:solidFill>
-                <a:latin typeface="Arial"/>
-              </a:rPr>
-              <a:t>at 5 and 10 points, with the promise kept.</a:t>
-            </a:r>
-          </a:p>
-        </p:txBody>
-      </p:sp>
-      <p:sp>
-        <p:nvSpPr>
-          <p:cNvPr id="11" name="TextBox 10"/>
-          <p:cNvSpPr txBox="1"/>
-          <p:nvPr/>
-        </p:nvSpPr>
-        <p:spPr>
-          <a:xfrm>
-            <a:off x="812800" y="4699000"/>
-            <a:ext cx="10566400" cy="508000"/>
-          </a:xfrm>
-          <a:prstGeom prst="rect">
-            <a:avLst/>
-          </a:prstGeom>
-          <a:noFill/>
-        </p:spPr>
-        <p:txBody>
-          <a:bodyPr wrap="square" lIns="0" rIns="0" tIns="0" bIns="0" anchor="t">
-            <a:spAutoFit/>
-          </a:bodyPr>
-          <a:lstStyle/>
-          <a:p>
-            <a:pPr algn="l">
-              <a:lnSpc>
-                <a:spcPct val="115000"/>
-              </a:lnSpc>
-              <a:spcAft>
-                <a:spcPts val="0"/>
-              </a:spcAft>
-            </a:pPr>
-            <a:r>
-              <a:rPr sz="1800" b="0">
-                <a:solidFill>
-                  <a:srgbClr val="C9D1E0"/>
-                </a:solidFill>
-                <a:latin typeface="Arial"/>
-              </a:rPr>
-              <a:t>Assumes calibration tasks resemble deployment tasks. Recalibrating takes under a second.</a:t>
-            </a:r>
-          </a:p>
-        </p:txBody>
-      </p:sp>
-      <p:sp>
-        <p:nvSpPr>
-          <p:cNvPr id="12" name="TextBox 11"/>
-          <p:cNvSpPr txBox="1"/>
-          <p:nvPr/>
-        </p:nvSpPr>
-        <p:spPr>
-          <a:xfrm>
-            <a:off x="812800" y="5397500"/>
-            <a:ext cx="10566400" cy="571500"/>
-          </a:xfrm>
-          <a:prstGeom prst="rect">
-            <a:avLst/>
-          </a:prstGeom>
-          <a:noFill/>
-        </p:spPr>
-        <p:txBody>
-          <a:bodyPr wrap="square" lIns="0" rIns="0" tIns="0" bIns="0" anchor="t">
-            <a:spAutoFit/>
-          </a:bodyPr>
-          <a:lstStyle/>
-          <a:p>
-            <a:pPr algn="l">
-              <a:lnSpc>
-                <a:spcPct val="115000"/>
-              </a:lnSpc>
-              <a:spcAft>
-                <a:spcPts val="0"/>
-              </a:spcAft>
-            </a:pPr>
-            <a:r>
-              <a:rPr sz="3600" b="1">
-                <a:solidFill>
-                  <a:srgbClr val="F0A66B"/>
-                </a:solidFill>
-                <a:latin typeface="Georgia"/>
-              </a:rPr>
-              <a:t>Thank you. Questions?</a:t>
+              <a:rPr sz="1700" b="0">
+                <a:solidFill>
+                  <a:srgbClr val="3A4150"/>
+                </a:solidFill>
+                <a:latin typeface="Arial"/>
+              </a:rPr>
+              <a:t>of splits broken at ε = 5 by the tuned rule. CLIMB: 0.6%.</a:t>
             </a:r>
           </a:p>
         </p:txBody>
@@ -11265,6 +11590,557 @@
                 <a:latin typeface="Arial"/>
               </a:rPr>
               <a:t>rejected? revise, up to 5 rounds</a:t>
+            </a:r>
+          </a:p>
+        </p:txBody>
+      </p:sp>
+    </p:spTree>
+  </p:cSld>
+  <p:clrMapOvr>
+    <a:masterClrMapping/>
+  </p:clrMapOvr>
+</p:sld>
+</file>
+
+<file path=ppt/slides/slide20.xml><?xml version="1.0" encoding="utf-8"?>
+<p:sld xmlns:a="http://schemas.openxmlformats.org/drawingml/2006/main" xmlns:p="http://schemas.openxmlformats.org/presentationml/2006/main" xmlns:r="http://schemas.openxmlformats.org/officeDocument/2006/relationships">
+  <p:cSld>
+    <p:bg>
+      <p:bgPr>
+        <a:solidFill>
+          <a:srgbClr val="14213D"/>
+        </a:solidFill>
+        <a:effectLst/>
+      </p:bgPr>
+    </p:bg>
+    <p:spTree>
+      <p:nvGrpSpPr>
+        <p:cNvPr id="1" name=""/>
+        <p:cNvGrpSpPr/>
+        <p:nvPr/>
+      </p:nvGrpSpPr>
+      <p:grpSpPr/>
+      <p:sp>
+        <p:nvSpPr>
+          <p:cNvPr id="2" name="TextBox 1"/>
+          <p:cNvSpPr txBox="1"/>
+          <p:nvPr/>
+        </p:nvSpPr>
+        <p:spPr>
+          <a:xfrm>
+            <a:off x="812800" y="6413500"/>
+            <a:ext cx="10566400" cy="215900"/>
+          </a:xfrm>
+          <a:prstGeom prst="rect">
+            <a:avLst/>
+          </a:prstGeom>
+          <a:noFill/>
+        </p:spPr>
+        <p:txBody>
+          <a:bodyPr wrap="square" lIns="0" rIns="0" tIns="0" bIns="0" anchor="t">
+            <a:spAutoFit/>
+          </a:bodyPr>
+          <a:lstStyle/>
+          <a:p>
+            <a:pPr algn="r">
+              <a:lnSpc>
+                <a:spcPct val="115000"/>
+              </a:lnSpc>
+              <a:spcAft>
+                <a:spcPts val="0"/>
+              </a:spcAft>
+            </a:pPr>
+            <a:r>
+              <a:rPr sz="1200" b="0">
+                <a:solidFill>
+                  <a:srgbClr val="8B97AE"/>
+                </a:solidFill>
+                <a:latin typeface="Arial"/>
+              </a:rPr>
+              <a:t>20</a:t>
+            </a:r>
+          </a:p>
+        </p:txBody>
+      </p:sp>
+      <p:sp>
+        <p:nvSpPr>
+          <p:cNvPr id="3" name="TextBox 2"/>
+          <p:cNvSpPr txBox="1"/>
+          <p:nvPr/>
+        </p:nvSpPr>
+        <p:spPr>
+          <a:xfrm>
+            <a:off x="812800" y="635000"/>
+            <a:ext cx="10566400" cy="254000"/>
+          </a:xfrm>
+          <a:prstGeom prst="rect">
+            <a:avLst/>
+          </a:prstGeom>
+          <a:noFill/>
+        </p:spPr>
+        <p:txBody>
+          <a:bodyPr wrap="square" lIns="0" rIns="0" tIns="0" bIns="0" anchor="t">
+            <a:spAutoFit/>
+          </a:bodyPr>
+          <a:lstStyle/>
+          <a:p>
+            <a:pPr algn="l">
+              <a:lnSpc>
+                <a:spcPct val="115000"/>
+              </a:lnSpc>
+              <a:spcAft>
+                <a:spcPts val="0"/>
+              </a:spcAft>
+            </a:pPr>
+            <a:r>
+              <a:rPr sz="1300" b="1">
+                <a:solidFill>
+                  <a:srgbClr val="F0A66B"/>
+                </a:solidFill>
+                <a:latin typeface="Arial"/>
+              </a:rPr>
+              <a:t>TAKEAWAYS</a:t>
+            </a:r>
+          </a:p>
+        </p:txBody>
+      </p:sp>
+      <p:sp>
+        <p:nvSpPr>
+          <p:cNvPr id="4" name="TextBox 3"/>
+          <p:cNvSpPr txBox="1"/>
+          <p:nvPr/>
+        </p:nvSpPr>
+        <p:spPr>
+          <a:xfrm>
+            <a:off x="812800" y="889000"/>
+            <a:ext cx="10566400" cy="571500"/>
+          </a:xfrm>
+          <a:prstGeom prst="rect">
+            <a:avLst/>
+          </a:prstGeom>
+          <a:noFill/>
+        </p:spPr>
+        <p:txBody>
+          <a:bodyPr wrap="square" lIns="0" rIns="0" tIns="0" bIns="0" anchor="t">
+            <a:spAutoFit/>
+          </a:bodyPr>
+          <a:lstStyle/>
+          <a:p>
+            <a:pPr algn="l">
+              <a:lnSpc>
+                <a:spcPct val="105000"/>
+              </a:lnSpc>
+              <a:spcAft>
+                <a:spcPts val="0"/>
+              </a:spcAft>
+            </a:pPr>
+            <a:r>
+              <a:rPr sz="3600" b="1">
+                <a:solidFill>
+                  <a:srgbClr val="F7F6F2"/>
+                </a:solidFill>
+                <a:latin typeface="Georgia"/>
+              </a:rPr>
+              <a:t>Call the team only when you must</a:t>
+            </a:r>
+          </a:p>
+        </p:txBody>
+      </p:sp>
+      <p:sp>
+        <p:nvSpPr>
+          <p:cNvPr id="5" name="Rectangle 4"/>
+          <p:cNvSpPr/>
+          <p:nvPr/>
+        </p:nvSpPr>
+        <p:spPr>
+          <a:xfrm>
+            <a:off x="812800" y="2095500"/>
+            <a:ext cx="3384550" cy="38100"/>
+          </a:xfrm>
+          <a:prstGeom prst="rect">
+            <a:avLst/>
+          </a:prstGeom>
+          <a:solidFill>
+            <a:srgbClr val="F0A66B"/>
+          </a:solidFill>
+          <a:ln>
+            <a:noFill/>
+          </a:ln>
+          <a:effectLst/>
+        </p:spPr>
+        <p:style>
+          <a:lnRef idx="1">
+            <a:schemeClr val="accent1"/>
+          </a:lnRef>
+          <a:fillRef idx="3">
+            <a:schemeClr val="accent1"/>
+          </a:fillRef>
+          <a:effectRef idx="2">
+            <a:schemeClr val="accent1"/>
+          </a:effectRef>
+          <a:fontRef idx="minor">
+            <a:schemeClr val="lt1"/>
+          </a:fontRef>
+        </p:style>
+        <p:txBody>
+          <a:bodyPr rtlCol="0" anchor="ctr"/>
+          <a:lstStyle/>
+          <a:p>
+            <a:pPr algn="ctr"/>
+          </a:p>
+        </p:txBody>
+      </p:sp>
+      <p:sp>
+        <p:nvSpPr>
+          <p:cNvPr id="6" name="TextBox 5"/>
+          <p:cNvSpPr txBox="1"/>
+          <p:nvPr/>
+        </p:nvSpPr>
+        <p:spPr>
+          <a:xfrm>
+            <a:off x="812800" y="2286000"/>
+            <a:ext cx="3384550" cy="1651000"/>
+          </a:xfrm>
+          <a:prstGeom prst="rect">
+            <a:avLst/>
+          </a:prstGeom>
+          <a:noFill/>
+        </p:spPr>
+        <p:txBody>
+          <a:bodyPr wrap="square" lIns="0" rIns="0" tIns="0" bIns="0" anchor="t">
+            <a:spAutoFit/>
+          </a:bodyPr>
+          <a:lstStyle/>
+          <a:p>
+            <a:pPr algn="l">
+              <a:lnSpc>
+                <a:spcPct val="115000"/>
+              </a:lnSpc>
+              <a:spcAft>
+                <a:spcPts val="1000"/>
+              </a:spcAft>
+            </a:pPr>
+            <a:r>
+              <a:rPr sz="2800" b="1">
+                <a:solidFill>
+                  <a:srgbClr val="F7F6F2"/>
+                </a:solidFill>
+                <a:latin typeface="Georgia"/>
+              </a:rPr>
+              <a:t>Teams are costly</a:t>
+            </a:r>
+          </a:p>
+          <a:p>
+            <a:pPr algn="l">
+              <a:lnSpc>
+                <a:spcPct val="115000"/>
+              </a:lnSpc>
+              <a:spcAft>
+                <a:spcPts val="0"/>
+              </a:spcAft>
+            </a:pPr>
+            <a:r>
+              <a:rPr sz="2000" b="0">
+                <a:solidFill>
+                  <a:srgbClr val="C9D1E0"/>
+                </a:solidFill>
+                <a:latin typeface="Arial"/>
+              </a:rPr>
+              <a:t>and sometimes break right answers.</a:t>
+            </a:r>
+          </a:p>
+        </p:txBody>
+      </p:sp>
+      <p:sp>
+        <p:nvSpPr>
+          <p:cNvPr id="7" name="Rectangle 6"/>
+          <p:cNvSpPr/>
+          <p:nvPr/>
+        </p:nvSpPr>
+        <p:spPr>
+          <a:xfrm>
+            <a:off x="4400550" y="2095500"/>
+            <a:ext cx="3384550" cy="38100"/>
+          </a:xfrm>
+          <a:prstGeom prst="rect">
+            <a:avLst/>
+          </a:prstGeom>
+          <a:solidFill>
+            <a:srgbClr val="F0A66B"/>
+          </a:solidFill>
+          <a:ln>
+            <a:noFill/>
+          </a:ln>
+          <a:effectLst/>
+        </p:spPr>
+        <p:style>
+          <a:lnRef idx="1">
+            <a:schemeClr val="accent1"/>
+          </a:lnRef>
+          <a:fillRef idx="3">
+            <a:schemeClr val="accent1"/>
+          </a:fillRef>
+          <a:effectRef idx="2">
+            <a:schemeClr val="accent1"/>
+          </a:effectRef>
+          <a:fontRef idx="minor">
+            <a:schemeClr val="lt1"/>
+          </a:fontRef>
+        </p:style>
+        <p:txBody>
+          <a:bodyPr rtlCol="0" anchor="ctr"/>
+          <a:lstStyle/>
+          <a:p>
+            <a:pPr algn="ctr"/>
+          </a:p>
+        </p:txBody>
+      </p:sp>
+      <p:sp>
+        <p:nvSpPr>
+          <p:cNvPr id="8" name="TextBox 7"/>
+          <p:cNvSpPr txBox="1"/>
+          <p:nvPr/>
+        </p:nvSpPr>
+        <p:spPr>
+          <a:xfrm>
+            <a:off x="4400550" y="2286000"/>
+            <a:ext cx="3384550" cy="1651000"/>
+          </a:xfrm>
+          <a:prstGeom prst="rect">
+            <a:avLst/>
+          </a:prstGeom>
+          <a:noFill/>
+        </p:spPr>
+        <p:txBody>
+          <a:bodyPr wrap="square" lIns="0" rIns="0" tIns="0" bIns="0" anchor="t">
+            <a:spAutoFit/>
+          </a:bodyPr>
+          <a:lstStyle/>
+          <a:p>
+            <a:pPr algn="l">
+              <a:lnSpc>
+                <a:spcPct val="115000"/>
+              </a:lnSpc>
+              <a:spcAft>
+                <a:spcPts val="1000"/>
+              </a:spcAft>
+            </a:pPr>
+            <a:r>
+              <a:rPr sz="2800" b="1">
+                <a:solidFill>
+                  <a:srgbClr val="F7F6F2"/>
+                </a:solidFill>
+                <a:latin typeface="Georgia"/>
+              </a:rPr>
+              <a:t>CLIMB keeps a promise</a:t>
+            </a:r>
+          </a:p>
+          <a:p>
+            <a:pPr algn="l">
+              <a:lnSpc>
+                <a:spcPct val="115000"/>
+              </a:lnSpc>
+              <a:spcAft>
+                <a:spcPts val="0"/>
+              </a:spcAft>
+            </a:pPr>
+            <a:r>
+              <a:rPr sz="2000" b="0">
+                <a:solidFill>
+                  <a:srgbClr val="C9D1E0"/>
+                </a:solidFill>
+                <a:latin typeface="Arial"/>
+              </a:rPr>
+              <a:t>you set the loss, it finds the cheapest safe rule.</a:t>
+            </a:r>
+          </a:p>
+        </p:txBody>
+      </p:sp>
+      <p:sp>
+        <p:nvSpPr>
+          <p:cNvPr id="9" name="Rectangle 8"/>
+          <p:cNvSpPr/>
+          <p:nvPr/>
+        </p:nvSpPr>
+        <p:spPr>
+          <a:xfrm>
+            <a:off x="7988300" y="2095500"/>
+            <a:ext cx="3384550" cy="38100"/>
+          </a:xfrm>
+          <a:prstGeom prst="rect">
+            <a:avLst/>
+          </a:prstGeom>
+          <a:solidFill>
+            <a:srgbClr val="F0A66B"/>
+          </a:solidFill>
+          <a:ln>
+            <a:noFill/>
+          </a:ln>
+          <a:effectLst/>
+        </p:spPr>
+        <p:style>
+          <a:lnRef idx="1">
+            <a:schemeClr val="accent1"/>
+          </a:lnRef>
+          <a:fillRef idx="3">
+            <a:schemeClr val="accent1"/>
+          </a:fillRef>
+          <a:effectRef idx="2">
+            <a:schemeClr val="accent1"/>
+          </a:effectRef>
+          <a:fontRef idx="minor">
+            <a:schemeClr val="lt1"/>
+          </a:fontRef>
+        </p:style>
+        <p:txBody>
+          <a:bodyPr rtlCol="0" anchor="ctr"/>
+          <a:lstStyle/>
+          <a:p>
+            <a:pPr algn="ctr"/>
+          </a:p>
+        </p:txBody>
+      </p:sp>
+      <p:sp>
+        <p:nvSpPr>
+          <p:cNvPr id="10" name="TextBox 9"/>
+          <p:cNvSpPr txBox="1"/>
+          <p:nvPr/>
+        </p:nvSpPr>
+        <p:spPr>
+          <a:xfrm>
+            <a:off x="7988300" y="2286000"/>
+            <a:ext cx="3384550" cy="1651000"/>
+          </a:xfrm>
+          <a:prstGeom prst="rect">
+            <a:avLst/>
+          </a:prstGeom>
+          <a:noFill/>
+        </p:spPr>
+        <p:txBody>
+          <a:bodyPr wrap="square" lIns="0" rIns="0" tIns="0" bIns="0" anchor="t">
+            <a:spAutoFit/>
+          </a:bodyPr>
+          <a:lstStyle/>
+          <a:p>
+            <a:pPr algn="l">
+              <a:lnSpc>
+                <a:spcPct val="115000"/>
+              </a:lnSpc>
+              <a:spcAft>
+                <a:spcPts val="1000"/>
+              </a:spcAft>
+            </a:pPr>
+            <a:r>
+              <a:rPr sz="2800" b="1">
+                <a:solidFill>
+                  <a:srgbClr val="F7F6F2"/>
+                </a:solidFill>
+                <a:latin typeface="Georgia"/>
+              </a:rPr>
+              <a:t>38–65% saved</a:t>
+            </a:r>
+          </a:p>
+          <a:p>
+            <a:pPr algn="l">
+              <a:lnSpc>
+                <a:spcPct val="115000"/>
+              </a:lnSpc>
+              <a:spcAft>
+                <a:spcPts val="0"/>
+              </a:spcAft>
+            </a:pPr>
+            <a:r>
+              <a:rPr sz="2000" b="0">
+                <a:solidFill>
+                  <a:srgbClr val="C9D1E0"/>
+                </a:solidFill>
+                <a:latin typeface="Arial"/>
+              </a:rPr>
+              <a:t>at 5 and 10 points, with the promise kept.</a:t>
+            </a:r>
+          </a:p>
+        </p:txBody>
+      </p:sp>
+      <p:sp>
+        <p:nvSpPr>
+          <p:cNvPr id="11" name="TextBox 10"/>
+          <p:cNvSpPr txBox="1"/>
+          <p:nvPr/>
+        </p:nvSpPr>
+        <p:spPr>
+          <a:xfrm>
+            <a:off x="812800" y="4699000"/>
+            <a:ext cx="10566400" cy="508000"/>
+          </a:xfrm>
+          <a:prstGeom prst="rect">
+            <a:avLst/>
+          </a:prstGeom>
+          <a:noFill/>
+        </p:spPr>
+        <p:txBody>
+          <a:bodyPr wrap="square" lIns="0" rIns="0" tIns="0" bIns="0" anchor="t">
+            <a:spAutoFit/>
+          </a:bodyPr>
+          <a:lstStyle/>
+          <a:p>
+            <a:pPr algn="l">
+              <a:lnSpc>
+                <a:spcPct val="115000"/>
+              </a:lnSpc>
+              <a:spcAft>
+                <a:spcPts val="0"/>
+              </a:spcAft>
+            </a:pPr>
+            <a:r>
+              <a:rPr sz="1800" b="0">
+                <a:solidFill>
+                  <a:srgbClr val="C9D1E0"/>
+                </a:solidFill>
+                <a:latin typeface="Arial"/>
+              </a:rPr>
+              <a:t>Assumes calibration tasks resemble deployment tasks. Recalibrating takes under a second.</a:t>
+            </a:r>
+          </a:p>
+        </p:txBody>
+      </p:sp>
+      <p:sp>
+        <p:nvSpPr>
+          <p:cNvPr id="12" name="TextBox 11"/>
+          <p:cNvSpPr txBox="1"/>
+          <p:nvPr/>
+        </p:nvSpPr>
+        <p:spPr>
+          <a:xfrm>
+            <a:off x="812800" y="5397500"/>
+            <a:ext cx="10566400" cy="571500"/>
+          </a:xfrm>
+          <a:prstGeom prst="rect">
+            <a:avLst/>
+          </a:prstGeom>
+          <a:noFill/>
+        </p:spPr>
+        <p:txBody>
+          <a:bodyPr wrap="square" lIns="0" rIns="0" tIns="0" bIns="0" anchor="t">
+            <a:spAutoFit/>
+          </a:bodyPr>
+          <a:lstStyle/>
+          <a:p>
+            <a:pPr algn="l">
+              <a:lnSpc>
+                <a:spcPct val="115000"/>
+              </a:lnSpc>
+              <a:spcAft>
+                <a:spcPts val="0"/>
+              </a:spcAft>
+            </a:pPr>
+            <a:r>
+              <a:rPr sz="3600" b="1">
+                <a:solidFill>
+                  <a:srgbClr val="F0A66B"/>
+                </a:solidFill>
+                <a:latin typeface="Georgia"/>
+              </a:rPr>
+              <a:t>Thank you. Questions?</a:t>
             </a:r>
           </a:p>
         </p:txBody>
@@ -12867,7 +13743,69 @@
       </p:sp>
       <p:sp>
         <p:nvSpPr>
-          <p:cNvPr id="5" name="Rectangle 4"/>
+          <p:cNvPr id="5" name="Rounded Rectangle 4"/>
+          <p:cNvSpPr/>
+          <p:nvPr/>
+        </p:nvSpPr>
+        <p:spPr>
+          <a:xfrm>
+            <a:off x="812800" y="1619250"/>
+            <a:ext cx="6731000" cy="508000"/>
+          </a:xfrm>
+          <a:prstGeom prst="roundRect">
+            <a:avLst>
+              <a:gd name="adj" fmla="val 10000"/>
+            </a:avLst>
+          </a:prstGeom>
+          <a:solidFill>
+            <a:srgbClr val="14213D"/>
+          </a:solidFill>
+          <a:ln>
+            <a:noFill/>
+          </a:ln>
+          <a:effectLst/>
+        </p:spPr>
+        <p:style>
+          <a:lnRef idx="1">
+            <a:schemeClr val="accent1"/>
+          </a:lnRef>
+          <a:fillRef idx="3">
+            <a:schemeClr val="accent1"/>
+          </a:fillRef>
+          <a:effectRef idx="2">
+            <a:schemeClr val="accent1"/>
+          </a:effectRef>
+          <a:fontRef idx="minor">
+            <a:schemeClr val="lt1"/>
+          </a:fontRef>
+        </p:style>
+        <p:txBody>
+          <a:bodyPr rtlCol="0" anchor="ctr" wrap="square" lIns="63500" rIns="63500" tIns="63500" bIns="63500"/>
+          <a:lstStyle/>
+          <a:p>
+            <a:pPr algn="l">
+              <a:lnSpc>
+                <a:spcPct val="115000"/>
+              </a:lnSpc>
+              <a:spcAft>
+                <a:spcPts val="0"/>
+              </a:spcAft>
+            </a:pPr>
+            <a:r>
+              <a:rPr sz="2200" b="1">
+                <a:solidFill>
+                  <a:srgbClr val="F0A66B"/>
+                </a:solidFill>
+                <a:latin typeface="Arial"/>
+              </a:rPr>
+              <a:t>The key question: when should a task climb?</a:t>
+            </a:r>
+          </a:p>
+        </p:txBody>
+      </p:sp>
+      <p:sp>
+        <p:nvSpPr>
+          <p:cNvPr id="6" name="Rectangle 5"/>
           <p:cNvSpPr/>
           <p:nvPr/>
         </p:nvSpPr>
@@ -12948,7 +13886,7 @@
       </p:sp>
       <p:sp>
         <p:nvSpPr>
-          <p:cNvPr id="6" name="TextBox 5"/>
+          <p:cNvPr id="7" name="TextBox 6"/>
           <p:cNvSpPr txBox="1"/>
           <p:nvPr/>
         </p:nvSpPr>
@@ -12991,7 +13929,7 @@
       </p:sp>
       <p:sp>
         <p:nvSpPr>
-          <p:cNvPr id="7" name="Right Arrow 6"/>
+          <p:cNvPr id="8" name="Right Arrow 7"/>
           <p:cNvSpPr/>
           <p:nvPr/>
         </p:nvSpPr>
@@ -13035,7 +13973,7 @@
       </p:sp>
       <p:sp>
         <p:nvSpPr>
-          <p:cNvPr id="8" name="Rectangle 7"/>
+          <p:cNvPr id="9" name="Rectangle 8"/>
           <p:cNvSpPr/>
           <p:nvPr/>
         </p:nvSpPr>
@@ -13116,7 +14054,7 @@
       </p:sp>
       <p:sp>
         <p:nvSpPr>
-          <p:cNvPr id="9" name="TextBox 8"/>
+          <p:cNvPr id="10" name="TextBox 9"/>
           <p:cNvSpPr txBox="1"/>
           <p:nvPr/>
         </p:nvSpPr>
@@ -13159,7 +14097,7 @@
       </p:sp>
       <p:sp>
         <p:nvSpPr>
-          <p:cNvPr id="10" name="Right Arrow 9"/>
+          <p:cNvPr id="11" name="Right Arrow 10"/>
           <p:cNvSpPr/>
           <p:nvPr/>
         </p:nvSpPr>
@@ -13203,7 +14141,7 @@
       </p:sp>
       <p:sp>
         <p:nvSpPr>
-          <p:cNvPr id="11" name="Rectangle 10"/>
+          <p:cNvPr id="12" name="Rectangle 11"/>
           <p:cNvSpPr/>
           <p:nvPr/>
         </p:nvSpPr>
@@ -13284,7 +14222,7 @@
       </p:sp>
       <p:sp>
         <p:nvSpPr>
-          <p:cNvPr id="12" name="TextBox 11"/>
+          <p:cNvPr id="13" name="TextBox 12"/>
           <p:cNvSpPr txBox="1"/>
           <p:nvPr/>
         </p:nvSpPr>
@@ -13326,7 +14264,7 @@
       </p:sp>
       <p:sp>
         <p:nvSpPr>
-          <p:cNvPr id="13" name="TextBox 12"/>
+          <p:cNvPr id="14" name="TextBox 13"/>
           <p:cNvSpPr txBox="1"/>
           <p:nvPr/>
         </p:nvSpPr>
@@ -13368,7 +14306,7 @@
       </p:sp>
       <p:sp>
         <p:nvSpPr>
-          <p:cNvPr id="14" name="TextBox 13"/>
+          <p:cNvPr id="15" name="TextBox 14"/>
           <p:cNvSpPr txBox="1"/>
           <p:nvPr/>
         </p:nvSpPr>
@@ -13422,7 +14360,7 @@
     <p:bg>
       <p:bgPr>
         <a:solidFill>
-          <a:srgbClr val="F7F6F2"/>
+          <a:srgbClr val="14213D"/>
         </a:solidFill>
         <a:effectLst/>
       </p:bgPr>
@@ -13467,7 +14405,7 @@
             <a:r>
               <a:rPr sz="1200" b="0">
                 <a:solidFill>
-                  <a:srgbClr val="6B7280"/>
+                  <a:srgbClr val="8B97AE"/>
                 </a:solidFill>
                 <a:latin typeface="Arial"/>
               </a:rPr>
@@ -13509,11 +14447,11 @@
             <a:r>
               <a:rPr sz="1300" b="1">
                 <a:solidFill>
-                  <a:srgbClr val="B4541A"/>
-                </a:solidFill>
-                <a:latin typeface="Arial"/>
-              </a:rPr>
-              <a:t>SIGNALS</a:t>
+                  <a:srgbClr val="F0A66B"/>
+                </a:solidFill>
+                <a:latin typeface="Arial"/>
+              </a:rPr>
+              <a:t>HOW TO CLIMB</a:t>
             </a:r>
           </a:p>
         </p:txBody>
@@ -13549,64 +14487,38 @@
               </a:spcAft>
             </a:pPr>
             <a:r>
-              <a:rPr sz="3000" b="1">
-                <a:solidFill>
-                  <a:srgbClr val="14213D"/>
+              <a:rPr sz="3400" b="1">
+                <a:solidFill>
+                  <a:srgbClr val="F7F6F2"/>
                 </a:solidFill>
                 <a:latin typeface="Georgia"/>
               </a:rPr>
-              <a:t>Signal 1: how confident is the direct answer?</a:t>
-            </a:r>
-          </a:p>
-        </p:txBody>
-      </p:sp>
-      <p:pic>
-        <p:nvPicPr>
-          <p:cNvPr id="5" name="Picture 4" descr="c_auroc.png"/>
-          <p:cNvPicPr>
-            <a:picLocks noChangeAspect="1"/>
-          </p:cNvPicPr>
-          <p:nvPr/>
-        </p:nvPicPr>
-        <p:blipFill>
-          <a:blip r:embed="rId3"/>
-          <a:stretch>
-            <a:fillRect/>
-          </a:stretch>
-        </p:blipFill>
-        <p:spPr>
-          <a:xfrm>
-            <a:off x="812800" y="2046894"/>
-            <a:ext cx="7302500" cy="3653211"/>
-          </a:xfrm>
-          <a:prstGeom prst="rect">
-            <a:avLst/>
-          </a:prstGeom>
-        </p:spPr>
-      </p:pic>
-      <p:sp>
-        <p:nvSpPr>
-          <p:cNvPr id="6" name="Rounded Rectangle 5"/>
+              <a:t>Deciding when to climb: four questions</a:t>
+            </a:r>
+          </a:p>
+        </p:txBody>
+      </p:sp>
+      <p:sp>
+        <p:nvSpPr>
+          <p:cNvPr id="5" name="Rounded Rectangle 4"/>
           <p:cNvSpPr/>
           <p:nvPr/>
         </p:nvSpPr>
         <p:spPr>
           <a:xfrm>
-            <a:off x="8445500" y="2095500"/>
-            <a:ext cx="2933700" cy="1651000"/>
+            <a:off x="812800" y="1841500"/>
+            <a:ext cx="2451100" cy="3429000"/>
           </a:xfrm>
           <a:prstGeom prst="roundRect">
             <a:avLst>
-              <a:gd name="adj" fmla="val 6923"/>
+              <a:gd name="adj" fmla="val 4663"/>
             </a:avLst>
           </a:prstGeom>
           <a:solidFill>
-            <a:srgbClr val="E2EAF5"/>
+            <a:srgbClr val="1F2F52"/>
           </a:solidFill>
-          <a:ln w="12700">
-            <a:solidFill>
-              <a:srgbClr val="DDD8CC"/>
-            </a:solidFill>
+          <a:ln>
+            <a:noFill/>
           </a:ln>
           <a:effectLst/>
         </p:spPr>
@@ -13625,25 +14537,25 @@
           </a:fontRef>
         </p:style>
         <p:txBody>
-          <a:bodyPr rtlCol="0" anchor="ctr" wrap="square" lIns="190500" rIns="190500" tIns="190500" bIns="190500"/>
+          <a:bodyPr rtlCol="0" anchor="t" wrap="square" lIns="177800" rIns="177800" tIns="177800" bIns="177800"/>
           <a:lstStyle/>
           <a:p>
             <a:pPr algn="l">
               <a:lnSpc>
-                <a:spcPct val="100000"/>
-              </a:lnSpc>
-              <a:spcAft>
-                <a:spcPts val="600"/>
+                <a:spcPct val="115000"/>
+              </a:lnSpc>
+              <a:spcAft>
+                <a:spcPts val="400"/>
               </a:spcAft>
             </a:pPr>
             <a:r>
               <a:rPr sz="3600" b="1">
                 <a:solidFill>
-                  <a:srgbClr val="2E5C99"/>
+                  <a:srgbClr val="F0A66B"/>
                 </a:solidFill>
                 <a:latin typeface="Georgia"/>
               </a:rPr>
-              <a:t>usually helps</a:t>
+              <a:t>1</a:t>
             </a:r>
           </a:p>
           <a:p>
@@ -13652,44 +14564,80 @@
                 <a:spcPct val="115000"/>
               </a:lnSpc>
               <a:spcAft>
-                <a:spcPts val="0"/>
-              </a:spcAft>
-            </a:pPr>
-            <a:r>
-              <a:rPr sz="1700" b="0">
-                <a:solidFill>
-                  <a:srgbClr val="3A4150"/>
-                </a:solidFill>
-                <a:latin typeface="Arial"/>
-              </a:rPr>
-              <a:t>confident answers tend to be right</a:t>
-            </a:r>
-          </a:p>
-        </p:txBody>
-      </p:sp>
-      <p:sp>
-        <p:nvSpPr>
-          <p:cNvPr id="7" name="Rounded Rectangle 6"/>
+                <a:spcPts val="1200"/>
+              </a:spcAft>
+            </a:pPr>
+            <a:r>
+              <a:rPr sz="2400" b="1">
+                <a:solidFill>
+                  <a:srgbClr val="F7F6F2"/>
+                </a:solidFill>
+                <a:latin typeface="Arial"/>
+              </a:rPr>
+              <a:t>Signal</a:t>
+            </a:r>
+          </a:p>
+          <a:p>
+            <a:pPr algn="l">
+              <a:lnSpc>
+                <a:spcPct val="115000"/>
+              </a:lnSpc>
+              <a:spcAft>
+                <a:spcPts val="1600"/>
+              </a:spcAft>
+            </a:pPr>
+            <a:r>
+              <a:rPr sz="1800" b="0">
+                <a:solidFill>
+                  <a:srgbClr val="C9D1E0"/>
+                </a:solidFill>
+                <a:latin typeface="Arial"/>
+              </a:rPr>
+              <a:t>Does the cheap answer look right?</a:t>
+            </a:r>
+          </a:p>
+          <a:p>
+            <a:pPr algn="l">
+              <a:lnSpc>
+                <a:spcPct val="115000"/>
+              </a:lnSpc>
+              <a:spcAft>
+                <a:spcPts val="0"/>
+              </a:spcAft>
+            </a:pPr>
+            <a:r>
+              <a:rPr sz="1800" b="1">
+                <a:solidFill>
+                  <a:srgbClr val="F0A66B"/>
+                </a:solidFill>
+                <a:latin typeface="Arial"/>
+              </a:rPr>
+              <a:t>→ confidence and agreement</a:t>
+            </a:r>
+          </a:p>
+        </p:txBody>
+      </p:sp>
+      <p:sp>
+        <p:nvSpPr>
+          <p:cNvPr id="6" name="Rounded Rectangle 5"/>
           <p:cNvSpPr/>
           <p:nvPr/>
         </p:nvSpPr>
         <p:spPr>
           <a:xfrm>
-            <a:off x="8445500" y="4000500"/>
-            <a:ext cx="2933700" cy="1651000"/>
+            <a:off x="3517900" y="1841500"/>
+            <a:ext cx="2451100" cy="3429000"/>
           </a:xfrm>
           <a:prstGeom prst="roundRect">
             <a:avLst>
-              <a:gd name="adj" fmla="val 6923"/>
+              <a:gd name="adj" fmla="val 4663"/>
             </a:avLst>
           </a:prstGeom>
           <a:solidFill>
-            <a:srgbClr val="F6E3E0"/>
+            <a:srgbClr val="1F2F52"/>
           </a:solidFill>
-          <a:ln w="12700">
-            <a:solidFill>
-              <a:srgbClr val="DDD8CC"/>
-            </a:solidFill>
+          <a:ln>
+            <a:noFill/>
           </a:ln>
           <a:effectLst/>
         </p:spPr>
@@ -13708,25 +14656,25 @@
           </a:fontRef>
         </p:style>
         <p:txBody>
-          <a:bodyPr rtlCol="0" anchor="ctr" wrap="square" lIns="190500" rIns="190500" tIns="190500" bIns="190500"/>
+          <a:bodyPr rtlCol="0" anchor="t" wrap="square" lIns="177800" rIns="177800" tIns="177800" bIns="177800"/>
           <a:lstStyle/>
           <a:p>
             <a:pPr algn="l">
               <a:lnSpc>
-                <a:spcPct val="100000"/>
-              </a:lnSpc>
-              <a:spcAft>
-                <a:spcPts val="600"/>
+                <a:spcPct val="115000"/>
+              </a:lnSpc>
+              <a:spcAft>
+                <a:spcPts val="400"/>
               </a:spcAft>
             </a:pPr>
             <a:r>
               <a:rPr sz="3600" b="1">
                 <a:solidFill>
-                  <a:srgbClr val="B03A2E"/>
+                  <a:srgbClr val="F0A66B"/>
                 </a:solidFill>
                 <a:latin typeface="Georgia"/>
               </a:rPr>
-              <a:t>3 of 12</a:t>
+              <a:t>2</a:t>
             </a:r>
           </a:p>
           <a:p>
@@ -13735,17 +14683,335 @@
                 <a:spcPct val="115000"/>
               </a:lnSpc>
               <a:spcAft>
-                <a:spcPts val="0"/>
-              </a:spcAft>
-            </a:pPr>
-            <a:r>
-              <a:rPr sz="1700" b="0">
-                <a:solidFill>
-                  <a:srgbClr val="3A4150"/>
-                </a:solidFill>
-                <a:latin typeface="Arial"/>
-              </a:rPr>
-              <a:t>settings where it points the wrong way</a:t>
+                <a:spcPts val="1200"/>
+              </a:spcAft>
+            </a:pPr>
+            <a:r>
+              <a:rPr sz="2400" b="1">
+                <a:solidFill>
+                  <a:srgbClr val="F7F6F2"/>
+                </a:solidFill>
+                <a:latin typeface="Arial"/>
+              </a:rPr>
+              <a:t>Rule</a:t>
+            </a:r>
+          </a:p>
+          <a:p>
+            <a:pPr algn="l">
+              <a:lnSpc>
+                <a:spcPct val="115000"/>
+              </a:lnSpc>
+              <a:spcAft>
+                <a:spcPts val="1600"/>
+              </a:spcAft>
+            </a:pPr>
+            <a:r>
+              <a:rPr sz="1800" b="0">
+                <a:solidFill>
+                  <a:srgbClr val="C9D1E0"/>
+                </a:solidFill>
+                <a:latin typeface="Arial"/>
+              </a:rPr>
+              <a:t>Where do we draw the line?</a:t>
+            </a:r>
+          </a:p>
+          <a:p>
+            <a:pPr algn="l">
+              <a:lnSpc>
+                <a:spcPct val="115000"/>
+              </a:lnSpc>
+              <a:spcAft>
+                <a:spcPts val="0"/>
+              </a:spcAft>
+            </a:pPr>
+            <a:r>
+              <a:rPr sz="1800" b="1">
+                <a:solidFill>
+                  <a:srgbClr val="F0A66B"/>
+                </a:solidFill>
+                <a:latin typeface="Arial"/>
+              </a:rPr>
+              <a:t>→ a threshold on the score</a:t>
+            </a:r>
+          </a:p>
+        </p:txBody>
+      </p:sp>
+      <p:sp>
+        <p:nvSpPr>
+          <p:cNvPr id="7" name="Rounded Rectangle 6"/>
+          <p:cNvSpPr/>
+          <p:nvPr/>
+        </p:nvSpPr>
+        <p:spPr>
+          <a:xfrm>
+            <a:off x="6223000" y="1841500"/>
+            <a:ext cx="2451100" cy="3429000"/>
+          </a:xfrm>
+          <a:prstGeom prst="roundRect">
+            <a:avLst>
+              <a:gd name="adj" fmla="val 4663"/>
+            </a:avLst>
+          </a:prstGeom>
+          <a:solidFill>
+            <a:srgbClr val="1F2F52"/>
+          </a:solidFill>
+          <a:ln>
+            <a:noFill/>
+          </a:ln>
+          <a:effectLst/>
+        </p:spPr>
+        <p:style>
+          <a:lnRef idx="1">
+            <a:schemeClr val="accent1"/>
+          </a:lnRef>
+          <a:fillRef idx="3">
+            <a:schemeClr val="accent1"/>
+          </a:fillRef>
+          <a:effectRef idx="2">
+            <a:schemeClr val="accent1"/>
+          </a:effectRef>
+          <a:fontRef idx="minor">
+            <a:schemeClr val="lt1"/>
+          </a:fontRef>
+        </p:style>
+        <p:txBody>
+          <a:bodyPr rtlCol="0" anchor="t" wrap="square" lIns="177800" rIns="177800" tIns="177800" bIns="177800"/>
+          <a:lstStyle/>
+          <a:p>
+            <a:pPr algn="l">
+              <a:lnSpc>
+                <a:spcPct val="115000"/>
+              </a:lnSpc>
+              <a:spcAft>
+                <a:spcPts val="400"/>
+              </a:spcAft>
+            </a:pPr>
+            <a:r>
+              <a:rPr sz="3600" b="1">
+                <a:solidFill>
+                  <a:srgbClr val="F0A66B"/>
+                </a:solidFill>
+                <a:latin typeface="Georgia"/>
+              </a:rPr>
+              <a:t>3</a:t>
+            </a:r>
+          </a:p>
+          <a:p>
+            <a:pPr algn="l">
+              <a:lnSpc>
+                <a:spcPct val="115000"/>
+              </a:lnSpc>
+              <a:spcAft>
+                <a:spcPts val="1200"/>
+              </a:spcAft>
+            </a:pPr>
+            <a:r>
+              <a:rPr sz="2400" b="1">
+                <a:solidFill>
+                  <a:srgbClr val="F7F6F2"/>
+                </a:solidFill>
+                <a:latin typeface="Arial"/>
+              </a:rPr>
+              <a:t>Check</a:t>
+            </a:r>
+          </a:p>
+          <a:p>
+            <a:pPr algn="l">
+              <a:lnSpc>
+                <a:spcPct val="115000"/>
+              </a:lnSpc>
+              <a:spcAft>
+                <a:spcPts val="1600"/>
+              </a:spcAft>
+            </a:pPr>
+            <a:r>
+              <a:rPr sz="1800" b="0">
+                <a:solidFill>
+                  <a:srgbClr val="C9D1E0"/>
+                </a:solidFill>
+                <a:latin typeface="Arial"/>
+              </a:rPr>
+              <a:t>Is that line safe?</a:t>
+            </a:r>
+          </a:p>
+          <a:p>
+            <a:pPr algn="l">
+              <a:lnSpc>
+                <a:spcPct val="115000"/>
+              </a:lnSpc>
+              <a:spcAft>
+                <a:spcPts val="0"/>
+              </a:spcAft>
+            </a:pPr>
+            <a:r>
+              <a:rPr sz="1800" b="1">
+                <a:solidFill>
+                  <a:srgbClr val="F0A66B"/>
+                </a:solidFill>
+                <a:latin typeface="Arial"/>
+              </a:rPr>
+              <a:t>→ a test with a guarantee</a:t>
+            </a:r>
+          </a:p>
+        </p:txBody>
+      </p:sp>
+      <p:sp>
+        <p:nvSpPr>
+          <p:cNvPr id="8" name="Rounded Rectangle 7"/>
+          <p:cNvSpPr/>
+          <p:nvPr/>
+        </p:nvSpPr>
+        <p:spPr>
+          <a:xfrm>
+            <a:off x="8928100" y="1841500"/>
+            <a:ext cx="2451100" cy="3429000"/>
+          </a:xfrm>
+          <a:prstGeom prst="roundRect">
+            <a:avLst>
+              <a:gd name="adj" fmla="val 4663"/>
+            </a:avLst>
+          </a:prstGeom>
+          <a:solidFill>
+            <a:srgbClr val="1F2F52"/>
+          </a:solidFill>
+          <a:ln>
+            <a:noFill/>
+          </a:ln>
+          <a:effectLst/>
+        </p:spPr>
+        <p:style>
+          <a:lnRef idx="1">
+            <a:schemeClr val="accent1"/>
+          </a:lnRef>
+          <a:fillRef idx="3">
+            <a:schemeClr val="accent1"/>
+          </a:fillRef>
+          <a:effectRef idx="2">
+            <a:schemeClr val="accent1"/>
+          </a:effectRef>
+          <a:fontRef idx="minor">
+            <a:schemeClr val="lt1"/>
+          </a:fontRef>
+        </p:style>
+        <p:txBody>
+          <a:bodyPr rtlCol="0" anchor="t" wrap="square" lIns="177800" rIns="177800" tIns="177800" bIns="177800"/>
+          <a:lstStyle/>
+          <a:p>
+            <a:pPr algn="l">
+              <a:lnSpc>
+                <a:spcPct val="115000"/>
+              </a:lnSpc>
+              <a:spcAft>
+                <a:spcPts val="400"/>
+              </a:spcAft>
+            </a:pPr>
+            <a:r>
+              <a:rPr sz="3600" b="1">
+                <a:solidFill>
+                  <a:srgbClr val="F0A66B"/>
+                </a:solidFill>
+                <a:latin typeface="Georgia"/>
+              </a:rPr>
+              <a:t>4</a:t>
+            </a:r>
+          </a:p>
+          <a:p>
+            <a:pPr algn="l">
+              <a:lnSpc>
+                <a:spcPct val="115000"/>
+              </a:lnSpc>
+              <a:spcAft>
+                <a:spcPts val="1200"/>
+              </a:spcAft>
+            </a:pPr>
+            <a:r>
+              <a:rPr sz="2400" b="1">
+                <a:solidFill>
+                  <a:srgbClr val="F7F6F2"/>
+                </a:solidFill>
+                <a:latin typeface="Arial"/>
+              </a:rPr>
+              <a:t>Depth</a:t>
+            </a:r>
+          </a:p>
+          <a:p>
+            <a:pPr algn="l">
+              <a:lnSpc>
+                <a:spcPct val="115000"/>
+              </a:lnSpc>
+              <a:spcAft>
+                <a:spcPts val="1600"/>
+              </a:spcAft>
+            </a:pPr>
+            <a:r>
+              <a:rPr sz="1800" b="0">
+                <a:solidFill>
+                  <a:srgbClr val="C9D1E0"/>
+                </a:solidFill>
+                <a:latin typeface="Arial"/>
+              </a:rPr>
+              <a:t>Look one rung up or two?</a:t>
+            </a:r>
+          </a:p>
+          <a:p>
+            <a:pPr algn="l">
+              <a:lnSpc>
+                <a:spcPct val="115000"/>
+              </a:lnSpc>
+              <a:spcAft>
+                <a:spcPts val="0"/>
+              </a:spcAft>
+            </a:pPr>
+            <a:r>
+              <a:rPr sz="1800" b="1">
+                <a:solidFill>
+                  <a:srgbClr val="F0A66B"/>
+                </a:solidFill>
+                <a:latin typeface="Arial"/>
+              </a:rPr>
+              <a:t>→ let the data choose</a:t>
+            </a:r>
+          </a:p>
+        </p:txBody>
+      </p:sp>
+      <p:sp>
+        <p:nvSpPr>
+          <p:cNvPr id="9" name="TextBox 8"/>
+          <p:cNvSpPr txBox="1"/>
+          <p:nvPr/>
+        </p:nvSpPr>
+        <p:spPr>
+          <a:xfrm>
+            <a:off x="812800" y="5524500"/>
+            <a:ext cx="10566400" cy="381000"/>
+          </a:xfrm>
+          <a:prstGeom prst="rect">
+            <a:avLst/>
+          </a:prstGeom>
+          <a:noFill/>
+        </p:spPr>
+        <p:txBody>
+          <a:bodyPr wrap="square" lIns="0" rIns="0" tIns="0" bIns="0" anchor="t">
+            <a:spAutoFit/>
+          </a:bodyPr>
+          <a:lstStyle/>
+          <a:p>
+            <a:pPr algn="l">
+              <a:lnSpc>
+                <a:spcPct val="115000"/>
+              </a:lnSpc>
+              <a:spcAft>
+                <a:spcPts val="0"/>
+              </a:spcAft>
+            </a:pPr>
+            <a:r>
+              <a:rPr sz="2000" b="0">
+                <a:solidFill>
+                  <a:srgbClr val="C9D1E0"/>
+                </a:solidFill>
+                <a:latin typeface="Arial"/>
+              </a:rPr>
+              <a:t>No rule passes the check?  →  always call the team.  Worst case: no savings, never lost accuracy.</a:t>
             </a:r>
           </a:p>
         </p:txBody>
@@ -13855,7 +15121,7 @@
                 </a:solidFill>
                 <a:latin typeface="Arial"/>
               </a:rPr>
-              <a:t>SIGNALS</a:t>
+              <a:t>HOW TO CLIMB · 1 SIGNAL</a:t>
             </a:r>
           </a:p>
         </p:txBody>
@@ -13897,14 +15163,14 @@
                 </a:solidFill>
                 <a:latin typeface="Georgia"/>
               </a:rPr>
-              <a:t>Signal 2: do two cheap answers agree?</a:t>
+              <a:t>Is the direct answer confident?</a:t>
             </a:r>
           </a:p>
         </p:txBody>
       </p:sp>
       <p:pic>
         <p:nvPicPr>
-          <p:cNvPr id="5" name="Picture 4" descr="c_agree.png"/>
+          <p:cNvPr id="5" name="Picture 4" descr="c_auroc.png"/>
           <p:cNvPicPr>
             <a:picLocks noChangeAspect="1"/>
           </p:cNvPicPr>
@@ -13918,8 +15184,8 @@
         </p:blipFill>
         <p:spPr>
           <a:xfrm>
-            <a:off x="812800" y="1922942"/>
-            <a:ext cx="7302500" cy="3901114"/>
+            <a:off x="812800" y="2046894"/>
+            <a:ext cx="7302500" cy="3653211"/>
           </a:xfrm>
           <a:prstGeom prst="rect">
             <a:avLst/>
@@ -13934,16 +15200,16 @@
         </p:nvSpPr>
         <p:spPr>
           <a:xfrm>
-            <a:off x="8445500" y="2286000"/>
-            <a:ext cx="2933700" cy="1905000"/>
+            <a:off x="8445500" y="2095500"/>
+            <a:ext cx="2933700" cy="1651000"/>
           </a:xfrm>
           <a:prstGeom prst="roundRect">
             <a:avLst>
-              <a:gd name="adj" fmla="val 6000"/>
+              <a:gd name="adj" fmla="val 6923"/>
             </a:avLst>
           </a:prstGeom>
           <a:solidFill>
-            <a:srgbClr val="E3ECE2"/>
+            <a:srgbClr val="E2EAF5"/>
           </a:solidFill>
           <a:ln w="12700">
             <a:solidFill>
@@ -13981,11 +15247,11 @@
             <a:r>
               <a:rPr sz="3600" b="1">
                 <a:solidFill>
-                  <a:srgbClr val="2F6B34"/>
+                  <a:srgbClr val="2E5C99"/>
                 </a:solidFill>
                 <a:latin typeface="Georgia"/>
               </a:rPr>
-              <a:t>agree</a:t>
+              <a:t>usually helps</a:t>
             </a:r>
           </a:p>
           <a:p>
@@ -14004,49 +15270,90 @@
                 </a:solidFill>
                 <a:latin typeface="Arial"/>
               </a:rPr>
-              <a:t>→ the single agent is usually right</a:t>
-            </a:r>
-          </a:p>
-        </p:txBody>
-      </p:sp>
-      <p:sp>
-        <p:nvSpPr>
-          <p:cNvPr id="7" name="TextBox 6"/>
-          <p:cNvSpPr txBox="1"/>
-          <p:nvPr/>
-        </p:nvSpPr>
-        <p:spPr>
-          <a:xfrm>
-            <a:off x="8445500" y="4445000"/>
-            <a:ext cx="2933700" cy="1270000"/>
-          </a:xfrm>
-          <a:prstGeom prst="rect">
-            <a:avLst/>
-          </a:prstGeom>
-          <a:noFill/>
-        </p:spPr>
-        <p:txBody>
-          <a:bodyPr wrap="square" lIns="0" rIns="0" tIns="0" bIns="0" anchor="t">
-            <a:spAutoFit/>
-          </a:bodyPr>
+              <a:t>confident answers tend to be right</a:t>
+            </a:r>
+          </a:p>
+        </p:txBody>
+      </p:sp>
+      <p:sp>
+        <p:nvSpPr>
+          <p:cNvPr id="7" name="Rounded Rectangle 6"/>
+          <p:cNvSpPr/>
+          <p:nvPr/>
+        </p:nvSpPr>
+        <p:spPr>
+          <a:xfrm>
+            <a:off x="8445500" y="4000500"/>
+            <a:ext cx="2933700" cy="1651000"/>
+          </a:xfrm>
+          <a:prstGeom prst="roundRect">
+            <a:avLst>
+              <a:gd name="adj" fmla="val 6923"/>
+            </a:avLst>
+          </a:prstGeom>
+          <a:solidFill>
+            <a:srgbClr val="F6E3E0"/>
+          </a:solidFill>
+          <a:ln w="12700">
+            <a:solidFill>
+              <a:srgbClr val="DDD8CC"/>
+            </a:solidFill>
+          </a:ln>
+          <a:effectLst/>
+        </p:spPr>
+        <p:style>
+          <a:lnRef idx="1">
+            <a:schemeClr val="accent1"/>
+          </a:lnRef>
+          <a:fillRef idx="3">
+            <a:schemeClr val="accent1"/>
+          </a:fillRef>
+          <a:effectRef idx="2">
+            <a:schemeClr val="accent1"/>
+          </a:effectRef>
+          <a:fontRef idx="minor">
+            <a:schemeClr val="lt1"/>
+          </a:fontRef>
+        </p:style>
+        <p:txBody>
+          <a:bodyPr rtlCol="0" anchor="ctr" wrap="square" lIns="190500" rIns="190500" tIns="190500" bIns="190500"/>
           <a:lstStyle/>
           <a:p>
             <a:pPr algn="l">
               <a:lnSpc>
-                <a:spcPct val="115000"/>
-              </a:lnSpc>
-              <a:spcAft>
-                <a:spcPts val="0"/>
-              </a:spcAft>
-            </a:pPr>
-            <a:r>
-              <a:rPr sz="1800" b="0">
-                <a:solidFill>
-                  <a:srgbClr val="6B7280"/>
-                </a:solidFill>
-                <a:latin typeface="Arial"/>
-              </a:rPr>
-              <a:t>Neither answer sees the other, so agreement costs nothing extra.</a:t>
+                <a:spcPct val="100000"/>
+              </a:lnSpc>
+              <a:spcAft>
+                <a:spcPts val="600"/>
+              </a:spcAft>
+            </a:pPr>
+            <a:r>
+              <a:rPr sz="3600" b="1">
+                <a:solidFill>
+                  <a:srgbClr val="B03A2E"/>
+                </a:solidFill>
+                <a:latin typeface="Georgia"/>
+              </a:rPr>
+              <a:t>3 of 12</a:t>
+            </a:r>
+          </a:p>
+          <a:p>
+            <a:pPr algn="l">
+              <a:lnSpc>
+                <a:spcPct val="115000"/>
+              </a:lnSpc>
+              <a:spcAft>
+                <a:spcPts val="0"/>
+              </a:spcAft>
+            </a:pPr>
+            <a:r>
+              <a:rPr sz="1700" b="0">
+                <a:solidFill>
+                  <a:srgbClr val="3A4150"/>
+                </a:solidFill>
+                <a:latin typeface="Arial"/>
+              </a:rPr>
+              <a:t>settings where it points the wrong way</a:t>
             </a:r>
           </a:p>
         </p:txBody>
@@ -14156,7 +15463,7 @@
                 </a:solidFill>
                 <a:latin typeface="Arial"/>
               </a:rPr>
-              <a:t>THE PROBLEM</a:t>
+              <a:t>HOW TO CLIMB · 1 SIGNAL</a:t>
             </a:r>
           </a:p>
         </p:txBody>
@@ -14198,14 +15505,14 @@
                 </a:solidFill>
                 <a:latin typeface="Georgia"/>
               </a:rPr>
-              <a:t>Guessing a rule can go badly</a:t>
+              <a:t>Do two cheap answers agree?</a:t>
             </a:r>
           </a:p>
         </p:txBody>
       </p:sp>
       <p:pic>
         <p:nvPicPr>
-          <p:cNvPr id="5" name="Picture 4" descr="c_maxloss.png"/>
+          <p:cNvPr id="5" name="Picture 4" descr="c_agree.png"/>
           <p:cNvPicPr>
             <a:picLocks noChangeAspect="1"/>
           </p:cNvPicPr>
@@ -14219,8 +15526,8 @@
         </p:blipFill>
         <p:spPr>
           <a:xfrm>
-            <a:off x="812800" y="2379642"/>
-            <a:ext cx="7302500" cy="2987715"/>
+            <a:off x="812800" y="1922942"/>
+            <a:ext cx="7302500" cy="3901114"/>
           </a:xfrm>
           <a:prstGeom prst="rect">
             <a:avLst/>
@@ -14235,16 +15542,16 @@
         </p:nvSpPr>
         <p:spPr>
           <a:xfrm>
-            <a:off x="8445500" y="2286000"/>
-            <a:ext cx="2933700" cy="1905000"/>
+            <a:off x="8445500" y="2095500"/>
+            <a:ext cx="2933700" cy="1651000"/>
           </a:xfrm>
           <a:prstGeom prst="roundRect">
             <a:avLst>
-              <a:gd name="adj" fmla="val 6000"/>
+              <a:gd name="adj" fmla="val 6923"/>
             </a:avLst>
           </a:prstGeom>
           <a:solidFill>
-            <a:srgbClr val="F6E3E0"/>
+            <a:srgbClr val="E3ECE2"/>
           </a:solidFill>
           <a:ln w="12700">
             <a:solidFill>
@@ -14282,11 +15589,11 @@
             <a:r>
               <a:rPr sz="3600" b="1">
                 <a:solidFill>
-                  <a:srgbClr val="B03A2E"/>
+                  <a:srgbClr val="2F6B34"/>
                 </a:solidFill>
                 <a:latin typeface="Georgia"/>
               </a:rPr>
-              <a:t>16 points</a:t>
+              <a:t>agree</a:t>
             </a:r>
           </a:p>
           <a:p>
@@ -14305,31 +15612,51 @@
                 </a:solidFill>
                 <a:latin typeface="Arial"/>
               </a:rPr>
-              <a:t>lost by a hand-picked threshold on one setting</a:t>
-            </a:r>
-          </a:p>
-        </p:txBody>
-      </p:sp>
-      <p:sp>
-        <p:nvSpPr>
-          <p:cNvPr id="7" name="TextBox 6"/>
-          <p:cNvSpPr txBox="1"/>
-          <p:nvPr/>
-        </p:nvSpPr>
-        <p:spPr>
-          <a:xfrm>
-            <a:off x="8445500" y="4445000"/>
-            <a:ext cx="2933700" cy="1270000"/>
-          </a:xfrm>
-          <a:prstGeom prst="rect">
-            <a:avLst/>
-          </a:prstGeom>
-          <a:noFill/>
-        </p:spPr>
-        <p:txBody>
-          <a:bodyPr wrap="square" lIns="0" rIns="0" tIns="0" bIns="0" anchor="t">
-            <a:spAutoFit/>
-          </a:bodyPr>
+              <a:t>→ the single agent is usually right</a:t>
+            </a:r>
+          </a:p>
+        </p:txBody>
+      </p:sp>
+      <p:sp>
+        <p:nvSpPr>
+          <p:cNvPr id="7" name="Rounded Rectangle 6"/>
+          <p:cNvSpPr/>
+          <p:nvPr/>
+        </p:nvSpPr>
+        <p:spPr>
+          <a:xfrm>
+            <a:off x="8445500" y="4000500"/>
+            <a:ext cx="2933700" cy="1651000"/>
+          </a:xfrm>
+          <a:prstGeom prst="roundRect">
+            <a:avLst>
+              <a:gd name="adj" fmla="val 6923"/>
+            </a:avLst>
+          </a:prstGeom>
+          <a:solidFill>
+            <a:srgbClr val="14213D"/>
+          </a:solidFill>
+          <a:ln>
+            <a:noFill/>
+          </a:ln>
+          <a:effectLst/>
+        </p:spPr>
+        <p:style>
+          <a:lnRef idx="1">
+            <a:schemeClr val="accent1"/>
+          </a:lnRef>
+          <a:fillRef idx="3">
+            <a:schemeClr val="accent1"/>
+          </a:fillRef>
+          <a:effectRef idx="2">
+            <a:schemeClr val="accent1"/>
+          </a:effectRef>
+          <a:fontRef idx="minor">
+            <a:schemeClr val="lt1"/>
+          </a:fontRef>
+        </p:style>
+        <p:txBody>
+          <a:bodyPr rtlCol="0" anchor="ctr" wrap="square" lIns="190500" rIns="190500" tIns="190500" bIns="190500"/>
           <a:lstStyle/>
           <a:p>
             <a:pPr algn="l">
@@ -14337,17 +15664,36 @@
                 <a:spcPct val="115000"/>
               </a:lnSpc>
               <a:spcAft>
-                <a:spcPts val="0"/>
-              </a:spcAft>
-            </a:pPr>
-            <a:r>
-              <a:rPr sz="1800" b="0">
-                <a:solidFill>
-                  <a:srgbClr val="6B7280"/>
-                </a:solidFill>
-                <a:latin typeface="Arial"/>
-              </a:rPr>
-              <a:t>Nothing at deployment says which setting will go wrong.</a:t>
+                <a:spcPts val="800"/>
+              </a:spcAft>
+            </a:pPr>
+            <a:r>
+              <a:rPr sz="2600" b="1">
+                <a:solidFill>
+                  <a:srgbClr val="F0A66B"/>
+                </a:solidFill>
+                <a:latin typeface="Arial"/>
+              </a:rPr>
+              <a:t>One score</a:t>
+            </a:r>
+          </a:p>
+          <a:p>
+            <a:pPr algn="l">
+              <a:lnSpc>
+                <a:spcPct val="115000"/>
+              </a:lnSpc>
+              <a:spcAft>
+                <a:spcPts val="0"/>
+              </a:spcAft>
+            </a:pPr>
+            <a:r>
+              <a:rPr sz="1700" b="0">
+                <a:solidFill>
+                  <a:srgbClr val="F7F6F2"/>
+                </a:solidFill>
+                <a:latin typeface="Arial"/>
+              </a:rPr>
+              <a:t>agreeing tasks first, then by confidence</a:t>
             </a:r>
           </a:p>
         </p:txBody>

--- a/slides/CLIMB_talk.pptx
+++ b/slides/CLIMB_talk.pptx
@@ -25,6 +25,8 @@
     <p:sldId id="273" r:id="rId25"/>
     <p:sldId id="274" r:id="rId26"/>
     <p:sldId id="275" r:id="rId27"/>
+    <p:sldId id="276" r:id="rId28"/>
+    <p:sldId id="277" r:id="rId29"/>
   </p:sldIdLst>
   <p:sldSz cx="12192000" cy="6858000" type="screen4x3"/>
   <p:notesSz cx="6858000" cy="9144000"/>
@@ -731,7 +733,7 @@
           <a:lstStyle/>
           <a:p>
             <a:r>
-              <a:t>Here is how the check runs, on real data: gpt-oss-120b on MuSiQue. Each dot is one candidate threshold. On the left, almost everything goes to the team: safe but expensive. Moving right, more tasks stop early: cheaper but riskier. CLIMB tests them in this order and stops at the first one that fails. It deploys the cheapest one that passed, the star, at 57 percent of the tokens. Some grey dots are still under the line: the test is cautious, it needs evidence.</a:t>
+              <a:t>How do we check one rule? Imagine a gambler who bets that the rule is safe. He starts with one dollar. We reveal the calibration tasks one by one. If the rule gives the same result as the team, which is most tasks, he wins a little. If it loses an answer the team got right, he loses a lot. If it saves an answer the team broke, he wins a lot. If his money ever reaches 20 dollars, the rule passes. On the chart, the green rule loses half a point and he gets rich quickly. The red one loses 6 points and he goes broke. The bet size follows how much the earlier tasks varied, so a rule that rarely changes anything is bet on hard.</a:t>
             </a:r>
           </a:p>
         </p:txBody>
@@ -801,7 +803,7 @@
           <a:lstStyle/>
           <a:p>
             <a:r>
-              <a:t>How does the test decide pass or fail for one threshold? Think of a gambler who bets that skipping the team is harmless. Start with one dollar. For each calibration task, if skipping did no harm, the gambler wins a little. If it broke an answer, the gambler loses. If the wealth ever reaches 20 times the start, the rule passes. A safe rule makes the gambler rich fast. A rule that loses 6 points makes the gambler broke. The bet size adapts to how often skipping changes anything, which makes the test efficient.</a:t>
+              <a:t>Why should reaching 20 convince us? Suppose the rule is actually bad, so it loses more than the tolerance. Then every bet loses money on average, so the gambler's average wealth stays at most one dollar. His money can never go negative. If he reached 20 dollars more than 1 time in 20, those cases alone would push his average above one dollar. That is impossible. So a bad rule passes at most 5 percent of the time. Twenty is just one over five percent. Stopping as soon as he reaches 20 is covered too: freeze the money there and the same argument holds. We check two families of rules, each at 5 percent, so 90 percent overall.</a:t>
             </a:r>
           </a:p>
         </p:txBody>
@@ -871,7 +873,7 @@
           <a:lstStyle/>
           <a:p>
             <a:r>
-              <a:t>One detail makes the check much sharper. Skipping the team is not only a risk: sometimes the cheap answer is right and the team would have broken it. Usual tests count only the losses. CLIMB's bet counts both sides, so saved answers offset lost ones. On the right, every test is valid, but they certify very different savings: a worst-case bound certifies nothing, ignoring saved answers keeps 79 percent of tokens, CLIMB's test 62.</a:t>
+              <a:t>Now many rules. We order them from safe to risky. Moving right, more tasks stop early: cheaper but riskier. We run the betting test on each, in this order, and stop at the first failure. Then we deploy the cheapest one that passed, the star, at 57 percent of the team's tokens. Because we stop at the first failure, testing many rules adds no extra risk: to pass a bad rule, the first bad rule in the line would have to pass, and that happens at most 5 percent of the time. This is the direct-answer family. The same runs for the two-rung family, and CLIMB keeps the cheaper one.</a:t>
             </a:r>
           </a:p>
         </p:txBody>
@@ -941,7 +943,7 @@
           <a:lstStyle/>
           <a:p>
             <a:r>
-              <a:t>Question four: how far up the ladder should we look before deciding? Option A stops after the direct answer when it is confident. Option B also runs the single agent and stops when the two agree. Which is cheaper depends on the model and the task, so CLIMB checks both on the calibration data and deploys the cheaper one that passes, splitting the error budget between them. If neither passes, it always calls the team.</a:t>
+              <a:t>One detail makes the check much sharper. Skipping the team is not only a risk: sometimes the cheap answer is right and the team would have broken it. Usual tests count only the losses. CLIMB's bet counts both sides, so saved answers offset lost ones. On the right, every test is valid, but they certify very different savings: a worst-case bound certifies nothing, ignoring saved answers keeps 79 percent of tokens, CLIMB's test 62.</a:t>
             </a:r>
           </a:p>
         </p:txBody>
@@ -1011,7 +1013,7 @@
           <a:lstStyle/>
           <a:p>
             <a:r>
-              <a:t>We test on three open models and four benchmarks: math, two open-book question answering sets, and hard reasoning. We record every rung for every task once, then replay 200 random splits: half to calibrate CLIMB, half to evaluate it.</a:t>
+              <a:t>Question four: how far up the ladder should we look before deciding? Option A stops after the direct answer when it is confident. Option B also runs the single agent and stops when the two agree. Which is cheaper depends on the model and the task, so CLIMB checks both on the calibration data and deploys the cheaper one that passes, splitting the error budget between them. If neither passes, it always calls the team.</a:t>
             </a:r>
           </a:p>
         </p:txBody>
@@ -1081,7 +1083,7 @@
           <a:lstStyle/>
           <a:p>
             <a:r>
-              <a:t>Does the promise hold? For each setting, the share of splits where CLIMB lost more than its tolerance. The guarantee allows up to 10 percent. We see at most 2 percent. A separate check with 5,000 random calibration draws per setting gives at most 3.4 percent.</a:t>
+              <a:t>We test on three open models and four benchmarks: math, two open-book question answering sets, and hard reasoning. We record every rung for every task once, then replay 200 random splits: half to calibrate CLIMB, half to evaluate it.</a:t>
             </a:r>
           </a:p>
         </p:txBody>
@@ -1151,7 +1153,7 @@
           <a:lstStyle/>
           <a:p>
             <a:r>
-              <a:t>How much does it save? Each bar is the share of the team's tokens CLIMB uses. At a 5 point tolerance it saves 38 percent on average, at 10 points 65 percent. Savings are smallest where confidence points the wrong way, on Gemma, and the guarantee still holds there: CLIMB just calls the team more often.</a:t>
+              <a:t>Does the promise hold? For each setting, the share of splits where CLIMB lost more than its tolerance. The guarantee allows up to 10 percent. We see at most 2 percent. A separate check with 5,000 random calibration draws per setting gives at most 3.4 percent.</a:t>
             </a:r>
           </a:p>
         </p:txBody>
@@ -1221,7 +1223,7 @@
           <a:lstStyle/>
           <a:p>
             <a:r>
-              <a:t>Why not just tune the threshold on the same data, without the test? It is cheaper on paper, but it breaks the promise: at 5 points it fails on 31 percent of splits on average, against at most 2 percent for CLIMB. A rule tuned to the edge on one sample tends to cross it on the next. The extra tokens CLIMB spends are the price of the guarantee.</a:t>
+              <a:t>How much does it save? Each bar is the share of the team's tokens CLIMB uses. At a 5 point tolerance it saves 38 percent on average, at 10 points 65 percent. Savings are smallest where confidence points the wrong way, on Gemma, and the guarantee still holds there: CLIMB just calls the team more often.</a:t>
             </a:r>
           </a:p>
         </p:txBody>
@@ -1361,7 +1363,147 @@
           <a:lstStyle/>
           <a:p>
             <a:r>
+              <a:t>Why not just tune the threshold on the same data, without the test? It is cheaper on paper, but it breaks the promise: at 5 points it fails on 31 percent of splits on average, against at most 2 percent for CLIMB. A rule tuned to the edge on one sample tends to cross it on the next. The extra tokens CLIMB spends are the price of the guarantee.</a:t>
+            </a:r>
+          </a:p>
+        </p:txBody>
+      </p:sp>
+      <p:sp>
+        <p:nvSpPr>
+          <p:cNvPr id="4" name="Slide Number Placeholder 3"/>
+          <p:cNvSpPr>
+            <a:spLocks noGrp="1"/>
+          </p:cNvSpPr>
+          <p:nvPr>
+            <p:ph type="sldNum" idx="5" sz="quarter"/>
+          </p:nvPr>
+        </p:nvSpPr>
+        <p:spPr/>
+      </p:sp>
+    </p:spTree>
+  </p:cSld>
+  <p:clrMapOvr>
+    <a:masterClrMapping/>
+  </p:clrMapOvr>
+</p:notes>
+</file>
+
+<file path=ppt/notesSlides/notesSlide21.xml><?xml version="1.0" encoding="utf-8"?>
+<p:notes xmlns:a="http://schemas.openxmlformats.org/drawingml/2006/main" xmlns:p="http://schemas.openxmlformats.org/presentationml/2006/main" xmlns:r="http://schemas.openxmlformats.org/officeDocument/2006/relationships">
+  <p:cSld>
+    <p:spTree>
+      <p:nvGrpSpPr>
+        <p:cNvPr id="1" name=""/>
+        <p:cNvGrpSpPr/>
+        <p:nvPr/>
+      </p:nvGrpSpPr>
+      <p:grpSpPr>
+        <a:xfrm>
+          <a:off x="0" y="0"/>
+          <a:ext cx="0" cy="0"/>
+          <a:chOff x="0" y="0"/>
+          <a:chExt cx="0" cy="0"/>
+        </a:xfrm>
+      </p:grpSpPr>
+      <p:sp>
+        <p:nvSpPr>
+          <p:cNvPr id="2" name="Slide Image Placeholder 1"/>
+          <p:cNvSpPr>
+            <a:spLocks noGrp="1"/>
+          </p:cNvSpPr>
+          <p:nvPr>
+            <p:ph type="sldImg" idx="2"/>
+          </p:nvPr>
+        </p:nvSpPr>
+        <p:spPr/>
+      </p:sp>
+      <p:sp>
+        <p:nvSpPr>
+          <p:cNvPr id="3" name="Notes Placeholder 2"/>
+          <p:cNvSpPr>
+            <a:spLocks noGrp="1"/>
+          </p:cNvSpPr>
+          <p:nvPr>
+            <p:ph type="body" idx="3" sz="quarter"/>
+          </p:nvPr>
+        </p:nvSpPr>
+        <p:spPr/>
+        <p:txBody>
+          <a:bodyPr/>
+          <a:lstStyle/>
+          <a:p>
+            <a:r>
               <a:t>To sum up. Agent teams are expensive and sometimes hurt. CLIMB calls them only when cheaper answers cannot be certified, keeps a user-chosen accuracy promise, and saves 38 to 65 percent of tokens. The guarantee assumes calibration tasks look like deployment tasks. Thank you.</a:t>
+            </a:r>
+          </a:p>
+        </p:txBody>
+      </p:sp>
+      <p:sp>
+        <p:nvSpPr>
+          <p:cNvPr id="4" name="Slide Number Placeholder 3"/>
+          <p:cNvSpPr>
+            <a:spLocks noGrp="1"/>
+          </p:cNvSpPr>
+          <p:nvPr>
+            <p:ph type="sldNum" idx="5" sz="quarter"/>
+          </p:nvPr>
+        </p:nvSpPr>
+        <p:spPr/>
+      </p:sp>
+    </p:spTree>
+  </p:cSld>
+  <p:clrMapOvr>
+    <a:masterClrMapping/>
+  </p:clrMapOvr>
+</p:notes>
+</file>
+
+<file path=ppt/notesSlides/notesSlide22.xml><?xml version="1.0" encoding="utf-8"?>
+<p:notes xmlns:a="http://schemas.openxmlformats.org/drawingml/2006/main" xmlns:p="http://schemas.openxmlformats.org/presentationml/2006/main" xmlns:r="http://schemas.openxmlformats.org/officeDocument/2006/relationships">
+  <p:cSld>
+    <p:spTree>
+      <p:nvGrpSpPr>
+        <p:cNvPr id="1" name=""/>
+        <p:cNvGrpSpPr/>
+        <p:nvPr/>
+      </p:nvGrpSpPr>
+      <p:grpSpPr>
+        <a:xfrm>
+          <a:off x="0" y="0"/>
+          <a:ext cx="0" cy="0"/>
+          <a:chOff x="0" y="0"/>
+          <a:chExt cx="0" cy="0"/>
+        </a:xfrm>
+      </p:grpSpPr>
+      <p:sp>
+        <p:nvSpPr>
+          <p:cNvPr id="2" name="Slide Image Placeholder 1"/>
+          <p:cNvSpPr>
+            <a:spLocks noGrp="1"/>
+          </p:cNvSpPr>
+          <p:nvPr>
+            <p:ph type="sldImg" idx="2"/>
+          </p:nvPr>
+        </p:nvSpPr>
+        <p:spPr/>
+      </p:sp>
+      <p:sp>
+        <p:nvSpPr>
+          <p:cNvPr id="3" name="Notes Placeholder 2"/>
+          <p:cNvSpPr>
+            <a:spLocks noGrp="1"/>
+          </p:cNvSpPr>
+          <p:nvPr>
+            <p:ph type="body" idx="3" sz="quarter"/>
+          </p:nvPr>
+        </p:nvSpPr>
+        <p:spPr/>
+        <p:txBody>
+          <a:bodyPr/>
+          <a:lstStyle/>
+          <a:p>
+            <a:r>
+              <a:t>Finally, what this could offer Amex. First, token spend. CLIMB only needs a score and a few hundred labelled tasks, so it can sit in front of any multi-agent workflow. Closed APIs often hide log-probabilities. We can still get them: feed the closed model's answer to an open model and read off each token's log-probability, the way PPO's reference model scores tokens written by another policy. The agreement of two cheap calls needs no log-probabilities at all. The guarantee holds whatever score we plug in: a weaker score saves less, it does not break the promise. We have not tested these proxy log-probabilities yet, so treat that part as a proposal. Second, design insights. More agents is not always better: reviewers pass many wrong drafts and teams break some right answers. Route each task instead of fixing one design for all. Cheap signals such as agreement are strong. And any routing rule, from model cascades to human review, can be given the same kind of guarantee. Thank you.</a:t>
             </a:r>
           </a:p>
         </p:txBody>
@@ -1501,7 +1643,7 @@
           <a:lstStyle/>
           <a:p>
             <a:r>
-              <a:t>But the accuracy comes at a price, in two ways. Left: the team uses 1.3 to 6.3 times the tokens of a single agent, because planner, executor and reviewer each add calls, for up to five rounds. Right: against the single agent, green bars are wrong answers the team fixes, red bars are right answers it breaks, up to 9 percent of tasks. So the team is better on balance, but it is expensive and not uniformly better.</a:t>
+              <a:t>The accuracy comes at a price, in two ways. Left: the team uses 1.3 to 6.3 times the tokens of a single agent, because planner, executor and reviewer each add calls, for up to five rounds. Right: against the single agent, green bars are wrong answers the team fixes, red bars are right answers it breaks, up to 9 percent of tasks. So the team is better on balance, but it is expensive and not uniformly better.</a:t>
             </a:r>
           </a:p>
         </p:txBody>
@@ -4853,7 +4995,7 @@
     <p:bg>
       <p:bgPr>
         <a:solidFill>
-          <a:srgbClr val="14213D"/>
+          <a:srgbClr val="F6F8FB"/>
         </a:solidFill>
         <a:effectLst/>
       </p:bgPr>
@@ -4898,7 +5040,7 @@
             <a:r>
               <a:rPr sz="1600" b="1">
                 <a:solidFill>
-                  <a:srgbClr val="F0A66B"/>
+                  <a:srgbClr val="006FCF"/>
                 </a:solidFill>
                 <a:latin typeface="Arial"/>
               </a:rPr>
@@ -4940,7 +5082,7 @@
             <a:r>
               <a:rPr sz="5600" b="1">
                 <a:solidFill>
-                  <a:srgbClr val="F7F6F2"/>
+                  <a:srgbClr val="00175A"/>
                 </a:solidFill>
                 <a:latin typeface="Georgia"/>
               </a:rPr>
@@ -4982,7 +5124,7 @@
             <a:r>
               <a:rPr sz="2400" b="0">
                 <a:solidFill>
-                  <a:srgbClr val="C9D1E0"/>
+                  <a:srgbClr val="333B47"/>
                 </a:solidFill>
                 <a:latin typeface="Arial"/>
               </a:rPr>
@@ -5006,7 +5148,7 @@
             <a:avLst/>
           </a:prstGeom>
           <a:solidFill>
-            <a:srgbClr val="F0A66B"/>
+            <a:srgbClr val="006FCF"/>
           </a:solidFill>
           <a:ln>
             <a:noFill/>
@@ -5068,7 +5210,7 @@
             <a:r>
               <a:rPr sz="1800" b="0">
                 <a:solidFill>
-                  <a:srgbClr val="C9D1E0"/>
+                  <a:srgbClr val="6B7480"/>
                 </a:solidFill>
                 <a:latin typeface="Arial"/>
               </a:rPr>
@@ -5091,7 +5233,7 @@
     <p:bg>
       <p:bgPr>
         <a:solidFill>
-          <a:srgbClr val="F7F6F2"/>
+          <a:srgbClr val="F6F8FB"/>
         </a:solidFill>
         <a:effectLst/>
       </p:bgPr>
@@ -5136,7 +5278,7 @@
             <a:r>
               <a:rPr sz="1200" b="0">
                 <a:solidFill>
-                  <a:srgbClr val="6B7280"/>
+                  <a:srgbClr val="6B7480"/>
                 </a:solidFill>
                 <a:latin typeface="Arial"/>
               </a:rPr>
@@ -5178,7 +5320,7 @@
             <a:r>
               <a:rPr sz="1300" b="1">
                 <a:solidFill>
-                  <a:srgbClr val="B4541A"/>
+                  <a:srgbClr val="006FCF"/>
                 </a:solidFill>
                 <a:latin typeface="Arial"/>
               </a:rPr>
@@ -5220,7 +5362,7 @@
             <a:r>
               <a:rPr sz="3000" b="1">
                 <a:solidFill>
-                  <a:srgbClr val="14213D"/>
+                  <a:srgbClr val="00175A"/>
                 </a:solidFill>
                 <a:latin typeface="Georgia"/>
               </a:rPr>
@@ -5274,7 +5416,7 @@
           </a:solidFill>
           <a:ln w="12700">
             <a:solidFill>
-              <a:srgbClr val="DDD8CC"/>
+              <a:srgbClr val="D3DCE8"/>
             </a:solidFill>
           </a:ln>
           <a:effectLst/>
@@ -5327,7 +5469,7 @@
             <a:r>
               <a:rPr sz="1700" b="0">
                 <a:solidFill>
-                  <a:srgbClr val="3A4150"/>
+                  <a:srgbClr val="333B47"/>
                 </a:solidFill>
                 <a:latin typeface="Arial"/>
               </a:rPr>
@@ -5369,7 +5511,7 @@
             <a:r>
               <a:rPr sz="1800" b="0">
                 <a:solidFill>
-                  <a:srgbClr val="6B7280"/>
+                  <a:srgbClr val="6B7480"/>
                 </a:solidFill>
                 <a:latin typeface="Arial"/>
               </a:rPr>
@@ -5392,7 +5534,7 @@
     <p:bg>
       <p:bgPr>
         <a:solidFill>
-          <a:srgbClr val="F7F6F2"/>
+          <a:srgbClr val="F6F8FB"/>
         </a:solidFill>
         <a:effectLst/>
       </p:bgPr>
@@ -5437,7 +5579,7 @@
             <a:r>
               <a:rPr sz="1200" b="0">
                 <a:solidFill>
-                  <a:srgbClr val="6B7280"/>
+                  <a:srgbClr val="6B7480"/>
                 </a:solidFill>
                 <a:latin typeface="Arial"/>
               </a:rPr>
@@ -5479,7 +5621,7 @@
             <a:r>
               <a:rPr sz="1300" b="1">
                 <a:solidFill>
-                  <a:srgbClr val="B4541A"/>
+                  <a:srgbClr val="006FCF"/>
                 </a:solidFill>
                 <a:latin typeface="Arial"/>
               </a:rPr>
@@ -5521,7 +5663,7 @@
             <a:r>
               <a:rPr sz="3000" b="1">
                 <a:solidFill>
-                  <a:srgbClr val="14213D"/>
+                  <a:srgbClr val="00175A"/>
                 </a:solidFill>
                 <a:latin typeface="Georgia"/>
               </a:rPr>
@@ -5547,11 +5689,11 @@
             </a:avLst>
           </a:prstGeom>
           <a:solidFill>
-            <a:srgbClr val="F8E8DC"/>
+            <a:srgbClr val="DDEDFB"/>
           </a:solidFill>
           <a:ln w="31750">
             <a:solidFill>
-              <a:srgbClr val="B4541A"/>
+              <a:srgbClr val="006FCF"/>
             </a:solidFill>
           </a:ln>
           <a:effectLst/>
@@ -5585,7 +5727,7 @@
             <a:r>
               <a:rPr sz="2400" b="1">
                 <a:solidFill>
-                  <a:srgbClr val="B4541A"/>
+                  <a:srgbClr val="006FCF"/>
                 </a:solidFill>
                 <a:latin typeface="Arial"/>
               </a:rPr>
@@ -5604,7 +5746,7 @@
             <a:r>
               <a:rPr sz="1900" b="0">
                 <a:solidFill>
-                  <a:srgbClr val="14213D"/>
+                  <a:srgbClr val="00175A"/>
                 </a:solidFill>
                 <a:latin typeface="Arial"/>
               </a:rPr>
@@ -5628,7 +5770,7 @@
             <a:avLst/>
           </a:prstGeom>
           <a:solidFill>
-            <a:srgbClr val="6B7280"/>
+            <a:srgbClr val="6B7480"/>
           </a:solidFill>
           <a:ln>
             <a:noFill/>
@@ -5674,7 +5816,7 @@
             </a:avLst>
           </a:prstGeom>
           <a:solidFill>
-            <a:srgbClr val="14213D"/>
+            <a:srgbClr val="00175A"/>
           </a:solidFill>
           <a:ln>
             <a:noFill/>
@@ -5710,7 +5852,7 @@
             <a:r>
               <a:rPr sz="2400" b="1">
                 <a:solidFill>
-                  <a:srgbClr val="F0A66B"/>
+                  <a:srgbClr val="66B2F0"/>
                 </a:solidFill>
                 <a:latin typeface="Arial"/>
               </a:rPr>
@@ -5729,7 +5871,7 @@
             <a:r>
               <a:rPr sz="1900" b="0">
                 <a:solidFill>
-                  <a:srgbClr val="F7F6F2"/>
+                  <a:srgbClr val="F6F8FB"/>
                 </a:solidFill>
                 <a:latin typeface="Arial"/>
               </a:rPr>
@@ -5753,7 +5895,7 @@
             <a:avLst/>
           </a:prstGeom>
           <a:solidFill>
-            <a:srgbClr val="6B7280"/>
+            <a:srgbClr val="6B7480"/>
           </a:solidFill>
           <a:ln>
             <a:noFill/>
@@ -5856,7 +5998,7 @@
             <a:r>
               <a:rPr sz="1900" b="0">
                 <a:solidFill>
-                  <a:srgbClr val="14213D"/>
+                  <a:srgbClr val="00175A"/>
                 </a:solidFill>
                 <a:latin typeface="Arial"/>
               </a:rPr>
@@ -5882,11 +6024,11 @@
             </a:avLst>
           </a:prstGeom>
           <a:solidFill>
-            <a:srgbClr val="FDFCF9"/>
+            <a:srgbClr val="FFFFFF"/>
           </a:solidFill>
           <a:ln w="12700">
             <a:solidFill>
-              <a:srgbClr val="DDD8CC"/>
+              <a:srgbClr val="D3DCE8"/>
             </a:solidFill>
           </a:ln>
           <a:effectLst/>
@@ -5920,7 +6062,7 @@
             <a:r>
               <a:rPr sz="2000" b="1">
                 <a:solidFill>
-                  <a:srgbClr val="14213D"/>
+                  <a:srgbClr val="00175A"/>
                 </a:solidFill>
                 <a:latin typeface="Arial"/>
               </a:rPr>
@@ -5943,7 +6085,7 @@
     <p:bg>
       <p:bgPr>
         <a:solidFill>
-          <a:srgbClr val="F7F6F2"/>
+          <a:srgbClr val="F6F8FB"/>
         </a:solidFill>
         <a:effectLst/>
       </p:bgPr>
@@ -5988,7 +6130,7 @@
             <a:r>
               <a:rPr sz="1200" b="0">
                 <a:solidFill>
-                  <a:srgbClr val="6B7280"/>
+                  <a:srgbClr val="6B7480"/>
                 </a:solidFill>
                 <a:latin typeface="Arial"/>
               </a:rPr>
@@ -6030,7 +6172,7 @@
             <a:r>
               <a:rPr sz="1300" b="1">
                 <a:solidFill>
-                  <a:srgbClr val="B4541A"/>
+                  <a:srgbClr val="006FCF"/>
                 </a:solidFill>
                 <a:latin typeface="Arial"/>
               </a:rPr>
@@ -6072,18 +6214,18 @@
             <a:r>
               <a:rPr sz="3000" b="1">
                 <a:solidFill>
-                  <a:srgbClr val="14213D"/>
+                  <a:srgbClr val="00175A"/>
                 </a:solidFill>
                 <a:latin typeface="Georgia"/>
               </a:rPr>
-              <a:t>Test from safe to risky, keep the cheapest that passes</a:t>
+              <a:t>Each test is a betting game</a:t>
             </a:r>
           </a:p>
         </p:txBody>
       </p:sp>
       <p:pic>
         <p:nvPicPr>
-          <p:cNvPr id="5" name="Picture 4" descr="c_sweep.png"/>
+          <p:cNvPr id="5" name="Picture 4" descr="c_wealth.png"/>
           <p:cNvPicPr>
             <a:picLocks noChangeAspect="1"/>
           </p:cNvPicPr>
@@ -6097,8 +6239,8 @@
         </p:blipFill>
         <p:spPr>
           <a:xfrm>
-            <a:off x="2179492" y="1587500"/>
-            <a:ext cx="7833014" cy="4445000"/>
+            <a:off x="812800" y="1915559"/>
+            <a:ext cx="6985000" cy="3788881"/>
           </a:xfrm>
           <a:prstGeom prst="rect">
             <a:avLst/>
@@ -6107,14 +6249,74 @@
       </p:pic>
       <p:sp>
         <p:nvSpPr>
-          <p:cNvPr id="6" name="TextBox 5"/>
+          <p:cNvPr id="6" name="Oval 5"/>
+          <p:cNvSpPr/>
+          <p:nvPr/>
+        </p:nvSpPr>
+        <p:spPr>
+          <a:xfrm>
+            <a:off x="8191500" y="1841500"/>
+            <a:ext cx="444500" cy="444500"/>
+          </a:xfrm>
+          <a:prstGeom prst="ellipse">
+            <a:avLst/>
+          </a:prstGeom>
+          <a:solidFill>
+            <a:srgbClr val="006FCF"/>
+          </a:solidFill>
+          <a:ln>
+            <a:noFill/>
+          </a:ln>
+          <a:effectLst/>
+        </p:spPr>
+        <p:style>
+          <a:lnRef idx="1">
+            <a:schemeClr val="accent1"/>
+          </a:lnRef>
+          <a:fillRef idx="3">
+            <a:schemeClr val="accent1"/>
+          </a:fillRef>
+          <a:effectRef idx="2">
+            <a:schemeClr val="accent1"/>
+          </a:effectRef>
+          <a:fontRef idx="minor">
+            <a:schemeClr val="lt1"/>
+          </a:fontRef>
+        </p:style>
+        <p:txBody>
+          <a:bodyPr rtlCol="0" anchor="ctr" wrap="square" lIns="0" rIns="0" tIns="0" bIns="0"/>
+          <a:lstStyle/>
+          <a:p>
+            <a:pPr algn="ctr">
+              <a:lnSpc>
+                <a:spcPct val="115000"/>
+              </a:lnSpc>
+              <a:spcAft>
+                <a:spcPts val="0"/>
+              </a:spcAft>
+            </a:pPr>
+            <a:r>
+              <a:rPr sz="2800" b="1">
+                <a:solidFill>
+                  <a:srgbClr val="F6F8FB"/>
+                </a:solidFill>
+                <a:latin typeface="Arial"/>
+              </a:rPr>
+              <a:t>1</a:t>
+            </a:r>
+          </a:p>
+        </p:txBody>
+      </p:sp>
+      <p:sp>
+        <p:nvSpPr>
+          <p:cNvPr id="7" name="TextBox 6"/>
           <p:cNvSpPr txBox="1"/>
           <p:nvPr/>
         </p:nvSpPr>
         <p:spPr>
           <a:xfrm>
-            <a:off x="812800" y="6096000"/>
-            <a:ext cx="10566400" cy="254000"/>
+            <a:off x="8794750" y="1866900"/>
+            <a:ext cx="2584450" cy="1016000"/>
           </a:xfrm>
           <a:prstGeom prst="rect">
             <a:avLst/>
@@ -6136,13 +6338,319 @@
               </a:spcAft>
             </a:pPr>
             <a:r>
-              <a:rPr sz="1500" b="0">
-                <a:solidFill>
-                  <a:srgbClr val="6B7280"/>
-                </a:solidFill>
-                <a:latin typeface="Arial"/>
-              </a:rPr>
-              <a:t>gpt-oss-120b on MuSiQue, thresholds on the direct answer’s confidence, one calibration half.</a:t>
+              <a:rPr sz="1900" b="0">
+                <a:solidFill>
+                  <a:srgbClr val="333B47"/>
+                </a:solidFill>
+                <a:latin typeface="Arial"/>
+              </a:rPr>
+              <a:t>Start with $1.</a:t>
+            </a:r>
+          </a:p>
+        </p:txBody>
+      </p:sp>
+      <p:sp>
+        <p:nvSpPr>
+          <p:cNvPr id="8" name="Oval 7"/>
+          <p:cNvSpPr/>
+          <p:nvPr/>
+        </p:nvSpPr>
+        <p:spPr>
+          <a:xfrm>
+            <a:off x="8191500" y="2921000"/>
+            <a:ext cx="444500" cy="444500"/>
+          </a:xfrm>
+          <a:prstGeom prst="ellipse">
+            <a:avLst/>
+          </a:prstGeom>
+          <a:solidFill>
+            <a:srgbClr val="006FCF"/>
+          </a:solidFill>
+          <a:ln>
+            <a:noFill/>
+          </a:ln>
+          <a:effectLst/>
+        </p:spPr>
+        <p:style>
+          <a:lnRef idx="1">
+            <a:schemeClr val="accent1"/>
+          </a:lnRef>
+          <a:fillRef idx="3">
+            <a:schemeClr val="accent1"/>
+          </a:fillRef>
+          <a:effectRef idx="2">
+            <a:schemeClr val="accent1"/>
+          </a:effectRef>
+          <a:fontRef idx="minor">
+            <a:schemeClr val="lt1"/>
+          </a:fontRef>
+        </p:style>
+        <p:txBody>
+          <a:bodyPr rtlCol="0" anchor="ctr" wrap="square" lIns="0" rIns="0" tIns="0" bIns="0"/>
+          <a:lstStyle/>
+          <a:p>
+            <a:pPr algn="ctr">
+              <a:lnSpc>
+                <a:spcPct val="115000"/>
+              </a:lnSpc>
+              <a:spcAft>
+                <a:spcPts val="0"/>
+              </a:spcAft>
+            </a:pPr>
+            <a:r>
+              <a:rPr sz="2800" b="1">
+                <a:solidFill>
+                  <a:srgbClr val="F6F8FB"/>
+                </a:solidFill>
+                <a:latin typeface="Arial"/>
+              </a:rPr>
+              <a:t>2</a:t>
+            </a:r>
+          </a:p>
+        </p:txBody>
+      </p:sp>
+      <p:sp>
+        <p:nvSpPr>
+          <p:cNvPr id="9" name="TextBox 8"/>
+          <p:cNvSpPr txBox="1"/>
+          <p:nvPr/>
+        </p:nvSpPr>
+        <p:spPr>
+          <a:xfrm>
+            <a:off x="8794750" y="2946400"/>
+            <a:ext cx="2584450" cy="1016000"/>
+          </a:xfrm>
+          <a:prstGeom prst="rect">
+            <a:avLst/>
+          </a:prstGeom>
+          <a:noFill/>
+        </p:spPr>
+        <p:txBody>
+          <a:bodyPr wrap="square" lIns="0" rIns="0" tIns="0" bIns="0" anchor="t">
+            <a:spAutoFit/>
+          </a:bodyPr>
+          <a:lstStyle/>
+          <a:p>
+            <a:pPr algn="l">
+              <a:lnSpc>
+                <a:spcPct val="115000"/>
+              </a:lnSpc>
+              <a:spcAft>
+                <a:spcPts val="0"/>
+              </a:spcAft>
+            </a:pPr>
+            <a:r>
+              <a:rPr sz="1900" b="0">
+                <a:solidFill>
+                  <a:srgbClr val="333B47"/>
+                </a:solidFill>
+                <a:latin typeface="Arial"/>
+              </a:rPr>
+              <a:t>Same as the team: win a little.</a:t>
+            </a:r>
+          </a:p>
+        </p:txBody>
+      </p:sp>
+      <p:sp>
+        <p:nvSpPr>
+          <p:cNvPr id="10" name="Oval 9"/>
+          <p:cNvSpPr/>
+          <p:nvPr/>
+        </p:nvSpPr>
+        <p:spPr>
+          <a:xfrm>
+            <a:off x="8191500" y="4000500"/>
+            <a:ext cx="444500" cy="444500"/>
+          </a:xfrm>
+          <a:prstGeom prst="ellipse">
+            <a:avLst/>
+          </a:prstGeom>
+          <a:solidFill>
+            <a:srgbClr val="006FCF"/>
+          </a:solidFill>
+          <a:ln>
+            <a:noFill/>
+          </a:ln>
+          <a:effectLst/>
+        </p:spPr>
+        <p:style>
+          <a:lnRef idx="1">
+            <a:schemeClr val="accent1"/>
+          </a:lnRef>
+          <a:fillRef idx="3">
+            <a:schemeClr val="accent1"/>
+          </a:fillRef>
+          <a:effectRef idx="2">
+            <a:schemeClr val="accent1"/>
+          </a:effectRef>
+          <a:fontRef idx="minor">
+            <a:schemeClr val="lt1"/>
+          </a:fontRef>
+        </p:style>
+        <p:txBody>
+          <a:bodyPr rtlCol="0" anchor="ctr" wrap="square" lIns="0" rIns="0" tIns="0" bIns="0"/>
+          <a:lstStyle/>
+          <a:p>
+            <a:pPr algn="ctr">
+              <a:lnSpc>
+                <a:spcPct val="115000"/>
+              </a:lnSpc>
+              <a:spcAft>
+                <a:spcPts val="0"/>
+              </a:spcAft>
+            </a:pPr>
+            <a:r>
+              <a:rPr sz="2800" b="1">
+                <a:solidFill>
+                  <a:srgbClr val="F6F8FB"/>
+                </a:solidFill>
+                <a:latin typeface="Arial"/>
+              </a:rPr>
+              <a:t>3</a:t>
+            </a:r>
+          </a:p>
+        </p:txBody>
+      </p:sp>
+      <p:sp>
+        <p:nvSpPr>
+          <p:cNvPr id="11" name="TextBox 10"/>
+          <p:cNvSpPr txBox="1"/>
+          <p:nvPr/>
+        </p:nvSpPr>
+        <p:spPr>
+          <a:xfrm>
+            <a:off x="8794750" y="4025900"/>
+            <a:ext cx="2584450" cy="1016000"/>
+          </a:xfrm>
+          <a:prstGeom prst="rect">
+            <a:avLst/>
+          </a:prstGeom>
+          <a:noFill/>
+        </p:spPr>
+        <p:txBody>
+          <a:bodyPr wrap="square" lIns="0" rIns="0" tIns="0" bIns="0" anchor="t">
+            <a:spAutoFit/>
+          </a:bodyPr>
+          <a:lstStyle/>
+          <a:p>
+            <a:pPr algn="l">
+              <a:lnSpc>
+                <a:spcPct val="115000"/>
+              </a:lnSpc>
+              <a:spcAft>
+                <a:spcPts val="0"/>
+              </a:spcAft>
+            </a:pPr>
+            <a:r>
+              <a:rPr sz="1900" b="0">
+                <a:solidFill>
+                  <a:srgbClr val="333B47"/>
+                </a:solidFill>
+                <a:latin typeface="Arial"/>
+              </a:rPr>
+              <a:t>Lost answer: lose a lot. Saved: win a lot.</a:t>
+            </a:r>
+          </a:p>
+        </p:txBody>
+      </p:sp>
+      <p:sp>
+        <p:nvSpPr>
+          <p:cNvPr id="12" name="Oval 11"/>
+          <p:cNvSpPr/>
+          <p:nvPr/>
+        </p:nvSpPr>
+        <p:spPr>
+          <a:xfrm>
+            <a:off x="8191500" y="5080000"/>
+            <a:ext cx="444500" cy="444500"/>
+          </a:xfrm>
+          <a:prstGeom prst="ellipse">
+            <a:avLst/>
+          </a:prstGeom>
+          <a:solidFill>
+            <a:srgbClr val="006FCF"/>
+          </a:solidFill>
+          <a:ln>
+            <a:noFill/>
+          </a:ln>
+          <a:effectLst/>
+        </p:spPr>
+        <p:style>
+          <a:lnRef idx="1">
+            <a:schemeClr val="accent1"/>
+          </a:lnRef>
+          <a:fillRef idx="3">
+            <a:schemeClr val="accent1"/>
+          </a:fillRef>
+          <a:effectRef idx="2">
+            <a:schemeClr val="accent1"/>
+          </a:effectRef>
+          <a:fontRef idx="minor">
+            <a:schemeClr val="lt1"/>
+          </a:fontRef>
+        </p:style>
+        <p:txBody>
+          <a:bodyPr rtlCol="0" anchor="ctr" wrap="square" lIns="0" rIns="0" tIns="0" bIns="0"/>
+          <a:lstStyle/>
+          <a:p>
+            <a:pPr algn="ctr">
+              <a:lnSpc>
+                <a:spcPct val="115000"/>
+              </a:lnSpc>
+              <a:spcAft>
+                <a:spcPts val="0"/>
+              </a:spcAft>
+            </a:pPr>
+            <a:r>
+              <a:rPr sz="2800" b="1">
+                <a:solidFill>
+                  <a:srgbClr val="F6F8FB"/>
+                </a:solidFill>
+                <a:latin typeface="Arial"/>
+              </a:rPr>
+              <a:t>4</a:t>
+            </a:r>
+          </a:p>
+        </p:txBody>
+      </p:sp>
+      <p:sp>
+        <p:nvSpPr>
+          <p:cNvPr id="13" name="TextBox 12"/>
+          <p:cNvSpPr txBox="1"/>
+          <p:nvPr/>
+        </p:nvSpPr>
+        <p:spPr>
+          <a:xfrm>
+            <a:off x="8794750" y="5105400"/>
+            <a:ext cx="2584450" cy="1016000"/>
+          </a:xfrm>
+          <a:prstGeom prst="rect">
+            <a:avLst/>
+          </a:prstGeom>
+          <a:noFill/>
+        </p:spPr>
+        <p:txBody>
+          <a:bodyPr wrap="square" lIns="0" rIns="0" tIns="0" bIns="0" anchor="t">
+            <a:spAutoFit/>
+          </a:bodyPr>
+          <a:lstStyle/>
+          <a:p>
+            <a:pPr algn="l">
+              <a:lnSpc>
+                <a:spcPct val="115000"/>
+              </a:lnSpc>
+              <a:spcAft>
+                <a:spcPts val="0"/>
+              </a:spcAft>
+            </a:pPr>
+            <a:r>
+              <a:rPr sz="1900" b="0">
+                <a:solidFill>
+                  <a:srgbClr val="333B47"/>
+                </a:solidFill>
+                <a:latin typeface="Arial"/>
+              </a:rPr>
+              <a:t>Reach $20: the rule passes.</a:t>
             </a:r>
           </a:p>
         </p:txBody>
@@ -6161,7 +6669,7 @@
     <p:bg>
       <p:bgPr>
         <a:solidFill>
-          <a:srgbClr val="F7F6F2"/>
+          <a:srgbClr val="F6F8FB"/>
         </a:solidFill>
         <a:effectLst/>
       </p:bgPr>
@@ -6206,7 +6714,7 @@
             <a:r>
               <a:rPr sz="1200" b="0">
                 <a:solidFill>
-                  <a:srgbClr val="6B7280"/>
+                  <a:srgbClr val="6B7480"/>
                 </a:solidFill>
                 <a:latin typeface="Arial"/>
               </a:rPr>
@@ -6248,7 +6756,7 @@
             <a:r>
               <a:rPr sz="1300" b="1">
                 <a:solidFill>
-                  <a:srgbClr val="B4541A"/>
+                  <a:srgbClr val="006FCF"/>
                 </a:solidFill>
                 <a:latin typeface="Arial"/>
               </a:rPr>
@@ -6290,55 +6798,114 @@
             <a:r>
               <a:rPr sz="3000" b="1">
                 <a:solidFill>
-                  <a:srgbClr val="14213D"/>
+                  <a:srgbClr val="00175A"/>
                 </a:solidFill>
                 <a:latin typeface="Georgia"/>
               </a:rPr>
-              <a:t>Each test is a betting game</a:t>
-            </a:r>
-          </a:p>
-        </p:txBody>
-      </p:sp>
-      <p:pic>
-        <p:nvPicPr>
-          <p:cNvPr id="5" name="Picture 4" descr="c_wealth.png"/>
-          <p:cNvPicPr>
-            <a:picLocks noChangeAspect="1"/>
-          </p:cNvPicPr>
-          <p:nvPr/>
-        </p:nvPicPr>
-        <p:blipFill>
-          <a:blip r:embed="rId3"/>
-          <a:stretch>
-            <a:fillRect/>
-          </a:stretch>
-        </p:blipFill>
-        <p:spPr>
-          <a:xfrm>
-            <a:off x="812800" y="1915559"/>
-            <a:ext cx="6985000" cy="3788881"/>
-          </a:xfrm>
-          <a:prstGeom prst="rect">
+              <a:t>Why $20? A bad rule rarely gets there</a:t>
+            </a:r>
+          </a:p>
+        </p:txBody>
+      </p:sp>
+      <p:sp>
+        <p:nvSpPr>
+          <p:cNvPr id="5" name="Rounded Rectangle 4"/>
+          <p:cNvSpPr/>
+          <p:nvPr/>
+        </p:nvSpPr>
+        <p:spPr>
+          <a:xfrm>
+            <a:off x="812800" y="1778000"/>
+            <a:ext cx="3111500" cy="1397000"/>
+          </a:xfrm>
+          <a:prstGeom prst="roundRect">
+            <a:avLst>
+              <a:gd name="adj" fmla="val 8181"/>
+            </a:avLst>
+          </a:prstGeom>
+          <a:solidFill>
+            <a:srgbClr val="F6E3E0"/>
+          </a:solidFill>
+          <a:ln w="31750">
+            <a:solidFill>
+              <a:srgbClr val="B03A2E"/>
+            </a:solidFill>
+          </a:ln>
+          <a:effectLst/>
+        </p:spPr>
+        <p:style>
+          <a:lnRef idx="1">
+            <a:schemeClr val="accent1"/>
+          </a:lnRef>
+          <a:fillRef idx="3">
+            <a:schemeClr val="accent1"/>
+          </a:fillRef>
+          <a:effectRef idx="2">
+            <a:schemeClr val="accent1"/>
+          </a:effectRef>
+          <a:fontRef idx="minor">
+            <a:schemeClr val="lt1"/>
+          </a:fontRef>
+        </p:style>
+        <p:txBody>
+          <a:bodyPr rtlCol="0" anchor="ctr" wrap="square" lIns="139700" rIns="139700" tIns="139700" bIns="139700"/>
+          <a:lstStyle/>
+          <a:p>
+            <a:pPr algn="ctr">
+              <a:lnSpc>
+                <a:spcPct val="115000"/>
+              </a:lnSpc>
+              <a:spcAft>
+                <a:spcPts val="1000"/>
+              </a:spcAft>
+            </a:pPr>
+            <a:r>
+              <a:rPr sz="2600" b="1">
+                <a:solidFill>
+                  <a:srgbClr val="B03A2E"/>
+                </a:solidFill>
+                <a:latin typeface="Arial"/>
+              </a:rPr>
+              <a:t>Bad rule</a:t>
+            </a:r>
+          </a:p>
+          <a:p>
+            <a:pPr algn="ctr">
+              <a:lnSpc>
+                <a:spcPct val="115000"/>
+              </a:lnSpc>
+              <a:spcAft>
+                <a:spcPts val="0"/>
+              </a:spcAft>
+            </a:pPr>
+            <a:r>
+              <a:rPr sz="1800" b="0">
+                <a:solidFill>
+                  <a:srgbClr val="333B47"/>
+                </a:solidFill>
+                <a:latin typeface="Arial"/>
+              </a:rPr>
+              <a:t>each bet loses on average</a:t>
+            </a:r>
+          </a:p>
+        </p:txBody>
+      </p:sp>
+      <p:sp>
+        <p:nvSpPr>
+          <p:cNvPr id="6" name="Right Arrow 5"/>
+          <p:cNvSpPr/>
+          <p:nvPr/>
+        </p:nvSpPr>
+        <p:spPr>
+          <a:xfrm>
+            <a:off x="3987800" y="2317750"/>
+            <a:ext cx="419100" cy="317500"/>
+          </a:xfrm>
+          <a:prstGeom prst="rightArrow">
             <a:avLst/>
           </a:prstGeom>
-        </p:spPr>
-      </p:pic>
-      <p:sp>
-        <p:nvSpPr>
-          <p:cNvPr id="6" name="Oval 5"/>
-          <p:cNvSpPr/>
-          <p:nvPr/>
-        </p:nvSpPr>
-        <p:spPr>
-          <a:xfrm>
-            <a:off x="8191500" y="1841500"/>
-            <a:ext cx="444500" cy="444500"/>
-          </a:xfrm>
-          <a:prstGeom prst="ellipse">
-            <a:avLst/>
-          </a:prstGeom>
           <a:solidFill>
-            <a:srgbClr val="B4541A"/>
+            <a:srgbClr val="6B7480"/>
           </a:solidFill>
           <a:ln>
             <a:noFill/>
@@ -6360,7 +6927,55 @@
           </a:fontRef>
         </p:style>
         <p:txBody>
-          <a:bodyPr rtlCol="0" anchor="ctr" wrap="square" lIns="0" rIns="0" tIns="0" bIns="0"/>
+          <a:bodyPr rtlCol="0" anchor="ctr"/>
+          <a:lstStyle/>
+          <a:p>
+            <a:pPr algn="ctr"/>
+          </a:p>
+        </p:txBody>
+      </p:sp>
+      <p:sp>
+        <p:nvSpPr>
+          <p:cNvPr id="7" name="Rounded Rectangle 6"/>
+          <p:cNvSpPr/>
+          <p:nvPr/>
+        </p:nvSpPr>
+        <p:spPr>
+          <a:xfrm>
+            <a:off x="4464050" y="1778000"/>
+            <a:ext cx="3111500" cy="1397000"/>
+          </a:xfrm>
+          <a:prstGeom prst="roundRect">
+            <a:avLst>
+              <a:gd name="adj" fmla="val 8181"/>
+            </a:avLst>
+          </a:prstGeom>
+          <a:solidFill>
+            <a:srgbClr val="E9EEF5"/>
+          </a:solidFill>
+          <a:ln w="31750">
+            <a:solidFill>
+              <a:srgbClr val="00175A"/>
+            </a:solidFill>
+          </a:ln>
+          <a:effectLst/>
+        </p:spPr>
+        <p:style>
+          <a:lnRef idx="1">
+            <a:schemeClr val="accent1"/>
+          </a:lnRef>
+          <a:fillRef idx="3">
+            <a:schemeClr val="accent1"/>
+          </a:fillRef>
+          <a:effectRef idx="2">
+            <a:schemeClr val="accent1"/>
+          </a:effectRef>
+          <a:fontRef idx="minor">
+            <a:schemeClr val="lt1"/>
+          </a:fontRef>
+        </p:style>
+        <p:txBody>
+          <a:bodyPr rtlCol="0" anchor="ctr" wrap="square" lIns="139700" rIns="139700" tIns="139700" bIns="139700"/>
           <a:lstStyle/>
           <a:p>
             <a:pPr algn="ctr">
@@ -6368,79 +6983,56 @@
                 <a:spcPct val="115000"/>
               </a:lnSpc>
               <a:spcAft>
-                <a:spcPts val="0"/>
-              </a:spcAft>
-            </a:pPr>
-            <a:r>
-              <a:rPr sz="2800" b="1">
-                <a:solidFill>
-                  <a:srgbClr val="F7F6F2"/>
-                </a:solidFill>
-                <a:latin typeface="Arial"/>
-              </a:rPr>
-              <a:t>1</a:t>
-            </a:r>
-          </a:p>
-        </p:txBody>
-      </p:sp>
-      <p:sp>
-        <p:nvSpPr>
-          <p:cNvPr id="7" name="TextBox 6"/>
-          <p:cNvSpPr txBox="1"/>
-          <p:nvPr/>
-        </p:nvSpPr>
-        <p:spPr>
-          <a:xfrm>
-            <a:off x="8794750" y="1866900"/>
-            <a:ext cx="2584450" cy="1016000"/>
-          </a:xfrm>
-          <a:prstGeom prst="rect">
+                <a:spcPts val="1000"/>
+              </a:spcAft>
+            </a:pPr>
+            <a:r>
+              <a:rPr sz="2600" b="1">
+                <a:solidFill>
+                  <a:srgbClr val="00175A"/>
+                </a:solidFill>
+                <a:latin typeface="Arial"/>
+              </a:rPr>
+              <a:t>Average ≤ $1</a:t>
+            </a:r>
+          </a:p>
+          <a:p>
+            <a:pPr algn="ctr">
+              <a:lnSpc>
+                <a:spcPct val="115000"/>
+              </a:lnSpc>
+              <a:spcAft>
+                <a:spcPts val="0"/>
+              </a:spcAft>
+            </a:pPr>
+            <a:r>
+              <a:rPr sz="1800" b="0">
+                <a:solidFill>
+                  <a:srgbClr val="333B47"/>
+                </a:solidFill>
+                <a:latin typeface="Arial"/>
+              </a:rPr>
+              <a:t>starts at $1, never grows on average</a:t>
+            </a:r>
+          </a:p>
+        </p:txBody>
+      </p:sp>
+      <p:sp>
+        <p:nvSpPr>
+          <p:cNvPr id="8" name="Right Arrow 7"/>
+          <p:cNvSpPr/>
+          <p:nvPr/>
+        </p:nvSpPr>
+        <p:spPr>
+          <a:xfrm>
+            <a:off x="7639050" y="2317750"/>
+            <a:ext cx="419100" cy="317500"/>
+          </a:xfrm>
+          <a:prstGeom prst="rightArrow">
             <a:avLst/>
           </a:prstGeom>
-          <a:noFill/>
-        </p:spPr>
-        <p:txBody>
-          <a:bodyPr wrap="square" lIns="0" rIns="0" tIns="0" bIns="0" anchor="t">
-            <a:spAutoFit/>
-          </a:bodyPr>
-          <a:lstStyle/>
-          <a:p>
-            <a:pPr algn="l">
-              <a:lnSpc>
-                <a:spcPct val="115000"/>
-              </a:lnSpc>
-              <a:spcAft>
-                <a:spcPts val="0"/>
-              </a:spcAft>
-            </a:pPr>
-            <a:r>
-              <a:rPr sz="1900" b="0">
-                <a:solidFill>
-                  <a:srgbClr val="3A4150"/>
-                </a:solidFill>
-                <a:latin typeface="Arial"/>
-              </a:rPr>
-              <a:t>Start with $1.</a:t>
-            </a:r>
-          </a:p>
-        </p:txBody>
-      </p:sp>
-      <p:sp>
-        <p:nvSpPr>
-          <p:cNvPr id="8" name="Oval 7"/>
-          <p:cNvSpPr/>
-          <p:nvPr/>
-        </p:nvSpPr>
-        <p:spPr>
-          <a:xfrm>
-            <a:off x="8191500" y="2921000"/>
-            <a:ext cx="444500" cy="444500"/>
-          </a:xfrm>
-          <a:prstGeom prst="ellipse">
-            <a:avLst/>
-          </a:prstGeom>
           <a:solidFill>
-            <a:srgbClr val="B4541A"/>
+            <a:srgbClr val="6B7480"/>
           </a:solidFill>
           <a:ln>
             <a:noFill/>
@@ -6462,7 +7054,55 @@
           </a:fontRef>
         </p:style>
         <p:txBody>
-          <a:bodyPr rtlCol="0" anchor="ctr" wrap="square" lIns="0" rIns="0" tIns="0" bIns="0"/>
+          <a:bodyPr rtlCol="0" anchor="ctr"/>
+          <a:lstStyle/>
+          <a:p>
+            <a:pPr algn="ctr"/>
+          </a:p>
+        </p:txBody>
+      </p:sp>
+      <p:sp>
+        <p:nvSpPr>
+          <p:cNvPr id="9" name="Rounded Rectangle 8"/>
+          <p:cNvSpPr/>
+          <p:nvPr/>
+        </p:nvSpPr>
+        <p:spPr>
+          <a:xfrm>
+            <a:off x="8115300" y="1778000"/>
+            <a:ext cx="3111500" cy="1397000"/>
+          </a:xfrm>
+          <a:prstGeom prst="roundRect">
+            <a:avLst>
+              <a:gd name="adj" fmla="val 8181"/>
+            </a:avLst>
+          </a:prstGeom>
+          <a:solidFill>
+            <a:srgbClr val="E9EEF5"/>
+          </a:solidFill>
+          <a:ln w="31750">
+            <a:solidFill>
+              <a:srgbClr val="00175A"/>
+            </a:solidFill>
+          </a:ln>
+          <a:effectLst/>
+        </p:spPr>
+        <p:style>
+          <a:lnRef idx="1">
+            <a:schemeClr val="accent1"/>
+          </a:lnRef>
+          <a:fillRef idx="3">
+            <a:schemeClr val="accent1"/>
+          </a:fillRef>
+          <a:effectRef idx="2">
+            <a:schemeClr val="accent1"/>
+          </a:effectRef>
+          <a:fontRef idx="minor">
+            <a:schemeClr val="lt1"/>
+          </a:fontRef>
+        </p:style>
+        <p:txBody>
+          <a:bodyPr rtlCol="0" anchor="ctr" wrap="square" lIns="139700" rIns="139700" tIns="139700" bIns="139700"/>
           <a:lstStyle/>
           <a:p>
             <a:pPr algn="ctr">
@@ -6470,79 +7110,58 @@
                 <a:spcPct val="115000"/>
               </a:lnSpc>
               <a:spcAft>
-                <a:spcPts val="0"/>
-              </a:spcAft>
-            </a:pPr>
-            <a:r>
-              <a:rPr sz="2800" b="1">
-                <a:solidFill>
-                  <a:srgbClr val="F7F6F2"/>
-                </a:solidFill>
-                <a:latin typeface="Arial"/>
-              </a:rPr>
-              <a:t>2</a:t>
-            </a:r>
-          </a:p>
-        </p:txBody>
-      </p:sp>
-      <p:sp>
-        <p:nvSpPr>
-          <p:cNvPr id="9" name="TextBox 8"/>
-          <p:cNvSpPr txBox="1"/>
-          <p:nvPr/>
-        </p:nvSpPr>
-        <p:spPr>
-          <a:xfrm>
-            <a:off x="8794750" y="2946400"/>
-            <a:ext cx="2584450" cy="1016000"/>
-          </a:xfrm>
-          <a:prstGeom prst="rect">
-            <a:avLst/>
-          </a:prstGeom>
-          <a:noFill/>
-        </p:spPr>
-        <p:txBody>
-          <a:bodyPr wrap="square" lIns="0" rIns="0" tIns="0" bIns="0" anchor="t">
-            <a:spAutoFit/>
-          </a:bodyPr>
-          <a:lstStyle/>
-          <a:p>
-            <a:pPr algn="l">
-              <a:lnSpc>
-                <a:spcPct val="115000"/>
-              </a:lnSpc>
-              <a:spcAft>
-                <a:spcPts val="0"/>
-              </a:spcAft>
-            </a:pPr>
-            <a:r>
-              <a:rPr sz="1900" b="0">
-                <a:solidFill>
-                  <a:srgbClr val="3A4150"/>
-                </a:solidFill>
-                <a:latin typeface="Arial"/>
-              </a:rPr>
-              <a:t>Each task: bet that skipping the team does no harm.</a:t>
-            </a:r>
-          </a:p>
-        </p:txBody>
-      </p:sp>
-      <p:sp>
-        <p:nvSpPr>
-          <p:cNvPr id="10" name="Oval 9"/>
+                <a:spcPts val="1000"/>
+              </a:spcAft>
+            </a:pPr>
+            <a:r>
+              <a:rPr sz="2600" b="1">
+                <a:solidFill>
+                  <a:srgbClr val="00175A"/>
+                </a:solidFill>
+                <a:latin typeface="Arial"/>
+              </a:rPr>
+              <a:t>Never below $0</a:t>
+            </a:r>
+          </a:p>
+          <a:p>
+            <a:pPr algn="ctr">
+              <a:lnSpc>
+                <a:spcPct val="115000"/>
+              </a:lnSpc>
+              <a:spcAft>
+                <a:spcPts val="0"/>
+              </a:spcAft>
+            </a:pPr>
+            <a:r>
+              <a:rPr sz="1800" b="0">
+                <a:solidFill>
+                  <a:srgbClr val="333B47"/>
+                </a:solidFill>
+                <a:latin typeface="Arial"/>
+              </a:rPr>
+              <a:t>a lost answer at most halves it</a:t>
+            </a:r>
+          </a:p>
+        </p:txBody>
+      </p:sp>
+      <p:sp>
+        <p:nvSpPr>
+          <p:cNvPr id="10" name="Rounded Rectangle 9"/>
           <p:cNvSpPr/>
           <p:nvPr/>
         </p:nvSpPr>
         <p:spPr>
           <a:xfrm>
-            <a:off x="8191500" y="4000500"/>
-            <a:ext cx="444500" cy="444500"/>
-          </a:xfrm>
-          <a:prstGeom prst="ellipse">
-            <a:avLst/>
+            <a:off x="812800" y="3492500"/>
+            <a:ext cx="10566400" cy="1270000"/>
+          </a:xfrm>
+          <a:prstGeom prst="roundRect">
+            <a:avLst>
+              <a:gd name="adj" fmla="val 9000"/>
+            </a:avLst>
           </a:prstGeom>
           <a:solidFill>
-            <a:srgbClr val="B4541A"/>
+            <a:srgbClr val="00175A"/>
           </a:solidFill>
           <a:ln>
             <a:noFill/>
@@ -6564,7 +7183,7 @@
           </a:fontRef>
         </p:style>
         <p:txBody>
-          <a:bodyPr rtlCol="0" anchor="ctr" wrap="square" lIns="0" rIns="0" tIns="0" bIns="0"/>
+          <a:bodyPr rtlCol="0" anchor="ctr" wrap="square" lIns="127000" rIns="127000" tIns="127000" bIns="127000"/>
           <a:lstStyle/>
           <a:p>
             <a:pPr algn="ctr">
@@ -6572,82 +7191,72 @@
                 <a:spcPct val="115000"/>
               </a:lnSpc>
               <a:spcAft>
+                <a:spcPts val="1000"/>
+              </a:spcAft>
+            </a:pPr>
+            <a:r>
+              <a:rPr sz="3600" b="1">
+                <a:solidFill>
+                  <a:srgbClr val="F6F8FB"/>
+                </a:solidFill>
+                <a:latin typeface="Georgia"/>
+              </a:rPr>
+              <a:t>1  ≥  average wealth  ≥  20 × P(reach $20)</a:t>
+            </a:r>
+          </a:p>
+          <a:p>
+            <a:pPr algn="ctr">
+              <a:lnSpc>
+                <a:spcPct val="115000"/>
+              </a:lnSpc>
+              <a:spcAft>
                 <a:spcPts val="0"/>
               </a:spcAft>
             </a:pPr>
             <a:r>
               <a:rPr sz="2800" b="1">
                 <a:solidFill>
-                  <a:srgbClr val="F7F6F2"/>
-                </a:solidFill>
-                <a:latin typeface="Arial"/>
-              </a:rPr>
-              <a:t>3</a:t>
-            </a:r>
-          </a:p>
-        </p:txBody>
-      </p:sp>
-      <p:sp>
-        <p:nvSpPr>
-          <p:cNvPr id="11" name="TextBox 10"/>
-          <p:cNvSpPr txBox="1"/>
-          <p:nvPr/>
-        </p:nvSpPr>
-        <p:spPr>
-          <a:xfrm>
-            <a:off x="8794750" y="4025900"/>
-            <a:ext cx="2584450" cy="1016000"/>
-          </a:xfrm>
-          <a:prstGeom prst="rect">
-            <a:avLst/>
-          </a:prstGeom>
-          <a:noFill/>
-        </p:spPr>
-        <p:txBody>
-          <a:bodyPr wrap="square" lIns="0" rIns="0" tIns="0" bIns="0" anchor="t">
-            <a:spAutoFit/>
-          </a:bodyPr>
-          <a:lstStyle/>
-          <a:p>
-            <a:pPr algn="l">
-              <a:lnSpc>
-                <a:spcPct val="115000"/>
-              </a:lnSpc>
-              <a:spcAft>
-                <a:spcPts val="0"/>
-              </a:spcAft>
-            </a:pPr>
-            <a:r>
-              <a:rPr sz="1900" b="0">
-                <a:solidFill>
-                  <a:srgbClr val="3A4150"/>
-                </a:solidFill>
-                <a:latin typeface="Arial"/>
-              </a:rPr>
-              <a:t>No harm: win a little. Broken answer: lose.</a:t>
-            </a:r>
-          </a:p>
-        </p:txBody>
-      </p:sp>
-      <p:sp>
-        <p:nvSpPr>
-          <p:cNvPr id="12" name="Oval 11"/>
+                  <a:srgbClr val="F6F8FB"/>
+                </a:solidFill>
+                <a:latin typeface="Arial"/>
+              </a:rPr>
+              <a:t>so  </a:t>
+            </a:r>
+            <a:r>
+              <a:rPr sz="2800" b="1">
+                <a:solidFill>
+                  <a:srgbClr val="66B2F0"/>
+                </a:solidFill>
+                <a:latin typeface="Arial"/>
+              </a:rPr>
+              <a:t>P(a bad rule passes)  ≤  1/20  =  5%</a:t>
+            </a:r>
+          </a:p>
+        </p:txBody>
+      </p:sp>
+      <p:sp>
+        <p:nvSpPr>
+          <p:cNvPr id="11" name="Rounded Rectangle 10"/>
           <p:cNvSpPr/>
           <p:nvPr/>
         </p:nvSpPr>
         <p:spPr>
           <a:xfrm>
-            <a:off x="8191500" y="5080000"/>
-            <a:ext cx="444500" cy="444500"/>
-          </a:xfrm>
-          <a:prstGeom prst="ellipse">
-            <a:avLst/>
+            <a:off x="812800" y="5016500"/>
+            <a:ext cx="5080000" cy="1143000"/>
+          </a:xfrm>
+          <a:prstGeom prst="roundRect">
+            <a:avLst>
+              <a:gd name="adj" fmla="val 10000"/>
+            </a:avLst>
           </a:prstGeom>
           <a:solidFill>
-            <a:srgbClr val="B4541A"/>
+            <a:srgbClr val="FFFFFF"/>
           </a:solidFill>
-          <a:ln>
-            <a:noFill/>
+          <a:ln w="12700">
+            <a:solidFill>
+              <a:srgbClr val="D3DCE8"/>
+            </a:solidFill>
           </a:ln>
           <a:effectLst/>
         </p:spPr>
@@ -6666,49 +7275,7 @@
           </a:fontRef>
         </p:style>
         <p:txBody>
-          <a:bodyPr rtlCol="0" anchor="ctr" wrap="square" lIns="0" rIns="0" tIns="0" bIns="0"/>
-          <a:lstStyle/>
-          <a:p>
-            <a:pPr algn="ctr">
-              <a:lnSpc>
-                <a:spcPct val="115000"/>
-              </a:lnSpc>
-              <a:spcAft>
-                <a:spcPts val="0"/>
-              </a:spcAft>
-            </a:pPr>
-            <a:r>
-              <a:rPr sz="2800" b="1">
-                <a:solidFill>
-                  <a:srgbClr val="F7F6F2"/>
-                </a:solidFill>
-                <a:latin typeface="Arial"/>
-              </a:rPr>
-              <a:t>4</a:t>
-            </a:r>
-          </a:p>
-        </p:txBody>
-      </p:sp>
-      <p:sp>
-        <p:nvSpPr>
-          <p:cNvPr id="13" name="TextBox 12"/>
-          <p:cNvSpPr txBox="1"/>
-          <p:nvPr/>
-        </p:nvSpPr>
-        <p:spPr>
-          <a:xfrm>
-            <a:off x="8794750" y="5105400"/>
-            <a:ext cx="2584450" cy="1016000"/>
-          </a:xfrm>
-          <a:prstGeom prst="rect">
-            <a:avLst/>
-          </a:prstGeom>
-          <a:noFill/>
-        </p:spPr>
-        <p:txBody>
-          <a:bodyPr wrap="square" lIns="0" rIns="0" tIns="0" bIns="0" anchor="t">
-            <a:spAutoFit/>
-          </a:bodyPr>
+          <a:bodyPr rtlCol="0" anchor="ctr" wrap="square" lIns="152400" rIns="152400" tIns="152400" bIns="152400"/>
           <a:lstStyle/>
           <a:p>
             <a:pPr algn="l">
@@ -6716,17 +7283,119 @@
                 <a:spcPct val="115000"/>
               </a:lnSpc>
               <a:spcAft>
-                <a:spcPts val="0"/>
-              </a:spcAft>
-            </a:pPr>
-            <a:r>
-              <a:rPr sz="1900" b="0">
-                <a:solidFill>
-                  <a:srgbClr val="3A4150"/>
-                </a:solidFill>
-                <a:latin typeface="Arial"/>
-              </a:rPr>
-              <a:t>Reach $20: the rule passes.</a:t>
+                <a:spcPts val="600"/>
+              </a:spcAft>
+            </a:pPr>
+            <a:r>
+              <a:rPr sz="2000" b="1">
+                <a:solidFill>
+                  <a:srgbClr val="00175A"/>
+                </a:solidFill>
+                <a:latin typeface="Arial"/>
+              </a:rPr>
+              <a:t>The line sets the error</a:t>
+            </a:r>
+          </a:p>
+          <a:p>
+            <a:pPr algn="l">
+              <a:lnSpc>
+                <a:spcPct val="115000"/>
+              </a:lnSpc>
+              <a:spcAft>
+                <a:spcPts val="0"/>
+              </a:spcAft>
+            </a:pPr>
+            <a:r>
+              <a:rPr sz="1800" b="0">
+                <a:solidFill>
+                  <a:srgbClr val="6B7480"/>
+                </a:solidFill>
+                <a:latin typeface="Arial"/>
+              </a:rPr>
+              <a:t>$20 → 5%,  $100 → 1%. Two families × 5% = 10%.</a:t>
+            </a:r>
+          </a:p>
+        </p:txBody>
+      </p:sp>
+      <p:sp>
+        <p:nvSpPr>
+          <p:cNvPr id="12" name="Rounded Rectangle 11"/>
+          <p:cNvSpPr/>
+          <p:nvPr/>
+        </p:nvSpPr>
+        <p:spPr>
+          <a:xfrm>
+            <a:off x="6299200" y="5016500"/>
+            <a:ext cx="5080000" cy="1143000"/>
+          </a:xfrm>
+          <a:prstGeom prst="roundRect">
+            <a:avLst>
+              <a:gd name="adj" fmla="val 10000"/>
+            </a:avLst>
+          </a:prstGeom>
+          <a:solidFill>
+            <a:srgbClr val="FFFFFF"/>
+          </a:solidFill>
+          <a:ln w="12700">
+            <a:solidFill>
+              <a:srgbClr val="D3DCE8"/>
+            </a:solidFill>
+          </a:ln>
+          <a:effectLst/>
+        </p:spPr>
+        <p:style>
+          <a:lnRef idx="1">
+            <a:schemeClr val="accent1"/>
+          </a:lnRef>
+          <a:fillRef idx="3">
+            <a:schemeClr val="accent1"/>
+          </a:fillRef>
+          <a:effectRef idx="2">
+            <a:schemeClr val="accent1"/>
+          </a:effectRef>
+          <a:fontRef idx="minor">
+            <a:schemeClr val="lt1"/>
+          </a:fontRef>
+        </p:style>
+        <p:txBody>
+          <a:bodyPr rtlCol="0" anchor="ctr" wrap="square" lIns="152400" rIns="152400" tIns="152400" bIns="152400"/>
+          <a:lstStyle/>
+          <a:p>
+            <a:pPr algn="l">
+              <a:lnSpc>
+                <a:spcPct val="115000"/>
+              </a:lnSpc>
+              <a:spcAft>
+                <a:spcPts val="600"/>
+              </a:spcAft>
+            </a:pPr>
+            <a:r>
+              <a:rPr sz="2000" b="1">
+                <a:solidFill>
+                  <a:srgbClr val="00175A"/>
+                </a:solidFill>
+                <a:latin typeface="Arial"/>
+              </a:rPr>
+              <a:t>Hit $20, then dropped? Still a pass</a:t>
+            </a:r>
+          </a:p>
+          <a:p>
+            <a:pPr algn="l">
+              <a:lnSpc>
+                <a:spcPct val="115000"/>
+              </a:lnSpc>
+              <a:spcAft>
+                <a:spcPts val="0"/>
+              </a:spcAft>
+            </a:pPr>
+            <a:r>
+              <a:rPr sz="1800" b="0">
+                <a:solidFill>
+                  <a:srgbClr val="6B7480"/>
+                </a:solidFill>
+                <a:latin typeface="Arial"/>
+              </a:rPr>
+              <a:t>Freeze the money at $20: the average stays ≤ $1.</a:t>
             </a:r>
           </a:p>
         </p:txBody>
@@ -6745,7 +7414,7 @@
     <p:bg>
       <p:bgPr>
         <a:solidFill>
-          <a:srgbClr val="F7F6F2"/>
+          <a:srgbClr val="F6F8FB"/>
         </a:solidFill>
         <a:effectLst/>
       </p:bgPr>
@@ -6790,7 +7459,7 @@
             <a:r>
               <a:rPr sz="1200" b="0">
                 <a:solidFill>
-                  <a:srgbClr val="6B7280"/>
+                  <a:srgbClr val="6B7480"/>
                 </a:solidFill>
                 <a:latin typeface="Arial"/>
               </a:rPr>
@@ -6832,7 +7501,7 @@
             <a:r>
               <a:rPr sz="1300" b="1">
                 <a:solidFill>
-                  <a:srgbClr val="B4541A"/>
+                  <a:srgbClr val="006FCF"/>
                 </a:solidFill>
                 <a:latin typeface="Arial"/>
               </a:rPr>
@@ -6874,267 +7543,18 @@
             <a:r>
               <a:rPr sz="3000" b="1">
                 <a:solidFill>
-                  <a:srgbClr val="14213D"/>
+                  <a:srgbClr val="00175A"/>
                 </a:solidFill>
                 <a:latin typeface="Georgia"/>
               </a:rPr>
-              <a:t>Count the answers skipping saves, too</a:t>
-            </a:r>
-          </a:p>
-        </p:txBody>
-      </p:sp>
-      <p:sp>
-        <p:nvSpPr>
-          <p:cNvPr id="5" name="Rounded Rectangle 4"/>
-          <p:cNvSpPr/>
-          <p:nvPr/>
-        </p:nvSpPr>
-        <p:spPr>
-          <a:xfrm>
-            <a:off x="812800" y="1841500"/>
-            <a:ext cx="3810000" cy="1016000"/>
-          </a:xfrm>
-          <a:prstGeom prst="roundRect">
-            <a:avLst>
-              <a:gd name="adj" fmla="val 10000"/>
-            </a:avLst>
-          </a:prstGeom>
-          <a:solidFill>
-            <a:srgbClr val="F6E3E0"/>
-          </a:solidFill>
-          <a:ln w="31750">
-            <a:solidFill>
-              <a:srgbClr val="B03A2E"/>
-            </a:solidFill>
-          </a:ln>
-          <a:effectLst/>
-        </p:spPr>
-        <p:style>
-          <a:lnRef idx="1">
-            <a:schemeClr val="accent1"/>
-          </a:lnRef>
-          <a:fillRef idx="3">
-            <a:schemeClr val="accent1"/>
-          </a:fillRef>
-          <a:effectRef idx="2">
-            <a:schemeClr val="accent1"/>
-          </a:effectRef>
-          <a:fontRef idx="minor">
-            <a:schemeClr val="lt1"/>
-          </a:fontRef>
-        </p:style>
-        <p:txBody>
-          <a:bodyPr rtlCol="0" anchor="ctr" wrap="square" lIns="76200" rIns="76200" tIns="76200" bIns="76200"/>
-          <a:lstStyle/>
-          <a:p>
-            <a:pPr algn="ctr">
-              <a:lnSpc>
-                <a:spcPct val="115000"/>
-              </a:lnSpc>
-              <a:spcAft>
-                <a:spcPts val="600"/>
-              </a:spcAft>
-            </a:pPr>
-            <a:r>
-              <a:rPr sz="2200" b="1">
-                <a:solidFill>
-                  <a:srgbClr val="14213D"/>
-                </a:solidFill>
-                <a:latin typeface="Arial"/>
-              </a:rPr>
-              <a:t>Cheap wrong, team right</a:t>
-            </a:r>
-          </a:p>
-          <a:p>
-            <a:pPr algn="ctr">
-              <a:lnSpc>
-                <a:spcPct val="115000"/>
-              </a:lnSpc>
-              <a:spcAft>
-                <a:spcPts val="0"/>
-              </a:spcAft>
-            </a:pPr>
-            <a:r>
-              <a:rPr sz="2000" b="1">
-                <a:solidFill>
-                  <a:srgbClr val="B03A2E"/>
-                </a:solidFill>
-                <a:latin typeface="Arial"/>
-              </a:rPr>
-              <a:t>lose a point</a:t>
-            </a:r>
-          </a:p>
-        </p:txBody>
-      </p:sp>
-      <p:sp>
-        <p:nvSpPr>
-          <p:cNvPr id="6" name="Rounded Rectangle 5"/>
-          <p:cNvSpPr/>
-          <p:nvPr/>
-        </p:nvSpPr>
-        <p:spPr>
-          <a:xfrm>
-            <a:off x="812800" y="3048000"/>
-            <a:ext cx="3810000" cy="1016000"/>
-          </a:xfrm>
-          <a:prstGeom prst="roundRect">
-            <a:avLst>
-              <a:gd name="adj" fmla="val 10000"/>
-            </a:avLst>
-          </a:prstGeom>
-          <a:solidFill>
-            <a:srgbClr val="ECEAE3"/>
-          </a:solidFill>
-          <a:ln w="31750">
-            <a:solidFill>
-              <a:srgbClr val="6B7280"/>
-            </a:solidFill>
-          </a:ln>
-          <a:effectLst/>
-        </p:spPr>
-        <p:style>
-          <a:lnRef idx="1">
-            <a:schemeClr val="accent1"/>
-          </a:lnRef>
-          <a:fillRef idx="3">
-            <a:schemeClr val="accent1"/>
-          </a:fillRef>
-          <a:effectRef idx="2">
-            <a:schemeClr val="accent1"/>
-          </a:effectRef>
-          <a:fontRef idx="minor">
-            <a:schemeClr val="lt1"/>
-          </a:fontRef>
-        </p:style>
-        <p:txBody>
-          <a:bodyPr rtlCol="0" anchor="ctr" wrap="square" lIns="76200" rIns="76200" tIns="76200" bIns="76200"/>
-          <a:lstStyle/>
-          <a:p>
-            <a:pPr algn="ctr">
-              <a:lnSpc>
-                <a:spcPct val="115000"/>
-              </a:lnSpc>
-              <a:spcAft>
-                <a:spcPts val="600"/>
-              </a:spcAft>
-            </a:pPr>
-            <a:r>
-              <a:rPr sz="2200" b="1">
-                <a:solidFill>
-                  <a:srgbClr val="14213D"/>
-                </a:solidFill>
-                <a:latin typeface="Arial"/>
-              </a:rPr>
-              <a:t>Same result</a:t>
-            </a:r>
-          </a:p>
-          <a:p>
-            <a:pPr algn="ctr">
-              <a:lnSpc>
-                <a:spcPct val="115000"/>
-              </a:lnSpc>
-              <a:spcAft>
-                <a:spcPts val="0"/>
-              </a:spcAft>
-            </a:pPr>
-            <a:r>
-              <a:rPr sz="2000" b="1">
-                <a:solidFill>
-                  <a:srgbClr val="6B7280"/>
-                </a:solidFill>
-                <a:latin typeface="Arial"/>
-              </a:rPr>
-              <a:t>no change (most tasks)</a:t>
-            </a:r>
-          </a:p>
-        </p:txBody>
-      </p:sp>
-      <p:sp>
-        <p:nvSpPr>
-          <p:cNvPr id="7" name="Rounded Rectangle 6"/>
-          <p:cNvSpPr/>
-          <p:nvPr/>
-        </p:nvSpPr>
-        <p:spPr>
-          <a:xfrm>
-            <a:off x="812800" y="4254500"/>
-            <a:ext cx="3810000" cy="1016000"/>
-          </a:xfrm>
-          <a:prstGeom prst="roundRect">
-            <a:avLst>
-              <a:gd name="adj" fmla="val 10000"/>
-            </a:avLst>
-          </a:prstGeom>
-          <a:solidFill>
-            <a:srgbClr val="E3ECE2"/>
-          </a:solidFill>
-          <a:ln w="31750">
-            <a:solidFill>
-              <a:srgbClr val="2F6B34"/>
-            </a:solidFill>
-          </a:ln>
-          <a:effectLst/>
-        </p:spPr>
-        <p:style>
-          <a:lnRef idx="1">
-            <a:schemeClr val="accent1"/>
-          </a:lnRef>
-          <a:fillRef idx="3">
-            <a:schemeClr val="accent1"/>
-          </a:fillRef>
-          <a:effectRef idx="2">
-            <a:schemeClr val="accent1"/>
-          </a:effectRef>
-          <a:fontRef idx="minor">
-            <a:schemeClr val="lt1"/>
-          </a:fontRef>
-        </p:style>
-        <p:txBody>
-          <a:bodyPr rtlCol="0" anchor="ctr" wrap="square" lIns="76200" rIns="76200" tIns="76200" bIns="76200"/>
-          <a:lstStyle/>
-          <a:p>
-            <a:pPr algn="ctr">
-              <a:lnSpc>
-                <a:spcPct val="115000"/>
-              </a:lnSpc>
-              <a:spcAft>
-                <a:spcPts val="600"/>
-              </a:spcAft>
-            </a:pPr>
-            <a:r>
-              <a:rPr sz="2200" b="1">
-                <a:solidFill>
-                  <a:srgbClr val="14213D"/>
-                </a:solidFill>
-                <a:latin typeface="Arial"/>
-              </a:rPr>
-              <a:t>Cheap right, team wrong</a:t>
-            </a:r>
-          </a:p>
-          <a:p>
-            <a:pPr algn="ctr">
-              <a:lnSpc>
-                <a:spcPct val="115000"/>
-              </a:lnSpc>
-              <a:spcAft>
-                <a:spcPts val="0"/>
-              </a:spcAft>
-            </a:pPr>
-            <a:r>
-              <a:rPr sz="2000" b="1">
-                <a:solidFill>
-                  <a:srgbClr val="2F6B34"/>
-                </a:solidFill>
-                <a:latin typeface="Arial"/>
-              </a:rPr>
-              <a:t>save a point</a:t>
+              <a:t>Many rules: test from safe to risky</a:t>
             </a:r>
           </a:p>
         </p:txBody>
       </p:sp>
       <p:pic>
         <p:nvPicPr>
-          <p:cNvPr id="8" name="Picture 7" descr="c_tests.png"/>
+          <p:cNvPr id="5" name="Picture 4" descr="c_sweep.png"/>
           <p:cNvPicPr>
             <a:picLocks noChangeAspect="1"/>
           </p:cNvPicPr>
@@ -7148,8 +7568,8 @@
         </p:blipFill>
         <p:spPr>
           <a:xfrm>
-            <a:off x="5016500" y="2322816"/>
-            <a:ext cx="6362700" cy="2466366"/>
+            <a:off x="2179492" y="1587500"/>
+            <a:ext cx="7833014" cy="4445000"/>
           </a:xfrm>
           <a:prstGeom prst="rect">
             <a:avLst/>
@@ -7158,14 +7578,14 @@
       </p:pic>
       <p:sp>
         <p:nvSpPr>
-          <p:cNvPr id="9" name="TextBox 8"/>
+          <p:cNvPr id="6" name="TextBox 5"/>
           <p:cNvSpPr txBox="1"/>
           <p:nvPr/>
         </p:nvSpPr>
         <p:spPr>
           <a:xfrm>
-            <a:off x="5016500" y="5334000"/>
-            <a:ext cx="6362700" cy="508000"/>
+            <a:off x="812800" y="6096000"/>
+            <a:ext cx="10566400" cy="254000"/>
           </a:xfrm>
           <a:prstGeom prst="rect">
             <a:avLst/>
@@ -7187,13 +7607,13 @@
               </a:spcAft>
             </a:pPr>
             <a:r>
-              <a:rPr sz="1700" b="0">
-                <a:solidFill>
-                  <a:srgbClr val="6B7280"/>
-                </a:solidFill>
-                <a:latin typeface="Arial"/>
-              </a:rPr>
-              <a:t>Tokens each valid test can certify at ε = 5. Lower is better.</a:t>
+              <a:rPr sz="1500" b="0">
+                <a:solidFill>
+                  <a:srgbClr val="6B7480"/>
+                </a:solidFill>
+                <a:latin typeface="Arial"/>
+              </a:rPr>
+              <a:t>gpt-oss-120b on MuSiQue, option A (direct answer’s confidence), one calibration half.</a:t>
             </a:r>
           </a:p>
         </p:txBody>
@@ -7212,7 +7632,7 @@
     <p:bg>
       <p:bgPr>
         <a:solidFill>
-          <a:srgbClr val="F7F6F2"/>
+          <a:srgbClr val="F6F8FB"/>
         </a:solidFill>
         <a:effectLst/>
       </p:bgPr>
@@ -7257,7 +7677,7 @@
             <a:r>
               <a:rPr sz="1200" b="0">
                 <a:solidFill>
-                  <a:srgbClr val="6B7280"/>
+                  <a:srgbClr val="6B7480"/>
                 </a:solidFill>
                 <a:latin typeface="Arial"/>
               </a:rPr>
@@ -7299,11 +7719,11 @@
             <a:r>
               <a:rPr sz="1300" b="1">
                 <a:solidFill>
-                  <a:srgbClr val="B4541A"/>
-                </a:solidFill>
-                <a:latin typeface="Arial"/>
-              </a:rPr>
-              <a:t>HOW TO CLIMB · 4 DEPTH</a:t>
+                  <a:srgbClr val="006FCF"/>
+                </a:solidFill>
+                <a:latin typeface="Arial"/>
+              </a:rPr>
+              <a:t>HOW TO CLIMB · 3 CHECK</a:t>
             </a:r>
           </a:p>
         </p:txBody>
@@ -7341,67 +7761,25 @@
             <a:r>
               <a:rPr sz="3000" b="1">
                 <a:solidFill>
-                  <a:srgbClr val="14213D"/>
+                  <a:srgbClr val="00175A"/>
                 </a:solidFill>
                 <a:latin typeface="Georgia"/>
               </a:rPr>
-              <a:t>One rung or two? The data decides</a:t>
-            </a:r>
-          </a:p>
-        </p:txBody>
-      </p:sp>
-      <p:sp>
-        <p:nvSpPr>
-          <p:cNvPr id="5" name="TextBox 4"/>
-          <p:cNvSpPr txBox="1"/>
-          <p:nvPr/>
-        </p:nvSpPr>
-        <p:spPr>
-          <a:xfrm>
-            <a:off x="812800" y="1778000"/>
-            <a:ext cx="5715000" cy="317500"/>
-          </a:xfrm>
-          <a:prstGeom prst="rect">
-            <a:avLst/>
-          </a:prstGeom>
-          <a:noFill/>
-        </p:spPr>
-        <p:txBody>
-          <a:bodyPr wrap="square" lIns="0" rIns="0" tIns="0" bIns="0" anchor="t">
-            <a:spAutoFit/>
-          </a:bodyPr>
-          <a:lstStyle/>
-          <a:p>
-            <a:pPr algn="l">
-              <a:lnSpc>
-                <a:spcPct val="115000"/>
-              </a:lnSpc>
-              <a:spcAft>
-                <a:spcPts val="0"/>
-              </a:spcAft>
-            </a:pPr>
-            <a:r>
-              <a:rPr sz="2200" b="1">
-                <a:solidFill>
-                  <a:srgbClr val="14213D"/>
-                </a:solidFill>
-                <a:latin typeface="Arial"/>
-              </a:rPr>
-              <a:t>Option A: one rung</a:t>
-            </a:r>
-          </a:p>
-        </p:txBody>
-      </p:sp>
-      <p:sp>
-        <p:nvSpPr>
-          <p:cNvPr id="6" name="Rounded Rectangle 5"/>
+              <a:t>Count the answers skipping saves, too</a:t>
+            </a:r>
+          </a:p>
+        </p:txBody>
+      </p:sp>
+      <p:sp>
+        <p:nvSpPr>
+          <p:cNvPr id="5" name="Rounded Rectangle 4"/>
           <p:cNvSpPr/>
           <p:nvPr/>
         </p:nvSpPr>
         <p:spPr>
           <a:xfrm>
-            <a:off x="812800" y="2159000"/>
-            <a:ext cx="2667000" cy="952500"/>
+            <a:off x="812800" y="1841500"/>
+            <a:ext cx="3810000" cy="1016000"/>
           </a:xfrm>
           <a:prstGeom prst="roundRect">
             <a:avLst>
@@ -7409,11 +7787,11 @@
             </a:avLst>
           </a:prstGeom>
           <a:solidFill>
-            <a:srgbClr val="E2EAF5"/>
+            <a:srgbClr val="F6E3E0"/>
           </a:solidFill>
-          <a:ln w="25400">
+          <a:ln w="31750">
             <a:solidFill>
-              <a:srgbClr val="2E5C99"/>
+              <a:srgbClr val="B03A2E"/>
             </a:solidFill>
           </a:ln>
           <a:effectLst/>
@@ -7433,7 +7811,7 @@
           </a:fontRef>
         </p:style>
         <p:txBody>
-          <a:bodyPr rtlCol="0" anchor="ctr" wrap="square" lIns="88900" rIns="88900" tIns="88900" bIns="88900"/>
+          <a:bodyPr rtlCol="0" anchor="ctr" wrap="square" lIns="76200" rIns="76200" tIns="76200" bIns="76200"/>
           <a:lstStyle/>
           <a:p>
             <a:pPr algn="ctr">
@@ -7441,40 +7819,63 @@
                 <a:spcPct val="115000"/>
               </a:lnSpc>
               <a:spcAft>
-                <a:spcPts val="0"/>
-              </a:spcAft>
-            </a:pPr>
-            <a:r>
-              <a:rPr sz="2100" b="1">
-                <a:solidFill>
-                  <a:srgbClr val="14213D"/>
-                </a:solidFill>
-                <a:latin typeface="Arial"/>
-              </a:rPr>
-              <a:t>Direct answer</a:t>
-            </a:r>
-          </a:p>
-        </p:txBody>
-      </p:sp>
-      <p:sp>
-        <p:nvSpPr>
-          <p:cNvPr id="7" name="Right Arrow 6"/>
+                <a:spcPts val="600"/>
+              </a:spcAft>
+            </a:pPr>
+            <a:r>
+              <a:rPr sz="2200" b="1">
+                <a:solidFill>
+                  <a:srgbClr val="00175A"/>
+                </a:solidFill>
+                <a:latin typeface="Arial"/>
+              </a:rPr>
+              <a:t>Cheap wrong, team right</a:t>
+            </a:r>
+          </a:p>
+          <a:p>
+            <a:pPr algn="ctr">
+              <a:lnSpc>
+                <a:spcPct val="115000"/>
+              </a:lnSpc>
+              <a:spcAft>
+                <a:spcPts val="0"/>
+              </a:spcAft>
+            </a:pPr>
+            <a:r>
+              <a:rPr sz="2000" b="1">
+                <a:solidFill>
+                  <a:srgbClr val="B03A2E"/>
+                </a:solidFill>
+                <a:latin typeface="Arial"/>
+              </a:rPr>
+              <a:t>lose a point</a:t>
+            </a:r>
+          </a:p>
+        </p:txBody>
+      </p:sp>
+      <p:sp>
+        <p:nvSpPr>
+          <p:cNvPr id="6" name="Rounded Rectangle 5"/>
           <p:cNvSpPr/>
           <p:nvPr/>
         </p:nvSpPr>
         <p:spPr>
           <a:xfrm>
-            <a:off x="3556000" y="2476500"/>
-            <a:ext cx="444500" cy="317500"/>
-          </a:xfrm>
-          <a:prstGeom prst="rightArrow">
-            <a:avLst/>
+            <a:off x="812800" y="3048000"/>
+            <a:ext cx="3810000" cy="1016000"/>
+          </a:xfrm>
+          <a:prstGeom prst="roundRect">
+            <a:avLst>
+              <a:gd name="adj" fmla="val 10000"/>
+            </a:avLst>
           </a:prstGeom>
           <a:solidFill>
-            <a:srgbClr val="6B7280"/>
+            <a:srgbClr val="E9EEF5"/>
           </a:solidFill>
-          <a:ln>
-            <a:noFill/>
+          <a:ln w="31750">
+            <a:solidFill>
+              <a:srgbClr val="6B7480"/>
+            </a:solidFill>
           </a:ln>
           <a:effectLst/>
         </p:spPr>
@@ -7493,23 +7894,58 @@
           </a:fontRef>
         </p:style>
         <p:txBody>
-          <a:bodyPr rtlCol="0" anchor="ctr"/>
-          <a:lstStyle/>
-          <a:p>
-            <a:pPr algn="ctr"/>
-          </a:p>
-        </p:txBody>
-      </p:sp>
-      <p:sp>
-        <p:nvSpPr>
-          <p:cNvPr id="8" name="Rounded Rectangle 7"/>
+          <a:bodyPr rtlCol="0" anchor="ctr" wrap="square" lIns="76200" rIns="76200" tIns="76200" bIns="76200"/>
+          <a:lstStyle/>
+          <a:p>
+            <a:pPr algn="ctr">
+              <a:lnSpc>
+                <a:spcPct val="115000"/>
+              </a:lnSpc>
+              <a:spcAft>
+                <a:spcPts val="600"/>
+              </a:spcAft>
+            </a:pPr>
+            <a:r>
+              <a:rPr sz="2200" b="1">
+                <a:solidFill>
+                  <a:srgbClr val="00175A"/>
+                </a:solidFill>
+                <a:latin typeface="Arial"/>
+              </a:rPr>
+              <a:t>Same result</a:t>
+            </a:r>
+          </a:p>
+          <a:p>
+            <a:pPr algn="ctr">
+              <a:lnSpc>
+                <a:spcPct val="115000"/>
+              </a:lnSpc>
+              <a:spcAft>
+                <a:spcPts val="0"/>
+              </a:spcAft>
+            </a:pPr>
+            <a:r>
+              <a:rPr sz="2000" b="1">
+                <a:solidFill>
+                  <a:srgbClr val="6B7480"/>
+                </a:solidFill>
+                <a:latin typeface="Arial"/>
+              </a:rPr>
+              <a:t>no change (most tasks)</a:t>
+            </a:r>
+          </a:p>
+        </p:txBody>
+      </p:sp>
+      <p:sp>
+        <p:nvSpPr>
+          <p:cNvPr id="7" name="Rounded Rectangle 6"/>
           <p:cNvSpPr/>
           <p:nvPr/>
         </p:nvSpPr>
         <p:spPr>
           <a:xfrm>
-            <a:off x="4095750" y="2159000"/>
-            <a:ext cx="2667000" cy="952500"/>
+            <a:off x="812800" y="4254500"/>
+            <a:ext cx="3810000" cy="1016000"/>
           </a:xfrm>
           <a:prstGeom prst="roundRect">
             <a:avLst>
@@ -7519,7 +7955,7 @@
           <a:solidFill>
             <a:srgbClr val="E3ECE2"/>
           </a:solidFill>
-          <a:ln w="25400">
+          <a:ln w="31750">
             <a:solidFill>
               <a:srgbClr val="2F6B34"/>
             </a:solidFill>
@@ -7541,7 +7977,7 @@
           </a:fontRef>
         </p:style>
         <p:txBody>
-          <a:bodyPr rtlCol="0" anchor="ctr" wrap="square" lIns="88900" rIns="88900" tIns="88900" bIns="88900"/>
+          <a:bodyPr rtlCol="0" anchor="ctr" wrap="square" lIns="76200" rIns="76200" tIns="76200" bIns="76200"/>
           <a:lstStyle/>
           <a:p>
             <a:pPr algn="ctr">
@@ -7549,21 +7985,64 @@
                 <a:spcPct val="115000"/>
               </a:lnSpc>
               <a:spcAft>
-                <a:spcPts val="0"/>
-              </a:spcAft>
-            </a:pPr>
-            <a:r>
-              <a:rPr sz="2100" b="1">
+                <a:spcPts val="600"/>
+              </a:spcAft>
+            </a:pPr>
+            <a:r>
+              <a:rPr sz="2200" b="1">
+                <a:solidFill>
+                  <a:srgbClr val="00175A"/>
+                </a:solidFill>
+                <a:latin typeface="Arial"/>
+              </a:rPr>
+              <a:t>Cheap right, team wrong</a:t>
+            </a:r>
+          </a:p>
+          <a:p>
+            <a:pPr algn="ctr">
+              <a:lnSpc>
+                <a:spcPct val="115000"/>
+              </a:lnSpc>
+              <a:spcAft>
+                <a:spcPts val="0"/>
+              </a:spcAft>
+            </a:pPr>
+            <a:r>
+              <a:rPr sz="2000" b="1">
                 <a:solidFill>
                   <a:srgbClr val="2F6B34"/>
                 </a:solidFill>
                 <a:latin typeface="Arial"/>
               </a:rPr>
-              <a:t>confident? stop</a:t>
-            </a:r>
-          </a:p>
-        </p:txBody>
-      </p:sp>
+              <a:t>save a point</a:t>
+            </a:r>
+          </a:p>
+        </p:txBody>
+      </p:sp>
+      <p:pic>
+        <p:nvPicPr>
+          <p:cNvPr id="8" name="Picture 7" descr="c_tests.png"/>
+          <p:cNvPicPr>
+            <a:picLocks noChangeAspect="1"/>
+          </p:cNvPicPr>
+          <p:nvPr/>
+        </p:nvPicPr>
+        <p:blipFill>
+          <a:blip r:embed="rId3"/>
+          <a:stretch>
+            <a:fillRect/>
+          </a:stretch>
+        </p:blipFill>
+        <p:spPr>
+          <a:xfrm>
+            <a:off x="5016500" y="2322816"/>
+            <a:ext cx="6362700" cy="2466366"/>
+          </a:xfrm>
+          <a:prstGeom prst="rect">
+            <a:avLst/>
+          </a:prstGeom>
+        </p:spPr>
+      </p:pic>
       <p:sp>
         <p:nvSpPr>
           <p:cNvPr id="9" name="TextBox 8"/>
@@ -7572,8 +8051,8 @@
         </p:nvSpPr>
         <p:spPr>
           <a:xfrm>
-            <a:off x="6889750" y="2444750"/>
-            <a:ext cx="1587500" cy="381000"/>
+            <a:off x="5016500" y="5334000"/>
+            <a:ext cx="6362700" cy="508000"/>
           </a:xfrm>
           <a:prstGeom prst="rect">
             <a:avLst/>
@@ -7595,369 +8074,13 @@
               </a:spcAft>
             </a:pPr>
             <a:r>
-              <a:rPr sz="1900" b="1">
-                <a:solidFill>
-                  <a:srgbClr val="B4541A"/>
-                </a:solidFill>
-                <a:latin typeface="Arial"/>
-              </a:rPr>
-              <a:t>otherwise → team</a:t>
-            </a:r>
-          </a:p>
-        </p:txBody>
-      </p:sp>
-      <p:sp>
-        <p:nvSpPr>
-          <p:cNvPr id="10" name="TextBox 9"/>
-          <p:cNvSpPr txBox="1"/>
-          <p:nvPr/>
-        </p:nvSpPr>
-        <p:spPr>
-          <a:xfrm>
-            <a:off x="812800" y="3429000"/>
-            <a:ext cx="5715000" cy="317500"/>
-          </a:xfrm>
-          <a:prstGeom prst="rect">
-            <a:avLst/>
-          </a:prstGeom>
-          <a:noFill/>
-        </p:spPr>
-        <p:txBody>
-          <a:bodyPr wrap="square" lIns="0" rIns="0" tIns="0" bIns="0" anchor="t">
-            <a:spAutoFit/>
-          </a:bodyPr>
-          <a:lstStyle/>
-          <a:p>
-            <a:pPr algn="l">
-              <a:lnSpc>
-                <a:spcPct val="115000"/>
-              </a:lnSpc>
-              <a:spcAft>
-                <a:spcPts val="0"/>
-              </a:spcAft>
-            </a:pPr>
-            <a:r>
-              <a:rPr sz="2200" b="1">
-                <a:solidFill>
-                  <a:srgbClr val="14213D"/>
-                </a:solidFill>
-                <a:latin typeface="Arial"/>
-              </a:rPr>
-              <a:t>Option B: two rungs</a:t>
-            </a:r>
-          </a:p>
-        </p:txBody>
-      </p:sp>
-      <p:sp>
-        <p:nvSpPr>
-          <p:cNvPr id="11" name="Rounded Rectangle 10"/>
-          <p:cNvSpPr/>
-          <p:nvPr/>
-        </p:nvSpPr>
-        <p:spPr>
-          <a:xfrm>
-            <a:off x="812800" y="3810000"/>
-            <a:ext cx="2667000" cy="952500"/>
-          </a:xfrm>
-          <a:prstGeom prst="roundRect">
-            <a:avLst>
-              <a:gd name="adj" fmla="val 10000"/>
-            </a:avLst>
-          </a:prstGeom>
-          <a:solidFill>
-            <a:srgbClr val="E2EAF5"/>
-          </a:solidFill>
-          <a:ln w="25400">
-            <a:solidFill>
-              <a:srgbClr val="2E5C99"/>
-            </a:solidFill>
-          </a:ln>
-          <a:effectLst/>
-        </p:spPr>
-        <p:style>
-          <a:lnRef idx="1">
-            <a:schemeClr val="accent1"/>
-          </a:lnRef>
-          <a:fillRef idx="3">
-            <a:schemeClr val="accent1"/>
-          </a:fillRef>
-          <a:effectRef idx="2">
-            <a:schemeClr val="accent1"/>
-          </a:effectRef>
-          <a:fontRef idx="minor">
-            <a:schemeClr val="lt1"/>
-          </a:fontRef>
-        </p:style>
-        <p:txBody>
-          <a:bodyPr rtlCol="0" anchor="ctr" wrap="square" lIns="88900" rIns="88900" tIns="88900" bIns="88900"/>
-          <a:lstStyle/>
-          <a:p>
-            <a:pPr algn="ctr">
-              <a:lnSpc>
-                <a:spcPct val="115000"/>
-              </a:lnSpc>
-              <a:spcAft>
-                <a:spcPts val="0"/>
-              </a:spcAft>
-            </a:pPr>
-            <a:r>
-              <a:rPr sz="2100" b="1">
-                <a:solidFill>
-                  <a:srgbClr val="14213D"/>
-                </a:solidFill>
-                <a:latin typeface="Arial"/>
-              </a:rPr>
-              <a:t>Direct answer + single agent</a:t>
-            </a:r>
-          </a:p>
-        </p:txBody>
-      </p:sp>
-      <p:sp>
-        <p:nvSpPr>
-          <p:cNvPr id="12" name="Right Arrow 11"/>
-          <p:cNvSpPr/>
-          <p:nvPr/>
-        </p:nvSpPr>
-        <p:spPr>
-          <a:xfrm>
-            <a:off x="3556000" y="4127500"/>
-            <a:ext cx="444500" cy="317500"/>
-          </a:xfrm>
-          <a:prstGeom prst="rightArrow">
-            <a:avLst/>
-          </a:prstGeom>
-          <a:solidFill>
-            <a:srgbClr val="6B7280"/>
-          </a:solidFill>
-          <a:ln>
-            <a:noFill/>
-          </a:ln>
-          <a:effectLst/>
-        </p:spPr>
-        <p:style>
-          <a:lnRef idx="1">
-            <a:schemeClr val="accent1"/>
-          </a:lnRef>
-          <a:fillRef idx="3">
-            <a:schemeClr val="accent1"/>
-          </a:fillRef>
-          <a:effectRef idx="2">
-            <a:schemeClr val="accent1"/>
-          </a:effectRef>
-          <a:fontRef idx="minor">
-            <a:schemeClr val="lt1"/>
-          </a:fontRef>
-        </p:style>
-        <p:txBody>
-          <a:bodyPr rtlCol="0" anchor="ctr"/>
-          <a:lstStyle/>
-          <a:p>
-            <a:pPr algn="ctr"/>
-          </a:p>
-        </p:txBody>
-      </p:sp>
-      <p:sp>
-        <p:nvSpPr>
-          <p:cNvPr id="13" name="Rounded Rectangle 12"/>
-          <p:cNvSpPr/>
-          <p:nvPr/>
-        </p:nvSpPr>
-        <p:spPr>
-          <a:xfrm>
-            <a:off x="4095750" y="3810000"/>
-            <a:ext cx="2667000" cy="952500"/>
-          </a:xfrm>
-          <a:prstGeom prst="roundRect">
-            <a:avLst>
-              <a:gd name="adj" fmla="val 10000"/>
-            </a:avLst>
-          </a:prstGeom>
-          <a:solidFill>
-            <a:srgbClr val="E3ECE2"/>
-          </a:solidFill>
-          <a:ln w="25400">
-            <a:solidFill>
-              <a:srgbClr val="2F6B34"/>
-            </a:solidFill>
-          </a:ln>
-          <a:effectLst/>
-        </p:spPr>
-        <p:style>
-          <a:lnRef idx="1">
-            <a:schemeClr val="accent1"/>
-          </a:lnRef>
-          <a:fillRef idx="3">
-            <a:schemeClr val="accent1"/>
-          </a:fillRef>
-          <a:effectRef idx="2">
-            <a:schemeClr val="accent1"/>
-          </a:effectRef>
-          <a:fontRef idx="minor">
-            <a:schemeClr val="lt1"/>
-          </a:fontRef>
-        </p:style>
-        <p:txBody>
-          <a:bodyPr rtlCol="0" anchor="ctr" wrap="square" lIns="88900" rIns="88900" tIns="88900" bIns="88900"/>
-          <a:lstStyle/>
-          <a:p>
-            <a:pPr algn="ctr">
-              <a:lnSpc>
-                <a:spcPct val="115000"/>
-              </a:lnSpc>
-              <a:spcAft>
-                <a:spcPts val="0"/>
-              </a:spcAft>
-            </a:pPr>
-            <a:r>
-              <a:rPr sz="2100" b="1">
-                <a:solidFill>
-                  <a:srgbClr val="2F6B34"/>
-                </a:solidFill>
-                <a:latin typeface="Arial"/>
-              </a:rPr>
-              <a:t>agree and confident? stop</a:t>
-            </a:r>
-          </a:p>
-        </p:txBody>
-      </p:sp>
-      <p:sp>
-        <p:nvSpPr>
-          <p:cNvPr id="14" name="TextBox 13"/>
-          <p:cNvSpPr txBox="1"/>
-          <p:nvPr/>
-        </p:nvSpPr>
-        <p:spPr>
-          <a:xfrm>
-            <a:off x="6889750" y="4095750"/>
-            <a:ext cx="1587500" cy="381000"/>
-          </a:xfrm>
-          <a:prstGeom prst="rect">
-            <a:avLst/>
-          </a:prstGeom>
-          <a:noFill/>
-        </p:spPr>
-        <p:txBody>
-          <a:bodyPr wrap="square" lIns="0" rIns="0" tIns="0" bIns="0" anchor="t">
-            <a:spAutoFit/>
-          </a:bodyPr>
-          <a:lstStyle/>
-          <a:p>
-            <a:pPr algn="l">
-              <a:lnSpc>
-                <a:spcPct val="115000"/>
-              </a:lnSpc>
-              <a:spcAft>
-                <a:spcPts val="0"/>
-              </a:spcAft>
-            </a:pPr>
-            <a:r>
-              <a:rPr sz="1900" b="1">
-                <a:solidFill>
-                  <a:srgbClr val="B4541A"/>
-                </a:solidFill>
-                <a:latin typeface="Arial"/>
-              </a:rPr>
-              <a:t>otherwise → team</a:t>
-            </a:r>
-          </a:p>
-        </p:txBody>
-      </p:sp>
-      <p:sp>
-        <p:nvSpPr>
-          <p:cNvPr id="15" name="Rounded Rectangle 14"/>
-          <p:cNvSpPr/>
-          <p:nvPr/>
-        </p:nvSpPr>
-        <p:spPr>
-          <a:xfrm>
-            <a:off x="8763000" y="1905000"/>
-            <a:ext cx="2616200" cy="3175000"/>
-          </a:xfrm>
-          <a:prstGeom prst="roundRect">
-            <a:avLst>
-              <a:gd name="adj" fmla="val 4368"/>
-            </a:avLst>
-          </a:prstGeom>
-          <a:solidFill>
-            <a:srgbClr val="14213D"/>
-          </a:solidFill>
-          <a:ln>
-            <a:noFill/>
-          </a:ln>
-          <a:effectLst/>
-        </p:spPr>
-        <p:style>
-          <a:lnRef idx="1">
-            <a:schemeClr val="accent1"/>
-          </a:lnRef>
-          <a:fillRef idx="3">
-            <a:schemeClr val="accent1"/>
-          </a:fillRef>
-          <a:effectRef idx="2">
-            <a:schemeClr val="accent1"/>
-          </a:effectRef>
-          <a:fontRef idx="minor">
-            <a:schemeClr val="lt1"/>
-          </a:fontRef>
-        </p:style>
-        <p:txBody>
-          <a:bodyPr rtlCol="0" anchor="ctr" wrap="square" lIns="177800" rIns="177800" tIns="177800" bIns="177800"/>
-          <a:lstStyle/>
-          <a:p>
-            <a:pPr algn="l">
-              <a:lnSpc>
-                <a:spcPct val="115000"/>
-              </a:lnSpc>
-              <a:spcAft>
-                <a:spcPts val="1200"/>
-              </a:spcAft>
-            </a:pPr>
-            <a:r>
-              <a:rPr sz="2400" b="1">
-                <a:solidFill>
-                  <a:srgbClr val="F0A66B"/>
-                </a:solidFill>
-                <a:latin typeface="Arial"/>
-              </a:rPr>
-              <a:t>Check both</a:t>
-            </a:r>
-          </a:p>
-          <a:p>
-            <a:pPr algn="l">
-              <a:lnSpc>
-                <a:spcPct val="115000"/>
-              </a:lnSpc>
-              <a:spcAft>
-                <a:spcPts val="1200"/>
-              </a:spcAft>
-            </a:pPr>
-            <a:r>
-              <a:rPr sz="1800" b="0">
-                <a:solidFill>
-                  <a:srgbClr val="F7F6F2"/>
-                </a:solidFill>
-                <a:latin typeface="Arial"/>
-              </a:rPr>
-              <a:t>on calibration data, then deploy the cheaper one that passes.</a:t>
-            </a:r>
-          </a:p>
-          <a:p>
-            <a:pPr algn="l">
-              <a:lnSpc>
-                <a:spcPct val="115000"/>
-              </a:lnSpc>
-              <a:spcAft>
-                <a:spcPts val="0"/>
-              </a:spcAft>
-            </a:pPr>
-            <a:r>
-              <a:rPr sz="1800" b="0">
-                <a:solidFill>
-                  <a:srgbClr val="C9D1E0"/>
-                </a:solidFill>
-                <a:latin typeface="Arial"/>
-              </a:rPr>
-              <a:t>Neither passes? Always call the team.</a:t>
+              <a:rPr sz="1700" b="0">
+                <a:solidFill>
+                  <a:srgbClr val="6B7480"/>
+                </a:solidFill>
+                <a:latin typeface="Arial"/>
+              </a:rPr>
+              <a:t>Tokens each valid test can certify at ε = 5. Lower is better.</a:t>
             </a:r>
           </a:p>
         </p:txBody>
@@ -7976,7 +8099,7 @@
     <p:bg>
       <p:bgPr>
         <a:solidFill>
-          <a:srgbClr val="F7F6F2"/>
+          <a:srgbClr val="F6F8FB"/>
         </a:solidFill>
         <a:effectLst/>
       </p:bgPr>
@@ -8021,7 +8144,7 @@
             <a:r>
               <a:rPr sz="1200" b="0">
                 <a:solidFill>
-                  <a:srgbClr val="6B7280"/>
+                  <a:srgbClr val="6B7480"/>
                 </a:solidFill>
                 <a:latin typeface="Arial"/>
               </a:rPr>
@@ -8063,11 +8186,11 @@
             <a:r>
               <a:rPr sz="1300" b="1">
                 <a:solidFill>
-                  <a:srgbClr val="B4541A"/>
-                </a:solidFill>
-                <a:latin typeface="Arial"/>
-              </a:rPr>
-              <a:t>EXPERIMENTS</a:t>
+                  <a:srgbClr val="006FCF"/>
+                </a:solidFill>
+                <a:latin typeface="Arial"/>
+              </a:rPr>
+              <a:t>HOW TO CLIMB · 4 DEPTH</a:t>
             </a:r>
           </a:p>
         </p:txBody>
@@ -8105,11 +8228,11 @@
             <a:r>
               <a:rPr sz="3000" b="1">
                 <a:solidFill>
-                  <a:srgbClr val="14213D"/>
+                  <a:srgbClr val="00175A"/>
                 </a:solidFill>
                 <a:latin typeface="Georgia"/>
               </a:rPr>
-              <a:t>3 models × 4 benchmarks = 12 settings</a:t>
+              <a:t>One rung or two? The data decides</a:t>
             </a:r>
           </a:p>
         </p:txBody>
@@ -8122,8 +8245,8 @@
         </p:nvSpPr>
         <p:spPr>
           <a:xfrm>
-            <a:off x="3048000" y="1841500"/>
-            <a:ext cx="1905000" cy="508000"/>
+            <a:off x="812800" y="1778000"/>
+            <a:ext cx="5715000" cy="317500"/>
           </a:xfrm>
           <a:prstGeom prst="rect">
             <a:avLst/>
@@ -8136,7 +8259,7 @@
           </a:bodyPr>
           <a:lstStyle/>
           <a:p>
-            <a:pPr algn="ctr">
+            <a:pPr algn="l">
               <a:lnSpc>
                 <a:spcPct val="115000"/>
               </a:lnSpc>
@@ -8147,269 +8270,25 @@
             <a:r>
               <a:rPr sz="2200" b="1">
                 <a:solidFill>
-                  <a:srgbClr val="14213D"/>
-                </a:solidFill>
-                <a:latin typeface="Arial"/>
-              </a:rPr>
-              <a:t>MATH</a:t>
-            </a:r>
-          </a:p>
-          <a:p>
-            <a:pPr algn="ctr">
-              <a:lnSpc>
-                <a:spcPct val="115000"/>
-              </a:lnSpc>
-              <a:spcAft>
-                <a:spcPts val="0"/>
-              </a:spcAft>
-            </a:pPr>
-            <a:r>
-              <a:rPr sz="1600" b="0">
-                <a:solidFill>
-                  <a:srgbClr val="6B7280"/>
-                </a:solidFill>
-                <a:latin typeface="Arial"/>
-              </a:rPr>
-              <a:t>math</a:t>
-            </a:r>
-          </a:p>
-        </p:txBody>
-      </p:sp>
-      <p:sp>
-        <p:nvSpPr>
-          <p:cNvPr id="6" name="TextBox 5"/>
-          <p:cNvSpPr txBox="1"/>
-          <p:nvPr/>
-        </p:nvSpPr>
-        <p:spPr>
-          <a:xfrm>
-            <a:off x="5080000" y="1841500"/>
-            <a:ext cx="1905000" cy="508000"/>
-          </a:xfrm>
-          <a:prstGeom prst="rect">
-            <a:avLst/>
-          </a:prstGeom>
-          <a:noFill/>
-        </p:spPr>
-        <p:txBody>
-          <a:bodyPr wrap="square" lIns="0" rIns="0" tIns="0" bIns="0" anchor="t">
-            <a:spAutoFit/>
-          </a:bodyPr>
-          <a:lstStyle/>
-          <a:p>
-            <a:pPr algn="ctr">
-              <a:lnSpc>
-                <a:spcPct val="115000"/>
-              </a:lnSpc>
-              <a:spcAft>
-                <a:spcPts val="0"/>
-              </a:spcAft>
-            </a:pPr>
-            <a:r>
-              <a:rPr sz="2200" b="1">
-                <a:solidFill>
-                  <a:srgbClr val="14213D"/>
-                </a:solidFill>
-                <a:latin typeface="Arial"/>
-              </a:rPr>
-              <a:t>FRAMES</a:t>
-            </a:r>
-          </a:p>
-          <a:p>
-            <a:pPr algn="ctr">
-              <a:lnSpc>
-                <a:spcPct val="115000"/>
-              </a:lnSpc>
-              <a:spcAft>
-                <a:spcPts val="0"/>
-              </a:spcAft>
-            </a:pPr>
-            <a:r>
-              <a:rPr sz="1600" b="0">
-                <a:solidFill>
-                  <a:srgbClr val="6B7280"/>
-                </a:solidFill>
-                <a:latin typeface="Arial"/>
-              </a:rPr>
-              <a:t>open-book QA</a:t>
-            </a:r>
-          </a:p>
-        </p:txBody>
-      </p:sp>
-      <p:sp>
-        <p:nvSpPr>
-          <p:cNvPr id="7" name="TextBox 6"/>
-          <p:cNvSpPr txBox="1"/>
-          <p:nvPr/>
-        </p:nvSpPr>
-        <p:spPr>
-          <a:xfrm>
-            <a:off x="7112000" y="1841500"/>
-            <a:ext cx="1905000" cy="508000"/>
-          </a:xfrm>
-          <a:prstGeom prst="rect">
-            <a:avLst/>
-          </a:prstGeom>
-          <a:noFill/>
-        </p:spPr>
-        <p:txBody>
-          <a:bodyPr wrap="square" lIns="0" rIns="0" tIns="0" bIns="0" anchor="t">
-            <a:spAutoFit/>
-          </a:bodyPr>
-          <a:lstStyle/>
-          <a:p>
-            <a:pPr algn="ctr">
-              <a:lnSpc>
-                <a:spcPct val="115000"/>
-              </a:lnSpc>
-              <a:spcAft>
-                <a:spcPts val="0"/>
-              </a:spcAft>
-            </a:pPr>
-            <a:r>
-              <a:rPr sz="2200" b="1">
-                <a:solidFill>
-                  <a:srgbClr val="14213D"/>
-                </a:solidFill>
-                <a:latin typeface="Arial"/>
-              </a:rPr>
-              <a:t>MuSiQue</a:t>
-            </a:r>
-          </a:p>
-          <a:p>
-            <a:pPr algn="ctr">
-              <a:lnSpc>
-                <a:spcPct val="115000"/>
-              </a:lnSpc>
-              <a:spcAft>
-                <a:spcPts val="0"/>
-              </a:spcAft>
-            </a:pPr>
-            <a:r>
-              <a:rPr sz="1600" b="0">
-                <a:solidFill>
-                  <a:srgbClr val="6B7280"/>
-                </a:solidFill>
-                <a:latin typeface="Arial"/>
-              </a:rPr>
-              <a:t>open-book QA</a:t>
-            </a:r>
-          </a:p>
-        </p:txBody>
-      </p:sp>
-      <p:sp>
-        <p:nvSpPr>
-          <p:cNvPr id="8" name="TextBox 7"/>
-          <p:cNvSpPr txBox="1"/>
-          <p:nvPr/>
-        </p:nvSpPr>
-        <p:spPr>
-          <a:xfrm>
-            <a:off x="9144000" y="1841500"/>
-            <a:ext cx="1905000" cy="508000"/>
-          </a:xfrm>
-          <a:prstGeom prst="rect">
-            <a:avLst/>
-          </a:prstGeom>
-          <a:noFill/>
-        </p:spPr>
-        <p:txBody>
-          <a:bodyPr wrap="square" lIns="0" rIns="0" tIns="0" bIns="0" anchor="t">
-            <a:spAutoFit/>
-          </a:bodyPr>
-          <a:lstStyle/>
-          <a:p>
-            <a:pPr algn="ctr">
-              <a:lnSpc>
-                <a:spcPct val="115000"/>
-              </a:lnSpc>
-              <a:spcAft>
-                <a:spcPts val="0"/>
-              </a:spcAft>
-            </a:pPr>
-            <a:r>
-              <a:rPr sz="2200" b="1">
-                <a:solidFill>
-                  <a:srgbClr val="14213D"/>
-                </a:solidFill>
-                <a:latin typeface="Arial"/>
-              </a:rPr>
-              <a:t>BBEH</a:t>
-            </a:r>
-          </a:p>
-          <a:p>
-            <a:pPr algn="ctr">
-              <a:lnSpc>
-                <a:spcPct val="115000"/>
-              </a:lnSpc>
-              <a:spcAft>
-                <a:spcPts val="0"/>
-              </a:spcAft>
-            </a:pPr>
-            <a:r>
-              <a:rPr sz="1600" b="0">
-                <a:solidFill>
-                  <a:srgbClr val="6B7280"/>
-                </a:solidFill>
-                <a:latin typeface="Arial"/>
-              </a:rPr>
-              <a:t>hard reasoning</a:t>
-            </a:r>
-          </a:p>
-        </p:txBody>
-      </p:sp>
-      <p:sp>
-        <p:nvSpPr>
-          <p:cNvPr id="9" name="TextBox 8"/>
-          <p:cNvSpPr txBox="1"/>
-          <p:nvPr/>
-        </p:nvSpPr>
-        <p:spPr>
-          <a:xfrm>
-            <a:off x="812800" y="2508250"/>
-            <a:ext cx="2032000" cy="762000"/>
-          </a:xfrm>
-          <a:prstGeom prst="rect">
-            <a:avLst/>
-          </a:prstGeom>
-          <a:noFill/>
-        </p:spPr>
-        <p:txBody>
-          <a:bodyPr wrap="square" lIns="0" rIns="0" tIns="0" bIns="0" anchor="ctr">
-            <a:spAutoFit/>
-          </a:bodyPr>
-          <a:lstStyle/>
-          <a:p>
-            <a:pPr algn="l">
-              <a:lnSpc>
-                <a:spcPct val="115000"/>
-              </a:lnSpc>
-              <a:spcAft>
-                <a:spcPts val="0"/>
-              </a:spcAft>
-            </a:pPr>
-            <a:r>
-              <a:rPr sz="2200" b="1">
-                <a:solidFill>
-                  <a:srgbClr val="14213D"/>
-                </a:solidFill>
-                <a:latin typeface="Arial"/>
-              </a:rPr>
-              <a:t>gpt-oss-20b</a:t>
-            </a:r>
-          </a:p>
-        </p:txBody>
-      </p:sp>
-      <p:sp>
-        <p:nvSpPr>
-          <p:cNvPr id="10" name="Rounded Rectangle 9"/>
+                  <a:srgbClr val="00175A"/>
+                </a:solidFill>
+                <a:latin typeface="Arial"/>
+              </a:rPr>
+              <a:t>Option A: one rung</a:t>
+            </a:r>
+          </a:p>
+        </p:txBody>
+      </p:sp>
+      <p:sp>
+        <p:nvSpPr>
+          <p:cNvPr id="6" name="Rounded Rectangle 5"/>
           <p:cNvSpPr/>
           <p:nvPr/>
         </p:nvSpPr>
         <p:spPr>
           <a:xfrm>
-            <a:off x="3048000" y="2508250"/>
-            <a:ext cx="1905000" cy="762000"/>
+            <a:off x="812800" y="2159000"/>
+            <a:ext cx="2667000" cy="952500"/>
           </a:xfrm>
           <a:prstGeom prst="roundRect">
             <a:avLst>
@@ -8417,11 +8296,11 @@
             </a:avLst>
           </a:prstGeom>
           <a:solidFill>
-            <a:srgbClr val="E2EAF5"/>
+            <a:srgbClr val="E6EBF4"/>
           </a:solidFill>
-          <a:ln w="12700">
+          <a:ln w="25400">
             <a:solidFill>
-              <a:srgbClr val="DDD8CC"/>
+              <a:srgbClr val="00175A"/>
             </a:solidFill>
           </a:ln>
           <a:effectLst/>
@@ -8441,7 +8320,7 @@
           </a:fontRef>
         </p:style>
         <p:txBody>
-          <a:bodyPr rtlCol="0" anchor="ctr" wrap="square" lIns="50800" rIns="50800" tIns="50800" bIns="50800"/>
+          <a:bodyPr rtlCol="0" anchor="ctr" wrap="square" lIns="88900" rIns="88900" tIns="88900" bIns="88900"/>
           <a:lstStyle/>
           <a:p>
             <a:pPr algn="ctr">
@@ -8453,59 +8332,36 @@
               </a:spcAft>
             </a:pPr>
             <a:r>
-              <a:rPr sz="2400" b="1">
-                <a:solidFill>
-                  <a:srgbClr val="14213D"/>
-                </a:solidFill>
-                <a:latin typeface="Arial"/>
-              </a:rPr>
-              <a:t>94.8%</a:t>
-            </a:r>
-          </a:p>
-          <a:p>
-            <a:pPr algn="ctr">
-              <a:lnSpc>
-                <a:spcPct val="115000"/>
-              </a:lnSpc>
-              <a:spcAft>
-                <a:spcPts val="0"/>
-              </a:spcAft>
-            </a:pPr>
-            <a:r>
-              <a:rPr sz="1300" b="0">
-                <a:solidFill>
-                  <a:srgbClr val="6B7280"/>
-                </a:solidFill>
-                <a:latin typeface="Arial"/>
-              </a:rPr>
-              <a:t>team accuracy</a:t>
-            </a:r>
-          </a:p>
-        </p:txBody>
-      </p:sp>
-      <p:sp>
-        <p:nvSpPr>
-          <p:cNvPr id="11" name="Rounded Rectangle 10"/>
+              <a:rPr sz="2100" b="1">
+                <a:solidFill>
+                  <a:srgbClr val="00175A"/>
+                </a:solidFill>
+                <a:latin typeface="Arial"/>
+              </a:rPr>
+              <a:t>Direct answer</a:t>
+            </a:r>
+          </a:p>
+        </p:txBody>
+      </p:sp>
+      <p:sp>
+        <p:nvSpPr>
+          <p:cNvPr id="7" name="Right Arrow 6"/>
           <p:cNvSpPr/>
           <p:nvPr/>
         </p:nvSpPr>
         <p:spPr>
           <a:xfrm>
-            <a:off x="5080000" y="2508250"/>
-            <a:ext cx="1905000" cy="762000"/>
-          </a:xfrm>
-          <a:prstGeom prst="roundRect">
-            <a:avLst>
-              <a:gd name="adj" fmla="val 10000"/>
-            </a:avLst>
+            <a:off x="3556000" y="2476500"/>
+            <a:ext cx="444500" cy="317500"/>
+          </a:xfrm>
+          <a:prstGeom prst="rightArrow">
+            <a:avLst/>
           </a:prstGeom>
           <a:solidFill>
-            <a:srgbClr val="E2EAF5"/>
+            <a:srgbClr val="6B7480"/>
           </a:solidFill>
-          <a:ln w="12700">
-            <a:solidFill>
-              <a:srgbClr val="DDD8CC"/>
-            </a:solidFill>
+          <a:ln>
+            <a:noFill/>
           </a:ln>
           <a:effectLst/>
         </p:spPr>
@@ -8524,58 +8380,23 @@
           </a:fontRef>
         </p:style>
         <p:txBody>
-          <a:bodyPr rtlCol="0" anchor="ctr" wrap="square" lIns="50800" rIns="50800" tIns="50800" bIns="50800"/>
-          <a:lstStyle/>
-          <a:p>
-            <a:pPr algn="ctr">
-              <a:lnSpc>
-                <a:spcPct val="115000"/>
-              </a:lnSpc>
-              <a:spcAft>
-                <a:spcPts val="0"/>
-              </a:spcAft>
-            </a:pPr>
-            <a:r>
-              <a:rPr sz="2400" b="1">
-                <a:solidFill>
-                  <a:srgbClr val="14213D"/>
-                </a:solidFill>
-                <a:latin typeface="Arial"/>
-              </a:rPr>
-              <a:t>76.1%</a:t>
-            </a:r>
-          </a:p>
-          <a:p>
-            <a:pPr algn="ctr">
-              <a:lnSpc>
-                <a:spcPct val="115000"/>
-              </a:lnSpc>
-              <a:spcAft>
-                <a:spcPts val="0"/>
-              </a:spcAft>
-            </a:pPr>
-            <a:r>
-              <a:rPr sz="1300" b="0">
-                <a:solidFill>
-                  <a:srgbClr val="6B7280"/>
-                </a:solidFill>
-                <a:latin typeface="Arial"/>
-              </a:rPr>
-              <a:t>team accuracy</a:t>
-            </a:r>
-          </a:p>
-        </p:txBody>
-      </p:sp>
-      <p:sp>
-        <p:nvSpPr>
-          <p:cNvPr id="12" name="Rounded Rectangle 11"/>
+          <a:bodyPr rtlCol="0" anchor="ctr"/>
+          <a:lstStyle/>
+          <a:p>
+            <a:pPr algn="ctr"/>
+          </a:p>
+        </p:txBody>
+      </p:sp>
+      <p:sp>
+        <p:nvSpPr>
+          <p:cNvPr id="8" name="Rounded Rectangle 7"/>
           <p:cNvSpPr/>
           <p:nvPr/>
         </p:nvSpPr>
         <p:spPr>
           <a:xfrm>
-            <a:off x="7112000" y="2508250"/>
-            <a:ext cx="1905000" cy="762000"/>
+            <a:off x="4095750" y="2159000"/>
+            <a:ext cx="2667000" cy="952500"/>
           </a:xfrm>
           <a:prstGeom prst="roundRect">
             <a:avLst>
@@ -8583,11 +8404,11 @@
             </a:avLst>
           </a:prstGeom>
           <a:solidFill>
-            <a:srgbClr val="E2EAF5"/>
+            <a:srgbClr val="E3ECE2"/>
           </a:solidFill>
-          <a:ln w="12700">
+          <a:ln w="25400">
             <a:solidFill>
-              <a:srgbClr val="DDD8CC"/>
+              <a:srgbClr val="2F6B34"/>
             </a:solidFill>
           </a:ln>
           <a:effectLst/>
@@ -8607,7 +8428,7 @@
           </a:fontRef>
         </p:style>
         <p:txBody>
-          <a:bodyPr rtlCol="0" anchor="ctr" wrap="square" lIns="50800" rIns="50800" tIns="50800" bIns="50800"/>
+          <a:bodyPr rtlCol="0" anchor="ctr" wrap="square" lIns="88900" rIns="88900" tIns="88900" bIns="88900"/>
           <a:lstStyle/>
           <a:p>
             <a:pPr algn="ctr">
@@ -8619,46 +8440,111 @@
               </a:spcAft>
             </a:pPr>
             <a:r>
-              <a:rPr sz="2400" b="1">
-                <a:solidFill>
-                  <a:srgbClr val="14213D"/>
-                </a:solidFill>
-                <a:latin typeface="Arial"/>
-              </a:rPr>
-              <a:t>64.9%</a:t>
-            </a:r>
-          </a:p>
-          <a:p>
-            <a:pPr algn="ctr">
-              <a:lnSpc>
-                <a:spcPct val="115000"/>
-              </a:lnSpc>
-              <a:spcAft>
-                <a:spcPts val="0"/>
-              </a:spcAft>
-            </a:pPr>
-            <a:r>
-              <a:rPr sz="1300" b="0">
-                <a:solidFill>
-                  <a:srgbClr val="6B7280"/>
-                </a:solidFill>
-                <a:latin typeface="Arial"/>
-              </a:rPr>
-              <a:t>team accuracy</a:t>
-            </a:r>
-          </a:p>
-        </p:txBody>
-      </p:sp>
-      <p:sp>
-        <p:nvSpPr>
-          <p:cNvPr id="13" name="Rounded Rectangle 12"/>
+              <a:rPr sz="2100" b="1">
+                <a:solidFill>
+                  <a:srgbClr val="2F6B34"/>
+                </a:solidFill>
+                <a:latin typeface="Arial"/>
+              </a:rPr>
+              <a:t>confident? stop</a:t>
+            </a:r>
+          </a:p>
+        </p:txBody>
+      </p:sp>
+      <p:sp>
+        <p:nvSpPr>
+          <p:cNvPr id="9" name="TextBox 8"/>
+          <p:cNvSpPr txBox="1"/>
+          <p:nvPr/>
+        </p:nvSpPr>
+        <p:spPr>
+          <a:xfrm>
+            <a:off x="6889750" y="2444750"/>
+            <a:ext cx="1587500" cy="381000"/>
+          </a:xfrm>
+          <a:prstGeom prst="rect">
+            <a:avLst/>
+          </a:prstGeom>
+          <a:noFill/>
+        </p:spPr>
+        <p:txBody>
+          <a:bodyPr wrap="square" lIns="0" rIns="0" tIns="0" bIns="0" anchor="t">
+            <a:spAutoFit/>
+          </a:bodyPr>
+          <a:lstStyle/>
+          <a:p>
+            <a:pPr algn="l">
+              <a:lnSpc>
+                <a:spcPct val="115000"/>
+              </a:lnSpc>
+              <a:spcAft>
+                <a:spcPts val="0"/>
+              </a:spcAft>
+            </a:pPr>
+            <a:r>
+              <a:rPr sz="1900" b="1">
+                <a:solidFill>
+                  <a:srgbClr val="006FCF"/>
+                </a:solidFill>
+                <a:latin typeface="Arial"/>
+              </a:rPr>
+              <a:t>otherwise → team</a:t>
+            </a:r>
+          </a:p>
+        </p:txBody>
+      </p:sp>
+      <p:sp>
+        <p:nvSpPr>
+          <p:cNvPr id="10" name="TextBox 9"/>
+          <p:cNvSpPr txBox="1"/>
+          <p:nvPr/>
+        </p:nvSpPr>
+        <p:spPr>
+          <a:xfrm>
+            <a:off x="812800" y="3429000"/>
+            <a:ext cx="5715000" cy="317500"/>
+          </a:xfrm>
+          <a:prstGeom prst="rect">
+            <a:avLst/>
+          </a:prstGeom>
+          <a:noFill/>
+        </p:spPr>
+        <p:txBody>
+          <a:bodyPr wrap="square" lIns="0" rIns="0" tIns="0" bIns="0" anchor="t">
+            <a:spAutoFit/>
+          </a:bodyPr>
+          <a:lstStyle/>
+          <a:p>
+            <a:pPr algn="l">
+              <a:lnSpc>
+                <a:spcPct val="115000"/>
+              </a:lnSpc>
+              <a:spcAft>
+                <a:spcPts val="0"/>
+              </a:spcAft>
+            </a:pPr>
+            <a:r>
+              <a:rPr sz="2200" b="1">
+                <a:solidFill>
+                  <a:srgbClr val="00175A"/>
+                </a:solidFill>
+                <a:latin typeface="Arial"/>
+              </a:rPr>
+              <a:t>Option B: two rungs</a:t>
+            </a:r>
+          </a:p>
+        </p:txBody>
+      </p:sp>
+      <p:sp>
+        <p:nvSpPr>
+          <p:cNvPr id="11" name="Rounded Rectangle 10"/>
           <p:cNvSpPr/>
           <p:nvPr/>
         </p:nvSpPr>
         <p:spPr>
           <a:xfrm>
-            <a:off x="9144000" y="2508250"/>
-            <a:ext cx="1905000" cy="762000"/>
+            <a:off x="812800" y="3810000"/>
+            <a:ext cx="2667000" cy="952500"/>
           </a:xfrm>
           <a:prstGeom prst="roundRect">
             <a:avLst>
@@ -8666,11 +8552,11 @@
             </a:avLst>
           </a:prstGeom>
           <a:solidFill>
-            <a:srgbClr val="E2EAF5"/>
+            <a:srgbClr val="E6EBF4"/>
           </a:solidFill>
-          <a:ln w="12700">
+          <a:ln w="25400">
             <a:solidFill>
-              <a:srgbClr val="DDD8CC"/>
+              <a:srgbClr val="00175A"/>
             </a:solidFill>
           </a:ln>
           <a:effectLst/>
@@ -8690,7 +8576,7 @@
           </a:fontRef>
         </p:style>
         <p:txBody>
-          <a:bodyPr rtlCol="0" anchor="ctr" wrap="square" lIns="50800" rIns="50800" tIns="50800" bIns="50800"/>
+          <a:bodyPr rtlCol="0" anchor="ctr" wrap="square" lIns="88900" rIns="88900" tIns="88900" bIns="88900"/>
           <a:lstStyle/>
           <a:p>
             <a:pPr algn="ctr">
@@ -8702,101 +8588,36 @@
               </a:spcAft>
             </a:pPr>
             <a:r>
-              <a:rPr sz="2400" b="1">
-                <a:solidFill>
-                  <a:srgbClr val="14213D"/>
-                </a:solidFill>
-                <a:latin typeface="Arial"/>
-              </a:rPr>
-              <a:t>28.0%</a:t>
-            </a:r>
-          </a:p>
-          <a:p>
-            <a:pPr algn="ctr">
-              <a:lnSpc>
-                <a:spcPct val="115000"/>
-              </a:lnSpc>
-              <a:spcAft>
-                <a:spcPts val="0"/>
-              </a:spcAft>
-            </a:pPr>
-            <a:r>
-              <a:rPr sz="1300" b="0">
-                <a:solidFill>
-                  <a:srgbClr val="6B7280"/>
-                </a:solidFill>
-                <a:latin typeface="Arial"/>
-              </a:rPr>
-              <a:t>team accuracy</a:t>
-            </a:r>
-          </a:p>
-        </p:txBody>
-      </p:sp>
-      <p:sp>
-        <p:nvSpPr>
-          <p:cNvPr id="14" name="TextBox 13"/>
-          <p:cNvSpPr txBox="1"/>
-          <p:nvPr/>
-        </p:nvSpPr>
-        <p:spPr>
-          <a:xfrm>
-            <a:off x="812800" y="3460750"/>
-            <a:ext cx="2032000" cy="762000"/>
-          </a:xfrm>
-          <a:prstGeom prst="rect">
+              <a:rPr sz="2100" b="1">
+                <a:solidFill>
+                  <a:srgbClr val="00175A"/>
+                </a:solidFill>
+                <a:latin typeface="Arial"/>
+              </a:rPr>
+              <a:t>Direct answer + single agent</a:t>
+            </a:r>
+          </a:p>
+        </p:txBody>
+      </p:sp>
+      <p:sp>
+        <p:nvSpPr>
+          <p:cNvPr id="12" name="Right Arrow 11"/>
+          <p:cNvSpPr/>
+          <p:nvPr/>
+        </p:nvSpPr>
+        <p:spPr>
+          <a:xfrm>
+            <a:off x="3556000" y="4127500"/>
+            <a:ext cx="444500" cy="317500"/>
+          </a:xfrm>
+          <a:prstGeom prst="rightArrow">
             <a:avLst/>
           </a:prstGeom>
-          <a:noFill/>
-        </p:spPr>
-        <p:txBody>
-          <a:bodyPr wrap="square" lIns="0" rIns="0" tIns="0" bIns="0" anchor="ctr">
-            <a:spAutoFit/>
-          </a:bodyPr>
-          <a:lstStyle/>
-          <a:p>
-            <a:pPr algn="l">
-              <a:lnSpc>
-                <a:spcPct val="115000"/>
-              </a:lnSpc>
-              <a:spcAft>
-                <a:spcPts val="0"/>
-              </a:spcAft>
-            </a:pPr>
-            <a:r>
-              <a:rPr sz="2200" b="1">
-                <a:solidFill>
-                  <a:srgbClr val="14213D"/>
-                </a:solidFill>
-                <a:latin typeface="Arial"/>
-              </a:rPr>
-              <a:t>gpt-oss-120b</a:t>
-            </a:r>
-          </a:p>
-        </p:txBody>
-      </p:sp>
-      <p:sp>
-        <p:nvSpPr>
-          <p:cNvPr id="15" name="Rounded Rectangle 14"/>
-          <p:cNvSpPr/>
-          <p:nvPr/>
-        </p:nvSpPr>
-        <p:spPr>
-          <a:xfrm>
-            <a:off x="3048000" y="3460750"/>
-            <a:ext cx="1905000" cy="762000"/>
-          </a:xfrm>
-          <a:prstGeom prst="roundRect">
-            <a:avLst>
-              <a:gd name="adj" fmla="val 10000"/>
-            </a:avLst>
-          </a:prstGeom>
           <a:solidFill>
-            <a:srgbClr val="E2EAF5"/>
+            <a:srgbClr val="6B7480"/>
           </a:solidFill>
-          <a:ln w="12700">
-            <a:solidFill>
-              <a:srgbClr val="DDD8CC"/>
-            </a:solidFill>
+          <a:ln>
+            <a:noFill/>
           </a:ln>
           <a:effectLst/>
         </p:spPr>
@@ -8815,58 +8636,23 @@
           </a:fontRef>
         </p:style>
         <p:txBody>
-          <a:bodyPr rtlCol="0" anchor="ctr" wrap="square" lIns="50800" rIns="50800" tIns="50800" bIns="50800"/>
-          <a:lstStyle/>
-          <a:p>
-            <a:pPr algn="ctr">
-              <a:lnSpc>
-                <a:spcPct val="115000"/>
-              </a:lnSpc>
-              <a:spcAft>
-                <a:spcPts val="0"/>
-              </a:spcAft>
-            </a:pPr>
-            <a:r>
-              <a:rPr sz="2400" b="1">
-                <a:solidFill>
-                  <a:srgbClr val="14213D"/>
-                </a:solidFill>
-                <a:latin typeface="Arial"/>
-              </a:rPr>
-              <a:t>97.0%</a:t>
-            </a:r>
-          </a:p>
-          <a:p>
-            <a:pPr algn="ctr">
-              <a:lnSpc>
-                <a:spcPct val="115000"/>
-              </a:lnSpc>
-              <a:spcAft>
-                <a:spcPts val="0"/>
-              </a:spcAft>
-            </a:pPr>
-            <a:r>
-              <a:rPr sz="1300" b="0">
-                <a:solidFill>
-                  <a:srgbClr val="6B7280"/>
-                </a:solidFill>
-                <a:latin typeface="Arial"/>
-              </a:rPr>
-              <a:t>team accuracy</a:t>
-            </a:r>
-          </a:p>
-        </p:txBody>
-      </p:sp>
-      <p:sp>
-        <p:nvSpPr>
-          <p:cNvPr id="16" name="Rounded Rectangle 15"/>
+          <a:bodyPr rtlCol="0" anchor="ctr"/>
+          <a:lstStyle/>
+          <a:p>
+            <a:pPr algn="ctr"/>
+          </a:p>
+        </p:txBody>
+      </p:sp>
+      <p:sp>
+        <p:nvSpPr>
+          <p:cNvPr id="13" name="Rounded Rectangle 12"/>
           <p:cNvSpPr/>
           <p:nvPr/>
         </p:nvSpPr>
         <p:spPr>
           <a:xfrm>
-            <a:off x="5080000" y="3460750"/>
-            <a:ext cx="1905000" cy="762000"/>
+            <a:off x="4095750" y="3810000"/>
+            <a:ext cx="2667000" cy="952500"/>
           </a:xfrm>
           <a:prstGeom prst="roundRect">
             <a:avLst>
@@ -8874,11 +8660,11 @@
             </a:avLst>
           </a:prstGeom>
           <a:solidFill>
-            <a:srgbClr val="E2EAF5"/>
+            <a:srgbClr val="E3ECE2"/>
           </a:solidFill>
-          <a:ln w="12700">
+          <a:ln w="25400">
             <a:solidFill>
-              <a:srgbClr val="DDD8CC"/>
+              <a:srgbClr val="2F6B34"/>
             </a:solidFill>
           </a:ln>
           <a:effectLst/>
@@ -8898,7 +8684,7 @@
           </a:fontRef>
         </p:style>
         <p:txBody>
-          <a:bodyPr rtlCol="0" anchor="ctr" wrap="square" lIns="50800" rIns="50800" tIns="50800" bIns="50800"/>
+          <a:bodyPr rtlCol="0" anchor="ctr" wrap="square" lIns="88900" rIns="88900" tIns="88900" bIns="88900"/>
           <a:lstStyle/>
           <a:p>
             <a:pPr algn="ctr">
@@ -8910,59 +8696,80 @@
               </a:spcAft>
             </a:pPr>
             <a:r>
-              <a:rPr sz="2400" b="1">
-                <a:solidFill>
-                  <a:srgbClr val="14213D"/>
-                </a:solidFill>
-                <a:latin typeface="Arial"/>
-              </a:rPr>
-              <a:t>79.8%</a:t>
-            </a:r>
-          </a:p>
-          <a:p>
-            <a:pPr algn="ctr">
-              <a:lnSpc>
-                <a:spcPct val="115000"/>
-              </a:lnSpc>
-              <a:spcAft>
-                <a:spcPts val="0"/>
-              </a:spcAft>
-            </a:pPr>
-            <a:r>
-              <a:rPr sz="1300" b="0">
-                <a:solidFill>
-                  <a:srgbClr val="6B7280"/>
-                </a:solidFill>
-                <a:latin typeface="Arial"/>
-              </a:rPr>
-              <a:t>team accuracy</a:t>
-            </a:r>
-          </a:p>
-        </p:txBody>
-      </p:sp>
-      <p:sp>
-        <p:nvSpPr>
-          <p:cNvPr id="17" name="Rounded Rectangle 16"/>
+              <a:rPr sz="2100" b="1">
+                <a:solidFill>
+                  <a:srgbClr val="2F6B34"/>
+                </a:solidFill>
+                <a:latin typeface="Arial"/>
+              </a:rPr>
+              <a:t>agree and confident? stop</a:t>
+            </a:r>
+          </a:p>
+        </p:txBody>
+      </p:sp>
+      <p:sp>
+        <p:nvSpPr>
+          <p:cNvPr id="14" name="TextBox 13"/>
+          <p:cNvSpPr txBox="1"/>
+          <p:nvPr/>
+        </p:nvSpPr>
+        <p:spPr>
+          <a:xfrm>
+            <a:off x="6889750" y="4095750"/>
+            <a:ext cx="1587500" cy="381000"/>
+          </a:xfrm>
+          <a:prstGeom prst="rect">
+            <a:avLst/>
+          </a:prstGeom>
+          <a:noFill/>
+        </p:spPr>
+        <p:txBody>
+          <a:bodyPr wrap="square" lIns="0" rIns="0" tIns="0" bIns="0" anchor="t">
+            <a:spAutoFit/>
+          </a:bodyPr>
+          <a:lstStyle/>
+          <a:p>
+            <a:pPr algn="l">
+              <a:lnSpc>
+                <a:spcPct val="115000"/>
+              </a:lnSpc>
+              <a:spcAft>
+                <a:spcPts val="0"/>
+              </a:spcAft>
+            </a:pPr>
+            <a:r>
+              <a:rPr sz="1900" b="1">
+                <a:solidFill>
+                  <a:srgbClr val="006FCF"/>
+                </a:solidFill>
+                <a:latin typeface="Arial"/>
+              </a:rPr>
+              <a:t>otherwise → team</a:t>
+            </a:r>
+          </a:p>
+        </p:txBody>
+      </p:sp>
+      <p:sp>
+        <p:nvSpPr>
+          <p:cNvPr id="15" name="Rounded Rectangle 14"/>
           <p:cNvSpPr/>
           <p:nvPr/>
         </p:nvSpPr>
         <p:spPr>
           <a:xfrm>
-            <a:off x="7112000" y="3460750"/>
-            <a:ext cx="1905000" cy="762000"/>
+            <a:off x="8763000" y="1905000"/>
+            <a:ext cx="2616200" cy="3175000"/>
           </a:xfrm>
           <a:prstGeom prst="roundRect">
             <a:avLst>
-              <a:gd name="adj" fmla="val 10000"/>
+              <a:gd name="adj" fmla="val 4368"/>
             </a:avLst>
           </a:prstGeom>
           <a:solidFill>
-            <a:srgbClr val="E2EAF5"/>
+            <a:srgbClr val="00175A"/>
           </a:solidFill>
-          <a:ln w="12700">
-            <a:solidFill>
-              <a:srgbClr val="DDD8CC"/>
-            </a:solidFill>
+          <a:ln>
+            <a:noFill/>
           </a:ln>
           <a:effectLst/>
         </p:spPr>
@@ -8981,581 +8788,63 @@
           </a:fontRef>
         </p:style>
         <p:txBody>
-          <a:bodyPr rtlCol="0" anchor="ctr" wrap="square" lIns="50800" rIns="50800" tIns="50800" bIns="50800"/>
-          <a:lstStyle/>
-          <a:p>
-            <a:pPr algn="ctr">
-              <a:lnSpc>
-                <a:spcPct val="115000"/>
-              </a:lnSpc>
-              <a:spcAft>
-                <a:spcPts val="0"/>
+          <a:bodyPr rtlCol="0" anchor="ctr" wrap="square" lIns="177800" rIns="177800" tIns="177800" bIns="177800"/>
+          <a:lstStyle/>
+          <a:p>
+            <a:pPr algn="l">
+              <a:lnSpc>
+                <a:spcPct val="115000"/>
+              </a:lnSpc>
+              <a:spcAft>
+                <a:spcPts val="1200"/>
               </a:spcAft>
             </a:pPr>
             <a:r>
               <a:rPr sz="2400" b="1">
                 <a:solidFill>
-                  <a:srgbClr val="14213D"/>
-                </a:solidFill>
-                <a:latin typeface="Arial"/>
-              </a:rPr>
-              <a:t>71.1%</a:t>
-            </a:r>
-          </a:p>
-          <a:p>
-            <a:pPr algn="ctr">
-              <a:lnSpc>
-                <a:spcPct val="115000"/>
-              </a:lnSpc>
-              <a:spcAft>
-                <a:spcPts val="0"/>
-              </a:spcAft>
-            </a:pPr>
-            <a:r>
-              <a:rPr sz="1300" b="0">
-                <a:solidFill>
-                  <a:srgbClr val="6B7280"/>
-                </a:solidFill>
-                <a:latin typeface="Arial"/>
-              </a:rPr>
-              <a:t>team accuracy</a:t>
-            </a:r>
-          </a:p>
-        </p:txBody>
-      </p:sp>
-      <p:sp>
-        <p:nvSpPr>
-          <p:cNvPr id="18" name="Rounded Rectangle 17"/>
-          <p:cNvSpPr/>
-          <p:nvPr/>
-        </p:nvSpPr>
-        <p:spPr>
-          <a:xfrm>
-            <a:off x="9144000" y="3460750"/>
-            <a:ext cx="1905000" cy="762000"/>
-          </a:xfrm>
-          <a:prstGeom prst="roundRect">
-            <a:avLst>
-              <a:gd name="adj" fmla="val 10000"/>
-            </a:avLst>
-          </a:prstGeom>
-          <a:solidFill>
-            <a:srgbClr val="E2EAF5"/>
-          </a:solidFill>
-          <a:ln w="12700">
-            <a:solidFill>
-              <a:srgbClr val="DDD8CC"/>
-            </a:solidFill>
-          </a:ln>
-          <a:effectLst/>
-        </p:spPr>
-        <p:style>
-          <a:lnRef idx="1">
-            <a:schemeClr val="accent1"/>
-          </a:lnRef>
-          <a:fillRef idx="3">
-            <a:schemeClr val="accent1"/>
-          </a:fillRef>
-          <a:effectRef idx="2">
-            <a:schemeClr val="accent1"/>
-          </a:effectRef>
-          <a:fontRef idx="minor">
-            <a:schemeClr val="lt1"/>
-          </a:fontRef>
-        </p:style>
-        <p:txBody>
-          <a:bodyPr rtlCol="0" anchor="ctr" wrap="square" lIns="50800" rIns="50800" tIns="50800" bIns="50800"/>
-          <a:lstStyle/>
-          <a:p>
-            <a:pPr algn="ctr">
-              <a:lnSpc>
-                <a:spcPct val="115000"/>
-              </a:lnSpc>
-              <a:spcAft>
-                <a:spcPts val="0"/>
-              </a:spcAft>
-            </a:pPr>
-            <a:r>
-              <a:rPr sz="2400" b="1">
-                <a:solidFill>
-                  <a:srgbClr val="14213D"/>
-                </a:solidFill>
-                <a:latin typeface="Arial"/>
-              </a:rPr>
-              <a:t>45.1%</a:t>
-            </a:r>
-          </a:p>
-          <a:p>
-            <a:pPr algn="ctr">
-              <a:lnSpc>
-                <a:spcPct val="115000"/>
-              </a:lnSpc>
-              <a:spcAft>
-                <a:spcPts val="0"/>
-              </a:spcAft>
-            </a:pPr>
-            <a:r>
-              <a:rPr sz="1300" b="0">
-                <a:solidFill>
-                  <a:srgbClr val="6B7280"/>
-                </a:solidFill>
-                <a:latin typeface="Arial"/>
-              </a:rPr>
-              <a:t>team accuracy</a:t>
-            </a:r>
-          </a:p>
-        </p:txBody>
-      </p:sp>
-      <p:sp>
-        <p:nvSpPr>
-          <p:cNvPr id="19" name="TextBox 18"/>
-          <p:cNvSpPr txBox="1"/>
-          <p:nvPr/>
-        </p:nvSpPr>
-        <p:spPr>
-          <a:xfrm>
-            <a:off x="812800" y="4413250"/>
-            <a:ext cx="2032000" cy="762000"/>
-          </a:xfrm>
-          <a:prstGeom prst="rect">
-            <a:avLst/>
-          </a:prstGeom>
-          <a:noFill/>
-        </p:spPr>
-        <p:txBody>
-          <a:bodyPr wrap="square" lIns="0" rIns="0" tIns="0" bIns="0" anchor="ctr">
-            <a:spAutoFit/>
-          </a:bodyPr>
-          <a:lstStyle/>
+                  <a:srgbClr val="66B2F0"/>
+                </a:solidFill>
+                <a:latin typeface="Arial"/>
+              </a:rPr>
+              <a:t>Check both</a:t>
+            </a:r>
+          </a:p>
           <a:p>
             <a:pPr algn="l">
               <a:lnSpc>
                 <a:spcPct val="115000"/>
               </a:lnSpc>
               <a:spcAft>
-                <a:spcPts val="0"/>
-              </a:spcAft>
-            </a:pPr>
-            <a:r>
-              <a:rPr sz="2200" b="1">
-                <a:solidFill>
-                  <a:srgbClr val="14213D"/>
-                </a:solidFill>
-                <a:latin typeface="Arial"/>
-              </a:rPr>
-              <a:t>Gemma-4-26B</a:t>
-            </a:r>
-          </a:p>
-        </p:txBody>
-      </p:sp>
-      <p:sp>
-        <p:nvSpPr>
-          <p:cNvPr id="20" name="Rounded Rectangle 19"/>
-          <p:cNvSpPr/>
-          <p:nvPr/>
-        </p:nvSpPr>
-        <p:spPr>
-          <a:xfrm>
-            <a:off x="3048000" y="4413250"/>
-            <a:ext cx="1905000" cy="762000"/>
-          </a:xfrm>
-          <a:prstGeom prst="roundRect">
-            <a:avLst>
-              <a:gd name="adj" fmla="val 10000"/>
-            </a:avLst>
-          </a:prstGeom>
-          <a:solidFill>
-            <a:srgbClr val="F8E8DC"/>
-          </a:solidFill>
-          <a:ln w="12700">
-            <a:solidFill>
-              <a:srgbClr val="DDD8CC"/>
-            </a:solidFill>
-          </a:ln>
-          <a:effectLst/>
-        </p:spPr>
-        <p:style>
-          <a:lnRef idx="1">
-            <a:schemeClr val="accent1"/>
-          </a:lnRef>
-          <a:fillRef idx="3">
-            <a:schemeClr val="accent1"/>
-          </a:fillRef>
-          <a:effectRef idx="2">
-            <a:schemeClr val="accent1"/>
-          </a:effectRef>
-          <a:fontRef idx="minor">
-            <a:schemeClr val="lt1"/>
-          </a:fontRef>
-        </p:style>
-        <p:txBody>
-          <a:bodyPr rtlCol="0" anchor="ctr" wrap="square" lIns="50800" rIns="50800" tIns="50800" bIns="50800"/>
-          <a:lstStyle/>
-          <a:p>
-            <a:pPr algn="ctr">
-              <a:lnSpc>
-                <a:spcPct val="115000"/>
-              </a:lnSpc>
-              <a:spcAft>
-                <a:spcPts val="0"/>
-              </a:spcAft>
-            </a:pPr>
-            <a:r>
-              <a:rPr sz="2400" b="1">
-                <a:solidFill>
-                  <a:srgbClr val="14213D"/>
-                </a:solidFill>
-                <a:latin typeface="Arial"/>
-              </a:rPr>
-              <a:t>99.8%</a:t>
-            </a:r>
-          </a:p>
-          <a:p>
-            <a:pPr algn="ctr">
-              <a:lnSpc>
-                <a:spcPct val="115000"/>
-              </a:lnSpc>
-              <a:spcAft>
-                <a:spcPts val="0"/>
-              </a:spcAft>
-            </a:pPr>
-            <a:r>
-              <a:rPr sz="1300" b="0">
-                <a:solidFill>
-                  <a:srgbClr val="6B7280"/>
-                </a:solidFill>
-                <a:latin typeface="Arial"/>
-              </a:rPr>
-              <a:t>team accuracy</a:t>
-            </a:r>
-          </a:p>
-        </p:txBody>
-      </p:sp>
-      <p:sp>
-        <p:nvSpPr>
-          <p:cNvPr id="21" name="Rounded Rectangle 20"/>
-          <p:cNvSpPr/>
-          <p:nvPr/>
-        </p:nvSpPr>
-        <p:spPr>
-          <a:xfrm>
-            <a:off x="5080000" y="4413250"/>
-            <a:ext cx="1905000" cy="762000"/>
-          </a:xfrm>
-          <a:prstGeom prst="roundRect">
-            <a:avLst>
-              <a:gd name="adj" fmla="val 10000"/>
-            </a:avLst>
-          </a:prstGeom>
-          <a:solidFill>
-            <a:srgbClr val="F8E8DC"/>
-          </a:solidFill>
-          <a:ln w="12700">
-            <a:solidFill>
-              <a:srgbClr val="DDD8CC"/>
-            </a:solidFill>
-          </a:ln>
-          <a:effectLst/>
-        </p:spPr>
-        <p:style>
-          <a:lnRef idx="1">
-            <a:schemeClr val="accent1"/>
-          </a:lnRef>
-          <a:fillRef idx="3">
-            <a:schemeClr val="accent1"/>
-          </a:fillRef>
-          <a:effectRef idx="2">
-            <a:schemeClr val="accent1"/>
-          </a:effectRef>
-          <a:fontRef idx="minor">
-            <a:schemeClr val="lt1"/>
-          </a:fontRef>
-        </p:style>
-        <p:txBody>
-          <a:bodyPr rtlCol="0" anchor="ctr" wrap="square" lIns="50800" rIns="50800" tIns="50800" bIns="50800"/>
-          <a:lstStyle/>
-          <a:p>
-            <a:pPr algn="ctr">
-              <a:lnSpc>
-                <a:spcPct val="115000"/>
-              </a:lnSpc>
-              <a:spcAft>
-                <a:spcPts val="0"/>
-              </a:spcAft>
-            </a:pPr>
-            <a:r>
-              <a:rPr sz="2400" b="1">
-                <a:solidFill>
-                  <a:srgbClr val="14213D"/>
-                </a:solidFill>
-                <a:latin typeface="Arial"/>
-              </a:rPr>
-              <a:t>67.9%</a:t>
-            </a:r>
-          </a:p>
-          <a:p>
-            <a:pPr algn="ctr">
-              <a:lnSpc>
-                <a:spcPct val="115000"/>
-              </a:lnSpc>
-              <a:spcAft>
-                <a:spcPts val="0"/>
-              </a:spcAft>
-            </a:pPr>
-            <a:r>
-              <a:rPr sz="1300" b="0">
-                <a:solidFill>
-                  <a:srgbClr val="6B7280"/>
-                </a:solidFill>
-                <a:latin typeface="Arial"/>
-              </a:rPr>
-              <a:t>team accuracy</a:t>
-            </a:r>
-          </a:p>
-        </p:txBody>
-      </p:sp>
-      <p:sp>
-        <p:nvSpPr>
-          <p:cNvPr id="22" name="Rounded Rectangle 21"/>
-          <p:cNvSpPr/>
-          <p:nvPr/>
-        </p:nvSpPr>
-        <p:spPr>
-          <a:xfrm>
-            <a:off x="7112000" y="4413250"/>
-            <a:ext cx="1905000" cy="762000"/>
-          </a:xfrm>
-          <a:prstGeom prst="roundRect">
-            <a:avLst>
-              <a:gd name="adj" fmla="val 10000"/>
-            </a:avLst>
-          </a:prstGeom>
-          <a:solidFill>
-            <a:srgbClr val="F8E8DC"/>
-          </a:solidFill>
-          <a:ln w="12700">
-            <a:solidFill>
-              <a:srgbClr val="DDD8CC"/>
-            </a:solidFill>
-          </a:ln>
-          <a:effectLst/>
-        </p:spPr>
-        <p:style>
-          <a:lnRef idx="1">
-            <a:schemeClr val="accent1"/>
-          </a:lnRef>
-          <a:fillRef idx="3">
-            <a:schemeClr val="accent1"/>
-          </a:fillRef>
-          <a:effectRef idx="2">
-            <a:schemeClr val="accent1"/>
-          </a:effectRef>
-          <a:fontRef idx="minor">
-            <a:schemeClr val="lt1"/>
-          </a:fontRef>
-        </p:style>
-        <p:txBody>
-          <a:bodyPr rtlCol="0" anchor="ctr" wrap="square" lIns="50800" rIns="50800" tIns="50800" bIns="50800"/>
-          <a:lstStyle/>
-          <a:p>
-            <a:pPr algn="ctr">
-              <a:lnSpc>
-                <a:spcPct val="115000"/>
-              </a:lnSpc>
-              <a:spcAft>
-                <a:spcPts val="0"/>
-              </a:spcAft>
-            </a:pPr>
-            <a:r>
-              <a:rPr sz="2400" b="1">
-                <a:solidFill>
-                  <a:srgbClr val="14213D"/>
-                </a:solidFill>
-                <a:latin typeface="Arial"/>
-              </a:rPr>
-              <a:t>65.3%</a:t>
-            </a:r>
-          </a:p>
-          <a:p>
-            <a:pPr algn="ctr">
-              <a:lnSpc>
-                <a:spcPct val="115000"/>
-              </a:lnSpc>
-              <a:spcAft>
-                <a:spcPts val="0"/>
-              </a:spcAft>
-            </a:pPr>
-            <a:r>
-              <a:rPr sz="1300" b="0">
-                <a:solidFill>
-                  <a:srgbClr val="6B7280"/>
-                </a:solidFill>
-                <a:latin typeface="Arial"/>
-              </a:rPr>
-              <a:t>team accuracy</a:t>
-            </a:r>
-          </a:p>
-        </p:txBody>
-      </p:sp>
-      <p:sp>
-        <p:nvSpPr>
-          <p:cNvPr id="23" name="Rounded Rectangle 22"/>
-          <p:cNvSpPr/>
-          <p:nvPr/>
-        </p:nvSpPr>
-        <p:spPr>
-          <a:xfrm>
-            <a:off x="9144000" y="4413250"/>
-            <a:ext cx="1905000" cy="762000"/>
-          </a:xfrm>
-          <a:prstGeom prst="roundRect">
-            <a:avLst>
-              <a:gd name="adj" fmla="val 10000"/>
-            </a:avLst>
-          </a:prstGeom>
-          <a:solidFill>
-            <a:srgbClr val="F8E8DC"/>
-          </a:solidFill>
-          <a:ln w="12700">
-            <a:solidFill>
-              <a:srgbClr val="DDD8CC"/>
-            </a:solidFill>
-          </a:ln>
-          <a:effectLst/>
-        </p:spPr>
-        <p:style>
-          <a:lnRef idx="1">
-            <a:schemeClr val="accent1"/>
-          </a:lnRef>
-          <a:fillRef idx="3">
-            <a:schemeClr val="accent1"/>
-          </a:fillRef>
-          <a:effectRef idx="2">
-            <a:schemeClr val="accent1"/>
-          </a:effectRef>
-          <a:fontRef idx="minor">
-            <a:schemeClr val="lt1"/>
-          </a:fontRef>
-        </p:style>
-        <p:txBody>
-          <a:bodyPr rtlCol="0" anchor="ctr" wrap="square" lIns="50800" rIns="50800" tIns="50800" bIns="50800"/>
-          <a:lstStyle/>
-          <a:p>
-            <a:pPr algn="ctr">
-              <a:lnSpc>
-                <a:spcPct val="115000"/>
-              </a:lnSpc>
-              <a:spcAft>
-                <a:spcPts val="0"/>
-              </a:spcAft>
-            </a:pPr>
-            <a:r>
-              <a:rPr sz="2400" b="1">
-                <a:solidFill>
-                  <a:srgbClr val="14213D"/>
-                </a:solidFill>
-                <a:latin typeface="Arial"/>
-              </a:rPr>
-              <a:t>36.4%</a:t>
-            </a:r>
-          </a:p>
-          <a:p>
-            <a:pPr algn="ctr">
-              <a:lnSpc>
-                <a:spcPct val="115000"/>
-              </a:lnSpc>
-              <a:spcAft>
-                <a:spcPts val="0"/>
-              </a:spcAft>
-            </a:pPr>
-            <a:r>
-              <a:rPr sz="1300" b="0">
-                <a:solidFill>
-                  <a:srgbClr val="6B7280"/>
-                </a:solidFill>
-                <a:latin typeface="Arial"/>
-              </a:rPr>
-              <a:t>team accuracy</a:t>
-            </a:r>
-          </a:p>
-        </p:txBody>
-      </p:sp>
-      <p:sp>
-        <p:nvSpPr>
-          <p:cNvPr id="24" name="Rounded Rectangle 23"/>
-          <p:cNvSpPr/>
-          <p:nvPr/>
-        </p:nvSpPr>
-        <p:spPr>
-          <a:xfrm>
-            <a:off x="812800" y="5524500"/>
-            <a:ext cx="10566400" cy="635000"/>
-          </a:xfrm>
-          <a:prstGeom prst="roundRect">
-            <a:avLst>
-              <a:gd name="adj" fmla="val 10000"/>
-            </a:avLst>
-          </a:prstGeom>
-          <a:solidFill>
-            <a:srgbClr val="14213D"/>
-          </a:solidFill>
-          <a:ln>
-            <a:noFill/>
-          </a:ln>
-          <a:effectLst/>
-        </p:spPr>
-        <p:style>
-          <a:lnRef idx="1">
-            <a:schemeClr val="accent1"/>
-          </a:lnRef>
-          <a:fillRef idx="3">
-            <a:schemeClr val="accent1"/>
-          </a:fillRef>
-          <a:effectRef idx="2">
-            <a:schemeClr val="accent1"/>
-          </a:effectRef>
-          <a:fontRef idx="minor">
-            <a:schemeClr val="lt1"/>
-          </a:fontRef>
-        </p:style>
-        <p:txBody>
-          <a:bodyPr rtlCol="0" anchor="ctr" wrap="square" lIns="203200" rIns="203200" tIns="203200" bIns="203200"/>
-          <a:lstStyle/>
-          <a:p>
-            <a:pPr algn="ctr">
-              <a:lnSpc>
-                <a:spcPct val="115000"/>
-              </a:lnSpc>
-              <a:spcAft>
-                <a:spcPts val="0"/>
+                <a:spcPts val="1200"/>
               </a:spcAft>
             </a:pPr>
             <a:r>
               <a:rPr sz="1800" b="0">
                 <a:solidFill>
-                  <a:srgbClr val="F7F6F2"/>
-                </a:solidFill>
-                <a:latin typeface="Arial"/>
-              </a:rPr>
-              <a:t>Record every task once, then replay </a:t>
-            </a:r>
-            <a:r>
-              <a:rPr sz="1800" b="1">
-                <a:solidFill>
-                  <a:srgbClr val="F0A66B"/>
-                </a:solidFill>
-                <a:latin typeface="Arial"/>
-              </a:rPr>
-              <a:t>200 random splits</a:t>
-            </a:r>
+                  <a:srgbClr val="F6F8FB"/>
+                </a:solidFill>
+                <a:latin typeface="Arial"/>
+              </a:rPr>
+              <a:t>on calibration data, then deploy the cheaper one that passes.</a:t>
+            </a:r>
+          </a:p>
+          <a:p>
+            <a:pPr algn="l">
+              <a:lnSpc>
+                <a:spcPct val="115000"/>
+              </a:lnSpc>
+              <a:spcAft>
+                <a:spcPts val="0"/>
+              </a:spcAft>
+            </a:pPr>
             <a:r>
               <a:rPr sz="1800" b="0">
                 <a:solidFill>
-                  <a:srgbClr val="F7F6F2"/>
-                </a:solidFill>
-                <a:latin typeface="Arial"/>
-              </a:rPr>
-              <a:t>: half to calibrate CLIMB, half to test it.</a:t>
+                  <a:srgbClr val="C3D3EC"/>
+                </a:solidFill>
+                <a:latin typeface="Arial"/>
+              </a:rPr>
+              <a:t>Neither passes? Always call the team.</a:t>
             </a:r>
           </a:p>
         </p:txBody>
@@ -9574,7 +8863,7 @@
     <p:bg>
       <p:bgPr>
         <a:solidFill>
-          <a:srgbClr val="F7F6F2"/>
+          <a:srgbClr val="F6F8FB"/>
         </a:solidFill>
         <a:effectLst/>
       </p:bgPr>
@@ -9619,7 +8908,7 @@
             <a:r>
               <a:rPr sz="1200" b="0">
                 <a:solidFill>
-                  <a:srgbClr val="6B7280"/>
+                  <a:srgbClr val="6B7480"/>
                 </a:solidFill>
                 <a:latin typeface="Arial"/>
               </a:rPr>
@@ -9661,11 +8950,11 @@
             <a:r>
               <a:rPr sz="1300" b="1">
                 <a:solidFill>
-                  <a:srgbClr val="B4541A"/>
-                </a:solidFill>
-                <a:latin typeface="Arial"/>
-              </a:rPr>
-              <a:t>RESULTS</a:t>
+                  <a:srgbClr val="006FCF"/>
+                </a:solidFill>
+                <a:latin typeface="Arial"/>
+              </a:rPr>
+              <a:t>EXPERIMENTS</a:t>
             </a:r>
           </a:p>
         </p:txBody>
@@ -9703,61 +8992,323 @@
             <a:r>
               <a:rPr sz="3000" b="1">
                 <a:solidFill>
-                  <a:srgbClr val="14213D"/>
+                  <a:srgbClr val="00175A"/>
                 </a:solidFill>
                 <a:latin typeface="Georgia"/>
               </a:rPr>
-              <a:t>The promise holds on every setting</a:t>
-            </a:r>
-          </a:p>
-        </p:txBody>
-      </p:sp>
-      <p:pic>
-        <p:nvPicPr>
-          <p:cNvPr id="5" name="Picture 4" descr="c_viol.png"/>
-          <p:cNvPicPr>
-            <a:picLocks noChangeAspect="1"/>
-          </p:cNvPicPr>
-          <p:nvPr/>
-        </p:nvPicPr>
-        <p:blipFill>
-          <a:blip r:embed="rId3"/>
-          <a:stretch>
-            <a:fillRect/>
-          </a:stretch>
-        </p:blipFill>
-        <p:spPr>
-          <a:xfrm>
-            <a:off x="812800" y="1999442"/>
-            <a:ext cx="7302500" cy="3748115"/>
+              <a:t>3 models × 4 benchmarks = 12 settings</a:t>
+            </a:r>
+          </a:p>
+        </p:txBody>
+      </p:sp>
+      <p:sp>
+        <p:nvSpPr>
+          <p:cNvPr id="5" name="TextBox 4"/>
+          <p:cNvSpPr txBox="1"/>
+          <p:nvPr/>
+        </p:nvSpPr>
+        <p:spPr>
+          <a:xfrm>
+            <a:off x="3048000" y="1841500"/>
+            <a:ext cx="1905000" cy="508000"/>
           </a:xfrm>
           <a:prstGeom prst="rect">
             <a:avLst/>
           </a:prstGeom>
-        </p:spPr>
-      </p:pic>
-      <p:sp>
-        <p:nvSpPr>
-          <p:cNvPr id="6" name="Rounded Rectangle 5"/>
+          <a:noFill/>
+        </p:spPr>
+        <p:txBody>
+          <a:bodyPr wrap="square" lIns="0" rIns="0" tIns="0" bIns="0" anchor="t">
+            <a:spAutoFit/>
+          </a:bodyPr>
+          <a:lstStyle/>
+          <a:p>
+            <a:pPr algn="ctr">
+              <a:lnSpc>
+                <a:spcPct val="115000"/>
+              </a:lnSpc>
+              <a:spcAft>
+                <a:spcPts val="0"/>
+              </a:spcAft>
+            </a:pPr>
+            <a:r>
+              <a:rPr sz="2200" b="1">
+                <a:solidFill>
+                  <a:srgbClr val="00175A"/>
+                </a:solidFill>
+                <a:latin typeface="Arial"/>
+              </a:rPr>
+              <a:t>MATH</a:t>
+            </a:r>
+          </a:p>
+          <a:p>
+            <a:pPr algn="ctr">
+              <a:lnSpc>
+                <a:spcPct val="115000"/>
+              </a:lnSpc>
+              <a:spcAft>
+                <a:spcPts val="0"/>
+              </a:spcAft>
+            </a:pPr>
+            <a:r>
+              <a:rPr sz="1600" b="0">
+                <a:solidFill>
+                  <a:srgbClr val="6B7480"/>
+                </a:solidFill>
+                <a:latin typeface="Arial"/>
+              </a:rPr>
+              <a:t>math</a:t>
+            </a:r>
+          </a:p>
+        </p:txBody>
+      </p:sp>
+      <p:sp>
+        <p:nvSpPr>
+          <p:cNvPr id="6" name="TextBox 5"/>
+          <p:cNvSpPr txBox="1"/>
+          <p:nvPr/>
+        </p:nvSpPr>
+        <p:spPr>
+          <a:xfrm>
+            <a:off x="5080000" y="1841500"/>
+            <a:ext cx="1905000" cy="508000"/>
+          </a:xfrm>
+          <a:prstGeom prst="rect">
+            <a:avLst/>
+          </a:prstGeom>
+          <a:noFill/>
+        </p:spPr>
+        <p:txBody>
+          <a:bodyPr wrap="square" lIns="0" rIns="0" tIns="0" bIns="0" anchor="t">
+            <a:spAutoFit/>
+          </a:bodyPr>
+          <a:lstStyle/>
+          <a:p>
+            <a:pPr algn="ctr">
+              <a:lnSpc>
+                <a:spcPct val="115000"/>
+              </a:lnSpc>
+              <a:spcAft>
+                <a:spcPts val="0"/>
+              </a:spcAft>
+            </a:pPr>
+            <a:r>
+              <a:rPr sz="2200" b="1">
+                <a:solidFill>
+                  <a:srgbClr val="00175A"/>
+                </a:solidFill>
+                <a:latin typeface="Arial"/>
+              </a:rPr>
+              <a:t>FRAMES</a:t>
+            </a:r>
+          </a:p>
+          <a:p>
+            <a:pPr algn="ctr">
+              <a:lnSpc>
+                <a:spcPct val="115000"/>
+              </a:lnSpc>
+              <a:spcAft>
+                <a:spcPts val="0"/>
+              </a:spcAft>
+            </a:pPr>
+            <a:r>
+              <a:rPr sz="1600" b="0">
+                <a:solidFill>
+                  <a:srgbClr val="6B7480"/>
+                </a:solidFill>
+                <a:latin typeface="Arial"/>
+              </a:rPr>
+              <a:t>open-book QA</a:t>
+            </a:r>
+          </a:p>
+        </p:txBody>
+      </p:sp>
+      <p:sp>
+        <p:nvSpPr>
+          <p:cNvPr id="7" name="TextBox 6"/>
+          <p:cNvSpPr txBox="1"/>
+          <p:nvPr/>
+        </p:nvSpPr>
+        <p:spPr>
+          <a:xfrm>
+            <a:off x="7112000" y="1841500"/>
+            <a:ext cx="1905000" cy="508000"/>
+          </a:xfrm>
+          <a:prstGeom prst="rect">
+            <a:avLst/>
+          </a:prstGeom>
+          <a:noFill/>
+        </p:spPr>
+        <p:txBody>
+          <a:bodyPr wrap="square" lIns="0" rIns="0" tIns="0" bIns="0" anchor="t">
+            <a:spAutoFit/>
+          </a:bodyPr>
+          <a:lstStyle/>
+          <a:p>
+            <a:pPr algn="ctr">
+              <a:lnSpc>
+                <a:spcPct val="115000"/>
+              </a:lnSpc>
+              <a:spcAft>
+                <a:spcPts val="0"/>
+              </a:spcAft>
+            </a:pPr>
+            <a:r>
+              <a:rPr sz="2200" b="1">
+                <a:solidFill>
+                  <a:srgbClr val="00175A"/>
+                </a:solidFill>
+                <a:latin typeface="Arial"/>
+              </a:rPr>
+              <a:t>MuSiQue</a:t>
+            </a:r>
+          </a:p>
+          <a:p>
+            <a:pPr algn="ctr">
+              <a:lnSpc>
+                <a:spcPct val="115000"/>
+              </a:lnSpc>
+              <a:spcAft>
+                <a:spcPts val="0"/>
+              </a:spcAft>
+            </a:pPr>
+            <a:r>
+              <a:rPr sz="1600" b="0">
+                <a:solidFill>
+                  <a:srgbClr val="6B7480"/>
+                </a:solidFill>
+                <a:latin typeface="Arial"/>
+              </a:rPr>
+              <a:t>open-book QA</a:t>
+            </a:r>
+          </a:p>
+        </p:txBody>
+      </p:sp>
+      <p:sp>
+        <p:nvSpPr>
+          <p:cNvPr id="8" name="TextBox 7"/>
+          <p:cNvSpPr txBox="1"/>
+          <p:nvPr/>
+        </p:nvSpPr>
+        <p:spPr>
+          <a:xfrm>
+            <a:off x="9144000" y="1841500"/>
+            <a:ext cx="1905000" cy="508000"/>
+          </a:xfrm>
+          <a:prstGeom prst="rect">
+            <a:avLst/>
+          </a:prstGeom>
+          <a:noFill/>
+        </p:spPr>
+        <p:txBody>
+          <a:bodyPr wrap="square" lIns="0" rIns="0" tIns="0" bIns="0" anchor="t">
+            <a:spAutoFit/>
+          </a:bodyPr>
+          <a:lstStyle/>
+          <a:p>
+            <a:pPr algn="ctr">
+              <a:lnSpc>
+                <a:spcPct val="115000"/>
+              </a:lnSpc>
+              <a:spcAft>
+                <a:spcPts val="0"/>
+              </a:spcAft>
+            </a:pPr>
+            <a:r>
+              <a:rPr sz="2200" b="1">
+                <a:solidFill>
+                  <a:srgbClr val="00175A"/>
+                </a:solidFill>
+                <a:latin typeface="Arial"/>
+              </a:rPr>
+              <a:t>BBEH</a:t>
+            </a:r>
+          </a:p>
+          <a:p>
+            <a:pPr algn="ctr">
+              <a:lnSpc>
+                <a:spcPct val="115000"/>
+              </a:lnSpc>
+              <a:spcAft>
+                <a:spcPts val="0"/>
+              </a:spcAft>
+            </a:pPr>
+            <a:r>
+              <a:rPr sz="1600" b="0">
+                <a:solidFill>
+                  <a:srgbClr val="6B7480"/>
+                </a:solidFill>
+                <a:latin typeface="Arial"/>
+              </a:rPr>
+              <a:t>hard reasoning</a:t>
+            </a:r>
+          </a:p>
+        </p:txBody>
+      </p:sp>
+      <p:sp>
+        <p:nvSpPr>
+          <p:cNvPr id="9" name="TextBox 8"/>
+          <p:cNvSpPr txBox="1"/>
+          <p:nvPr/>
+        </p:nvSpPr>
+        <p:spPr>
+          <a:xfrm>
+            <a:off x="812800" y="2508250"/>
+            <a:ext cx="2032000" cy="762000"/>
+          </a:xfrm>
+          <a:prstGeom prst="rect">
+            <a:avLst/>
+          </a:prstGeom>
+          <a:noFill/>
+        </p:spPr>
+        <p:txBody>
+          <a:bodyPr wrap="square" lIns="0" rIns="0" tIns="0" bIns="0" anchor="ctr">
+            <a:spAutoFit/>
+          </a:bodyPr>
+          <a:lstStyle/>
+          <a:p>
+            <a:pPr algn="l">
+              <a:lnSpc>
+                <a:spcPct val="115000"/>
+              </a:lnSpc>
+              <a:spcAft>
+                <a:spcPts val="0"/>
+              </a:spcAft>
+            </a:pPr>
+            <a:r>
+              <a:rPr sz="2200" b="1">
+                <a:solidFill>
+                  <a:srgbClr val="00175A"/>
+                </a:solidFill>
+                <a:latin typeface="Arial"/>
+              </a:rPr>
+              <a:t>gpt-oss-20b</a:t>
+            </a:r>
+          </a:p>
+        </p:txBody>
+      </p:sp>
+      <p:sp>
+        <p:nvSpPr>
+          <p:cNvPr id="10" name="Rounded Rectangle 9"/>
           <p:cNvSpPr/>
           <p:nvPr/>
         </p:nvSpPr>
         <p:spPr>
           <a:xfrm>
-            <a:off x="8445500" y="2286000"/>
-            <a:ext cx="2933700" cy="1905000"/>
+            <a:off x="3048000" y="2508250"/>
+            <a:ext cx="1905000" cy="762000"/>
           </a:xfrm>
           <a:prstGeom prst="roundRect">
             <a:avLst>
-              <a:gd name="adj" fmla="val 6000"/>
+              <a:gd name="adj" fmla="val 10000"/>
             </a:avLst>
           </a:prstGeom>
           <a:solidFill>
-            <a:srgbClr val="E3ECE2"/>
+            <a:srgbClr val="E6EBF4"/>
           </a:solidFill>
           <a:ln w="12700">
             <a:solidFill>
-              <a:srgbClr val="DDD8CC"/>
+              <a:srgbClr val="D3DCE8"/>
             </a:solidFill>
           </a:ln>
           <a:effectLst/>
@@ -9777,27 +9328,692 @@
           </a:fontRef>
         </p:style>
         <p:txBody>
-          <a:bodyPr rtlCol="0" anchor="ctr" wrap="square" lIns="190500" rIns="190500" tIns="190500" bIns="190500"/>
+          <a:bodyPr rtlCol="0" anchor="ctr" wrap="square" lIns="50800" rIns="50800" tIns="50800" bIns="50800"/>
+          <a:lstStyle/>
+          <a:p>
+            <a:pPr algn="ctr">
+              <a:lnSpc>
+                <a:spcPct val="115000"/>
+              </a:lnSpc>
+              <a:spcAft>
+                <a:spcPts val="0"/>
+              </a:spcAft>
+            </a:pPr>
+            <a:r>
+              <a:rPr sz="2400" b="1">
+                <a:solidFill>
+                  <a:srgbClr val="00175A"/>
+                </a:solidFill>
+                <a:latin typeface="Arial"/>
+              </a:rPr>
+              <a:t>94.8%</a:t>
+            </a:r>
+          </a:p>
+          <a:p>
+            <a:pPr algn="ctr">
+              <a:lnSpc>
+                <a:spcPct val="115000"/>
+              </a:lnSpc>
+              <a:spcAft>
+                <a:spcPts val="0"/>
+              </a:spcAft>
+            </a:pPr>
+            <a:r>
+              <a:rPr sz="1300" b="0">
+                <a:solidFill>
+                  <a:srgbClr val="6B7480"/>
+                </a:solidFill>
+                <a:latin typeface="Arial"/>
+              </a:rPr>
+              <a:t>team accuracy</a:t>
+            </a:r>
+          </a:p>
+        </p:txBody>
+      </p:sp>
+      <p:sp>
+        <p:nvSpPr>
+          <p:cNvPr id="11" name="Rounded Rectangle 10"/>
+          <p:cNvSpPr/>
+          <p:nvPr/>
+        </p:nvSpPr>
+        <p:spPr>
+          <a:xfrm>
+            <a:off x="5080000" y="2508250"/>
+            <a:ext cx="1905000" cy="762000"/>
+          </a:xfrm>
+          <a:prstGeom prst="roundRect">
+            <a:avLst>
+              <a:gd name="adj" fmla="val 10000"/>
+            </a:avLst>
+          </a:prstGeom>
+          <a:solidFill>
+            <a:srgbClr val="E6EBF4"/>
+          </a:solidFill>
+          <a:ln w="12700">
+            <a:solidFill>
+              <a:srgbClr val="D3DCE8"/>
+            </a:solidFill>
+          </a:ln>
+          <a:effectLst/>
+        </p:spPr>
+        <p:style>
+          <a:lnRef idx="1">
+            <a:schemeClr val="accent1"/>
+          </a:lnRef>
+          <a:fillRef idx="3">
+            <a:schemeClr val="accent1"/>
+          </a:fillRef>
+          <a:effectRef idx="2">
+            <a:schemeClr val="accent1"/>
+          </a:effectRef>
+          <a:fontRef idx="minor">
+            <a:schemeClr val="lt1"/>
+          </a:fontRef>
+        </p:style>
+        <p:txBody>
+          <a:bodyPr rtlCol="0" anchor="ctr" wrap="square" lIns="50800" rIns="50800" tIns="50800" bIns="50800"/>
+          <a:lstStyle/>
+          <a:p>
+            <a:pPr algn="ctr">
+              <a:lnSpc>
+                <a:spcPct val="115000"/>
+              </a:lnSpc>
+              <a:spcAft>
+                <a:spcPts val="0"/>
+              </a:spcAft>
+            </a:pPr>
+            <a:r>
+              <a:rPr sz="2400" b="1">
+                <a:solidFill>
+                  <a:srgbClr val="00175A"/>
+                </a:solidFill>
+                <a:latin typeface="Arial"/>
+              </a:rPr>
+              <a:t>76.1%</a:t>
+            </a:r>
+          </a:p>
+          <a:p>
+            <a:pPr algn="ctr">
+              <a:lnSpc>
+                <a:spcPct val="115000"/>
+              </a:lnSpc>
+              <a:spcAft>
+                <a:spcPts val="0"/>
+              </a:spcAft>
+            </a:pPr>
+            <a:r>
+              <a:rPr sz="1300" b="0">
+                <a:solidFill>
+                  <a:srgbClr val="6B7480"/>
+                </a:solidFill>
+                <a:latin typeface="Arial"/>
+              </a:rPr>
+              <a:t>team accuracy</a:t>
+            </a:r>
+          </a:p>
+        </p:txBody>
+      </p:sp>
+      <p:sp>
+        <p:nvSpPr>
+          <p:cNvPr id="12" name="Rounded Rectangle 11"/>
+          <p:cNvSpPr/>
+          <p:nvPr/>
+        </p:nvSpPr>
+        <p:spPr>
+          <a:xfrm>
+            <a:off x="7112000" y="2508250"/>
+            <a:ext cx="1905000" cy="762000"/>
+          </a:xfrm>
+          <a:prstGeom prst="roundRect">
+            <a:avLst>
+              <a:gd name="adj" fmla="val 10000"/>
+            </a:avLst>
+          </a:prstGeom>
+          <a:solidFill>
+            <a:srgbClr val="E6EBF4"/>
+          </a:solidFill>
+          <a:ln w="12700">
+            <a:solidFill>
+              <a:srgbClr val="D3DCE8"/>
+            </a:solidFill>
+          </a:ln>
+          <a:effectLst/>
+        </p:spPr>
+        <p:style>
+          <a:lnRef idx="1">
+            <a:schemeClr val="accent1"/>
+          </a:lnRef>
+          <a:fillRef idx="3">
+            <a:schemeClr val="accent1"/>
+          </a:fillRef>
+          <a:effectRef idx="2">
+            <a:schemeClr val="accent1"/>
+          </a:effectRef>
+          <a:fontRef idx="minor">
+            <a:schemeClr val="lt1"/>
+          </a:fontRef>
+        </p:style>
+        <p:txBody>
+          <a:bodyPr rtlCol="0" anchor="ctr" wrap="square" lIns="50800" rIns="50800" tIns="50800" bIns="50800"/>
+          <a:lstStyle/>
+          <a:p>
+            <a:pPr algn="ctr">
+              <a:lnSpc>
+                <a:spcPct val="115000"/>
+              </a:lnSpc>
+              <a:spcAft>
+                <a:spcPts val="0"/>
+              </a:spcAft>
+            </a:pPr>
+            <a:r>
+              <a:rPr sz="2400" b="1">
+                <a:solidFill>
+                  <a:srgbClr val="00175A"/>
+                </a:solidFill>
+                <a:latin typeface="Arial"/>
+              </a:rPr>
+              <a:t>64.9%</a:t>
+            </a:r>
+          </a:p>
+          <a:p>
+            <a:pPr algn="ctr">
+              <a:lnSpc>
+                <a:spcPct val="115000"/>
+              </a:lnSpc>
+              <a:spcAft>
+                <a:spcPts val="0"/>
+              </a:spcAft>
+            </a:pPr>
+            <a:r>
+              <a:rPr sz="1300" b="0">
+                <a:solidFill>
+                  <a:srgbClr val="6B7480"/>
+                </a:solidFill>
+                <a:latin typeface="Arial"/>
+              </a:rPr>
+              <a:t>team accuracy</a:t>
+            </a:r>
+          </a:p>
+        </p:txBody>
+      </p:sp>
+      <p:sp>
+        <p:nvSpPr>
+          <p:cNvPr id="13" name="Rounded Rectangle 12"/>
+          <p:cNvSpPr/>
+          <p:nvPr/>
+        </p:nvSpPr>
+        <p:spPr>
+          <a:xfrm>
+            <a:off x="9144000" y="2508250"/>
+            <a:ext cx="1905000" cy="762000"/>
+          </a:xfrm>
+          <a:prstGeom prst="roundRect">
+            <a:avLst>
+              <a:gd name="adj" fmla="val 10000"/>
+            </a:avLst>
+          </a:prstGeom>
+          <a:solidFill>
+            <a:srgbClr val="E6EBF4"/>
+          </a:solidFill>
+          <a:ln w="12700">
+            <a:solidFill>
+              <a:srgbClr val="D3DCE8"/>
+            </a:solidFill>
+          </a:ln>
+          <a:effectLst/>
+        </p:spPr>
+        <p:style>
+          <a:lnRef idx="1">
+            <a:schemeClr val="accent1"/>
+          </a:lnRef>
+          <a:fillRef idx="3">
+            <a:schemeClr val="accent1"/>
+          </a:fillRef>
+          <a:effectRef idx="2">
+            <a:schemeClr val="accent1"/>
+          </a:effectRef>
+          <a:fontRef idx="minor">
+            <a:schemeClr val="lt1"/>
+          </a:fontRef>
+        </p:style>
+        <p:txBody>
+          <a:bodyPr rtlCol="0" anchor="ctr" wrap="square" lIns="50800" rIns="50800" tIns="50800" bIns="50800"/>
+          <a:lstStyle/>
+          <a:p>
+            <a:pPr algn="ctr">
+              <a:lnSpc>
+                <a:spcPct val="115000"/>
+              </a:lnSpc>
+              <a:spcAft>
+                <a:spcPts val="0"/>
+              </a:spcAft>
+            </a:pPr>
+            <a:r>
+              <a:rPr sz="2400" b="1">
+                <a:solidFill>
+                  <a:srgbClr val="00175A"/>
+                </a:solidFill>
+                <a:latin typeface="Arial"/>
+              </a:rPr>
+              <a:t>28.0%</a:t>
+            </a:r>
+          </a:p>
+          <a:p>
+            <a:pPr algn="ctr">
+              <a:lnSpc>
+                <a:spcPct val="115000"/>
+              </a:lnSpc>
+              <a:spcAft>
+                <a:spcPts val="0"/>
+              </a:spcAft>
+            </a:pPr>
+            <a:r>
+              <a:rPr sz="1300" b="0">
+                <a:solidFill>
+                  <a:srgbClr val="6B7480"/>
+                </a:solidFill>
+                <a:latin typeface="Arial"/>
+              </a:rPr>
+              <a:t>team accuracy</a:t>
+            </a:r>
+          </a:p>
+        </p:txBody>
+      </p:sp>
+      <p:sp>
+        <p:nvSpPr>
+          <p:cNvPr id="14" name="TextBox 13"/>
+          <p:cNvSpPr txBox="1"/>
+          <p:nvPr/>
+        </p:nvSpPr>
+        <p:spPr>
+          <a:xfrm>
+            <a:off x="812800" y="3460750"/>
+            <a:ext cx="2032000" cy="762000"/>
+          </a:xfrm>
+          <a:prstGeom prst="rect">
+            <a:avLst/>
+          </a:prstGeom>
+          <a:noFill/>
+        </p:spPr>
+        <p:txBody>
+          <a:bodyPr wrap="square" lIns="0" rIns="0" tIns="0" bIns="0" anchor="ctr">
+            <a:spAutoFit/>
+          </a:bodyPr>
           <a:lstStyle/>
           <a:p>
             <a:pPr algn="l">
               <a:lnSpc>
-                <a:spcPct val="100000"/>
-              </a:lnSpc>
-              <a:spcAft>
-                <a:spcPts val="600"/>
-              </a:spcAft>
-            </a:pPr>
-            <a:r>
-              <a:rPr sz="3600" b="1">
-                <a:solidFill>
-                  <a:srgbClr val="2F6B34"/>
-                </a:solidFill>
-                <a:latin typeface="Georgia"/>
-              </a:rPr>
-              <a:t>≤ 2%</a:t>
-            </a:r>
-          </a:p>
+                <a:spcPct val="115000"/>
+              </a:lnSpc>
+              <a:spcAft>
+                <a:spcPts val="0"/>
+              </a:spcAft>
+            </a:pPr>
+            <a:r>
+              <a:rPr sz="2200" b="1">
+                <a:solidFill>
+                  <a:srgbClr val="00175A"/>
+                </a:solidFill>
+                <a:latin typeface="Arial"/>
+              </a:rPr>
+              <a:t>gpt-oss-120b</a:t>
+            </a:r>
+          </a:p>
+        </p:txBody>
+      </p:sp>
+      <p:sp>
+        <p:nvSpPr>
+          <p:cNvPr id="15" name="Rounded Rectangle 14"/>
+          <p:cNvSpPr/>
+          <p:nvPr/>
+        </p:nvSpPr>
+        <p:spPr>
+          <a:xfrm>
+            <a:off x="3048000" y="3460750"/>
+            <a:ext cx="1905000" cy="762000"/>
+          </a:xfrm>
+          <a:prstGeom prst="roundRect">
+            <a:avLst>
+              <a:gd name="adj" fmla="val 10000"/>
+            </a:avLst>
+          </a:prstGeom>
+          <a:solidFill>
+            <a:srgbClr val="E6EBF4"/>
+          </a:solidFill>
+          <a:ln w="12700">
+            <a:solidFill>
+              <a:srgbClr val="D3DCE8"/>
+            </a:solidFill>
+          </a:ln>
+          <a:effectLst/>
+        </p:spPr>
+        <p:style>
+          <a:lnRef idx="1">
+            <a:schemeClr val="accent1"/>
+          </a:lnRef>
+          <a:fillRef idx="3">
+            <a:schemeClr val="accent1"/>
+          </a:fillRef>
+          <a:effectRef idx="2">
+            <a:schemeClr val="accent1"/>
+          </a:effectRef>
+          <a:fontRef idx="minor">
+            <a:schemeClr val="lt1"/>
+          </a:fontRef>
+        </p:style>
+        <p:txBody>
+          <a:bodyPr rtlCol="0" anchor="ctr" wrap="square" lIns="50800" rIns="50800" tIns="50800" bIns="50800"/>
+          <a:lstStyle/>
+          <a:p>
+            <a:pPr algn="ctr">
+              <a:lnSpc>
+                <a:spcPct val="115000"/>
+              </a:lnSpc>
+              <a:spcAft>
+                <a:spcPts val="0"/>
+              </a:spcAft>
+            </a:pPr>
+            <a:r>
+              <a:rPr sz="2400" b="1">
+                <a:solidFill>
+                  <a:srgbClr val="00175A"/>
+                </a:solidFill>
+                <a:latin typeface="Arial"/>
+              </a:rPr>
+              <a:t>97.0%</a:t>
+            </a:r>
+          </a:p>
+          <a:p>
+            <a:pPr algn="ctr">
+              <a:lnSpc>
+                <a:spcPct val="115000"/>
+              </a:lnSpc>
+              <a:spcAft>
+                <a:spcPts val="0"/>
+              </a:spcAft>
+            </a:pPr>
+            <a:r>
+              <a:rPr sz="1300" b="0">
+                <a:solidFill>
+                  <a:srgbClr val="6B7480"/>
+                </a:solidFill>
+                <a:latin typeface="Arial"/>
+              </a:rPr>
+              <a:t>team accuracy</a:t>
+            </a:r>
+          </a:p>
+        </p:txBody>
+      </p:sp>
+      <p:sp>
+        <p:nvSpPr>
+          <p:cNvPr id="16" name="Rounded Rectangle 15"/>
+          <p:cNvSpPr/>
+          <p:nvPr/>
+        </p:nvSpPr>
+        <p:spPr>
+          <a:xfrm>
+            <a:off x="5080000" y="3460750"/>
+            <a:ext cx="1905000" cy="762000"/>
+          </a:xfrm>
+          <a:prstGeom prst="roundRect">
+            <a:avLst>
+              <a:gd name="adj" fmla="val 10000"/>
+            </a:avLst>
+          </a:prstGeom>
+          <a:solidFill>
+            <a:srgbClr val="E6EBF4"/>
+          </a:solidFill>
+          <a:ln w="12700">
+            <a:solidFill>
+              <a:srgbClr val="D3DCE8"/>
+            </a:solidFill>
+          </a:ln>
+          <a:effectLst/>
+        </p:spPr>
+        <p:style>
+          <a:lnRef idx="1">
+            <a:schemeClr val="accent1"/>
+          </a:lnRef>
+          <a:fillRef idx="3">
+            <a:schemeClr val="accent1"/>
+          </a:fillRef>
+          <a:effectRef idx="2">
+            <a:schemeClr val="accent1"/>
+          </a:effectRef>
+          <a:fontRef idx="minor">
+            <a:schemeClr val="lt1"/>
+          </a:fontRef>
+        </p:style>
+        <p:txBody>
+          <a:bodyPr rtlCol="0" anchor="ctr" wrap="square" lIns="50800" rIns="50800" tIns="50800" bIns="50800"/>
+          <a:lstStyle/>
+          <a:p>
+            <a:pPr algn="ctr">
+              <a:lnSpc>
+                <a:spcPct val="115000"/>
+              </a:lnSpc>
+              <a:spcAft>
+                <a:spcPts val="0"/>
+              </a:spcAft>
+            </a:pPr>
+            <a:r>
+              <a:rPr sz="2400" b="1">
+                <a:solidFill>
+                  <a:srgbClr val="00175A"/>
+                </a:solidFill>
+                <a:latin typeface="Arial"/>
+              </a:rPr>
+              <a:t>79.8%</a:t>
+            </a:r>
+          </a:p>
+          <a:p>
+            <a:pPr algn="ctr">
+              <a:lnSpc>
+                <a:spcPct val="115000"/>
+              </a:lnSpc>
+              <a:spcAft>
+                <a:spcPts val="0"/>
+              </a:spcAft>
+            </a:pPr>
+            <a:r>
+              <a:rPr sz="1300" b="0">
+                <a:solidFill>
+                  <a:srgbClr val="6B7480"/>
+                </a:solidFill>
+                <a:latin typeface="Arial"/>
+              </a:rPr>
+              <a:t>team accuracy</a:t>
+            </a:r>
+          </a:p>
+        </p:txBody>
+      </p:sp>
+      <p:sp>
+        <p:nvSpPr>
+          <p:cNvPr id="17" name="Rounded Rectangle 16"/>
+          <p:cNvSpPr/>
+          <p:nvPr/>
+        </p:nvSpPr>
+        <p:spPr>
+          <a:xfrm>
+            <a:off x="7112000" y="3460750"/>
+            <a:ext cx="1905000" cy="762000"/>
+          </a:xfrm>
+          <a:prstGeom prst="roundRect">
+            <a:avLst>
+              <a:gd name="adj" fmla="val 10000"/>
+            </a:avLst>
+          </a:prstGeom>
+          <a:solidFill>
+            <a:srgbClr val="E6EBF4"/>
+          </a:solidFill>
+          <a:ln w="12700">
+            <a:solidFill>
+              <a:srgbClr val="D3DCE8"/>
+            </a:solidFill>
+          </a:ln>
+          <a:effectLst/>
+        </p:spPr>
+        <p:style>
+          <a:lnRef idx="1">
+            <a:schemeClr val="accent1"/>
+          </a:lnRef>
+          <a:fillRef idx="3">
+            <a:schemeClr val="accent1"/>
+          </a:fillRef>
+          <a:effectRef idx="2">
+            <a:schemeClr val="accent1"/>
+          </a:effectRef>
+          <a:fontRef idx="minor">
+            <a:schemeClr val="lt1"/>
+          </a:fontRef>
+        </p:style>
+        <p:txBody>
+          <a:bodyPr rtlCol="0" anchor="ctr" wrap="square" lIns="50800" rIns="50800" tIns="50800" bIns="50800"/>
+          <a:lstStyle/>
+          <a:p>
+            <a:pPr algn="ctr">
+              <a:lnSpc>
+                <a:spcPct val="115000"/>
+              </a:lnSpc>
+              <a:spcAft>
+                <a:spcPts val="0"/>
+              </a:spcAft>
+            </a:pPr>
+            <a:r>
+              <a:rPr sz="2400" b="1">
+                <a:solidFill>
+                  <a:srgbClr val="00175A"/>
+                </a:solidFill>
+                <a:latin typeface="Arial"/>
+              </a:rPr>
+              <a:t>71.1%</a:t>
+            </a:r>
+          </a:p>
+          <a:p>
+            <a:pPr algn="ctr">
+              <a:lnSpc>
+                <a:spcPct val="115000"/>
+              </a:lnSpc>
+              <a:spcAft>
+                <a:spcPts val="0"/>
+              </a:spcAft>
+            </a:pPr>
+            <a:r>
+              <a:rPr sz="1300" b="0">
+                <a:solidFill>
+                  <a:srgbClr val="6B7480"/>
+                </a:solidFill>
+                <a:latin typeface="Arial"/>
+              </a:rPr>
+              <a:t>team accuracy</a:t>
+            </a:r>
+          </a:p>
+        </p:txBody>
+      </p:sp>
+      <p:sp>
+        <p:nvSpPr>
+          <p:cNvPr id="18" name="Rounded Rectangle 17"/>
+          <p:cNvSpPr/>
+          <p:nvPr/>
+        </p:nvSpPr>
+        <p:spPr>
+          <a:xfrm>
+            <a:off x="9144000" y="3460750"/>
+            <a:ext cx="1905000" cy="762000"/>
+          </a:xfrm>
+          <a:prstGeom prst="roundRect">
+            <a:avLst>
+              <a:gd name="adj" fmla="val 10000"/>
+            </a:avLst>
+          </a:prstGeom>
+          <a:solidFill>
+            <a:srgbClr val="E6EBF4"/>
+          </a:solidFill>
+          <a:ln w="12700">
+            <a:solidFill>
+              <a:srgbClr val="D3DCE8"/>
+            </a:solidFill>
+          </a:ln>
+          <a:effectLst/>
+        </p:spPr>
+        <p:style>
+          <a:lnRef idx="1">
+            <a:schemeClr val="accent1"/>
+          </a:lnRef>
+          <a:fillRef idx="3">
+            <a:schemeClr val="accent1"/>
+          </a:fillRef>
+          <a:effectRef idx="2">
+            <a:schemeClr val="accent1"/>
+          </a:effectRef>
+          <a:fontRef idx="minor">
+            <a:schemeClr val="lt1"/>
+          </a:fontRef>
+        </p:style>
+        <p:txBody>
+          <a:bodyPr rtlCol="0" anchor="ctr" wrap="square" lIns="50800" rIns="50800" tIns="50800" bIns="50800"/>
+          <a:lstStyle/>
+          <a:p>
+            <a:pPr algn="ctr">
+              <a:lnSpc>
+                <a:spcPct val="115000"/>
+              </a:lnSpc>
+              <a:spcAft>
+                <a:spcPts val="0"/>
+              </a:spcAft>
+            </a:pPr>
+            <a:r>
+              <a:rPr sz="2400" b="1">
+                <a:solidFill>
+                  <a:srgbClr val="00175A"/>
+                </a:solidFill>
+                <a:latin typeface="Arial"/>
+              </a:rPr>
+              <a:t>45.1%</a:t>
+            </a:r>
+          </a:p>
+          <a:p>
+            <a:pPr algn="ctr">
+              <a:lnSpc>
+                <a:spcPct val="115000"/>
+              </a:lnSpc>
+              <a:spcAft>
+                <a:spcPts val="0"/>
+              </a:spcAft>
+            </a:pPr>
+            <a:r>
+              <a:rPr sz="1300" b="0">
+                <a:solidFill>
+                  <a:srgbClr val="6B7480"/>
+                </a:solidFill>
+                <a:latin typeface="Arial"/>
+              </a:rPr>
+              <a:t>team accuracy</a:t>
+            </a:r>
+          </a:p>
+        </p:txBody>
+      </p:sp>
+      <p:sp>
+        <p:nvSpPr>
+          <p:cNvPr id="19" name="TextBox 18"/>
+          <p:cNvSpPr txBox="1"/>
+          <p:nvPr/>
+        </p:nvSpPr>
+        <p:spPr>
+          <a:xfrm>
+            <a:off x="812800" y="4413250"/>
+            <a:ext cx="2032000" cy="762000"/>
+          </a:xfrm>
+          <a:prstGeom prst="rect">
+            <a:avLst/>
+          </a:prstGeom>
+          <a:noFill/>
+        </p:spPr>
+        <p:txBody>
+          <a:bodyPr wrap="square" lIns="0" rIns="0" tIns="0" bIns="0" anchor="ctr">
+            <a:spAutoFit/>
+          </a:bodyPr>
+          <a:lstStyle/>
           <a:p>
             <a:pPr algn="l">
               <a:lnSpc>
@@ -9808,13 +10024,425 @@
               </a:spcAft>
             </a:pPr>
             <a:r>
-              <a:rPr sz="1700" b="0">
-                <a:solidFill>
-                  <a:srgbClr val="3A4150"/>
-                </a:solidFill>
-                <a:latin typeface="Arial"/>
-              </a:rPr>
-              <a:t>of splits broke the promise. Allowed: 10%.</a:t>
+              <a:rPr sz="2200" b="1">
+                <a:solidFill>
+                  <a:srgbClr val="00175A"/>
+                </a:solidFill>
+                <a:latin typeface="Arial"/>
+              </a:rPr>
+              <a:t>Gemma-4-26B</a:t>
+            </a:r>
+          </a:p>
+        </p:txBody>
+      </p:sp>
+      <p:sp>
+        <p:nvSpPr>
+          <p:cNvPr id="20" name="Rounded Rectangle 19"/>
+          <p:cNvSpPr/>
+          <p:nvPr/>
+        </p:nvSpPr>
+        <p:spPr>
+          <a:xfrm>
+            <a:off x="3048000" y="4413250"/>
+            <a:ext cx="1905000" cy="762000"/>
+          </a:xfrm>
+          <a:prstGeom prst="roundRect">
+            <a:avLst>
+              <a:gd name="adj" fmla="val 10000"/>
+            </a:avLst>
+          </a:prstGeom>
+          <a:solidFill>
+            <a:srgbClr val="DDEDFB"/>
+          </a:solidFill>
+          <a:ln w="12700">
+            <a:solidFill>
+              <a:srgbClr val="D3DCE8"/>
+            </a:solidFill>
+          </a:ln>
+          <a:effectLst/>
+        </p:spPr>
+        <p:style>
+          <a:lnRef idx="1">
+            <a:schemeClr val="accent1"/>
+          </a:lnRef>
+          <a:fillRef idx="3">
+            <a:schemeClr val="accent1"/>
+          </a:fillRef>
+          <a:effectRef idx="2">
+            <a:schemeClr val="accent1"/>
+          </a:effectRef>
+          <a:fontRef idx="minor">
+            <a:schemeClr val="lt1"/>
+          </a:fontRef>
+        </p:style>
+        <p:txBody>
+          <a:bodyPr rtlCol="0" anchor="ctr" wrap="square" lIns="50800" rIns="50800" tIns="50800" bIns="50800"/>
+          <a:lstStyle/>
+          <a:p>
+            <a:pPr algn="ctr">
+              <a:lnSpc>
+                <a:spcPct val="115000"/>
+              </a:lnSpc>
+              <a:spcAft>
+                <a:spcPts val="0"/>
+              </a:spcAft>
+            </a:pPr>
+            <a:r>
+              <a:rPr sz="2400" b="1">
+                <a:solidFill>
+                  <a:srgbClr val="00175A"/>
+                </a:solidFill>
+                <a:latin typeface="Arial"/>
+              </a:rPr>
+              <a:t>99.8%</a:t>
+            </a:r>
+          </a:p>
+          <a:p>
+            <a:pPr algn="ctr">
+              <a:lnSpc>
+                <a:spcPct val="115000"/>
+              </a:lnSpc>
+              <a:spcAft>
+                <a:spcPts val="0"/>
+              </a:spcAft>
+            </a:pPr>
+            <a:r>
+              <a:rPr sz="1300" b="0">
+                <a:solidFill>
+                  <a:srgbClr val="6B7480"/>
+                </a:solidFill>
+                <a:latin typeface="Arial"/>
+              </a:rPr>
+              <a:t>team accuracy</a:t>
+            </a:r>
+          </a:p>
+        </p:txBody>
+      </p:sp>
+      <p:sp>
+        <p:nvSpPr>
+          <p:cNvPr id="21" name="Rounded Rectangle 20"/>
+          <p:cNvSpPr/>
+          <p:nvPr/>
+        </p:nvSpPr>
+        <p:spPr>
+          <a:xfrm>
+            <a:off x="5080000" y="4413250"/>
+            <a:ext cx="1905000" cy="762000"/>
+          </a:xfrm>
+          <a:prstGeom prst="roundRect">
+            <a:avLst>
+              <a:gd name="adj" fmla="val 10000"/>
+            </a:avLst>
+          </a:prstGeom>
+          <a:solidFill>
+            <a:srgbClr val="DDEDFB"/>
+          </a:solidFill>
+          <a:ln w="12700">
+            <a:solidFill>
+              <a:srgbClr val="D3DCE8"/>
+            </a:solidFill>
+          </a:ln>
+          <a:effectLst/>
+        </p:spPr>
+        <p:style>
+          <a:lnRef idx="1">
+            <a:schemeClr val="accent1"/>
+          </a:lnRef>
+          <a:fillRef idx="3">
+            <a:schemeClr val="accent1"/>
+          </a:fillRef>
+          <a:effectRef idx="2">
+            <a:schemeClr val="accent1"/>
+          </a:effectRef>
+          <a:fontRef idx="minor">
+            <a:schemeClr val="lt1"/>
+          </a:fontRef>
+        </p:style>
+        <p:txBody>
+          <a:bodyPr rtlCol="0" anchor="ctr" wrap="square" lIns="50800" rIns="50800" tIns="50800" bIns="50800"/>
+          <a:lstStyle/>
+          <a:p>
+            <a:pPr algn="ctr">
+              <a:lnSpc>
+                <a:spcPct val="115000"/>
+              </a:lnSpc>
+              <a:spcAft>
+                <a:spcPts val="0"/>
+              </a:spcAft>
+            </a:pPr>
+            <a:r>
+              <a:rPr sz="2400" b="1">
+                <a:solidFill>
+                  <a:srgbClr val="00175A"/>
+                </a:solidFill>
+                <a:latin typeface="Arial"/>
+              </a:rPr>
+              <a:t>67.9%</a:t>
+            </a:r>
+          </a:p>
+          <a:p>
+            <a:pPr algn="ctr">
+              <a:lnSpc>
+                <a:spcPct val="115000"/>
+              </a:lnSpc>
+              <a:spcAft>
+                <a:spcPts val="0"/>
+              </a:spcAft>
+            </a:pPr>
+            <a:r>
+              <a:rPr sz="1300" b="0">
+                <a:solidFill>
+                  <a:srgbClr val="6B7480"/>
+                </a:solidFill>
+                <a:latin typeface="Arial"/>
+              </a:rPr>
+              <a:t>team accuracy</a:t>
+            </a:r>
+          </a:p>
+        </p:txBody>
+      </p:sp>
+      <p:sp>
+        <p:nvSpPr>
+          <p:cNvPr id="22" name="Rounded Rectangle 21"/>
+          <p:cNvSpPr/>
+          <p:nvPr/>
+        </p:nvSpPr>
+        <p:spPr>
+          <a:xfrm>
+            <a:off x="7112000" y="4413250"/>
+            <a:ext cx="1905000" cy="762000"/>
+          </a:xfrm>
+          <a:prstGeom prst="roundRect">
+            <a:avLst>
+              <a:gd name="adj" fmla="val 10000"/>
+            </a:avLst>
+          </a:prstGeom>
+          <a:solidFill>
+            <a:srgbClr val="DDEDFB"/>
+          </a:solidFill>
+          <a:ln w="12700">
+            <a:solidFill>
+              <a:srgbClr val="D3DCE8"/>
+            </a:solidFill>
+          </a:ln>
+          <a:effectLst/>
+        </p:spPr>
+        <p:style>
+          <a:lnRef idx="1">
+            <a:schemeClr val="accent1"/>
+          </a:lnRef>
+          <a:fillRef idx="3">
+            <a:schemeClr val="accent1"/>
+          </a:fillRef>
+          <a:effectRef idx="2">
+            <a:schemeClr val="accent1"/>
+          </a:effectRef>
+          <a:fontRef idx="minor">
+            <a:schemeClr val="lt1"/>
+          </a:fontRef>
+        </p:style>
+        <p:txBody>
+          <a:bodyPr rtlCol="0" anchor="ctr" wrap="square" lIns="50800" rIns="50800" tIns="50800" bIns="50800"/>
+          <a:lstStyle/>
+          <a:p>
+            <a:pPr algn="ctr">
+              <a:lnSpc>
+                <a:spcPct val="115000"/>
+              </a:lnSpc>
+              <a:spcAft>
+                <a:spcPts val="0"/>
+              </a:spcAft>
+            </a:pPr>
+            <a:r>
+              <a:rPr sz="2400" b="1">
+                <a:solidFill>
+                  <a:srgbClr val="00175A"/>
+                </a:solidFill>
+                <a:latin typeface="Arial"/>
+              </a:rPr>
+              <a:t>65.3%</a:t>
+            </a:r>
+          </a:p>
+          <a:p>
+            <a:pPr algn="ctr">
+              <a:lnSpc>
+                <a:spcPct val="115000"/>
+              </a:lnSpc>
+              <a:spcAft>
+                <a:spcPts val="0"/>
+              </a:spcAft>
+            </a:pPr>
+            <a:r>
+              <a:rPr sz="1300" b="0">
+                <a:solidFill>
+                  <a:srgbClr val="6B7480"/>
+                </a:solidFill>
+                <a:latin typeface="Arial"/>
+              </a:rPr>
+              <a:t>team accuracy</a:t>
+            </a:r>
+          </a:p>
+        </p:txBody>
+      </p:sp>
+      <p:sp>
+        <p:nvSpPr>
+          <p:cNvPr id="23" name="Rounded Rectangle 22"/>
+          <p:cNvSpPr/>
+          <p:nvPr/>
+        </p:nvSpPr>
+        <p:spPr>
+          <a:xfrm>
+            <a:off x="9144000" y="4413250"/>
+            <a:ext cx="1905000" cy="762000"/>
+          </a:xfrm>
+          <a:prstGeom prst="roundRect">
+            <a:avLst>
+              <a:gd name="adj" fmla="val 10000"/>
+            </a:avLst>
+          </a:prstGeom>
+          <a:solidFill>
+            <a:srgbClr val="DDEDFB"/>
+          </a:solidFill>
+          <a:ln w="12700">
+            <a:solidFill>
+              <a:srgbClr val="D3DCE8"/>
+            </a:solidFill>
+          </a:ln>
+          <a:effectLst/>
+        </p:spPr>
+        <p:style>
+          <a:lnRef idx="1">
+            <a:schemeClr val="accent1"/>
+          </a:lnRef>
+          <a:fillRef idx="3">
+            <a:schemeClr val="accent1"/>
+          </a:fillRef>
+          <a:effectRef idx="2">
+            <a:schemeClr val="accent1"/>
+          </a:effectRef>
+          <a:fontRef idx="minor">
+            <a:schemeClr val="lt1"/>
+          </a:fontRef>
+        </p:style>
+        <p:txBody>
+          <a:bodyPr rtlCol="0" anchor="ctr" wrap="square" lIns="50800" rIns="50800" tIns="50800" bIns="50800"/>
+          <a:lstStyle/>
+          <a:p>
+            <a:pPr algn="ctr">
+              <a:lnSpc>
+                <a:spcPct val="115000"/>
+              </a:lnSpc>
+              <a:spcAft>
+                <a:spcPts val="0"/>
+              </a:spcAft>
+            </a:pPr>
+            <a:r>
+              <a:rPr sz="2400" b="1">
+                <a:solidFill>
+                  <a:srgbClr val="00175A"/>
+                </a:solidFill>
+                <a:latin typeface="Arial"/>
+              </a:rPr>
+              <a:t>36.4%</a:t>
+            </a:r>
+          </a:p>
+          <a:p>
+            <a:pPr algn="ctr">
+              <a:lnSpc>
+                <a:spcPct val="115000"/>
+              </a:lnSpc>
+              <a:spcAft>
+                <a:spcPts val="0"/>
+              </a:spcAft>
+            </a:pPr>
+            <a:r>
+              <a:rPr sz="1300" b="0">
+                <a:solidFill>
+                  <a:srgbClr val="6B7480"/>
+                </a:solidFill>
+                <a:latin typeface="Arial"/>
+              </a:rPr>
+              <a:t>team accuracy</a:t>
+            </a:r>
+          </a:p>
+        </p:txBody>
+      </p:sp>
+      <p:sp>
+        <p:nvSpPr>
+          <p:cNvPr id="24" name="Rounded Rectangle 23"/>
+          <p:cNvSpPr/>
+          <p:nvPr/>
+        </p:nvSpPr>
+        <p:spPr>
+          <a:xfrm>
+            <a:off x="812800" y="5524500"/>
+            <a:ext cx="10566400" cy="635000"/>
+          </a:xfrm>
+          <a:prstGeom prst="roundRect">
+            <a:avLst>
+              <a:gd name="adj" fmla="val 10000"/>
+            </a:avLst>
+          </a:prstGeom>
+          <a:solidFill>
+            <a:srgbClr val="00175A"/>
+          </a:solidFill>
+          <a:ln>
+            <a:noFill/>
+          </a:ln>
+          <a:effectLst/>
+        </p:spPr>
+        <p:style>
+          <a:lnRef idx="1">
+            <a:schemeClr val="accent1"/>
+          </a:lnRef>
+          <a:fillRef idx="3">
+            <a:schemeClr val="accent1"/>
+          </a:fillRef>
+          <a:effectRef idx="2">
+            <a:schemeClr val="accent1"/>
+          </a:effectRef>
+          <a:fontRef idx="minor">
+            <a:schemeClr val="lt1"/>
+          </a:fontRef>
+        </p:style>
+        <p:txBody>
+          <a:bodyPr rtlCol="0" anchor="ctr" wrap="square" lIns="203200" rIns="203200" tIns="203200" bIns="203200"/>
+          <a:lstStyle/>
+          <a:p>
+            <a:pPr algn="ctr">
+              <a:lnSpc>
+                <a:spcPct val="115000"/>
+              </a:lnSpc>
+              <a:spcAft>
+                <a:spcPts val="0"/>
+              </a:spcAft>
+            </a:pPr>
+            <a:r>
+              <a:rPr sz="1800" b="0">
+                <a:solidFill>
+                  <a:srgbClr val="F6F8FB"/>
+                </a:solidFill>
+                <a:latin typeface="Arial"/>
+              </a:rPr>
+              <a:t>Record every task once, then replay </a:t>
+            </a:r>
+            <a:r>
+              <a:rPr sz="1800" b="1">
+                <a:solidFill>
+                  <a:srgbClr val="66B2F0"/>
+                </a:solidFill>
+                <a:latin typeface="Arial"/>
+              </a:rPr>
+              <a:t>200 random splits</a:t>
+            </a:r>
+            <a:r>
+              <a:rPr sz="1800" b="0">
+                <a:solidFill>
+                  <a:srgbClr val="F6F8FB"/>
+                </a:solidFill>
+                <a:latin typeface="Arial"/>
+              </a:rPr>
+              <a:t>: half to calibrate CLIMB, half to test it.</a:t>
             </a:r>
           </a:p>
         </p:txBody>
@@ -9833,7 +10461,7 @@
     <p:bg>
       <p:bgPr>
         <a:solidFill>
-          <a:srgbClr val="F7F6F2"/>
+          <a:srgbClr val="F6F8FB"/>
         </a:solidFill>
         <a:effectLst/>
       </p:bgPr>
@@ -9878,7 +10506,7 @@
             <a:r>
               <a:rPr sz="1200" b="0">
                 <a:solidFill>
-                  <a:srgbClr val="6B7280"/>
+                  <a:srgbClr val="6B7480"/>
                 </a:solidFill>
                 <a:latin typeface="Arial"/>
               </a:rPr>
@@ -9920,7 +10548,7 @@
             <a:r>
               <a:rPr sz="1300" b="1">
                 <a:solidFill>
-                  <a:srgbClr val="B4541A"/>
+                  <a:srgbClr val="006FCF"/>
                 </a:solidFill>
                 <a:latin typeface="Arial"/>
               </a:rPr>
@@ -9962,18 +10590,18 @@
             <a:r>
               <a:rPr sz="3000" b="1">
                 <a:solidFill>
-                  <a:srgbClr val="14213D"/>
+                  <a:srgbClr val="00175A"/>
                 </a:solidFill>
                 <a:latin typeface="Georgia"/>
               </a:rPr>
-              <a:t>How much it saves</a:t>
+              <a:t>The promise holds on every setting</a:t>
             </a:r>
           </a:p>
         </p:txBody>
       </p:sp>
       <p:pic>
         <p:nvPicPr>
-          <p:cNvPr id="5" name="Picture 4" descr="c_savings.png"/>
+          <p:cNvPr id="5" name="Picture 4" descr="c_viol.png"/>
           <p:cNvPicPr>
             <a:picLocks noChangeAspect="1"/>
           </p:cNvPicPr>
@@ -9987,8 +10615,8 @@
         </p:blipFill>
         <p:spPr>
           <a:xfrm>
-            <a:off x="812800" y="1997499"/>
-            <a:ext cx="7302500" cy="3752001"/>
+            <a:off x="812800" y="1999442"/>
+            <a:ext cx="7302500" cy="3748115"/>
           </a:xfrm>
           <a:prstGeom prst="rect">
             <a:avLst/>
@@ -10003,20 +10631,20 @@
         </p:nvSpPr>
         <p:spPr>
           <a:xfrm>
-            <a:off x="8445500" y="2095500"/>
-            <a:ext cx="2933700" cy="1651000"/>
+            <a:off x="8445500" y="2286000"/>
+            <a:ext cx="2933700" cy="1905000"/>
           </a:xfrm>
           <a:prstGeom prst="roundRect">
             <a:avLst>
-              <a:gd name="adj" fmla="val 6923"/>
+              <a:gd name="adj" fmla="val 6000"/>
             </a:avLst>
           </a:prstGeom>
           <a:solidFill>
-            <a:srgbClr val="E2EAF5"/>
+            <a:srgbClr val="E3ECE2"/>
           </a:solidFill>
           <a:ln w="12700">
             <a:solidFill>
-              <a:srgbClr val="DDD8CC"/>
+              <a:srgbClr val="D3DCE8"/>
             </a:solidFill>
           </a:ln>
           <a:effectLst/>
@@ -10050,11 +10678,11 @@
             <a:r>
               <a:rPr sz="3600" b="1">
                 <a:solidFill>
-                  <a:srgbClr val="2E5C99"/>
+                  <a:srgbClr val="2F6B34"/>
                 </a:solidFill>
                 <a:latin typeface="Georgia"/>
               </a:rPr>
-              <a:t>38% saved</a:t>
+              <a:t>≤ 2%</a:t>
             </a:r>
           </a:p>
           <a:p>
@@ -10069,94 +10697,11 @@
             <a:r>
               <a:rPr sz="1700" b="0">
                 <a:solidFill>
-                  <a:srgbClr val="3A4150"/>
-                </a:solidFill>
-                <a:latin typeface="Arial"/>
-              </a:rPr>
-              <a:t>allowing 5 points of loss</a:t>
-            </a:r>
-          </a:p>
-        </p:txBody>
-      </p:sp>
-      <p:sp>
-        <p:nvSpPr>
-          <p:cNvPr id="7" name="Rounded Rectangle 6"/>
-          <p:cNvSpPr/>
-          <p:nvPr/>
-        </p:nvSpPr>
-        <p:spPr>
-          <a:xfrm>
-            <a:off x="8445500" y="4000500"/>
-            <a:ext cx="2933700" cy="1651000"/>
-          </a:xfrm>
-          <a:prstGeom prst="roundRect">
-            <a:avLst>
-              <a:gd name="adj" fmla="val 6923"/>
-            </a:avLst>
-          </a:prstGeom>
-          <a:solidFill>
-            <a:srgbClr val="E2EAF5"/>
-          </a:solidFill>
-          <a:ln w="12700">
-            <a:solidFill>
-              <a:srgbClr val="DDD8CC"/>
-            </a:solidFill>
-          </a:ln>
-          <a:effectLst/>
-        </p:spPr>
-        <p:style>
-          <a:lnRef idx="1">
-            <a:schemeClr val="accent1"/>
-          </a:lnRef>
-          <a:fillRef idx="3">
-            <a:schemeClr val="accent1"/>
-          </a:fillRef>
-          <a:effectRef idx="2">
-            <a:schemeClr val="accent1"/>
-          </a:effectRef>
-          <a:fontRef idx="minor">
-            <a:schemeClr val="lt1"/>
-          </a:fontRef>
-        </p:style>
-        <p:txBody>
-          <a:bodyPr rtlCol="0" anchor="ctr" wrap="square" lIns="190500" rIns="190500" tIns="190500" bIns="190500"/>
-          <a:lstStyle/>
-          <a:p>
-            <a:pPr algn="l">
-              <a:lnSpc>
-                <a:spcPct val="100000"/>
-              </a:lnSpc>
-              <a:spcAft>
-                <a:spcPts val="600"/>
-              </a:spcAft>
-            </a:pPr>
-            <a:r>
-              <a:rPr sz="3600" b="1">
-                <a:solidFill>
-                  <a:srgbClr val="2E5C99"/>
-                </a:solidFill>
-                <a:latin typeface="Georgia"/>
-              </a:rPr>
-              <a:t>65% saved</a:t>
-            </a:r>
-          </a:p>
-          <a:p>
-            <a:pPr algn="l">
-              <a:lnSpc>
-                <a:spcPct val="115000"/>
-              </a:lnSpc>
-              <a:spcAft>
-                <a:spcPts val="0"/>
-              </a:spcAft>
-            </a:pPr>
-            <a:r>
-              <a:rPr sz="1700" b="0">
-                <a:solidFill>
-                  <a:srgbClr val="3A4150"/>
-                </a:solidFill>
-                <a:latin typeface="Arial"/>
-              </a:rPr>
-              <a:t>allowing 10 points of loss</a:t>
+                  <a:srgbClr val="333B47"/>
+                </a:solidFill>
+                <a:latin typeface="Arial"/>
+              </a:rPr>
+              <a:t>of splits broke the promise. Allowed: 10%.</a:t>
             </a:r>
           </a:p>
         </p:txBody>
@@ -10175,7 +10720,7 @@
     <p:bg>
       <p:bgPr>
         <a:solidFill>
-          <a:srgbClr val="F7F6F2"/>
+          <a:srgbClr val="F6F8FB"/>
         </a:solidFill>
         <a:effectLst/>
       </p:bgPr>
@@ -10220,7 +10765,7 @@
             <a:r>
               <a:rPr sz="1200" b="0">
                 <a:solidFill>
-                  <a:srgbClr val="6B7280"/>
+                  <a:srgbClr val="6B7480"/>
                 </a:solidFill>
                 <a:latin typeface="Arial"/>
               </a:rPr>
@@ -10262,7 +10807,7 @@
             <a:r>
               <a:rPr sz="1300" b="1">
                 <a:solidFill>
-                  <a:srgbClr val="B4541A"/>
+                  <a:srgbClr val="006FCF"/>
                 </a:solidFill>
                 <a:latin typeface="Arial"/>
               </a:rPr>
@@ -10304,18 +10849,18 @@
             <a:r>
               <a:rPr sz="3000" b="1">
                 <a:solidFill>
-                  <a:srgbClr val="14213D"/>
+                  <a:srgbClr val="00175A"/>
                 </a:solidFill>
                 <a:latin typeface="Georgia"/>
               </a:rPr>
-              <a:t>Without the test, the promise breaks</a:t>
+              <a:t>How much it saves</a:t>
             </a:r>
           </a:p>
         </p:txBody>
       </p:sp>
       <p:pic>
         <p:nvPicPr>
-          <p:cNvPr id="5" name="Picture 4" descr="c_tuned.png"/>
+          <p:cNvPr id="5" name="Picture 4" descr="c_savings.png"/>
           <p:cNvPicPr>
             <a:picLocks noChangeAspect="1"/>
           </p:cNvPicPr>
@@ -10329,8 +10874,8 @@
         </p:blipFill>
         <p:spPr>
           <a:xfrm>
-            <a:off x="812800" y="1721371"/>
-            <a:ext cx="7302500" cy="4304257"/>
+            <a:off x="812800" y="1997499"/>
+            <a:ext cx="7302500" cy="3752001"/>
           </a:xfrm>
           <a:prstGeom prst="rect">
             <a:avLst/>
@@ -10345,20 +10890,20 @@
         </p:nvSpPr>
         <p:spPr>
           <a:xfrm>
-            <a:off x="8445500" y="2286000"/>
-            <a:ext cx="2933700" cy="1905000"/>
+            <a:off x="8445500" y="2095500"/>
+            <a:ext cx="2933700" cy="1651000"/>
           </a:xfrm>
           <a:prstGeom prst="roundRect">
             <a:avLst>
-              <a:gd name="adj" fmla="val 6000"/>
+              <a:gd name="adj" fmla="val 6923"/>
             </a:avLst>
           </a:prstGeom>
           <a:solidFill>
-            <a:srgbClr val="F6E3E0"/>
+            <a:srgbClr val="E6EBF4"/>
           </a:solidFill>
           <a:ln w="12700">
             <a:solidFill>
-              <a:srgbClr val="DDD8CC"/>
+              <a:srgbClr val="D3DCE8"/>
             </a:solidFill>
           </a:ln>
           <a:effectLst/>
@@ -10392,11 +10937,11 @@
             <a:r>
               <a:rPr sz="3600" b="1">
                 <a:solidFill>
-                  <a:srgbClr val="B03A2E"/>
+                  <a:srgbClr val="00175A"/>
                 </a:solidFill>
                 <a:latin typeface="Georgia"/>
               </a:rPr>
-              <a:t>31%</a:t>
+              <a:t>38% saved</a:t>
             </a:r>
           </a:p>
           <a:p>
@@ -10411,11 +10956,94 @@
             <a:r>
               <a:rPr sz="1700" b="0">
                 <a:solidFill>
-                  <a:srgbClr val="3A4150"/>
-                </a:solidFill>
-                <a:latin typeface="Arial"/>
-              </a:rPr>
-              <a:t>of splits broken at ε = 5 by the tuned rule. CLIMB: 0.6%.</a:t>
+                  <a:srgbClr val="333B47"/>
+                </a:solidFill>
+                <a:latin typeface="Arial"/>
+              </a:rPr>
+              <a:t>allowing 5 points of loss</a:t>
+            </a:r>
+          </a:p>
+        </p:txBody>
+      </p:sp>
+      <p:sp>
+        <p:nvSpPr>
+          <p:cNvPr id="7" name="Rounded Rectangle 6"/>
+          <p:cNvSpPr/>
+          <p:nvPr/>
+        </p:nvSpPr>
+        <p:spPr>
+          <a:xfrm>
+            <a:off x="8445500" y="4000500"/>
+            <a:ext cx="2933700" cy="1651000"/>
+          </a:xfrm>
+          <a:prstGeom prst="roundRect">
+            <a:avLst>
+              <a:gd name="adj" fmla="val 6923"/>
+            </a:avLst>
+          </a:prstGeom>
+          <a:solidFill>
+            <a:srgbClr val="E6EBF4"/>
+          </a:solidFill>
+          <a:ln w="12700">
+            <a:solidFill>
+              <a:srgbClr val="D3DCE8"/>
+            </a:solidFill>
+          </a:ln>
+          <a:effectLst/>
+        </p:spPr>
+        <p:style>
+          <a:lnRef idx="1">
+            <a:schemeClr val="accent1"/>
+          </a:lnRef>
+          <a:fillRef idx="3">
+            <a:schemeClr val="accent1"/>
+          </a:fillRef>
+          <a:effectRef idx="2">
+            <a:schemeClr val="accent1"/>
+          </a:effectRef>
+          <a:fontRef idx="minor">
+            <a:schemeClr val="lt1"/>
+          </a:fontRef>
+        </p:style>
+        <p:txBody>
+          <a:bodyPr rtlCol="0" anchor="ctr" wrap="square" lIns="190500" rIns="190500" tIns="190500" bIns="190500"/>
+          <a:lstStyle/>
+          <a:p>
+            <a:pPr algn="l">
+              <a:lnSpc>
+                <a:spcPct val="100000"/>
+              </a:lnSpc>
+              <a:spcAft>
+                <a:spcPts val="600"/>
+              </a:spcAft>
+            </a:pPr>
+            <a:r>
+              <a:rPr sz="3600" b="1">
+                <a:solidFill>
+                  <a:srgbClr val="00175A"/>
+                </a:solidFill>
+                <a:latin typeface="Georgia"/>
+              </a:rPr>
+              <a:t>65% saved</a:t>
+            </a:r>
+          </a:p>
+          <a:p>
+            <a:pPr algn="l">
+              <a:lnSpc>
+                <a:spcPct val="115000"/>
+              </a:lnSpc>
+              <a:spcAft>
+                <a:spcPts val="0"/>
+              </a:spcAft>
+            </a:pPr>
+            <a:r>
+              <a:rPr sz="1700" b="0">
+                <a:solidFill>
+                  <a:srgbClr val="333B47"/>
+                </a:solidFill>
+                <a:latin typeface="Arial"/>
+              </a:rPr>
+              <a:t>allowing 10 points of loss</a:t>
             </a:r>
           </a:p>
         </p:txBody>
@@ -10434,7 +11062,7 @@
     <p:bg>
       <p:bgPr>
         <a:solidFill>
-          <a:srgbClr val="F7F6F2"/>
+          <a:srgbClr val="F6F8FB"/>
         </a:solidFill>
         <a:effectLst/>
       </p:bgPr>
@@ -10479,7 +11107,7 @@
             <a:r>
               <a:rPr sz="1200" b="0">
                 <a:solidFill>
-                  <a:srgbClr val="6B7280"/>
+                  <a:srgbClr val="6B7480"/>
                 </a:solidFill>
                 <a:latin typeface="Arial"/>
               </a:rPr>
@@ -10521,7 +11149,7 @@
             <a:r>
               <a:rPr sz="1300" b="1">
                 <a:solidFill>
-                  <a:srgbClr val="B4541A"/>
+                  <a:srgbClr val="006FCF"/>
                 </a:solidFill>
                 <a:latin typeface="Arial"/>
               </a:rPr>
@@ -10563,7 +11191,7 @@
             <a:r>
               <a:rPr sz="3000" b="1">
                 <a:solidFill>
-                  <a:srgbClr val="14213D"/>
+                  <a:srgbClr val="00175A"/>
                 </a:solidFill>
                 <a:latin typeface="Georgia"/>
               </a:rPr>
@@ -10605,7 +11233,7 @@
             <a:r>
               <a:rPr sz="2200" b="1">
                 <a:solidFill>
-                  <a:srgbClr val="2E5C99"/>
+                  <a:srgbClr val="00175A"/>
                 </a:solidFill>
                 <a:latin typeface="Arial"/>
               </a:rPr>
@@ -10631,11 +11259,11 @@
             </a:avLst>
           </a:prstGeom>
           <a:solidFill>
-            <a:srgbClr val="FDFCF9"/>
+            <a:srgbClr val="FFFFFF"/>
           </a:solidFill>
           <a:ln w="12700">
             <a:solidFill>
-              <a:srgbClr val="DDD8CC"/>
+              <a:srgbClr val="D3DCE8"/>
             </a:solidFill>
           </a:ln>
           <a:effectLst/>
@@ -10669,7 +11297,7 @@
             <a:r>
               <a:rPr sz="2200" b="1">
                 <a:solidFill>
-                  <a:srgbClr val="14213D"/>
+                  <a:srgbClr val="00175A"/>
                 </a:solidFill>
                 <a:latin typeface="Arial"/>
               </a:rPr>
@@ -10693,7 +11321,7 @@
             <a:avLst/>
           </a:prstGeom>
           <a:solidFill>
-            <a:srgbClr val="6B7280"/>
+            <a:srgbClr val="6B7480"/>
           </a:solidFill>
           <a:ln>
             <a:noFill/>
@@ -10739,11 +11367,11 @@
             </a:avLst>
           </a:prstGeom>
           <a:solidFill>
-            <a:srgbClr val="E2EAF5"/>
+            <a:srgbClr val="E6EBF4"/>
           </a:solidFill>
           <a:ln w="25400">
             <a:solidFill>
-              <a:srgbClr val="2E5C99"/>
+              <a:srgbClr val="00175A"/>
             </a:solidFill>
           </a:ln>
           <a:effectLst/>
@@ -10777,7 +11405,7 @@
             <a:r>
               <a:rPr sz="2200" b="1">
                 <a:solidFill>
-                  <a:srgbClr val="14213D"/>
+                  <a:srgbClr val="00175A"/>
                 </a:solidFill>
                 <a:latin typeface="Arial"/>
               </a:rPr>
@@ -10796,7 +11424,7 @@
             <a:r>
               <a:rPr sz="1600" b="0">
                 <a:solidFill>
-                  <a:srgbClr val="2E5C99"/>
+                  <a:srgbClr val="00175A"/>
                 </a:solidFill>
                 <a:latin typeface="Arial"/>
               </a:rPr>
@@ -10820,7 +11448,7 @@
             <a:avLst/>
           </a:prstGeom>
           <a:solidFill>
-            <a:srgbClr val="6B7280"/>
+            <a:srgbClr val="6B7480"/>
           </a:solidFill>
           <a:ln>
             <a:noFill/>
@@ -10866,11 +11494,11 @@
             </a:avLst>
           </a:prstGeom>
           <a:solidFill>
-            <a:srgbClr val="FDFCF9"/>
+            <a:srgbClr val="FFFFFF"/>
           </a:solidFill>
           <a:ln w="12700">
             <a:solidFill>
-              <a:srgbClr val="DDD8CC"/>
+              <a:srgbClr val="D3DCE8"/>
             </a:solidFill>
           </a:ln>
           <a:effectLst/>
@@ -10904,7 +11532,7 @@
             <a:r>
               <a:rPr sz="2200" b="1">
                 <a:solidFill>
-                  <a:srgbClr val="14213D"/>
+                  <a:srgbClr val="00175A"/>
                 </a:solidFill>
                 <a:latin typeface="Arial"/>
               </a:rPr>
@@ -10946,7 +11574,7 @@
             <a:r>
               <a:rPr sz="2200" b="1">
                 <a:solidFill>
-                  <a:srgbClr val="B4541A"/>
+                  <a:srgbClr val="006FCF"/>
                 </a:solidFill>
                 <a:latin typeface="Arial"/>
               </a:rPr>
@@ -10972,11 +11600,11 @@
             </a:avLst>
           </a:prstGeom>
           <a:solidFill>
-            <a:srgbClr val="FDFCF9"/>
+            <a:srgbClr val="FFFFFF"/>
           </a:solidFill>
           <a:ln w="25400">
             <a:solidFill>
-              <a:srgbClr val="DDD8CC"/>
+              <a:srgbClr val="D3DCE8"/>
             </a:solidFill>
           </a:ln>
           <a:effectLst/>
@@ -11010,7 +11638,7 @@
             <a:r>
               <a:rPr sz="2100" b="1">
                 <a:solidFill>
-                  <a:srgbClr val="14213D"/>
+                  <a:srgbClr val="00175A"/>
                 </a:solidFill>
                 <a:latin typeface="Arial"/>
               </a:rPr>
@@ -11034,7 +11662,7 @@
             <a:avLst/>
           </a:prstGeom>
           <a:solidFill>
-            <a:srgbClr val="6B7280"/>
+            <a:srgbClr val="6B7480"/>
           </a:solidFill>
           <a:ln>
             <a:noFill/>
@@ -11080,11 +11708,11 @@
             </a:avLst>
           </a:prstGeom>
           <a:solidFill>
-            <a:srgbClr val="F8E8DC"/>
+            <a:srgbClr val="DDEDFB"/>
           </a:solidFill>
           <a:ln w="25400">
             <a:solidFill>
-              <a:srgbClr val="B4541A"/>
+              <a:srgbClr val="006FCF"/>
             </a:solidFill>
           </a:ln>
           <a:effectLst/>
@@ -11118,7 +11746,7 @@
             <a:r>
               <a:rPr sz="2100" b="1">
                 <a:solidFill>
-                  <a:srgbClr val="14213D"/>
+                  <a:srgbClr val="00175A"/>
                 </a:solidFill>
                 <a:latin typeface="Arial"/>
               </a:rPr>
@@ -11137,7 +11765,7 @@
             <a:r>
               <a:rPr sz="1500" b="0">
                 <a:solidFill>
-                  <a:srgbClr val="B4541A"/>
+                  <a:srgbClr val="006FCF"/>
                 </a:solidFill>
                 <a:latin typeface="Arial"/>
               </a:rPr>
@@ -11161,7 +11789,7 @@
             <a:avLst/>
           </a:prstGeom>
           <a:solidFill>
-            <a:srgbClr val="6B7280"/>
+            <a:srgbClr val="6B7480"/>
           </a:solidFill>
           <a:ln>
             <a:noFill/>
@@ -11207,11 +11835,11 @@
             </a:avLst>
           </a:prstGeom>
           <a:solidFill>
-            <a:srgbClr val="F8E8DC"/>
+            <a:srgbClr val="DDEDFB"/>
           </a:solidFill>
           <a:ln w="25400">
             <a:solidFill>
-              <a:srgbClr val="B4541A"/>
+              <a:srgbClr val="006FCF"/>
             </a:solidFill>
           </a:ln>
           <a:effectLst/>
@@ -11245,7 +11873,7 @@
             <a:r>
               <a:rPr sz="2100" b="1">
                 <a:solidFill>
-                  <a:srgbClr val="14213D"/>
+                  <a:srgbClr val="00175A"/>
                 </a:solidFill>
                 <a:latin typeface="Arial"/>
               </a:rPr>
@@ -11264,7 +11892,7 @@
             <a:r>
               <a:rPr sz="1500" b="0">
                 <a:solidFill>
-                  <a:srgbClr val="B4541A"/>
+                  <a:srgbClr val="006FCF"/>
                 </a:solidFill>
                 <a:latin typeface="Arial"/>
               </a:rPr>
@@ -11288,7 +11916,7 @@
             <a:avLst/>
           </a:prstGeom>
           <a:solidFill>
-            <a:srgbClr val="6B7280"/>
+            <a:srgbClr val="6B7480"/>
           </a:solidFill>
           <a:ln>
             <a:noFill/>
@@ -11334,11 +11962,11 @@
             </a:avLst>
           </a:prstGeom>
           <a:solidFill>
-            <a:srgbClr val="F8E8DC"/>
+            <a:srgbClr val="DDEDFB"/>
           </a:solidFill>
           <a:ln w="25400">
             <a:solidFill>
-              <a:srgbClr val="B4541A"/>
+              <a:srgbClr val="006FCF"/>
             </a:solidFill>
           </a:ln>
           <a:effectLst/>
@@ -11372,7 +12000,7 @@
             <a:r>
               <a:rPr sz="2100" b="1">
                 <a:solidFill>
-                  <a:srgbClr val="14213D"/>
+                  <a:srgbClr val="00175A"/>
                 </a:solidFill>
                 <a:latin typeface="Arial"/>
               </a:rPr>
@@ -11391,7 +12019,7 @@
             <a:r>
               <a:rPr sz="1500" b="0">
                 <a:solidFill>
-                  <a:srgbClr val="B4541A"/>
+                  <a:srgbClr val="006FCF"/>
                 </a:solidFill>
                 <a:latin typeface="Arial"/>
               </a:rPr>
@@ -11415,7 +12043,7 @@
             <a:avLst/>
           </a:prstGeom>
           <a:solidFill>
-            <a:srgbClr val="6B7280"/>
+            <a:srgbClr val="6B7480"/>
           </a:solidFill>
           <a:ln>
             <a:noFill/>
@@ -11461,11 +12089,11 @@
             </a:avLst>
           </a:prstGeom>
           <a:solidFill>
-            <a:srgbClr val="FDFCF9"/>
+            <a:srgbClr val="FFFFFF"/>
           </a:solidFill>
           <a:ln w="25400">
             <a:solidFill>
-              <a:srgbClr val="DDD8CC"/>
+              <a:srgbClr val="D3DCE8"/>
             </a:solidFill>
           </a:ln>
           <a:effectLst/>
@@ -11499,7 +12127,7 @@
             <a:r>
               <a:rPr sz="2100" b="1">
                 <a:solidFill>
-                  <a:srgbClr val="14213D"/>
+                  <a:srgbClr val="00175A"/>
                 </a:solidFill>
                 <a:latin typeface="Arial"/>
               </a:rPr>
@@ -11523,7 +12151,7 @@
             <a:avLst/>
           </a:prstGeom>
           <a:solidFill>
-            <a:srgbClr val="B4541A"/>
+            <a:srgbClr val="006FCF"/>
           </a:solidFill>
           <a:ln>
             <a:noFill/>
@@ -11585,7 +12213,7 @@
             <a:r>
               <a:rPr sz="1800" b="1">
                 <a:solidFill>
-                  <a:srgbClr val="B4541A"/>
+                  <a:srgbClr val="006FCF"/>
                 </a:solidFill>
                 <a:latin typeface="Arial"/>
               </a:rPr>
@@ -11608,7 +12236,7 @@
     <p:bg>
       <p:bgPr>
         <a:solidFill>
-          <a:srgbClr val="14213D"/>
+          <a:srgbClr val="F6F8FB"/>
         </a:solidFill>
         <a:effectLst/>
       </p:bgPr>
@@ -11653,7 +12281,7 @@
             <a:r>
               <a:rPr sz="1200" b="0">
                 <a:solidFill>
-                  <a:srgbClr val="8B97AE"/>
+                  <a:srgbClr val="6B7480"/>
                 </a:solidFill>
                 <a:latin typeface="Arial"/>
               </a:rPr>
@@ -11695,11 +12323,11 @@
             <a:r>
               <a:rPr sz="1300" b="1">
                 <a:solidFill>
-                  <a:srgbClr val="F0A66B"/>
-                </a:solidFill>
-                <a:latin typeface="Arial"/>
-              </a:rPr>
-              <a:t>TAKEAWAYS</a:t>
+                  <a:srgbClr val="006FCF"/>
+                </a:solidFill>
+                <a:latin typeface="Arial"/>
+              </a:rPr>
+              <a:t>RESULTS</a:t>
             </a:r>
           </a:p>
         </p:txBody>
@@ -11735,9 +12363,268 @@
               </a:spcAft>
             </a:pPr>
             <a:r>
+              <a:rPr sz="3000" b="1">
+                <a:solidFill>
+                  <a:srgbClr val="00175A"/>
+                </a:solidFill>
+                <a:latin typeface="Georgia"/>
+              </a:rPr>
+              <a:t>Without the test, the promise breaks</a:t>
+            </a:r>
+          </a:p>
+        </p:txBody>
+      </p:sp>
+      <p:pic>
+        <p:nvPicPr>
+          <p:cNvPr id="5" name="Picture 4" descr="c_tuned.png"/>
+          <p:cNvPicPr>
+            <a:picLocks noChangeAspect="1"/>
+          </p:cNvPicPr>
+          <p:nvPr/>
+        </p:nvPicPr>
+        <p:blipFill>
+          <a:blip r:embed="rId3"/>
+          <a:stretch>
+            <a:fillRect/>
+          </a:stretch>
+        </p:blipFill>
+        <p:spPr>
+          <a:xfrm>
+            <a:off x="812800" y="1721371"/>
+            <a:ext cx="7302500" cy="4304257"/>
+          </a:xfrm>
+          <a:prstGeom prst="rect">
+            <a:avLst/>
+          </a:prstGeom>
+        </p:spPr>
+      </p:pic>
+      <p:sp>
+        <p:nvSpPr>
+          <p:cNvPr id="6" name="Rounded Rectangle 5"/>
+          <p:cNvSpPr/>
+          <p:nvPr/>
+        </p:nvSpPr>
+        <p:spPr>
+          <a:xfrm>
+            <a:off x="8445500" y="2286000"/>
+            <a:ext cx="2933700" cy="1905000"/>
+          </a:xfrm>
+          <a:prstGeom prst="roundRect">
+            <a:avLst>
+              <a:gd name="adj" fmla="val 6000"/>
+            </a:avLst>
+          </a:prstGeom>
+          <a:solidFill>
+            <a:srgbClr val="F6E3E0"/>
+          </a:solidFill>
+          <a:ln w="12700">
+            <a:solidFill>
+              <a:srgbClr val="D3DCE8"/>
+            </a:solidFill>
+          </a:ln>
+          <a:effectLst/>
+        </p:spPr>
+        <p:style>
+          <a:lnRef idx="1">
+            <a:schemeClr val="accent1"/>
+          </a:lnRef>
+          <a:fillRef idx="3">
+            <a:schemeClr val="accent1"/>
+          </a:fillRef>
+          <a:effectRef idx="2">
+            <a:schemeClr val="accent1"/>
+          </a:effectRef>
+          <a:fontRef idx="minor">
+            <a:schemeClr val="lt1"/>
+          </a:fontRef>
+        </p:style>
+        <p:txBody>
+          <a:bodyPr rtlCol="0" anchor="ctr" wrap="square" lIns="190500" rIns="190500" tIns="190500" bIns="190500"/>
+          <a:lstStyle/>
+          <a:p>
+            <a:pPr algn="l">
+              <a:lnSpc>
+                <a:spcPct val="100000"/>
+              </a:lnSpc>
+              <a:spcAft>
+                <a:spcPts val="600"/>
+              </a:spcAft>
+            </a:pPr>
+            <a:r>
               <a:rPr sz="3600" b="1">
                 <a:solidFill>
-                  <a:srgbClr val="F7F6F2"/>
+                  <a:srgbClr val="B03A2E"/>
+                </a:solidFill>
+                <a:latin typeface="Georgia"/>
+              </a:rPr>
+              <a:t>31%</a:t>
+            </a:r>
+          </a:p>
+          <a:p>
+            <a:pPr algn="l">
+              <a:lnSpc>
+                <a:spcPct val="115000"/>
+              </a:lnSpc>
+              <a:spcAft>
+                <a:spcPts val="0"/>
+              </a:spcAft>
+            </a:pPr>
+            <a:r>
+              <a:rPr sz="1700" b="0">
+                <a:solidFill>
+                  <a:srgbClr val="333B47"/>
+                </a:solidFill>
+                <a:latin typeface="Arial"/>
+              </a:rPr>
+              <a:t>of splits broken at ε = 5 by the tuned rule. CLIMB: 0.6%.</a:t>
+            </a:r>
+          </a:p>
+        </p:txBody>
+      </p:sp>
+    </p:spTree>
+  </p:cSld>
+  <p:clrMapOvr>
+    <a:masterClrMapping/>
+  </p:clrMapOvr>
+</p:sld>
+</file>
+
+<file path=ppt/slides/slide21.xml><?xml version="1.0" encoding="utf-8"?>
+<p:sld xmlns:a="http://schemas.openxmlformats.org/drawingml/2006/main" xmlns:p="http://schemas.openxmlformats.org/presentationml/2006/main" xmlns:r="http://schemas.openxmlformats.org/officeDocument/2006/relationships">
+  <p:cSld>
+    <p:bg>
+      <p:bgPr>
+        <a:solidFill>
+          <a:srgbClr val="F6F8FB"/>
+        </a:solidFill>
+        <a:effectLst/>
+      </p:bgPr>
+    </p:bg>
+    <p:spTree>
+      <p:nvGrpSpPr>
+        <p:cNvPr id="1" name=""/>
+        <p:cNvGrpSpPr/>
+        <p:nvPr/>
+      </p:nvGrpSpPr>
+      <p:grpSpPr/>
+      <p:sp>
+        <p:nvSpPr>
+          <p:cNvPr id="2" name="TextBox 1"/>
+          <p:cNvSpPr txBox="1"/>
+          <p:nvPr/>
+        </p:nvSpPr>
+        <p:spPr>
+          <a:xfrm>
+            <a:off x="812800" y="6413500"/>
+            <a:ext cx="10566400" cy="215900"/>
+          </a:xfrm>
+          <a:prstGeom prst="rect">
+            <a:avLst/>
+          </a:prstGeom>
+          <a:noFill/>
+        </p:spPr>
+        <p:txBody>
+          <a:bodyPr wrap="square" lIns="0" rIns="0" tIns="0" bIns="0" anchor="t">
+            <a:spAutoFit/>
+          </a:bodyPr>
+          <a:lstStyle/>
+          <a:p>
+            <a:pPr algn="r">
+              <a:lnSpc>
+                <a:spcPct val="115000"/>
+              </a:lnSpc>
+              <a:spcAft>
+                <a:spcPts val="0"/>
+              </a:spcAft>
+            </a:pPr>
+            <a:r>
+              <a:rPr sz="1200" b="0">
+                <a:solidFill>
+                  <a:srgbClr val="6B7480"/>
+                </a:solidFill>
+                <a:latin typeface="Arial"/>
+              </a:rPr>
+              <a:t>21</a:t>
+            </a:r>
+          </a:p>
+        </p:txBody>
+      </p:sp>
+      <p:sp>
+        <p:nvSpPr>
+          <p:cNvPr id="3" name="TextBox 2"/>
+          <p:cNvSpPr txBox="1"/>
+          <p:nvPr/>
+        </p:nvSpPr>
+        <p:spPr>
+          <a:xfrm>
+            <a:off x="812800" y="635000"/>
+            <a:ext cx="10566400" cy="254000"/>
+          </a:xfrm>
+          <a:prstGeom prst="rect">
+            <a:avLst/>
+          </a:prstGeom>
+          <a:noFill/>
+        </p:spPr>
+        <p:txBody>
+          <a:bodyPr wrap="square" lIns="0" rIns="0" tIns="0" bIns="0" anchor="t">
+            <a:spAutoFit/>
+          </a:bodyPr>
+          <a:lstStyle/>
+          <a:p>
+            <a:pPr algn="l">
+              <a:lnSpc>
+                <a:spcPct val="115000"/>
+              </a:lnSpc>
+              <a:spcAft>
+                <a:spcPts val="0"/>
+              </a:spcAft>
+            </a:pPr>
+            <a:r>
+              <a:rPr sz="1300" b="1">
+                <a:solidFill>
+                  <a:srgbClr val="006FCF"/>
+                </a:solidFill>
+                <a:latin typeface="Arial"/>
+              </a:rPr>
+              <a:t>TAKEAWAYS</a:t>
+            </a:r>
+          </a:p>
+        </p:txBody>
+      </p:sp>
+      <p:sp>
+        <p:nvSpPr>
+          <p:cNvPr id="4" name="TextBox 3"/>
+          <p:cNvSpPr txBox="1"/>
+          <p:nvPr/>
+        </p:nvSpPr>
+        <p:spPr>
+          <a:xfrm>
+            <a:off x="812800" y="889000"/>
+            <a:ext cx="10566400" cy="571500"/>
+          </a:xfrm>
+          <a:prstGeom prst="rect">
+            <a:avLst/>
+          </a:prstGeom>
+          <a:noFill/>
+        </p:spPr>
+        <p:txBody>
+          <a:bodyPr wrap="square" lIns="0" rIns="0" tIns="0" bIns="0" anchor="t">
+            <a:spAutoFit/>
+          </a:bodyPr>
+          <a:lstStyle/>
+          <a:p>
+            <a:pPr algn="l">
+              <a:lnSpc>
+                <a:spcPct val="105000"/>
+              </a:lnSpc>
+              <a:spcAft>
+                <a:spcPts val="0"/>
+              </a:spcAft>
+            </a:pPr>
+            <a:r>
+              <a:rPr sz="3600" b="1">
+                <a:solidFill>
+                  <a:srgbClr val="00175A"/>
                 </a:solidFill>
                 <a:latin typeface="Georgia"/>
               </a:rPr>
@@ -11761,7 +12648,7 @@
             <a:avLst/>
           </a:prstGeom>
           <a:solidFill>
-            <a:srgbClr val="F0A66B"/>
+            <a:srgbClr val="006FCF"/>
           </a:solidFill>
           <a:ln>
             <a:noFill/>
@@ -11823,7 +12710,7 @@
             <a:r>
               <a:rPr sz="2800" b="1">
                 <a:solidFill>
-                  <a:srgbClr val="F7F6F2"/>
+                  <a:srgbClr val="00175A"/>
                 </a:solidFill>
                 <a:latin typeface="Georgia"/>
               </a:rPr>
@@ -11842,7 +12729,7 @@
             <a:r>
               <a:rPr sz="2000" b="0">
                 <a:solidFill>
-                  <a:srgbClr val="C9D1E0"/>
+                  <a:srgbClr val="333B47"/>
                 </a:solidFill>
                 <a:latin typeface="Arial"/>
               </a:rPr>
@@ -11866,7 +12753,7 @@
             <a:avLst/>
           </a:prstGeom>
           <a:solidFill>
-            <a:srgbClr val="F0A66B"/>
+            <a:srgbClr val="006FCF"/>
           </a:solidFill>
           <a:ln>
             <a:noFill/>
@@ -11928,7 +12815,7 @@
             <a:r>
               <a:rPr sz="2800" b="1">
                 <a:solidFill>
-                  <a:srgbClr val="F7F6F2"/>
+                  <a:srgbClr val="00175A"/>
                 </a:solidFill>
                 <a:latin typeface="Georgia"/>
               </a:rPr>
@@ -11947,7 +12834,7 @@
             <a:r>
               <a:rPr sz="2000" b="0">
                 <a:solidFill>
-                  <a:srgbClr val="C9D1E0"/>
+                  <a:srgbClr val="333B47"/>
                 </a:solidFill>
                 <a:latin typeface="Arial"/>
               </a:rPr>
@@ -11971,7 +12858,7 @@
             <a:avLst/>
           </a:prstGeom>
           <a:solidFill>
-            <a:srgbClr val="F0A66B"/>
+            <a:srgbClr val="006FCF"/>
           </a:solidFill>
           <a:ln>
             <a:noFill/>
@@ -12033,7 +12920,7 @@
             <a:r>
               <a:rPr sz="2800" b="1">
                 <a:solidFill>
-                  <a:srgbClr val="F7F6F2"/>
+                  <a:srgbClr val="00175A"/>
                 </a:solidFill>
                 <a:latin typeface="Georgia"/>
               </a:rPr>
@@ -12052,7 +12939,7 @@
             <a:r>
               <a:rPr sz="2000" b="0">
                 <a:solidFill>
-                  <a:srgbClr val="C9D1E0"/>
+                  <a:srgbClr val="333B47"/>
                 </a:solidFill>
                 <a:latin typeface="Arial"/>
               </a:rPr>
@@ -12094,7 +12981,7 @@
             <a:r>
               <a:rPr sz="1800" b="0">
                 <a:solidFill>
-                  <a:srgbClr val="C9D1E0"/>
+                  <a:srgbClr val="333B47"/>
                 </a:solidFill>
                 <a:latin typeface="Arial"/>
               </a:rPr>
@@ -12103,16 +12990,42 @@
           </a:p>
         </p:txBody>
       </p:sp>
-      <p:sp>
-        <p:nvSpPr>
-          <p:cNvPr id="12" name="TextBox 11"/>
+    </p:spTree>
+  </p:cSld>
+  <p:clrMapOvr>
+    <a:masterClrMapping/>
+  </p:clrMapOvr>
+</p:sld>
+</file>
+
+<file path=ppt/slides/slide22.xml><?xml version="1.0" encoding="utf-8"?>
+<p:sld xmlns:a="http://schemas.openxmlformats.org/drawingml/2006/main" xmlns:p="http://schemas.openxmlformats.org/presentationml/2006/main" xmlns:r="http://schemas.openxmlformats.org/officeDocument/2006/relationships">
+  <p:cSld>
+    <p:bg>
+      <p:bgPr>
+        <a:solidFill>
+          <a:srgbClr val="F6F8FB"/>
+        </a:solidFill>
+        <a:effectLst/>
+      </p:bgPr>
+    </p:bg>
+    <p:spTree>
+      <p:nvGrpSpPr>
+        <p:cNvPr id="1" name=""/>
+        <p:cNvGrpSpPr/>
+        <p:nvPr/>
+      </p:nvGrpSpPr>
+      <p:grpSpPr/>
+      <p:sp>
+        <p:nvSpPr>
+          <p:cNvPr id="2" name="TextBox 1"/>
           <p:cNvSpPr txBox="1"/>
           <p:nvPr/>
         </p:nvSpPr>
         <p:spPr>
           <a:xfrm>
-            <a:off x="812800" y="5397500"/>
-            <a:ext cx="10566400" cy="571500"/>
+            <a:off x="812800" y="6413500"/>
+            <a:ext cx="10566400" cy="215900"/>
           </a:xfrm>
           <a:prstGeom prst="rect">
             <a:avLst/>
@@ -12125,6 +13038,48 @@
           </a:bodyPr>
           <a:lstStyle/>
           <a:p>
+            <a:pPr algn="r">
+              <a:lnSpc>
+                <a:spcPct val="115000"/>
+              </a:lnSpc>
+              <a:spcAft>
+                <a:spcPts val="0"/>
+              </a:spcAft>
+            </a:pPr>
+            <a:r>
+              <a:rPr sz="1200" b="0">
+                <a:solidFill>
+                  <a:srgbClr val="6B7480"/>
+                </a:solidFill>
+                <a:latin typeface="Arial"/>
+              </a:rPr>
+              <a:t>22</a:t>
+            </a:r>
+          </a:p>
+        </p:txBody>
+      </p:sp>
+      <p:sp>
+        <p:nvSpPr>
+          <p:cNvPr id="3" name="TextBox 2"/>
+          <p:cNvSpPr txBox="1"/>
+          <p:nvPr/>
+        </p:nvSpPr>
+        <p:spPr>
+          <a:xfrm>
+            <a:off x="812800" y="635000"/>
+            <a:ext cx="10566400" cy="254000"/>
+          </a:xfrm>
+          <a:prstGeom prst="rect">
+            <a:avLst/>
+          </a:prstGeom>
+          <a:noFill/>
+        </p:spPr>
+        <p:txBody>
+          <a:bodyPr wrap="square" lIns="0" rIns="0" tIns="0" bIns="0" anchor="t">
+            <a:spAutoFit/>
+          </a:bodyPr>
+          <a:lstStyle/>
+          <a:p>
             <a:pPr algn="l">
               <a:lnSpc>
                 <a:spcPct val="115000"/>
@@ -12134,9 +13089,1171 @@
               </a:spcAft>
             </a:pPr>
             <a:r>
-              <a:rPr sz="3600" b="1">
-                <a:solidFill>
-                  <a:srgbClr val="F0A66B"/>
+              <a:rPr sz="1300" b="1">
+                <a:solidFill>
+                  <a:srgbClr val="006FCF"/>
+                </a:solidFill>
+                <a:latin typeface="Arial"/>
+              </a:rPr>
+              <a:t>FOR AMEX</a:t>
+            </a:r>
+          </a:p>
+        </p:txBody>
+      </p:sp>
+      <p:sp>
+        <p:nvSpPr>
+          <p:cNvPr id="4" name="TextBox 3"/>
+          <p:cNvSpPr txBox="1"/>
+          <p:nvPr/>
+        </p:nvSpPr>
+        <p:spPr>
+          <a:xfrm>
+            <a:off x="812800" y="889000"/>
+            <a:ext cx="10566400" cy="571500"/>
+          </a:xfrm>
+          <a:prstGeom prst="rect">
+            <a:avLst/>
+          </a:prstGeom>
+          <a:noFill/>
+        </p:spPr>
+        <p:txBody>
+          <a:bodyPr wrap="square" lIns="0" rIns="0" tIns="0" bIns="0" anchor="t">
+            <a:spAutoFit/>
+          </a:bodyPr>
+          <a:lstStyle/>
+          <a:p>
+            <a:pPr algn="l">
+              <a:lnSpc>
+                <a:spcPct val="105000"/>
+              </a:lnSpc>
+              <a:spcAft>
+                <a:spcPts val="0"/>
+              </a:spcAft>
+            </a:pPr>
+            <a:r>
+              <a:rPr sz="3000" b="1">
+                <a:solidFill>
+                  <a:srgbClr val="00175A"/>
+                </a:solidFill>
+                <a:latin typeface="Georgia"/>
+              </a:rPr>
+              <a:t>What this offers Amex</a:t>
+            </a:r>
+          </a:p>
+        </p:txBody>
+      </p:sp>
+      <p:sp>
+        <p:nvSpPr>
+          <p:cNvPr id="5" name="Oval 4"/>
+          <p:cNvSpPr/>
+          <p:nvPr/>
+        </p:nvSpPr>
+        <p:spPr>
+          <a:xfrm>
+            <a:off x="812800" y="1663700"/>
+            <a:ext cx="381000" cy="381000"/>
+          </a:xfrm>
+          <a:prstGeom prst="ellipse">
+            <a:avLst/>
+          </a:prstGeom>
+          <a:solidFill>
+            <a:srgbClr val="006FCF"/>
+          </a:solidFill>
+          <a:ln>
+            <a:noFill/>
+          </a:ln>
+          <a:effectLst/>
+        </p:spPr>
+        <p:style>
+          <a:lnRef idx="1">
+            <a:schemeClr val="accent1"/>
+          </a:lnRef>
+          <a:fillRef idx="3">
+            <a:schemeClr val="accent1"/>
+          </a:fillRef>
+          <a:effectRef idx="2">
+            <a:schemeClr val="accent1"/>
+          </a:effectRef>
+          <a:fontRef idx="minor">
+            <a:schemeClr val="lt1"/>
+          </a:fontRef>
+        </p:style>
+        <p:txBody>
+          <a:bodyPr rtlCol="0" anchor="ctr" wrap="square" lIns="0" rIns="0" tIns="0" bIns="0"/>
+          <a:lstStyle/>
+          <a:p>
+            <a:pPr algn="ctr">
+              <a:lnSpc>
+                <a:spcPct val="115000"/>
+              </a:lnSpc>
+              <a:spcAft>
+                <a:spcPts val="0"/>
+              </a:spcAft>
+            </a:pPr>
+            <a:r>
+              <a:rPr sz="2400" b="1">
+                <a:solidFill>
+                  <a:srgbClr val="F6F8FB"/>
+                </a:solidFill>
+                <a:latin typeface="Arial"/>
+              </a:rPr>
+              <a:t>1</a:t>
+            </a:r>
+          </a:p>
+        </p:txBody>
+      </p:sp>
+      <p:sp>
+        <p:nvSpPr>
+          <p:cNvPr id="6" name="TextBox 5"/>
+          <p:cNvSpPr txBox="1"/>
+          <p:nvPr/>
+        </p:nvSpPr>
+        <p:spPr>
+          <a:xfrm>
+            <a:off x="1320800" y="1663700"/>
+            <a:ext cx="4699000" cy="381000"/>
+          </a:xfrm>
+          <a:prstGeom prst="rect">
+            <a:avLst/>
+          </a:prstGeom>
+          <a:noFill/>
+        </p:spPr>
+        <p:txBody>
+          <a:bodyPr wrap="square" lIns="0" rIns="0" tIns="0" bIns="0" anchor="ctr">
+            <a:spAutoFit/>
+          </a:bodyPr>
+          <a:lstStyle/>
+          <a:p>
+            <a:pPr algn="l">
+              <a:lnSpc>
+                <a:spcPct val="115000"/>
+              </a:lnSpc>
+              <a:spcAft>
+                <a:spcPts val="0"/>
+              </a:spcAft>
+            </a:pPr>
+            <a:r>
+              <a:rPr sz="2000" b="1">
+                <a:solidFill>
+                  <a:srgbClr val="00175A"/>
+                </a:solidFill>
+                <a:latin typeface="Arial"/>
+              </a:rPr>
+              <a:t>Fewer tokens, even on closed models</a:t>
+            </a:r>
+          </a:p>
+        </p:txBody>
+      </p:sp>
+      <p:sp>
+        <p:nvSpPr>
+          <p:cNvPr id="7" name="Oval 6"/>
+          <p:cNvSpPr/>
+          <p:nvPr/>
+        </p:nvSpPr>
+        <p:spPr>
+          <a:xfrm>
+            <a:off x="6223000" y="1663700"/>
+            <a:ext cx="381000" cy="381000"/>
+          </a:xfrm>
+          <a:prstGeom prst="ellipse">
+            <a:avLst/>
+          </a:prstGeom>
+          <a:solidFill>
+            <a:srgbClr val="006FCF"/>
+          </a:solidFill>
+          <a:ln>
+            <a:noFill/>
+          </a:ln>
+          <a:effectLst/>
+        </p:spPr>
+        <p:style>
+          <a:lnRef idx="1">
+            <a:schemeClr val="accent1"/>
+          </a:lnRef>
+          <a:fillRef idx="3">
+            <a:schemeClr val="accent1"/>
+          </a:fillRef>
+          <a:effectRef idx="2">
+            <a:schemeClr val="accent1"/>
+          </a:effectRef>
+          <a:fontRef idx="minor">
+            <a:schemeClr val="lt1"/>
+          </a:fontRef>
+        </p:style>
+        <p:txBody>
+          <a:bodyPr rtlCol="0" anchor="ctr" wrap="square" lIns="0" rIns="0" tIns="0" bIns="0"/>
+          <a:lstStyle/>
+          <a:p>
+            <a:pPr algn="ctr">
+              <a:lnSpc>
+                <a:spcPct val="115000"/>
+              </a:lnSpc>
+              <a:spcAft>
+                <a:spcPts val="0"/>
+              </a:spcAft>
+            </a:pPr>
+            <a:r>
+              <a:rPr sz="2400" b="1">
+                <a:solidFill>
+                  <a:srgbClr val="F6F8FB"/>
+                </a:solidFill>
+                <a:latin typeface="Arial"/>
+              </a:rPr>
+              <a:t>2</a:t>
+            </a:r>
+          </a:p>
+        </p:txBody>
+      </p:sp>
+      <p:sp>
+        <p:nvSpPr>
+          <p:cNvPr id="8" name="TextBox 7"/>
+          <p:cNvSpPr txBox="1"/>
+          <p:nvPr/>
+        </p:nvSpPr>
+        <p:spPr>
+          <a:xfrm>
+            <a:off x="6731000" y="1663700"/>
+            <a:ext cx="4699000" cy="381000"/>
+          </a:xfrm>
+          <a:prstGeom prst="rect">
+            <a:avLst/>
+          </a:prstGeom>
+          <a:noFill/>
+        </p:spPr>
+        <p:txBody>
+          <a:bodyPr wrap="square" lIns="0" rIns="0" tIns="0" bIns="0" anchor="ctr">
+            <a:spAutoFit/>
+          </a:bodyPr>
+          <a:lstStyle/>
+          <a:p>
+            <a:pPr algn="l">
+              <a:lnSpc>
+                <a:spcPct val="115000"/>
+              </a:lnSpc>
+              <a:spcAft>
+                <a:spcPts val="0"/>
+              </a:spcAft>
+            </a:pPr>
+            <a:r>
+              <a:rPr sz="2000" b="1">
+                <a:solidFill>
+                  <a:srgbClr val="00175A"/>
+                </a:solidFill>
+                <a:latin typeface="Arial"/>
+              </a:rPr>
+              <a:t>Lessons for complex agent systems</a:t>
+            </a:r>
+          </a:p>
+        </p:txBody>
+      </p:sp>
+      <p:sp>
+        <p:nvSpPr>
+          <p:cNvPr id="9" name="Rounded Rectangle 8"/>
+          <p:cNvSpPr/>
+          <p:nvPr/>
+        </p:nvSpPr>
+        <p:spPr>
+          <a:xfrm>
+            <a:off x="812800" y="2286000"/>
+            <a:ext cx="1473200" cy="889000"/>
+          </a:xfrm>
+          <a:prstGeom prst="roundRect">
+            <a:avLst>
+              <a:gd name="adj" fmla="val 10000"/>
+            </a:avLst>
+          </a:prstGeom>
+          <a:solidFill>
+            <a:srgbClr val="E6EBF4"/>
+          </a:solidFill>
+          <a:ln w="19050">
+            <a:solidFill>
+              <a:srgbClr val="D3DCE8"/>
+            </a:solidFill>
+          </a:ln>
+          <a:effectLst/>
+        </p:spPr>
+        <p:style>
+          <a:lnRef idx="1">
+            <a:schemeClr val="accent1"/>
+          </a:lnRef>
+          <a:fillRef idx="3">
+            <a:schemeClr val="accent1"/>
+          </a:fillRef>
+          <a:effectRef idx="2">
+            <a:schemeClr val="accent1"/>
+          </a:effectRef>
+          <a:fontRef idx="minor">
+            <a:schemeClr val="lt1"/>
+          </a:fontRef>
+        </p:style>
+        <p:txBody>
+          <a:bodyPr rtlCol="0" anchor="ctr" wrap="square" lIns="38100" rIns="38100" tIns="38100" bIns="38100"/>
+          <a:lstStyle/>
+          <a:p>
+            <a:pPr algn="ctr">
+              <a:lnSpc>
+                <a:spcPct val="115000"/>
+              </a:lnSpc>
+              <a:spcAft>
+                <a:spcPts val="200"/>
+              </a:spcAft>
+            </a:pPr>
+            <a:r>
+              <a:rPr sz="1600" b="1">
+                <a:solidFill>
+                  <a:srgbClr val="00175A"/>
+                </a:solidFill>
+                <a:latin typeface="Arial"/>
+              </a:rPr>
+              <a:t>Closed model</a:t>
+            </a:r>
+          </a:p>
+          <a:p>
+            <a:pPr algn="ctr">
+              <a:lnSpc>
+                <a:spcPct val="115000"/>
+              </a:lnSpc>
+              <a:spcAft>
+                <a:spcPts val="0"/>
+              </a:spcAft>
+            </a:pPr>
+            <a:r>
+              <a:rPr sz="1300" b="0">
+                <a:solidFill>
+                  <a:srgbClr val="6B7480"/>
+                </a:solidFill>
+                <a:latin typeface="Arial"/>
+              </a:rPr>
+              <a:t>writes the output</a:t>
+            </a:r>
+          </a:p>
+        </p:txBody>
+      </p:sp>
+      <p:sp>
+        <p:nvSpPr>
+          <p:cNvPr id="10" name="Right Arrow 9"/>
+          <p:cNvSpPr/>
+          <p:nvPr/>
+        </p:nvSpPr>
+        <p:spPr>
+          <a:xfrm>
+            <a:off x="2324100" y="2603500"/>
+            <a:ext cx="177800" cy="254000"/>
+          </a:xfrm>
+          <a:prstGeom prst="rightArrow">
+            <a:avLst/>
+          </a:prstGeom>
+          <a:solidFill>
+            <a:srgbClr val="6B7480"/>
+          </a:solidFill>
+          <a:ln>
+            <a:noFill/>
+          </a:ln>
+          <a:effectLst/>
+        </p:spPr>
+        <p:style>
+          <a:lnRef idx="1">
+            <a:schemeClr val="accent1"/>
+          </a:lnRef>
+          <a:fillRef idx="3">
+            <a:schemeClr val="accent1"/>
+          </a:fillRef>
+          <a:effectRef idx="2">
+            <a:schemeClr val="accent1"/>
+          </a:effectRef>
+          <a:fontRef idx="minor">
+            <a:schemeClr val="lt1"/>
+          </a:fontRef>
+        </p:style>
+        <p:txBody>
+          <a:bodyPr rtlCol="0" anchor="ctr"/>
+          <a:lstStyle/>
+          <a:p>
+            <a:pPr algn="ctr"/>
+          </a:p>
+        </p:txBody>
+      </p:sp>
+      <p:sp>
+        <p:nvSpPr>
+          <p:cNvPr id="11" name="Rounded Rectangle 10"/>
+          <p:cNvSpPr/>
+          <p:nvPr/>
+        </p:nvSpPr>
+        <p:spPr>
+          <a:xfrm>
+            <a:off x="2540000" y="2286000"/>
+            <a:ext cx="1473200" cy="889000"/>
+          </a:xfrm>
+          <a:prstGeom prst="roundRect">
+            <a:avLst>
+              <a:gd name="adj" fmla="val 10000"/>
+            </a:avLst>
+          </a:prstGeom>
+          <a:solidFill>
+            <a:srgbClr val="E6EBF4"/>
+          </a:solidFill>
+          <a:ln w="19050">
+            <a:solidFill>
+              <a:srgbClr val="D3DCE8"/>
+            </a:solidFill>
+          </a:ln>
+          <a:effectLst/>
+        </p:spPr>
+        <p:style>
+          <a:lnRef idx="1">
+            <a:schemeClr val="accent1"/>
+          </a:lnRef>
+          <a:fillRef idx="3">
+            <a:schemeClr val="accent1"/>
+          </a:fillRef>
+          <a:effectRef idx="2">
+            <a:schemeClr val="accent1"/>
+          </a:effectRef>
+          <a:fontRef idx="minor">
+            <a:schemeClr val="lt1"/>
+          </a:fontRef>
+        </p:style>
+        <p:txBody>
+          <a:bodyPr rtlCol="0" anchor="ctr" wrap="square" lIns="38100" rIns="38100" tIns="38100" bIns="38100"/>
+          <a:lstStyle/>
+          <a:p>
+            <a:pPr algn="ctr">
+              <a:lnSpc>
+                <a:spcPct val="115000"/>
+              </a:lnSpc>
+              <a:spcAft>
+                <a:spcPts val="200"/>
+              </a:spcAft>
+            </a:pPr>
+            <a:r>
+              <a:rPr sz="1600" b="1">
+                <a:solidFill>
+                  <a:srgbClr val="00175A"/>
+                </a:solidFill>
+                <a:latin typeface="Arial"/>
+              </a:rPr>
+              <a:t>Open model</a:t>
+            </a:r>
+          </a:p>
+          <a:p>
+            <a:pPr algn="ctr">
+              <a:lnSpc>
+                <a:spcPct val="115000"/>
+              </a:lnSpc>
+              <a:spcAft>
+                <a:spcPts val="0"/>
+              </a:spcAft>
+            </a:pPr>
+            <a:r>
+              <a:rPr sz="1300" b="0">
+                <a:solidFill>
+                  <a:srgbClr val="6B7480"/>
+                </a:solidFill>
+                <a:latin typeface="Arial"/>
+              </a:rPr>
+              <a:t>reads it → log-probs</a:t>
+            </a:r>
+          </a:p>
+        </p:txBody>
+      </p:sp>
+      <p:sp>
+        <p:nvSpPr>
+          <p:cNvPr id="12" name="Right Arrow 11"/>
+          <p:cNvSpPr/>
+          <p:nvPr/>
+        </p:nvSpPr>
+        <p:spPr>
+          <a:xfrm>
+            <a:off x="4051300" y="2603500"/>
+            <a:ext cx="177800" cy="254000"/>
+          </a:xfrm>
+          <a:prstGeom prst="rightArrow">
+            <a:avLst/>
+          </a:prstGeom>
+          <a:solidFill>
+            <a:srgbClr val="6B7480"/>
+          </a:solidFill>
+          <a:ln>
+            <a:noFill/>
+          </a:ln>
+          <a:effectLst/>
+        </p:spPr>
+        <p:style>
+          <a:lnRef idx="1">
+            <a:schemeClr val="accent1"/>
+          </a:lnRef>
+          <a:fillRef idx="3">
+            <a:schemeClr val="accent1"/>
+          </a:fillRef>
+          <a:effectRef idx="2">
+            <a:schemeClr val="accent1"/>
+          </a:effectRef>
+          <a:fontRef idx="minor">
+            <a:schemeClr val="lt1"/>
+          </a:fontRef>
+        </p:style>
+        <p:txBody>
+          <a:bodyPr rtlCol="0" anchor="ctr"/>
+          <a:lstStyle/>
+          <a:p>
+            <a:pPr algn="ctr"/>
+          </a:p>
+        </p:txBody>
+      </p:sp>
+      <p:sp>
+        <p:nvSpPr>
+          <p:cNvPr id="13" name="Rounded Rectangle 12"/>
+          <p:cNvSpPr/>
+          <p:nvPr/>
+        </p:nvSpPr>
+        <p:spPr>
+          <a:xfrm>
+            <a:off x="4267200" y="2286000"/>
+            <a:ext cx="1473200" cy="889000"/>
+          </a:xfrm>
+          <a:prstGeom prst="roundRect">
+            <a:avLst>
+              <a:gd name="adj" fmla="val 10000"/>
+            </a:avLst>
+          </a:prstGeom>
+          <a:solidFill>
+            <a:srgbClr val="DDEDFB"/>
+          </a:solidFill>
+          <a:ln w="19050">
+            <a:solidFill>
+              <a:srgbClr val="006FCF"/>
+            </a:solidFill>
+          </a:ln>
+          <a:effectLst/>
+        </p:spPr>
+        <p:style>
+          <a:lnRef idx="1">
+            <a:schemeClr val="accent1"/>
+          </a:lnRef>
+          <a:fillRef idx="3">
+            <a:schemeClr val="accent1"/>
+          </a:fillRef>
+          <a:effectRef idx="2">
+            <a:schemeClr val="accent1"/>
+          </a:effectRef>
+          <a:fontRef idx="minor">
+            <a:schemeClr val="lt1"/>
+          </a:fontRef>
+        </p:style>
+        <p:txBody>
+          <a:bodyPr rtlCol="0" anchor="ctr" wrap="square" lIns="38100" rIns="38100" tIns="38100" bIns="38100"/>
+          <a:lstStyle/>
+          <a:p>
+            <a:pPr algn="ctr">
+              <a:lnSpc>
+                <a:spcPct val="115000"/>
+              </a:lnSpc>
+              <a:spcAft>
+                <a:spcPts val="200"/>
+              </a:spcAft>
+            </a:pPr>
+            <a:r>
+              <a:rPr sz="1600" b="1">
+                <a:solidFill>
+                  <a:srgbClr val="00175A"/>
+                </a:solidFill>
+                <a:latin typeface="Arial"/>
+              </a:rPr>
+              <a:t>CLIMB</a:t>
+            </a:r>
+          </a:p>
+          <a:p>
+            <a:pPr algn="ctr">
+              <a:lnSpc>
+                <a:spcPct val="115000"/>
+              </a:lnSpc>
+              <a:spcAft>
+                <a:spcPts val="0"/>
+              </a:spcAft>
+            </a:pPr>
+            <a:r>
+              <a:rPr sz="1300" b="0">
+                <a:solidFill>
+                  <a:srgbClr val="6B7480"/>
+                </a:solidFill>
+                <a:latin typeface="Arial"/>
+              </a:rPr>
+              <a:t>uses them as S₀</a:t>
+            </a:r>
+          </a:p>
+        </p:txBody>
+      </p:sp>
+      <p:sp>
+        <p:nvSpPr>
+          <p:cNvPr id="14" name="TextBox 13"/>
+          <p:cNvSpPr txBox="1"/>
+          <p:nvPr/>
+        </p:nvSpPr>
+        <p:spPr>
+          <a:xfrm>
+            <a:off x="812800" y="3270250"/>
+            <a:ext cx="5016500" cy="254000"/>
+          </a:xfrm>
+          <a:prstGeom prst="rect">
+            <a:avLst/>
+          </a:prstGeom>
+          <a:noFill/>
+        </p:spPr>
+        <p:txBody>
+          <a:bodyPr wrap="square" lIns="0" rIns="0" tIns="0" bIns="0" anchor="t">
+            <a:spAutoFit/>
+          </a:bodyPr>
+          <a:lstStyle/>
+          <a:p>
+            <a:pPr algn="l">
+              <a:lnSpc>
+                <a:spcPct val="115000"/>
+              </a:lnSpc>
+              <a:spcAft>
+                <a:spcPts val="0"/>
+              </a:spcAft>
+            </a:pPr>
+            <a:r>
+              <a:rPr sz="1400" b="1">
+                <a:solidFill>
+                  <a:srgbClr val="006FCF"/>
+                </a:solidFill>
+                <a:latin typeface="Arial"/>
+              </a:rPr>
+              <a:t>Same idea as the reference model in PPO.</a:t>
+            </a:r>
+          </a:p>
+        </p:txBody>
+      </p:sp>
+      <p:sp>
+        <p:nvSpPr>
+          <p:cNvPr id="15" name="TextBox 14"/>
+          <p:cNvSpPr txBox="1"/>
+          <p:nvPr/>
+        </p:nvSpPr>
+        <p:spPr>
+          <a:xfrm>
+            <a:off x="812800" y="3778250"/>
+            <a:ext cx="5016500" cy="2095500"/>
+          </a:xfrm>
+          <a:prstGeom prst="rect">
+            <a:avLst/>
+          </a:prstGeom>
+          <a:noFill/>
+        </p:spPr>
+        <p:txBody>
+          <a:bodyPr wrap="square" lIns="0" rIns="0" tIns="0" bIns="0" anchor="t">
+            <a:spAutoFit/>
+          </a:bodyPr>
+          <a:lstStyle/>
+          <a:p>
+            <a:pPr algn="l">
+              <a:lnSpc>
+                <a:spcPct val="115000"/>
+              </a:lnSpc>
+              <a:spcAft>
+                <a:spcPts val="1000"/>
+              </a:spcAft>
+            </a:pPr>
+            <a:r>
+              <a:rPr sz="1600" b="0">
+                <a:solidFill>
+                  <a:srgbClr val="333B47"/>
+                </a:solidFill>
+                <a:latin typeface="Arial"/>
+              </a:rPr>
+              <a:t>• Feed the closed model’s output to an open model to get its </a:t>
+            </a:r>
+            <a:r>
+              <a:rPr sz="1600" b="1">
+                <a:solidFill>
+                  <a:srgbClr val="333B47"/>
+                </a:solidFill>
+                <a:latin typeface="Arial"/>
+              </a:rPr>
+              <a:t>log-probs</a:t>
+            </a:r>
+          </a:p>
+          <a:p>
+            <a:pPr algn="l">
+              <a:lnSpc>
+                <a:spcPct val="115000"/>
+              </a:lnSpc>
+              <a:spcAft>
+                <a:spcPts val="1000"/>
+              </a:spcAft>
+            </a:pPr>
+            <a:r>
+              <a:rPr sz="1600" b="0">
+                <a:solidFill>
+                  <a:srgbClr val="333B47"/>
+                </a:solidFill>
+                <a:latin typeface="Arial"/>
+              </a:rPr>
+              <a:t>• </a:t>
+            </a:r>
+            <a:r>
+              <a:rPr sz="1600" b="1">
+                <a:solidFill>
+                  <a:srgbClr val="333B47"/>
+                </a:solidFill>
+                <a:latin typeface="Arial"/>
+              </a:rPr>
+              <a:t>38–65% fewer tokens</a:t>
+            </a:r>
+            <a:r>
+              <a:rPr sz="1600" b="0">
+                <a:solidFill>
+                  <a:srgbClr val="333B47"/>
+                </a:solidFill>
+                <a:latin typeface="Arial"/>
+              </a:rPr>
+              <a:t> at 5–10 points in our tests</a:t>
+            </a:r>
+          </a:p>
+          <a:p>
+            <a:pPr algn="l">
+              <a:lnSpc>
+                <a:spcPct val="115000"/>
+              </a:lnSpc>
+              <a:spcAft>
+                <a:spcPts val="1000"/>
+              </a:spcAft>
+            </a:pPr>
+            <a:r>
+              <a:rPr sz="1600" b="0">
+                <a:solidFill>
+                  <a:srgbClr val="333B47"/>
+                </a:solidFill>
+                <a:latin typeface="Arial"/>
+              </a:rPr>
+              <a:t>• Agreement of two cheap calls needs </a:t>
+            </a:r>
+            <a:r>
+              <a:rPr sz="1600" b="1">
+                <a:solidFill>
+                  <a:srgbClr val="333B47"/>
+                </a:solidFill>
+                <a:latin typeface="Arial"/>
+              </a:rPr>
+              <a:t>no log-probs</a:t>
+            </a:r>
+          </a:p>
+          <a:p>
+            <a:pPr algn="l">
+              <a:lnSpc>
+                <a:spcPct val="115000"/>
+              </a:lnSpc>
+              <a:spcAft>
+                <a:spcPts val="1000"/>
+              </a:spcAft>
+            </a:pPr>
+            <a:r>
+              <a:rPr sz="1600" b="0">
+                <a:solidFill>
+                  <a:srgbClr val="333B47"/>
+                </a:solidFill>
+                <a:latin typeface="Arial"/>
+              </a:rPr>
+              <a:t>• A weaker score saves less, the </a:t>
+            </a:r>
+            <a:r>
+              <a:rPr sz="1600" b="1">
+                <a:solidFill>
+                  <a:srgbClr val="333B47"/>
+                </a:solidFill>
+                <a:latin typeface="Arial"/>
+              </a:rPr>
+              <a:t>promise still holds</a:t>
+            </a:r>
+          </a:p>
+          <a:p>
+            <a:pPr algn="l">
+              <a:lnSpc>
+                <a:spcPct val="115000"/>
+              </a:lnSpc>
+              <a:spcAft>
+                <a:spcPts val="0"/>
+              </a:spcAft>
+            </a:pPr>
+            <a:r>
+              <a:rPr sz="1300" b="0">
+                <a:solidFill>
+                  <a:srgbClr val="6B7480"/>
+                </a:solidFill>
+                <a:latin typeface="Arial"/>
+              </a:rPr>
+              <a:t>Getting a closed model’s log-probs from an open model is a proposal, not yet tested.</a:t>
+            </a:r>
+          </a:p>
+        </p:txBody>
+      </p:sp>
+      <p:sp>
+        <p:nvSpPr>
+          <p:cNvPr id="16" name="Rounded Rectangle 15"/>
+          <p:cNvSpPr/>
+          <p:nvPr/>
+        </p:nvSpPr>
+        <p:spPr>
+          <a:xfrm>
+            <a:off x="6223000" y="2286000"/>
+            <a:ext cx="5156200" cy="762000"/>
+          </a:xfrm>
+          <a:prstGeom prst="roundRect">
+            <a:avLst>
+              <a:gd name="adj" fmla="val 10000"/>
+            </a:avLst>
+          </a:prstGeom>
+          <a:solidFill>
+            <a:srgbClr val="FFFFFF"/>
+          </a:solidFill>
+          <a:ln w="12700">
+            <a:solidFill>
+              <a:srgbClr val="D3DCE8"/>
+            </a:solidFill>
+          </a:ln>
+          <a:effectLst/>
+        </p:spPr>
+        <p:style>
+          <a:lnRef idx="1">
+            <a:schemeClr val="accent1"/>
+          </a:lnRef>
+          <a:fillRef idx="3">
+            <a:schemeClr val="accent1"/>
+          </a:fillRef>
+          <a:effectRef idx="2">
+            <a:schemeClr val="accent1"/>
+          </a:effectRef>
+          <a:fontRef idx="minor">
+            <a:schemeClr val="lt1"/>
+          </a:fontRef>
+        </p:style>
+        <p:txBody>
+          <a:bodyPr rtlCol="0" anchor="ctr" wrap="square" lIns="114300" rIns="114300" tIns="114300" bIns="114300"/>
+          <a:lstStyle/>
+          <a:p>
+            <a:pPr algn="l">
+              <a:lnSpc>
+                <a:spcPct val="115000"/>
+              </a:lnSpc>
+              <a:spcAft>
+                <a:spcPts val="400"/>
+              </a:spcAft>
+            </a:pPr>
+            <a:r>
+              <a:rPr sz="1700" b="1">
+                <a:solidFill>
+                  <a:srgbClr val="00175A"/>
+                </a:solidFill>
+                <a:latin typeface="Arial"/>
+              </a:rPr>
+              <a:t>More agents is not always better</a:t>
+            </a:r>
+          </a:p>
+          <a:p>
+            <a:pPr algn="l">
+              <a:lnSpc>
+                <a:spcPct val="115000"/>
+              </a:lnSpc>
+              <a:spcAft>
+                <a:spcPts val="0"/>
+              </a:spcAft>
+            </a:pPr>
+            <a:r>
+              <a:rPr sz="1400" b="0">
+                <a:solidFill>
+                  <a:srgbClr val="6B7480"/>
+                </a:solidFill>
+                <a:latin typeface="Arial"/>
+              </a:rPr>
+              <a:t>Reviewers pass 23–58% of wrong drafts.</a:t>
+            </a:r>
+          </a:p>
+        </p:txBody>
+      </p:sp>
+      <p:sp>
+        <p:nvSpPr>
+          <p:cNvPr id="17" name="Rounded Rectangle 16"/>
+          <p:cNvSpPr/>
+          <p:nvPr/>
+        </p:nvSpPr>
+        <p:spPr>
+          <a:xfrm>
+            <a:off x="6223000" y="3175000"/>
+            <a:ext cx="5156200" cy="762000"/>
+          </a:xfrm>
+          <a:prstGeom prst="roundRect">
+            <a:avLst>
+              <a:gd name="adj" fmla="val 10000"/>
+            </a:avLst>
+          </a:prstGeom>
+          <a:solidFill>
+            <a:srgbClr val="FFFFFF"/>
+          </a:solidFill>
+          <a:ln w="12700">
+            <a:solidFill>
+              <a:srgbClr val="D3DCE8"/>
+            </a:solidFill>
+          </a:ln>
+          <a:effectLst/>
+        </p:spPr>
+        <p:style>
+          <a:lnRef idx="1">
+            <a:schemeClr val="accent1"/>
+          </a:lnRef>
+          <a:fillRef idx="3">
+            <a:schemeClr val="accent1"/>
+          </a:fillRef>
+          <a:effectRef idx="2">
+            <a:schemeClr val="accent1"/>
+          </a:effectRef>
+          <a:fontRef idx="minor">
+            <a:schemeClr val="lt1"/>
+          </a:fontRef>
+        </p:style>
+        <p:txBody>
+          <a:bodyPr rtlCol="0" anchor="ctr" wrap="square" lIns="114300" rIns="114300" tIns="114300" bIns="114300"/>
+          <a:lstStyle/>
+          <a:p>
+            <a:pPr algn="l">
+              <a:lnSpc>
+                <a:spcPct val="115000"/>
+              </a:lnSpc>
+              <a:spcAft>
+                <a:spcPts val="400"/>
+              </a:spcAft>
+            </a:pPr>
+            <a:r>
+              <a:rPr sz="1700" b="1">
+                <a:solidFill>
+                  <a:srgbClr val="00175A"/>
+                </a:solidFill>
+                <a:latin typeface="Arial"/>
+              </a:rPr>
+              <a:t>Route each task, not the whole system</a:t>
+            </a:r>
+          </a:p>
+          <a:p>
+            <a:pPr algn="l">
+              <a:lnSpc>
+                <a:spcPct val="115000"/>
+              </a:lnSpc>
+              <a:spcAft>
+                <a:spcPts val="0"/>
+              </a:spcAft>
+            </a:pPr>
+            <a:r>
+              <a:rPr sz="1400" b="0">
+                <a:solidFill>
+                  <a:srgbClr val="6B7480"/>
+                </a:solidFill>
+                <a:latin typeface="Arial"/>
+              </a:rPr>
+              <a:t>Escalate only the doubtful tasks.</a:t>
+            </a:r>
+          </a:p>
+        </p:txBody>
+      </p:sp>
+      <p:sp>
+        <p:nvSpPr>
+          <p:cNvPr id="18" name="Rounded Rectangle 17"/>
+          <p:cNvSpPr/>
+          <p:nvPr/>
+        </p:nvSpPr>
+        <p:spPr>
+          <a:xfrm>
+            <a:off x="6223000" y="4064000"/>
+            <a:ext cx="5156200" cy="762000"/>
+          </a:xfrm>
+          <a:prstGeom prst="roundRect">
+            <a:avLst>
+              <a:gd name="adj" fmla="val 10000"/>
+            </a:avLst>
+          </a:prstGeom>
+          <a:solidFill>
+            <a:srgbClr val="FFFFFF"/>
+          </a:solidFill>
+          <a:ln w="12700">
+            <a:solidFill>
+              <a:srgbClr val="D3DCE8"/>
+            </a:solidFill>
+          </a:ln>
+          <a:effectLst/>
+        </p:spPr>
+        <p:style>
+          <a:lnRef idx="1">
+            <a:schemeClr val="accent1"/>
+          </a:lnRef>
+          <a:fillRef idx="3">
+            <a:schemeClr val="accent1"/>
+          </a:fillRef>
+          <a:effectRef idx="2">
+            <a:schemeClr val="accent1"/>
+          </a:effectRef>
+          <a:fontRef idx="minor">
+            <a:schemeClr val="lt1"/>
+          </a:fontRef>
+        </p:style>
+        <p:txBody>
+          <a:bodyPr rtlCol="0" anchor="ctr" wrap="square" lIns="114300" rIns="114300" tIns="114300" bIns="114300"/>
+          <a:lstStyle/>
+          <a:p>
+            <a:pPr algn="l">
+              <a:lnSpc>
+                <a:spcPct val="115000"/>
+              </a:lnSpc>
+              <a:spcAft>
+                <a:spcPts val="400"/>
+              </a:spcAft>
+            </a:pPr>
+            <a:r>
+              <a:rPr sz="1700" b="1">
+                <a:solidFill>
+                  <a:srgbClr val="00175A"/>
+                </a:solidFill>
+                <a:latin typeface="Arial"/>
+              </a:rPr>
+              <a:t>Cheap signals are strong</a:t>
+            </a:r>
+          </a:p>
+          <a:p>
+            <a:pPr algn="l">
+              <a:lnSpc>
+                <a:spcPct val="115000"/>
+              </a:lnSpc>
+              <a:spcAft>
+                <a:spcPts val="0"/>
+              </a:spcAft>
+            </a:pPr>
+            <a:r>
+              <a:rPr sz="1400" b="0">
+                <a:solidFill>
+                  <a:srgbClr val="6B7480"/>
+                </a:solidFill>
+                <a:latin typeface="Arial"/>
+              </a:rPr>
+              <a:t>Two cheap answers agree → usually right.</a:t>
+            </a:r>
+          </a:p>
+        </p:txBody>
+      </p:sp>
+      <p:sp>
+        <p:nvSpPr>
+          <p:cNvPr id="19" name="Rounded Rectangle 18"/>
+          <p:cNvSpPr/>
+          <p:nvPr/>
+        </p:nvSpPr>
+        <p:spPr>
+          <a:xfrm>
+            <a:off x="6223000" y="4953000"/>
+            <a:ext cx="5156200" cy="762000"/>
+          </a:xfrm>
+          <a:prstGeom prst="roundRect">
+            <a:avLst>
+              <a:gd name="adj" fmla="val 10000"/>
+            </a:avLst>
+          </a:prstGeom>
+          <a:solidFill>
+            <a:srgbClr val="FFFFFF"/>
+          </a:solidFill>
+          <a:ln w="12700">
+            <a:solidFill>
+              <a:srgbClr val="D3DCE8"/>
+            </a:solidFill>
+          </a:ln>
+          <a:effectLst/>
+        </p:spPr>
+        <p:style>
+          <a:lnRef idx="1">
+            <a:schemeClr val="accent1"/>
+          </a:lnRef>
+          <a:fillRef idx="3">
+            <a:schemeClr val="accent1"/>
+          </a:fillRef>
+          <a:effectRef idx="2">
+            <a:schemeClr val="accent1"/>
+          </a:effectRef>
+          <a:fontRef idx="minor">
+            <a:schemeClr val="lt1"/>
+          </a:fontRef>
+        </p:style>
+        <p:txBody>
+          <a:bodyPr rtlCol="0" anchor="ctr" wrap="square" lIns="114300" rIns="114300" tIns="114300" bIns="114300"/>
+          <a:lstStyle/>
+          <a:p>
+            <a:pPr algn="l">
+              <a:lnSpc>
+                <a:spcPct val="115000"/>
+              </a:lnSpc>
+              <a:spcAft>
+                <a:spcPts val="400"/>
+              </a:spcAft>
+            </a:pPr>
+            <a:r>
+              <a:rPr sz="1700" b="1">
+                <a:solidFill>
+                  <a:srgbClr val="00175A"/>
+                </a:solidFill>
+                <a:latin typeface="Arial"/>
+              </a:rPr>
+              <a:t>Put a guarantee on any routing rule</a:t>
+            </a:r>
+          </a:p>
+          <a:p>
+            <a:pPr algn="l">
+              <a:lnSpc>
+                <a:spcPct val="115000"/>
+              </a:lnSpc>
+              <a:spcAft>
+                <a:spcPts val="0"/>
+              </a:spcAft>
+            </a:pPr>
+            <a:r>
+              <a:rPr sz="1400" b="0">
+                <a:solidFill>
+                  <a:srgbClr val="6B7480"/>
+                </a:solidFill>
+                <a:latin typeface="Arial"/>
+              </a:rPr>
+              <a:t>Cascades, tool calls, human review.</a:t>
+            </a:r>
+          </a:p>
+        </p:txBody>
+      </p:sp>
+      <p:sp>
+        <p:nvSpPr>
+          <p:cNvPr id="20" name="TextBox 19"/>
+          <p:cNvSpPr txBox="1"/>
+          <p:nvPr/>
+        </p:nvSpPr>
+        <p:spPr>
+          <a:xfrm>
+            <a:off x="6223000" y="5969000"/>
+            <a:ext cx="5156200" cy="317500"/>
+          </a:xfrm>
+          <a:prstGeom prst="rect">
+            <a:avLst/>
+          </a:prstGeom>
+          <a:noFill/>
+        </p:spPr>
+        <p:txBody>
+          <a:bodyPr wrap="square" lIns="0" rIns="0" tIns="0" bIns="0" anchor="t">
+            <a:spAutoFit/>
+          </a:bodyPr>
+          <a:lstStyle/>
+          <a:p>
+            <a:pPr algn="r">
+              <a:lnSpc>
+                <a:spcPct val="115000"/>
+              </a:lnSpc>
+              <a:spcAft>
+                <a:spcPts val="0"/>
+              </a:spcAft>
+            </a:pPr>
+            <a:r>
+              <a:rPr sz="2200" b="1">
+                <a:solidFill>
+                  <a:srgbClr val="006FCF"/>
                 </a:solidFill>
                 <a:latin typeface="Georgia"/>
               </a:rPr>
@@ -12159,7 +14276,7 @@
     <p:bg>
       <p:bgPr>
         <a:solidFill>
-          <a:srgbClr val="F7F6F2"/>
+          <a:srgbClr val="F6F8FB"/>
         </a:solidFill>
         <a:effectLst/>
       </p:bgPr>
@@ -12204,7 +14321,7 @@
             <a:r>
               <a:rPr sz="1200" b="0">
                 <a:solidFill>
-                  <a:srgbClr val="6B7280"/>
+                  <a:srgbClr val="6B7480"/>
                 </a:solidFill>
                 <a:latin typeface="Arial"/>
               </a:rPr>
@@ -12246,7 +14363,7 @@
             <a:r>
               <a:rPr sz="1300" b="1">
                 <a:solidFill>
-                  <a:srgbClr val="B4541A"/>
+                  <a:srgbClr val="006FCF"/>
                 </a:solidFill>
                 <a:latin typeface="Arial"/>
               </a:rPr>
@@ -12288,7 +14405,7 @@
             <a:r>
               <a:rPr sz="3000" b="1">
                 <a:solidFill>
-                  <a:srgbClr val="14213D"/>
+                  <a:srgbClr val="00175A"/>
                 </a:solidFill>
                 <a:latin typeface="Georgia"/>
               </a:rPr>
@@ -12338,11 +14455,11 @@
             </a:avLst>
           </a:prstGeom>
           <a:solidFill>
-            <a:srgbClr val="F8E8DC"/>
+            <a:srgbClr val="DDEDFB"/>
           </a:solidFill>
           <a:ln w="12700">
             <a:solidFill>
-              <a:srgbClr val="DDD8CC"/>
+              <a:srgbClr val="D3DCE8"/>
             </a:solidFill>
           </a:ln>
           <a:effectLst/>
@@ -12376,7 +14493,7 @@
             <a:r>
               <a:rPr sz="3600" b="1">
                 <a:solidFill>
-                  <a:srgbClr val="B4541A"/>
+                  <a:srgbClr val="006FCF"/>
                 </a:solidFill>
                 <a:latin typeface="Georgia"/>
               </a:rPr>
@@ -12395,7 +14512,7 @@
             <a:r>
               <a:rPr sz="1700" b="0">
                 <a:solidFill>
-                  <a:srgbClr val="3A4150"/>
+                  <a:srgbClr val="333B47"/>
                 </a:solidFill>
                 <a:latin typeface="Arial"/>
               </a:rPr>
@@ -12421,11 +14538,11 @@
             </a:avLst>
           </a:prstGeom>
           <a:solidFill>
-            <a:srgbClr val="F8E8DC"/>
+            <a:srgbClr val="DDEDFB"/>
           </a:solidFill>
           <a:ln w="12700">
             <a:solidFill>
-              <a:srgbClr val="DDD8CC"/>
+              <a:srgbClr val="D3DCE8"/>
             </a:solidFill>
           </a:ln>
           <a:effectLst/>
@@ -12459,7 +14576,7 @@
             <a:r>
               <a:rPr sz="3600" b="1">
                 <a:solidFill>
-                  <a:srgbClr val="B4541A"/>
+                  <a:srgbClr val="006FCF"/>
                 </a:solidFill>
                 <a:latin typeface="Georgia"/>
               </a:rPr>
@@ -12478,7 +14595,7 @@
             <a:r>
               <a:rPr sz="1700" b="0">
                 <a:solidFill>
-                  <a:srgbClr val="3A4150"/>
+                  <a:srgbClr val="333B47"/>
                 </a:solidFill>
                 <a:latin typeface="Arial"/>
               </a:rPr>
@@ -12501,7 +14618,7 @@
     <p:bg>
       <p:bgPr>
         <a:solidFill>
-          <a:srgbClr val="F7F6F2"/>
+          <a:srgbClr val="F6F8FB"/>
         </a:solidFill>
         <a:effectLst/>
       </p:bgPr>
@@ -12546,7 +14663,7 @@
             <a:r>
               <a:rPr sz="1200" b="0">
                 <a:solidFill>
-                  <a:srgbClr val="6B7280"/>
+                  <a:srgbClr val="6B7480"/>
                 </a:solidFill>
                 <a:latin typeface="Arial"/>
               </a:rPr>
@@ -12588,11 +14705,11 @@
             <a:r>
               <a:rPr sz="1300" b="1">
                 <a:solidFill>
-                  <a:srgbClr val="B4541A"/>
-                </a:solidFill>
-                <a:latin typeface="Arial"/>
-              </a:rPr>
-              <a:t>BUT…</a:t>
+                  <a:srgbClr val="006FCF"/>
+                </a:solidFill>
+                <a:latin typeface="Arial"/>
+              </a:rPr>
+              <a:t>THE CATCH</a:t>
             </a:r>
           </a:p>
         </p:txBody>
@@ -12630,11 +14747,11 @@
             <a:r>
               <a:rPr sz="3000" b="1">
                 <a:solidFill>
-                  <a:srgbClr val="14213D"/>
+                  <a:srgbClr val="00175A"/>
                 </a:solidFill>
                 <a:latin typeface="Georgia"/>
               </a:rPr>
-              <a:t>But teams are costly, and sometimes harmful</a:t>
+              <a:t>Teams are costly, and sometimes harmful</a:t>
             </a:r>
           </a:p>
         </p:txBody>
@@ -12672,7 +14789,7 @@
             <a:r>
               <a:rPr sz="2400" b="1">
                 <a:solidFill>
-                  <a:srgbClr val="14213D"/>
+                  <a:srgbClr val="00175A"/>
                 </a:solidFill>
                 <a:latin typeface="Arial"/>
               </a:rPr>
@@ -12690,7 +14807,7 @@
             <a:r>
               <a:rPr sz="2400" b="1">
                 <a:solidFill>
-                  <a:srgbClr val="14213D"/>
+                  <a:srgbClr val="00175A"/>
                 </a:solidFill>
                 <a:latin typeface="Arial"/>
               </a:rPr>
@@ -12756,7 +14873,7 @@
             <a:r>
               <a:rPr sz="2400" b="1">
                 <a:solidFill>
-                  <a:srgbClr val="14213D"/>
+                  <a:srgbClr val="00175A"/>
                 </a:solidFill>
                 <a:latin typeface="Arial"/>
               </a:rPr>
@@ -12774,7 +14891,7 @@
             <a:r>
               <a:rPr sz="2400" b="1">
                 <a:solidFill>
-                  <a:srgbClr val="14213D"/>
+                  <a:srgbClr val="00175A"/>
                 </a:solidFill>
                 <a:latin typeface="Arial"/>
               </a:rPr>
@@ -12821,7 +14938,7 @@
     <p:bg>
       <p:bgPr>
         <a:solidFill>
-          <a:srgbClr val="F7F6F2"/>
+          <a:srgbClr val="F6F8FB"/>
         </a:solidFill>
         <a:effectLst/>
       </p:bgPr>
@@ -12866,7 +14983,7 @@
             <a:r>
               <a:rPr sz="1200" b="0">
                 <a:solidFill>
-                  <a:srgbClr val="6B7280"/>
+                  <a:srgbClr val="6B7480"/>
                 </a:solidFill>
                 <a:latin typeface="Arial"/>
               </a:rPr>
@@ -12908,7 +15025,7 @@
             <a:r>
               <a:rPr sz="1300" b="1">
                 <a:solidFill>
-                  <a:srgbClr val="B4541A"/>
+                  <a:srgbClr val="006FCF"/>
                 </a:solidFill>
                 <a:latin typeface="Arial"/>
               </a:rPr>
@@ -12950,7 +15067,7 @@
             <a:r>
               <a:rPr sz="3000" b="1">
                 <a:solidFill>
-                  <a:srgbClr val="14213D"/>
+                  <a:srgbClr val="00175A"/>
                 </a:solidFill>
                 <a:latin typeface="Georgia"/>
               </a:rPr>
@@ -12976,11 +15093,11 @@
             </a:avLst>
           </a:prstGeom>
           <a:solidFill>
-            <a:srgbClr val="E2EAF5"/>
+            <a:srgbClr val="E6EBF4"/>
           </a:solidFill>
           <a:ln w="31750">
             <a:solidFill>
-              <a:srgbClr val="2E5C99"/>
+              <a:srgbClr val="00175A"/>
             </a:solidFill>
           </a:ln>
           <a:effectLst/>
@@ -13014,7 +15131,7 @@
             <a:r>
               <a:rPr sz="2200" b="1">
                 <a:solidFill>
-                  <a:srgbClr val="14213D"/>
+                  <a:srgbClr val="00175A"/>
                 </a:solidFill>
                 <a:latin typeface="Arial"/>
               </a:rPr>
@@ -13033,7 +15150,7 @@
             <a:r>
               <a:rPr sz="1700" b="1">
                 <a:solidFill>
-                  <a:srgbClr val="2E5C99"/>
+                  <a:srgbClr val="00175A"/>
                 </a:solidFill>
                 <a:latin typeface="Arial"/>
               </a:rPr>
@@ -13057,7 +15174,7 @@
             <a:avLst/>
           </a:prstGeom>
           <a:solidFill>
-            <a:srgbClr val="6B7280"/>
+            <a:srgbClr val="6B7480"/>
           </a:solidFill>
           <a:ln>
             <a:noFill/>
@@ -13141,7 +15258,7 @@
             <a:r>
               <a:rPr sz="2200" b="1">
                 <a:solidFill>
-                  <a:srgbClr val="14213D"/>
+                  <a:srgbClr val="00175A"/>
                 </a:solidFill>
                 <a:latin typeface="Arial"/>
               </a:rPr>
@@ -13184,7 +15301,7 @@
             <a:avLst/>
           </a:prstGeom>
           <a:solidFill>
-            <a:srgbClr val="6B7280"/>
+            <a:srgbClr val="6B7480"/>
           </a:solidFill>
           <a:ln>
             <a:noFill/>
@@ -13230,11 +15347,11 @@
             </a:avLst>
           </a:prstGeom>
           <a:solidFill>
-            <a:srgbClr val="E2EAF5"/>
+            <a:srgbClr val="E6EBF4"/>
           </a:solidFill>
           <a:ln w="31750">
             <a:solidFill>
-              <a:srgbClr val="2E5C99"/>
+              <a:srgbClr val="00175A"/>
             </a:solidFill>
           </a:ln>
           <a:effectLst/>
@@ -13268,7 +15385,7 @@
             <a:r>
               <a:rPr sz="2200" b="1">
                 <a:solidFill>
-                  <a:srgbClr val="14213D"/>
+                  <a:srgbClr val="00175A"/>
                 </a:solidFill>
                 <a:latin typeface="Arial"/>
               </a:rPr>
@@ -13287,7 +15404,7 @@
             <a:r>
               <a:rPr sz="1700" b="1">
                 <a:solidFill>
-                  <a:srgbClr val="2E5C99"/>
+                  <a:srgbClr val="00175A"/>
                 </a:solidFill>
                 <a:latin typeface="Arial"/>
               </a:rPr>
@@ -13311,7 +15428,7 @@
             <a:avLst/>
           </a:prstGeom>
           <a:solidFill>
-            <a:srgbClr val="6B7280"/>
+            <a:srgbClr val="6B7480"/>
           </a:solidFill>
           <a:ln>
             <a:noFill/>
@@ -13395,7 +15512,7 @@
             <a:r>
               <a:rPr sz="2200" b="1">
                 <a:solidFill>
-                  <a:srgbClr val="14213D"/>
+                  <a:srgbClr val="00175A"/>
                 </a:solidFill>
                 <a:latin typeface="Arial"/>
               </a:rPr>
@@ -13440,11 +15557,11 @@
             </a:avLst>
           </a:prstGeom>
           <a:solidFill>
-            <a:srgbClr val="FDFCF9"/>
+            <a:srgbClr val="FFFFFF"/>
           </a:solidFill>
           <a:ln w="12700">
             <a:solidFill>
-              <a:srgbClr val="DDD8CC"/>
+              <a:srgbClr val="D3DCE8"/>
             </a:solidFill>
           </a:ln>
           <a:effectLst/>
@@ -13497,7 +15614,7 @@
             <a:r>
               <a:rPr sz="1700" b="0">
                 <a:solidFill>
-                  <a:srgbClr val="3A4150"/>
+                  <a:srgbClr val="333B47"/>
                 </a:solidFill>
                 <a:latin typeface="Arial"/>
               </a:rPr>
@@ -13523,11 +15640,11 @@
             </a:avLst>
           </a:prstGeom>
           <a:solidFill>
-            <a:srgbClr val="FDFCF9"/>
+            <a:srgbClr val="FFFFFF"/>
           </a:solidFill>
           <a:ln w="12700">
             <a:solidFill>
-              <a:srgbClr val="DDD8CC"/>
+              <a:srgbClr val="D3DCE8"/>
             </a:solidFill>
           </a:ln>
           <a:effectLst/>
@@ -13580,7 +15697,7 @@
             <a:r>
               <a:rPr sz="1700" b="0">
                 <a:solidFill>
-                  <a:srgbClr val="3A4150"/>
+                  <a:srgbClr val="333B47"/>
                 </a:solidFill>
                 <a:latin typeface="Arial"/>
               </a:rPr>
@@ -13603,7 +15720,7 @@
     <p:bg>
       <p:bgPr>
         <a:solidFill>
-          <a:srgbClr val="F7F6F2"/>
+          <a:srgbClr val="F6F8FB"/>
         </a:solidFill>
         <a:effectLst/>
       </p:bgPr>
@@ -13648,7 +15765,7 @@
             <a:r>
               <a:rPr sz="1200" b="0">
                 <a:solidFill>
-                  <a:srgbClr val="6B7280"/>
+                  <a:srgbClr val="6B7480"/>
                 </a:solidFill>
                 <a:latin typeface="Arial"/>
               </a:rPr>
@@ -13690,7 +15807,7 @@
             <a:r>
               <a:rPr sz="1300" b="1">
                 <a:solidFill>
-                  <a:srgbClr val="B4541A"/>
+                  <a:srgbClr val="006FCF"/>
                 </a:solidFill>
                 <a:latin typeface="Arial"/>
               </a:rPr>
@@ -13732,7 +15849,7 @@
             <a:r>
               <a:rPr sz="3000" b="1">
                 <a:solidFill>
-                  <a:srgbClr val="14213D"/>
+                  <a:srgbClr val="00175A"/>
                 </a:solidFill>
                 <a:latin typeface="Georgia"/>
               </a:rPr>
@@ -13758,7 +15875,7 @@
             </a:avLst>
           </a:prstGeom>
           <a:solidFill>
-            <a:srgbClr val="14213D"/>
+            <a:srgbClr val="00175A"/>
           </a:solidFill>
           <a:ln>
             <a:noFill/>
@@ -13794,7 +15911,7 @@
             <a:r>
               <a:rPr sz="2200" b="1">
                 <a:solidFill>
-                  <a:srgbClr val="F0A66B"/>
+                  <a:srgbClr val="66B2F0"/>
                 </a:solidFill>
                 <a:latin typeface="Arial"/>
               </a:rPr>
@@ -13818,11 +15935,11 @@
             <a:avLst/>
           </a:prstGeom>
           <a:solidFill>
-            <a:srgbClr val="E2EAF5"/>
+            <a:srgbClr val="E6EBF4"/>
           </a:solidFill>
           <a:ln w="31750">
             <a:solidFill>
-              <a:srgbClr val="2E5C99"/>
+              <a:srgbClr val="00175A"/>
             </a:solidFill>
           </a:ln>
           <a:effectLst/>
@@ -13856,7 +15973,7 @@
             <a:r>
               <a:rPr sz="2400" b="1">
                 <a:solidFill>
-                  <a:srgbClr val="14213D"/>
+                  <a:srgbClr val="00175A"/>
                 </a:solidFill>
                 <a:latin typeface="Arial"/>
               </a:rPr>
@@ -13875,7 +15992,7 @@
             <a:r>
               <a:rPr sz="1800" b="1">
                 <a:solidFill>
-                  <a:srgbClr val="2E5C99"/>
+                  <a:srgbClr val="00175A"/>
                 </a:solidFill>
                 <a:latin typeface="Arial"/>
               </a:rPr>
@@ -13917,7 +16034,7 @@
             <a:r>
               <a:rPr sz="1500" b="1">
                 <a:solidFill>
-                  <a:srgbClr val="6B7280"/>
+                  <a:srgbClr val="6B7480"/>
                 </a:solidFill>
                 <a:latin typeface="Arial"/>
               </a:rPr>
@@ -13942,7 +16059,7 @@
             <a:avLst/>
           </a:prstGeom>
           <a:solidFill>
-            <a:srgbClr val="6B7280"/>
+            <a:srgbClr val="6B7480"/>
           </a:solidFill>
           <a:ln>
             <a:noFill/>
@@ -13986,11 +16103,11 @@
             <a:avLst/>
           </a:prstGeom>
           <a:solidFill>
-            <a:srgbClr val="E2EAF5"/>
+            <a:srgbClr val="E6EBF4"/>
           </a:solidFill>
           <a:ln w="31750">
             <a:solidFill>
-              <a:srgbClr val="2E5C99"/>
+              <a:srgbClr val="00175A"/>
             </a:solidFill>
           </a:ln>
           <a:effectLst/>
@@ -14024,7 +16141,7 @@
             <a:r>
               <a:rPr sz="2400" b="1">
                 <a:solidFill>
-                  <a:srgbClr val="14213D"/>
+                  <a:srgbClr val="00175A"/>
                 </a:solidFill>
                 <a:latin typeface="Arial"/>
               </a:rPr>
@@ -14043,7 +16160,7 @@
             <a:r>
               <a:rPr sz="1800" b="1">
                 <a:solidFill>
-                  <a:srgbClr val="2E5C99"/>
+                  <a:srgbClr val="00175A"/>
                 </a:solidFill>
                 <a:latin typeface="Arial"/>
               </a:rPr>
@@ -14085,7 +16202,7 @@
             <a:r>
               <a:rPr sz="1500" b="1">
                 <a:solidFill>
-                  <a:srgbClr val="6B7280"/>
+                  <a:srgbClr val="6B7480"/>
                 </a:solidFill>
                 <a:latin typeface="Arial"/>
               </a:rPr>
@@ -14110,7 +16227,7 @@
             <a:avLst/>
           </a:prstGeom>
           <a:solidFill>
-            <a:srgbClr val="6B7280"/>
+            <a:srgbClr val="6B7480"/>
           </a:solidFill>
           <a:ln>
             <a:noFill/>
@@ -14154,11 +16271,11 @@
             <a:avLst/>
           </a:prstGeom>
           <a:solidFill>
-            <a:srgbClr val="F8E8DC"/>
+            <a:srgbClr val="DDEDFB"/>
           </a:solidFill>
           <a:ln w="31750">
             <a:solidFill>
-              <a:srgbClr val="B4541A"/>
+              <a:srgbClr val="006FCF"/>
             </a:solidFill>
           </a:ln>
           <a:effectLst/>
@@ -14192,7 +16309,7 @@
             <a:r>
               <a:rPr sz="2400" b="1">
                 <a:solidFill>
-                  <a:srgbClr val="14213D"/>
+                  <a:srgbClr val="00175A"/>
                 </a:solidFill>
                 <a:latin typeface="Arial"/>
               </a:rPr>
@@ -14211,7 +16328,7 @@
             <a:r>
               <a:rPr sz="1800" b="1">
                 <a:solidFill>
-                  <a:srgbClr val="B4541A"/>
+                  <a:srgbClr val="006FCF"/>
                 </a:solidFill>
                 <a:latin typeface="Arial"/>
               </a:rPr>
@@ -14337,7 +16454,7 @@
             <a:r>
               <a:rPr sz="1700" b="1">
                 <a:solidFill>
-                  <a:srgbClr val="B4541A"/>
+                  <a:srgbClr val="006FCF"/>
                 </a:solidFill>
                 <a:latin typeface="Arial"/>
               </a:rPr>
@@ -14360,7 +16477,7 @@
     <p:bg>
       <p:bgPr>
         <a:solidFill>
-          <a:srgbClr val="14213D"/>
+          <a:srgbClr val="F6F8FB"/>
         </a:solidFill>
         <a:effectLst/>
       </p:bgPr>
@@ -14405,7 +16522,7 @@
             <a:r>
               <a:rPr sz="1200" b="0">
                 <a:solidFill>
-                  <a:srgbClr val="8B97AE"/>
+                  <a:srgbClr val="6B7480"/>
                 </a:solidFill>
                 <a:latin typeface="Arial"/>
               </a:rPr>
@@ -14447,7 +16564,7 @@
             <a:r>
               <a:rPr sz="1300" b="1">
                 <a:solidFill>
-                  <a:srgbClr val="F0A66B"/>
+                  <a:srgbClr val="006FCF"/>
                 </a:solidFill>
                 <a:latin typeface="Arial"/>
               </a:rPr>
@@ -14489,7 +16606,7 @@
             <a:r>
               <a:rPr sz="3400" b="1">
                 <a:solidFill>
-                  <a:srgbClr val="F7F6F2"/>
+                  <a:srgbClr val="00175A"/>
                 </a:solidFill>
                 <a:latin typeface="Georgia"/>
               </a:rPr>
@@ -14515,10 +16632,12 @@
             </a:avLst>
           </a:prstGeom>
           <a:solidFill>
-            <a:srgbClr val="1F2F52"/>
+            <a:srgbClr val="E6EBF4"/>
           </a:solidFill>
-          <a:ln>
-            <a:noFill/>
+          <a:ln w="12700">
+            <a:solidFill>
+              <a:srgbClr val="D3DCE8"/>
+            </a:solidFill>
           </a:ln>
           <a:effectLst/>
         </p:spPr>
@@ -14551,7 +16670,7 @@
             <a:r>
               <a:rPr sz="3600" b="1">
                 <a:solidFill>
-                  <a:srgbClr val="F0A66B"/>
+                  <a:srgbClr val="006FCF"/>
                 </a:solidFill>
                 <a:latin typeface="Georgia"/>
               </a:rPr>
@@ -14570,7 +16689,7 @@
             <a:r>
               <a:rPr sz="2400" b="1">
                 <a:solidFill>
-                  <a:srgbClr val="F7F6F2"/>
+                  <a:srgbClr val="00175A"/>
                 </a:solidFill>
                 <a:latin typeface="Arial"/>
               </a:rPr>
@@ -14589,7 +16708,7 @@
             <a:r>
               <a:rPr sz="1800" b="0">
                 <a:solidFill>
-                  <a:srgbClr val="C9D1E0"/>
+                  <a:srgbClr val="333B47"/>
                 </a:solidFill>
                 <a:latin typeface="Arial"/>
               </a:rPr>
@@ -14608,7 +16727,7 @@
             <a:r>
               <a:rPr sz="1800" b="1">
                 <a:solidFill>
-                  <a:srgbClr val="F0A66B"/>
+                  <a:srgbClr val="006FCF"/>
                 </a:solidFill>
                 <a:latin typeface="Arial"/>
               </a:rPr>
@@ -14634,10 +16753,12 @@
             </a:avLst>
           </a:prstGeom>
           <a:solidFill>
-            <a:srgbClr val="1F2F52"/>
+            <a:srgbClr val="E6EBF4"/>
           </a:solidFill>
-          <a:ln>
-            <a:noFill/>
+          <a:ln w="12700">
+            <a:solidFill>
+              <a:srgbClr val="D3DCE8"/>
+            </a:solidFill>
           </a:ln>
           <a:effectLst/>
         </p:spPr>
@@ -14670,7 +16791,7 @@
             <a:r>
               <a:rPr sz="3600" b="1">
                 <a:solidFill>
-                  <a:srgbClr val="F0A66B"/>
+                  <a:srgbClr val="006FCF"/>
                 </a:solidFill>
                 <a:latin typeface="Georgia"/>
               </a:rPr>
@@ -14689,7 +16810,7 @@
             <a:r>
               <a:rPr sz="2400" b="1">
                 <a:solidFill>
-                  <a:srgbClr val="F7F6F2"/>
+                  <a:srgbClr val="00175A"/>
                 </a:solidFill>
                 <a:latin typeface="Arial"/>
               </a:rPr>
@@ -14708,7 +16829,7 @@
             <a:r>
               <a:rPr sz="1800" b="0">
                 <a:solidFill>
-                  <a:srgbClr val="C9D1E0"/>
+                  <a:srgbClr val="333B47"/>
                 </a:solidFill>
                 <a:latin typeface="Arial"/>
               </a:rPr>
@@ -14727,7 +16848,7 @@
             <a:r>
               <a:rPr sz="1800" b="1">
                 <a:solidFill>
-                  <a:srgbClr val="F0A66B"/>
+                  <a:srgbClr val="006FCF"/>
                 </a:solidFill>
                 <a:latin typeface="Arial"/>
               </a:rPr>
@@ -14753,10 +16874,12 @@
             </a:avLst>
           </a:prstGeom>
           <a:solidFill>
-            <a:srgbClr val="1F2F52"/>
+            <a:srgbClr val="E6EBF4"/>
           </a:solidFill>
-          <a:ln>
-            <a:noFill/>
+          <a:ln w="12700">
+            <a:solidFill>
+              <a:srgbClr val="D3DCE8"/>
+            </a:solidFill>
           </a:ln>
           <a:effectLst/>
         </p:spPr>
@@ -14789,7 +16912,7 @@
             <a:r>
               <a:rPr sz="3600" b="1">
                 <a:solidFill>
-                  <a:srgbClr val="F0A66B"/>
+                  <a:srgbClr val="006FCF"/>
                 </a:solidFill>
                 <a:latin typeface="Georgia"/>
               </a:rPr>
@@ -14808,7 +16931,7 @@
             <a:r>
               <a:rPr sz="2400" b="1">
                 <a:solidFill>
-                  <a:srgbClr val="F7F6F2"/>
+                  <a:srgbClr val="00175A"/>
                 </a:solidFill>
                 <a:latin typeface="Arial"/>
               </a:rPr>
@@ -14827,7 +16950,7 @@
             <a:r>
               <a:rPr sz="1800" b="0">
                 <a:solidFill>
-                  <a:srgbClr val="C9D1E0"/>
+                  <a:srgbClr val="333B47"/>
                 </a:solidFill>
                 <a:latin typeface="Arial"/>
               </a:rPr>
@@ -14846,7 +16969,7 @@
             <a:r>
               <a:rPr sz="1800" b="1">
                 <a:solidFill>
-                  <a:srgbClr val="F0A66B"/>
+                  <a:srgbClr val="006FCF"/>
                 </a:solidFill>
                 <a:latin typeface="Arial"/>
               </a:rPr>
@@ -14872,10 +16995,12 @@
             </a:avLst>
           </a:prstGeom>
           <a:solidFill>
-            <a:srgbClr val="1F2F52"/>
+            <a:srgbClr val="E6EBF4"/>
           </a:solidFill>
-          <a:ln>
-            <a:noFill/>
+          <a:ln w="12700">
+            <a:solidFill>
+              <a:srgbClr val="D3DCE8"/>
+            </a:solidFill>
           </a:ln>
           <a:effectLst/>
         </p:spPr>
@@ -14908,7 +17033,7 @@
             <a:r>
               <a:rPr sz="3600" b="1">
                 <a:solidFill>
-                  <a:srgbClr val="F0A66B"/>
+                  <a:srgbClr val="006FCF"/>
                 </a:solidFill>
                 <a:latin typeface="Georgia"/>
               </a:rPr>
@@ -14927,7 +17052,7 @@
             <a:r>
               <a:rPr sz="2400" b="1">
                 <a:solidFill>
-                  <a:srgbClr val="F7F6F2"/>
+                  <a:srgbClr val="00175A"/>
                 </a:solidFill>
                 <a:latin typeface="Arial"/>
               </a:rPr>
@@ -14946,7 +17071,7 @@
             <a:r>
               <a:rPr sz="1800" b="0">
                 <a:solidFill>
-                  <a:srgbClr val="C9D1E0"/>
+                  <a:srgbClr val="333B47"/>
                 </a:solidFill>
                 <a:latin typeface="Arial"/>
               </a:rPr>
@@ -14965,7 +17090,7 @@
             <a:r>
               <a:rPr sz="1800" b="1">
                 <a:solidFill>
-                  <a:srgbClr val="F0A66B"/>
+                  <a:srgbClr val="006FCF"/>
                 </a:solidFill>
                 <a:latin typeface="Arial"/>
               </a:rPr>
@@ -15005,9 +17130,9 @@
               </a:spcAft>
             </a:pPr>
             <a:r>
-              <a:rPr sz="2000" b="0">
-                <a:solidFill>
-                  <a:srgbClr val="C9D1E0"/>
+              <a:rPr sz="2000" b="1">
+                <a:solidFill>
+                  <a:srgbClr val="00175A"/>
                 </a:solidFill>
                 <a:latin typeface="Arial"/>
               </a:rPr>
@@ -15030,7 +17155,7 @@
     <p:bg>
       <p:bgPr>
         <a:solidFill>
-          <a:srgbClr val="F7F6F2"/>
+          <a:srgbClr val="F6F8FB"/>
         </a:solidFill>
         <a:effectLst/>
       </p:bgPr>
@@ -15075,7 +17200,7 @@
             <a:r>
               <a:rPr sz="1200" b="0">
                 <a:solidFill>
-                  <a:srgbClr val="6B7280"/>
+                  <a:srgbClr val="6B7480"/>
                 </a:solidFill>
                 <a:latin typeface="Arial"/>
               </a:rPr>
@@ -15117,7 +17242,7 @@
             <a:r>
               <a:rPr sz="1300" b="1">
                 <a:solidFill>
-                  <a:srgbClr val="B4541A"/>
+                  <a:srgbClr val="006FCF"/>
                 </a:solidFill>
                 <a:latin typeface="Arial"/>
               </a:rPr>
@@ -15159,7 +17284,7 @@
             <a:r>
               <a:rPr sz="3000" b="1">
                 <a:solidFill>
-                  <a:srgbClr val="14213D"/>
+                  <a:srgbClr val="00175A"/>
                 </a:solidFill>
                 <a:latin typeface="Georgia"/>
               </a:rPr>
@@ -15209,11 +17334,11 @@
             </a:avLst>
           </a:prstGeom>
           <a:solidFill>
-            <a:srgbClr val="E2EAF5"/>
+            <a:srgbClr val="E6EBF4"/>
           </a:solidFill>
           <a:ln w="12700">
             <a:solidFill>
-              <a:srgbClr val="DDD8CC"/>
+              <a:srgbClr val="D3DCE8"/>
             </a:solidFill>
           </a:ln>
           <a:effectLst/>
@@ -15247,7 +17372,7 @@
             <a:r>
               <a:rPr sz="3600" b="1">
                 <a:solidFill>
-                  <a:srgbClr val="2E5C99"/>
+                  <a:srgbClr val="00175A"/>
                 </a:solidFill>
                 <a:latin typeface="Georgia"/>
               </a:rPr>
@@ -15266,7 +17391,7 @@
             <a:r>
               <a:rPr sz="1700" b="0">
                 <a:solidFill>
-                  <a:srgbClr val="3A4150"/>
+                  <a:srgbClr val="333B47"/>
                 </a:solidFill>
                 <a:latin typeface="Arial"/>
               </a:rPr>
@@ -15296,7 +17421,7 @@
           </a:solidFill>
           <a:ln w="12700">
             <a:solidFill>
-              <a:srgbClr val="DDD8CC"/>
+              <a:srgbClr val="D3DCE8"/>
             </a:solidFill>
           </a:ln>
           <a:effectLst/>
@@ -15349,7 +17474,7 @@
             <a:r>
               <a:rPr sz="1700" b="0">
                 <a:solidFill>
-                  <a:srgbClr val="3A4150"/>
+                  <a:srgbClr val="333B47"/>
                 </a:solidFill>
                 <a:latin typeface="Arial"/>
               </a:rPr>
@@ -15372,7 +17497,7 @@
     <p:bg>
       <p:bgPr>
         <a:solidFill>
-          <a:srgbClr val="F7F6F2"/>
+          <a:srgbClr val="F6F8FB"/>
         </a:solidFill>
         <a:effectLst/>
       </p:bgPr>
@@ -15417,7 +17542,7 @@
             <a:r>
               <a:rPr sz="1200" b="0">
                 <a:solidFill>
-                  <a:srgbClr val="6B7280"/>
+                  <a:srgbClr val="6B7480"/>
                 </a:solidFill>
                 <a:latin typeface="Arial"/>
               </a:rPr>
@@ -15459,7 +17584,7 @@
             <a:r>
               <a:rPr sz="1300" b="1">
                 <a:solidFill>
-                  <a:srgbClr val="B4541A"/>
+                  <a:srgbClr val="006FCF"/>
                 </a:solidFill>
                 <a:latin typeface="Arial"/>
               </a:rPr>
@@ -15501,7 +17626,7 @@
             <a:r>
               <a:rPr sz="3000" b="1">
                 <a:solidFill>
-                  <a:srgbClr val="14213D"/>
+                  <a:srgbClr val="00175A"/>
                 </a:solidFill>
                 <a:latin typeface="Georgia"/>
               </a:rPr>
@@ -15555,7 +17680,7 @@
           </a:solidFill>
           <a:ln w="12700">
             <a:solidFill>
-              <a:srgbClr val="DDD8CC"/>
+              <a:srgbClr val="D3DCE8"/>
             </a:solidFill>
           </a:ln>
           <a:effectLst/>
@@ -15608,7 +17733,7 @@
             <a:r>
               <a:rPr sz="1700" b="0">
                 <a:solidFill>
-                  <a:srgbClr val="3A4150"/>
+                  <a:srgbClr val="333B47"/>
                 </a:solidFill>
                 <a:latin typeface="Arial"/>
               </a:rPr>
@@ -15634,7 +17759,7 @@
             </a:avLst>
           </a:prstGeom>
           <a:solidFill>
-            <a:srgbClr val="14213D"/>
+            <a:srgbClr val="00175A"/>
           </a:solidFill>
           <a:ln>
             <a:noFill/>
@@ -15670,7 +17795,7 @@
             <a:r>
               <a:rPr sz="2600" b="1">
                 <a:solidFill>
-                  <a:srgbClr val="F0A66B"/>
+                  <a:srgbClr val="66B2F0"/>
                 </a:solidFill>
                 <a:latin typeface="Arial"/>
               </a:rPr>
@@ -15689,7 +17814,7 @@
             <a:r>
               <a:rPr sz="1700" b="0">
                 <a:solidFill>
-                  <a:srgbClr val="F7F6F2"/>
+                  <a:srgbClr val="F6F8FB"/>
                 </a:solidFill>
                 <a:latin typeface="Arial"/>
               </a:rPr>

--- a/slides/CLIMB_talk.pptx
+++ b/slides/CLIMB_talk.pptx
@@ -1923,7 +1923,7 @@
           <a:lstStyle/>
           <a:p>
             <a:r>
-              <a:t>Question one: what tells us a cheap answer is right? The first signal is free: the model's own confidence, its average token probability. Above the dashed line, confident answers are more often right. On three Gemma settings it points the wrong way: the model is confidently wrong. So any rule built on this signal must be checked, not trusted.</a:t>
+              <a:t>Question one: what tells us a cheap answer is good enough? A good signal must tell right answers from wrong ones, and it must cost far less than the team, or there is nothing to save. We use two. The first is confidence: how probable the model finds its own answer. A model that knows the answer tends to put its probability on one answer. An unsure model spreads it over several. It is free: it comes with the answer. The second is agreement: run the direct answer and the single agent independently and see whether they match. There is one right answer but many wrong ones, so two independent tries rarely land on the same wrong answer. It costs one more cheap call, and that call's answer is the one we keep. It needs no log-probabilities.</a:t>
             </a:r>
           </a:p>
         </p:txBody>
@@ -1993,7 +1993,7 @@
           <a:lstStyle/>
           <a:p>
             <a:r>
-              <a:t>The second signal is also nearly free. The direct answer and the single agent answer independently. When they agree, the single agent is much more often right, for example 99 against 77 percent on gpt-oss-20b MATH. CLIMB combines the two into one score: agreeing tasks rank first, then by confidence.</a:t>
+              <a:t>Do they work? Left: for each setting, the direct answer's accuracy on its more confident half of tasks against its less confident half. On most settings the confident half is right much more often. On three Gemma settings it is backwards: the model is confidently wrong. Right: the single agent's accuracy when the two cheap answers agree against when they disagree. Agreement separates on most settings, including the three where confidence fails, for example 90 against 34 percent on Gemma FRAMES. It is weak on gpt-oss-20b BBEH, where both answers are mostly wrong. So the two signals cover each other. What does CLIMB do when confidence is backwards? Three things. First, option B ranks tasks by agreement first, so confidence only breaks ties. On Gemma FRAMES and MuSiQue, CLIMB picks option B in every split. Second, the check catches it: a backwards score puts the losses first, so the test fails early and that threshold is never deployed. Third, in the worst case CLIMB calls the team. On these three Gemma settings it uses 69 to 96 percent of the team's tokens at a 5 point tolerance: it saves less, but the promise still holds.</a:t>
             </a:r>
           </a:p>
         </p:txBody>
@@ -17288,35 +17288,53 @@
                 </a:solidFill>
                 <a:latin typeface="Georgia"/>
               </a:rPr>
-              <a:t>Is the direct answer confident?</a:t>
-            </a:r>
-          </a:p>
-        </p:txBody>
-      </p:sp>
-      <p:pic>
-        <p:nvPicPr>
-          <p:cNvPr id="5" name="Picture 4" descr="c_auroc.png"/>
-          <p:cNvPicPr>
-            <a:picLocks noChangeAspect="1"/>
-          </p:cNvPicPr>
-          <p:nvPr/>
-        </p:nvPicPr>
-        <p:blipFill>
-          <a:blip r:embed="rId3"/>
-          <a:stretch>
-            <a:fillRect/>
-          </a:stretch>
-        </p:blipFill>
-        <p:spPr>
-          <a:xfrm>
-            <a:off x="812800" y="2046894"/>
-            <a:ext cx="7302500" cy="3653211"/>
+              <a:t>Why confidence, and why agreement?</a:t>
+            </a:r>
+          </a:p>
+        </p:txBody>
+      </p:sp>
+      <p:sp>
+        <p:nvSpPr>
+          <p:cNvPr id="5" name="TextBox 4"/>
+          <p:cNvSpPr txBox="1"/>
+          <p:nvPr/>
+        </p:nvSpPr>
+        <p:spPr>
+          <a:xfrm>
+            <a:off x="812800" y="1473200"/>
+            <a:ext cx="10566400" cy="254000"/>
           </a:xfrm>
           <a:prstGeom prst="rect">
             <a:avLst/>
           </a:prstGeom>
-        </p:spPr>
-      </p:pic>
+          <a:noFill/>
+        </p:spPr>
+        <p:txBody>
+          <a:bodyPr wrap="square" lIns="0" rIns="0" tIns="0" bIns="0" anchor="t">
+            <a:spAutoFit/>
+          </a:bodyPr>
+          <a:lstStyle/>
+          <a:p>
+            <a:pPr algn="l">
+              <a:lnSpc>
+                <a:spcPct val="115000"/>
+              </a:lnSpc>
+              <a:spcAft>
+                <a:spcPts val="0"/>
+              </a:spcAft>
+            </a:pPr>
+            <a:r>
+              <a:rPr sz="2000" b="1">
+                <a:solidFill>
+                  <a:srgbClr val="00175A"/>
+                </a:solidFill>
+                <a:latin typeface="Arial"/>
+              </a:rPr>
+              <a:t>A good signal tells right from wrong, and costs far less than the team.</a:t>
+            </a:r>
+          </a:p>
+        </p:txBody>
+      </p:sp>
       <p:sp>
         <p:nvSpPr>
           <p:cNvPr id="6" name="Rounded Rectangle 5"/>
@@ -17325,16 +17343,16 @@
         </p:nvSpPr>
         <p:spPr>
           <a:xfrm>
-            <a:off x="8445500" y="2095500"/>
-            <a:ext cx="2933700" cy="1651000"/>
+            <a:off x="812800" y="1905000"/>
+            <a:ext cx="5080000" cy="4254500"/>
           </a:xfrm>
           <a:prstGeom prst="roundRect">
             <a:avLst>
-              <a:gd name="adj" fmla="val 6923"/>
+              <a:gd name="adj" fmla="val 2686"/>
             </a:avLst>
           </a:prstGeom>
           <a:solidFill>
-            <a:srgbClr val="E6EBF4"/>
+            <a:srgbClr val="FFFFFF"/>
           </a:solidFill>
           <a:ln w="12700">
             <a:solidFill>
@@ -17358,25 +17376,51 @@
           </a:fontRef>
         </p:style>
         <p:txBody>
-          <a:bodyPr rtlCol="0" anchor="ctr" wrap="square" lIns="190500" rIns="190500" tIns="190500" bIns="190500"/>
+          <a:bodyPr rtlCol="0" anchor="ctr"/>
+          <a:lstStyle/>
+          <a:p>
+            <a:pPr algn="ctr"/>
+          </a:p>
+        </p:txBody>
+      </p:sp>
+      <p:sp>
+        <p:nvSpPr>
+          <p:cNvPr id="7" name="TextBox 6"/>
+          <p:cNvSpPr txBox="1"/>
+          <p:nvPr/>
+        </p:nvSpPr>
+        <p:spPr>
+          <a:xfrm>
+            <a:off x="1041400" y="2032000"/>
+            <a:ext cx="4635500" cy="635000"/>
+          </a:xfrm>
+          <a:prstGeom prst="rect">
+            <a:avLst/>
+          </a:prstGeom>
+          <a:noFill/>
+        </p:spPr>
+        <p:txBody>
+          <a:bodyPr wrap="square" lIns="0" rIns="0" tIns="0" bIns="0" anchor="t">
+            <a:spAutoFit/>
+          </a:bodyPr>
           <a:lstStyle/>
           <a:p>
             <a:pPr algn="l">
               <a:lnSpc>
-                <a:spcPct val="100000"/>
-              </a:lnSpc>
-              <a:spcAft>
-                <a:spcPts val="600"/>
-              </a:spcAft>
-            </a:pPr>
-            <a:r>
-              <a:rPr sz="3600" b="1">
+                <a:spcPct val="115000"/>
+              </a:lnSpc>
+              <a:spcAft>
+                <a:spcPts val="200"/>
+              </a:spcAft>
+            </a:pPr>
+            <a:r>
+              <a:rPr sz="2800" b="1">
                 <a:solidFill>
                   <a:srgbClr val="00175A"/>
                 </a:solidFill>
                 <a:latin typeface="Georgia"/>
               </a:rPr>
-              <a:t>usually helps</a:t>
+              <a:t>Confidence</a:t>
             </a:r>
           </a:p>
           <a:p>
@@ -17389,35 +17433,77 @@
               </a:spcAft>
             </a:pPr>
             <a:r>
-              <a:rPr sz="1700" b="0">
-                <a:solidFill>
-                  <a:srgbClr val="333B47"/>
-                </a:solidFill>
-                <a:latin typeface="Arial"/>
-              </a:rPr>
-              <a:t>confident answers tend to be right</a:t>
-            </a:r>
-          </a:p>
-        </p:txBody>
-      </p:sp>
-      <p:sp>
-        <p:nvSpPr>
-          <p:cNvPr id="7" name="Rounded Rectangle 6"/>
+              <a:rPr sz="1800" b="0">
+                <a:solidFill>
+                  <a:srgbClr val="6B7480"/>
+                </a:solidFill>
+                <a:latin typeface="Arial"/>
+              </a:rPr>
+              <a:t>Is the model sure of its answer?</a:t>
+            </a:r>
+          </a:p>
+        </p:txBody>
+      </p:sp>
+      <p:sp>
+        <p:nvSpPr>
+          <p:cNvPr id="8" name="TextBox 7"/>
+          <p:cNvSpPr txBox="1"/>
+          <p:nvPr/>
+        </p:nvSpPr>
+        <p:spPr>
+          <a:xfrm>
+            <a:off x="1041400" y="2844800"/>
+            <a:ext cx="4635500" cy="190500"/>
+          </a:xfrm>
+          <a:prstGeom prst="rect">
+            <a:avLst/>
+          </a:prstGeom>
+          <a:noFill/>
+        </p:spPr>
+        <p:txBody>
+          <a:bodyPr wrap="square" lIns="0" rIns="0" tIns="0" bIns="0" anchor="t">
+            <a:spAutoFit/>
+          </a:bodyPr>
+          <a:lstStyle/>
+          <a:p>
+            <a:pPr algn="l">
+              <a:lnSpc>
+                <a:spcPct val="115000"/>
+              </a:lnSpc>
+              <a:spcAft>
+                <a:spcPts val="0"/>
+              </a:spcAft>
+            </a:pPr>
+            <a:r>
+              <a:rPr sz="1500" b="0">
+                <a:solidFill>
+                  <a:srgbClr val="6B7480"/>
+                </a:solidFill>
+                <a:latin typeface="Arial"/>
+              </a:rPr>
+              <a:t>Example: “When did World War II end?”</a:t>
+            </a:r>
+          </a:p>
+        </p:txBody>
+      </p:sp>
+      <p:sp>
+        <p:nvSpPr>
+          <p:cNvPr id="9" name="Rounded Rectangle 8"/>
           <p:cNvSpPr/>
           <p:nvPr/>
         </p:nvSpPr>
         <p:spPr>
           <a:xfrm>
-            <a:off x="8445500" y="4000500"/>
-            <a:ext cx="2933700" cy="1651000"/>
+            <a:off x="6299200" y="1905000"/>
+            <a:ext cx="5080000" cy="4254500"/>
           </a:xfrm>
           <a:prstGeom prst="roundRect">
             <a:avLst>
-              <a:gd name="adj" fmla="val 6923"/>
+              <a:gd name="adj" fmla="val 2686"/>
             </a:avLst>
           </a:prstGeom>
           <a:solidFill>
-            <a:srgbClr val="F6E3E0"/>
+            <a:srgbClr val="FFFFFF"/>
           </a:solidFill>
           <a:ln w="12700">
             <a:solidFill>
@@ -17441,27 +17527,1259 @@
           </a:fontRef>
         </p:style>
         <p:txBody>
-          <a:bodyPr rtlCol="0" anchor="ctr" wrap="square" lIns="190500" rIns="190500" tIns="190500" bIns="190500"/>
+          <a:bodyPr rtlCol="0" anchor="ctr"/>
+          <a:lstStyle/>
+          <a:p>
+            <a:pPr algn="ctr"/>
+          </a:p>
+        </p:txBody>
+      </p:sp>
+      <p:sp>
+        <p:nvSpPr>
+          <p:cNvPr id="10" name="TextBox 9"/>
+          <p:cNvSpPr txBox="1"/>
+          <p:nvPr/>
+        </p:nvSpPr>
+        <p:spPr>
+          <a:xfrm>
+            <a:off x="6527800" y="2032000"/>
+            <a:ext cx="4635500" cy="635000"/>
+          </a:xfrm>
+          <a:prstGeom prst="rect">
+            <a:avLst/>
+          </a:prstGeom>
+          <a:noFill/>
+        </p:spPr>
+        <p:txBody>
+          <a:bodyPr wrap="square" lIns="0" rIns="0" tIns="0" bIns="0" anchor="t">
+            <a:spAutoFit/>
+          </a:bodyPr>
           <a:lstStyle/>
           <a:p>
             <a:pPr algn="l">
               <a:lnSpc>
-                <a:spcPct val="100000"/>
-              </a:lnSpc>
-              <a:spcAft>
-                <a:spcPts val="600"/>
-              </a:spcAft>
-            </a:pPr>
-            <a:r>
-              <a:rPr sz="3600" b="1">
+                <a:spcPct val="115000"/>
+              </a:lnSpc>
+              <a:spcAft>
+                <a:spcPts val="200"/>
+              </a:spcAft>
+            </a:pPr>
+            <a:r>
+              <a:rPr sz="2800" b="1">
+                <a:solidFill>
+                  <a:srgbClr val="00175A"/>
+                </a:solidFill>
+                <a:latin typeface="Georgia"/>
+              </a:rPr>
+              <a:t>Agreement</a:t>
+            </a:r>
+          </a:p>
+          <a:p>
+            <a:pPr algn="l">
+              <a:lnSpc>
+                <a:spcPct val="115000"/>
+              </a:lnSpc>
+              <a:spcAft>
+                <a:spcPts val="0"/>
+              </a:spcAft>
+            </a:pPr>
+            <a:r>
+              <a:rPr sz="1800" b="0">
+                <a:solidFill>
+                  <a:srgbClr val="6B7480"/>
+                </a:solidFill>
+                <a:latin typeface="Arial"/>
+              </a:rPr>
+              <a:t>Do two cheap answers match?</a:t>
+            </a:r>
+          </a:p>
+        </p:txBody>
+      </p:sp>
+      <p:sp>
+        <p:nvSpPr>
+          <p:cNvPr id="11" name="TextBox 10"/>
+          <p:cNvSpPr txBox="1"/>
+          <p:nvPr/>
+        </p:nvSpPr>
+        <p:spPr>
+          <a:xfrm>
+            <a:off x="6527800" y="2844800"/>
+            <a:ext cx="4635500" cy="190500"/>
+          </a:xfrm>
+          <a:prstGeom prst="rect">
+            <a:avLst/>
+          </a:prstGeom>
+          <a:noFill/>
+        </p:spPr>
+        <p:txBody>
+          <a:bodyPr wrap="square" lIns="0" rIns="0" tIns="0" bIns="0" anchor="t">
+            <a:spAutoFit/>
+          </a:bodyPr>
+          <a:lstStyle/>
+          <a:p>
+            <a:pPr algn="l">
+              <a:lnSpc>
+                <a:spcPct val="115000"/>
+              </a:lnSpc>
+              <a:spcAft>
+                <a:spcPts val="0"/>
+              </a:spcAft>
+            </a:pPr>
+            <a:r>
+              <a:rPr sz="1500" b="0">
+                <a:solidFill>
+                  <a:srgbClr val="6B7480"/>
+                </a:solidFill>
+                <a:latin typeface="Arial"/>
+              </a:rPr>
+              <a:t>Example: “When did World War II end?”</a:t>
+            </a:r>
+          </a:p>
+        </p:txBody>
+      </p:sp>
+      <p:sp>
+        <p:nvSpPr>
+          <p:cNvPr id="12" name="TextBox 11"/>
+          <p:cNvSpPr txBox="1"/>
+          <p:nvPr/>
+        </p:nvSpPr>
+        <p:spPr>
+          <a:xfrm>
+            <a:off x="1041400" y="3206750"/>
+            <a:ext cx="1016000" cy="254000"/>
+          </a:xfrm>
+          <a:prstGeom prst="rect">
+            <a:avLst/>
+          </a:prstGeom>
+          <a:noFill/>
+        </p:spPr>
+        <p:txBody>
+          <a:bodyPr wrap="square" lIns="0" rIns="0" tIns="0" bIns="0" anchor="t">
+            <a:spAutoFit/>
+          </a:bodyPr>
+          <a:lstStyle/>
+          <a:p>
+            <a:pPr algn="l">
+              <a:lnSpc>
+                <a:spcPct val="115000"/>
+              </a:lnSpc>
+              <a:spcAft>
+                <a:spcPts val="0"/>
+              </a:spcAft>
+            </a:pPr>
+            <a:r>
+              <a:rPr sz="1800" b="1">
+                <a:solidFill>
+                  <a:srgbClr val="00175A"/>
+                </a:solidFill>
+                <a:latin typeface="Arial"/>
+              </a:rPr>
+              <a:t>Sure</a:t>
+            </a:r>
+          </a:p>
+        </p:txBody>
+      </p:sp>
+      <p:sp>
+        <p:nvSpPr>
+          <p:cNvPr id="13" name="TextBox 12"/>
+          <p:cNvSpPr txBox="1"/>
+          <p:nvPr/>
+        </p:nvSpPr>
+        <p:spPr>
+          <a:xfrm>
+            <a:off x="2095500" y="3206750"/>
+            <a:ext cx="508000" cy="215900"/>
+          </a:xfrm>
+          <a:prstGeom prst="rect">
+            <a:avLst/>
+          </a:prstGeom>
+          <a:noFill/>
+        </p:spPr>
+        <p:txBody>
+          <a:bodyPr wrap="square" lIns="0" rIns="0" tIns="0" bIns="0" anchor="t">
+            <a:spAutoFit/>
+          </a:bodyPr>
+          <a:lstStyle/>
+          <a:p>
+            <a:pPr algn="l">
+              <a:lnSpc>
+                <a:spcPct val="115000"/>
+              </a:lnSpc>
+              <a:spcAft>
+                <a:spcPts val="0"/>
+              </a:spcAft>
+            </a:pPr>
+            <a:r>
+              <a:rPr sz="1600" b="0">
+                <a:solidFill>
+                  <a:srgbClr val="333B47"/>
+                </a:solidFill>
+                <a:latin typeface="Arial"/>
+              </a:rPr>
+              <a:t>1945</a:t>
+            </a:r>
+          </a:p>
+        </p:txBody>
+      </p:sp>
+      <p:sp>
+        <p:nvSpPr>
+          <p:cNvPr id="14" name="Rectangle 13"/>
+          <p:cNvSpPr/>
+          <p:nvPr/>
+        </p:nvSpPr>
+        <p:spPr>
+          <a:xfrm>
+            <a:off x="2603500" y="3244850"/>
+            <a:ext cx="1828800" cy="152400"/>
+          </a:xfrm>
+          <a:prstGeom prst="rect">
+            <a:avLst/>
+          </a:prstGeom>
+          <a:solidFill>
+            <a:srgbClr val="2F6B34"/>
+          </a:solidFill>
+          <a:ln>
+            <a:noFill/>
+          </a:ln>
+          <a:effectLst/>
+        </p:spPr>
+        <p:style>
+          <a:lnRef idx="1">
+            <a:schemeClr val="accent1"/>
+          </a:lnRef>
+          <a:fillRef idx="3">
+            <a:schemeClr val="accent1"/>
+          </a:fillRef>
+          <a:effectRef idx="2">
+            <a:schemeClr val="accent1"/>
+          </a:effectRef>
+          <a:fontRef idx="minor">
+            <a:schemeClr val="lt1"/>
+          </a:fontRef>
+        </p:style>
+        <p:txBody>
+          <a:bodyPr rtlCol="0" anchor="ctr"/>
+          <a:lstStyle/>
+          <a:p>
+            <a:pPr algn="ctr"/>
+          </a:p>
+        </p:txBody>
+      </p:sp>
+      <p:sp>
+        <p:nvSpPr>
+          <p:cNvPr id="15" name="TextBox 14"/>
+          <p:cNvSpPr txBox="1"/>
+          <p:nvPr/>
+        </p:nvSpPr>
+        <p:spPr>
+          <a:xfrm>
+            <a:off x="4495800" y="3206750"/>
+            <a:ext cx="444500" cy="215900"/>
+          </a:xfrm>
+          <a:prstGeom prst="rect">
+            <a:avLst/>
+          </a:prstGeom>
+          <a:noFill/>
+        </p:spPr>
+        <p:txBody>
+          <a:bodyPr wrap="square" lIns="0" rIns="0" tIns="0" bIns="0" anchor="t">
+            <a:spAutoFit/>
+          </a:bodyPr>
+          <a:lstStyle/>
+          <a:p>
+            <a:pPr algn="l">
+              <a:lnSpc>
+                <a:spcPct val="115000"/>
+              </a:lnSpc>
+              <a:spcAft>
+                <a:spcPts val="0"/>
+              </a:spcAft>
+            </a:pPr>
+            <a:r>
+              <a:rPr sz="1500" b="0">
+                <a:solidFill>
+                  <a:srgbClr val="6B7480"/>
+                </a:solidFill>
+                <a:latin typeface="Arial"/>
+              </a:rPr>
+              <a:t>0.96</a:t>
+            </a:r>
+          </a:p>
+        </p:txBody>
+      </p:sp>
+      <p:sp>
+        <p:nvSpPr>
+          <p:cNvPr id="16" name="TextBox 15"/>
+          <p:cNvSpPr txBox="1"/>
+          <p:nvPr/>
+        </p:nvSpPr>
+        <p:spPr>
+          <a:xfrm>
+            <a:off x="1041400" y="3873500"/>
+            <a:ext cx="1016000" cy="254000"/>
+          </a:xfrm>
+          <a:prstGeom prst="rect">
+            <a:avLst/>
+          </a:prstGeom>
+          <a:noFill/>
+        </p:spPr>
+        <p:txBody>
+          <a:bodyPr wrap="square" lIns="0" rIns="0" tIns="0" bIns="0" anchor="t">
+            <a:spAutoFit/>
+          </a:bodyPr>
+          <a:lstStyle/>
+          <a:p>
+            <a:pPr algn="l">
+              <a:lnSpc>
+                <a:spcPct val="115000"/>
+              </a:lnSpc>
+              <a:spcAft>
+                <a:spcPts val="0"/>
+              </a:spcAft>
+            </a:pPr>
+            <a:r>
+              <a:rPr sz="1800" b="1">
+                <a:solidFill>
+                  <a:srgbClr val="00175A"/>
+                </a:solidFill>
+                <a:latin typeface="Arial"/>
+              </a:rPr>
+              <a:t>Unsure</a:t>
+            </a:r>
+          </a:p>
+        </p:txBody>
+      </p:sp>
+      <p:sp>
+        <p:nvSpPr>
+          <p:cNvPr id="17" name="TextBox 16"/>
+          <p:cNvSpPr txBox="1"/>
+          <p:nvPr/>
+        </p:nvSpPr>
+        <p:spPr>
+          <a:xfrm>
+            <a:off x="2095500" y="3873500"/>
+            <a:ext cx="508000" cy="215900"/>
+          </a:xfrm>
+          <a:prstGeom prst="rect">
+            <a:avLst/>
+          </a:prstGeom>
+          <a:noFill/>
+        </p:spPr>
+        <p:txBody>
+          <a:bodyPr wrap="square" lIns="0" rIns="0" tIns="0" bIns="0" anchor="t">
+            <a:spAutoFit/>
+          </a:bodyPr>
+          <a:lstStyle/>
+          <a:p>
+            <a:pPr algn="l">
+              <a:lnSpc>
+                <a:spcPct val="115000"/>
+              </a:lnSpc>
+              <a:spcAft>
+                <a:spcPts val="0"/>
+              </a:spcAft>
+            </a:pPr>
+            <a:r>
+              <a:rPr sz="1600" b="0">
+                <a:solidFill>
+                  <a:srgbClr val="333B47"/>
+                </a:solidFill>
+                <a:latin typeface="Arial"/>
+              </a:rPr>
+              <a:t>1944</a:t>
+            </a:r>
+          </a:p>
+        </p:txBody>
+      </p:sp>
+      <p:sp>
+        <p:nvSpPr>
+          <p:cNvPr id="18" name="Rectangle 17"/>
+          <p:cNvSpPr/>
+          <p:nvPr/>
+        </p:nvSpPr>
+        <p:spPr>
+          <a:xfrm>
+            <a:off x="2603500" y="3911600"/>
+            <a:ext cx="723900" cy="152400"/>
+          </a:xfrm>
+          <a:prstGeom prst="rect">
+            <a:avLst/>
+          </a:prstGeom>
+          <a:solidFill>
+            <a:srgbClr val="B03A2E"/>
+          </a:solidFill>
+          <a:ln>
+            <a:noFill/>
+          </a:ln>
+          <a:effectLst/>
+        </p:spPr>
+        <p:style>
+          <a:lnRef idx="1">
+            <a:schemeClr val="accent1"/>
+          </a:lnRef>
+          <a:fillRef idx="3">
+            <a:schemeClr val="accent1"/>
+          </a:fillRef>
+          <a:effectRef idx="2">
+            <a:schemeClr val="accent1"/>
+          </a:effectRef>
+          <a:fontRef idx="minor">
+            <a:schemeClr val="lt1"/>
+          </a:fontRef>
+        </p:style>
+        <p:txBody>
+          <a:bodyPr rtlCol="0" anchor="ctr"/>
+          <a:lstStyle/>
+          <a:p>
+            <a:pPr algn="ctr"/>
+          </a:p>
+        </p:txBody>
+      </p:sp>
+      <p:sp>
+        <p:nvSpPr>
+          <p:cNvPr id="19" name="TextBox 18"/>
+          <p:cNvSpPr txBox="1"/>
+          <p:nvPr/>
+        </p:nvSpPr>
+        <p:spPr>
+          <a:xfrm>
+            <a:off x="3390900" y="3873500"/>
+            <a:ext cx="444500" cy="215900"/>
+          </a:xfrm>
+          <a:prstGeom prst="rect">
+            <a:avLst/>
+          </a:prstGeom>
+          <a:noFill/>
+        </p:spPr>
+        <p:txBody>
+          <a:bodyPr wrap="square" lIns="0" rIns="0" tIns="0" bIns="0" anchor="t">
+            <a:spAutoFit/>
+          </a:bodyPr>
+          <a:lstStyle/>
+          <a:p>
+            <a:pPr algn="l">
+              <a:lnSpc>
+                <a:spcPct val="115000"/>
+              </a:lnSpc>
+              <a:spcAft>
+                <a:spcPts val="0"/>
+              </a:spcAft>
+            </a:pPr>
+            <a:r>
+              <a:rPr sz="1500" b="0">
+                <a:solidFill>
+                  <a:srgbClr val="6B7480"/>
+                </a:solidFill>
+                <a:latin typeface="Arial"/>
+              </a:rPr>
+              <a:t>0.38</a:t>
+            </a:r>
+          </a:p>
+        </p:txBody>
+      </p:sp>
+      <p:sp>
+        <p:nvSpPr>
+          <p:cNvPr id="20" name="TextBox 19"/>
+          <p:cNvSpPr txBox="1"/>
+          <p:nvPr/>
+        </p:nvSpPr>
+        <p:spPr>
+          <a:xfrm>
+            <a:off x="2095500" y="4114800"/>
+            <a:ext cx="508000" cy="215900"/>
+          </a:xfrm>
+          <a:prstGeom prst="rect">
+            <a:avLst/>
+          </a:prstGeom>
+          <a:noFill/>
+        </p:spPr>
+        <p:txBody>
+          <a:bodyPr wrap="square" lIns="0" rIns="0" tIns="0" bIns="0" anchor="t">
+            <a:spAutoFit/>
+          </a:bodyPr>
+          <a:lstStyle/>
+          <a:p>
+            <a:pPr algn="l">
+              <a:lnSpc>
+                <a:spcPct val="115000"/>
+              </a:lnSpc>
+              <a:spcAft>
+                <a:spcPts val="0"/>
+              </a:spcAft>
+            </a:pPr>
+            <a:r>
+              <a:rPr sz="1600" b="0">
+                <a:solidFill>
+                  <a:srgbClr val="333B47"/>
+                </a:solidFill>
+                <a:latin typeface="Arial"/>
+              </a:rPr>
+              <a:t>1945</a:t>
+            </a:r>
+          </a:p>
+        </p:txBody>
+      </p:sp>
+      <p:sp>
+        <p:nvSpPr>
+          <p:cNvPr id="21" name="Rectangle 20"/>
+          <p:cNvSpPr/>
+          <p:nvPr/>
+        </p:nvSpPr>
+        <p:spPr>
+          <a:xfrm>
+            <a:off x="2603500" y="4152900"/>
+            <a:ext cx="628650" cy="152400"/>
+          </a:xfrm>
+          <a:prstGeom prst="rect">
+            <a:avLst/>
+          </a:prstGeom>
+          <a:solidFill>
+            <a:srgbClr val="B03A2E"/>
+          </a:solidFill>
+          <a:ln>
+            <a:noFill/>
+          </a:ln>
+          <a:effectLst/>
+        </p:spPr>
+        <p:style>
+          <a:lnRef idx="1">
+            <a:schemeClr val="accent1"/>
+          </a:lnRef>
+          <a:fillRef idx="3">
+            <a:schemeClr val="accent1"/>
+          </a:fillRef>
+          <a:effectRef idx="2">
+            <a:schemeClr val="accent1"/>
+          </a:effectRef>
+          <a:fontRef idx="minor">
+            <a:schemeClr val="lt1"/>
+          </a:fontRef>
+        </p:style>
+        <p:txBody>
+          <a:bodyPr rtlCol="0" anchor="ctr"/>
+          <a:lstStyle/>
+          <a:p>
+            <a:pPr algn="ctr"/>
+          </a:p>
+        </p:txBody>
+      </p:sp>
+      <p:sp>
+        <p:nvSpPr>
+          <p:cNvPr id="22" name="TextBox 21"/>
+          <p:cNvSpPr txBox="1"/>
+          <p:nvPr/>
+        </p:nvSpPr>
+        <p:spPr>
+          <a:xfrm>
+            <a:off x="3295650" y="4114800"/>
+            <a:ext cx="444500" cy="215900"/>
+          </a:xfrm>
+          <a:prstGeom prst="rect">
+            <a:avLst/>
+          </a:prstGeom>
+          <a:noFill/>
+        </p:spPr>
+        <p:txBody>
+          <a:bodyPr wrap="square" lIns="0" rIns="0" tIns="0" bIns="0" anchor="t">
+            <a:spAutoFit/>
+          </a:bodyPr>
+          <a:lstStyle/>
+          <a:p>
+            <a:pPr algn="l">
+              <a:lnSpc>
+                <a:spcPct val="115000"/>
+              </a:lnSpc>
+              <a:spcAft>
+                <a:spcPts val="0"/>
+              </a:spcAft>
+            </a:pPr>
+            <a:r>
+              <a:rPr sz="1500" b="0">
+                <a:solidFill>
+                  <a:srgbClr val="6B7480"/>
+                </a:solidFill>
+                <a:latin typeface="Arial"/>
+              </a:rPr>
+              <a:t>0.33</a:t>
+            </a:r>
+          </a:p>
+        </p:txBody>
+      </p:sp>
+      <p:sp>
+        <p:nvSpPr>
+          <p:cNvPr id="23" name="TextBox 22"/>
+          <p:cNvSpPr txBox="1"/>
+          <p:nvPr/>
+        </p:nvSpPr>
+        <p:spPr>
+          <a:xfrm>
+            <a:off x="2095500" y="4356100"/>
+            <a:ext cx="508000" cy="215900"/>
+          </a:xfrm>
+          <a:prstGeom prst="rect">
+            <a:avLst/>
+          </a:prstGeom>
+          <a:noFill/>
+        </p:spPr>
+        <p:txBody>
+          <a:bodyPr wrap="square" lIns="0" rIns="0" tIns="0" bIns="0" anchor="t">
+            <a:spAutoFit/>
+          </a:bodyPr>
+          <a:lstStyle/>
+          <a:p>
+            <a:pPr algn="l">
+              <a:lnSpc>
+                <a:spcPct val="115000"/>
+              </a:lnSpc>
+              <a:spcAft>
+                <a:spcPts val="0"/>
+              </a:spcAft>
+            </a:pPr>
+            <a:r>
+              <a:rPr sz="1600" b="0">
+                <a:solidFill>
+                  <a:srgbClr val="333B47"/>
+                </a:solidFill>
+                <a:latin typeface="Arial"/>
+              </a:rPr>
+              <a:t>1946</a:t>
+            </a:r>
+          </a:p>
+        </p:txBody>
+      </p:sp>
+      <p:sp>
+        <p:nvSpPr>
+          <p:cNvPr id="24" name="Rectangle 23"/>
+          <p:cNvSpPr/>
+          <p:nvPr/>
+        </p:nvSpPr>
+        <p:spPr>
+          <a:xfrm>
+            <a:off x="2603500" y="4394200"/>
+            <a:ext cx="552450" cy="152400"/>
+          </a:xfrm>
+          <a:prstGeom prst="rect">
+            <a:avLst/>
+          </a:prstGeom>
+          <a:solidFill>
+            <a:srgbClr val="B03A2E"/>
+          </a:solidFill>
+          <a:ln>
+            <a:noFill/>
+          </a:ln>
+          <a:effectLst/>
+        </p:spPr>
+        <p:style>
+          <a:lnRef idx="1">
+            <a:schemeClr val="accent1"/>
+          </a:lnRef>
+          <a:fillRef idx="3">
+            <a:schemeClr val="accent1"/>
+          </a:fillRef>
+          <a:effectRef idx="2">
+            <a:schemeClr val="accent1"/>
+          </a:effectRef>
+          <a:fontRef idx="minor">
+            <a:schemeClr val="lt1"/>
+          </a:fontRef>
+        </p:style>
+        <p:txBody>
+          <a:bodyPr rtlCol="0" anchor="ctr"/>
+          <a:lstStyle/>
+          <a:p>
+            <a:pPr algn="ctr"/>
+          </a:p>
+        </p:txBody>
+      </p:sp>
+      <p:sp>
+        <p:nvSpPr>
+          <p:cNvPr id="25" name="TextBox 24"/>
+          <p:cNvSpPr txBox="1"/>
+          <p:nvPr/>
+        </p:nvSpPr>
+        <p:spPr>
+          <a:xfrm>
+            <a:off x="3219450" y="4356100"/>
+            <a:ext cx="444500" cy="215900"/>
+          </a:xfrm>
+          <a:prstGeom prst="rect">
+            <a:avLst/>
+          </a:prstGeom>
+          <a:noFill/>
+        </p:spPr>
+        <p:txBody>
+          <a:bodyPr wrap="square" lIns="0" rIns="0" tIns="0" bIns="0" anchor="t">
+            <a:spAutoFit/>
+          </a:bodyPr>
+          <a:lstStyle/>
+          <a:p>
+            <a:pPr algn="l">
+              <a:lnSpc>
+                <a:spcPct val="115000"/>
+              </a:lnSpc>
+              <a:spcAft>
+                <a:spcPts val="0"/>
+              </a:spcAft>
+            </a:pPr>
+            <a:r>
+              <a:rPr sz="1500" b="0">
+                <a:solidFill>
+                  <a:srgbClr val="6B7480"/>
+                </a:solidFill>
+                <a:latin typeface="Arial"/>
+              </a:rPr>
+              <a:t>0.29</a:t>
+            </a:r>
+          </a:p>
+        </p:txBody>
+      </p:sp>
+      <p:sp>
+        <p:nvSpPr>
+          <p:cNvPr id="26" name="TextBox 25"/>
+          <p:cNvSpPr txBox="1"/>
+          <p:nvPr/>
+        </p:nvSpPr>
+        <p:spPr>
+          <a:xfrm>
+            <a:off x="1041400" y="4889500"/>
+            <a:ext cx="4635500" cy="635000"/>
+          </a:xfrm>
+          <a:prstGeom prst="rect">
+            <a:avLst/>
+          </a:prstGeom>
+          <a:noFill/>
+        </p:spPr>
+        <p:txBody>
+          <a:bodyPr wrap="square" lIns="0" rIns="0" tIns="0" bIns="0" anchor="t">
+            <a:spAutoFit/>
+          </a:bodyPr>
+          <a:lstStyle/>
+          <a:p>
+            <a:pPr algn="l">
+              <a:lnSpc>
+                <a:spcPct val="115000"/>
+              </a:lnSpc>
+              <a:spcAft>
+                <a:spcPts val="0"/>
+              </a:spcAft>
+            </a:pPr>
+            <a:r>
+              <a:rPr sz="1800" b="0">
+                <a:solidFill>
+                  <a:srgbClr val="333B47"/>
+                </a:solidFill>
+                <a:latin typeface="Arial"/>
+              </a:rPr>
+              <a:t>A model that knows tends to put its probability on </a:t>
+            </a:r>
+            <a:r>
+              <a:rPr sz="1800" b="1">
+                <a:solidFill>
+                  <a:srgbClr val="333B47"/>
+                </a:solidFill>
+                <a:latin typeface="Arial"/>
+              </a:rPr>
+              <a:t>one</a:t>
+            </a:r>
+            <a:r>
+              <a:rPr sz="1800" b="0">
+                <a:solidFill>
+                  <a:srgbClr val="333B47"/>
+                </a:solidFill>
+                <a:latin typeface="Arial"/>
+              </a:rPr>
+              <a:t> answer. An unsure one spreads it.</a:t>
+            </a:r>
+          </a:p>
+        </p:txBody>
+      </p:sp>
+      <p:sp>
+        <p:nvSpPr>
+          <p:cNvPr id="27" name="TextBox 26"/>
+          <p:cNvSpPr txBox="1"/>
+          <p:nvPr/>
+        </p:nvSpPr>
+        <p:spPr>
+          <a:xfrm>
+            <a:off x="1041400" y="5715000"/>
+            <a:ext cx="4635500" cy="317500"/>
+          </a:xfrm>
+          <a:prstGeom prst="rect">
+            <a:avLst/>
+          </a:prstGeom>
+          <a:noFill/>
+        </p:spPr>
+        <p:txBody>
+          <a:bodyPr wrap="square" lIns="0" rIns="0" tIns="0" bIns="0" anchor="t">
+            <a:spAutoFit/>
+          </a:bodyPr>
+          <a:lstStyle/>
+          <a:p>
+            <a:pPr algn="l">
+              <a:lnSpc>
+                <a:spcPct val="115000"/>
+              </a:lnSpc>
+              <a:spcAft>
+                <a:spcPts val="0"/>
+              </a:spcAft>
+            </a:pPr>
+            <a:r>
+              <a:rPr sz="1800" b="1">
+                <a:solidFill>
+                  <a:srgbClr val="2F6B34"/>
+                </a:solidFill>
+                <a:latin typeface="Arial"/>
+              </a:rPr>
+              <a:t>Cost: free, it comes with the answer.</a:t>
+            </a:r>
+          </a:p>
+        </p:txBody>
+      </p:sp>
+      <p:sp>
+        <p:nvSpPr>
+          <p:cNvPr id="28" name="TextBox 27"/>
+          <p:cNvSpPr txBox="1"/>
+          <p:nvPr/>
+        </p:nvSpPr>
+        <p:spPr>
+          <a:xfrm>
+            <a:off x="6731000" y="3111500"/>
+            <a:ext cx="1206500" cy="190500"/>
+          </a:xfrm>
+          <a:prstGeom prst="rect">
+            <a:avLst/>
+          </a:prstGeom>
+          <a:noFill/>
+        </p:spPr>
+        <p:txBody>
+          <a:bodyPr wrap="square" lIns="0" rIns="0" tIns="0" bIns="0" anchor="t">
+            <a:spAutoFit/>
+          </a:bodyPr>
+          <a:lstStyle/>
+          <a:p>
+            <a:pPr algn="ctr">
+              <a:lnSpc>
+                <a:spcPct val="115000"/>
+              </a:lnSpc>
+              <a:spcAft>
+                <a:spcPts val="0"/>
+              </a:spcAft>
+            </a:pPr>
+            <a:r>
+              <a:rPr sz="1500" b="0">
+                <a:solidFill>
+                  <a:srgbClr val="6B7480"/>
+                </a:solidFill>
+                <a:latin typeface="Arial"/>
+              </a:rPr>
+              <a:t>direct answer</a:t>
+            </a:r>
+          </a:p>
+        </p:txBody>
+      </p:sp>
+      <p:sp>
+        <p:nvSpPr>
+          <p:cNvPr id="29" name="TextBox 28"/>
+          <p:cNvSpPr txBox="1"/>
+          <p:nvPr/>
+        </p:nvSpPr>
+        <p:spPr>
+          <a:xfrm>
+            <a:off x="8064500" y="3111500"/>
+            <a:ext cx="1206500" cy="190500"/>
+          </a:xfrm>
+          <a:prstGeom prst="rect">
+            <a:avLst/>
+          </a:prstGeom>
+          <a:noFill/>
+        </p:spPr>
+        <p:txBody>
+          <a:bodyPr wrap="square" lIns="0" rIns="0" tIns="0" bIns="0" anchor="t">
+            <a:spAutoFit/>
+          </a:bodyPr>
+          <a:lstStyle/>
+          <a:p>
+            <a:pPr algn="ctr">
+              <a:lnSpc>
+                <a:spcPct val="115000"/>
+              </a:lnSpc>
+              <a:spcAft>
+                <a:spcPts val="0"/>
+              </a:spcAft>
+            </a:pPr>
+            <a:r>
+              <a:rPr sz="1500" b="0">
+                <a:solidFill>
+                  <a:srgbClr val="6B7480"/>
+                </a:solidFill>
+                <a:latin typeface="Arial"/>
+              </a:rPr>
+              <a:t>single agent</a:t>
+            </a:r>
+          </a:p>
+        </p:txBody>
+      </p:sp>
+      <p:sp>
+        <p:nvSpPr>
+          <p:cNvPr id="30" name="Rounded Rectangle 29"/>
+          <p:cNvSpPr/>
+          <p:nvPr/>
+        </p:nvSpPr>
+        <p:spPr>
+          <a:xfrm>
+            <a:off x="6731000" y="3365500"/>
+            <a:ext cx="1206500" cy="539750"/>
+          </a:xfrm>
+          <a:prstGeom prst="roundRect">
+            <a:avLst>
+              <a:gd name="adj" fmla="val 10000"/>
+            </a:avLst>
+          </a:prstGeom>
+          <a:solidFill>
+            <a:srgbClr val="E6EBF4"/>
+          </a:solidFill>
+          <a:ln w="25400">
+            <a:solidFill>
+              <a:srgbClr val="2F6B34"/>
+            </a:solidFill>
+          </a:ln>
+          <a:effectLst/>
+        </p:spPr>
+        <p:style>
+          <a:lnRef idx="1">
+            <a:schemeClr val="accent1"/>
+          </a:lnRef>
+          <a:fillRef idx="3">
+            <a:schemeClr val="accent1"/>
+          </a:fillRef>
+          <a:effectRef idx="2">
+            <a:schemeClr val="accent1"/>
+          </a:effectRef>
+          <a:fontRef idx="minor">
+            <a:schemeClr val="lt1"/>
+          </a:fontRef>
+        </p:style>
+        <p:txBody>
+          <a:bodyPr rtlCol="0" anchor="ctr" wrap="square" lIns="25400" rIns="25400" tIns="25400" bIns="25400"/>
+          <a:lstStyle/>
+          <a:p>
+            <a:pPr algn="ctr">
+              <a:lnSpc>
+                <a:spcPct val="115000"/>
+              </a:lnSpc>
+              <a:spcAft>
+                <a:spcPts val="0"/>
+              </a:spcAft>
+            </a:pPr>
+            <a:r>
+              <a:rPr sz="2200" b="1">
+                <a:solidFill>
+                  <a:srgbClr val="00175A"/>
+                </a:solidFill>
+                <a:latin typeface="Arial"/>
+              </a:rPr>
+              <a:t>1945</a:t>
+            </a:r>
+          </a:p>
+        </p:txBody>
+      </p:sp>
+      <p:sp>
+        <p:nvSpPr>
+          <p:cNvPr id="31" name="Rounded Rectangle 30"/>
+          <p:cNvSpPr/>
+          <p:nvPr/>
+        </p:nvSpPr>
+        <p:spPr>
+          <a:xfrm>
+            <a:off x="8064500" y="3365500"/>
+            <a:ext cx="1206500" cy="539750"/>
+          </a:xfrm>
+          <a:prstGeom prst="roundRect">
+            <a:avLst>
+              <a:gd name="adj" fmla="val 10000"/>
+            </a:avLst>
+          </a:prstGeom>
+          <a:solidFill>
+            <a:srgbClr val="E6EBF4"/>
+          </a:solidFill>
+          <a:ln w="25400">
+            <a:solidFill>
+              <a:srgbClr val="2F6B34"/>
+            </a:solidFill>
+          </a:ln>
+          <a:effectLst/>
+        </p:spPr>
+        <p:style>
+          <a:lnRef idx="1">
+            <a:schemeClr val="accent1"/>
+          </a:lnRef>
+          <a:fillRef idx="3">
+            <a:schemeClr val="accent1"/>
+          </a:fillRef>
+          <a:effectRef idx="2">
+            <a:schemeClr val="accent1"/>
+          </a:effectRef>
+          <a:fontRef idx="minor">
+            <a:schemeClr val="lt1"/>
+          </a:fontRef>
+        </p:style>
+        <p:txBody>
+          <a:bodyPr rtlCol="0" anchor="ctr" wrap="square" lIns="25400" rIns="25400" tIns="25400" bIns="25400"/>
+          <a:lstStyle/>
+          <a:p>
+            <a:pPr algn="ctr">
+              <a:lnSpc>
+                <a:spcPct val="115000"/>
+              </a:lnSpc>
+              <a:spcAft>
+                <a:spcPts val="0"/>
+              </a:spcAft>
+            </a:pPr>
+            <a:r>
+              <a:rPr sz="2200" b="1">
+                <a:solidFill>
+                  <a:srgbClr val="00175A"/>
+                </a:solidFill>
+                <a:latin typeface="Arial"/>
+              </a:rPr>
+              <a:t>1945</a:t>
+            </a:r>
+          </a:p>
+        </p:txBody>
+      </p:sp>
+      <p:sp>
+        <p:nvSpPr>
+          <p:cNvPr id="32" name="TextBox 31"/>
+          <p:cNvSpPr txBox="1"/>
+          <p:nvPr/>
+        </p:nvSpPr>
+        <p:spPr>
+          <a:xfrm>
+            <a:off x="9461500" y="3524250"/>
+            <a:ext cx="1841500" cy="254000"/>
+          </a:xfrm>
+          <a:prstGeom prst="rect">
+            <a:avLst/>
+          </a:prstGeom>
+          <a:noFill/>
+        </p:spPr>
+        <p:txBody>
+          <a:bodyPr wrap="square" lIns="0" rIns="0" tIns="0" bIns="0" anchor="t">
+            <a:spAutoFit/>
+          </a:bodyPr>
+          <a:lstStyle/>
+          <a:p>
+            <a:pPr algn="l">
+              <a:lnSpc>
+                <a:spcPct val="115000"/>
+              </a:lnSpc>
+              <a:spcAft>
+                <a:spcPts val="0"/>
+              </a:spcAft>
+            </a:pPr>
+            <a:r>
+              <a:rPr sz="1600" b="1">
+                <a:solidFill>
+                  <a:srgbClr val="2F6B34"/>
+                </a:solidFill>
+                <a:latin typeface="Arial"/>
+              </a:rPr>
+              <a:t>agree: likely right</a:t>
+            </a:r>
+          </a:p>
+        </p:txBody>
+      </p:sp>
+      <p:sp>
+        <p:nvSpPr>
+          <p:cNvPr id="33" name="Rounded Rectangle 32"/>
+          <p:cNvSpPr/>
+          <p:nvPr/>
+        </p:nvSpPr>
+        <p:spPr>
+          <a:xfrm>
+            <a:off x="6731000" y="4032250"/>
+            <a:ext cx="1206500" cy="539750"/>
+          </a:xfrm>
+          <a:prstGeom prst="roundRect">
+            <a:avLst>
+              <a:gd name="adj" fmla="val 10000"/>
+            </a:avLst>
+          </a:prstGeom>
+          <a:solidFill>
+            <a:srgbClr val="E6EBF4"/>
+          </a:solidFill>
+          <a:ln w="25400">
+            <a:solidFill>
+              <a:srgbClr val="B03A2E"/>
+            </a:solidFill>
+          </a:ln>
+          <a:effectLst/>
+        </p:spPr>
+        <p:style>
+          <a:lnRef idx="1">
+            <a:schemeClr val="accent1"/>
+          </a:lnRef>
+          <a:fillRef idx="3">
+            <a:schemeClr val="accent1"/>
+          </a:fillRef>
+          <a:effectRef idx="2">
+            <a:schemeClr val="accent1"/>
+          </a:effectRef>
+          <a:fontRef idx="minor">
+            <a:schemeClr val="lt1"/>
+          </a:fontRef>
+        </p:style>
+        <p:txBody>
+          <a:bodyPr rtlCol="0" anchor="ctr" wrap="square" lIns="25400" rIns="25400" tIns="25400" bIns="25400"/>
+          <a:lstStyle/>
+          <a:p>
+            <a:pPr algn="ctr">
+              <a:lnSpc>
+                <a:spcPct val="115000"/>
+              </a:lnSpc>
+              <a:spcAft>
+                <a:spcPts val="0"/>
+              </a:spcAft>
+            </a:pPr>
+            <a:r>
+              <a:rPr sz="2200" b="1">
+                <a:solidFill>
+                  <a:srgbClr val="00175A"/>
+                </a:solidFill>
+                <a:latin typeface="Arial"/>
+              </a:rPr>
+              <a:t>1944</a:t>
+            </a:r>
+          </a:p>
+        </p:txBody>
+      </p:sp>
+      <p:sp>
+        <p:nvSpPr>
+          <p:cNvPr id="34" name="Rounded Rectangle 33"/>
+          <p:cNvSpPr/>
+          <p:nvPr/>
+        </p:nvSpPr>
+        <p:spPr>
+          <a:xfrm>
+            <a:off x="8064500" y="4032250"/>
+            <a:ext cx="1206500" cy="539750"/>
+          </a:xfrm>
+          <a:prstGeom prst="roundRect">
+            <a:avLst>
+              <a:gd name="adj" fmla="val 10000"/>
+            </a:avLst>
+          </a:prstGeom>
+          <a:solidFill>
+            <a:srgbClr val="E6EBF4"/>
+          </a:solidFill>
+          <a:ln w="25400">
+            <a:solidFill>
+              <a:srgbClr val="B03A2E"/>
+            </a:solidFill>
+          </a:ln>
+          <a:effectLst/>
+        </p:spPr>
+        <p:style>
+          <a:lnRef idx="1">
+            <a:schemeClr val="accent1"/>
+          </a:lnRef>
+          <a:fillRef idx="3">
+            <a:schemeClr val="accent1"/>
+          </a:fillRef>
+          <a:effectRef idx="2">
+            <a:schemeClr val="accent1"/>
+          </a:effectRef>
+          <a:fontRef idx="minor">
+            <a:schemeClr val="lt1"/>
+          </a:fontRef>
+        </p:style>
+        <p:txBody>
+          <a:bodyPr rtlCol="0" anchor="ctr" wrap="square" lIns="25400" rIns="25400" tIns="25400" bIns="25400"/>
+          <a:lstStyle/>
+          <a:p>
+            <a:pPr algn="ctr">
+              <a:lnSpc>
+                <a:spcPct val="115000"/>
+              </a:lnSpc>
+              <a:spcAft>
+                <a:spcPts val="0"/>
+              </a:spcAft>
+            </a:pPr>
+            <a:r>
+              <a:rPr sz="2200" b="1">
+                <a:solidFill>
+                  <a:srgbClr val="00175A"/>
+                </a:solidFill>
+                <a:latin typeface="Arial"/>
+              </a:rPr>
+              <a:t>1946</a:t>
+            </a:r>
+          </a:p>
+        </p:txBody>
+      </p:sp>
+      <p:sp>
+        <p:nvSpPr>
+          <p:cNvPr id="35" name="TextBox 34"/>
+          <p:cNvSpPr txBox="1"/>
+          <p:nvPr/>
+        </p:nvSpPr>
+        <p:spPr>
+          <a:xfrm>
+            <a:off x="9461500" y="4191000"/>
+            <a:ext cx="1841500" cy="254000"/>
+          </a:xfrm>
+          <a:prstGeom prst="rect">
+            <a:avLst/>
+          </a:prstGeom>
+          <a:noFill/>
+        </p:spPr>
+        <p:txBody>
+          <a:bodyPr wrap="square" lIns="0" rIns="0" tIns="0" bIns="0" anchor="t">
+            <a:spAutoFit/>
+          </a:bodyPr>
+          <a:lstStyle/>
+          <a:p>
+            <a:pPr algn="l">
+              <a:lnSpc>
+                <a:spcPct val="115000"/>
+              </a:lnSpc>
+              <a:spcAft>
+                <a:spcPts val="0"/>
+              </a:spcAft>
+            </a:pPr>
+            <a:r>
+              <a:rPr sz="1600" b="1">
                 <a:solidFill>
                   <a:srgbClr val="B03A2E"/>
                 </a:solidFill>
-                <a:latin typeface="Georgia"/>
-              </a:rPr>
-              <a:t>3 of 12</a:t>
-            </a:r>
-          </a:p>
+                <a:latin typeface="Arial"/>
+              </a:rPr>
+              <a:t>disagree: doubtful</a:t>
+            </a:r>
+          </a:p>
+        </p:txBody>
+      </p:sp>
+      <p:sp>
+        <p:nvSpPr>
+          <p:cNvPr id="36" name="TextBox 35"/>
+          <p:cNvSpPr txBox="1"/>
+          <p:nvPr/>
+        </p:nvSpPr>
+        <p:spPr>
+          <a:xfrm>
+            <a:off x="6527800" y="4889500"/>
+            <a:ext cx="4635500" cy="635000"/>
+          </a:xfrm>
+          <a:prstGeom prst="rect">
+            <a:avLst/>
+          </a:prstGeom>
+          <a:noFill/>
+        </p:spPr>
+        <p:txBody>
+          <a:bodyPr wrap="square" lIns="0" rIns="0" tIns="0" bIns="0" anchor="t">
+            <a:spAutoFit/>
+          </a:bodyPr>
+          <a:lstStyle/>
           <a:p>
             <a:pPr algn="l">
               <a:lnSpc>
@@ -17472,13 +18790,73 @@
               </a:spcAft>
             </a:pPr>
             <a:r>
-              <a:rPr sz="1700" b="0">
+              <a:rPr sz="1800" b="0">
                 <a:solidFill>
                   <a:srgbClr val="333B47"/>
                 </a:solidFill>
                 <a:latin typeface="Arial"/>
               </a:rPr>
-              <a:t>settings where it points the wrong way</a:t>
+              <a:t>One right answer, many wrong ones: two tries </a:t>
+            </a:r>
+            <a:r>
+              <a:rPr sz="1800" b="1">
+                <a:solidFill>
+                  <a:srgbClr val="333B47"/>
+                </a:solidFill>
+                <a:latin typeface="Arial"/>
+              </a:rPr>
+              <a:t>rarely</a:t>
+            </a:r>
+            <a:r>
+              <a:rPr sz="1800" b="0">
+                <a:solidFill>
+                  <a:srgbClr val="333B47"/>
+                </a:solidFill>
+                <a:latin typeface="Arial"/>
+              </a:rPr>
+              <a:t> match on a wrong one.</a:t>
+            </a:r>
+          </a:p>
+        </p:txBody>
+      </p:sp>
+      <p:sp>
+        <p:nvSpPr>
+          <p:cNvPr id="37" name="TextBox 36"/>
+          <p:cNvSpPr txBox="1"/>
+          <p:nvPr/>
+        </p:nvSpPr>
+        <p:spPr>
+          <a:xfrm>
+            <a:off x="6527800" y="5715000"/>
+            <a:ext cx="4635500" cy="317500"/>
+          </a:xfrm>
+          <a:prstGeom prst="rect">
+            <a:avLst/>
+          </a:prstGeom>
+          <a:noFill/>
+        </p:spPr>
+        <p:txBody>
+          <a:bodyPr wrap="square" lIns="0" rIns="0" tIns="0" bIns="0" anchor="t">
+            <a:spAutoFit/>
+          </a:bodyPr>
+          <a:lstStyle/>
+          <a:p>
+            <a:pPr algn="l">
+              <a:lnSpc>
+                <a:spcPct val="115000"/>
+              </a:lnSpc>
+              <a:spcAft>
+                <a:spcPts val="0"/>
+              </a:spcAft>
+            </a:pPr>
+            <a:r>
+              <a:rPr sz="1800" b="1">
+                <a:solidFill>
+                  <a:srgbClr val="2F6B34"/>
+                </a:solidFill>
+                <a:latin typeface="Arial"/>
+              </a:rPr>
+              <a:t>Cost: one more cheap call, no log-probs.</a:t>
             </a:r>
           </a:p>
         </p:txBody>
@@ -17630,14 +19008,56 @@
                 </a:solidFill>
                 <a:latin typeface="Georgia"/>
               </a:rPr>
-              <a:t>Do two cheap answers agree?</a:t>
+              <a:t>Do they work? Mostly, and they cover each other</a:t>
+            </a:r>
+          </a:p>
+        </p:txBody>
+      </p:sp>
+      <p:sp>
+        <p:nvSpPr>
+          <p:cNvPr id="5" name="TextBox 4"/>
+          <p:cNvSpPr txBox="1"/>
+          <p:nvPr/>
+        </p:nvSpPr>
+        <p:spPr>
+          <a:xfrm>
+            <a:off x="812800" y="1555750"/>
+            <a:ext cx="5080000" cy="254000"/>
+          </a:xfrm>
+          <a:prstGeom prst="rect">
+            <a:avLst/>
+          </a:prstGeom>
+          <a:noFill/>
+        </p:spPr>
+        <p:txBody>
+          <a:bodyPr wrap="square" lIns="0" rIns="0" tIns="0" bIns="0" anchor="t">
+            <a:spAutoFit/>
+          </a:bodyPr>
+          <a:lstStyle/>
+          <a:p>
+            <a:pPr algn="l">
+              <a:lnSpc>
+                <a:spcPct val="115000"/>
+              </a:lnSpc>
+              <a:spcAft>
+                <a:spcPts val="0"/>
+              </a:spcAft>
+            </a:pPr>
+            <a:r>
+              <a:rPr sz="2200" b="1">
+                <a:solidFill>
+                  <a:srgbClr val="00175A"/>
+                </a:solidFill>
+                <a:latin typeface="Arial"/>
+              </a:rPr>
+              <a:t>Confidence: direct answer accuracy</a:t>
             </a:r>
           </a:p>
         </p:txBody>
       </p:sp>
       <p:pic>
         <p:nvPicPr>
-          <p:cNvPr id="5" name="Picture 4" descr="c_agree.png"/>
+          <p:cNvPr id="6" name="Picture 5" descr="c_sig_conf.png"/>
           <p:cNvPicPr>
             <a:picLocks noChangeAspect="1"/>
           </p:cNvPicPr>
@@ -17651,8 +19071,8 @@
         </p:blipFill>
         <p:spPr>
           <a:xfrm>
-            <a:off x="812800" y="1922942"/>
-            <a:ext cx="7302500" cy="3901114"/>
+            <a:off x="1650011" y="2019300"/>
+            <a:ext cx="3405577" cy="2349500"/>
           </a:xfrm>
           <a:prstGeom prst="rect">
             <a:avLst/>
@@ -17661,101 +19081,228 @@
       </p:pic>
       <p:sp>
         <p:nvSpPr>
-          <p:cNvPr id="6" name="Rounded Rectangle 5"/>
+          <p:cNvPr id="7" name="TextBox 6"/>
+          <p:cNvSpPr txBox="1"/>
+          <p:nvPr/>
+        </p:nvSpPr>
+        <p:spPr>
+          <a:xfrm>
+            <a:off x="6299200" y="1555750"/>
+            <a:ext cx="5080000" cy="254000"/>
+          </a:xfrm>
+          <a:prstGeom prst="rect">
+            <a:avLst/>
+          </a:prstGeom>
+          <a:noFill/>
+        </p:spPr>
+        <p:txBody>
+          <a:bodyPr wrap="square" lIns="0" rIns="0" tIns="0" bIns="0" anchor="t">
+            <a:spAutoFit/>
+          </a:bodyPr>
+          <a:lstStyle/>
+          <a:p>
+            <a:pPr algn="l">
+              <a:lnSpc>
+                <a:spcPct val="115000"/>
+              </a:lnSpc>
+              <a:spcAft>
+                <a:spcPts val="0"/>
+              </a:spcAft>
+            </a:pPr>
+            <a:r>
+              <a:rPr sz="2200" b="1">
+                <a:solidFill>
+                  <a:srgbClr val="00175A"/>
+                </a:solidFill>
+                <a:latin typeface="Arial"/>
+              </a:rPr>
+              <a:t>Agreement: single agent accuracy</a:t>
+            </a:r>
+          </a:p>
+        </p:txBody>
+      </p:sp>
+      <p:pic>
+        <p:nvPicPr>
+          <p:cNvPr id="8" name="Picture 7" descr="c_sig_agree.png"/>
+          <p:cNvPicPr>
+            <a:picLocks noChangeAspect="1"/>
+          </p:cNvPicPr>
+          <p:nvPr/>
+        </p:nvPicPr>
+        <p:blipFill>
+          <a:blip r:embed="rId4"/>
+          <a:stretch>
+            <a:fillRect/>
+          </a:stretch>
+        </p:blipFill>
+        <p:spPr>
+          <a:xfrm>
+            <a:off x="7136411" y="2019300"/>
+            <a:ext cx="3405577" cy="2349500"/>
+          </a:xfrm>
+          <a:prstGeom prst="rect">
+            <a:avLst/>
+          </a:prstGeom>
+        </p:spPr>
+      </p:pic>
+      <p:sp>
+        <p:nvSpPr>
+          <p:cNvPr id="9" name="TextBox 8"/>
+          <p:cNvSpPr txBox="1"/>
+          <p:nvPr/>
+        </p:nvSpPr>
+        <p:spPr>
+          <a:xfrm>
+            <a:off x="812800" y="4413250"/>
+            <a:ext cx="5080000" cy="254000"/>
+          </a:xfrm>
+          <a:prstGeom prst="rect">
+            <a:avLst/>
+          </a:prstGeom>
+          <a:noFill/>
+        </p:spPr>
+        <p:txBody>
+          <a:bodyPr wrap="square" lIns="0" rIns="0" tIns="0" bIns="0" anchor="t">
+            <a:spAutoFit/>
+          </a:bodyPr>
+          <a:lstStyle/>
+          <a:p>
+            <a:pPr algn="l">
+              <a:lnSpc>
+                <a:spcPct val="115000"/>
+              </a:lnSpc>
+              <a:spcAft>
+                <a:spcPts val="0"/>
+              </a:spcAft>
+            </a:pPr>
+            <a:r>
+              <a:rPr sz="1800" b="0">
+                <a:solidFill>
+                  <a:srgbClr val="333B47"/>
+                </a:solidFill>
+                <a:latin typeface="Arial"/>
+              </a:rPr>
+              <a:t>Mostly helps. </a:t>
+            </a:r>
+            <a:r>
+              <a:rPr sz="1800" b="1">
+                <a:solidFill>
+                  <a:srgbClr val="B03A2E"/>
+                </a:solidFill>
+                <a:latin typeface="Arial"/>
+              </a:rPr>
+              <a:t>Backwards on 3 (Gemma).</a:t>
+            </a:r>
+          </a:p>
+        </p:txBody>
+      </p:sp>
+      <p:sp>
+        <p:nvSpPr>
+          <p:cNvPr id="10" name="TextBox 9"/>
+          <p:cNvSpPr txBox="1"/>
+          <p:nvPr/>
+        </p:nvSpPr>
+        <p:spPr>
+          <a:xfrm>
+            <a:off x="6299200" y="4413250"/>
+            <a:ext cx="5080000" cy="254000"/>
+          </a:xfrm>
+          <a:prstGeom prst="rect">
+            <a:avLst/>
+          </a:prstGeom>
+          <a:noFill/>
+        </p:spPr>
+        <p:txBody>
+          <a:bodyPr wrap="square" lIns="0" rIns="0" tIns="0" bIns="0" anchor="t">
+            <a:spAutoFit/>
+          </a:bodyPr>
+          <a:lstStyle/>
+          <a:p>
+            <a:pPr algn="l">
+              <a:lnSpc>
+                <a:spcPct val="115000"/>
+              </a:lnSpc>
+              <a:spcAft>
+                <a:spcPts val="0"/>
+              </a:spcAft>
+            </a:pPr>
+            <a:r>
+              <a:rPr sz="1800" b="0">
+                <a:solidFill>
+                  <a:srgbClr val="333B47"/>
+                </a:solidFill>
+                <a:latin typeface="Arial"/>
+              </a:rPr>
+              <a:t>Mostly helps, </a:t>
+            </a:r>
+            <a:r>
+              <a:rPr sz="1800" b="1">
+                <a:solidFill>
+                  <a:srgbClr val="2F6B34"/>
+                </a:solidFill>
+                <a:latin typeface="Arial"/>
+              </a:rPr>
+              <a:t>including those 3.</a:t>
+            </a:r>
+          </a:p>
+        </p:txBody>
+      </p:sp>
+      <p:sp>
+        <p:nvSpPr>
+          <p:cNvPr id="11" name="TextBox 10"/>
+          <p:cNvSpPr txBox="1"/>
+          <p:nvPr/>
+        </p:nvSpPr>
+        <p:spPr>
+          <a:xfrm>
+            <a:off x="812800" y="4749800"/>
+            <a:ext cx="10566400" cy="254000"/>
+          </a:xfrm>
+          <a:prstGeom prst="rect">
+            <a:avLst/>
+          </a:prstGeom>
+          <a:noFill/>
+        </p:spPr>
+        <p:txBody>
+          <a:bodyPr wrap="square" lIns="0" rIns="0" tIns="0" bIns="0" anchor="t">
+            <a:spAutoFit/>
+          </a:bodyPr>
+          <a:lstStyle/>
+          <a:p>
+            <a:pPr algn="l">
+              <a:lnSpc>
+                <a:spcPct val="115000"/>
+              </a:lnSpc>
+              <a:spcAft>
+                <a:spcPts val="0"/>
+              </a:spcAft>
+            </a:pPr>
+            <a:r>
+              <a:rPr sz="1900" b="1">
+                <a:solidFill>
+                  <a:srgbClr val="00175A"/>
+                </a:solidFill>
+                <a:latin typeface="Arial"/>
+              </a:rPr>
+              <a:t>When confidence is backwards, CLIMB still holds:</a:t>
+            </a:r>
+          </a:p>
+        </p:txBody>
+      </p:sp>
+      <p:sp>
+        <p:nvSpPr>
+          <p:cNvPr id="12" name="Rounded Rectangle 11"/>
           <p:cNvSpPr/>
           <p:nvPr/>
         </p:nvSpPr>
         <p:spPr>
           <a:xfrm>
-            <a:off x="8445500" y="2095500"/>
-            <a:ext cx="2933700" cy="1651000"/>
+            <a:off x="812800" y="5156200"/>
+            <a:ext cx="3378200" cy="1003300"/>
           </a:xfrm>
           <a:prstGeom prst="roundRect">
             <a:avLst>
-              <a:gd name="adj" fmla="val 6923"/>
-            </a:avLst>
-          </a:prstGeom>
-          <a:solidFill>
-            <a:srgbClr val="E3ECE2"/>
-          </a:solidFill>
-          <a:ln w="12700">
-            <a:solidFill>
-              <a:srgbClr val="D3DCE8"/>
-            </a:solidFill>
-          </a:ln>
-          <a:effectLst/>
-        </p:spPr>
-        <p:style>
-          <a:lnRef idx="1">
-            <a:schemeClr val="accent1"/>
-          </a:lnRef>
-          <a:fillRef idx="3">
-            <a:schemeClr val="accent1"/>
-          </a:fillRef>
-          <a:effectRef idx="2">
-            <a:schemeClr val="accent1"/>
-          </a:effectRef>
-          <a:fontRef idx="minor">
-            <a:schemeClr val="lt1"/>
-          </a:fontRef>
-        </p:style>
-        <p:txBody>
-          <a:bodyPr rtlCol="0" anchor="ctr" wrap="square" lIns="190500" rIns="190500" tIns="190500" bIns="190500"/>
-          <a:lstStyle/>
-          <a:p>
-            <a:pPr algn="l">
-              <a:lnSpc>
-                <a:spcPct val="100000"/>
-              </a:lnSpc>
-              <a:spcAft>
-                <a:spcPts val="600"/>
-              </a:spcAft>
-            </a:pPr>
-            <a:r>
-              <a:rPr sz="3600" b="1">
-                <a:solidFill>
-                  <a:srgbClr val="2F6B34"/>
-                </a:solidFill>
-                <a:latin typeface="Georgia"/>
-              </a:rPr>
-              <a:t>agree</a:t>
-            </a:r>
-          </a:p>
-          <a:p>
-            <a:pPr algn="l">
-              <a:lnSpc>
-                <a:spcPct val="115000"/>
-              </a:lnSpc>
-              <a:spcAft>
-                <a:spcPts val="0"/>
-              </a:spcAft>
-            </a:pPr>
-            <a:r>
-              <a:rPr sz="1700" b="0">
-                <a:solidFill>
-                  <a:srgbClr val="333B47"/>
-                </a:solidFill>
-                <a:latin typeface="Arial"/>
-              </a:rPr>
-              <a:t>→ the single agent is usually right</a:t>
-            </a:r>
-          </a:p>
-        </p:txBody>
-      </p:sp>
-      <p:sp>
-        <p:nvSpPr>
-          <p:cNvPr id="7" name="Rounded Rectangle 6"/>
-          <p:cNvSpPr/>
-          <p:nvPr/>
-        </p:nvSpPr>
-        <p:spPr>
-          <a:xfrm>
-            <a:off x="8445500" y="4000500"/>
-            <a:ext cx="2933700" cy="1651000"/>
-          </a:xfrm>
-          <a:prstGeom prst="roundRect">
-            <a:avLst>
-              <a:gd name="adj" fmla="val 6923"/>
+              <a:gd name="adj" fmla="val 10000"/>
             </a:avLst>
           </a:prstGeom>
           <a:solidFill>
@@ -17781,7 +19328,7 @@
           </a:fontRef>
         </p:style>
         <p:txBody>
-          <a:bodyPr rtlCol="0" anchor="ctr" wrap="square" lIns="190500" rIns="190500" tIns="190500" bIns="190500"/>
+          <a:bodyPr rtlCol="0" anchor="ctr" wrap="square" lIns="114300" rIns="114300" tIns="114300" bIns="114300"/>
           <a:lstStyle/>
           <a:p>
             <a:pPr algn="l">
@@ -17789,17 +19336,17 @@
                 <a:spcPct val="115000"/>
               </a:lnSpc>
               <a:spcAft>
-                <a:spcPts val="800"/>
-              </a:spcAft>
-            </a:pPr>
-            <a:r>
-              <a:rPr sz="2600" b="1">
+                <a:spcPts val="400"/>
+              </a:spcAft>
+            </a:pPr>
+            <a:r>
+              <a:rPr sz="1900" b="1">
                 <a:solidFill>
                   <a:srgbClr val="66B2F0"/>
                 </a:solidFill>
                 <a:latin typeface="Arial"/>
               </a:rPr>
-              <a:t>One score</a:t>
+              <a:t>1  Agreement first</a:t>
             </a:r>
           </a:p>
           <a:p>
@@ -17812,13 +19359,175 @@
               </a:spcAft>
             </a:pPr>
             <a:r>
-              <a:rPr sz="1700" b="0">
+              <a:rPr sz="1500" b="0">
                 <a:solidFill>
                   <a:srgbClr val="F6F8FB"/>
                 </a:solidFill>
                 <a:latin typeface="Arial"/>
               </a:rPr>
-              <a:t>agreeing tasks first, then by confidence</a:t>
+              <a:t>Option B ranks by agreement. Confidence only breaks ties.</a:t>
+            </a:r>
+          </a:p>
+        </p:txBody>
+      </p:sp>
+      <p:sp>
+        <p:nvSpPr>
+          <p:cNvPr id="13" name="Rounded Rectangle 12"/>
+          <p:cNvSpPr/>
+          <p:nvPr/>
+        </p:nvSpPr>
+        <p:spPr>
+          <a:xfrm>
+            <a:off x="4406900" y="5156200"/>
+            <a:ext cx="3378200" cy="1003300"/>
+          </a:xfrm>
+          <a:prstGeom prst="roundRect">
+            <a:avLst>
+              <a:gd name="adj" fmla="val 10000"/>
+            </a:avLst>
+          </a:prstGeom>
+          <a:solidFill>
+            <a:srgbClr val="00175A"/>
+          </a:solidFill>
+          <a:ln>
+            <a:noFill/>
+          </a:ln>
+          <a:effectLst/>
+        </p:spPr>
+        <p:style>
+          <a:lnRef idx="1">
+            <a:schemeClr val="accent1"/>
+          </a:lnRef>
+          <a:fillRef idx="3">
+            <a:schemeClr val="accent1"/>
+          </a:fillRef>
+          <a:effectRef idx="2">
+            <a:schemeClr val="accent1"/>
+          </a:effectRef>
+          <a:fontRef idx="minor">
+            <a:schemeClr val="lt1"/>
+          </a:fontRef>
+        </p:style>
+        <p:txBody>
+          <a:bodyPr rtlCol="0" anchor="ctr" wrap="square" lIns="114300" rIns="114300" tIns="114300" bIns="114300"/>
+          <a:lstStyle/>
+          <a:p>
+            <a:pPr algn="l">
+              <a:lnSpc>
+                <a:spcPct val="115000"/>
+              </a:lnSpc>
+              <a:spcAft>
+                <a:spcPts val="400"/>
+              </a:spcAft>
+            </a:pPr>
+            <a:r>
+              <a:rPr sz="1900" b="1">
+                <a:solidFill>
+                  <a:srgbClr val="66B2F0"/>
+                </a:solidFill>
+                <a:latin typeface="Arial"/>
+              </a:rPr>
+              <a:t>2  The check catches it</a:t>
+            </a:r>
+          </a:p>
+          <a:p>
+            <a:pPr algn="l">
+              <a:lnSpc>
+                <a:spcPct val="115000"/>
+              </a:lnSpc>
+              <a:spcAft>
+                <a:spcPts val="0"/>
+              </a:spcAft>
+            </a:pPr>
+            <a:r>
+              <a:rPr sz="1500" b="0">
+                <a:solidFill>
+                  <a:srgbClr val="F6F8FB"/>
+                </a:solidFill>
+                <a:latin typeface="Arial"/>
+              </a:rPr>
+              <a:t>A backwards score fails the test early. It is not deployed.</a:t>
+            </a:r>
+          </a:p>
+        </p:txBody>
+      </p:sp>
+      <p:sp>
+        <p:nvSpPr>
+          <p:cNvPr id="14" name="Rounded Rectangle 13"/>
+          <p:cNvSpPr/>
+          <p:nvPr/>
+        </p:nvSpPr>
+        <p:spPr>
+          <a:xfrm>
+            <a:off x="8001000" y="5156200"/>
+            <a:ext cx="3378200" cy="1003300"/>
+          </a:xfrm>
+          <a:prstGeom prst="roundRect">
+            <a:avLst>
+              <a:gd name="adj" fmla="val 10000"/>
+            </a:avLst>
+          </a:prstGeom>
+          <a:solidFill>
+            <a:srgbClr val="00175A"/>
+          </a:solidFill>
+          <a:ln>
+            <a:noFill/>
+          </a:ln>
+          <a:effectLst/>
+        </p:spPr>
+        <p:style>
+          <a:lnRef idx="1">
+            <a:schemeClr val="accent1"/>
+          </a:lnRef>
+          <a:fillRef idx="3">
+            <a:schemeClr val="accent1"/>
+          </a:fillRef>
+          <a:effectRef idx="2">
+            <a:schemeClr val="accent1"/>
+          </a:effectRef>
+          <a:fontRef idx="minor">
+            <a:schemeClr val="lt1"/>
+          </a:fontRef>
+        </p:style>
+        <p:txBody>
+          <a:bodyPr rtlCol="0" anchor="ctr" wrap="square" lIns="114300" rIns="114300" tIns="114300" bIns="114300"/>
+          <a:lstStyle/>
+          <a:p>
+            <a:pPr algn="l">
+              <a:lnSpc>
+                <a:spcPct val="115000"/>
+              </a:lnSpc>
+              <a:spcAft>
+                <a:spcPts val="400"/>
+              </a:spcAft>
+            </a:pPr>
+            <a:r>
+              <a:rPr sz="1900" b="1">
+                <a:solidFill>
+                  <a:srgbClr val="66B2F0"/>
+                </a:solidFill>
+                <a:latin typeface="Arial"/>
+              </a:rPr>
+              <a:t>3  Worst case: the team</a:t>
+            </a:r>
+          </a:p>
+          <a:p>
+            <a:pPr algn="l">
+              <a:lnSpc>
+                <a:spcPct val="115000"/>
+              </a:lnSpc>
+              <a:spcAft>
+                <a:spcPts val="0"/>
+              </a:spcAft>
+            </a:pPr>
+            <a:r>
+              <a:rPr sz="1500" b="0">
+                <a:solidFill>
+                  <a:srgbClr val="F6F8FB"/>
+                </a:solidFill>
+                <a:latin typeface="Arial"/>
+              </a:rPr>
+              <a:t>Less saving, no lost accuracy. Gemma: 69–96% of tokens.</a:t>
             </a:r>
           </a:p>
         </p:txBody>

--- a/slides/CLIMB_talk.pptx
+++ b/slides/CLIMB_talk.pptx
@@ -12,13 +12,15 @@
     <p:sldId id="261" r:id="rId13"/>
     <p:sldId id="263" r:id="rId15"/>
     <p:sldId id="264" r:id="rId16"/>
+    <p:sldId id="283" r:id="rId35"/>
     <p:sldId id="266" r:id="rId18"/>
+    <p:sldId id="284" r:id="rId36"/>
     <p:sldId id="267" r:id="rId19"/>
     <p:sldId id="268" r:id="rId20"/>
     <p:sldId id="269" r:id="rId21"/>
+    <p:sldId id="285" r:id="rId37"/>
     <p:sldId id="271" r:id="rId23"/>
     <p:sldId id="277" r:id="rId29"/>
-    <p:sldId id="278" r:id="rId30"/>
     <p:sldId id="279" r:id="rId31"/>
     <p:sldId id="280" r:id="rId32"/>
     <p:sldId id="281" r:id="rId33"/>
@@ -26,6 +28,7 @@
     <p:sldId id="260" r:id="rId12"/>
     <p:sldId id="262" r:id="rId14"/>
     <p:sldId id="265" r:id="rId17"/>
+    <p:sldId id="278" r:id="rId30"/>
     <p:sldId id="270" r:id="rId22"/>
     <p:sldId id="272" r:id="rId24"/>
     <p:sldId id="273" r:id="rId25"/>
@@ -668,7 +671,7 @@
           <a:lstStyle/>
           <a:p>
             <a:r>
-              <a:t>Question three: how do we know a line is safe? CLIMB turns this into a promise. You choose how much accuracy you can give up, say 5 points. CLIMB checks candidate rules on a few hundred labelled tasks and returns the cheapest rule that keeps the promise, with 90 percent probability. If no cheaper rule qualifies, it always calls the team, so the worst case is no savings, not lost accuracy.</a:t>
+              <a:t>How do we replace guessing with a promise? You pick only the tolerance, say 5 points, and the data picks the threshold. Here is the workflow. Take the labelled tasks and split them in two. On the calibration half, run the betting test on every candidate threshold, from strict to loose, and stop at the first failure. The thresholds before that failure are certified. Deploy the cheapest certified one. If none passes, always call the team. Then check on the test half, which calibration never saw: did the deployed threshold keep the loss within 5 points, and how many tokens did it save? In our experiments we repeat this split 200 times. In deployment, you only need the calibration half: the test half is simply your future tasks. Next, how the betting test works.</a:t>
             </a:r>
           </a:p>
         </p:txBody>
@@ -738,7 +741,7 @@
           <a:lstStyle/>
           <a:p>
             <a:r>
-              <a:t>Here is the heart of CLIMB: the betting test. Imagine a gambler who bets that a rule is safe. He starts with one dollar. We reveal the labelled tasks one by one, and compare the rule with the team on each. If both give the same result, which is most tasks, his money grows a little, times 1.03. If the rule loses an answer the team got right, he loses a lot, about half. If the rule saves an answer the team broke, he wins a lot, times 1.5. If his money ever reaches 20 dollars, the rule passes. If it never does, the rule fails.</a:t>
+              <a:t>Here is how CLIMB checks a threshold: the betting test. Imagine a gambler who bets that a threshold is safe. He starts with one dollar. We reveal the labelled tasks one by one, and compare the threshold's answer with the team's on each. If both give the same result, which is most tasks, his money grows a little, times 1.03. If the threshold stops on a wrong cheap answer the team got right, he loses a lot, about half. If it keeps a right cheap answer the team broke, he wins a lot, times 1.5. If his money ever reaches 20 dollars, the threshold passes. If it never does, it fails.</a:t>
             </a:r>
           </a:p>
         </p:txBody>
@@ -808,7 +811,7 @@
           <a:lstStyle/>
           <a:p>
             <a:r>
-              <a:t>Why does this tell good rules from bad ones? Average the multiplier over tasks: it is one plus the bet size times the tolerance minus the rule's true loss. A good rule loses less than the tolerance, so on average each task multiplies the money by more than one, and it grows. A bad rule loses more, so each task multiplies it by less than one, and it shrinks. On the chart, real rules from gpt-oss-120b on MuSiQue: the green one loses half a point and gets rich fast, the blue one loses 2 points and passes more slowly, the red one loses 6 points, more than the 5 allowed, and goes broke. The bet size is set from the earlier tasks only, never from the task being revealed.</a:t>
+              <a:t>Why does this tell safe thresholds from unsafe ones? Average the multiplier over tasks: it is one plus the bet size times the tolerance minus the threshold's true loss. A safe threshold loses less than the tolerance, so on average each task multiplies the money by more than one, and it grows. An unsafe one loses more, so each task multiplies it by less than one, and it shrinks. On the chart, three real thresholds from gpt-oss-120b on MuSiQue: the green one loses half a point and gets rich fast, the blue one loses 2 points and passes more slowly, the red one loses 6 points, more than the 5 allowed, and goes broke. The bet size is set from the earlier tasks only, never from the task being revealed.</a:t>
             </a:r>
           </a:p>
         </p:txBody>
@@ -878,7 +881,7 @@
           <a:lstStyle/>
           <a:p>
             <a:r>
-              <a:t>Why should reaching 20 convince us? Suppose the rule is actually bad, so it loses more than the tolerance. Then every bet loses money on average, so the gambler's average wealth stays at most one dollar. His money can never go negative. If he reached 20 dollars more than 1 time in 20, those cases alone would push his average above one dollar. That is impossible. So a bad rule passes at most 5 percent of the time. Twenty is just one over five percent. Stopping as soon as he reaches 20 is covered too: freeze the money there and the same argument holds. We check two families of rules, each at 5 percent, so 90 percent overall. A pass means we accept the rule and are wrong at most 5 percent of the time, like a driving test: passing gets you a licence, it does not prove you can drive.</a:t>
+              <a:t>Why should reaching 20 convince us? Suppose the threshold is actually unsafe, so it loses more than the tolerance. Then every bet loses money on average, so the gambler's average wealth stays at most one dollar. His money can never go negative. If he reached 20 dollars more than 1 time in 20, those cases alone would push his average above one dollar. That is impossible. So an unsafe threshold passes at most 5 percent of the time. Twenty is just one over five percent. Stopping as soon as he reaches 20 is covered too: freeze the money there and the same argument holds. We check two families of rules, each at 5 percent, so 90 percent overall. A pass means we accept the threshold and are wrong at most 5 percent of the time, like a driving test: passing gets you a licence, it does not prove you can drive.</a:t>
             </a:r>
           </a:p>
         </p:txBody>
@@ -1018,7 +1021,7 @@
           <a:lstStyle/>
           <a:p>
             <a:r>
-              <a:t>Now many rules. We order them from safe to risky. Moving right, more tasks stop early: cheaper but riskier. We run the betting test on each, in this order, and stop at the first failure. Then we deploy the cheapest one that passed, the star, at 57 percent of the team's tokens. Because we stop at the first failure, testing many rules adds no extra risk: to pass a bad rule, the first bad rule in the line would have to pass, and that happens at most 5 percent of the time. This is the direct-answer family. The same runs for the two-rung family, and CLIMB keeps the cheaper one.</a:t>
+              <a:t>Putting it together, this is how CLIMB sets the threshold. Each dot is one candidate threshold. On the left, a strict threshold: almost every task goes to the team. Moving right, the threshold gets looser, more tasks stop early, cheaper but riskier. We run the betting test on each, from strict to loose, and stop at the first failure. The threshold we deploy is the loosest one that passed, the star, at 57 percent of the team's tokens. Nobody picked it by hand: it comes from your tolerance and your data. On another model or task, the same steps give a different threshold. Stopping at the first failure means testing many thresholds adds no extra risk: to pass an unsafe one, the first unsafe one in the line would have to pass, and that happens at most 5 percent of the time. The same runs for the two-rung family, and CLIMB keeps the cheaper one.</a:t>
             </a:r>
           </a:p>
         </p:txBody>
@@ -1858,7 +1861,147 @@
           <a:lstStyle/>
           <a:p>
             <a:r>
-              <a:t>In one slide. Agent teams are more accurate, but they cost several times the tokens and sometimes break right answers. CLIMB tries cheap answers first and calls the team only when a cheap answer looks unreliable. You set how much accuracy you can lose. A betting test on a few hundred labelled tasks certifies the cheapest rule that keeps this promise, with 90 percent probability. Across three models and four benchmarks it saves 38 to 65 percent of tokens, and the promise broke in at most 2 percent of splits. For Amex, it can sit in front of any multi-agent workflow.</a:t>
+              <a:t>In one slide. Agent teams are more accurate, but they cost several times the tokens and sometimes break right answers. CLIMB tries cheap answers first and calls the team only when a cheap answer looks unreliable. You set how much accuracy you can lose, and the data sets the threshold: a betting test on a few hundred labelled tasks certifies the cheapest threshold that keeps this promise, with 90 percent probability. Across three models and four benchmarks it saves 38 to 65 percent of tokens, and the promise broke in at most 2 percent of splits. For Amex, it can sit in front of any multi-agent workflow.</a:t>
+            </a:r>
+          </a:p>
+        </p:txBody>
+      </p:sp>
+      <p:sp>
+        <p:nvSpPr>
+          <p:cNvPr id="4" name="Slide Number Placeholder 3"/>
+          <p:cNvSpPr>
+            <a:spLocks noGrp="1"/>
+          </p:cNvSpPr>
+          <p:nvPr>
+            <p:ph type="sldNum" idx="5" sz="quarter"/>
+          </p:nvPr>
+        </p:nvSpPr>
+        <p:spPr/>
+      </p:sp>
+    </p:spTree>
+  </p:cSld>
+  <p:clrMapOvr>
+    <a:masterClrMapping/>
+  </p:clrMapOvr>
+</p:notes>
+</file>
+
+<file path=ppt/notesSlides/notesSlide28.xml><?xml version="1.0" encoding="utf-8"?>
+<p:notes xmlns:a="http://schemas.openxmlformats.org/drawingml/2006/main" xmlns:p="http://schemas.openxmlformats.org/presentationml/2006/main" xmlns:r="http://schemas.openxmlformats.org/officeDocument/2006/relationships">
+  <p:cSld>
+    <p:spTree>
+      <p:nvGrpSpPr>
+        <p:cNvPr id="1" name=""/>
+        <p:cNvGrpSpPr/>
+        <p:nvPr/>
+      </p:nvGrpSpPr>
+      <p:grpSpPr>
+        <a:xfrm>
+          <a:off x="0" y="0"/>
+          <a:ext cx="0" cy="0"/>
+          <a:chOff x="0" y="0"/>
+          <a:chExt cx="0" cy="0"/>
+        </a:xfrm>
+      </p:grpSpPr>
+      <p:sp>
+        <p:nvSpPr>
+          <p:cNvPr id="2" name="Slide Image Placeholder 1"/>
+          <p:cNvSpPr>
+            <a:spLocks noGrp="1"/>
+          </p:cNvSpPr>
+          <p:nvPr>
+            <p:ph type="sldImg" idx="2"/>
+          </p:nvPr>
+        </p:nvSpPr>
+        <p:spPr/>
+      </p:sp>
+      <p:sp>
+        <p:nvSpPr>
+          <p:cNvPr id="3" name="Notes Placeholder 2"/>
+          <p:cNvSpPr>
+            <a:spLocks noGrp="1"/>
+          </p:cNvSpPr>
+          <p:nvPr>
+            <p:ph type="body" idx="3" sz="quarter"/>
+          </p:nvPr>
+        </p:nvSpPr>
+        <p:spPr/>
+        <p:txBody>
+          <a:bodyPr/>
+          <a:lstStyle/>
+          <a:p>
+            <a:r>
+              <a:t>Now step two, the threshold. Once we have a score, where do we set the line? Two shortcuts come to mind, and both break the promise. Left: fix one confidence threshold for every setting, chosen so its average cost matches CLIMB. It is fine on most settings, but loses 8 to 16 points on four of them. A threshold that is safe on all four gpt-oss-20b benchmarks loses up to 16 points on the other two models. The right threshold depends on the model and the task. Right: tune the threshold on each setting's own data, picking the cheapest one whose loss on the sample is within 5 points. A threshold tuned to the edge on one sample tends to cross it on the next: it breaks the promise on 31 percent of splits. So we need a threshold set from each setting's data, with a guarantee.</a:t>
+            </a:r>
+          </a:p>
+        </p:txBody>
+      </p:sp>
+      <p:sp>
+        <p:nvSpPr>
+          <p:cNvPr id="4" name="Slide Number Placeholder 3"/>
+          <p:cNvSpPr>
+            <a:spLocks noGrp="1"/>
+          </p:cNvSpPr>
+          <p:nvPr>
+            <p:ph type="sldNum" idx="5" sz="quarter"/>
+          </p:nvPr>
+        </p:nvSpPr>
+        <p:spPr/>
+      </p:sp>
+    </p:spTree>
+  </p:cSld>
+  <p:clrMapOvr>
+    <a:masterClrMapping/>
+  </p:clrMapOvr>
+</p:notes>
+</file>
+
+<file path=ppt/notesSlides/notesSlide29.xml><?xml version="1.0" encoding="utf-8"?>
+<p:notes xmlns:a="http://schemas.openxmlformats.org/drawingml/2006/main" xmlns:p="http://schemas.openxmlformats.org/presentationml/2006/main" xmlns:r="http://schemas.openxmlformats.org/officeDocument/2006/relationships">
+  <p:cSld>
+    <p:spTree>
+      <p:nvGrpSpPr>
+        <p:cNvPr id="1" name=""/>
+        <p:cNvGrpSpPr/>
+        <p:nvPr/>
+      </p:nvGrpSpPr>
+      <p:grpSpPr>
+        <a:xfrm>
+          <a:off x="0" y="0"/>
+          <a:ext cx="0" cy="0"/>
+          <a:chOff x="0" y="0"/>
+          <a:chExt cx="0" cy="0"/>
+        </a:xfrm>
+      </p:grpSpPr>
+      <p:sp>
+        <p:nvSpPr>
+          <p:cNvPr id="2" name="Slide Image Placeholder 1"/>
+          <p:cNvSpPr>
+            <a:spLocks noGrp="1"/>
+          </p:cNvSpPr>
+          <p:nvPr>
+            <p:ph type="sldImg" idx="2"/>
+          </p:nvPr>
+        </p:nvSpPr>
+        <p:spPr/>
+      </p:sp>
+      <p:sp>
+        <p:nvSpPr>
+          <p:cNvPr id="3" name="Notes Placeholder 2"/>
+          <p:cNvSpPr>
+            <a:spLocks noGrp="1"/>
+          </p:cNvSpPr>
+          <p:nvPr>
+            <p:ph type="body" idx="3" sz="quarter"/>
+          </p:nvPr>
+        </p:nvSpPr>
+        <p:spPr/>
+        <p:txBody>
+          <a:bodyPr/>
+          <a:lstStyle/>
+          <a:p>
+            <a:r>
+              <a:t>Why a betting test? We need a test that, on a few hundred labelled tasks, accepts an unsafe threshold at most 5 percent of the time. Three things make this hard here. First, the loss is signed: a cheap answer can lose a right answer, but it can also save one the team breaks, and teams break up to 9 percent. Classic bounds such as Hoeffding have to cover the whole range from minus one to one and certify nothing. Ignoring the saves throws that credit away. Second, most tasks have loss zero, so the loss varies little. A good test should use that. Third, we test many thresholds, and splitting the 5 percent among them would make each test much stricter. The betting test handles all three. It bets on the signed loss, its bet size adapts to the variance it has seen, and in a strict-to-loose sequence each test can use the full 5 percent. The guarantee needs no model of the data, only that calibration tasks look like deployment tasks. On the chart, every test is valid, but CLIMB's test certifies a threshold at 62 percent of the team's tokens, against 79 to 100 for the others.</a:t>
             </a:r>
           </a:p>
         </p:txBody>
@@ -1953,6 +2096,76 @@
 </p:notes>
 </file>
 
+<file path=ppt/notesSlides/notesSlide30.xml><?xml version="1.0" encoding="utf-8"?>
+<p:notes xmlns:a="http://schemas.openxmlformats.org/drawingml/2006/main" xmlns:p="http://schemas.openxmlformats.org/presentationml/2006/main" xmlns:r="http://schemas.openxmlformats.org/officeDocument/2006/relationships">
+  <p:cSld>
+    <p:spTree>
+      <p:nvGrpSpPr>
+        <p:cNvPr id="1" name=""/>
+        <p:cNvGrpSpPr/>
+        <p:nvPr/>
+      </p:nvGrpSpPr>
+      <p:grpSpPr>
+        <a:xfrm>
+          <a:off x="0" y="0"/>
+          <a:ext cx="0" cy="0"/>
+          <a:chOff x="0" y="0"/>
+          <a:chExt cx="0" cy="0"/>
+        </a:xfrm>
+      </p:grpSpPr>
+      <p:sp>
+        <p:nvSpPr>
+          <p:cNvPr id="2" name="Slide Image Placeholder 1"/>
+          <p:cNvSpPr>
+            <a:spLocks noGrp="1"/>
+          </p:cNvSpPr>
+          <p:nvPr>
+            <p:ph type="sldImg" idx="2"/>
+          </p:nvPr>
+        </p:nvSpPr>
+        <p:spPr/>
+      </p:sp>
+      <p:sp>
+        <p:nvSpPr>
+          <p:cNvPr id="3" name="Notes Placeholder 2"/>
+          <p:cNvSpPr>
+            <a:spLocks noGrp="1"/>
+          </p:cNvSpPr>
+          <p:nvPr>
+            <p:ph type="body" idx="3" sz="quarter"/>
+          </p:nvPr>
+        </p:nvSpPr>
+        <p:spPr/>
+        <p:txBody>
+          <a:bodyPr/>
+          <a:lstStyle/>
+          <a:p>
+            <a:r>
+              <a:t>Here is exactly what CLIMB does for one threshold. Take the calibration tasks in random order and start with one dollar. For each task, the threshold either stops early and keeps the cheap answer, or escalates and uses the team's answer. The loss is the team's correctness minus ours: plus one if we lost a right answer, minus one if we saved one, zero otherwise. An escalated task always has loss zero. The bet size is set from the earlier tasks only, never from the current one, and is capped so one loss at most halves the money. Multiply the money by one plus bet size times tolerance minus loss. In the example, with bet size 0.5 and a 5 point tolerance, task 3 loses a right answer and the money halves, task 4 saves one and it grows by half. If the money ever reaches 20 dollars, the threshold is certified and we move to the next, looser one. If it never does, we stop: no looser threshold is deployed. We run this for options A and B, each at 5 percent.</a:t>
+            </a:r>
+          </a:p>
+        </p:txBody>
+      </p:sp>
+      <p:sp>
+        <p:nvSpPr>
+          <p:cNvPr id="4" name="Slide Number Placeholder 3"/>
+          <p:cNvSpPr>
+            <a:spLocks noGrp="1"/>
+          </p:cNvSpPr>
+          <p:nvPr>
+            <p:ph type="sldNum" idx="5" sz="quarter"/>
+          </p:nvPr>
+        </p:nvSpPr>
+        <p:spPr/>
+      </p:sp>
+    </p:spTree>
+  </p:cSld>
+  <p:clrMapOvr>
+    <a:masterClrMapping/>
+  </p:clrMapOvr>
+</p:notes>
+</file>
+
 <file path=ppt/notesSlides/notesSlide4.xml><?xml version="1.0" encoding="utf-8"?>
 <p:notes xmlns:a="http://schemas.openxmlformats.org/drawingml/2006/main" xmlns:p="http://schemas.openxmlformats.org/presentationml/2006/main" xmlns:r="http://schemas.openxmlformats.org/officeDocument/2006/relationships">
   <p:cSld>
@@ -2138,7 +2351,7 @@
           <a:lstStyle/>
           <a:p>
             <a:r>
-              <a:t>Since the team is expensive and not always better, the idea is a ladder. Try the cheapest configuration first, a direct answer. If it looks right, stop. Otherwise try a single agent. Only if that also looks unreliable, call the full team. All three use the same model. The ladder itself is simple. The real question, and the rest of the method, is when a task should climb.</a:t>
+              <a:t>Since the team is expensive and not always better, the idea is a ladder. Try the cheapest configuration first, a direct answer. If it looks right, stop. Otherwise try a single agent. Only if that also looks unreliable, call the full team. All three use the same model. The ladder itself is simple. A task stops when a score is above a threshold. So the real question, and the rest of the talk, is: which score, and above all, which threshold?</a:t>
             </a:r>
           </a:p>
         </p:txBody>
@@ -5870,7 +6083,7 @@
                 </a:solidFill>
                 <a:latin typeface="Arial"/>
               </a:rPr>
-              <a:t>21</a:t>
+              <a:t>23</a:t>
             </a:r>
           </a:p>
         </p:txBody>
@@ -5938,7 +6151,7 @@
                 </a:solidFill>
                 <a:latin typeface="Arial"/>
               </a:rPr>
-              <a:t>HOW TO CLIMB · CHECK</a:t>
+              <a:t>STEP 2 · SETTING THE THRESHOLD</a:t>
             </a:r>
           </a:p>
         </p:txBody>
@@ -5980,25 +6193,925 @@
                 </a:solidFill>
                 <a:latin typeface="Georgia"/>
               </a:rPr>
-              <a:t>Replace guessing with a promise</a:t>
-            </a:r>
-          </a:p>
-        </p:txBody>
-      </p:sp>
-      <p:sp>
-        <p:nvSpPr>
-          <p:cNvPr id="4" name="Rounded Rectangle 3"/>
+              <a:t>Replace guessing with a promise: calibrate, then test</a:t>
+            </a:r>
+          </a:p>
+        </p:txBody>
+      </p:sp>
+      <p:sp>
+        <p:nvSpPr>
+          <p:cNvPr id="4" name="TextBox 3"/>
+          <p:cNvSpPr txBox="1"/>
+          <p:nvPr/>
+        </p:nvSpPr>
+        <p:spPr>
+          <a:xfrm>
+            <a:off x="812800" y="1435100"/>
+            <a:ext cx="10566400" cy="254000"/>
+          </a:xfrm>
+          <a:prstGeom prst="rect">
+            <a:avLst/>
+          </a:prstGeom>
+          <a:noFill/>
+        </p:spPr>
+        <p:txBody>
+          <a:bodyPr wrap="square" lIns="0" rIns="0" tIns="0" bIns="0" anchor="t">
+            <a:spAutoFit/>
+          </a:bodyPr>
+          <a:lstStyle/>
+          <a:p>
+            <a:pPr algn="l">
+              <a:lnSpc>
+                <a:spcPct val="115000"/>
+              </a:lnSpc>
+              <a:spcAft>
+                <a:spcPts val="0"/>
+              </a:spcAft>
+            </a:pPr>
+            <a:r>
+              <a:rPr sz="1800" b="1">
+                <a:solidFill>
+                  <a:srgbClr val="00175A"/>
+                </a:solidFill>
+                <a:latin typeface="Arial"/>
+              </a:rPr>
+              <a:t>You pick only ε, e.g. “lose at most 5 points”.  The data picks the threshold.</a:t>
+            </a:r>
+          </a:p>
+        </p:txBody>
+      </p:sp>
+      <p:sp>
+        <p:nvSpPr>
+          <p:cNvPr id="5" name="Rounded Rectangle 4"/>
           <p:cNvSpPr/>
           <p:nvPr/>
         </p:nvSpPr>
         <p:spPr>
           <a:xfrm>
-            <a:off x="812800" y="2095500"/>
-            <a:ext cx="3111500" cy="2032000"/>
+            <a:off x="812800" y="1968500"/>
+            <a:ext cx="1524000" cy="3619500"/>
           </a:xfrm>
           <a:prstGeom prst="roundRect">
             <a:avLst>
-              <a:gd name="adj" fmla="val 5625"/>
+              <a:gd name="adj" fmla="val 7500"/>
+            </a:avLst>
+          </a:prstGeom>
+          <a:solidFill>
+            <a:srgbClr val="E9EEF5"/>
+          </a:solidFill>
+          <a:ln w="25400">
+            <a:solidFill>
+              <a:srgbClr val="00175A"/>
+            </a:solidFill>
+          </a:ln>
+          <a:effectLst/>
+        </p:spPr>
+        <p:style>
+          <a:lnRef idx="1">
+            <a:schemeClr val="accent1"/>
+          </a:lnRef>
+          <a:fillRef idx="3">
+            <a:schemeClr val="accent1"/>
+          </a:fillRef>
+          <a:effectRef idx="2">
+            <a:schemeClr val="accent1"/>
+          </a:effectRef>
+          <a:fontRef idx="minor">
+            <a:schemeClr val="lt1"/>
+          </a:fontRef>
+        </p:style>
+        <p:txBody>
+          <a:bodyPr rtlCol="0" anchor="ctr" wrap="square" lIns="76200" rIns="76200" tIns="76200" bIns="76200"/>
+          <a:lstStyle/>
+          <a:p>
+            <a:pPr algn="ctr">
+              <a:lnSpc>
+                <a:spcPct val="115000"/>
+              </a:lnSpc>
+              <a:spcAft>
+                <a:spcPts val="800"/>
+              </a:spcAft>
+            </a:pPr>
+            <a:r>
+              <a:rPr sz="1800" b="1">
+                <a:solidFill>
+                  <a:srgbClr val="00175A"/>
+                </a:solidFill>
+                <a:latin typeface="Arial"/>
+              </a:rPr>
+              <a:t>Labelled tasks</a:t>
+            </a:r>
+          </a:p>
+          <a:p>
+            <a:pPr algn="ctr">
+              <a:lnSpc>
+                <a:spcPct val="115000"/>
+              </a:lnSpc>
+              <a:spcAft>
+                <a:spcPts val="0"/>
+              </a:spcAft>
+            </a:pPr>
+            <a:r>
+              <a:rPr sz="1400" b="0">
+                <a:solidFill>
+                  <a:srgbClr val="6B7480"/>
+                </a:solidFill>
+                <a:latin typeface="Arial"/>
+              </a:rPr>
+              <a:t>split in two at random</a:t>
+            </a:r>
+          </a:p>
+        </p:txBody>
+      </p:sp>
+      <p:sp>
+        <p:nvSpPr>
+          <p:cNvPr id="6" name="Rounded Rectangle 5"/>
+          <p:cNvSpPr/>
+          <p:nvPr/>
+        </p:nvSpPr>
+        <p:spPr>
+          <a:xfrm>
+            <a:off x="2730500" y="2222500"/>
+            <a:ext cx="1587500" cy="1079500"/>
+          </a:xfrm>
+          <a:prstGeom prst="roundRect">
+            <a:avLst>
+              <a:gd name="adj" fmla="val 10000"/>
+            </a:avLst>
+          </a:prstGeom>
+          <a:solidFill>
+            <a:srgbClr val="E6EBF4"/>
+          </a:solidFill>
+          <a:ln w="25400">
+            <a:solidFill>
+              <a:srgbClr val="00175A"/>
+            </a:solidFill>
+          </a:ln>
+          <a:effectLst/>
+        </p:spPr>
+        <p:style>
+          <a:lnRef idx="1">
+            <a:schemeClr val="accent1"/>
+          </a:lnRef>
+          <a:fillRef idx="3">
+            <a:schemeClr val="accent1"/>
+          </a:fillRef>
+          <a:effectRef idx="2">
+            <a:schemeClr val="accent1"/>
+          </a:effectRef>
+          <a:fontRef idx="minor">
+            <a:schemeClr val="lt1"/>
+          </a:fontRef>
+        </p:style>
+        <p:txBody>
+          <a:bodyPr rtlCol="0" anchor="ctr" wrap="square" lIns="63500" rIns="63500" tIns="63500" bIns="63500"/>
+          <a:lstStyle/>
+          <a:p>
+            <a:pPr algn="ctr">
+              <a:lnSpc>
+                <a:spcPct val="115000"/>
+              </a:lnSpc>
+              <a:spcAft>
+                <a:spcPts val="0"/>
+              </a:spcAft>
+            </a:pPr>
+            <a:r>
+              <a:rPr sz="1700" b="1">
+                <a:solidFill>
+                  <a:srgbClr val="00175A"/>
+                </a:solidFill>
+                <a:latin typeface="Arial"/>
+              </a:rPr>
+              <a:t>Calibration half</a:t>
+            </a:r>
+          </a:p>
+        </p:txBody>
+      </p:sp>
+      <p:sp>
+        <p:nvSpPr>
+          <p:cNvPr id="7" name="Rounded Rectangle 6"/>
+          <p:cNvSpPr/>
+          <p:nvPr/>
+        </p:nvSpPr>
+        <p:spPr>
+          <a:xfrm>
+            <a:off x="2730500" y="4413250"/>
+            <a:ext cx="1587500" cy="1079500"/>
+          </a:xfrm>
+          <a:prstGeom prst="roundRect">
+            <a:avLst>
+              <a:gd name="adj" fmla="val 10000"/>
+            </a:avLst>
+          </a:prstGeom>
+          <a:solidFill>
+            <a:srgbClr val="E6EBF4"/>
+          </a:solidFill>
+          <a:ln w="25400">
+            <a:solidFill>
+              <a:srgbClr val="00175A"/>
+            </a:solidFill>
+          </a:ln>
+          <a:effectLst/>
+        </p:spPr>
+        <p:style>
+          <a:lnRef idx="1">
+            <a:schemeClr val="accent1"/>
+          </a:lnRef>
+          <a:fillRef idx="3">
+            <a:schemeClr val="accent1"/>
+          </a:fillRef>
+          <a:effectRef idx="2">
+            <a:schemeClr val="accent1"/>
+          </a:effectRef>
+          <a:fontRef idx="minor">
+            <a:schemeClr val="lt1"/>
+          </a:fontRef>
+        </p:style>
+        <p:txBody>
+          <a:bodyPr rtlCol="0" anchor="ctr" wrap="square" lIns="63500" rIns="63500" tIns="63500" bIns="63500"/>
+          <a:lstStyle/>
+          <a:p>
+            <a:pPr algn="ctr">
+              <a:lnSpc>
+                <a:spcPct val="115000"/>
+              </a:lnSpc>
+              <a:spcAft>
+                <a:spcPts val="400"/>
+              </a:spcAft>
+            </a:pPr>
+            <a:r>
+              <a:rPr sz="1700" b="1">
+                <a:solidFill>
+                  <a:srgbClr val="00175A"/>
+                </a:solidFill>
+                <a:latin typeface="Arial"/>
+              </a:rPr>
+              <a:t>Test half</a:t>
+            </a:r>
+          </a:p>
+          <a:p>
+            <a:pPr algn="ctr">
+              <a:lnSpc>
+                <a:spcPct val="115000"/>
+              </a:lnSpc>
+              <a:spcAft>
+                <a:spcPts val="0"/>
+              </a:spcAft>
+            </a:pPr>
+            <a:r>
+              <a:rPr sz="1300" b="0">
+                <a:solidFill>
+                  <a:srgbClr val="6B7480"/>
+                </a:solidFill>
+                <a:latin typeface="Arial"/>
+              </a:rPr>
+              <a:t>unseen in calibration</a:t>
+            </a:r>
+          </a:p>
+        </p:txBody>
+      </p:sp>
+      <p:sp>
+        <p:nvSpPr>
+          <p:cNvPr id="8" name="Right Arrow 7"/>
+          <p:cNvSpPr/>
+          <p:nvPr/>
+        </p:nvSpPr>
+        <p:spPr>
+          <a:xfrm>
+            <a:off x="2387600" y="2635250"/>
+            <a:ext cx="292100" cy="254000"/>
+          </a:xfrm>
+          <a:prstGeom prst="rightArrow">
+            <a:avLst/>
+          </a:prstGeom>
+          <a:solidFill>
+            <a:srgbClr val="6B7480"/>
+          </a:solidFill>
+          <a:ln>
+            <a:noFill/>
+          </a:ln>
+          <a:effectLst/>
+        </p:spPr>
+        <p:style>
+          <a:lnRef idx="1">
+            <a:schemeClr val="accent1"/>
+          </a:lnRef>
+          <a:fillRef idx="3">
+            <a:schemeClr val="accent1"/>
+          </a:fillRef>
+          <a:effectRef idx="2">
+            <a:schemeClr val="accent1"/>
+          </a:effectRef>
+          <a:fontRef idx="minor">
+            <a:schemeClr val="lt1"/>
+          </a:fontRef>
+        </p:style>
+        <p:txBody>
+          <a:bodyPr rtlCol="0" anchor="ctr"/>
+          <a:lstStyle/>
+          <a:p>
+            <a:pPr algn="ctr"/>
+          </a:p>
+        </p:txBody>
+      </p:sp>
+      <p:sp>
+        <p:nvSpPr>
+          <p:cNvPr id="9" name="Right Arrow 8"/>
+          <p:cNvSpPr/>
+          <p:nvPr/>
+        </p:nvSpPr>
+        <p:spPr>
+          <a:xfrm>
+            <a:off x="2387600" y="4826000"/>
+            <a:ext cx="292100" cy="254000"/>
+          </a:xfrm>
+          <a:prstGeom prst="rightArrow">
+            <a:avLst/>
+          </a:prstGeom>
+          <a:solidFill>
+            <a:srgbClr val="6B7480"/>
+          </a:solidFill>
+          <a:ln>
+            <a:noFill/>
+          </a:ln>
+          <a:effectLst/>
+        </p:spPr>
+        <p:style>
+          <a:lnRef idx="1">
+            <a:schemeClr val="accent1"/>
+          </a:lnRef>
+          <a:fillRef idx="3">
+            <a:schemeClr val="accent1"/>
+          </a:fillRef>
+          <a:effectRef idx="2">
+            <a:schemeClr val="accent1"/>
+          </a:effectRef>
+          <a:fontRef idx="minor">
+            <a:schemeClr val="lt1"/>
+          </a:fontRef>
+        </p:style>
+        <p:txBody>
+          <a:bodyPr rtlCol="0" anchor="ctr"/>
+          <a:lstStyle/>
+          <a:p>
+            <a:pPr algn="ctr"/>
+          </a:p>
+        </p:txBody>
+      </p:sp>
+      <p:sp>
+        <p:nvSpPr>
+          <p:cNvPr id="10" name="Right Arrow 9"/>
+          <p:cNvSpPr/>
+          <p:nvPr/>
+        </p:nvSpPr>
+        <p:spPr>
+          <a:xfrm>
+            <a:off x="4368800" y="2635250"/>
+            <a:ext cx="292100" cy="254000"/>
+          </a:xfrm>
+          <a:prstGeom prst="rightArrow">
+            <a:avLst/>
+          </a:prstGeom>
+          <a:solidFill>
+            <a:srgbClr val="6B7480"/>
+          </a:solidFill>
+          <a:ln>
+            <a:noFill/>
+          </a:ln>
+          <a:effectLst/>
+        </p:spPr>
+        <p:style>
+          <a:lnRef idx="1">
+            <a:schemeClr val="accent1"/>
+          </a:lnRef>
+          <a:fillRef idx="3">
+            <a:schemeClr val="accent1"/>
+          </a:fillRef>
+          <a:effectRef idx="2">
+            <a:schemeClr val="accent1"/>
+          </a:effectRef>
+          <a:fontRef idx="minor">
+            <a:schemeClr val="lt1"/>
+          </a:fontRef>
+        </p:style>
+        <p:txBody>
+          <a:bodyPr rtlCol="0" anchor="ctr"/>
+          <a:lstStyle/>
+          <a:p>
+            <a:pPr algn="ctr"/>
+          </a:p>
+        </p:txBody>
+      </p:sp>
+      <p:sp>
+        <p:nvSpPr>
+          <p:cNvPr id="11" name="Rounded Rectangle 10"/>
+          <p:cNvSpPr/>
+          <p:nvPr/>
+        </p:nvSpPr>
+        <p:spPr>
+          <a:xfrm>
+            <a:off x="4711700" y="1968500"/>
+            <a:ext cx="3556000" cy="1587500"/>
+          </a:xfrm>
+          <a:prstGeom prst="roundRect">
+            <a:avLst>
+              <a:gd name="adj" fmla="val 7199"/>
+            </a:avLst>
+          </a:prstGeom>
+          <a:solidFill>
+            <a:srgbClr val="00175A"/>
+          </a:solidFill>
+          <a:ln w="38100">
+            <a:solidFill>
+              <a:srgbClr val="006FCF"/>
+            </a:solidFill>
+          </a:ln>
+          <a:effectLst/>
+        </p:spPr>
+        <p:style>
+          <a:lnRef idx="1">
+            <a:schemeClr val="accent1"/>
+          </a:lnRef>
+          <a:fillRef idx="3">
+            <a:schemeClr val="accent1"/>
+          </a:fillRef>
+          <a:effectRef idx="2">
+            <a:schemeClr val="accent1"/>
+          </a:effectRef>
+          <a:fontRef idx="minor">
+            <a:schemeClr val="lt1"/>
+          </a:fontRef>
+        </p:style>
+        <p:txBody>
+          <a:bodyPr rtlCol="0" anchor="ctr"/>
+          <a:lstStyle/>
+          <a:p>
+            <a:pPr algn="ctr"/>
+          </a:p>
+        </p:txBody>
+      </p:sp>
+      <p:sp>
+        <p:nvSpPr>
+          <p:cNvPr id="12" name="TextBox 11"/>
+          <p:cNvSpPr txBox="1"/>
+          <p:nvPr/>
+        </p:nvSpPr>
+        <p:spPr>
+          <a:xfrm>
+            <a:off x="4838700" y="2070100"/>
+            <a:ext cx="3302000" cy="228600"/>
+          </a:xfrm>
+          <a:prstGeom prst="rect">
+            <a:avLst/>
+          </a:prstGeom>
+          <a:noFill/>
+        </p:spPr>
+        <p:txBody>
+          <a:bodyPr wrap="square" lIns="0" rIns="0" tIns="0" bIns="0" anchor="t">
+            <a:spAutoFit/>
+          </a:bodyPr>
+          <a:lstStyle/>
+          <a:p>
+            <a:pPr algn="ctr">
+              <a:lnSpc>
+                <a:spcPct val="115000"/>
+              </a:lnSpc>
+              <a:spcAft>
+                <a:spcPts val="0"/>
+              </a:spcAft>
+            </a:pPr>
+            <a:r>
+              <a:rPr sz="1700" b="1">
+                <a:solidFill>
+                  <a:srgbClr val="F6F8FB"/>
+                </a:solidFill>
+                <a:latin typeface="Arial"/>
+              </a:rPr>
+              <a:t>Betting test on each threshold</a:t>
+            </a:r>
+          </a:p>
+        </p:txBody>
+      </p:sp>
+      <p:sp>
+        <p:nvSpPr>
+          <p:cNvPr id="13" name="Rounded Rectangle 12"/>
+          <p:cNvSpPr/>
+          <p:nvPr/>
+        </p:nvSpPr>
+        <p:spPr>
+          <a:xfrm>
+            <a:off x="5092700" y="2425700"/>
+            <a:ext cx="482600" cy="482600"/>
+          </a:xfrm>
+          <a:prstGeom prst="roundRect">
+            <a:avLst>
+              <a:gd name="adj" fmla="val 10000"/>
+            </a:avLst>
+          </a:prstGeom>
+          <a:solidFill>
+            <a:srgbClr val="E3ECE2"/>
+          </a:solidFill>
+          <a:ln w="25400">
+            <a:solidFill>
+              <a:srgbClr val="2F6B34"/>
+            </a:solidFill>
+          </a:ln>
+          <a:effectLst/>
+        </p:spPr>
+        <p:style>
+          <a:lnRef idx="1">
+            <a:schemeClr val="accent1"/>
+          </a:lnRef>
+          <a:fillRef idx="3">
+            <a:schemeClr val="accent1"/>
+          </a:fillRef>
+          <a:effectRef idx="2">
+            <a:schemeClr val="accent1"/>
+          </a:effectRef>
+          <a:fontRef idx="minor">
+            <a:schemeClr val="lt1"/>
+          </a:fontRef>
+        </p:style>
+        <p:txBody>
+          <a:bodyPr rtlCol="0" anchor="ctr" wrap="square" lIns="12700" rIns="12700" tIns="12700" bIns="12700"/>
+          <a:lstStyle/>
+          <a:p>
+            <a:pPr algn="ctr">
+              <a:lnSpc>
+                <a:spcPct val="115000"/>
+              </a:lnSpc>
+              <a:spcAft>
+                <a:spcPts val="0"/>
+              </a:spcAft>
+            </a:pPr>
+            <a:r>
+              <a:rPr sz="2200" b="1">
+                <a:solidFill>
+                  <a:srgbClr val="2F6B34"/>
+                </a:solidFill>
+                <a:latin typeface="Arial"/>
+              </a:rPr>
+              <a:t>✓</a:t>
+            </a:r>
+          </a:p>
+        </p:txBody>
+      </p:sp>
+      <p:sp>
+        <p:nvSpPr>
+          <p:cNvPr id="14" name="Rounded Rectangle 13"/>
+          <p:cNvSpPr/>
+          <p:nvPr/>
+        </p:nvSpPr>
+        <p:spPr>
+          <a:xfrm>
+            <a:off x="5676900" y="2425700"/>
+            <a:ext cx="482600" cy="482600"/>
+          </a:xfrm>
+          <a:prstGeom prst="roundRect">
+            <a:avLst>
+              <a:gd name="adj" fmla="val 10000"/>
+            </a:avLst>
+          </a:prstGeom>
+          <a:solidFill>
+            <a:srgbClr val="E3ECE2"/>
+          </a:solidFill>
+          <a:ln w="25400">
+            <a:solidFill>
+              <a:srgbClr val="2F6B34"/>
+            </a:solidFill>
+          </a:ln>
+          <a:effectLst/>
+        </p:spPr>
+        <p:style>
+          <a:lnRef idx="1">
+            <a:schemeClr val="accent1"/>
+          </a:lnRef>
+          <a:fillRef idx="3">
+            <a:schemeClr val="accent1"/>
+          </a:fillRef>
+          <a:effectRef idx="2">
+            <a:schemeClr val="accent1"/>
+          </a:effectRef>
+          <a:fontRef idx="minor">
+            <a:schemeClr val="lt1"/>
+          </a:fontRef>
+        </p:style>
+        <p:txBody>
+          <a:bodyPr rtlCol="0" anchor="ctr" wrap="square" lIns="12700" rIns="12700" tIns="12700" bIns="12700"/>
+          <a:lstStyle/>
+          <a:p>
+            <a:pPr algn="ctr">
+              <a:lnSpc>
+                <a:spcPct val="115000"/>
+              </a:lnSpc>
+              <a:spcAft>
+                <a:spcPts val="0"/>
+              </a:spcAft>
+            </a:pPr>
+            <a:r>
+              <a:rPr sz="2200" b="1">
+                <a:solidFill>
+                  <a:srgbClr val="2F6B34"/>
+                </a:solidFill>
+                <a:latin typeface="Arial"/>
+              </a:rPr>
+              <a:t>✓</a:t>
+            </a:r>
+          </a:p>
+        </p:txBody>
+      </p:sp>
+      <p:sp>
+        <p:nvSpPr>
+          <p:cNvPr id="15" name="Rounded Rectangle 14"/>
+          <p:cNvSpPr/>
+          <p:nvPr/>
+        </p:nvSpPr>
+        <p:spPr>
+          <a:xfrm>
+            <a:off x="6261100" y="2425700"/>
+            <a:ext cx="482600" cy="482600"/>
+          </a:xfrm>
+          <a:prstGeom prst="roundRect">
+            <a:avLst>
+              <a:gd name="adj" fmla="val 10000"/>
+            </a:avLst>
+          </a:prstGeom>
+          <a:solidFill>
+            <a:srgbClr val="E3ECE2"/>
+          </a:solidFill>
+          <a:ln w="25400">
+            <a:solidFill>
+              <a:srgbClr val="2F6B34"/>
+            </a:solidFill>
+          </a:ln>
+          <a:effectLst/>
+        </p:spPr>
+        <p:style>
+          <a:lnRef idx="1">
+            <a:schemeClr val="accent1"/>
+          </a:lnRef>
+          <a:fillRef idx="3">
+            <a:schemeClr val="accent1"/>
+          </a:fillRef>
+          <a:effectRef idx="2">
+            <a:schemeClr val="accent1"/>
+          </a:effectRef>
+          <a:fontRef idx="minor">
+            <a:schemeClr val="lt1"/>
+          </a:fontRef>
+        </p:style>
+        <p:txBody>
+          <a:bodyPr rtlCol="0" anchor="ctr" wrap="square" lIns="12700" rIns="12700" tIns="12700" bIns="12700"/>
+          <a:lstStyle/>
+          <a:p>
+            <a:pPr algn="ctr">
+              <a:lnSpc>
+                <a:spcPct val="115000"/>
+              </a:lnSpc>
+              <a:spcAft>
+                <a:spcPts val="0"/>
+              </a:spcAft>
+            </a:pPr>
+            <a:r>
+              <a:rPr sz="2200" b="1">
+                <a:solidFill>
+                  <a:srgbClr val="2F6B34"/>
+                </a:solidFill>
+                <a:latin typeface="Arial"/>
+              </a:rPr>
+              <a:t>✓</a:t>
+            </a:r>
+          </a:p>
+        </p:txBody>
+      </p:sp>
+      <p:sp>
+        <p:nvSpPr>
+          <p:cNvPr id="16" name="Rounded Rectangle 15"/>
+          <p:cNvSpPr/>
+          <p:nvPr/>
+        </p:nvSpPr>
+        <p:spPr>
+          <a:xfrm>
+            <a:off x="6845300" y="2425700"/>
+            <a:ext cx="482600" cy="482600"/>
+          </a:xfrm>
+          <a:prstGeom prst="roundRect">
+            <a:avLst>
+              <a:gd name="adj" fmla="val 10000"/>
+            </a:avLst>
+          </a:prstGeom>
+          <a:solidFill>
+            <a:srgbClr val="F6E3E0"/>
+          </a:solidFill>
+          <a:ln w="25400">
+            <a:solidFill>
+              <a:srgbClr val="B03A2E"/>
+            </a:solidFill>
+          </a:ln>
+          <a:effectLst/>
+        </p:spPr>
+        <p:style>
+          <a:lnRef idx="1">
+            <a:schemeClr val="accent1"/>
+          </a:lnRef>
+          <a:fillRef idx="3">
+            <a:schemeClr val="accent1"/>
+          </a:fillRef>
+          <a:effectRef idx="2">
+            <a:schemeClr val="accent1"/>
+          </a:effectRef>
+          <a:fontRef idx="minor">
+            <a:schemeClr val="lt1"/>
+          </a:fontRef>
+        </p:style>
+        <p:txBody>
+          <a:bodyPr rtlCol="0" anchor="ctr" wrap="square" lIns="12700" rIns="12700" tIns="12700" bIns="12700"/>
+          <a:lstStyle/>
+          <a:p>
+            <a:pPr algn="ctr">
+              <a:lnSpc>
+                <a:spcPct val="115000"/>
+              </a:lnSpc>
+              <a:spcAft>
+                <a:spcPts val="0"/>
+              </a:spcAft>
+            </a:pPr>
+            <a:r>
+              <a:rPr sz="2200" b="1">
+                <a:solidFill>
+                  <a:srgbClr val="B03A2E"/>
+                </a:solidFill>
+                <a:latin typeface="Arial"/>
+              </a:rPr>
+              <a:t>✗</a:t>
+            </a:r>
+          </a:p>
+        </p:txBody>
+      </p:sp>
+      <p:sp>
+        <p:nvSpPr>
+          <p:cNvPr id="17" name="Rounded Rectangle 16"/>
+          <p:cNvSpPr/>
+          <p:nvPr/>
+        </p:nvSpPr>
+        <p:spPr>
+          <a:xfrm>
+            <a:off x="7429500" y="2425700"/>
+            <a:ext cx="482600" cy="482600"/>
+          </a:xfrm>
+          <a:prstGeom prst="roundRect">
+            <a:avLst>
+              <a:gd name="adj" fmla="val 10000"/>
+            </a:avLst>
+          </a:prstGeom>
+          <a:solidFill>
+            <a:srgbClr val="FFFFFF"/>
+          </a:solidFill>
+          <a:ln w="25400">
+            <a:solidFill>
+              <a:srgbClr val="6B7480"/>
+            </a:solidFill>
+          </a:ln>
+          <a:effectLst/>
+        </p:spPr>
+        <p:style>
+          <a:lnRef idx="1">
+            <a:schemeClr val="accent1"/>
+          </a:lnRef>
+          <a:fillRef idx="3">
+            <a:schemeClr val="accent1"/>
+          </a:fillRef>
+          <a:effectRef idx="2">
+            <a:schemeClr val="accent1"/>
+          </a:effectRef>
+          <a:fontRef idx="minor">
+            <a:schemeClr val="lt1"/>
+          </a:fontRef>
+        </p:style>
+        <p:txBody>
+          <a:bodyPr rtlCol="0" anchor="ctr" wrap="square" lIns="12700" rIns="12700" tIns="12700" bIns="12700"/>
+          <a:lstStyle/>
+          <a:p>
+            <a:pPr algn="ctr">
+              <a:lnSpc>
+                <a:spcPct val="115000"/>
+              </a:lnSpc>
+              <a:spcAft>
+                <a:spcPts val="0"/>
+              </a:spcAft>
+            </a:pPr>
+            <a:r>
+              <a:rPr sz="2200" b="1">
+                <a:solidFill>
+                  <a:srgbClr val="6B7480"/>
+                </a:solidFill>
+                <a:latin typeface="Arial"/>
+              </a:rPr>
+              <a:t>–</a:t>
+            </a:r>
+          </a:p>
+        </p:txBody>
+      </p:sp>
+      <p:sp>
+        <p:nvSpPr>
+          <p:cNvPr id="18" name="TextBox 17"/>
+          <p:cNvSpPr txBox="1"/>
+          <p:nvPr/>
+        </p:nvSpPr>
+        <p:spPr>
+          <a:xfrm>
+            <a:off x="4838700" y="3035300"/>
+            <a:ext cx="3302000" cy="381000"/>
+          </a:xfrm>
+          <a:prstGeom prst="rect">
+            <a:avLst/>
+          </a:prstGeom>
+          <a:noFill/>
+        </p:spPr>
+        <p:txBody>
+          <a:bodyPr wrap="square" lIns="0" rIns="0" tIns="0" bIns="0" anchor="t">
+            <a:spAutoFit/>
+          </a:bodyPr>
+          <a:lstStyle/>
+          <a:p>
+            <a:pPr algn="ctr">
+              <a:lnSpc>
+                <a:spcPct val="115000"/>
+              </a:lnSpc>
+              <a:spcAft>
+                <a:spcPts val="0"/>
+              </a:spcAft>
+            </a:pPr>
+            <a:r>
+              <a:rPr sz="1400" b="0">
+                <a:solidFill>
+                  <a:srgbClr val="C3D3EC"/>
+                </a:solidFill>
+                <a:latin typeface="Arial"/>
+              </a:rPr>
+              <a:t>strict → loose, stop at the first failure</a:t>
+            </a:r>
+          </a:p>
+        </p:txBody>
+      </p:sp>
+      <p:sp>
+        <p:nvSpPr>
+          <p:cNvPr id="19" name="Right Arrow 18"/>
+          <p:cNvSpPr/>
+          <p:nvPr/>
+        </p:nvSpPr>
+        <p:spPr>
+          <a:xfrm>
+            <a:off x="8318500" y="2635250"/>
+            <a:ext cx="355600" cy="254000"/>
+          </a:xfrm>
+          <a:prstGeom prst="rightArrow">
+            <a:avLst/>
+          </a:prstGeom>
+          <a:solidFill>
+            <a:srgbClr val="6B7480"/>
+          </a:solidFill>
+          <a:ln>
+            <a:noFill/>
+          </a:ln>
+          <a:effectLst/>
+        </p:spPr>
+        <p:style>
+          <a:lnRef idx="1">
+            <a:schemeClr val="accent1"/>
+          </a:lnRef>
+          <a:fillRef idx="3">
+            <a:schemeClr val="accent1"/>
+          </a:fillRef>
+          <a:effectRef idx="2">
+            <a:schemeClr val="accent1"/>
+          </a:effectRef>
+          <a:fontRef idx="minor">
+            <a:schemeClr val="lt1"/>
+          </a:fontRef>
+        </p:style>
+        <p:txBody>
+          <a:bodyPr rtlCol="0" anchor="ctr"/>
+          <a:lstStyle/>
+          <a:p>
+            <a:pPr algn="ctr"/>
+          </a:p>
+        </p:txBody>
+      </p:sp>
+      <p:sp>
+        <p:nvSpPr>
+          <p:cNvPr id="20" name="Rounded Rectangle 19"/>
+          <p:cNvSpPr/>
+          <p:nvPr/>
+        </p:nvSpPr>
+        <p:spPr>
+          <a:xfrm>
+            <a:off x="8724900" y="1968500"/>
+            <a:ext cx="2654300" cy="1587500"/>
+          </a:xfrm>
+          <a:prstGeom prst="roundRect">
+            <a:avLst>
+              <a:gd name="adj" fmla="val 7199"/>
             </a:avLst>
           </a:prstGeom>
           <a:solidFill>
@@ -6026,7 +7139,7 @@
           </a:fontRef>
         </p:style>
         <p:txBody>
-          <a:bodyPr rtlCol="0" anchor="ctr" wrap="square" lIns="152400" rIns="152400" tIns="152400" bIns="152400"/>
+          <a:bodyPr rtlCol="0" anchor="ctr" wrap="square" lIns="88900" rIns="88900" tIns="88900" bIns="88900"/>
           <a:lstStyle/>
           <a:p>
             <a:pPr algn="ctr">
@@ -6034,17 +7147,36 @@
                 <a:spcPct val="115000"/>
               </a:lnSpc>
               <a:spcAft>
-                <a:spcPts val="1200"/>
-              </a:spcAft>
-            </a:pPr>
-            <a:r>
-              <a:rPr sz="2400" b="1">
+                <a:spcPts val="800"/>
+              </a:spcAft>
+            </a:pPr>
+            <a:r>
+              <a:rPr sz="1400" b="0">
+                <a:solidFill>
+                  <a:srgbClr val="00175A"/>
+                </a:solidFill>
+                <a:latin typeface="Arial"/>
+              </a:rPr>
+              <a:t>Certified: before the first failure</a:t>
+            </a:r>
+          </a:p>
+          <a:p>
+            <a:pPr algn="ctr">
+              <a:lnSpc>
+                <a:spcPct val="115000"/>
+              </a:lnSpc>
+              <a:spcAft>
+                <a:spcPts val="800"/>
+              </a:spcAft>
+            </a:pPr>
+            <a:r>
+              <a:rPr sz="1700" b="1">
                 <a:solidFill>
                   <a:srgbClr val="006FCF"/>
                 </a:solidFill>
                 <a:latin typeface="Arial"/>
               </a:rPr>
-              <a:t>You choose</a:t>
+              <a:t>★ Deploy the cheapest</a:t>
             </a:r>
           </a:p>
           <a:p>
@@ -6057,33 +7189,33 @@
               </a:spcAft>
             </a:pPr>
             <a:r>
-              <a:rPr sz="1900" b="0">
-                <a:solidFill>
-                  <a:srgbClr val="00175A"/>
-                </a:solidFill>
-                <a:latin typeface="Arial"/>
-              </a:rPr>
-              <a:t>“I can lose at most 5 points of accuracy”</a:t>
-            </a:r>
-          </a:p>
-        </p:txBody>
-      </p:sp>
-      <p:sp>
-        <p:nvSpPr>
-          <p:cNvPr id="5" name="Right Arrow 4"/>
+              <a:rPr sz="1300" b="0">
+                <a:solidFill>
+                  <a:srgbClr val="6B7480"/>
+                </a:solidFill>
+                <a:latin typeface="Arial"/>
+              </a:rPr>
+              <a:t>None passes? Always the team.</a:t>
+            </a:r>
+          </a:p>
+        </p:txBody>
+      </p:sp>
+      <p:sp>
+        <p:nvSpPr>
+          <p:cNvPr id="21" name="Down Arrow 20"/>
           <p:cNvSpPr/>
           <p:nvPr/>
         </p:nvSpPr>
         <p:spPr>
           <a:xfrm>
-            <a:off x="4000500" y="2857500"/>
-            <a:ext cx="482600" cy="381000"/>
-          </a:xfrm>
-          <a:prstGeom prst="rightArrow">
+            <a:off x="9893300" y="3619500"/>
+            <a:ext cx="317500" cy="635000"/>
+          </a:xfrm>
+          <a:prstGeom prst="downArrow">
             <a:avLst/>
           </a:prstGeom>
           <a:solidFill>
-            <a:srgbClr val="6B7480"/>
+            <a:srgbClr val="006FCF"/>
           </a:solidFill>
           <a:ln>
             <a:noFill/>
@@ -6114,22 +7246,20 @@
       </p:sp>
       <p:sp>
         <p:nvSpPr>
-          <p:cNvPr id="6" name="Rounded Rectangle 5"/>
+          <p:cNvPr id="22" name="Right Arrow 21"/>
           <p:cNvSpPr/>
           <p:nvPr/>
         </p:nvSpPr>
         <p:spPr>
           <a:xfrm>
-            <a:off x="4559300" y="2095500"/>
-            <a:ext cx="3111500" cy="2032000"/>
-          </a:xfrm>
-          <a:prstGeom prst="roundRect">
-            <a:avLst>
-              <a:gd name="adj" fmla="val 5625"/>
-            </a:avLst>
+            <a:off x="4368800" y="4826000"/>
+            <a:ext cx="4305300" cy="254000"/>
+          </a:xfrm>
+          <a:prstGeom prst="rightArrow">
+            <a:avLst/>
           </a:prstGeom>
           <a:solidFill>
-            <a:srgbClr val="00175A"/>
+            <a:srgbClr val="D3DCE8"/>
           </a:solidFill>
           <a:ln>
             <a:noFill/>
@@ -6151,7 +7281,33 @@
           </a:fontRef>
         </p:style>
         <p:txBody>
-          <a:bodyPr rtlCol="0" anchor="ctr" wrap="square" lIns="152400" rIns="152400" tIns="152400" bIns="152400"/>
+          <a:bodyPr rtlCol="0" anchor="ctr"/>
+          <a:lstStyle/>
+          <a:p>
+            <a:pPr algn="ctr"/>
+          </a:p>
+        </p:txBody>
+      </p:sp>
+      <p:sp>
+        <p:nvSpPr>
+          <p:cNvPr id="23" name="TextBox 22"/>
+          <p:cNvSpPr txBox="1"/>
+          <p:nvPr/>
+        </p:nvSpPr>
+        <p:spPr>
+          <a:xfrm>
+            <a:off x="4711700" y="4508500"/>
+            <a:ext cx="3556000" cy="228600"/>
+          </a:xfrm>
+          <a:prstGeom prst="rect">
+            <a:avLst/>
+          </a:prstGeom>
+          <a:noFill/>
+        </p:spPr>
+        <p:txBody>
+          <a:bodyPr wrap="square" lIns="0" rIns="0" tIns="0" bIns="0" anchor="t">
+            <a:spAutoFit/>
+          </a:bodyPr>
           <a:lstStyle/>
           <a:p>
             <a:pPr algn="ctr">
@@ -6159,98 +7315,35 @@
                 <a:spcPct val="115000"/>
               </a:lnSpc>
               <a:spcAft>
-                <a:spcPts val="1200"/>
-              </a:spcAft>
-            </a:pPr>
-            <a:r>
-              <a:rPr sz="2400" b="1">
-                <a:solidFill>
-                  <a:srgbClr val="66B2F0"/>
-                </a:solidFill>
-                <a:latin typeface="Arial"/>
-              </a:rPr>
-              <a:t>A betting test checks</a:t>
-            </a:r>
-          </a:p>
-          <a:p>
-            <a:pPr algn="ctr">
-              <a:lnSpc>
-                <a:spcPct val="115000"/>
-              </a:lnSpc>
-              <a:spcAft>
-                <a:spcPts val="0"/>
-              </a:spcAft>
-            </a:pPr>
-            <a:r>
-              <a:rPr sz="1900" b="0">
-                <a:solidFill>
-                  <a:srgbClr val="F6F8FB"/>
-                </a:solidFill>
-                <a:latin typeface="Arial"/>
-              </a:rPr>
-              <a:t>candidate rules on a few hundred labelled tasks</a:t>
-            </a:r>
-          </a:p>
-        </p:txBody>
-      </p:sp>
-      <p:sp>
-        <p:nvSpPr>
-          <p:cNvPr id="7" name="Right Arrow 6"/>
+                <a:spcPts val="0"/>
+              </a:spcAft>
+            </a:pPr>
+            <a:r>
+              <a:rPr sz="1400" b="0">
+                <a:solidFill>
+                  <a:srgbClr val="6B7480"/>
+                </a:solidFill>
+                <a:latin typeface="Arial"/>
+              </a:rPr>
+              <a:t>apply the ★ threshold to unseen tasks</a:t>
+            </a:r>
+          </a:p>
+        </p:txBody>
+      </p:sp>
+      <p:sp>
+        <p:nvSpPr>
+          <p:cNvPr id="24" name="Rounded Rectangle 23"/>
           <p:cNvSpPr/>
           <p:nvPr/>
         </p:nvSpPr>
         <p:spPr>
           <a:xfrm>
-            <a:off x="7747000" y="2857500"/>
-            <a:ext cx="482600" cy="381000"/>
-          </a:xfrm>
-          <a:prstGeom prst="rightArrow">
-            <a:avLst/>
-          </a:prstGeom>
-          <a:solidFill>
-            <a:srgbClr val="6B7480"/>
-          </a:solidFill>
-          <a:ln>
-            <a:noFill/>
-          </a:ln>
-          <a:effectLst/>
-        </p:spPr>
-        <p:style>
-          <a:lnRef idx="1">
-            <a:schemeClr val="accent1"/>
-          </a:lnRef>
-          <a:fillRef idx="3">
-            <a:schemeClr val="accent1"/>
-          </a:fillRef>
-          <a:effectRef idx="2">
-            <a:schemeClr val="accent1"/>
-          </a:effectRef>
-          <a:fontRef idx="minor">
-            <a:schemeClr val="lt1"/>
-          </a:fontRef>
-        </p:style>
-        <p:txBody>
-          <a:bodyPr rtlCol="0" anchor="ctr"/>
-          <a:lstStyle/>
-          <a:p>
-            <a:pPr algn="ctr"/>
-          </a:p>
-        </p:txBody>
-      </p:sp>
-      <p:sp>
-        <p:nvSpPr>
-          <p:cNvPr id="8" name="Rounded Rectangle 7"/>
-          <p:cNvSpPr/>
-          <p:nvPr/>
-        </p:nvSpPr>
-        <p:spPr>
-          <a:xfrm>
-            <a:off x="8305800" y="2095500"/>
-            <a:ext cx="3111500" cy="2032000"/>
+            <a:off x="8724900" y="4318000"/>
+            <a:ext cx="2654300" cy="1270000"/>
           </a:xfrm>
           <a:prstGeom prst="roundRect">
             <a:avLst>
-              <a:gd name="adj" fmla="val 5625"/>
+              <a:gd name="adj" fmla="val 9000"/>
             </a:avLst>
           </a:prstGeom>
           <a:solidFill>
@@ -6278,7 +7371,7 @@
           </a:fontRef>
         </p:style>
         <p:txBody>
-          <a:bodyPr rtlCol="0" anchor="ctr" wrap="square" lIns="152400" rIns="152400" tIns="152400" bIns="152400"/>
+          <a:bodyPr rtlCol="0" anchor="ctr" wrap="square" lIns="88900" rIns="88900" tIns="88900" bIns="88900"/>
           <a:lstStyle/>
           <a:p>
             <a:pPr algn="ctr">
@@ -6286,17 +7379,17 @@
                 <a:spcPct val="115000"/>
               </a:lnSpc>
               <a:spcAft>
-                <a:spcPts val="1200"/>
-              </a:spcAft>
-            </a:pPr>
-            <a:r>
-              <a:rPr sz="2400" b="1">
+                <a:spcPts val="600"/>
+              </a:spcAft>
+            </a:pPr>
+            <a:r>
+              <a:rPr sz="1900" b="1">
                 <a:solidFill>
                   <a:srgbClr val="2F6B34"/>
                 </a:solidFill>
                 <a:latin typeface="Arial"/>
               </a:rPr>
-              <a:t>You get</a:t>
+              <a:t>Check the promise</a:t>
             </a:r>
           </a:p>
           <a:p>
@@ -6309,91 +7402,27 @@
               </a:spcAft>
             </a:pPr>
             <a:r>
-              <a:rPr sz="1900" b="0">
+              <a:rPr sz="1500" b="0">
                 <a:solidFill>
                   <a:srgbClr val="00175A"/>
                 </a:solidFill>
                 <a:latin typeface="Arial"/>
               </a:rPr>
-              <a:t>the cheapest rule that keeps the promise, 9 times out of 10</a:t>
-            </a:r>
-          </a:p>
-        </p:txBody>
-      </p:sp>
-      <p:sp>
-        <p:nvSpPr>
-          <p:cNvPr id="9" name="Rounded Rectangle 8"/>
-          <p:cNvSpPr/>
-          <p:nvPr/>
-        </p:nvSpPr>
-        <p:spPr>
-          <a:xfrm>
-            <a:off x="812800" y="4572000"/>
-            <a:ext cx="10566400" cy="952500"/>
-          </a:xfrm>
-          <a:prstGeom prst="roundRect">
-            <a:avLst>
-              <a:gd name="adj" fmla="val 10000"/>
-            </a:avLst>
-          </a:prstGeom>
-          <a:solidFill>
-            <a:srgbClr val="FFFFFF"/>
-          </a:solidFill>
-          <a:ln w="12700">
-            <a:solidFill>
-              <a:srgbClr val="D3DCE8"/>
-            </a:solidFill>
-          </a:ln>
-          <a:effectLst/>
-        </p:spPr>
-        <p:style>
-          <a:lnRef idx="1">
-            <a:schemeClr val="accent1"/>
-          </a:lnRef>
-          <a:fillRef idx="3">
-            <a:schemeClr val="accent1"/>
-          </a:fillRef>
-          <a:effectRef idx="2">
-            <a:schemeClr val="accent1"/>
-          </a:effectRef>
-          <a:fontRef idx="minor">
-            <a:schemeClr val="lt1"/>
-          </a:fontRef>
-        </p:style>
-        <p:txBody>
-          <a:bodyPr rtlCol="0" anchor="ctr" wrap="square" lIns="203200" rIns="203200" tIns="203200" bIns="203200"/>
-          <a:lstStyle/>
-          <a:p>
-            <a:pPr algn="ctr">
-              <a:lnSpc>
-                <a:spcPct val="115000"/>
-              </a:lnSpc>
-              <a:spcAft>
-                <a:spcPts val="0"/>
-              </a:spcAft>
-            </a:pPr>
-            <a:r>
-              <a:rPr sz="2000" b="1">
-                <a:solidFill>
-                  <a:srgbClr val="00175A"/>
-                </a:solidFill>
-                <a:latin typeface="Arial"/>
-              </a:rPr>
-              <a:t>No cheaper rule passes?  →  call the team every time.  Worst case: no savings, not lost accuracy.</a:t>
-            </a:r>
-          </a:p>
-        </p:txBody>
-      </p:sp>
-      <p:sp>
-        <p:nvSpPr>
-          <p:cNvPr id="10" name="TextBox 9"/>
+              <a:t>Loss ≤ ε?  Tokens saved?</a:t>
+            </a:r>
+          </a:p>
+        </p:txBody>
+      </p:sp>
+      <p:sp>
+        <p:nvSpPr>
+          <p:cNvPr id="25" name="TextBox 24"/>
           <p:cNvSpPr txBox="1"/>
           <p:nvPr/>
         </p:nvSpPr>
         <p:spPr>
           <a:xfrm>
-            <a:off x="812800" y="6413500"/>
-            <a:ext cx="10566400" cy="215900"/>
+            <a:off x="812800" y="5810250"/>
+            <a:ext cx="10566400" cy="381000"/>
           </a:xfrm>
           <a:prstGeom prst="rect">
             <a:avLst/>
@@ -6406,6 +7435,48 @@
           </a:bodyPr>
           <a:lstStyle/>
           <a:p>
+            <a:pPr algn="ctr">
+              <a:lnSpc>
+                <a:spcPct val="115000"/>
+              </a:lnSpc>
+              <a:spcAft>
+                <a:spcPts val="0"/>
+              </a:spcAft>
+            </a:pPr>
+            <a:r>
+              <a:rPr sz="1500" b="0">
+                <a:solidFill>
+                  <a:srgbClr val="6B7480"/>
+                </a:solidFill>
+                <a:latin typeface="Arial"/>
+              </a:rPr>
+              <a:t>In our experiments: 200 random splits.  In deployment: only the calibration half, the test half is your future tasks.</a:t>
+            </a:r>
+          </a:p>
+        </p:txBody>
+      </p:sp>
+      <p:sp>
+        <p:nvSpPr>
+          <p:cNvPr id="26" name="TextBox 25"/>
+          <p:cNvSpPr txBox="1"/>
+          <p:nvPr/>
+        </p:nvSpPr>
+        <p:spPr>
+          <a:xfrm>
+            <a:off x="812800" y="6413500"/>
+            <a:ext cx="10566400" cy="215900"/>
+          </a:xfrm>
+          <a:prstGeom prst="rect">
+            <a:avLst/>
+          </a:prstGeom>
+          <a:noFill/>
+        </p:spPr>
+        <p:txBody>
+          <a:bodyPr wrap="square" lIns="0" rIns="0" tIns="0" bIns="0" anchor="t">
+            <a:spAutoFit/>
+          </a:bodyPr>
+          <a:lstStyle/>
+          <a:p>
             <a:pPr algn="r">
               <a:lnSpc>
                 <a:spcPct val="115000"/>
@@ -6421,7 +7492,7 @@
                 </a:solidFill>
                 <a:latin typeface="Arial"/>
               </a:rPr>
-              <a:t>8</a:t>
+              <a:t>9</a:t>
             </a:r>
           </a:p>
         </p:txBody>
@@ -6489,7 +7560,7 @@
                 </a:solidFill>
                 <a:latin typeface="Arial"/>
               </a:rPr>
-              <a:t>HOW TO CLIMB · CHECK · THE BETTING TEST</a:t>
+              <a:t>STEP 2 · SETTING THE THRESHOLD · THE BETTING TEST</a:t>
             </a:r>
           </a:p>
         </p:txBody>
@@ -6531,7 +7602,7 @@
                 </a:solidFill>
                 <a:latin typeface="Georgia"/>
               </a:rPr>
-              <a:t>The betting test: start with $1, bet the rule is safe</a:t>
+              <a:t>The betting test: start with $1, bet the threshold is safe</a:t>
             </a:r>
           </a:p>
         </p:txBody>
@@ -6637,7 +7708,7 @@
                 </a:solidFill>
                 <a:latin typeface="Arial"/>
               </a:rPr>
-              <a:t>Rule wrong, team right</a:t>
+              <a:t>Cheap wrong, team right</a:t>
             </a:r>
           </a:p>
           <a:p>
@@ -6841,7 +7912,7 @@
                 </a:solidFill>
                 <a:latin typeface="Arial"/>
               </a:rPr>
-              <a:t>Rule right, team wrong</a:t>
+              <a:t>Cheap right, team wrong</a:t>
             </a:r>
           </a:p>
           <a:p>
@@ -7025,7 +8096,7 @@
                 </a:solidFill>
                 <a:latin typeface="Arial"/>
               </a:rPr>
-              <a:t>9</a:t>
+              <a:t>11</a:t>
             </a:r>
           </a:p>
         </p:txBody>
@@ -7093,7 +8164,7 @@
                 </a:solidFill>
                 <a:latin typeface="Arial"/>
               </a:rPr>
-              <a:t>HOW TO CLIMB · CHECK · THE BETTING TEST</a:t>
+              <a:t>STEP 2 · SETTING THE THRESHOLD · THE BETTING TEST</a:t>
             </a:r>
           </a:p>
         </p:txBody>
@@ -7135,7 +8206,7 @@
                 </a:solidFill>
                 <a:latin typeface="Georgia"/>
               </a:rPr>
-              <a:t>Good rules get rich, bad rules go broke</a:t>
+              <a:t>Safe thresholds get rich, unsafe ones go broke</a:t>
             </a:r>
           </a:p>
         </p:txBody>
@@ -7259,7 +8330,7 @@
                 </a:solidFill>
                 <a:latin typeface="Arial"/>
               </a:rPr>
-              <a:t>μ: the rule’s true average loss</a:t>
+              <a:t>μ: the threshold’s true average loss</a:t>
             </a:r>
           </a:p>
         </p:txBody>
@@ -7323,7 +8394,7 @@
                 </a:solidFill>
                 <a:latin typeface="Arial"/>
               </a:rPr>
-              <a:t>Good rule: μ &lt; ε</a:t>
+              <a:t>Safe: μ &lt; ε</a:t>
             </a:r>
           </a:p>
           <a:p>
@@ -7406,7 +8477,7 @@
                 </a:solidFill>
                 <a:latin typeface="Arial"/>
               </a:rPr>
-              <a:t>Bad rule: μ &gt; ε</a:t>
+              <a:t>Unsafe: μ &gt; ε</a:t>
             </a:r>
           </a:p>
           <a:p>
@@ -7509,7 +8580,7 @@
                 </a:solidFill>
                 <a:latin typeface="Arial"/>
               </a:rPr>
-              <a:t>10</a:t>
+              <a:t>12</a:t>
             </a:r>
           </a:p>
         </p:txBody>
@@ -7577,7 +8648,7 @@
                 </a:solidFill>
                 <a:latin typeface="Arial"/>
               </a:rPr>
-              <a:t>HOW TO CLIMB · CHECK · THE BETTING TEST</a:t>
+              <a:t>STEP 2 · SETTING THE THRESHOLD · THE BETTING TEST</a:t>
             </a:r>
           </a:p>
         </p:txBody>
@@ -7619,7 +8690,7 @@
                 </a:solidFill>
                 <a:latin typeface="Georgia"/>
               </a:rPr>
-              <a:t>Why $20? A bad rule rarely gets there</a:t>
+              <a:t>Why $20? An unsafe threshold rarely gets there</a:t>
             </a:r>
           </a:p>
         </p:txBody>
@@ -7683,7 +8754,7 @@
                 </a:solidFill>
                 <a:latin typeface="Arial"/>
               </a:rPr>
-              <a:t>Bad rule</a:t>
+              <a:t>Unsafe threshold</a:t>
             </a:r>
           </a:p>
           <a:p>
@@ -8046,7 +9117,7 @@
                 </a:solidFill>
                 <a:latin typeface="Arial"/>
               </a:rPr>
-              <a:t>P(a bad rule passes)  ≤  1/20  =  5%</a:t>
+              <a:t>P(an unsafe threshold passes)  ≤  1/20  =  5%</a:t>
             </a:r>
           </a:p>
         </p:txBody>
@@ -8254,7 +9325,7 @@
                 </a:solidFill>
                 <a:latin typeface="Arial"/>
               </a:rPr>
-              <a:t>11</a:t>
+              <a:t>13</a:t>
             </a:r>
           </a:p>
         </p:txBody>
@@ -8322,7 +9393,7 @@
                 </a:solidFill>
                 <a:latin typeface="Arial"/>
               </a:rPr>
-              <a:t>HOW TO CLIMB · CHECK · THE BETTING TEST</a:t>
+              <a:t>STEP 2 · SETTING THE THRESHOLD · THE BETTING TEST</a:t>
             </a:r>
           </a:p>
         </p:txBody>
@@ -8828,7 +9899,7 @@
                 </a:solidFill>
                 <a:latin typeface="Arial"/>
               </a:rPr>
-              <a:t>22</a:t>
+              <a:t>25</a:t>
             </a:r>
           </a:p>
         </p:txBody>
@@ -8896,7 +9967,7 @@
                 </a:solidFill>
                 <a:latin typeface="Arial"/>
               </a:rPr>
-              <a:t>HOW TO CLIMB · CHECK · THE BETTING TEST</a:t>
+              <a:t>STEP 2 · SETTING THE THRESHOLD</a:t>
             </a:r>
           </a:p>
         </p:txBody>
@@ -8938,7 +10009,7 @@
                 </a:solidFill>
                 <a:latin typeface="Georgia"/>
               </a:rPr>
-              <a:t>Many rules: test from safe to risky</a:t>
+              <a:t>Putting it together: how CLIMB sets the threshold</a:t>
             </a:r>
           </a:p>
         </p:txBody>
@@ -9004,7 +10075,7 @@
                 </a:solidFill>
                 <a:latin typeface="Arial"/>
               </a:rPr>
-              <a:t>gpt-oss-120b on MuSiQue, option A (direct answer’s confidence), one calibration half. Option B is tested the same way, the cheaper one is kept.</a:t>
+              <a:t>gpt-oss-120b on MuSiQue, threshold on the direct answer’s confidence, one calibration half. Two-rung thresholds are tested the same way, the cheaper is kept.</a:t>
             </a:r>
           </a:p>
         </p:txBody>
@@ -9046,7 +10117,7 @@
                 </a:solidFill>
                 <a:latin typeface="Arial"/>
               </a:rPr>
-              <a:t>12</a:t>
+              <a:t>15</a:t>
             </a:r>
           </a:p>
         </p:txBody>
@@ -9114,7 +10185,7 @@
                 </a:solidFill>
                 <a:latin typeface="Arial"/>
               </a:rPr>
-              <a:t>HOW TO CLIMB · CHECK · THE BETTING TEST</a:t>
+              <a:t>STEP 2 · SETTING THE THRESHOLD · THE BETTING TEST</a:t>
             </a:r>
           </a:p>
         </p:txBody>
@@ -9177,8 +10248,8 @@
         </p:blipFill>
         <p:spPr>
           <a:xfrm>
-            <a:off x="812800" y="2267670"/>
-            <a:ext cx="7302500" cy="2830659"/>
+            <a:off x="812800" y="2378610"/>
+            <a:ext cx="7302500" cy="2608779"/>
           </a:xfrm>
           <a:prstGeom prst="rect">
             <a:avLst/>
@@ -9389,7 +10460,7 @@
                 </a:solidFill>
                 <a:latin typeface="Arial"/>
               </a:rPr>
-              <a:t>23</a:t>
+              <a:t>26</a:t>
             </a:r>
           </a:p>
         </p:txBody>
@@ -10153,7 +11224,7 @@
                 </a:solidFill>
                 <a:latin typeface="Arial"/>
               </a:rPr>
-              <a:t>24</a:t>
+              <a:t>27</a:t>
             </a:r>
           </a:p>
         </p:txBody>
@@ -11751,7 +12822,7 @@
                 </a:solidFill>
                 <a:latin typeface="Arial"/>
               </a:rPr>
-              <a:t>25</a:t>
+              <a:t>28</a:t>
             </a:r>
           </a:p>
         </p:txBody>
@@ -13267,7 +14338,7 @@
                 </a:solidFill>
                 <a:latin typeface="Arial"/>
               </a:rPr>
-              <a:t>26</a:t>
+              <a:t>29</a:t>
             </a:r>
           </a:p>
         </p:txBody>
@@ -13609,7 +14680,7 @@
                 </a:solidFill>
                 <a:latin typeface="Arial"/>
               </a:rPr>
-              <a:t>27</a:t>
+              <a:t>30</a:t>
             </a:r>
           </a:p>
         </p:txBody>
@@ -13719,7 +14790,7 @@
                 </a:solidFill>
                 <a:latin typeface="Georgia"/>
               </a:rPr>
-              <a:t>The promise holds, and it saves 38–65%</a:t>
+              <a:t>These thresholds keep the promise and save 38–65%</a:t>
             </a:r>
           </a:p>
         </p:txBody>
@@ -14059,7 +15130,7 @@
                 </a:solidFill>
                 <a:latin typeface="Arial"/>
               </a:rPr>
-              <a:t>13</a:t>
+              <a:t>16</a:t>
             </a:r>
           </a:p>
         </p:txBody>
@@ -14318,7 +15389,7 @@
                 </a:solidFill>
                 <a:latin typeface="Arial"/>
               </a:rPr>
-              <a:t>14</a:t>
+              <a:t>24</a:t>
             </a:r>
           </a:p>
         </p:txBody>
@@ -14619,7 +15690,7 @@
                 </a:solidFill>
                 <a:latin typeface="Georgia"/>
               </a:rPr>
-              <a:t>A betting test keeps the promise</a:t>
+              <a:t>Data-set threshold</a:t>
             </a:r>
           </a:p>
           <a:p>
@@ -14638,7 +15709,7 @@
                 </a:solidFill>
                 <a:latin typeface="Arial"/>
               </a:rPr>
-              <a:t>you set the loss, it finds the cheapest safe rule.</a:t>
+              <a:t>you set the loss, a betting test finds the cheapest safe threshold.</a:t>
             </a:r>
           </a:p>
         </p:txBody>
@@ -14827,7 +15898,7 @@
                 </a:solidFill>
                 <a:latin typeface="Arial"/>
               </a:rPr>
-              <a:t>15</a:t>
+              <a:t>17</a:t>
             </a:r>
           </a:p>
         </p:txBody>
@@ -16099,7 +17170,7 @@
                 </a:solidFill>
                 <a:latin typeface="Arial"/>
               </a:rPr>
-              <a:t>16</a:t>
+              <a:t>18</a:t>
             </a:r>
           </a:p>
         </p:txBody>
@@ -16251,7 +17322,7 @@
                 </a:solidFill>
                 <a:latin typeface="Arial"/>
               </a:rPr>
-              <a:t>17</a:t>
+              <a:t>19</a:t>
             </a:r>
           </a:p>
         </p:txBody>
@@ -16811,7 +17882,7 @@
                 </a:solidFill>
                 <a:latin typeface="Arial"/>
               </a:rPr>
-              <a:t>You set the accuracy you can lose. A </a:t>
+              <a:t>You set the accuracy you can lose. The </a:t>
             </a:r>
             <a:r>
               <a:rPr sz="2100" b="1">
@@ -16820,6 +17891,24 @@
                 </a:solidFill>
                 <a:latin typeface="Arial"/>
               </a:rPr>
+              <a:t>data sets the threshold</a:t>
+            </a:r>
+            <a:r>
+              <a:rPr sz="2100" b="0">
+                <a:solidFill>
+                  <a:srgbClr val="00175A"/>
+                </a:solidFill>
+                <a:latin typeface="Arial"/>
+              </a:rPr>
+              <a:t>: a </a:t>
+            </a:r>
+            <a:r>
+              <a:rPr sz="2100" b="1">
+                <a:solidFill>
+                  <a:srgbClr val="00175A"/>
+                </a:solidFill>
+                <a:latin typeface="Arial"/>
+              </a:rPr>
               <a:t>betting test</a:t>
             </a:r>
             <a:r>
@@ -16829,7 +17918,7 @@
                 </a:solidFill>
                 <a:latin typeface="Arial"/>
               </a:rPr>
-              <a:t> certifies the cheapest rule that keeps it, with </a:t>
+              <a:t> certifies the cheapest one that keeps it, </a:t>
             </a:r>
             <a:r>
               <a:rPr sz="2100" b="1">
@@ -16847,7 +17936,7 @@
                 </a:solidFill>
                 <a:latin typeface="Arial"/>
               </a:rPr>
-              <a:t> probability.</a:t>
+              <a:t> of the time.</a:t>
             </a:r>
           </a:p>
         </p:txBody>
@@ -17169,6 +18258,1157 @@
                 <a:latin typeface="Arial"/>
               </a:rPr>
               <a:t>2</a:t>
+            </a:r>
+          </a:p>
+        </p:txBody>
+      </p:sp>
+    </p:spTree>
+  </p:cSld>
+  <p:clrMapOvr>
+    <a:masterClrMapping/>
+  </p:clrMapOvr>
+</p:sld>
+</file>
+
+<file path=ppt/slides/slide28.xml><?xml version="1.0" encoding="utf-8"?>
+<p:sld xmlns:a="http://schemas.openxmlformats.org/drawingml/2006/main" xmlns:p="http://schemas.openxmlformats.org/presentationml/2006/main" xmlns:r="http://schemas.openxmlformats.org/officeDocument/2006/relationships">
+  <p:cSld>
+    <p:bg>
+      <p:bgPr>
+        <a:solidFill>
+          <a:srgbClr val="F6F8FB"/>
+        </a:solidFill>
+        <a:effectLst/>
+      </p:bgPr>
+    </p:bg>
+    <p:spTree>
+      <p:nvGrpSpPr>
+        <p:cNvPr id="1" name=""/>
+        <p:cNvGrpSpPr/>
+        <p:nvPr/>
+      </p:nvGrpSpPr>
+      <p:grpSpPr/>
+      <p:sp>
+        <p:nvSpPr>
+          <p:cNvPr id="2" name="TextBox 1"/>
+          <p:cNvSpPr txBox="1"/>
+          <p:nvPr/>
+        </p:nvSpPr>
+        <p:spPr>
+          <a:xfrm>
+            <a:off x="812800" y="635000"/>
+            <a:ext cx="10566400" cy="254000"/>
+          </a:xfrm>
+          <a:prstGeom prst="rect">
+            <a:avLst/>
+          </a:prstGeom>
+          <a:noFill/>
+        </p:spPr>
+        <p:txBody>
+          <a:bodyPr wrap="square" lIns="0" rIns="0" tIns="0" bIns="0" anchor="t">
+            <a:spAutoFit/>
+          </a:bodyPr>
+          <a:lstStyle/>
+          <a:p>
+            <a:pPr algn="l">
+              <a:lnSpc>
+                <a:spcPct val="115000"/>
+              </a:lnSpc>
+              <a:spcAft>
+                <a:spcPts val="0"/>
+              </a:spcAft>
+            </a:pPr>
+            <a:r>
+              <a:rPr sz="1300" b="1">
+                <a:solidFill>
+                  <a:srgbClr val="006FCF"/>
+                </a:solidFill>
+                <a:latin typeface="Arial"/>
+              </a:rPr>
+              <a:t>STEP 2 · SETTING THE THRESHOLD</a:t>
+            </a:r>
+          </a:p>
+        </p:txBody>
+      </p:sp>
+      <p:sp>
+        <p:nvSpPr>
+          <p:cNvPr id="3" name="TextBox 2"/>
+          <p:cNvSpPr txBox="1"/>
+          <p:nvPr/>
+        </p:nvSpPr>
+        <p:spPr>
+          <a:xfrm>
+            <a:off x="812800" y="889000"/>
+            <a:ext cx="10566400" cy="571500"/>
+          </a:xfrm>
+          <a:prstGeom prst="rect">
+            <a:avLst/>
+          </a:prstGeom>
+          <a:noFill/>
+        </p:spPr>
+        <p:txBody>
+          <a:bodyPr wrap="square" lIns="0" rIns="0" tIns="0" bIns="0" anchor="t">
+            <a:spAutoFit/>
+          </a:bodyPr>
+          <a:lstStyle/>
+          <a:p>
+            <a:pPr algn="l">
+              <a:lnSpc>
+                <a:spcPct val="105000"/>
+              </a:lnSpc>
+              <a:spcAft>
+                <a:spcPts val="0"/>
+              </a:spcAft>
+            </a:pPr>
+            <a:r>
+              <a:rPr sz="3000" b="1">
+                <a:solidFill>
+                  <a:srgbClr val="00175A"/>
+                </a:solidFill>
+                <a:latin typeface="Georgia"/>
+              </a:rPr>
+              <a:t>Two shortcuts, and both break the promise</a:t>
+            </a:r>
+          </a:p>
+        </p:txBody>
+      </p:sp>
+      <p:sp>
+        <p:nvSpPr>
+          <p:cNvPr id="4" name="TextBox 3"/>
+          <p:cNvSpPr txBox="1"/>
+          <p:nvPr/>
+        </p:nvSpPr>
+        <p:spPr>
+          <a:xfrm>
+            <a:off x="812800" y="1555750"/>
+            <a:ext cx="5080000" cy="254000"/>
+          </a:xfrm>
+          <a:prstGeom prst="rect">
+            <a:avLst/>
+          </a:prstGeom>
+          <a:noFill/>
+        </p:spPr>
+        <p:txBody>
+          <a:bodyPr wrap="square" lIns="0" rIns="0" tIns="0" bIns="0" anchor="t">
+            <a:spAutoFit/>
+          </a:bodyPr>
+          <a:lstStyle/>
+          <a:p>
+            <a:pPr algn="l">
+              <a:lnSpc>
+                <a:spcPct val="115000"/>
+              </a:lnSpc>
+              <a:spcAft>
+                <a:spcPts val="0"/>
+              </a:spcAft>
+            </a:pPr>
+            <a:r>
+              <a:rPr sz="2200" b="1">
+                <a:solidFill>
+                  <a:srgbClr val="00175A"/>
+                </a:solidFill>
+                <a:latin typeface="Arial"/>
+              </a:rPr>
+              <a:t>One threshold for all settings</a:t>
+            </a:r>
+          </a:p>
+        </p:txBody>
+      </p:sp>
+      <p:pic>
+        <p:nvPicPr>
+          <p:cNvPr id="5" name="Picture 4" descr="c_fixed.png"/>
+          <p:cNvPicPr>
+            <a:picLocks noChangeAspect="1"/>
+          </p:cNvPicPr>
+          <p:nvPr/>
+        </p:nvPicPr>
+        <p:blipFill>
+          <a:blip r:embed="rId3"/>
+          <a:stretch>
+            <a:fillRect/>
+          </a:stretch>
+        </p:blipFill>
+        <p:spPr>
+          <a:xfrm>
+            <a:off x="812800" y="1944723"/>
+            <a:ext cx="5080000" cy="2651053"/>
+          </a:xfrm>
+          <a:prstGeom prst="rect">
+            <a:avLst/>
+          </a:prstGeom>
+        </p:spPr>
+      </p:pic>
+      <p:sp>
+        <p:nvSpPr>
+          <p:cNvPr id="6" name="TextBox 5"/>
+          <p:cNvSpPr txBox="1"/>
+          <p:nvPr/>
+        </p:nvSpPr>
+        <p:spPr>
+          <a:xfrm>
+            <a:off x="812800" y="4730750"/>
+            <a:ext cx="5080000" cy="254000"/>
+          </a:xfrm>
+          <a:prstGeom prst="rect">
+            <a:avLst/>
+          </a:prstGeom>
+          <a:noFill/>
+        </p:spPr>
+        <p:txBody>
+          <a:bodyPr wrap="square" lIns="0" rIns="0" tIns="0" bIns="0" anchor="t">
+            <a:spAutoFit/>
+          </a:bodyPr>
+          <a:lstStyle/>
+          <a:p>
+            <a:pPr algn="l">
+              <a:lnSpc>
+                <a:spcPct val="115000"/>
+              </a:lnSpc>
+              <a:spcAft>
+                <a:spcPts val="0"/>
+              </a:spcAft>
+            </a:pPr>
+            <a:r>
+              <a:rPr sz="1800" b="0">
+                <a:solidFill>
+                  <a:srgbClr val="333B47"/>
+                </a:solidFill>
+                <a:latin typeface="Arial"/>
+              </a:rPr>
+              <a:t>Above ε on </a:t>
+            </a:r>
+            <a:r>
+              <a:rPr sz="1800" b="1">
+                <a:solidFill>
+                  <a:srgbClr val="B03A2E"/>
+                </a:solidFill>
+                <a:latin typeface="Arial"/>
+              </a:rPr>
+              <a:t>4 of 12 settings, up to 16 points.</a:t>
+            </a:r>
+          </a:p>
+        </p:txBody>
+      </p:sp>
+      <p:sp>
+        <p:nvSpPr>
+          <p:cNvPr id="7" name="TextBox 6"/>
+          <p:cNvSpPr txBox="1"/>
+          <p:nvPr/>
+        </p:nvSpPr>
+        <p:spPr>
+          <a:xfrm>
+            <a:off x="6299200" y="1555750"/>
+            <a:ext cx="5080000" cy="254000"/>
+          </a:xfrm>
+          <a:prstGeom prst="rect">
+            <a:avLst/>
+          </a:prstGeom>
+          <a:noFill/>
+        </p:spPr>
+        <p:txBody>
+          <a:bodyPr wrap="square" lIns="0" rIns="0" tIns="0" bIns="0" anchor="t">
+            <a:spAutoFit/>
+          </a:bodyPr>
+          <a:lstStyle/>
+          <a:p>
+            <a:pPr algn="l">
+              <a:lnSpc>
+                <a:spcPct val="115000"/>
+              </a:lnSpc>
+              <a:spcAft>
+                <a:spcPts val="0"/>
+              </a:spcAft>
+            </a:pPr>
+            <a:r>
+              <a:rPr sz="2200" b="1">
+                <a:solidFill>
+                  <a:srgbClr val="00175A"/>
+                </a:solidFill>
+                <a:latin typeface="Arial"/>
+              </a:rPr>
+              <a:t>Tuned on each setting’s data, no test</a:t>
+            </a:r>
+          </a:p>
+        </p:txBody>
+      </p:sp>
+      <p:pic>
+        <p:nvPicPr>
+          <p:cNvPr id="8" name="Picture 7" descr="c_tuned.png"/>
+          <p:cNvPicPr>
+            <a:picLocks noChangeAspect="1"/>
+          </p:cNvPicPr>
+          <p:nvPr/>
+        </p:nvPicPr>
+        <p:blipFill>
+          <a:blip r:embed="rId4"/>
+          <a:stretch>
+            <a:fillRect/>
+          </a:stretch>
+        </p:blipFill>
+        <p:spPr>
+          <a:xfrm>
+            <a:off x="6522949" y="1905000"/>
+            <a:ext cx="4632501" cy="2730500"/>
+          </a:xfrm>
+          <a:prstGeom prst="rect">
+            <a:avLst/>
+          </a:prstGeom>
+        </p:spPr>
+      </p:pic>
+      <p:sp>
+        <p:nvSpPr>
+          <p:cNvPr id="9" name="TextBox 8"/>
+          <p:cNvSpPr txBox="1"/>
+          <p:nvPr/>
+        </p:nvSpPr>
+        <p:spPr>
+          <a:xfrm>
+            <a:off x="6299200" y="4730750"/>
+            <a:ext cx="5080000" cy="254000"/>
+          </a:xfrm>
+          <a:prstGeom prst="rect">
+            <a:avLst/>
+          </a:prstGeom>
+          <a:noFill/>
+        </p:spPr>
+        <p:txBody>
+          <a:bodyPr wrap="square" lIns="0" rIns="0" tIns="0" bIns="0" anchor="t">
+            <a:spAutoFit/>
+          </a:bodyPr>
+          <a:lstStyle/>
+          <a:p>
+            <a:pPr algn="l">
+              <a:lnSpc>
+                <a:spcPct val="115000"/>
+              </a:lnSpc>
+              <a:spcAft>
+                <a:spcPts val="0"/>
+              </a:spcAft>
+            </a:pPr>
+            <a:r>
+              <a:rPr sz="1800" b="0">
+                <a:solidFill>
+                  <a:srgbClr val="333B47"/>
+                </a:solidFill>
+                <a:latin typeface="Arial"/>
+              </a:rPr>
+              <a:t>Breaks the promise on </a:t>
+            </a:r>
+            <a:r>
+              <a:rPr sz="1800" b="1">
+                <a:solidFill>
+                  <a:srgbClr val="B03A2E"/>
+                </a:solidFill>
+                <a:latin typeface="Arial"/>
+              </a:rPr>
+              <a:t>31% of splits</a:t>
+            </a:r>
+            <a:r>
+              <a:rPr sz="1800" b="0">
+                <a:solidFill>
+                  <a:srgbClr val="333B47"/>
+                </a:solidFill>
+                <a:latin typeface="Arial"/>
+              </a:rPr>
+              <a:t> at ε = 5.</a:t>
+            </a:r>
+          </a:p>
+        </p:txBody>
+      </p:sp>
+      <p:sp>
+        <p:nvSpPr>
+          <p:cNvPr id="10" name="Rounded Rectangle 9"/>
+          <p:cNvSpPr/>
+          <p:nvPr/>
+        </p:nvSpPr>
+        <p:spPr>
+          <a:xfrm>
+            <a:off x="812800" y="5270500"/>
+            <a:ext cx="10566400" cy="825500"/>
+          </a:xfrm>
+          <a:prstGeom prst="roundRect">
+            <a:avLst>
+              <a:gd name="adj" fmla="val 10000"/>
+            </a:avLst>
+          </a:prstGeom>
+          <a:solidFill>
+            <a:srgbClr val="00175A"/>
+          </a:solidFill>
+          <a:ln>
+            <a:noFill/>
+          </a:ln>
+          <a:effectLst/>
+        </p:spPr>
+        <p:style>
+          <a:lnRef idx="1">
+            <a:schemeClr val="accent1"/>
+          </a:lnRef>
+          <a:fillRef idx="3">
+            <a:schemeClr val="accent1"/>
+          </a:fillRef>
+          <a:effectRef idx="2">
+            <a:schemeClr val="accent1"/>
+          </a:effectRef>
+          <a:fontRef idx="minor">
+            <a:schemeClr val="lt1"/>
+          </a:fontRef>
+        </p:style>
+        <p:txBody>
+          <a:bodyPr rtlCol="0" anchor="ctr" wrap="square" lIns="88900" rIns="88900" tIns="88900" bIns="88900"/>
+          <a:lstStyle/>
+          <a:p>
+            <a:pPr algn="ctr">
+              <a:lnSpc>
+                <a:spcPct val="115000"/>
+              </a:lnSpc>
+              <a:spcAft>
+                <a:spcPts val="400"/>
+              </a:spcAft>
+            </a:pPr>
+            <a:r>
+              <a:rPr sz="2400" b="1">
+                <a:solidFill>
+                  <a:srgbClr val="F6F8FB"/>
+                </a:solidFill>
+                <a:latin typeface="Georgia"/>
+              </a:rPr>
+              <a:t>The right threshold depends on the model and task.</a:t>
+            </a:r>
+          </a:p>
+          <a:p>
+            <a:pPr algn="ctr">
+              <a:lnSpc>
+                <a:spcPct val="115000"/>
+              </a:lnSpc>
+              <a:spcAft>
+                <a:spcPts val="0"/>
+              </a:spcAft>
+            </a:pPr>
+            <a:r>
+              <a:rPr sz="2000" b="1">
+                <a:solidFill>
+                  <a:srgbClr val="66B2F0"/>
+                </a:solidFill>
+                <a:latin typeface="Arial"/>
+              </a:rPr>
+              <a:t>We need it set from each setting’s data, with a guarantee.</a:t>
+            </a:r>
+          </a:p>
+        </p:txBody>
+      </p:sp>
+      <p:sp>
+        <p:nvSpPr>
+          <p:cNvPr id="11" name="TextBox 10"/>
+          <p:cNvSpPr txBox="1"/>
+          <p:nvPr/>
+        </p:nvSpPr>
+        <p:spPr>
+          <a:xfrm>
+            <a:off x="812800" y="6413500"/>
+            <a:ext cx="10566400" cy="215900"/>
+          </a:xfrm>
+          <a:prstGeom prst="rect">
+            <a:avLst/>
+          </a:prstGeom>
+          <a:noFill/>
+        </p:spPr>
+        <p:txBody>
+          <a:bodyPr wrap="square" lIns="0" rIns="0" tIns="0" bIns="0" anchor="t">
+            <a:spAutoFit/>
+          </a:bodyPr>
+          <a:lstStyle/>
+          <a:p>
+            <a:pPr algn="r">
+              <a:lnSpc>
+                <a:spcPct val="115000"/>
+              </a:lnSpc>
+              <a:spcAft>
+                <a:spcPts val="0"/>
+              </a:spcAft>
+            </a:pPr>
+            <a:r>
+              <a:rPr sz="1200" b="0">
+                <a:solidFill>
+                  <a:srgbClr val="6B7480"/>
+                </a:solidFill>
+                <a:latin typeface="Arial"/>
+              </a:rPr>
+              <a:t>8</a:t>
+            </a:r>
+          </a:p>
+        </p:txBody>
+      </p:sp>
+    </p:spTree>
+  </p:cSld>
+  <p:clrMapOvr>
+    <a:masterClrMapping/>
+  </p:clrMapOvr>
+</p:sld>
+</file>
+
+<file path=ppt/slides/slide29.xml><?xml version="1.0" encoding="utf-8"?>
+<p:sld xmlns:a="http://schemas.openxmlformats.org/drawingml/2006/main" xmlns:p="http://schemas.openxmlformats.org/presentationml/2006/main" xmlns:r="http://schemas.openxmlformats.org/officeDocument/2006/relationships">
+  <p:cSld>
+    <p:bg>
+      <p:bgPr>
+        <a:solidFill>
+          <a:srgbClr val="F6F8FB"/>
+        </a:solidFill>
+        <a:effectLst/>
+      </p:bgPr>
+    </p:bg>
+    <p:spTree>
+      <p:nvGrpSpPr>
+        <p:cNvPr id="1" name=""/>
+        <p:cNvGrpSpPr/>
+        <p:nvPr/>
+      </p:nvGrpSpPr>
+      <p:grpSpPr/>
+      <p:sp>
+        <p:nvSpPr>
+          <p:cNvPr id="2" name="TextBox 1"/>
+          <p:cNvSpPr txBox="1"/>
+          <p:nvPr/>
+        </p:nvSpPr>
+        <p:spPr>
+          <a:xfrm>
+            <a:off x="812800" y="635000"/>
+            <a:ext cx="10566400" cy="254000"/>
+          </a:xfrm>
+          <a:prstGeom prst="rect">
+            <a:avLst/>
+          </a:prstGeom>
+          <a:noFill/>
+        </p:spPr>
+        <p:txBody>
+          <a:bodyPr wrap="square" lIns="0" rIns="0" tIns="0" bIns="0" anchor="t">
+            <a:spAutoFit/>
+          </a:bodyPr>
+          <a:lstStyle/>
+          <a:p>
+            <a:pPr algn="l">
+              <a:lnSpc>
+                <a:spcPct val="115000"/>
+              </a:lnSpc>
+              <a:spcAft>
+                <a:spcPts val="0"/>
+              </a:spcAft>
+            </a:pPr>
+            <a:r>
+              <a:rPr sz="1300" b="1">
+                <a:solidFill>
+                  <a:srgbClr val="006FCF"/>
+                </a:solidFill>
+                <a:latin typeface="Arial"/>
+              </a:rPr>
+              <a:t>STEP 2 · SETTING THE THRESHOLD · THE BETTING TEST</a:t>
+            </a:r>
+          </a:p>
+        </p:txBody>
+      </p:sp>
+      <p:sp>
+        <p:nvSpPr>
+          <p:cNvPr id="3" name="TextBox 2"/>
+          <p:cNvSpPr txBox="1"/>
+          <p:nvPr/>
+        </p:nvSpPr>
+        <p:spPr>
+          <a:xfrm>
+            <a:off x="812800" y="889000"/>
+            <a:ext cx="10566400" cy="571500"/>
+          </a:xfrm>
+          <a:prstGeom prst="rect">
+            <a:avLst/>
+          </a:prstGeom>
+          <a:noFill/>
+        </p:spPr>
+        <p:txBody>
+          <a:bodyPr wrap="square" lIns="0" rIns="0" tIns="0" bIns="0" anchor="t">
+            <a:spAutoFit/>
+          </a:bodyPr>
+          <a:lstStyle/>
+          <a:p>
+            <a:pPr algn="l">
+              <a:lnSpc>
+                <a:spcPct val="105000"/>
+              </a:lnSpc>
+              <a:spcAft>
+                <a:spcPts val="0"/>
+              </a:spcAft>
+            </a:pPr>
+            <a:r>
+              <a:rPr sz="3000" b="1">
+                <a:solidFill>
+                  <a:srgbClr val="00175A"/>
+                </a:solidFill>
+                <a:latin typeface="Georgia"/>
+              </a:rPr>
+              <a:t>Why a betting test?</a:t>
+            </a:r>
+          </a:p>
+        </p:txBody>
+      </p:sp>
+      <p:sp>
+        <p:nvSpPr>
+          <p:cNvPr id="4" name="TextBox 3"/>
+          <p:cNvSpPr txBox="1"/>
+          <p:nvPr/>
+        </p:nvSpPr>
+        <p:spPr>
+          <a:xfrm>
+            <a:off x="812800" y="1473200"/>
+            <a:ext cx="10566400" cy="254000"/>
+          </a:xfrm>
+          <a:prstGeom prst="rect">
+            <a:avLst/>
+          </a:prstGeom>
+          <a:noFill/>
+        </p:spPr>
+        <p:txBody>
+          <a:bodyPr wrap="square" lIns="0" rIns="0" tIns="0" bIns="0" anchor="t">
+            <a:spAutoFit/>
+          </a:bodyPr>
+          <a:lstStyle/>
+          <a:p>
+            <a:pPr algn="l">
+              <a:lnSpc>
+                <a:spcPct val="115000"/>
+              </a:lnSpc>
+              <a:spcAft>
+                <a:spcPts val="0"/>
+              </a:spcAft>
+            </a:pPr>
+            <a:r>
+              <a:rPr sz="1800" b="1">
+                <a:solidFill>
+                  <a:srgbClr val="00175A"/>
+                </a:solidFill>
+                <a:latin typeface="Arial"/>
+              </a:rPr>
+              <a:t>We need: accept an unsafe threshold at most 5% of the time, from a few hundred tasks.</a:t>
+            </a:r>
+          </a:p>
+        </p:txBody>
+      </p:sp>
+      <p:sp>
+        <p:nvSpPr>
+          <p:cNvPr id="5" name="Rounded Rectangle 4"/>
+          <p:cNvSpPr/>
+          <p:nvPr/>
+        </p:nvSpPr>
+        <p:spPr>
+          <a:xfrm>
+            <a:off x="812800" y="1905000"/>
+            <a:ext cx="4191000" cy="952500"/>
+          </a:xfrm>
+          <a:prstGeom prst="roundRect">
+            <a:avLst>
+              <a:gd name="adj" fmla="val 10000"/>
+            </a:avLst>
+          </a:prstGeom>
+          <a:solidFill>
+            <a:srgbClr val="FFFFFF"/>
+          </a:solidFill>
+          <a:ln w="12700">
+            <a:solidFill>
+              <a:srgbClr val="D3DCE8"/>
+            </a:solidFill>
+          </a:ln>
+          <a:effectLst/>
+        </p:spPr>
+        <p:style>
+          <a:lnRef idx="1">
+            <a:schemeClr val="accent1"/>
+          </a:lnRef>
+          <a:fillRef idx="3">
+            <a:schemeClr val="accent1"/>
+          </a:fillRef>
+          <a:effectRef idx="2">
+            <a:schemeClr val="accent1"/>
+          </a:effectRef>
+          <a:fontRef idx="minor">
+            <a:schemeClr val="lt1"/>
+          </a:fontRef>
+        </p:style>
+        <p:txBody>
+          <a:bodyPr rtlCol="0" anchor="ctr" wrap="square" lIns="114300" rIns="114300" tIns="114300" bIns="114300"/>
+          <a:lstStyle/>
+          <a:p>
+            <a:pPr algn="l">
+              <a:lnSpc>
+                <a:spcPct val="115000"/>
+              </a:lnSpc>
+              <a:spcAft>
+                <a:spcPts val="400"/>
+              </a:spcAft>
+            </a:pPr>
+            <a:r>
+              <a:rPr sz="1800" b="1">
+                <a:solidFill>
+                  <a:srgbClr val="00175A"/>
+                </a:solidFill>
+                <a:latin typeface="Arial"/>
+              </a:rPr>
+              <a:t>Saves count</a:t>
+            </a:r>
+          </a:p>
+          <a:p>
+            <a:pPr algn="l">
+              <a:lnSpc>
+                <a:spcPct val="115000"/>
+              </a:lnSpc>
+              <a:spcAft>
+                <a:spcPts val="0"/>
+              </a:spcAft>
+            </a:pPr>
+            <a:r>
+              <a:rPr sz="1500" b="0">
+                <a:solidFill>
+                  <a:srgbClr val="333B47"/>
+                </a:solidFill>
+                <a:latin typeface="Arial"/>
+              </a:rPr>
+              <a:t>A cheap answer can also save one the team breaks (up to 9%). The bet credits it.</a:t>
+            </a:r>
+          </a:p>
+        </p:txBody>
+      </p:sp>
+      <p:sp>
+        <p:nvSpPr>
+          <p:cNvPr id="6" name="Rounded Rectangle 5"/>
+          <p:cNvSpPr/>
+          <p:nvPr/>
+        </p:nvSpPr>
+        <p:spPr>
+          <a:xfrm>
+            <a:off x="812800" y="2952750"/>
+            <a:ext cx="4191000" cy="952500"/>
+          </a:xfrm>
+          <a:prstGeom prst="roundRect">
+            <a:avLst>
+              <a:gd name="adj" fmla="val 10000"/>
+            </a:avLst>
+          </a:prstGeom>
+          <a:solidFill>
+            <a:srgbClr val="FFFFFF"/>
+          </a:solidFill>
+          <a:ln w="12700">
+            <a:solidFill>
+              <a:srgbClr val="D3DCE8"/>
+            </a:solidFill>
+          </a:ln>
+          <a:effectLst/>
+        </p:spPr>
+        <p:style>
+          <a:lnRef idx="1">
+            <a:schemeClr val="accent1"/>
+          </a:lnRef>
+          <a:fillRef idx="3">
+            <a:schemeClr val="accent1"/>
+          </a:fillRef>
+          <a:effectRef idx="2">
+            <a:schemeClr val="accent1"/>
+          </a:effectRef>
+          <a:fontRef idx="minor">
+            <a:schemeClr val="lt1"/>
+          </a:fontRef>
+        </p:style>
+        <p:txBody>
+          <a:bodyPr rtlCol="0" anchor="ctr" wrap="square" lIns="114300" rIns="114300" tIns="114300" bIns="114300"/>
+          <a:lstStyle/>
+          <a:p>
+            <a:pPr algn="l">
+              <a:lnSpc>
+                <a:spcPct val="115000"/>
+              </a:lnSpc>
+              <a:spcAft>
+                <a:spcPts val="400"/>
+              </a:spcAft>
+            </a:pPr>
+            <a:r>
+              <a:rPr sz="1800" b="1">
+                <a:solidFill>
+                  <a:srgbClr val="00175A"/>
+                </a:solidFill>
+                <a:latin typeface="Arial"/>
+              </a:rPr>
+              <a:t>Uses low variance</a:t>
+            </a:r>
+          </a:p>
+          <a:p>
+            <a:pPr algn="l">
+              <a:lnSpc>
+                <a:spcPct val="115000"/>
+              </a:lnSpc>
+              <a:spcAft>
+                <a:spcPts val="0"/>
+              </a:spcAft>
+            </a:pPr>
+            <a:r>
+              <a:rPr sz="1500" b="0">
+                <a:solidFill>
+                  <a:srgbClr val="333B47"/>
+                </a:solidFill>
+                <a:latin typeface="Arial"/>
+              </a:rPr>
+              <a:t>Most tasks lose 0. The bet size adapts to what it has seen.</a:t>
+            </a:r>
+          </a:p>
+        </p:txBody>
+      </p:sp>
+      <p:sp>
+        <p:nvSpPr>
+          <p:cNvPr id="7" name="Rounded Rectangle 6"/>
+          <p:cNvSpPr/>
+          <p:nvPr/>
+        </p:nvSpPr>
+        <p:spPr>
+          <a:xfrm>
+            <a:off x="812800" y="4000500"/>
+            <a:ext cx="4191000" cy="952500"/>
+          </a:xfrm>
+          <a:prstGeom prst="roundRect">
+            <a:avLst>
+              <a:gd name="adj" fmla="val 10000"/>
+            </a:avLst>
+          </a:prstGeom>
+          <a:solidFill>
+            <a:srgbClr val="FFFFFF"/>
+          </a:solidFill>
+          <a:ln w="12700">
+            <a:solidFill>
+              <a:srgbClr val="D3DCE8"/>
+            </a:solidFill>
+          </a:ln>
+          <a:effectLst/>
+        </p:spPr>
+        <p:style>
+          <a:lnRef idx="1">
+            <a:schemeClr val="accent1"/>
+          </a:lnRef>
+          <a:fillRef idx="3">
+            <a:schemeClr val="accent1"/>
+          </a:fillRef>
+          <a:effectRef idx="2">
+            <a:schemeClr val="accent1"/>
+          </a:effectRef>
+          <a:fontRef idx="minor">
+            <a:schemeClr val="lt1"/>
+          </a:fontRef>
+        </p:style>
+        <p:txBody>
+          <a:bodyPr rtlCol="0" anchor="ctr" wrap="square" lIns="114300" rIns="114300" tIns="114300" bIns="114300"/>
+          <a:lstStyle/>
+          <a:p>
+            <a:pPr algn="l">
+              <a:lnSpc>
+                <a:spcPct val="115000"/>
+              </a:lnSpc>
+              <a:spcAft>
+                <a:spcPts val="400"/>
+              </a:spcAft>
+            </a:pPr>
+            <a:r>
+              <a:rPr sz="1800" b="1">
+                <a:solidFill>
+                  <a:srgbClr val="00175A"/>
+                </a:solidFill>
+                <a:latin typeface="Arial"/>
+              </a:rPr>
+              <a:t>Many thresholds, full 5%</a:t>
+            </a:r>
+          </a:p>
+          <a:p>
+            <a:pPr algn="l">
+              <a:lnSpc>
+                <a:spcPct val="115000"/>
+              </a:lnSpc>
+              <a:spcAft>
+                <a:spcPts val="0"/>
+              </a:spcAft>
+            </a:pPr>
+            <a:r>
+              <a:rPr sz="1500" b="0">
+                <a:solidFill>
+                  <a:srgbClr val="333B47"/>
+                </a:solidFill>
+                <a:latin typeface="Arial"/>
+              </a:rPr>
+              <a:t>Tested strict → loose, each test keeps the whole 5%.</a:t>
+            </a:r>
+          </a:p>
+        </p:txBody>
+      </p:sp>
+      <p:sp>
+        <p:nvSpPr>
+          <p:cNvPr id="8" name="Rounded Rectangle 7"/>
+          <p:cNvSpPr/>
+          <p:nvPr/>
+        </p:nvSpPr>
+        <p:spPr>
+          <a:xfrm>
+            <a:off x="812800" y="5048250"/>
+            <a:ext cx="4191000" cy="952500"/>
+          </a:xfrm>
+          <a:prstGeom prst="roundRect">
+            <a:avLst>
+              <a:gd name="adj" fmla="val 10000"/>
+            </a:avLst>
+          </a:prstGeom>
+          <a:solidFill>
+            <a:srgbClr val="FFFFFF"/>
+          </a:solidFill>
+          <a:ln w="12700">
+            <a:solidFill>
+              <a:srgbClr val="D3DCE8"/>
+            </a:solidFill>
+          </a:ln>
+          <a:effectLst/>
+        </p:spPr>
+        <p:style>
+          <a:lnRef idx="1">
+            <a:schemeClr val="accent1"/>
+          </a:lnRef>
+          <a:fillRef idx="3">
+            <a:schemeClr val="accent1"/>
+          </a:fillRef>
+          <a:effectRef idx="2">
+            <a:schemeClr val="accent1"/>
+          </a:effectRef>
+          <a:fontRef idx="minor">
+            <a:schemeClr val="lt1"/>
+          </a:fontRef>
+        </p:style>
+        <p:txBody>
+          <a:bodyPr rtlCol="0" anchor="ctr" wrap="square" lIns="114300" rIns="114300" tIns="114300" bIns="114300"/>
+          <a:lstStyle/>
+          <a:p>
+            <a:pPr algn="l">
+              <a:lnSpc>
+                <a:spcPct val="115000"/>
+              </a:lnSpc>
+              <a:spcAft>
+                <a:spcPts val="400"/>
+              </a:spcAft>
+            </a:pPr>
+            <a:r>
+              <a:rPr sz="1800" b="1">
+                <a:solidFill>
+                  <a:srgbClr val="00175A"/>
+                </a:solidFill>
+                <a:latin typeface="Arial"/>
+              </a:rPr>
+              <a:t>Any data</a:t>
+            </a:r>
+          </a:p>
+          <a:p>
+            <a:pPr algn="l">
+              <a:lnSpc>
+                <a:spcPct val="115000"/>
+              </a:lnSpc>
+              <a:spcAft>
+                <a:spcPts val="0"/>
+              </a:spcAft>
+            </a:pPr>
+            <a:r>
+              <a:rPr sz="1500" b="0">
+                <a:solidFill>
+                  <a:srgbClr val="333B47"/>
+                </a:solidFill>
+                <a:latin typeface="Arial"/>
+              </a:rPr>
+              <a:t>No model of the score. Only: calibration looks like deployment.</a:t>
+            </a:r>
+          </a:p>
+        </p:txBody>
+      </p:sp>
+      <p:sp>
+        <p:nvSpPr>
+          <p:cNvPr id="9" name="TextBox 8"/>
+          <p:cNvSpPr txBox="1"/>
+          <p:nvPr/>
+        </p:nvSpPr>
+        <p:spPr>
+          <a:xfrm>
+            <a:off x="5270500" y="1905000"/>
+            <a:ext cx="6108700" cy="254000"/>
+          </a:xfrm>
+          <a:prstGeom prst="rect">
+            <a:avLst/>
+          </a:prstGeom>
+          <a:noFill/>
+        </p:spPr>
+        <p:txBody>
+          <a:bodyPr wrap="square" lIns="0" rIns="0" tIns="0" bIns="0" anchor="t">
+            <a:spAutoFit/>
+          </a:bodyPr>
+          <a:lstStyle/>
+          <a:p>
+            <a:pPr algn="l">
+              <a:lnSpc>
+                <a:spcPct val="115000"/>
+              </a:lnSpc>
+              <a:spcAft>
+                <a:spcPts val="0"/>
+              </a:spcAft>
+            </a:pPr>
+            <a:r>
+              <a:rPr sz="1800" b="1">
+                <a:solidFill>
+                  <a:srgbClr val="00175A"/>
+                </a:solidFill>
+                <a:latin typeface="Arial"/>
+              </a:rPr>
+              <a:t>All valid. Which one saves the most?</a:t>
+            </a:r>
+          </a:p>
+        </p:txBody>
+      </p:sp>
+      <p:pic>
+        <p:nvPicPr>
+          <p:cNvPr id="10" name="Picture 9" descr="c_tests.png"/>
+          <p:cNvPicPr>
+            <a:picLocks noChangeAspect="1"/>
+          </p:cNvPicPr>
+          <p:nvPr/>
+        </p:nvPicPr>
+        <p:blipFill>
+          <a:blip r:embed="rId3"/>
+          <a:stretch>
+            <a:fillRect/>
+          </a:stretch>
+        </p:blipFill>
+        <p:spPr>
+          <a:xfrm>
+            <a:off x="5270500" y="2464849"/>
+            <a:ext cx="6108700" cy="2182300"/>
+          </a:xfrm>
+          <a:prstGeom prst="rect">
+            <a:avLst/>
+          </a:prstGeom>
+        </p:spPr>
+      </p:pic>
+      <p:sp>
+        <p:nvSpPr>
+          <p:cNvPr id="11" name="Rounded Rectangle 10"/>
+          <p:cNvSpPr/>
+          <p:nvPr/>
+        </p:nvSpPr>
+        <p:spPr>
+          <a:xfrm>
+            <a:off x="5270500" y="5080000"/>
+            <a:ext cx="6108700" cy="984250"/>
+          </a:xfrm>
+          <a:prstGeom prst="roundRect">
+            <a:avLst>
+              <a:gd name="adj" fmla="val 10000"/>
+            </a:avLst>
+          </a:prstGeom>
+          <a:solidFill>
+            <a:srgbClr val="E3ECE2"/>
+          </a:solidFill>
+          <a:ln w="12700">
+            <a:solidFill>
+              <a:srgbClr val="D3DCE8"/>
+            </a:solidFill>
+          </a:ln>
+          <a:effectLst/>
+        </p:spPr>
+        <p:style>
+          <a:lnRef idx="1">
+            <a:schemeClr val="accent1"/>
+          </a:lnRef>
+          <a:fillRef idx="3">
+            <a:schemeClr val="accent1"/>
+          </a:fillRef>
+          <a:effectRef idx="2">
+            <a:schemeClr val="accent1"/>
+          </a:effectRef>
+          <a:fontRef idx="minor">
+            <a:schemeClr val="lt1"/>
+          </a:fontRef>
+        </p:style>
+        <p:txBody>
+          <a:bodyPr rtlCol="0" anchor="ctr" wrap="square" lIns="190500" rIns="190500" tIns="190500" bIns="190500"/>
+          <a:lstStyle/>
+          <a:p>
+            <a:pPr algn="l">
+              <a:lnSpc>
+                <a:spcPct val="100000"/>
+              </a:lnSpc>
+              <a:spcAft>
+                <a:spcPts val="600"/>
+              </a:spcAft>
+            </a:pPr>
+            <a:r>
+              <a:rPr sz="3600" b="1">
+                <a:solidFill>
+                  <a:srgbClr val="2F6B34"/>
+                </a:solidFill>
+                <a:latin typeface="Georgia"/>
+              </a:rPr>
+              <a:t>62% vs 79–100%</a:t>
+            </a:r>
+          </a:p>
+          <a:p>
+            <a:pPr algn="l">
+              <a:lnSpc>
+                <a:spcPct val="115000"/>
+              </a:lnSpc>
+              <a:spcAft>
+                <a:spcPts val="0"/>
+              </a:spcAft>
+            </a:pPr>
+            <a:r>
+              <a:rPr sz="1700" b="0">
+                <a:solidFill>
+                  <a:srgbClr val="333B47"/>
+                </a:solidFill>
+                <a:latin typeface="Arial"/>
+              </a:rPr>
+              <a:t>of the team’s tokens at ε = 5</a:t>
+            </a:r>
+          </a:p>
+        </p:txBody>
+      </p:sp>
+      <p:sp>
+        <p:nvSpPr>
+          <p:cNvPr id="12" name="TextBox 11"/>
+          <p:cNvSpPr txBox="1"/>
+          <p:nvPr/>
+        </p:nvSpPr>
+        <p:spPr>
+          <a:xfrm>
+            <a:off x="812800" y="6413500"/>
+            <a:ext cx="10566400" cy="215900"/>
+          </a:xfrm>
+          <a:prstGeom prst="rect">
+            <a:avLst/>
+          </a:prstGeom>
+          <a:noFill/>
+        </p:spPr>
+        <p:txBody>
+          <a:bodyPr wrap="square" lIns="0" rIns="0" tIns="0" bIns="0" anchor="t">
+            <a:spAutoFit/>
+          </a:bodyPr>
+          <a:lstStyle/>
+          <a:p>
+            <a:pPr algn="r">
+              <a:lnSpc>
+                <a:spcPct val="115000"/>
+              </a:lnSpc>
+              <a:spcAft>
+                <a:spcPts val="0"/>
+              </a:spcAft>
+            </a:pPr>
+            <a:r>
+              <a:rPr sz="1200" b="0">
+                <a:solidFill>
+                  <a:srgbClr val="6B7480"/>
+                </a:solidFill>
+                <a:latin typeface="Arial"/>
+              </a:rPr>
+              <a:t>10</a:t>
             </a:r>
           </a:p>
         </p:txBody>
@@ -17510,7 +19750,3380 @@
                 </a:solidFill>
                 <a:latin typeface="Arial"/>
               </a:rPr>
-              <a:t>18</a:t>
+              <a:t>20</a:t>
+            </a:r>
+          </a:p>
+        </p:txBody>
+      </p:sp>
+    </p:spTree>
+  </p:cSld>
+  <p:clrMapOvr>
+    <a:masterClrMapping/>
+  </p:clrMapOvr>
+</p:sld>
+</file>
+
+<file path=ppt/slides/slide30.xml><?xml version="1.0" encoding="utf-8"?>
+<p:sld xmlns:a="http://schemas.openxmlformats.org/drawingml/2006/main" xmlns:p="http://schemas.openxmlformats.org/presentationml/2006/main" xmlns:r="http://schemas.openxmlformats.org/officeDocument/2006/relationships">
+  <p:cSld>
+    <p:bg>
+      <p:bgPr>
+        <a:solidFill>
+          <a:srgbClr val="F6F8FB"/>
+        </a:solidFill>
+        <a:effectLst/>
+      </p:bgPr>
+    </p:bg>
+    <p:spTree>
+      <p:nvGrpSpPr>
+        <p:cNvPr id="1" name=""/>
+        <p:cNvGrpSpPr/>
+        <p:nvPr/>
+      </p:nvGrpSpPr>
+      <p:grpSpPr/>
+      <p:sp>
+        <p:nvSpPr>
+          <p:cNvPr id="2" name="TextBox 1"/>
+          <p:cNvSpPr txBox="1"/>
+          <p:nvPr/>
+        </p:nvSpPr>
+        <p:spPr>
+          <a:xfrm>
+            <a:off x="812800" y="635000"/>
+            <a:ext cx="10566400" cy="254000"/>
+          </a:xfrm>
+          <a:prstGeom prst="rect">
+            <a:avLst/>
+          </a:prstGeom>
+          <a:noFill/>
+        </p:spPr>
+        <p:txBody>
+          <a:bodyPr wrap="square" lIns="0" rIns="0" tIns="0" bIns="0" anchor="t">
+            <a:spAutoFit/>
+          </a:bodyPr>
+          <a:lstStyle/>
+          <a:p>
+            <a:pPr algn="l">
+              <a:lnSpc>
+                <a:spcPct val="115000"/>
+              </a:lnSpc>
+              <a:spcAft>
+                <a:spcPts val="0"/>
+              </a:spcAft>
+            </a:pPr>
+            <a:r>
+              <a:rPr sz="1300" b="1">
+                <a:solidFill>
+                  <a:srgbClr val="006FCF"/>
+                </a:solidFill>
+                <a:latin typeface="Arial"/>
+              </a:rPr>
+              <a:t>STEP 2 · SETTING THE THRESHOLD · THE BETTING TEST</a:t>
+            </a:r>
+          </a:p>
+        </p:txBody>
+      </p:sp>
+      <p:sp>
+        <p:nvSpPr>
+          <p:cNvPr id="3" name="TextBox 2"/>
+          <p:cNvSpPr txBox="1"/>
+          <p:nvPr/>
+        </p:nvSpPr>
+        <p:spPr>
+          <a:xfrm>
+            <a:off x="812800" y="889000"/>
+            <a:ext cx="10566400" cy="571500"/>
+          </a:xfrm>
+          <a:prstGeom prst="rect">
+            <a:avLst/>
+          </a:prstGeom>
+          <a:noFill/>
+        </p:spPr>
+        <p:txBody>
+          <a:bodyPr wrap="square" lIns="0" rIns="0" tIns="0" bIns="0" anchor="t">
+            <a:spAutoFit/>
+          </a:bodyPr>
+          <a:lstStyle/>
+          <a:p>
+            <a:pPr algn="l">
+              <a:lnSpc>
+                <a:spcPct val="105000"/>
+              </a:lnSpc>
+              <a:spcAft>
+                <a:spcPts val="0"/>
+              </a:spcAft>
+            </a:pPr>
+            <a:r>
+              <a:rPr sz="3000" b="1">
+                <a:solidFill>
+                  <a:srgbClr val="00175A"/>
+                </a:solidFill>
+                <a:latin typeface="Georgia"/>
+              </a:rPr>
+              <a:t>In CLIMB: testing one threshold, task by task</a:t>
+            </a:r>
+          </a:p>
+        </p:txBody>
+      </p:sp>
+      <p:sp>
+        <p:nvSpPr>
+          <p:cNvPr id="4" name="Rectangle 3"/>
+          <p:cNvSpPr/>
+          <p:nvPr/>
+        </p:nvSpPr>
+        <p:spPr>
+          <a:xfrm>
+            <a:off x="812800" y="1587500"/>
+            <a:ext cx="596900" cy="355600"/>
+          </a:xfrm>
+          <a:prstGeom prst="rect">
+            <a:avLst/>
+          </a:prstGeom>
+          <a:solidFill>
+            <a:srgbClr val="00175A"/>
+          </a:solidFill>
+          <a:ln>
+            <a:noFill/>
+          </a:ln>
+          <a:effectLst/>
+        </p:spPr>
+        <p:style>
+          <a:lnRef idx="1">
+            <a:schemeClr val="accent1"/>
+          </a:lnRef>
+          <a:fillRef idx="3">
+            <a:schemeClr val="accent1"/>
+          </a:fillRef>
+          <a:effectRef idx="2">
+            <a:schemeClr val="accent1"/>
+          </a:effectRef>
+          <a:fontRef idx="minor">
+            <a:schemeClr val="lt1"/>
+          </a:fontRef>
+        </p:style>
+        <p:txBody>
+          <a:bodyPr rtlCol="0" anchor="ctr" wrap="square" lIns="12700" rIns="12700" tIns="12700" bIns="12700"/>
+          <a:lstStyle/>
+          <a:p>
+            <a:pPr algn="ctr">
+              <a:lnSpc>
+                <a:spcPct val="115000"/>
+              </a:lnSpc>
+              <a:spcAft>
+                <a:spcPts val="0"/>
+              </a:spcAft>
+            </a:pPr>
+            <a:r>
+              <a:rPr sz="1500" b="1">
+                <a:solidFill>
+                  <a:srgbClr val="F6F8FB"/>
+                </a:solidFill>
+                <a:latin typeface="Arial"/>
+              </a:rPr>
+              <a:t>Task</a:t>
+            </a:r>
+          </a:p>
+        </p:txBody>
+      </p:sp>
+      <p:sp>
+        <p:nvSpPr>
+          <p:cNvPr id="5" name="Rectangle 4"/>
+          <p:cNvSpPr/>
+          <p:nvPr/>
+        </p:nvSpPr>
+        <p:spPr>
+          <a:xfrm>
+            <a:off x="812800" y="1993900"/>
+            <a:ext cx="596900" cy="469900"/>
+          </a:xfrm>
+          <a:prstGeom prst="rect">
+            <a:avLst/>
+          </a:prstGeom>
+          <a:solidFill>
+            <a:srgbClr val="FFFFFF"/>
+          </a:solidFill>
+          <a:ln>
+            <a:noFill/>
+          </a:ln>
+          <a:effectLst/>
+        </p:spPr>
+        <p:style>
+          <a:lnRef idx="1">
+            <a:schemeClr val="accent1"/>
+          </a:lnRef>
+          <a:fillRef idx="3">
+            <a:schemeClr val="accent1"/>
+          </a:fillRef>
+          <a:effectRef idx="2">
+            <a:schemeClr val="accent1"/>
+          </a:effectRef>
+          <a:fontRef idx="minor">
+            <a:schemeClr val="lt1"/>
+          </a:fontRef>
+        </p:style>
+        <p:txBody>
+          <a:bodyPr rtlCol="0" anchor="ctr" wrap="square" lIns="12700" rIns="12700" tIns="12700" bIns="12700"/>
+          <a:lstStyle/>
+          <a:p>
+            <a:pPr algn="ctr">
+              <a:lnSpc>
+                <a:spcPct val="115000"/>
+              </a:lnSpc>
+              <a:spcAft>
+                <a:spcPts val="0"/>
+              </a:spcAft>
+            </a:pPr>
+            <a:r>
+              <a:rPr sz="1700" b="0">
+                <a:solidFill>
+                  <a:srgbClr val="00175A"/>
+                </a:solidFill>
+                <a:latin typeface="Arial"/>
+              </a:rPr>
+              <a:t>1</a:t>
+            </a:r>
+          </a:p>
+        </p:txBody>
+      </p:sp>
+      <p:sp>
+        <p:nvSpPr>
+          <p:cNvPr id="6" name="Rectangle 5"/>
+          <p:cNvSpPr/>
+          <p:nvPr/>
+        </p:nvSpPr>
+        <p:spPr>
+          <a:xfrm>
+            <a:off x="812800" y="2501900"/>
+            <a:ext cx="596900" cy="469900"/>
+          </a:xfrm>
+          <a:prstGeom prst="rect">
+            <a:avLst/>
+          </a:prstGeom>
+          <a:solidFill>
+            <a:srgbClr val="E9EEF5"/>
+          </a:solidFill>
+          <a:ln>
+            <a:noFill/>
+          </a:ln>
+          <a:effectLst/>
+        </p:spPr>
+        <p:style>
+          <a:lnRef idx="1">
+            <a:schemeClr val="accent1"/>
+          </a:lnRef>
+          <a:fillRef idx="3">
+            <a:schemeClr val="accent1"/>
+          </a:fillRef>
+          <a:effectRef idx="2">
+            <a:schemeClr val="accent1"/>
+          </a:effectRef>
+          <a:fontRef idx="minor">
+            <a:schemeClr val="lt1"/>
+          </a:fontRef>
+        </p:style>
+        <p:txBody>
+          <a:bodyPr rtlCol="0" anchor="ctr" wrap="square" lIns="12700" rIns="12700" tIns="12700" bIns="12700"/>
+          <a:lstStyle/>
+          <a:p>
+            <a:pPr algn="ctr">
+              <a:lnSpc>
+                <a:spcPct val="115000"/>
+              </a:lnSpc>
+              <a:spcAft>
+                <a:spcPts val="0"/>
+              </a:spcAft>
+            </a:pPr>
+            <a:r>
+              <a:rPr sz="1700" b="0">
+                <a:solidFill>
+                  <a:srgbClr val="00175A"/>
+                </a:solidFill>
+                <a:latin typeface="Arial"/>
+              </a:rPr>
+              <a:t>2</a:t>
+            </a:r>
+          </a:p>
+        </p:txBody>
+      </p:sp>
+      <p:sp>
+        <p:nvSpPr>
+          <p:cNvPr id="7" name="Rectangle 6"/>
+          <p:cNvSpPr/>
+          <p:nvPr/>
+        </p:nvSpPr>
+        <p:spPr>
+          <a:xfrm>
+            <a:off x="812800" y="3009900"/>
+            <a:ext cx="596900" cy="469900"/>
+          </a:xfrm>
+          <a:prstGeom prst="rect">
+            <a:avLst/>
+          </a:prstGeom>
+          <a:solidFill>
+            <a:srgbClr val="F6E3E0"/>
+          </a:solidFill>
+          <a:ln>
+            <a:noFill/>
+          </a:ln>
+          <a:effectLst/>
+        </p:spPr>
+        <p:style>
+          <a:lnRef idx="1">
+            <a:schemeClr val="accent1"/>
+          </a:lnRef>
+          <a:fillRef idx="3">
+            <a:schemeClr val="accent1"/>
+          </a:fillRef>
+          <a:effectRef idx="2">
+            <a:schemeClr val="accent1"/>
+          </a:effectRef>
+          <a:fontRef idx="minor">
+            <a:schemeClr val="lt1"/>
+          </a:fontRef>
+        </p:style>
+        <p:txBody>
+          <a:bodyPr rtlCol="0" anchor="ctr" wrap="square" lIns="12700" rIns="12700" tIns="12700" bIns="12700"/>
+          <a:lstStyle/>
+          <a:p>
+            <a:pPr algn="ctr">
+              <a:lnSpc>
+                <a:spcPct val="115000"/>
+              </a:lnSpc>
+              <a:spcAft>
+                <a:spcPts val="0"/>
+              </a:spcAft>
+            </a:pPr>
+            <a:r>
+              <a:rPr sz="1700" b="0">
+                <a:solidFill>
+                  <a:srgbClr val="00175A"/>
+                </a:solidFill>
+                <a:latin typeface="Arial"/>
+              </a:rPr>
+              <a:t>3</a:t>
+            </a:r>
+          </a:p>
+        </p:txBody>
+      </p:sp>
+      <p:sp>
+        <p:nvSpPr>
+          <p:cNvPr id="8" name="Rectangle 7"/>
+          <p:cNvSpPr/>
+          <p:nvPr/>
+        </p:nvSpPr>
+        <p:spPr>
+          <a:xfrm>
+            <a:off x="812800" y="3517900"/>
+            <a:ext cx="596900" cy="469900"/>
+          </a:xfrm>
+          <a:prstGeom prst="rect">
+            <a:avLst/>
+          </a:prstGeom>
+          <a:solidFill>
+            <a:srgbClr val="E3ECE2"/>
+          </a:solidFill>
+          <a:ln>
+            <a:noFill/>
+          </a:ln>
+          <a:effectLst/>
+        </p:spPr>
+        <p:style>
+          <a:lnRef idx="1">
+            <a:schemeClr val="accent1"/>
+          </a:lnRef>
+          <a:fillRef idx="3">
+            <a:schemeClr val="accent1"/>
+          </a:fillRef>
+          <a:effectRef idx="2">
+            <a:schemeClr val="accent1"/>
+          </a:effectRef>
+          <a:fontRef idx="minor">
+            <a:schemeClr val="lt1"/>
+          </a:fontRef>
+        </p:style>
+        <p:txBody>
+          <a:bodyPr rtlCol="0" anchor="ctr" wrap="square" lIns="12700" rIns="12700" tIns="12700" bIns="12700"/>
+          <a:lstStyle/>
+          <a:p>
+            <a:pPr algn="ctr">
+              <a:lnSpc>
+                <a:spcPct val="115000"/>
+              </a:lnSpc>
+              <a:spcAft>
+                <a:spcPts val="0"/>
+              </a:spcAft>
+            </a:pPr>
+            <a:r>
+              <a:rPr sz="1700" b="0">
+                <a:solidFill>
+                  <a:srgbClr val="00175A"/>
+                </a:solidFill>
+                <a:latin typeface="Arial"/>
+              </a:rPr>
+              <a:t>4</a:t>
+            </a:r>
+          </a:p>
+        </p:txBody>
+      </p:sp>
+      <p:sp>
+        <p:nvSpPr>
+          <p:cNvPr id="9" name="Rectangle 8"/>
+          <p:cNvSpPr/>
+          <p:nvPr/>
+        </p:nvSpPr>
+        <p:spPr>
+          <a:xfrm>
+            <a:off x="812800" y="4025900"/>
+            <a:ext cx="596900" cy="469900"/>
+          </a:xfrm>
+          <a:prstGeom prst="rect">
+            <a:avLst/>
+          </a:prstGeom>
+          <a:solidFill>
+            <a:srgbClr val="FFFFFF"/>
+          </a:solidFill>
+          <a:ln>
+            <a:noFill/>
+          </a:ln>
+          <a:effectLst/>
+        </p:spPr>
+        <p:style>
+          <a:lnRef idx="1">
+            <a:schemeClr val="accent1"/>
+          </a:lnRef>
+          <a:fillRef idx="3">
+            <a:schemeClr val="accent1"/>
+          </a:fillRef>
+          <a:effectRef idx="2">
+            <a:schemeClr val="accent1"/>
+          </a:effectRef>
+          <a:fontRef idx="minor">
+            <a:schemeClr val="lt1"/>
+          </a:fontRef>
+        </p:style>
+        <p:txBody>
+          <a:bodyPr rtlCol="0" anchor="ctr" wrap="square" lIns="12700" rIns="12700" tIns="12700" bIns="12700"/>
+          <a:lstStyle/>
+          <a:p>
+            <a:pPr algn="ctr">
+              <a:lnSpc>
+                <a:spcPct val="115000"/>
+              </a:lnSpc>
+              <a:spcAft>
+                <a:spcPts val="0"/>
+              </a:spcAft>
+            </a:pPr>
+            <a:r>
+              <a:rPr sz="1700" b="0">
+                <a:solidFill>
+                  <a:srgbClr val="00175A"/>
+                </a:solidFill>
+                <a:latin typeface="Arial"/>
+              </a:rPr>
+              <a:t>5</a:t>
+            </a:r>
+          </a:p>
+        </p:txBody>
+      </p:sp>
+      <p:sp>
+        <p:nvSpPr>
+          <p:cNvPr id="10" name="Rectangle 9"/>
+          <p:cNvSpPr/>
+          <p:nvPr/>
+        </p:nvSpPr>
+        <p:spPr>
+          <a:xfrm>
+            <a:off x="812800" y="4533900"/>
+            <a:ext cx="596900" cy="469900"/>
+          </a:xfrm>
+          <a:prstGeom prst="rect">
+            <a:avLst/>
+          </a:prstGeom>
+          <a:solidFill>
+            <a:srgbClr val="E9EEF5"/>
+          </a:solidFill>
+          <a:ln>
+            <a:noFill/>
+          </a:ln>
+          <a:effectLst/>
+        </p:spPr>
+        <p:style>
+          <a:lnRef idx="1">
+            <a:schemeClr val="accent1"/>
+          </a:lnRef>
+          <a:fillRef idx="3">
+            <a:schemeClr val="accent1"/>
+          </a:fillRef>
+          <a:effectRef idx="2">
+            <a:schemeClr val="accent1"/>
+          </a:effectRef>
+          <a:fontRef idx="minor">
+            <a:schemeClr val="lt1"/>
+          </a:fontRef>
+        </p:style>
+        <p:txBody>
+          <a:bodyPr rtlCol="0" anchor="ctr" wrap="square" lIns="12700" rIns="12700" tIns="12700" bIns="12700"/>
+          <a:lstStyle/>
+          <a:p>
+            <a:pPr algn="ctr">
+              <a:lnSpc>
+                <a:spcPct val="115000"/>
+              </a:lnSpc>
+              <a:spcAft>
+                <a:spcPts val="0"/>
+              </a:spcAft>
+            </a:pPr>
+            <a:r>
+              <a:rPr sz="1700" b="0">
+                <a:solidFill>
+                  <a:srgbClr val="00175A"/>
+                </a:solidFill>
+                <a:latin typeface="Arial"/>
+              </a:rPr>
+              <a:t>…</a:t>
+            </a:r>
+          </a:p>
+        </p:txBody>
+      </p:sp>
+      <p:sp>
+        <p:nvSpPr>
+          <p:cNvPr id="11" name="Rectangle 10"/>
+          <p:cNvSpPr/>
+          <p:nvPr/>
+        </p:nvSpPr>
+        <p:spPr>
+          <a:xfrm>
+            <a:off x="1447800" y="1587500"/>
+            <a:ext cx="1168400" cy="355600"/>
+          </a:xfrm>
+          <a:prstGeom prst="rect">
+            <a:avLst/>
+          </a:prstGeom>
+          <a:solidFill>
+            <a:srgbClr val="00175A"/>
+          </a:solidFill>
+          <a:ln>
+            <a:noFill/>
+          </a:ln>
+          <a:effectLst/>
+        </p:spPr>
+        <p:style>
+          <a:lnRef idx="1">
+            <a:schemeClr val="accent1"/>
+          </a:lnRef>
+          <a:fillRef idx="3">
+            <a:schemeClr val="accent1"/>
+          </a:fillRef>
+          <a:effectRef idx="2">
+            <a:schemeClr val="accent1"/>
+          </a:effectRef>
+          <a:fontRef idx="minor">
+            <a:schemeClr val="lt1"/>
+          </a:fontRef>
+        </p:style>
+        <p:txBody>
+          <a:bodyPr rtlCol="0" anchor="ctr" wrap="square" lIns="12700" rIns="12700" tIns="12700" bIns="12700"/>
+          <a:lstStyle/>
+          <a:p>
+            <a:pPr algn="ctr">
+              <a:lnSpc>
+                <a:spcPct val="115000"/>
+              </a:lnSpc>
+              <a:spcAft>
+                <a:spcPts val="0"/>
+              </a:spcAft>
+            </a:pPr>
+            <a:r>
+              <a:rPr sz="1500" b="1">
+                <a:solidFill>
+                  <a:srgbClr val="F6F8FB"/>
+                </a:solidFill>
+                <a:latin typeface="Arial"/>
+              </a:rPr>
+              <a:t>Score &gt; t?</a:t>
+            </a:r>
+          </a:p>
+        </p:txBody>
+      </p:sp>
+      <p:sp>
+        <p:nvSpPr>
+          <p:cNvPr id="12" name="Rectangle 11"/>
+          <p:cNvSpPr/>
+          <p:nvPr/>
+        </p:nvSpPr>
+        <p:spPr>
+          <a:xfrm>
+            <a:off x="1447800" y="1993900"/>
+            <a:ext cx="1168400" cy="469900"/>
+          </a:xfrm>
+          <a:prstGeom prst="rect">
+            <a:avLst/>
+          </a:prstGeom>
+          <a:solidFill>
+            <a:srgbClr val="FFFFFF"/>
+          </a:solidFill>
+          <a:ln>
+            <a:noFill/>
+          </a:ln>
+          <a:effectLst/>
+        </p:spPr>
+        <p:style>
+          <a:lnRef idx="1">
+            <a:schemeClr val="accent1"/>
+          </a:lnRef>
+          <a:fillRef idx="3">
+            <a:schemeClr val="accent1"/>
+          </a:fillRef>
+          <a:effectRef idx="2">
+            <a:schemeClr val="accent1"/>
+          </a:effectRef>
+          <a:fontRef idx="minor">
+            <a:schemeClr val="lt1"/>
+          </a:fontRef>
+        </p:style>
+        <p:txBody>
+          <a:bodyPr rtlCol="0" anchor="ctr" wrap="square" lIns="12700" rIns="12700" tIns="12700" bIns="12700"/>
+          <a:lstStyle/>
+          <a:p>
+            <a:pPr algn="ctr">
+              <a:lnSpc>
+                <a:spcPct val="115000"/>
+              </a:lnSpc>
+              <a:spcAft>
+                <a:spcPts val="0"/>
+              </a:spcAft>
+            </a:pPr>
+            <a:r>
+              <a:rPr sz="1700" b="0">
+                <a:solidFill>
+                  <a:srgbClr val="00175A"/>
+                </a:solidFill>
+                <a:latin typeface="Arial"/>
+              </a:rPr>
+              <a:t>yes, stop</a:t>
+            </a:r>
+          </a:p>
+        </p:txBody>
+      </p:sp>
+      <p:sp>
+        <p:nvSpPr>
+          <p:cNvPr id="13" name="Rectangle 12"/>
+          <p:cNvSpPr/>
+          <p:nvPr/>
+        </p:nvSpPr>
+        <p:spPr>
+          <a:xfrm>
+            <a:off x="1447800" y="2501900"/>
+            <a:ext cx="1168400" cy="469900"/>
+          </a:xfrm>
+          <a:prstGeom prst="rect">
+            <a:avLst/>
+          </a:prstGeom>
+          <a:solidFill>
+            <a:srgbClr val="E9EEF5"/>
+          </a:solidFill>
+          <a:ln>
+            <a:noFill/>
+          </a:ln>
+          <a:effectLst/>
+        </p:spPr>
+        <p:style>
+          <a:lnRef idx="1">
+            <a:schemeClr val="accent1"/>
+          </a:lnRef>
+          <a:fillRef idx="3">
+            <a:schemeClr val="accent1"/>
+          </a:fillRef>
+          <a:effectRef idx="2">
+            <a:schemeClr val="accent1"/>
+          </a:effectRef>
+          <a:fontRef idx="minor">
+            <a:schemeClr val="lt1"/>
+          </a:fontRef>
+        </p:style>
+        <p:txBody>
+          <a:bodyPr rtlCol="0" anchor="ctr" wrap="square" lIns="12700" rIns="12700" tIns="12700" bIns="12700"/>
+          <a:lstStyle/>
+          <a:p>
+            <a:pPr algn="ctr">
+              <a:lnSpc>
+                <a:spcPct val="115000"/>
+              </a:lnSpc>
+              <a:spcAft>
+                <a:spcPts val="0"/>
+              </a:spcAft>
+            </a:pPr>
+            <a:r>
+              <a:rPr sz="1700" b="0">
+                <a:solidFill>
+                  <a:srgbClr val="00175A"/>
+                </a:solidFill>
+                <a:latin typeface="Arial"/>
+              </a:rPr>
+              <a:t>no → team</a:t>
+            </a:r>
+          </a:p>
+        </p:txBody>
+      </p:sp>
+      <p:sp>
+        <p:nvSpPr>
+          <p:cNvPr id="14" name="Rectangle 13"/>
+          <p:cNvSpPr/>
+          <p:nvPr/>
+        </p:nvSpPr>
+        <p:spPr>
+          <a:xfrm>
+            <a:off x="1447800" y="3009900"/>
+            <a:ext cx="1168400" cy="469900"/>
+          </a:xfrm>
+          <a:prstGeom prst="rect">
+            <a:avLst/>
+          </a:prstGeom>
+          <a:solidFill>
+            <a:srgbClr val="F6E3E0"/>
+          </a:solidFill>
+          <a:ln>
+            <a:noFill/>
+          </a:ln>
+          <a:effectLst/>
+        </p:spPr>
+        <p:style>
+          <a:lnRef idx="1">
+            <a:schemeClr val="accent1"/>
+          </a:lnRef>
+          <a:fillRef idx="3">
+            <a:schemeClr val="accent1"/>
+          </a:fillRef>
+          <a:effectRef idx="2">
+            <a:schemeClr val="accent1"/>
+          </a:effectRef>
+          <a:fontRef idx="minor">
+            <a:schemeClr val="lt1"/>
+          </a:fontRef>
+        </p:style>
+        <p:txBody>
+          <a:bodyPr rtlCol="0" anchor="ctr" wrap="square" lIns="12700" rIns="12700" tIns="12700" bIns="12700"/>
+          <a:lstStyle/>
+          <a:p>
+            <a:pPr algn="ctr">
+              <a:lnSpc>
+                <a:spcPct val="115000"/>
+              </a:lnSpc>
+              <a:spcAft>
+                <a:spcPts val="0"/>
+              </a:spcAft>
+            </a:pPr>
+            <a:r>
+              <a:rPr sz="1700" b="0">
+                <a:solidFill>
+                  <a:srgbClr val="00175A"/>
+                </a:solidFill>
+                <a:latin typeface="Arial"/>
+              </a:rPr>
+              <a:t>yes, stop</a:t>
+            </a:r>
+          </a:p>
+        </p:txBody>
+      </p:sp>
+      <p:sp>
+        <p:nvSpPr>
+          <p:cNvPr id="15" name="Rectangle 14"/>
+          <p:cNvSpPr/>
+          <p:nvPr/>
+        </p:nvSpPr>
+        <p:spPr>
+          <a:xfrm>
+            <a:off x="1447800" y="3517900"/>
+            <a:ext cx="1168400" cy="469900"/>
+          </a:xfrm>
+          <a:prstGeom prst="rect">
+            <a:avLst/>
+          </a:prstGeom>
+          <a:solidFill>
+            <a:srgbClr val="E3ECE2"/>
+          </a:solidFill>
+          <a:ln>
+            <a:noFill/>
+          </a:ln>
+          <a:effectLst/>
+        </p:spPr>
+        <p:style>
+          <a:lnRef idx="1">
+            <a:schemeClr val="accent1"/>
+          </a:lnRef>
+          <a:fillRef idx="3">
+            <a:schemeClr val="accent1"/>
+          </a:fillRef>
+          <a:effectRef idx="2">
+            <a:schemeClr val="accent1"/>
+          </a:effectRef>
+          <a:fontRef idx="minor">
+            <a:schemeClr val="lt1"/>
+          </a:fontRef>
+        </p:style>
+        <p:txBody>
+          <a:bodyPr rtlCol="0" anchor="ctr" wrap="square" lIns="12700" rIns="12700" tIns="12700" bIns="12700"/>
+          <a:lstStyle/>
+          <a:p>
+            <a:pPr algn="ctr">
+              <a:lnSpc>
+                <a:spcPct val="115000"/>
+              </a:lnSpc>
+              <a:spcAft>
+                <a:spcPts val="0"/>
+              </a:spcAft>
+            </a:pPr>
+            <a:r>
+              <a:rPr sz="1700" b="0">
+                <a:solidFill>
+                  <a:srgbClr val="00175A"/>
+                </a:solidFill>
+                <a:latin typeface="Arial"/>
+              </a:rPr>
+              <a:t>yes, stop</a:t>
+            </a:r>
+          </a:p>
+        </p:txBody>
+      </p:sp>
+      <p:sp>
+        <p:nvSpPr>
+          <p:cNvPr id="16" name="Rectangle 15"/>
+          <p:cNvSpPr/>
+          <p:nvPr/>
+        </p:nvSpPr>
+        <p:spPr>
+          <a:xfrm>
+            <a:off x="1447800" y="4025900"/>
+            <a:ext cx="1168400" cy="469900"/>
+          </a:xfrm>
+          <a:prstGeom prst="rect">
+            <a:avLst/>
+          </a:prstGeom>
+          <a:solidFill>
+            <a:srgbClr val="FFFFFF"/>
+          </a:solidFill>
+          <a:ln>
+            <a:noFill/>
+          </a:ln>
+          <a:effectLst/>
+        </p:spPr>
+        <p:style>
+          <a:lnRef idx="1">
+            <a:schemeClr val="accent1"/>
+          </a:lnRef>
+          <a:fillRef idx="3">
+            <a:schemeClr val="accent1"/>
+          </a:fillRef>
+          <a:effectRef idx="2">
+            <a:schemeClr val="accent1"/>
+          </a:effectRef>
+          <a:fontRef idx="minor">
+            <a:schemeClr val="lt1"/>
+          </a:fontRef>
+        </p:style>
+        <p:txBody>
+          <a:bodyPr rtlCol="0" anchor="ctr" wrap="square" lIns="12700" rIns="12700" tIns="12700" bIns="12700"/>
+          <a:lstStyle/>
+          <a:p>
+            <a:pPr algn="ctr">
+              <a:lnSpc>
+                <a:spcPct val="115000"/>
+              </a:lnSpc>
+              <a:spcAft>
+                <a:spcPts val="0"/>
+              </a:spcAft>
+            </a:pPr>
+            <a:r>
+              <a:rPr sz="1700" b="0">
+                <a:solidFill>
+                  <a:srgbClr val="00175A"/>
+                </a:solidFill>
+                <a:latin typeface="Arial"/>
+              </a:rPr>
+              <a:t>yes, stop</a:t>
+            </a:r>
+          </a:p>
+        </p:txBody>
+      </p:sp>
+      <p:sp>
+        <p:nvSpPr>
+          <p:cNvPr id="17" name="Rectangle 16"/>
+          <p:cNvSpPr/>
+          <p:nvPr/>
+        </p:nvSpPr>
+        <p:spPr>
+          <a:xfrm>
+            <a:off x="1447800" y="4533900"/>
+            <a:ext cx="1168400" cy="469900"/>
+          </a:xfrm>
+          <a:prstGeom prst="rect">
+            <a:avLst/>
+          </a:prstGeom>
+          <a:solidFill>
+            <a:srgbClr val="E9EEF5"/>
+          </a:solidFill>
+          <a:ln>
+            <a:noFill/>
+          </a:ln>
+          <a:effectLst/>
+        </p:spPr>
+        <p:style>
+          <a:lnRef idx="1">
+            <a:schemeClr val="accent1"/>
+          </a:lnRef>
+          <a:fillRef idx="3">
+            <a:schemeClr val="accent1"/>
+          </a:fillRef>
+          <a:effectRef idx="2">
+            <a:schemeClr val="accent1"/>
+          </a:effectRef>
+          <a:fontRef idx="minor">
+            <a:schemeClr val="lt1"/>
+          </a:fontRef>
+        </p:style>
+        <p:txBody>
+          <a:bodyPr rtlCol="0" anchor="ctr" wrap="square" lIns="12700" rIns="12700" tIns="12700" bIns="12700"/>
+          <a:lstStyle/>
+          <a:p>
+            <a:pPr algn="ctr">
+              <a:lnSpc>
+                <a:spcPct val="115000"/>
+              </a:lnSpc>
+              <a:spcAft>
+                <a:spcPts val="0"/>
+              </a:spcAft>
+            </a:pPr>
+          </a:p>
+        </p:txBody>
+      </p:sp>
+      <p:sp>
+        <p:nvSpPr>
+          <p:cNvPr id="18" name="Rectangle 17"/>
+          <p:cNvSpPr/>
+          <p:nvPr/>
+        </p:nvSpPr>
+        <p:spPr>
+          <a:xfrm>
+            <a:off x="2654300" y="1587500"/>
+            <a:ext cx="1104900" cy="355600"/>
+          </a:xfrm>
+          <a:prstGeom prst="rect">
+            <a:avLst/>
+          </a:prstGeom>
+          <a:solidFill>
+            <a:srgbClr val="00175A"/>
+          </a:solidFill>
+          <a:ln>
+            <a:noFill/>
+          </a:ln>
+          <a:effectLst/>
+        </p:spPr>
+        <p:style>
+          <a:lnRef idx="1">
+            <a:schemeClr val="accent1"/>
+          </a:lnRef>
+          <a:fillRef idx="3">
+            <a:schemeClr val="accent1"/>
+          </a:fillRef>
+          <a:effectRef idx="2">
+            <a:schemeClr val="accent1"/>
+          </a:effectRef>
+          <a:fontRef idx="minor">
+            <a:schemeClr val="lt1"/>
+          </a:fontRef>
+        </p:style>
+        <p:txBody>
+          <a:bodyPr rtlCol="0" anchor="ctr" wrap="square" lIns="12700" rIns="12700" tIns="12700" bIns="12700"/>
+          <a:lstStyle/>
+          <a:p>
+            <a:pPr algn="ctr">
+              <a:lnSpc>
+                <a:spcPct val="115000"/>
+              </a:lnSpc>
+              <a:spcAft>
+                <a:spcPts val="0"/>
+              </a:spcAft>
+            </a:pPr>
+            <a:r>
+              <a:rPr sz="1500" b="1">
+                <a:solidFill>
+                  <a:srgbClr val="F6F8FB"/>
+                </a:solidFill>
+                <a:latin typeface="Arial"/>
+              </a:rPr>
+              <a:t>Our answer</a:t>
+            </a:r>
+          </a:p>
+        </p:txBody>
+      </p:sp>
+      <p:sp>
+        <p:nvSpPr>
+          <p:cNvPr id="19" name="Rectangle 18"/>
+          <p:cNvSpPr/>
+          <p:nvPr/>
+        </p:nvSpPr>
+        <p:spPr>
+          <a:xfrm>
+            <a:off x="2654300" y="1993900"/>
+            <a:ext cx="1104900" cy="469900"/>
+          </a:xfrm>
+          <a:prstGeom prst="rect">
+            <a:avLst/>
+          </a:prstGeom>
+          <a:solidFill>
+            <a:srgbClr val="FFFFFF"/>
+          </a:solidFill>
+          <a:ln>
+            <a:noFill/>
+          </a:ln>
+          <a:effectLst/>
+        </p:spPr>
+        <p:style>
+          <a:lnRef idx="1">
+            <a:schemeClr val="accent1"/>
+          </a:lnRef>
+          <a:fillRef idx="3">
+            <a:schemeClr val="accent1"/>
+          </a:fillRef>
+          <a:effectRef idx="2">
+            <a:schemeClr val="accent1"/>
+          </a:effectRef>
+          <a:fontRef idx="minor">
+            <a:schemeClr val="lt1"/>
+          </a:fontRef>
+        </p:style>
+        <p:txBody>
+          <a:bodyPr rtlCol="0" anchor="ctr" wrap="square" lIns="12700" rIns="12700" tIns="12700" bIns="12700"/>
+          <a:lstStyle/>
+          <a:p>
+            <a:pPr algn="ctr">
+              <a:lnSpc>
+                <a:spcPct val="115000"/>
+              </a:lnSpc>
+              <a:spcAft>
+                <a:spcPts val="0"/>
+              </a:spcAft>
+            </a:pPr>
+            <a:r>
+              <a:rPr sz="1700" b="0">
+                <a:solidFill>
+                  <a:srgbClr val="00175A"/>
+                </a:solidFill>
+                <a:latin typeface="Arial"/>
+              </a:rPr>
+              <a:t>✓</a:t>
+            </a:r>
+          </a:p>
+        </p:txBody>
+      </p:sp>
+      <p:sp>
+        <p:nvSpPr>
+          <p:cNvPr id="20" name="Rectangle 19"/>
+          <p:cNvSpPr/>
+          <p:nvPr/>
+        </p:nvSpPr>
+        <p:spPr>
+          <a:xfrm>
+            <a:off x="2654300" y="2501900"/>
+            <a:ext cx="1104900" cy="469900"/>
+          </a:xfrm>
+          <a:prstGeom prst="rect">
+            <a:avLst/>
+          </a:prstGeom>
+          <a:solidFill>
+            <a:srgbClr val="E9EEF5"/>
+          </a:solidFill>
+          <a:ln>
+            <a:noFill/>
+          </a:ln>
+          <a:effectLst/>
+        </p:spPr>
+        <p:style>
+          <a:lnRef idx="1">
+            <a:schemeClr val="accent1"/>
+          </a:lnRef>
+          <a:fillRef idx="3">
+            <a:schemeClr val="accent1"/>
+          </a:fillRef>
+          <a:effectRef idx="2">
+            <a:schemeClr val="accent1"/>
+          </a:effectRef>
+          <a:fontRef idx="minor">
+            <a:schemeClr val="lt1"/>
+          </a:fontRef>
+        </p:style>
+        <p:txBody>
+          <a:bodyPr rtlCol="0" anchor="ctr" wrap="square" lIns="12700" rIns="12700" tIns="12700" bIns="12700"/>
+          <a:lstStyle/>
+          <a:p>
+            <a:pPr algn="ctr">
+              <a:lnSpc>
+                <a:spcPct val="115000"/>
+              </a:lnSpc>
+              <a:spcAft>
+                <a:spcPts val="0"/>
+              </a:spcAft>
+            </a:pPr>
+            <a:r>
+              <a:rPr sz="1700" b="0">
+                <a:solidFill>
+                  <a:srgbClr val="00175A"/>
+                </a:solidFill>
+                <a:latin typeface="Arial"/>
+              </a:rPr>
+              <a:t>team’s</a:t>
+            </a:r>
+          </a:p>
+        </p:txBody>
+      </p:sp>
+      <p:sp>
+        <p:nvSpPr>
+          <p:cNvPr id="21" name="Rectangle 20"/>
+          <p:cNvSpPr/>
+          <p:nvPr/>
+        </p:nvSpPr>
+        <p:spPr>
+          <a:xfrm>
+            <a:off x="2654300" y="3009900"/>
+            <a:ext cx="1104900" cy="469900"/>
+          </a:xfrm>
+          <a:prstGeom prst="rect">
+            <a:avLst/>
+          </a:prstGeom>
+          <a:solidFill>
+            <a:srgbClr val="F6E3E0"/>
+          </a:solidFill>
+          <a:ln>
+            <a:noFill/>
+          </a:ln>
+          <a:effectLst/>
+        </p:spPr>
+        <p:style>
+          <a:lnRef idx="1">
+            <a:schemeClr val="accent1"/>
+          </a:lnRef>
+          <a:fillRef idx="3">
+            <a:schemeClr val="accent1"/>
+          </a:fillRef>
+          <a:effectRef idx="2">
+            <a:schemeClr val="accent1"/>
+          </a:effectRef>
+          <a:fontRef idx="minor">
+            <a:schemeClr val="lt1"/>
+          </a:fontRef>
+        </p:style>
+        <p:txBody>
+          <a:bodyPr rtlCol="0" anchor="ctr" wrap="square" lIns="12700" rIns="12700" tIns="12700" bIns="12700"/>
+          <a:lstStyle/>
+          <a:p>
+            <a:pPr algn="ctr">
+              <a:lnSpc>
+                <a:spcPct val="115000"/>
+              </a:lnSpc>
+              <a:spcAft>
+                <a:spcPts val="0"/>
+              </a:spcAft>
+            </a:pPr>
+            <a:r>
+              <a:rPr sz="1700" b="0">
+                <a:solidFill>
+                  <a:srgbClr val="B03A2E"/>
+                </a:solidFill>
+                <a:latin typeface="Arial"/>
+              </a:rPr>
+              <a:t>✗</a:t>
+            </a:r>
+          </a:p>
+        </p:txBody>
+      </p:sp>
+      <p:sp>
+        <p:nvSpPr>
+          <p:cNvPr id="22" name="Rectangle 21"/>
+          <p:cNvSpPr/>
+          <p:nvPr/>
+        </p:nvSpPr>
+        <p:spPr>
+          <a:xfrm>
+            <a:off x="2654300" y="3517900"/>
+            <a:ext cx="1104900" cy="469900"/>
+          </a:xfrm>
+          <a:prstGeom prst="rect">
+            <a:avLst/>
+          </a:prstGeom>
+          <a:solidFill>
+            <a:srgbClr val="E3ECE2"/>
+          </a:solidFill>
+          <a:ln>
+            <a:noFill/>
+          </a:ln>
+          <a:effectLst/>
+        </p:spPr>
+        <p:style>
+          <a:lnRef idx="1">
+            <a:schemeClr val="accent1"/>
+          </a:lnRef>
+          <a:fillRef idx="3">
+            <a:schemeClr val="accent1"/>
+          </a:fillRef>
+          <a:effectRef idx="2">
+            <a:schemeClr val="accent1"/>
+          </a:effectRef>
+          <a:fontRef idx="minor">
+            <a:schemeClr val="lt1"/>
+          </a:fontRef>
+        </p:style>
+        <p:txBody>
+          <a:bodyPr rtlCol="0" anchor="ctr" wrap="square" lIns="12700" rIns="12700" tIns="12700" bIns="12700"/>
+          <a:lstStyle/>
+          <a:p>
+            <a:pPr algn="ctr">
+              <a:lnSpc>
+                <a:spcPct val="115000"/>
+              </a:lnSpc>
+              <a:spcAft>
+                <a:spcPts val="0"/>
+              </a:spcAft>
+            </a:pPr>
+            <a:r>
+              <a:rPr sz="1700" b="0">
+                <a:solidFill>
+                  <a:srgbClr val="00175A"/>
+                </a:solidFill>
+                <a:latin typeface="Arial"/>
+              </a:rPr>
+              <a:t>✓</a:t>
+            </a:r>
+          </a:p>
+        </p:txBody>
+      </p:sp>
+      <p:sp>
+        <p:nvSpPr>
+          <p:cNvPr id="23" name="Rectangle 22"/>
+          <p:cNvSpPr/>
+          <p:nvPr/>
+        </p:nvSpPr>
+        <p:spPr>
+          <a:xfrm>
+            <a:off x="2654300" y="4025900"/>
+            <a:ext cx="1104900" cy="469900"/>
+          </a:xfrm>
+          <a:prstGeom prst="rect">
+            <a:avLst/>
+          </a:prstGeom>
+          <a:solidFill>
+            <a:srgbClr val="FFFFFF"/>
+          </a:solidFill>
+          <a:ln>
+            <a:noFill/>
+          </a:ln>
+          <a:effectLst/>
+        </p:spPr>
+        <p:style>
+          <a:lnRef idx="1">
+            <a:schemeClr val="accent1"/>
+          </a:lnRef>
+          <a:fillRef idx="3">
+            <a:schemeClr val="accent1"/>
+          </a:fillRef>
+          <a:effectRef idx="2">
+            <a:schemeClr val="accent1"/>
+          </a:effectRef>
+          <a:fontRef idx="minor">
+            <a:schemeClr val="lt1"/>
+          </a:fontRef>
+        </p:style>
+        <p:txBody>
+          <a:bodyPr rtlCol="0" anchor="ctr" wrap="square" lIns="12700" rIns="12700" tIns="12700" bIns="12700"/>
+          <a:lstStyle/>
+          <a:p>
+            <a:pPr algn="ctr">
+              <a:lnSpc>
+                <a:spcPct val="115000"/>
+              </a:lnSpc>
+              <a:spcAft>
+                <a:spcPts val="0"/>
+              </a:spcAft>
+            </a:pPr>
+            <a:r>
+              <a:rPr sz="1700" b="0">
+                <a:solidFill>
+                  <a:srgbClr val="00175A"/>
+                </a:solidFill>
+                <a:latin typeface="Arial"/>
+              </a:rPr>
+              <a:t>✓</a:t>
+            </a:r>
+          </a:p>
+        </p:txBody>
+      </p:sp>
+      <p:sp>
+        <p:nvSpPr>
+          <p:cNvPr id="24" name="Rectangle 23"/>
+          <p:cNvSpPr/>
+          <p:nvPr/>
+        </p:nvSpPr>
+        <p:spPr>
+          <a:xfrm>
+            <a:off x="2654300" y="4533900"/>
+            <a:ext cx="1104900" cy="469900"/>
+          </a:xfrm>
+          <a:prstGeom prst="rect">
+            <a:avLst/>
+          </a:prstGeom>
+          <a:solidFill>
+            <a:srgbClr val="E9EEF5"/>
+          </a:solidFill>
+          <a:ln>
+            <a:noFill/>
+          </a:ln>
+          <a:effectLst/>
+        </p:spPr>
+        <p:style>
+          <a:lnRef idx="1">
+            <a:schemeClr val="accent1"/>
+          </a:lnRef>
+          <a:fillRef idx="3">
+            <a:schemeClr val="accent1"/>
+          </a:fillRef>
+          <a:effectRef idx="2">
+            <a:schemeClr val="accent1"/>
+          </a:effectRef>
+          <a:fontRef idx="minor">
+            <a:schemeClr val="lt1"/>
+          </a:fontRef>
+        </p:style>
+        <p:txBody>
+          <a:bodyPr rtlCol="0" anchor="ctr" wrap="square" lIns="12700" rIns="12700" tIns="12700" bIns="12700"/>
+          <a:lstStyle/>
+          <a:p>
+            <a:pPr algn="ctr">
+              <a:lnSpc>
+                <a:spcPct val="115000"/>
+              </a:lnSpc>
+              <a:spcAft>
+                <a:spcPts val="0"/>
+              </a:spcAft>
+            </a:pPr>
+          </a:p>
+        </p:txBody>
+      </p:sp>
+      <p:sp>
+        <p:nvSpPr>
+          <p:cNvPr id="25" name="Rectangle 24"/>
+          <p:cNvSpPr/>
+          <p:nvPr/>
+        </p:nvSpPr>
+        <p:spPr>
+          <a:xfrm>
+            <a:off x="3797300" y="1587500"/>
+            <a:ext cx="723900" cy="355600"/>
+          </a:xfrm>
+          <a:prstGeom prst="rect">
+            <a:avLst/>
+          </a:prstGeom>
+          <a:solidFill>
+            <a:srgbClr val="00175A"/>
+          </a:solidFill>
+          <a:ln>
+            <a:noFill/>
+          </a:ln>
+          <a:effectLst/>
+        </p:spPr>
+        <p:style>
+          <a:lnRef idx="1">
+            <a:schemeClr val="accent1"/>
+          </a:lnRef>
+          <a:fillRef idx="3">
+            <a:schemeClr val="accent1"/>
+          </a:fillRef>
+          <a:effectRef idx="2">
+            <a:schemeClr val="accent1"/>
+          </a:effectRef>
+          <a:fontRef idx="minor">
+            <a:schemeClr val="lt1"/>
+          </a:fontRef>
+        </p:style>
+        <p:txBody>
+          <a:bodyPr rtlCol="0" anchor="ctr" wrap="square" lIns="12700" rIns="12700" tIns="12700" bIns="12700"/>
+          <a:lstStyle/>
+          <a:p>
+            <a:pPr algn="ctr">
+              <a:lnSpc>
+                <a:spcPct val="115000"/>
+              </a:lnSpc>
+              <a:spcAft>
+                <a:spcPts val="0"/>
+              </a:spcAft>
+            </a:pPr>
+            <a:r>
+              <a:rPr sz="1500" b="1">
+                <a:solidFill>
+                  <a:srgbClr val="F6F8FB"/>
+                </a:solidFill>
+                <a:latin typeface="Arial"/>
+              </a:rPr>
+              <a:t>Team</a:t>
+            </a:r>
+          </a:p>
+        </p:txBody>
+      </p:sp>
+      <p:sp>
+        <p:nvSpPr>
+          <p:cNvPr id="26" name="Rectangle 25"/>
+          <p:cNvSpPr/>
+          <p:nvPr/>
+        </p:nvSpPr>
+        <p:spPr>
+          <a:xfrm>
+            <a:off x="3797300" y="1993900"/>
+            <a:ext cx="723900" cy="469900"/>
+          </a:xfrm>
+          <a:prstGeom prst="rect">
+            <a:avLst/>
+          </a:prstGeom>
+          <a:solidFill>
+            <a:srgbClr val="FFFFFF"/>
+          </a:solidFill>
+          <a:ln>
+            <a:noFill/>
+          </a:ln>
+          <a:effectLst/>
+        </p:spPr>
+        <p:style>
+          <a:lnRef idx="1">
+            <a:schemeClr val="accent1"/>
+          </a:lnRef>
+          <a:fillRef idx="3">
+            <a:schemeClr val="accent1"/>
+          </a:fillRef>
+          <a:effectRef idx="2">
+            <a:schemeClr val="accent1"/>
+          </a:effectRef>
+          <a:fontRef idx="minor">
+            <a:schemeClr val="lt1"/>
+          </a:fontRef>
+        </p:style>
+        <p:txBody>
+          <a:bodyPr rtlCol="0" anchor="ctr" wrap="square" lIns="12700" rIns="12700" tIns="12700" bIns="12700"/>
+          <a:lstStyle/>
+          <a:p>
+            <a:pPr algn="ctr">
+              <a:lnSpc>
+                <a:spcPct val="115000"/>
+              </a:lnSpc>
+              <a:spcAft>
+                <a:spcPts val="0"/>
+              </a:spcAft>
+            </a:pPr>
+            <a:r>
+              <a:rPr sz="1700" b="0">
+                <a:solidFill>
+                  <a:srgbClr val="00175A"/>
+                </a:solidFill>
+                <a:latin typeface="Arial"/>
+              </a:rPr>
+              <a:t>✓</a:t>
+            </a:r>
+          </a:p>
+        </p:txBody>
+      </p:sp>
+      <p:sp>
+        <p:nvSpPr>
+          <p:cNvPr id="27" name="Rectangle 26"/>
+          <p:cNvSpPr/>
+          <p:nvPr/>
+        </p:nvSpPr>
+        <p:spPr>
+          <a:xfrm>
+            <a:off x="3797300" y="2501900"/>
+            <a:ext cx="723900" cy="469900"/>
+          </a:xfrm>
+          <a:prstGeom prst="rect">
+            <a:avLst/>
+          </a:prstGeom>
+          <a:solidFill>
+            <a:srgbClr val="E9EEF5"/>
+          </a:solidFill>
+          <a:ln>
+            <a:noFill/>
+          </a:ln>
+          <a:effectLst/>
+        </p:spPr>
+        <p:style>
+          <a:lnRef idx="1">
+            <a:schemeClr val="accent1"/>
+          </a:lnRef>
+          <a:fillRef idx="3">
+            <a:schemeClr val="accent1"/>
+          </a:fillRef>
+          <a:effectRef idx="2">
+            <a:schemeClr val="accent1"/>
+          </a:effectRef>
+          <a:fontRef idx="minor">
+            <a:schemeClr val="lt1"/>
+          </a:fontRef>
+        </p:style>
+        <p:txBody>
+          <a:bodyPr rtlCol="0" anchor="ctr" wrap="square" lIns="12700" rIns="12700" tIns="12700" bIns="12700"/>
+          <a:lstStyle/>
+          <a:p>
+            <a:pPr algn="ctr">
+              <a:lnSpc>
+                <a:spcPct val="115000"/>
+              </a:lnSpc>
+              <a:spcAft>
+                <a:spcPts val="0"/>
+              </a:spcAft>
+            </a:pPr>
+            <a:r>
+              <a:rPr sz="1700" b="0">
+                <a:solidFill>
+                  <a:srgbClr val="00175A"/>
+                </a:solidFill>
+                <a:latin typeface="Arial"/>
+              </a:rPr>
+              <a:t>✓</a:t>
+            </a:r>
+          </a:p>
+        </p:txBody>
+      </p:sp>
+      <p:sp>
+        <p:nvSpPr>
+          <p:cNvPr id="28" name="Rectangle 27"/>
+          <p:cNvSpPr/>
+          <p:nvPr/>
+        </p:nvSpPr>
+        <p:spPr>
+          <a:xfrm>
+            <a:off x="3797300" y="3009900"/>
+            <a:ext cx="723900" cy="469900"/>
+          </a:xfrm>
+          <a:prstGeom prst="rect">
+            <a:avLst/>
+          </a:prstGeom>
+          <a:solidFill>
+            <a:srgbClr val="F6E3E0"/>
+          </a:solidFill>
+          <a:ln>
+            <a:noFill/>
+          </a:ln>
+          <a:effectLst/>
+        </p:spPr>
+        <p:style>
+          <a:lnRef idx="1">
+            <a:schemeClr val="accent1"/>
+          </a:lnRef>
+          <a:fillRef idx="3">
+            <a:schemeClr val="accent1"/>
+          </a:fillRef>
+          <a:effectRef idx="2">
+            <a:schemeClr val="accent1"/>
+          </a:effectRef>
+          <a:fontRef idx="minor">
+            <a:schemeClr val="lt1"/>
+          </a:fontRef>
+        </p:style>
+        <p:txBody>
+          <a:bodyPr rtlCol="0" anchor="ctr" wrap="square" lIns="12700" rIns="12700" tIns="12700" bIns="12700"/>
+          <a:lstStyle/>
+          <a:p>
+            <a:pPr algn="ctr">
+              <a:lnSpc>
+                <a:spcPct val="115000"/>
+              </a:lnSpc>
+              <a:spcAft>
+                <a:spcPts val="0"/>
+              </a:spcAft>
+            </a:pPr>
+            <a:r>
+              <a:rPr sz="1700" b="0">
+                <a:solidFill>
+                  <a:srgbClr val="00175A"/>
+                </a:solidFill>
+                <a:latin typeface="Arial"/>
+              </a:rPr>
+              <a:t>✓</a:t>
+            </a:r>
+          </a:p>
+        </p:txBody>
+      </p:sp>
+      <p:sp>
+        <p:nvSpPr>
+          <p:cNvPr id="29" name="Rectangle 28"/>
+          <p:cNvSpPr/>
+          <p:nvPr/>
+        </p:nvSpPr>
+        <p:spPr>
+          <a:xfrm>
+            <a:off x="3797300" y="3517900"/>
+            <a:ext cx="723900" cy="469900"/>
+          </a:xfrm>
+          <a:prstGeom prst="rect">
+            <a:avLst/>
+          </a:prstGeom>
+          <a:solidFill>
+            <a:srgbClr val="E3ECE2"/>
+          </a:solidFill>
+          <a:ln>
+            <a:noFill/>
+          </a:ln>
+          <a:effectLst/>
+        </p:spPr>
+        <p:style>
+          <a:lnRef idx="1">
+            <a:schemeClr val="accent1"/>
+          </a:lnRef>
+          <a:fillRef idx="3">
+            <a:schemeClr val="accent1"/>
+          </a:fillRef>
+          <a:effectRef idx="2">
+            <a:schemeClr val="accent1"/>
+          </a:effectRef>
+          <a:fontRef idx="minor">
+            <a:schemeClr val="lt1"/>
+          </a:fontRef>
+        </p:style>
+        <p:txBody>
+          <a:bodyPr rtlCol="0" anchor="ctr" wrap="square" lIns="12700" rIns="12700" tIns="12700" bIns="12700"/>
+          <a:lstStyle/>
+          <a:p>
+            <a:pPr algn="ctr">
+              <a:lnSpc>
+                <a:spcPct val="115000"/>
+              </a:lnSpc>
+              <a:spcAft>
+                <a:spcPts val="0"/>
+              </a:spcAft>
+            </a:pPr>
+            <a:r>
+              <a:rPr sz="1700" b="0">
+                <a:solidFill>
+                  <a:srgbClr val="B03A2E"/>
+                </a:solidFill>
+                <a:latin typeface="Arial"/>
+              </a:rPr>
+              <a:t>✗</a:t>
+            </a:r>
+          </a:p>
+        </p:txBody>
+      </p:sp>
+      <p:sp>
+        <p:nvSpPr>
+          <p:cNvPr id="30" name="Rectangle 29"/>
+          <p:cNvSpPr/>
+          <p:nvPr/>
+        </p:nvSpPr>
+        <p:spPr>
+          <a:xfrm>
+            <a:off x="3797300" y="4025900"/>
+            <a:ext cx="723900" cy="469900"/>
+          </a:xfrm>
+          <a:prstGeom prst="rect">
+            <a:avLst/>
+          </a:prstGeom>
+          <a:solidFill>
+            <a:srgbClr val="FFFFFF"/>
+          </a:solidFill>
+          <a:ln>
+            <a:noFill/>
+          </a:ln>
+          <a:effectLst/>
+        </p:spPr>
+        <p:style>
+          <a:lnRef idx="1">
+            <a:schemeClr val="accent1"/>
+          </a:lnRef>
+          <a:fillRef idx="3">
+            <a:schemeClr val="accent1"/>
+          </a:fillRef>
+          <a:effectRef idx="2">
+            <a:schemeClr val="accent1"/>
+          </a:effectRef>
+          <a:fontRef idx="minor">
+            <a:schemeClr val="lt1"/>
+          </a:fontRef>
+        </p:style>
+        <p:txBody>
+          <a:bodyPr rtlCol="0" anchor="ctr" wrap="square" lIns="12700" rIns="12700" tIns="12700" bIns="12700"/>
+          <a:lstStyle/>
+          <a:p>
+            <a:pPr algn="ctr">
+              <a:lnSpc>
+                <a:spcPct val="115000"/>
+              </a:lnSpc>
+              <a:spcAft>
+                <a:spcPts val="0"/>
+              </a:spcAft>
+            </a:pPr>
+            <a:r>
+              <a:rPr sz="1700" b="0">
+                <a:solidFill>
+                  <a:srgbClr val="00175A"/>
+                </a:solidFill>
+                <a:latin typeface="Arial"/>
+              </a:rPr>
+              <a:t>✓</a:t>
+            </a:r>
+          </a:p>
+        </p:txBody>
+      </p:sp>
+      <p:sp>
+        <p:nvSpPr>
+          <p:cNvPr id="31" name="Rectangle 30"/>
+          <p:cNvSpPr/>
+          <p:nvPr/>
+        </p:nvSpPr>
+        <p:spPr>
+          <a:xfrm>
+            <a:off x="3797300" y="4533900"/>
+            <a:ext cx="723900" cy="469900"/>
+          </a:xfrm>
+          <a:prstGeom prst="rect">
+            <a:avLst/>
+          </a:prstGeom>
+          <a:solidFill>
+            <a:srgbClr val="E9EEF5"/>
+          </a:solidFill>
+          <a:ln>
+            <a:noFill/>
+          </a:ln>
+          <a:effectLst/>
+        </p:spPr>
+        <p:style>
+          <a:lnRef idx="1">
+            <a:schemeClr val="accent1"/>
+          </a:lnRef>
+          <a:fillRef idx="3">
+            <a:schemeClr val="accent1"/>
+          </a:fillRef>
+          <a:effectRef idx="2">
+            <a:schemeClr val="accent1"/>
+          </a:effectRef>
+          <a:fontRef idx="minor">
+            <a:schemeClr val="lt1"/>
+          </a:fontRef>
+        </p:style>
+        <p:txBody>
+          <a:bodyPr rtlCol="0" anchor="ctr" wrap="square" lIns="12700" rIns="12700" tIns="12700" bIns="12700"/>
+          <a:lstStyle/>
+          <a:p>
+            <a:pPr algn="ctr">
+              <a:lnSpc>
+                <a:spcPct val="115000"/>
+              </a:lnSpc>
+              <a:spcAft>
+                <a:spcPts val="0"/>
+              </a:spcAft>
+            </a:pPr>
+          </a:p>
+        </p:txBody>
+      </p:sp>
+      <p:sp>
+        <p:nvSpPr>
+          <p:cNvPr id="32" name="Rectangle 31"/>
+          <p:cNvSpPr/>
+          <p:nvPr/>
+        </p:nvSpPr>
+        <p:spPr>
+          <a:xfrm>
+            <a:off x="4559300" y="1587500"/>
+            <a:ext cx="1041400" cy="355600"/>
+          </a:xfrm>
+          <a:prstGeom prst="rect">
+            <a:avLst/>
+          </a:prstGeom>
+          <a:solidFill>
+            <a:srgbClr val="00175A"/>
+          </a:solidFill>
+          <a:ln>
+            <a:noFill/>
+          </a:ln>
+          <a:effectLst/>
+        </p:spPr>
+        <p:style>
+          <a:lnRef idx="1">
+            <a:schemeClr val="accent1"/>
+          </a:lnRef>
+          <a:fillRef idx="3">
+            <a:schemeClr val="accent1"/>
+          </a:fillRef>
+          <a:effectRef idx="2">
+            <a:schemeClr val="accent1"/>
+          </a:effectRef>
+          <a:fontRef idx="minor">
+            <a:schemeClr val="lt1"/>
+          </a:fontRef>
+        </p:style>
+        <p:txBody>
+          <a:bodyPr rtlCol="0" anchor="ctr" wrap="square" lIns="12700" rIns="12700" tIns="12700" bIns="12700"/>
+          <a:lstStyle/>
+          <a:p>
+            <a:pPr algn="ctr">
+              <a:lnSpc>
+                <a:spcPct val="115000"/>
+              </a:lnSpc>
+              <a:spcAft>
+                <a:spcPts val="0"/>
+              </a:spcAft>
+            </a:pPr>
+            <a:r>
+              <a:rPr sz="1500" b="1">
+                <a:solidFill>
+                  <a:srgbClr val="F6F8FB"/>
+                </a:solidFill>
+                <a:latin typeface="Arial"/>
+              </a:rPr>
+              <a:t>Loss ℓ</a:t>
+            </a:r>
+          </a:p>
+        </p:txBody>
+      </p:sp>
+      <p:sp>
+        <p:nvSpPr>
+          <p:cNvPr id="33" name="Rectangle 32"/>
+          <p:cNvSpPr/>
+          <p:nvPr/>
+        </p:nvSpPr>
+        <p:spPr>
+          <a:xfrm>
+            <a:off x="4559300" y="1993900"/>
+            <a:ext cx="1041400" cy="469900"/>
+          </a:xfrm>
+          <a:prstGeom prst="rect">
+            <a:avLst/>
+          </a:prstGeom>
+          <a:solidFill>
+            <a:srgbClr val="FFFFFF"/>
+          </a:solidFill>
+          <a:ln>
+            <a:noFill/>
+          </a:ln>
+          <a:effectLst/>
+        </p:spPr>
+        <p:style>
+          <a:lnRef idx="1">
+            <a:schemeClr val="accent1"/>
+          </a:lnRef>
+          <a:fillRef idx="3">
+            <a:schemeClr val="accent1"/>
+          </a:fillRef>
+          <a:effectRef idx="2">
+            <a:schemeClr val="accent1"/>
+          </a:effectRef>
+          <a:fontRef idx="minor">
+            <a:schemeClr val="lt1"/>
+          </a:fontRef>
+        </p:style>
+        <p:txBody>
+          <a:bodyPr rtlCol="0" anchor="ctr" wrap="square" lIns="12700" rIns="12700" tIns="12700" bIns="12700"/>
+          <a:lstStyle/>
+          <a:p>
+            <a:pPr algn="ctr">
+              <a:lnSpc>
+                <a:spcPct val="115000"/>
+              </a:lnSpc>
+              <a:spcAft>
+                <a:spcPts val="0"/>
+              </a:spcAft>
+            </a:pPr>
+            <a:r>
+              <a:rPr sz="1700" b="1">
+                <a:solidFill>
+                  <a:srgbClr val="00175A"/>
+                </a:solidFill>
+                <a:latin typeface="Arial"/>
+              </a:rPr>
+              <a:t>0</a:t>
+            </a:r>
+          </a:p>
+        </p:txBody>
+      </p:sp>
+      <p:sp>
+        <p:nvSpPr>
+          <p:cNvPr id="34" name="Rectangle 33"/>
+          <p:cNvSpPr/>
+          <p:nvPr/>
+        </p:nvSpPr>
+        <p:spPr>
+          <a:xfrm>
+            <a:off x="4559300" y="2501900"/>
+            <a:ext cx="1041400" cy="469900"/>
+          </a:xfrm>
+          <a:prstGeom prst="rect">
+            <a:avLst/>
+          </a:prstGeom>
+          <a:solidFill>
+            <a:srgbClr val="E9EEF5"/>
+          </a:solidFill>
+          <a:ln>
+            <a:noFill/>
+          </a:ln>
+          <a:effectLst/>
+        </p:spPr>
+        <p:style>
+          <a:lnRef idx="1">
+            <a:schemeClr val="accent1"/>
+          </a:lnRef>
+          <a:fillRef idx="3">
+            <a:schemeClr val="accent1"/>
+          </a:fillRef>
+          <a:effectRef idx="2">
+            <a:schemeClr val="accent1"/>
+          </a:effectRef>
+          <a:fontRef idx="minor">
+            <a:schemeClr val="lt1"/>
+          </a:fontRef>
+        </p:style>
+        <p:txBody>
+          <a:bodyPr rtlCol="0" anchor="ctr" wrap="square" lIns="12700" rIns="12700" tIns="12700" bIns="12700"/>
+          <a:lstStyle/>
+          <a:p>
+            <a:pPr algn="ctr">
+              <a:lnSpc>
+                <a:spcPct val="115000"/>
+              </a:lnSpc>
+              <a:spcAft>
+                <a:spcPts val="0"/>
+              </a:spcAft>
+            </a:pPr>
+            <a:r>
+              <a:rPr sz="1700" b="1">
+                <a:solidFill>
+                  <a:srgbClr val="00175A"/>
+                </a:solidFill>
+                <a:latin typeface="Arial"/>
+              </a:rPr>
+              <a:t>0</a:t>
+            </a:r>
+          </a:p>
+        </p:txBody>
+      </p:sp>
+      <p:sp>
+        <p:nvSpPr>
+          <p:cNvPr id="35" name="Rectangle 34"/>
+          <p:cNvSpPr/>
+          <p:nvPr/>
+        </p:nvSpPr>
+        <p:spPr>
+          <a:xfrm>
+            <a:off x="4559300" y="3009900"/>
+            <a:ext cx="1041400" cy="469900"/>
+          </a:xfrm>
+          <a:prstGeom prst="rect">
+            <a:avLst/>
+          </a:prstGeom>
+          <a:solidFill>
+            <a:srgbClr val="F6E3E0"/>
+          </a:solidFill>
+          <a:ln>
+            <a:noFill/>
+          </a:ln>
+          <a:effectLst/>
+        </p:spPr>
+        <p:style>
+          <a:lnRef idx="1">
+            <a:schemeClr val="accent1"/>
+          </a:lnRef>
+          <a:fillRef idx="3">
+            <a:schemeClr val="accent1"/>
+          </a:fillRef>
+          <a:effectRef idx="2">
+            <a:schemeClr val="accent1"/>
+          </a:effectRef>
+          <a:fontRef idx="minor">
+            <a:schemeClr val="lt1"/>
+          </a:fontRef>
+        </p:style>
+        <p:txBody>
+          <a:bodyPr rtlCol="0" anchor="ctr" wrap="square" lIns="12700" rIns="12700" tIns="12700" bIns="12700"/>
+          <a:lstStyle/>
+          <a:p>
+            <a:pPr algn="ctr">
+              <a:lnSpc>
+                <a:spcPct val="115000"/>
+              </a:lnSpc>
+              <a:spcAft>
+                <a:spcPts val="0"/>
+              </a:spcAft>
+            </a:pPr>
+            <a:r>
+              <a:rPr sz="1700" b="1">
+                <a:solidFill>
+                  <a:srgbClr val="B03A2E"/>
+                </a:solidFill>
+                <a:latin typeface="Arial"/>
+              </a:rPr>
+              <a:t>+1 lost</a:t>
+            </a:r>
+          </a:p>
+        </p:txBody>
+      </p:sp>
+      <p:sp>
+        <p:nvSpPr>
+          <p:cNvPr id="36" name="Rectangle 35"/>
+          <p:cNvSpPr/>
+          <p:nvPr/>
+        </p:nvSpPr>
+        <p:spPr>
+          <a:xfrm>
+            <a:off x="4559300" y="3517900"/>
+            <a:ext cx="1041400" cy="469900"/>
+          </a:xfrm>
+          <a:prstGeom prst="rect">
+            <a:avLst/>
+          </a:prstGeom>
+          <a:solidFill>
+            <a:srgbClr val="E3ECE2"/>
+          </a:solidFill>
+          <a:ln>
+            <a:noFill/>
+          </a:ln>
+          <a:effectLst/>
+        </p:spPr>
+        <p:style>
+          <a:lnRef idx="1">
+            <a:schemeClr val="accent1"/>
+          </a:lnRef>
+          <a:fillRef idx="3">
+            <a:schemeClr val="accent1"/>
+          </a:fillRef>
+          <a:effectRef idx="2">
+            <a:schemeClr val="accent1"/>
+          </a:effectRef>
+          <a:fontRef idx="minor">
+            <a:schemeClr val="lt1"/>
+          </a:fontRef>
+        </p:style>
+        <p:txBody>
+          <a:bodyPr rtlCol="0" anchor="ctr" wrap="square" lIns="12700" rIns="12700" tIns="12700" bIns="12700"/>
+          <a:lstStyle/>
+          <a:p>
+            <a:pPr algn="ctr">
+              <a:lnSpc>
+                <a:spcPct val="115000"/>
+              </a:lnSpc>
+              <a:spcAft>
+                <a:spcPts val="0"/>
+              </a:spcAft>
+            </a:pPr>
+            <a:r>
+              <a:rPr sz="1700" b="1">
+                <a:solidFill>
+                  <a:srgbClr val="2F6B34"/>
+                </a:solidFill>
+                <a:latin typeface="Arial"/>
+              </a:rPr>
+              <a:t>−1 saved</a:t>
+            </a:r>
+          </a:p>
+        </p:txBody>
+      </p:sp>
+      <p:sp>
+        <p:nvSpPr>
+          <p:cNvPr id="37" name="Rectangle 36"/>
+          <p:cNvSpPr/>
+          <p:nvPr/>
+        </p:nvSpPr>
+        <p:spPr>
+          <a:xfrm>
+            <a:off x="4559300" y="4025900"/>
+            <a:ext cx="1041400" cy="469900"/>
+          </a:xfrm>
+          <a:prstGeom prst="rect">
+            <a:avLst/>
+          </a:prstGeom>
+          <a:solidFill>
+            <a:srgbClr val="FFFFFF"/>
+          </a:solidFill>
+          <a:ln>
+            <a:noFill/>
+          </a:ln>
+          <a:effectLst/>
+        </p:spPr>
+        <p:style>
+          <a:lnRef idx="1">
+            <a:schemeClr val="accent1"/>
+          </a:lnRef>
+          <a:fillRef idx="3">
+            <a:schemeClr val="accent1"/>
+          </a:fillRef>
+          <a:effectRef idx="2">
+            <a:schemeClr val="accent1"/>
+          </a:effectRef>
+          <a:fontRef idx="minor">
+            <a:schemeClr val="lt1"/>
+          </a:fontRef>
+        </p:style>
+        <p:txBody>
+          <a:bodyPr rtlCol="0" anchor="ctr" wrap="square" lIns="12700" rIns="12700" tIns="12700" bIns="12700"/>
+          <a:lstStyle/>
+          <a:p>
+            <a:pPr algn="ctr">
+              <a:lnSpc>
+                <a:spcPct val="115000"/>
+              </a:lnSpc>
+              <a:spcAft>
+                <a:spcPts val="0"/>
+              </a:spcAft>
+            </a:pPr>
+            <a:r>
+              <a:rPr sz="1700" b="1">
+                <a:solidFill>
+                  <a:srgbClr val="00175A"/>
+                </a:solidFill>
+                <a:latin typeface="Arial"/>
+              </a:rPr>
+              <a:t>0</a:t>
+            </a:r>
+          </a:p>
+        </p:txBody>
+      </p:sp>
+      <p:sp>
+        <p:nvSpPr>
+          <p:cNvPr id="38" name="Rectangle 37"/>
+          <p:cNvSpPr/>
+          <p:nvPr/>
+        </p:nvSpPr>
+        <p:spPr>
+          <a:xfrm>
+            <a:off x="4559300" y="4533900"/>
+            <a:ext cx="1041400" cy="469900"/>
+          </a:xfrm>
+          <a:prstGeom prst="rect">
+            <a:avLst/>
+          </a:prstGeom>
+          <a:solidFill>
+            <a:srgbClr val="E9EEF5"/>
+          </a:solidFill>
+          <a:ln>
+            <a:noFill/>
+          </a:ln>
+          <a:effectLst/>
+        </p:spPr>
+        <p:style>
+          <a:lnRef idx="1">
+            <a:schemeClr val="accent1"/>
+          </a:lnRef>
+          <a:fillRef idx="3">
+            <a:schemeClr val="accent1"/>
+          </a:fillRef>
+          <a:effectRef idx="2">
+            <a:schemeClr val="accent1"/>
+          </a:effectRef>
+          <a:fontRef idx="minor">
+            <a:schemeClr val="lt1"/>
+          </a:fontRef>
+        </p:style>
+        <p:txBody>
+          <a:bodyPr rtlCol="0" anchor="ctr" wrap="square" lIns="12700" rIns="12700" tIns="12700" bIns="12700"/>
+          <a:lstStyle/>
+          <a:p>
+            <a:pPr algn="ctr">
+              <a:lnSpc>
+                <a:spcPct val="115000"/>
+              </a:lnSpc>
+              <a:spcAft>
+                <a:spcPts val="0"/>
+              </a:spcAft>
+            </a:pPr>
+          </a:p>
+        </p:txBody>
+      </p:sp>
+      <p:sp>
+        <p:nvSpPr>
+          <p:cNvPr id="39" name="Rectangle 38"/>
+          <p:cNvSpPr/>
+          <p:nvPr/>
+        </p:nvSpPr>
+        <p:spPr>
+          <a:xfrm>
+            <a:off x="5638800" y="1587500"/>
+            <a:ext cx="914400" cy="355600"/>
+          </a:xfrm>
+          <a:prstGeom prst="rect">
+            <a:avLst/>
+          </a:prstGeom>
+          <a:solidFill>
+            <a:srgbClr val="00175A"/>
+          </a:solidFill>
+          <a:ln>
+            <a:noFill/>
+          </a:ln>
+          <a:effectLst/>
+        </p:spPr>
+        <p:style>
+          <a:lnRef idx="1">
+            <a:schemeClr val="accent1"/>
+          </a:lnRef>
+          <a:fillRef idx="3">
+            <a:schemeClr val="accent1"/>
+          </a:fillRef>
+          <a:effectRef idx="2">
+            <a:schemeClr val="accent1"/>
+          </a:effectRef>
+          <a:fontRef idx="minor">
+            <a:schemeClr val="lt1"/>
+          </a:fontRef>
+        </p:style>
+        <p:txBody>
+          <a:bodyPr rtlCol="0" anchor="ctr" wrap="square" lIns="12700" rIns="12700" tIns="12700" bIns="12700"/>
+          <a:lstStyle/>
+          <a:p>
+            <a:pPr algn="ctr">
+              <a:lnSpc>
+                <a:spcPct val="115000"/>
+              </a:lnSpc>
+              <a:spcAft>
+                <a:spcPts val="0"/>
+              </a:spcAft>
+            </a:pPr>
+            <a:r>
+              <a:rPr sz="1500" b="1">
+                <a:solidFill>
+                  <a:srgbClr val="F6F8FB"/>
+                </a:solidFill>
+                <a:latin typeface="Arial"/>
+              </a:rPr>
+              <a:t>× money</a:t>
+            </a:r>
+          </a:p>
+        </p:txBody>
+      </p:sp>
+      <p:sp>
+        <p:nvSpPr>
+          <p:cNvPr id="40" name="Rectangle 39"/>
+          <p:cNvSpPr/>
+          <p:nvPr/>
+        </p:nvSpPr>
+        <p:spPr>
+          <a:xfrm>
+            <a:off x="5638800" y="1993900"/>
+            <a:ext cx="914400" cy="469900"/>
+          </a:xfrm>
+          <a:prstGeom prst="rect">
+            <a:avLst/>
+          </a:prstGeom>
+          <a:solidFill>
+            <a:srgbClr val="FFFFFF"/>
+          </a:solidFill>
+          <a:ln>
+            <a:noFill/>
+          </a:ln>
+          <a:effectLst/>
+        </p:spPr>
+        <p:style>
+          <a:lnRef idx="1">
+            <a:schemeClr val="accent1"/>
+          </a:lnRef>
+          <a:fillRef idx="3">
+            <a:schemeClr val="accent1"/>
+          </a:fillRef>
+          <a:effectRef idx="2">
+            <a:schemeClr val="accent1"/>
+          </a:effectRef>
+          <a:fontRef idx="minor">
+            <a:schemeClr val="lt1"/>
+          </a:fontRef>
+        </p:style>
+        <p:txBody>
+          <a:bodyPr rtlCol="0" anchor="ctr" wrap="square" lIns="12700" rIns="12700" tIns="12700" bIns="12700"/>
+          <a:lstStyle/>
+          <a:p>
+            <a:pPr algn="ctr">
+              <a:lnSpc>
+                <a:spcPct val="115000"/>
+              </a:lnSpc>
+              <a:spcAft>
+                <a:spcPts val="0"/>
+              </a:spcAft>
+            </a:pPr>
+            <a:r>
+              <a:rPr sz="1700" b="0">
+                <a:solidFill>
+                  <a:srgbClr val="00175A"/>
+                </a:solidFill>
+                <a:latin typeface="Arial"/>
+              </a:rPr>
+              <a:t>× 1.03</a:t>
+            </a:r>
+          </a:p>
+        </p:txBody>
+      </p:sp>
+      <p:sp>
+        <p:nvSpPr>
+          <p:cNvPr id="41" name="Rectangle 40"/>
+          <p:cNvSpPr/>
+          <p:nvPr/>
+        </p:nvSpPr>
+        <p:spPr>
+          <a:xfrm>
+            <a:off x="5638800" y="2501900"/>
+            <a:ext cx="914400" cy="469900"/>
+          </a:xfrm>
+          <a:prstGeom prst="rect">
+            <a:avLst/>
+          </a:prstGeom>
+          <a:solidFill>
+            <a:srgbClr val="E9EEF5"/>
+          </a:solidFill>
+          <a:ln>
+            <a:noFill/>
+          </a:ln>
+          <a:effectLst/>
+        </p:spPr>
+        <p:style>
+          <a:lnRef idx="1">
+            <a:schemeClr val="accent1"/>
+          </a:lnRef>
+          <a:fillRef idx="3">
+            <a:schemeClr val="accent1"/>
+          </a:fillRef>
+          <a:effectRef idx="2">
+            <a:schemeClr val="accent1"/>
+          </a:effectRef>
+          <a:fontRef idx="minor">
+            <a:schemeClr val="lt1"/>
+          </a:fontRef>
+        </p:style>
+        <p:txBody>
+          <a:bodyPr rtlCol="0" anchor="ctr" wrap="square" lIns="12700" rIns="12700" tIns="12700" bIns="12700"/>
+          <a:lstStyle/>
+          <a:p>
+            <a:pPr algn="ctr">
+              <a:lnSpc>
+                <a:spcPct val="115000"/>
+              </a:lnSpc>
+              <a:spcAft>
+                <a:spcPts val="0"/>
+              </a:spcAft>
+            </a:pPr>
+            <a:r>
+              <a:rPr sz="1700" b="0">
+                <a:solidFill>
+                  <a:srgbClr val="00175A"/>
+                </a:solidFill>
+                <a:latin typeface="Arial"/>
+              </a:rPr>
+              <a:t>× 1.03</a:t>
+            </a:r>
+          </a:p>
+        </p:txBody>
+      </p:sp>
+      <p:sp>
+        <p:nvSpPr>
+          <p:cNvPr id="42" name="Rectangle 41"/>
+          <p:cNvSpPr/>
+          <p:nvPr/>
+        </p:nvSpPr>
+        <p:spPr>
+          <a:xfrm>
+            <a:off x="5638800" y="3009900"/>
+            <a:ext cx="914400" cy="469900"/>
+          </a:xfrm>
+          <a:prstGeom prst="rect">
+            <a:avLst/>
+          </a:prstGeom>
+          <a:solidFill>
+            <a:srgbClr val="F6E3E0"/>
+          </a:solidFill>
+          <a:ln>
+            <a:noFill/>
+          </a:ln>
+          <a:effectLst/>
+        </p:spPr>
+        <p:style>
+          <a:lnRef idx="1">
+            <a:schemeClr val="accent1"/>
+          </a:lnRef>
+          <a:fillRef idx="3">
+            <a:schemeClr val="accent1"/>
+          </a:fillRef>
+          <a:effectRef idx="2">
+            <a:schemeClr val="accent1"/>
+          </a:effectRef>
+          <a:fontRef idx="minor">
+            <a:schemeClr val="lt1"/>
+          </a:fontRef>
+        </p:style>
+        <p:txBody>
+          <a:bodyPr rtlCol="0" anchor="ctr" wrap="square" lIns="12700" rIns="12700" tIns="12700" bIns="12700"/>
+          <a:lstStyle/>
+          <a:p>
+            <a:pPr algn="ctr">
+              <a:lnSpc>
+                <a:spcPct val="115000"/>
+              </a:lnSpc>
+              <a:spcAft>
+                <a:spcPts val="0"/>
+              </a:spcAft>
+            </a:pPr>
+            <a:r>
+              <a:rPr sz="1700" b="0">
+                <a:solidFill>
+                  <a:srgbClr val="B03A2E"/>
+                </a:solidFill>
+                <a:latin typeface="Arial"/>
+              </a:rPr>
+              <a:t>× 0.53</a:t>
+            </a:r>
+          </a:p>
+        </p:txBody>
+      </p:sp>
+      <p:sp>
+        <p:nvSpPr>
+          <p:cNvPr id="43" name="Rectangle 42"/>
+          <p:cNvSpPr/>
+          <p:nvPr/>
+        </p:nvSpPr>
+        <p:spPr>
+          <a:xfrm>
+            <a:off x="5638800" y="3517900"/>
+            <a:ext cx="914400" cy="469900"/>
+          </a:xfrm>
+          <a:prstGeom prst="rect">
+            <a:avLst/>
+          </a:prstGeom>
+          <a:solidFill>
+            <a:srgbClr val="E3ECE2"/>
+          </a:solidFill>
+          <a:ln>
+            <a:noFill/>
+          </a:ln>
+          <a:effectLst/>
+        </p:spPr>
+        <p:style>
+          <a:lnRef idx="1">
+            <a:schemeClr val="accent1"/>
+          </a:lnRef>
+          <a:fillRef idx="3">
+            <a:schemeClr val="accent1"/>
+          </a:fillRef>
+          <a:effectRef idx="2">
+            <a:schemeClr val="accent1"/>
+          </a:effectRef>
+          <a:fontRef idx="minor">
+            <a:schemeClr val="lt1"/>
+          </a:fontRef>
+        </p:style>
+        <p:txBody>
+          <a:bodyPr rtlCol="0" anchor="ctr" wrap="square" lIns="12700" rIns="12700" tIns="12700" bIns="12700"/>
+          <a:lstStyle/>
+          <a:p>
+            <a:pPr algn="ctr">
+              <a:lnSpc>
+                <a:spcPct val="115000"/>
+              </a:lnSpc>
+              <a:spcAft>
+                <a:spcPts val="0"/>
+              </a:spcAft>
+            </a:pPr>
+            <a:r>
+              <a:rPr sz="1700" b="0">
+                <a:solidFill>
+                  <a:srgbClr val="2F6B34"/>
+                </a:solidFill>
+                <a:latin typeface="Arial"/>
+              </a:rPr>
+              <a:t>× 1.53</a:t>
+            </a:r>
+          </a:p>
+        </p:txBody>
+      </p:sp>
+      <p:sp>
+        <p:nvSpPr>
+          <p:cNvPr id="44" name="Rectangle 43"/>
+          <p:cNvSpPr/>
+          <p:nvPr/>
+        </p:nvSpPr>
+        <p:spPr>
+          <a:xfrm>
+            <a:off x="5638800" y="4025900"/>
+            <a:ext cx="914400" cy="469900"/>
+          </a:xfrm>
+          <a:prstGeom prst="rect">
+            <a:avLst/>
+          </a:prstGeom>
+          <a:solidFill>
+            <a:srgbClr val="FFFFFF"/>
+          </a:solidFill>
+          <a:ln>
+            <a:noFill/>
+          </a:ln>
+          <a:effectLst/>
+        </p:spPr>
+        <p:style>
+          <a:lnRef idx="1">
+            <a:schemeClr val="accent1"/>
+          </a:lnRef>
+          <a:fillRef idx="3">
+            <a:schemeClr val="accent1"/>
+          </a:fillRef>
+          <a:effectRef idx="2">
+            <a:schemeClr val="accent1"/>
+          </a:effectRef>
+          <a:fontRef idx="minor">
+            <a:schemeClr val="lt1"/>
+          </a:fontRef>
+        </p:style>
+        <p:txBody>
+          <a:bodyPr rtlCol="0" anchor="ctr" wrap="square" lIns="12700" rIns="12700" tIns="12700" bIns="12700"/>
+          <a:lstStyle/>
+          <a:p>
+            <a:pPr algn="ctr">
+              <a:lnSpc>
+                <a:spcPct val="115000"/>
+              </a:lnSpc>
+              <a:spcAft>
+                <a:spcPts val="0"/>
+              </a:spcAft>
+            </a:pPr>
+            <a:r>
+              <a:rPr sz="1700" b="0">
+                <a:solidFill>
+                  <a:srgbClr val="00175A"/>
+                </a:solidFill>
+                <a:latin typeface="Arial"/>
+              </a:rPr>
+              <a:t>× 1.03</a:t>
+            </a:r>
+          </a:p>
+        </p:txBody>
+      </p:sp>
+      <p:sp>
+        <p:nvSpPr>
+          <p:cNvPr id="45" name="Rectangle 44"/>
+          <p:cNvSpPr/>
+          <p:nvPr/>
+        </p:nvSpPr>
+        <p:spPr>
+          <a:xfrm>
+            <a:off x="5638800" y="4533900"/>
+            <a:ext cx="914400" cy="469900"/>
+          </a:xfrm>
+          <a:prstGeom prst="rect">
+            <a:avLst/>
+          </a:prstGeom>
+          <a:solidFill>
+            <a:srgbClr val="E9EEF5"/>
+          </a:solidFill>
+          <a:ln>
+            <a:noFill/>
+          </a:ln>
+          <a:effectLst/>
+        </p:spPr>
+        <p:style>
+          <a:lnRef idx="1">
+            <a:schemeClr val="accent1"/>
+          </a:lnRef>
+          <a:fillRef idx="3">
+            <a:schemeClr val="accent1"/>
+          </a:fillRef>
+          <a:effectRef idx="2">
+            <a:schemeClr val="accent1"/>
+          </a:effectRef>
+          <a:fontRef idx="minor">
+            <a:schemeClr val="lt1"/>
+          </a:fontRef>
+        </p:style>
+        <p:txBody>
+          <a:bodyPr rtlCol="0" anchor="ctr" wrap="square" lIns="12700" rIns="12700" tIns="12700" bIns="12700"/>
+          <a:lstStyle/>
+          <a:p>
+            <a:pPr algn="ctr">
+              <a:lnSpc>
+                <a:spcPct val="115000"/>
+              </a:lnSpc>
+              <a:spcAft>
+                <a:spcPts val="0"/>
+              </a:spcAft>
+            </a:pPr>
+          </a:p>
+        </p:txBody>
+      </p:sp>
+      <p:sp>
+        <p:nvSpPr>
+          <p:cNvPr id="46" name="Rectangle 45"/>
+          <p:cNvSpPr/>
+          <p:nvPr/>
+        </p:nvSpPr>
+        <p:spPr>
+          <a:xfrm>
+            <a:off x="6591300" y="1587500"/>
+            <a:ext cx="914400" cy="355600"/>
+          </a:xfrm>
+          <a:prstGeom prst="rect">
+            <a:avLst/>
+          </a:prstGeom>
+          <a:solidFill>
+            <a:srgbClr val="00175A"/>
+          </a:solidFill>
+          <a:ln>
+            <a:noFill/>
+          </a:ln>
+          <a:effectLst/>
+        </p:spPr>
+        <p:style>
+          <a:lnRef idx="1">
+            <a:schemeClr val="accent1"/>
+          </a:lnRef>
+          <a:fillRef idx="3">
+            <a:schemeClr val="accent1"/>
+          </a:fillRef>
+          <a:effectRef idx="2">
+            <a:schemeClr val="accent1"/>
+          </a:effectRef>
+          <a:fontRef idx="minor">
+            <a:schemeClr val="lt1"/>
+          </a:fontRef>
+        </p:style>
+        <p:txBody>
+          <a:bodyPr rtlCol="0" anchor="ctr" wrap="square" lIns="12700" rIns="12700" tIns="12700" bIns="12700"/>
+          <a:lstStyle/>
+          <a:p>
+            <a:pPr algn="ctr">
+              <a:lnSpc>
+                <a:spcPct val="115000"/>
+              </a:lnSpc>
+              <a:spcAft>
+                <a:spcPts val="0"/>
+              </a:spcAft>
+            </a:pPr>
+            <a:r>
+              <a:rPr sz="1500" b="1">
+                <a:solidFill>
+                  <a:srgbClr val="F6F8FB"/>
+                </a:solidFill>
+                <a:latin typeface="Arial"/>
+              </a:rPr>
+              <a:t>Money</a:t>
+            </a:r>
+          </a:p>
+        </p:txBody>
+      </p:sp>
+      <p:sp>
+        <p:nvSpPr>
+          <p:cNvPr id="47" name="Rectangle 46"/>
+          <p:cNvSpPr/>
+          <p:nvPr/>
+        </p:nvSpPr>
+        <p:spPr>
+          <a:xfrm>
+            <a:off x="6591300" y="1993900"/>
+            <a:ext cx="914400" cy="469900"/>
+          </a:xfrm>
+          <a:prstGeom prst="rect">
+            <a:avLst/>
+          </a:prstGeom>
+          <a:solidFill>
+            <a:srgbClr val="FFFFFF"/>
+          </a:solidFill>
+          <a:ln>
+            <a:noFill/>
+          </a:ln>
+          <a:effectLst/>
+        </p:spPr>
+        <p:style>
+          <a:lnRef idx="1">
+            <a:schemeClr val="accent1"/>
+          </a:lnRef>
+          <a:fillRef idx="3">
+            <a:schemeClr val="accent1"/>
+          </a:fillRef>
+          <a:effectRef idx="2">
+            <a:schemeClr val="accent1"/>
+          </a:effectRef>
+          <a:fontRef idx="minor">
+            <a:schemeClr val="lt1"/>
+          </a:fontRef>
+        </p:style>
+        <p:txBody>
+          <a:bodyPr rtlCol="0" anchor="ctr" wrap="square" lIns="12700" rIns="12700" tIns="12700" bIns="12700"/>
+          <a:lstStyle/>
+          <a:p>
+            <a:pPr algn="ctr">
+              <a:lnSpc>
+                <a:spcPct val="115000"/>
+              </a:lnSpc>
+              <a:spcAft>
+                <a:spcPts val="0"/>
+              </a:spcAft>
+            </a:pPr>
+            <a:r>
+              <a:rPr sz="1700" b="1">
+                <a:solidFill>
+                  <a:srgbClr val="00175A"/>
+                </a:solidFill>
+                <a:latin typeface="Arial"/>
+              </a:rPr>
+              <a:t>$1.03</a:t>
+            </a:r>
+          </a:p>
+        </p:txBody>
+      </p:sp>
+      <p:sp>
+        <p:nvSpPr>
+          <p:cNvPr id="48" name="Rectangle 47"/>
+          <p:cNvSpPr/>
+          <p:nvPr/>
+        </p:nvSpPr>
+        <p:spPr>
+          <a:xfrm>
+            <a:off x="6591300" y="2501900"/>
+            <a:ext cx="914400" cy="469900"/>
+          </a:xfrm>
+          <a:prstGeom prst="rect">
+            <a:avLst/>
+          </a:prstGeom>
+          <a:solidFill>
+            <a:srgbClr val="E9EEF5"/>
+          </a:solidFill>
+          <a:ln>
+            <a:noFill/>
+          </a:ln>
+          <a:effectLst/>
+        </p:spPr>
+        <p:style>
+          <a:lnRef idx="1">
+            <a:schemeClr val="accent1"/>
+          </a:lnRef>
+          <a:fillRef idx="3">
+            <a:schemeClr val="accent1"/>
+          </a:fillRef>
+          <a:effectRef idx="2">
+            <a:schemeClr val="accent1"/>
+          </a:effectRef>
+          <a:fontRef idx="minor">
+            <a:schemeClr val="lt1"/>
+          </a:fontRef>
+        </p:style>
+        <p:txBody>
+          <a:bodyPr rtlCol="0" anchor="ctr" wrap="square" lIns="12700" rIns="12700" tIns="12700" bIns="12700"/>
+          <a:lstStyle/>
+          <a:p>
+            <a:pPr algn="ctr">
+              <a:lnSpc>
+                <a:spcPct val="115000"/>
+              </a:lnSpc>
+              <a:spcAft>
+                <a:spcPts val="0"/>
+              </a:spcAft>
+            </a:pPr>
+            <a:r>
+              <a:rPr sz="1700" b="1">
+                <a:solidFill>
+                  <a:srgbClr val="00175A"/>
+                </a:solidFill>
+                <a:latin typeface="Arial"/>
+              </a:rPr>
+              <a:t>$1.05</a:t>
+            </a:r>
+          </a:p>
+        </p:txBody>
+      </p:sp>
+      <p:sp>
+        <p:nvSpPr>
+          <p:cNvPr id="49" name="Rectangle 48"/>
+          <p:cNvSpPr/>
+          <p:nvPr/>
+        </p:nvSpPr>
+        <p:spPr>
+          <a:xfrm>
+            <a:off x="6591300" y="3009900"/>
+            <a:ext cx="914400" cy="469900"/>
+          </a:xfrm>
+          <a:prstGeom prst="rect">
+            <a:avLst/>
+          </a:prstGeom>
+          <a:solidFill>
+            <a:srgbClr val="F6E3E0"/>
+          </a:solidFill>
+          <a:ln>
+            <a:noFill/>
+          </a:ln>
+          <a:effectLst/>
+        </p:spPr>
+        <p:style>
+          <a:lnRef idx="1">
+            <a:schemeClr val="accent1"/>
+          </a:lnRef>
+          <a:fillRef idx="3">
+            <a:schemeClr val="accent1"/>
+          </a:fillRef>
+          <a:effectRef idx="2">
+            <a:schemeClr val="accent1"/>
+          </a:effectRef>
+          <a:fontRef idx="minor">
+            <a:schemeClr val="lt1"/>
+          </a:fontRef>
+        </p:style>
+        <p:txBody>
+          <a:bodyPr rtlCol="0" anchor="ctr" wrap="square" lIns="12700" rIns="12700" tIns="12700" bIns="12700"/>
+          <a:lstStyle/>
+          <a:p>
+            <a:pPr algn="ctr">
+              <a:lnSpc>
+                <a:spcPct val="115000"/>
+              </a:lnSpc>
+              <a:spcAft>
+                <a:spcPts val="0"/>
+              </a:spcAft>
+            </a:pPr>
+            <a:r>
+              <a:rPr sz="1700" b="1">
+                <a:solidFill>
+                  <a:srgbClr val="00175A"/>
+                </a:solidFill>
+                <a:latin typeface="Arial"/>
+              </a:rPr>
+              <a:t>$0.55</a:t>
+            </a:r>
+          </a:p>
+        </p:txBody>
+      </p:sp>
+      <p:sp>
+        <p:nvSpPr>
+          <p:cNvPr id="50" name="Rectangle 49"/>
+          <p:cNvSpPr/>
+          <p:nvPr/>
+        </p:nvSpPr>
+        <p:spPr>
+          <a:xfrm>
+            <a:off x="6591300" y="3517900"/>
+            <a:ext cx="914400" cy="469900"/>
+          </a:xfrm>
+          <a:prstGeom prst="rect">
+            <a:avLst/>
+          </a:prstGeom>
+          <a:solidFill>
+            <a:srgbClr val="E3ECE2"/>
+          </a:solidFill>
+          <a:ln>
+            <a:noFill/>
+          </a:ln>
+          <a:effectLst/>
+        </p:spPr>
+        <p:style>
+          <a:lnRef idx="1">
+            <a:schemeClr val="accent1"/>
+          </a:lnRef>
+          <a:fillRef idx="3">
+            <a:schemeClr val="accent1"/>
+          </a:fillRef>
+          <a:effectRef idx="2">
+            <a:schemeClr val="accent1"/>
+          </a:effectRef>
+          <a:fontRef idx="minor">
+            <a:schemeClr val="lt1"/>
+          </a:fontRef>
+        </p:style>
+        <p:txBody>
+          <a:bodyPr rtlCol="0" anchor="ctr" wrap="square" lIns="12700" rIns="12700" tIns="12700" bIns="12700"/>
+          <a:lstStyle/>
+          <a:p>
+            <a:pPr algn="ctr">
+              <a:lnSpc>
+                <a:spcPct val="115000"/>
+              </a:lnSpc>
+              <a:spcAft>
+                <a:spcPts val="0"/>
+              </a:spcAft>
+            </a:pPr>
+            <a:r>
+              <a:rPr sz="1700" b="1">
+                <a:solidFill>
+                  <a:srgbClr val="00175A"/>
+                </a:solidFill>
+                <a:latin typeface="Arial"/>
+              </a:rPr>
+              <a:t>$0.84</a:t>
+            </a:r>
+          </a:p>
+        </p:txBody>
+      </p:sp>
+      <p:sp>
+        <p:nvSpPr>
+          <p:cNvPr id="51" name="Rectangle 50"/>
+          <p:cNvSpPr/>
+          <p:nvPr/>
+        </p:nvSpPr>
+        <p:spPr>
+          <a:xfrm>
+            <a:off x="6591300" y="4025900"/>
+            <a:ext cx="914400" cy="469900"/>
+          </a:xfrm>
+          <a:prstGeom prst="rect">
+            <a:avLst/>
+          </a:prstGeom>
+          <a:solidFill>
+            <a:srgbClr val="FFFFFF"/>
+          </a:solidFill>
+          <a:ln>
+            <a:noFill/>
+          </a:ln>
+          <a:effectLst/>
+        </p:spPr>
+        <p:style>
+          <a:lnRef idx="1">
+            <a:schemeClr val="accent1"/>
+          </a:lnRef>
+          <a:fillRef idx="3">
+            <a:schemeClr val="accent1"/>
+          </a:fillRef>
+          <a:effectRef idx="2">
+            <a:schemeClr val="accent1"/>
+          </a:effectRef>
+          <a:fontRef idx="minor">
+            <a:schemeClr val="lt1"/>
+          </a:fontRef>
+        </p:style>
+        <p:txBody>
+          <a:bodyPr rtlCol="0" anchor="ctr" wrap="square" lIns="12700" rIns="12700" tIns="12700" bIns="12700"/>
+          <a:lstStyle/>
+          <a:p>
+            <a:pPr algn="ctr">
+              <a:lnSpc>
+                <a:spcPct val="115000"/>
+              </a:lnSpc>
+              <a:spcAft>
+                <a:spcPts val="0"/>
+              </a:spcAft>
+            </a:pPr>
+            <a:r>
+              <a:rPr sz="1700" b="1">
+                <a:solidFill>
+                  <a:srgbClr val="00175A"/>
+                </a:solidFill>
+                <a:latin typeface="Arial"/>
+              </a:rPr>
+              <a:t>$0.86</a:t>
+            </a:r>
+          </a:p>
+        </p:txBody>
+      </p:sp>
+      <p:sp>
+        <p:nvSpPr>
+          <p:cNvPr id="52" name="Rectangle 51"/>
+          <p:cNvSpPr/>
+          <p:nvPr/>
+        </p:nvSpPr>
+        <p:spPr>
+          <a:xfrm>
+            <a:off x="6591300" y="4533900"/>
+            <a:ext cx="914400" cy="469900"/>
+          </a:xfrm>
+          <a:prstGeom prst="rect">
+            <a:avLst/>
+          </a:prstGeom>
+          <a:solidFill>
+            <a:srgbClr val="E9EEF5"/>
+          </a:solidFill>
+          <a:ln>
+            <a:noFill/>
+          </a:ln>
+          <a:effectLst/>
+        </p:spPr>
+        <p:style>
+          <a:lnRef idx="1">
+            <a:schemeClr val="accent1"/>
+          </a:lnRef>
+          <a:fillRef idx="3">
+            <a:schemeClr val="accent1"/>
+          </a:fillRef>
+          <a:effectRef idx="2">
+            <a:schemeClr val="accent1"/>
+          </a:effectRef>
+          <a:fontRef idx="minor">
+            <a:schemeClr val="lt1"/>
+          </a:fontRef>
+        </p:style>
+        <p:txBody>
+          <a:bodyPr rtlCol="0" anchor="ctr" wrap="square" lIns="12700" rIns="12700" tIns="12700" bIns="12700"/>
+          <a:lstStyle/>
+          <a:p>
+            <a:pPr algn="ctr">
+              <a:lnSpc>
+                <a:spcPct val="115000"/>
+              </a:lnSpc>
+              <a:spcAft>
+                <a:spcPts val="0"/>
+              </a:spcAft>
+            </a:pPr>
+            <a:r>
+              <a:rPr sz="1700" b="1">
+                <a:solidFill>
+                  <a:srgbClr val="00175A"/>
+                </a:solidFill>
+                <a:latin typeface="Arial"/>
+              </a:rPr>
+              <a:t>≥ $20?</a:t>
+            </a:r>
+          </a:p>
+        </p:txBody>
+      </p:sp>
+      <p:sp>
+        <p:nvSpPr>
+          <p:cNvPr id="53" name="TextBox 52"/>
+          <p:cNvSpPr txBox="1"/>
+          <p:nvPr/>
+        </p:nvSpPr>
+        <p:spPr>
+          <a:xfrm>
+            <a:off x="812800" y="5080000"/>
+            <a:ext cx="6819900" cy="381000"/>
+          </a:xfrm>
+          <a:prstGeom prst="rect">
+            <a:avLst/>
+          </a:prstGeom>
+          <a:noFill/>
+        </p:spPr>
+        <p:txBody>
+          <a:bodyPr wrap="square" lIns="0" rIns="0" tIns="0" bIns="0" anchor="t">
+            <a:spAutoFit/>
+          </a:bodyPr>
+          <a:lstStyle/>
+          <a:p>
+            <a:pPr algn="l">
+              <a:lnSpc>
+                <a:spcPct val="115000"/>
+              </a:lnSpc>
+              <a:spcAft>
+                <a:spcPts val="0"/>
+              </a:spcAft>
+            </a:pPr>
+            <a:r>
+              <a:rPr sz="1500" b="0">
+                <a:solidFill>
+                  <a:srgbClr val="6B7480"/>
+                </a:solidFill>
+                <a:latin typeface="Arial"/>
+              </a:rPr>
+              <a:t>ε = 5 points, bet size λ = 0.5.  Escalated tasks use the team’s answer: loss 0.</a:t>
+            </a:r>
+          </a:p>
+        </p:txBody>
+      </p:sp>
+      <p:sp>
+        <p:nvSpPr>
+          <p:cNvPr id="54" name="Rounded Rectangle 53"/>
+          <p:cNvSpPr/>
+          <p:nvPr/>
+        </p:nvSpPr>
+        <p:spPr>
+          <a:xfrm>
+            <a:off x="7874000" y="1587500"/>
+            <a:ext cx="3505200" cy="3873500"/>
+          </a:xfrm>
+          <a:prstGeom prst="roundRect">
+            <a:avLst>
+              <a:gd name="adj" fmla="val 3260"/>
+            </a:avLst>
+          </a:prstGeom>
+          <a:solidFill>
+            <a:srgbClr val="00175A"/>
+          </a:solidFill>
+          <a:ln>
+            <a:noFill/>
+          </a:ln>
+          <a:effectLst/>
+        </p:spPr>
+        <p:style>
+          <a:lnRef idx="1">
+            <a:schemeClr val="accent1"/>
+          </a:lnRef>
+          <a:fillRef idx="3">
+            <a:schemeClr val="accent1"/>
+          </a:fillRef>
+          <a:effectRef idx="2">
+            <a:schemeClr val="accent1"/>
+          </a:effectRef>
+          <a:fontRef idx="minor">
+            <a:schemeClr val="lt1"/>
+          </a:fontRef>
+        </p:style>
+        <p:txBody>
+          <a:bodyPr rtlCol="0" anchor="t" wrap="square" lIns="139700" rIns="139700" tIns="139700" bIns="139700"/>
+          <a:lstStyle/>
+          <a:p>
+            <a:pPr algn="l">
+              <a:lnSpc>
+                <a:spcPct val="115000"/>
+              </a:lnSpc>
+              <a:spcAft>
+                <a:spcPts val="1000"/>
+              </a:spcAft>
+            </a:pPr>
+            <a:r>
+              <a:rPr sz="1800" b="1">
+                <a:solidFill>
+                  <a:srgbClr val="66B2F0"/>
+                </a:solidFill>
+                <a:latin typeface="Arial"/>
+              </a:rPr>
+              <a:t>Each threshold, strict → loose</a:t>
+            </a:r>
+          </a:p>
+          <a:p>
+            <a:pPr algn="l">
+              <a:lnSpc>
+                <a:spcPct val="115000"/>
+              </a:lnSpc>
+              <a:spcAft>
+                <a:spcPts val="800"/>
+              </a:spcAft>
+            </a:pPr>
+            <a:r>
+              <a:rPr sz="1500" b="1">
+                <a:solidFill>
+                  <a:srgbClr val="F6F8FB"/>
+                </a:solidFill>
+                <a:latin typeface="Arial"/>
+              </a:rPr>
+              <a:t>1</a:t>
+            </a:r>
+            <a:r>
+              <a:rPr sz="1500" b="0">
+                <a:solidFill>
+                  <a:srgbClr val="F6F8FB"/>
+                </a:solidFill>
+                <a:latin typeface="Arial"/>
+              </a:rPr>
+              <a:t>  Tasks in random order, $1.</a:t>
+            </a:r>
+          </a:p>
+          <a:p>
+            <a:pPr algn="l">
+              <a:lnSpc>
+                <a:spcPct val="115000"/>
+              </a:lnSpc>
+              <a:spcAft>
+                <a:spcPts val="800"/>
+              </a:spcAft>
+            </a:pPr>
+            <a:r>
+              <a:rPr sz="1500" b="1">
+                <a:solidFill>
+                  <a:srgbClr val="F6F8FB"/>
+                </a:solidFill>
+                <a:latin typeface="Arial"/>
+              </a:rPr>
+              <a:t>2</a:t>
+            </a:r>
+            <a:r>
+              <a:rPr sz="1500" b="0">
+                <a:solidFill>
+                  <a:srgbClr val="F6F8FB"/>
+                </a:solidFill>
+                <a:latin typeface="Arial"/>
+              </a:rPr>
+              <a:t>  ℓ = team right − ours right.</a:t>
+            </a:r>
+          </a:p>
+          <a:p>
+            <a:pPr algn="l">
+              <a:lnSpc>
+                <a:spcPct val="115000"/>
+              </a:lnSpc>
+              <a:spcAft>
+                <a:spcPts val="800"/>
+              </a:spcAft>
+            </a:pPr>
+            <a:r>
+              <a:rPr sz="1500" b="1">
+                <a:solidFill>
+                  <a:srgbClr val="F6F8FB"/>
+                </a:solidFill>
+                <a:latin typeface="Arial"/>
+              </a:rPr>
+              <a:t>3</a:t>
+            </a:r>
+            <a:r>
+              <a:rPr sz="1500" b="0">
+                <a:solidFill>
+                  <a:srgbClr val="F6F8FB"/>
+                </a:solidFill>
+                <a:latin typeface="Arial"/>
+              </a:rPr>
+              <a:t>  λ from </a:t>
+            </a:r>
+            <a:r>
+              <a:rPr sz="1500" b="1">
+                <a:solidFill>
+                  <a:srgbClr val="F6F8FB"/>
+                </a:solidFill>
+                <a:latin typeface="Arial"/>
+              </a:rPr>
+              <a:t>earlier tasks only</a:t>
+            </a:r>
+            <a:r>
+              <a:rPr sz="1500" b="0">
+                <a:solidFill>
+                  <a:srgbClr val="F6F8FB"/>
+                </a:solidFill>
+                <a:latin typeface="Arial"/>
+              </a:rPr>
+              <a:t>. A loss at most halves the money.</a:t>
+            </a:r>
+          </a:p>
+          <a:p>
+            <a:pPr algn="l">
+              <a:lnSpc>
+                <a:spcPct val="115000"/>
+              </a:lnSpc>
+              <a:spcAft>
+                <a:spcPts val="800"/>
+              </a:spcAft>
+            </a:pPr>
+            <a:r>
+              <a:rPr sz="1500" b="1">
+                <a:solidFill>
+                  <a:srgbClr val="F6F8FB"/>
+                </a:solidFill>
+                <a:latin typeface="Arial"/>
+              </a:rPr>
+              <a:t>4</a:t>
+            </a:r>
+            <a:r>
+              <a:rPr sz="1500" b="0">
+                <a:solidFill>
+                  <a:srgbClr val="F6F8FB"/>
+                </a:solidFill>
+                <a:latin typeface="Arial"/>
+              </a:rPr>
+              <a:t>  Money × (1 + λ (ε − ℓ)).</a:t>
+            </a:r>
+          </a:p>
+          <a:p>
+            <a:pPr algn="l">
+              <a:lnSpc>
+                <a:spcPct val="115000"/>
+              </a:lnSpc>
+              <a:spcAft>
+                <a:spcPts val="0"/>
+              </a:spcAft>
+            </a:pPr>
+            <a:r>
+              <a:rPr sz="1500" b="1">
+                <a:solidFill>
+                  <a:srgbClr val="F6F8FB"/>
+                </a:solidFill>
+                <a:latin typeface="Arial"/>
+              </a:rPr>
+              <a:t>5</a:t>
+            </a:r>
+            <a:r>
+              <a:rPr sz="1500" b="0">
+                <a:solidFill>
+                  <a:srgbClr val="F6F8FB"/>
+                </a:solidFill>
+                <a:latin typeface="Arial"/>
+              </a:rPr>
+              <a:t>  Ever ≥ $20: certified, next threshold. Never: stop.</a:t>
+            </a:r>
+          </a:p>
+        </p:txBody>
+      </p:sp>
+      <p:sp>
+        <p:nvSpPr>
+          <p:cNvPr id="55" name="Rounded Rectangle 54"/>
+          <p:cNvSpPr/>
+          <p:nvPr/>
+        </p:nvSpPr>
+        <p:spPr>
+          <a:xfrm>
+            <a:off x="812800" y="5651500"/>
+            <a:ext cx="10566400" cy="508000"/>
+          </a:xfrm>
+          <a:prstGeom prst="roundRect">
+            <a:avLst>
+              <a:gd name="adj" fmla="val 10000"/>
+            </a:avLst>
+          </a:prstGeom>
+          <a:solidFill>
+            <a:srgbClr val="DDEDFB"/>
+          </a:solidFill>
+          <a:ln w="25400">
+            <a:solidFill>
+              <a:srgbClr val="006FCF"/>
+            </a:solidFill>
+          </a:ln>
+          <a:effectLst/>
+        </p:spPr>
+        <p:style>
+          <a:lnRef idx="1">
+            <a:schemeClr val="accent1"/>
+          </a:lnRef>
+          <a:fillRef idx="3">
+            <a:schemeClr val="accent1"/>
+          </a:fillRef>
+          <a:effectRef idx="2">
+            <a:schemeClr val="accent1"/>
+          </a:effectRef>
+          <a:fontRef idx="minor">
+            <a:schemeClr val="lt1"/>
+          </a:fontRef>
+        </p:style>
+        <p:txBody>
+          <a:bodyPr rtlCol="0" anchor="ctr" wrap="square" lIns="50800" rIns="50800" tIns="50800" bIns="50800"/>
+          <a:lstStyle/>
+          <a:p>
+            <a:pPr algn="ctr">
+              <a:lnSpc>
+                <a:spcPct val="115000"/>
+              </a:lnSpc>
+              <a:spcAft>
+                <a:spcPts val="0"/>
+              </a:spcAft>
+            </a:pPr>
+            <a:r>
+              <a:rPr sz="1800" b="1">
+                <a:solidFill>
+                  <a:srgbClr val="00175A"/>
+                </a:solidFill>
+                <a:latin typeface="Arial"/>
+              </a:rPr>
+              <a:t>Options A and B are each tested this way at 5%, so both hold together with probability ≥ 90%.</a:t>
+            </a:r>
+          </a:p>
+        </p:txBody>
+      </p:sp>
+      <p:sp>
+        <p:nvSpPr>
+          <p:cNvPr id="56" name="TextBox 55"/>
+          <p:cNvSpPr txBox="1"/>
+          <p:nvPr/>
+        </p:nvSpPr>
+        <p:spPr>
+          <a:xfrm>
+            <a:off x="812800" y="6413500"/>
+            <a:ext cx="10566400" cy="215900"/>
+          </a:xfrm>
+          <a:prstGeom prst="rect">
+            <a:avLst/>
+          </a:prstGeom>
+          <a:noFill/>
+        </p:spPr>
+        <p:txBody>
+          <a:bodyPr wrap="square" lIns="0" rIns="0" tIns="0" bIns="0" anchor="t">
+            <a:spAutoFit/>
+          </a:bodyPr>
+          <a:lstStyle/>
+          <a:p>
+            <a:pPr algn="r">
+              <a:lnSpc>
+                <a:spcPct val="115000"/>
+              </a:lnSpc>
+              <a:spcAft>
+                <a:spcPts val="0"/>
+              </a:spcAft>
+            </a:pPr>
+            <a:r>
+              <a:rPr sz="1200" b="0">
+                <a:solidFill>
+                  <a:srgbClr val="6B7480"/>
+                </a:solidFill>
+                <a:latin typeface="Arial"/>
+              </a:rPr>
+              <a:t>14</a:t>
             </a:r>
           </a:p>
         </p:txBody>
@@ -18612,7 +24225,7 @@
                 </a:solidFill>
                 <a:latin typeface="Arial"/>
               </a:rPr>
-              <a:t>19</a:t>
+              <a:t>21</a:t>
             </a:r>
           </a:p>
         </p:txBody>
@@ -18736,7 +24349,7 @@
         <p:spPr>
           <a:xfrm>
             <a:off x="812800" y="1619250"/>
-            <a:ext cx="6731000" cy="508000"/>
+            <a:ext cx="10566400" cy="508000"/>
           </a:xfrm>
           <a:prstGeom prst="roundRect">
             <a:avLst>
@@ -18784,7 +24397,7 @@
                 </a:solidFill>
                 <a:latin typeface="Arial"/>
               </a:rPr>
-              <a:t>The key question: when should a task climb?</a:t>
+              <a:t>Stop if score &gt; threshold.  The key question: which threshold?</a:t>
             </a:r>
           </a:p>
         </p:txBody>
@@ -20047,7 +25660,7 @@
                 </a:solidFill>
                 <a:latin typeface="Arial"/>
               </a:rPr>
-              <a:t>20</a:t>
+              <a:t>22</a:t>
             </a:r>
           </a:p>
         </p:txBody>
@@ -20115,7 +25728,7 @@
                 </a:solidFill>
                 <a:latin typeface="Arial"/>
               </a:rPr>
-              <a:t>HOW TO CLIMB · SIGNAL</a:t>
+              <a:t>STEP 1 · THE SCORE</a:t>
             </a:r>
           </a:p>
         </p:txBody>
@@ -21835,7 +27448,7 @@
                 </a:solidFill>
                 <a:latin typeface="Arial"/>
               </a:rPr>
-              <a:t>HOW TO CLIMB · SIGNAL</a:t>
+              <a:t>STEP 1 · THE SCORE</a:t>
             </a:r>
           </a:p>
         </p:txBody>

--- a/slides/CLIMB_talk.pptx
+++ b/slides/CLIMB_talk.pptx
@@ -12,6 +12,7 @@
     <p:sldId id="261" r:id="rId13"/>
     <p:sldId id="263" r:id="rId15"/>
     <p:sldId id="264" r:id="rId16"/>
+    <p:sldId id="286" r:id="rId38"/>
     <p:sldId id="283" r:id="rId35"/>
     <p:sldId id="266" r:id="rId18"/>
     <p:sldId id="284" r:id="rId36"/>
@@ -2142,6 +2143,76 @@
           <a:p>
             <a:r>
               <a:t>Here is exactly what CLIMB does for one threshold. Take the calibration tasks in random order and start with one dollar. For each task, the threshold either stops early and keeps the cheap answer, or escalates and uses the team's answer. The loss is the team's correctness minus ours: plus one if we lost a right answer, minus one if we saved one, zero otherwise. An escalated task always has loss zero. The bet size is set from the earlier tasks only, never from the current one, and is capped so one loss at most halves the money. Multiply the money by one plus bet size times tolerance minus loss. In the example, with bet size 0.5 and a 5 point tolerance, task 3 loses a right answer and the money halves, task 4 saves one and it grows by half. If the money ever reaches 20 dollars, the threshold is certified and we move to the next, looser one. If it never does, we stop: no looser threshold is deployed. We run this for options A and B, each at 5 percent.</a:t>
+            </a:r>
+          </a:p>
+        </p:txBody>
+      </p:sp>
+      <p:sp>
+        <p:nvSpPr>
+          <p:cNvPr id="4" name="Slide Number Placeholder 3"/>
+          <p:cNvSpPr>
+            <a:spLocks noGrp="1"/>
+          </p:cNvSpPr>
+          <p:nvPr>
+            <p:ph type="sldNum" idx="5" sz="quarter"/>
+          </p:nvPr>
+        </p:nvSpPr>
+        <p:spPr/>
+      </p:sp>
+    </p:spTree>
+  </p:cSld>
+  <p:clrMapOvr>
+    <a:masterClrMapping/>
+  </p:clrMapOvr>
+</p:notes>
+</file>
+
+<file path=ppt/notesSlides/notesSlide31.xml><?xml version="1.0" encoding="utf-8"?>
+<p:notes xmlns:a="http://schemas.openxmlformats.org/drawingml/2006/main" xmlns:p="http://schemas.openxmlformats.org/presentationml/2006/main" xmlns:r="http://schemas.openxmlformats.org/officeDocument/2006/relationships">
+  <p:cSld>
+    <p:spTree>
+      <p:nvGrpSpPr>
+        <p:cNvPr id="1" name=""/>
+        <p:cNvGrpSpPr/>
+        <p:nvPr/>
+      </p:nvGrpSpPr>
+      <p:grpSpPr>
+        <a:xfrm>
+          <a:off x="0" y="0"/>
+          <a:ext cx="0" cy="0"/>
+          <a:chOff x="0" y="0"/>
+          <a:chExt cx="0" cy="0"/>
+        </a:xfrm>
+      </p:grpSpPr>
+      <p:sp>
+        <p:nvSpPr>
+          <p:cNvPr id="2" name="Slide Image Placeholder 1"/>
+          <p:cNvSpPr>
+            <a:spLocks noGrp="1"/>
+          </p:cNvSpPr>
+          <p:nvPr>
+            <p:ph type="sldImg" idx="2"/>
+          </p:nvPr>
+        </p:nvSpPr>
+        <p:spPr/>
+      </p:sp>
+      <p:sp>
+        <p:nvSpPr>
+          <p:cNvPr id="3" name="Notes Placeholder 2"/>
+          <p:cNvSpPr>
+            <a:spLocks noGrp="1"/>
+          </p:cNvSpPr>
+          <p:nvPr>
+            <p:ph type="body" idx="3" sz="quarter"/>
+          </p:nvPr>
+        </p:nvSpPr>
+        <p:spPr/>
+        <p:txBody>
+          <a:bodyPr/>
+          <a:lstStyle/>
+          <a:p>
+            <a:r>
+              <a:t>Why is the rule a threshold, and not something more complex? Think of it as packing a bag. Stopping a task early saves the team's tokens on it, but risks the accuracy the team would have added, its gain. You can afford a total risk of epsilon. To save the most tokens, you stop first the tasks with the least gain per token saved, exactly like a knapsack. Now, if the gain falls as confidence rises, those are the most confident tasks. So the best rule stops every task above some confidence, and escalates the rest: a threshold. The paper proves this as a proposition. Does the gain fall with confidence? On the right, the gain from calling the team in each fifth of tasks, on the nine settings where confidence ranks answers the right way. It falls from 17 points on the least confident fifth to 4 to 6 on the confident ones, and it falls on eight of the nine. On Gemma's three backwards settings it does not, and there the guarantee still holds, the savings come from agreement. So theory gives the form of the rule. What it cannot give is where the line goes: that depends on the unknown gain, and the data has to decide.</a:t>
             </a:r>
           </a:p>
         </p:txBody>
@@ -6083,7 +6154,7 @@
                 </a:solidFill>
                 <a:latin typeface="Arial"/>
               </a:rPr>
-              <a:t>23</a:t>
+              <a:t>24</a:t>
             </a:r>
           </a:p>
         </p:txBody>
@@ -7492,7 +7563,7 @@
                 </a:solidFill>
                 <a:latin typeface="Arial"/>
               </a:rPr>
-              <a:t>9</a:t>
+              <a:t>10</a:t>
             </a:r>
           </a:p>
         </p:txBody>
@@ -8096,7 +8167,7 @@
                 </a:solidFill>
                 <a:latin typeface="Arial"/>
               </a:rPr>
-              <a:t>11</a:t>
+              <a:t>12</a:t>
             </a:r>
           </a:p>
         </p:txBody>
@@ -8580,7 +8651,7 @@
                 </a:solidFill>
                 <a:latin typeface="Arial"/>
               </a:rPr>
-              <a:t>12</a:t>
+              <a:t>13</a:t>
             </a:r>
           </a:p>
         </p:txBody>
@@ -9325,7 +9396,7 @@
                 </a:solidFill>
                 <a:latin typeface="Arial"/>
               </a:rPr>
-              <a:t>13</a:t>
+              <a:t>14</a:t>
             </a:r>
           </a:p>
         </p:txBody>
@@ -9899,7 +9970,7 @@
                 </a:solidFill>
                 <a:latin typeface="Arial"/>
               </a:rPr>
-              <a:t>25</a:t>
+              <a:t>26</a:t>
             </a:r>
           </a:p>
         </p:txBody>
@@ -10117,7 +10188,7 @@
                 </a:solidFill>
                 <a:latin typeface="Arial"/>
               </a:rPr>
-              <a:t>15</a:t>
+              <a:t>16</a:t>
             </a:r>
           </a:p>
         </p:txBody>
@@ -10460,7 +10531,7 @@
                 </a:solidFill>
                 <a:latin typeface="Arial"/>
               </a:rPr>
-              <a:t>26</a:t>
+              <a:t>27</a:t>
             </a:r>
           </a:p>
         </p:txBody>
@@ -11224,7 +11295,7 @@
                 </a:solidFill>
                 <a:latin typeface="Arial"/>
               </a:rPr>
-              <a:t>27</a:t>
+              <a:t>28</a:t>
             </a:r>
           </a:p>
         </p:txBody>
@@ -12822,7 +12893,7 @@
                 </a:solidFill>
                 <a:latin typeface="Arial"/>
               </a:rPr>
-              <a:t>28</a:t>
+              <a:t>29</a:t>
             </a:r>
           </a:p>
         </p:txBody>
@@ -14338,7 +14409,7 @@
                 </a:solidFill>
                 <a:latin typeface="Arial"/>
               </a:rPr>
-              <a:t>29</a:t>
+              <a:t>30</a:t>
             </a:r>
           </a:p>
         </p:txBody>
@@ -14680,7 +14751,7 @@
                 </a:solidFill>
                 <a:latin typeface="Arial"/>
               </a:rPr>
-              <a:t>30</a:t>
+              <a:t>31</a:t>
             </a:r>
           </a:p>
         </p:txBody>
@@ -15130,7 +15201,7 @@
                 </a:solidFill>
                 <a:latin typeface="Arial"/>
               </a:rPr>
-              <a:t>16</a:t>
+              <a:t>17</a:t>
             </a:r>
           </a:p>
         </p:txBody>
@@ -15389,7 +15460,7 @@
                 </a:solidFill>
                 <a:latin typeface="Arial"/>
               </a:rPr>
-              <a:t>24</a:t>
+              <a:t>25</a:t>
             </a:r>
           </a:p>
         </p:txBody>
@@ -15898,7 +15969,7 @@
                 </a:solidFill>
                 <a:latin typeface="Arial"/>
               </a:rPr>
-              <a:t>17</a:t>
+              <a:t>18</a:t>
             </a:r>
           </a:p>
         </p:txBody>
@@ -17170,7 +17241,7 @@
                 </a:solidFill>
                 <a:latin typeface="Arial"/>
               </a:rPr>
-              <a:t>18</a:t>
+              <a:t>19</a:t>
             </a:r>
           </a:p>
         </p:txBody>
@@ -17322,7 +17393,7 @@
                 </a:solidFill>
                 <a:latin typeface="Arial"/>
               </a:rPr>
-              <a:t>19</a:t>
+              <a:t>20</a:t>
             </a:r>
           </a:p>
         </p:txBody>
@@ -18733,7 +18804,7 @@
                 </a:solidFill>
                 <a:latin typeface="Arial"/>
               </a:rPr>
-              <a:t>8</a:t>
+              <a:t>9</a:t>
             </a:r>
           </a:p>
         </p:txBody>
@@ -19408,7 +19479,7 @@
                 </a:solidFill>
                 <a:latin typeface="Arial"/>
               </a:rPr>
-              <a:t>10</a:t>
+              <a:t>11</a:t>
             </a:r>
           </a:p>
         </p:txBody>
@@ -19750,7 +19821,7 @@
                 </a:solidFill>
                 <a:latin typeface="Arial"/>
               </a:rPr>
-              <a:t>20</a:t>
+              <a:t>21</a:t>
             </a:r>
           </a:p>
         </p:txBody>
@@ -23123,7 +23194,1052 @@
                 </a:solidFill>
                 <a:latin typeface="Arial"/>
               </a:rPr>
-              <a:t>14</a:t>
+              <a:t>15</a:t>
+            </a:r>
+          </a:p>
+        </p:txBody>
+      </p:sp>
+    </p:spTree>
+  </p:cSld>
+  <p:clrMapOvr>
+    <a:masterClrMapping/>
+  </p:clrMapOvr>
+</p:sld>
+</file>
+
+<file path=ppt/slides/slide31.xml><?xml version="1.0" encoding="utf-8"?>
+<p:sld xmlns:a="http://schemas.openxmlformats.org/drawingml/2006/main" xmlns:p="http://schemas.openxmlformats.org/presentationml/2006/main" xmlns:r="http://schemas.openxmlformats.org/officeDocument/2006/relationships">
+  <p:cSld>
+    <p:bg>
+      <p:bgPr>
+        <a:solidFill>
+          <a:srgbClr val="F6F8FB"/>
+        </a:solidFill>
+        <a:effectLst/>
+      </p:bgPr>
+    </p:bg>
+    <p:spTree>
+      <p:nvGrpSpPr>
+        <p:cNvPr id="1" name=""/>
+        <p:cNvGrpSpPr/>
+        <p:nvPr/>
+      </p:nvGrpSpPr>
+      <p:grpSpPr/>
+      <p:sp>
+        <p:nvSpPr>
+          <p:cNvPr id="2" name="TextBox 1"/>
+          <p:cNvSpPr txBox="1"/>
+          <p:nvPr/>
+        </p:nvSpPr>
+        <p:spPr>
+          <a:xfrm>
+            <a:off x="812800" y="635000"/>
+            <a:ext cx="10566400" cy="254000"/>
+          </a:xfrm>
+          <a:prstGeom prst="rect">
+            <a:avLst/>
+          </a:prstGeom>
+          <a:noFill/>
+        </p:spPr>
+        <p:txBody>
+          <a:bodyPr wrap="square" lIns="0" rIns="0" tIns="0" bIns="0" anchor="t">
+            <a:spAutoFit/>
+          </a:bodyPr>
+          <a:lstStyle/>
+          <a:p>
+            <a:pPr algn="l">
+              <a:lnSpc>
+                <a:spcPct val="115000"/>
+              </a:lnSpc>
+              <a:spcAft>
+                <a:spcPts val="0"/>
+              </a:spcAft>
+            </a:pPr>
+            <a:r>
+              <a:rPr sz="1300" b="1">
+                <a:solidFill>
+                  <a:srgbClr val="006FCF"/>
+                </a:solidFill>
+                <a:latin typeface="Arial"/>
+              </a:rPr>
+              <a:t>STEP 2 · SETTING THE THRESHOLD</a:t>
+            </a:r>
+          </a:p>
+        </p:txBody>
+      </p:sp>
+      <p:sp>
+        <p:nvSpPr>
+          <p:cNvPr id="3" name="TextBox 2"/>
+          <p:cNvSpPr txBox="1"/>
+          <p:nvPr/>
+        </p:nvSpPr>
+        <p:spPr>
+          <a:xfrm>
+            <a:off x="812800" y="889000"/>
+            <a:ext cx="10566400" cy="571500"/>
+          </a:xfrm>
+          <a:prstGeom prst="rect">
+            <a:avLst/>
+          </a:prstGeom>
+          <a:noFill/>
+        </p:spPr>
+        <p:txBody>
+          <a:bodyPr wrap="square" lIns="0" rIns="0" tIns="0" bIns="0" anchor="t">
+            <a:spAutoFit/>
+          </a:bodyPr>
+          <a:lstStyle/>
+          <a:p>
+            <a:pPr algn="l">
+              <a:lnSpc>
+                <a:spcPct val="105000"/>
+              </a:lnSpc>
+              <a:spcAft>
+                <a:spcPts val="0"/>
+              </a:spcAft>
+            </a:pPr>
+            <a:r>
+              <a:rPr sz="3000" b="1">
+                <a:solidFill>
+                  <a:srgbClr val="00175A"/>
+                </a:solidFill>
+                <a:latin typeface="Georgia"/>
+              </a:rPr>
+              <a:t>Why a threshold? It is the best rule</a:t>
+            </a:r>
+          </a:p>
+        </p:txBody>
+      </p:sp>
+      <p:sp>
+        <p:nvSpPr>
+          <p:cNvPr id="4" name="Oval 3"/>
+          <p:cNvSpPr/>
+          <p:nvPr/>
+        </p:nvSpPr>
+        <p:spPr>
+          <a:xfrm>
+            <a:off x="812800" y="1587500"/>
+            <a:ext cx="355600" cy="355600"/>
+          </a:xfrm>
+          <a:prstGeom prst="ellipse">
+            <a:avLst/>
+          </a:prstGeom>
+          <a:solidFill>
+            <a:srgbClr val="006FCF"/>
+          </a:solidFill>
+          <a:ln>
+            <a:noFill/>
+          </a:ln>
+          <a:effectLst/>
+        </p:spPr>
+        <p:style>
+          <a:lnRef idx="1">
+            <a:schemeClr val="accent1"/>
+          </a:lnRef>
+          <a:fillRef idx="3">
+            <a:schemeClr val="accent1"/>
+          </a:fillRef>
+          <a:effectRef idx="2">
+            <a:schemeClr val="accent1"/>
+          </a:effectRef>
+          <a:fontRef idx="minor">
+            <a:schemeClr val="lt1"/>
+          </a:fontRef>
+        </p:style>
+        <p:txBody>
+          <a:bodyPr rtlCol="0" anchor="ctr" wrap="square" lIns="0" rIns="0" tIns="0" bIns="0"/>
+          <a:lstStyle/>
+          <a:p>
+            <a:pPr algn="ctr">
+              <a:lnSpc>
+                <a:spcPct val="115000"/>
+              </a:lnSpc>
+              <a:spcAft>
+                <a:spcPts val="0"/>
+              </a:spcAft>
+            </a:pPr>
+            <a:r>
+              <a:rPr sz="2400" b="1">
+                <a:solidFill>
+                  <a:srgbClr val="F6F8FB"/>
+                </a:solidFill>
+                <a:latin typeface="Arial"/>
+              </a:rPr>
+              <a:t>1</a:t>
+            </a:r>
+          </a:p>
+        </p:txBody>
+      </p:sp>
+      <p:sp>
+        <p:nvSpPr>
+          <p:cNvPr id="5" name="TextBox 4"/>
+          <p:cNvSpPr txBox="1"/>
+          <p:nvPr/>
+        </p:nvSpPr>
+        <p:spPr>
+          <a:xfrm>
+            <a:off x="1295400" y="1574800"/>
+            <a:ext cx="4826000" cy="698500"/>
+          </a:xfrm>
+          <a:prstGeom prst="rect">
+            <a:avLst/>
+          </a:prstGeom>
+          <a:noFill/>
+        </p:spPr>
+        <p:txBody>
+          <a:bodyPr wrap="square" lIns="0" rIns="0" tIns="0" bIns="0" anchor="t">
+            <a:spAutoFit/>
+          </a:bodyPr>
+          <a:lstStyle/>
+          <a:p>
+            <a:pPr algn="l">
+              <a:lnSpc>
+                <a:spcPct val="115000"/>
+              </a:lnSpc>
+              <a:spcAft>
+                <a:spcPts val="0"/>
+              </a:spcAft>
+            </a:pPr>
+            <a:r>
+              <a:rPr sz="1700" b="0">
+                <a:solidFill>
+                  <a:srgbClr val="333B47"/>
+                </a:solidFill>
+                <a:latin typeface="Arial"/>
+              </a:rPr>
+              <a:t>Stopping a task early saves its team tokens, but risks the accuracy the team would add: its </a:t>
+            </a:r>
+            <a:r>
+              <a:rPr sz="1700" b="1">
+                <a:solidFill>
+                  <a:srgbClr val="333B47"/>
+                </a:solidFill>
+                <a:latin typeface="Arial"/>
+              </a:rPr>
+              <a:t>gain</a:t>
+            </a:r>
+            <a:r>
+              <a:rPr sz="1700" b="0">
+                <a:solidFill>
+                  <a:srgbClr val="333B47"/>
+                </a:solidFill>
+                <a:latin typeface="Arial"/>
+              </a:rPr>
+              <a:t>.</a:t>
+            </a:r>
+          </a:p>
+        </p:txBody>
+      </p:sp>
+      <p:sp>
+        <p:nvSpPr>
+          <p:cNvPr id="6" name="Oval 5"/>
+          <p:cNvSpPr/>
+          <p:nvPr/>
+        </p:nvSpPr>
+        <p:spPr>
+          <a:xfrm>
+            <a:off x="812800" y="2317750"/>
+            <a:ext cx="355600" cy="355600"/>
+          </a:xfrm>
+          <a:prstGeom prst="ellipse">
+            <a:avLst/>
+          </a:prstGeom>
+          <a:solidFill>
+            <a:srgbClr val="006FCF"/>
+          </a:solidFill>
+          <a:ln>
+            <a:noFill/>
+          </a:ln>
+          <a:effectLst/>
+        </p:spPr>
+        <p:style>
+          <a:lnRef idx="1">
+            <a:schemeClr val="accent1"/>
+          </a:lnRef>
+          <a:fillRef idx="3">
+            <a:schemeClr val="accent1"/>
+          </a:fillRef>
+          <a:effectRef idx="2">
+            <a:schemeClr val="accent1"/>
+          </a:effectRef>
+          <a:fontRef idx="minor">
+            <a:schemeClr val="lt1"/>
+          </a:fontRef>
+        </p:style>
+        <p:txBody>
+          <a:bodyPr rtlCol="0" anchor="ctr" wrap="square" lIns="0" rIns="0" tIns="0" bIns="0"/>
+          <a:lstStyle/>
+          <a:p>
+            <a:pPr algn="ctr">
+              <a:lnSpc>
+                <a:spcPct val="115000"/>
+              </a:lnSpc>
+              <a:spcAft>
+                <a:spcPts val="0"/>
+              </a:spcAft>
+            </a:pPr>
+            <a:r>
+              <a:rPr sz="2400" b="1">
+                <a:solidFill>
+                  <a:srgbClr val="F6F8FB"/>
+                </a:solidFill>
+                <a:latin typeface="Arial"/>
+              </a:rPr>
+              <a:t>2</a:t>
+            </a:r>
+          </a:p>
+        </p:txBody>
+      </p:sp>
+      <p:sp>
+        <p:nvSpPr>
+          <p:cNvPr id="7" name="TextBox 6"/>
+          <p:cNvSpPr txBox="1"/>
+          <p:nvPr/>
+        </p:nvSpPr>
+        <p:spPr>
+          <a:xfrm>
+            <a:off x="1295400" y="2305050"/>
+            <a:ext cx="4826000" cy="698500"/>
+          </a:xfrm>
+          <a:prstGeom prst="rect">
+            <a:avLst/>
+          </a:prstGeom>
+          <a:noFill/>
+        </p:spPr>
+        <p:txBody>
+          <a:bodyPr wrap="square" lIns="0" rIns="0" tIns="0" bIns="0" anchor="t">
+            <a:spAutoFit/>
+          </a:bodyPr>
+          <a:lstStyle/>
+          <a:p>
+            <a:pPr algn="l">
+              <a:lnSpc>
+                <a:spcPct val="115000"/>
+              </a:lnSpc>
+              <a:spcAft>
+                <a:spcPts val="0"/>
+              </a:spcAft>
+            </a:pPr>
+            <a:r>
+              <a:rPr sz="1700" b="0">
+                <a:solidFill>
+                  <a:srgbClr val="333B47"/>
+                </a:solidFill>
+                <a:latin typeface="Arial"/>
+              </a:rPr>
+              <a:t>With a risk budget ε, stop first the tasks with the </a:t>
+            </a:r>
+            <a:r>
+              <a:rPr sz="1700" b="1">
+                <a:solidFill>
+                  <a:srgbClr val="333B47"/>
+                </a:solidFill>
+                <a:latin typeface="Arial"/>
+              </a:rPr>
+              <a:t>least gain per token</a:t>
+            </a:r>
+            <a:r>
+              <a:rPr sz="1700" b="0">
+                <a:solidFill>
+                  <a:srgbClr val="333B47"/>
+                </a:solidFill>
+                <a:latin typeface="Arial"/>
+              </a:rPr>
+              <a:t>, like packing a knapsack.</a:t>
+            </a:r>
+          </a:p>
+        </p:txBody>
+      </p:sp>
+      <p:sp>
+        <p:nvSpPr>
+          <p:cNvPr id="8" name="Oval 7"/>
+          <p:cNvSpPr/>
+          <p:nvPr/>
+        </p:nvSpPr>
+        <p:spPr>
+          <a:xfrm>
+            <a:off x="812800" y="3048000"/>
+            <a:ext cx="355600" cy="355600"/>
+          </a:xfrm>
+          <a:prstGeom prst="ellipse">
+            <a:avLst/>
+          </a:prstGeom>
+          <a:solidFill>
+            <a:srgbClr val="006FCF"/>
+          </a:solidFill>
+          <a:ln>
+            <a:noFill/>
+          </a:ln>
+          <a:effectLst/>
+        </p:spPr>
+        <p:style>
+          <a:lnRef idx="1">
+            <a:schemeClr val="accent1"/>
+          </a:lnRef>
+          <a:fillRef idx="3">
+            <a:schemeClr val="accent1"/>
+          </a:fillRef>
+          <a:effectRef idx="2">
+            <a:schemeClr val="accent1"/>
+          </a:effectRef>
+          <a:fontRef idx="minor">
+            <a:schemeClr val="lt1"/>
+          </a:fontRef>
+        </p:style>
+        <p:txBody>
+          <a:bodyPr rtlCol="0" anchor="ctr" wrap="square" lIns="0" rIns="0" tIns="0" bIns="0"/>
+          <a:lstStyle/>
+          <a:p>
+            <a:pPr algn="ctr">
+              <a:lnSpc>
+                <a:spcPct val="115000"/>
+              </a:lnSpc>
+              <a:spcAft>
+                <a:spcPts val="0"/>
+              </a:spcAft>
+            </a:pPr>
+            <a:r>
+              <a:rPr sz="2400" b="1">
+                <a:solidFill>
+                  <a:srgbClr val="F6F8FB"/>
+                </a:solidFill>
+                <a:latin typeface="Arial"/>
+              </a:rPr>
+              <a:t>3</a:t>
+            </a:r>
+          </a:p>
+        </p:txBody>
+      </p:sp>
+      <p:sp>
+        <p:nvSpPr>
+          <p:cNvPr id="9" name="TextBox 8"/>
+          <p:cNvSpPr txBox="1"/>
+          <p:nvPr/>
+        </p:nvSpPr>
+        <p:spPr>
+          <a:xfrm>
+            <a:off x="1295400" y="3035300"/>
+            <a:ext cx="4826000" cy="698500"/>
+          </a:xfrm>
+          <a:prstGeom prst="rect">
+            <a:avLst/>
+          </a:prstGeom>
+          <a:noFill/>
+        </p:spPr>
+        <p:txBody>
+          <a:bodyPr wrap="square" lIns="0" rIns="0" tIns="0" bIns="0" anchor="t">
+            <a:spAutoFit/>
+          </a:bodyPr>
+          <a:lstStyle/>
+          <a:p>
+            <a:pPr algn="l">
+              <a:lnSpc>
+                <a:spcPct val="115000"/>
+              </a:lnSpc>
+              <a:spcAft>
+                <a:spcPts val="0"/>
+              </a:spcAft>
+            </a:pPr>
+            <a:r>
+              <a:rPr sz="1700" b="0">
+                <a:solidFill>
+                  <a:srgbClr val="333B47"/>
+                </a:solidFill>
+                <a:latin typeface="Arial"/>
+              </a:rPr>
+              <a:t>If gain falls as confidence rises, those are the </a:t>
+            </a:r>
+            <a:r>
+              <a:rPr sz="1700" b="1">
+                <a:solidFill>
+                  <a:srgbClr val="333B47"/>
+                </a:solidFill>
+                <a:latin typeface="Arial"/>
+              </a:rPr>
+              <a:t>most confident</a:t>
+            </a:r>
+            <a:r>
+              <a:rPr sz="1700" b="0">
+                <a:solidFill>
+                  <a:srgbClr val="333B47"/>
+                </a:solidFill>
+                <a:latin typeface="Arial"/>
+              </a:rPr>
+              <a:t> tasks.</a:t>
+            </a:r>
+          </a:p>
+        </p:txBody>
+      </p:sp>
+      <p:sp>
+        <p:nvSpPr>
+          <p:cNvPr id="10" name="TextBox 9"/>
+          <p:cNvSpPr txBox="1"/>
+          <p:nvPr/>
+        </p:nvSpPr>
+        <p:spPr>
+          <a:xfrm>
+            <a:off x="812800" y="3810000"/>
+            <a:ext cx="5207000" cy="215900"/>
+          </a:xfrm>
+          <a:prstGeom prst="rect">
+            <a:avLst/>
+          </a:prstGeom>
+          <a:noFill/>
+        </p:spPr>
+        <p:txBody>
+          <a:bodyPr wrap="square" lIns="0" rIns="0" tIns="0" bIns="0" anchor="t">
+            <a:spAutoFit/>
+          </a:bodyPr>
+          <a:lstStyle/>
+          <a:p>
+            <a:pPr algn="l">
+              <a:lnSpc>
+                <a:spcPct val="115000"/>
+              </a:lnSpc>
+              <a:spcAft>
+                <a:spcPts val="0"/>
+              </a:spcAft>
+            </a:pPr>
+            <a:r>
+              <a:rPr sz="1800" b="1">
+                <a:solidFill>
+                  <a:srgbClr val="00175A"/>
+                </a:solidFill>
+                <a:latin typeface="Arial"/>
+              </a:rPr>
+              <a:t>So the best rule:</a:t>
+            </a:r>
+          </a:p>
+        </p:txBody>
+      </p:sp>
+      <p:sp>
+        <p:nvSpPr>
+          <p:cNvPr id="11" name="Rectangle 10"/>
+          <p:cNvSpPr/>
+          <p:nvPr/>
+        </p:nvSpPr>
+        <p:spPr>
+          <a:xfrm>
+            <a:off x="812800" y="4127500"/>
+            <a:ext cx="2984500" cy="571500"/>
+          </a:xfrm>
+          <a:prstGeom prst="rect">
+            <a:avLst/>
+          </a:prstGeom>
+          <a:solidFill>
+            <a:srgbClr val="DDEDFB"/>
+          </a:solidFill>
+          <a:ln w="25400">
+            <a:solidFill>
+              <a:srgbClr val="006FCF"/>
+            </a:solidFill>
+          </a:ln>
+          <a:effectLst/>
+        </p:spPr>
+        <p:style>
+          <a:lnRef idx="1">
+            <a:schemeClr val="accent1"/>
+          </a:lnRef>
+          <a:fillRef idx="3">
+            <a:schemeClr val="accent1"/>
+          </a:fillRef>
+          <a:effectRef idx="2">
+            <a:schemeClr val="accent1"/>
+          </a:effectRef>
+          <a:fontRef idx="minor">
+            <a:schemeClr val="lt1"/>
+          </a:fontRef>
+        </p:style>
+        <p:txBody>
+          <a:bodyPr rtlCol="0" anchor="ctr" wrap="square" lIns="38100" rIns="38100" tIns="38100" bIns="38100"/>
+          <a:lstStyle/>
+          <a:p>
+            <a:pPr algn="ctr">
+              <a:lnSpc>
+                <a:spcPct val="115000"/>
+              </a:lnSpc>
+              <a:spcAft>
+                <a:spcPts val="0"/>
+              </a:spcAft>
+            </a:pPr>
+            <a:r>
+              <a:rPr sz="1800" b="1">
+                <a:solidFill>
+                  <a:srgbClr val="00175A"/>
+                </a:solidFill>
+                <a:latin typeface="Arial"/>
+              </a:rPr>
+              <a:t>below t: call the team</a:t>
+            </a:r>
+          </a:p>
+        </p:txBody>
+      </p:sp>
+      <p:sp>
+        <p:nvSpPr>
+          <p:cNvPr id="12" name="Rectangle 11"/>
+          <p:cNvSpPr/>
+          <p:nvPr/>
+        </p:nvSpPr>
+        <p:spPr>
+          <a:xfrm>
+            <a:off x="3797300" y="4127500"/>
+            <a:ext cx="2222500" cy="571500"/>
+          </a:xfrm>
+          <a:prstGeom prst="rect">
+            <a:avLst/>
+          </a:prstGeom>
+          <a:solidFill>
+            <a:srgbClr val="E3ECE2"/>
+          </a:solidFill>
+          <a:ln w="25400">
+            <a:solidFill>
+              <a:srgbClr val="2F6B34"/>
+            </a:solidFill>
+          </a:ln>
+          <a:effectLst/>
+        </p:spPr>
+        <p:style>
+          <a:lnRef idx="1">
+            <a:schemeClr val="accent1"/>
+          </a:lnRef>
+          <a:fillRef idx="3">
+            <a:schemeClr val="accent1"/>
+          </a:fillRef>
+          <a:effectRef idx="2">
+            <a:schemeClr val="accent1"/>
+          </a:effectRef>
+          <a:fontRef idx="minor">
+            <a:schemeClr val="lt1"/>
+          </a:fontRef>
+        </p:style>
+        <p:txBody>
+          <a:bodyPr rtlCol="0" anchor="ctr" wrap="square" lIns="38100" rIns="38100" tIns="38100" bIns="38100"/>
+          <a:lstStyle/>
+          <a:p>
+            <a:pPr algn="ctr">
+              <a:lnSpc>
+                <a:spcPct val="115000"/>
+              </a:lnSpc>
+              <a:spcAft>
+                <a:spcPts val="0"/>
+              </a:spcAft>
+            </a:pPr>
+            <a:r>
+              <a:rPr sz="1800" b="1">
+                <a:solidFill>
+                  <a:srgbClr val="2F6B34"/>
+                </a:solidFill>
+                <a:latin typeface="Arial"/>
+              </a:rPr>
+              <a:t>above t: stop</a:t>
+            </a:r>
+          </a:p>
+        </p:txBody>
+      </p:sp>
+      <p:sp>
+        <p:nvSpPr>
+          <p:cNvPr id="13" name="Rectangle 12"/>
+          <p:cNvSpPr/>
+          <p:nvPr/>
+        </p:nvSpPr>
+        <p:spPr>
+          <a:xfrm>
+            <a:off x="3759200" y="4000500"/>
+            <a:ext cx="76200" cy="825500"/>
+          </a:xfrm>
+          <a:prstGeom prst="rect">
+            <a:avLst/>
+          </a:prstGeom>
+          <a:solidFill>
+            <a:srgbClr val="B03A2E"/>
+          </a:solidFill>
+          <a:ln>
+            <a:noFill/>
+          </a:ln>
+          <a:effectLst/>
+        </p:spPr>
+        <p:style>
+          <a:lnRef idx="1">
+            <a:schemeClr val="accent1"/>
+          </a:lnRef>
+          <a:fillRef idx="3">
+            <a:schemeClr val="accent1"/>
+          </a:fillRef>
+          <a:effectRef idx="2">
+            <a:schemeClr val="accent1"/>
+          </a:effectRef>
+          <a:fontRef idx="minor">
+            <a:schemeClr val="lt1"/>
+          </a:fontRef>
+        </p:style>
+        <p:txBody>
+          <a:bodyPr rtlCol="0" anchor="ctr"/>
+          <a:lstStyle/>
+          <a:p>
+            <a:pPr algn="ctr"/>
+          </a:p>
+        </p:txBody>
+      </p:sp>
+      <p:sp>
+        <p:nvSpPr>
+          <p:cNvPr id="14" name="TextBox 13"/>
+          <p:cNvSpPr txBox="1"/>
+          <p:nvPr/>
+        </p:nvSpPr>
+        <p:spPr>
+          <a:xfrm>
+            <a:off x="3556000" y="4838700"/>
+            <a:ext cx="508000" cy="215900"/>
+          </a:xfrm>
+          <a:prstGeom prst="rect">
+            <a:avLst/>
+          </a:prstGeom>
+          <a:noFill/>
+        </p:spPr>
+        <p:txBody>
+          <a:bodyPr wrap="square" lIns="0" rIns="0" tIns="0" bIns="0" anchor="t">
+            <a:spAutoFit/>
+          </a:bodyPr>
+          <a:lstStyle/>
+          <a:p>
+            <a:pPr algn="ctr">
+              <a:lnSpc>
+                <a:spcPct val="115000"/>
+              </a:lnSpc>
+              <a:spcAft>
+                <a:spcPts val="0"/>
+              </a:spcAft>
+            </a:pPr>
+            <a:r>
+              <a:rPr sz="2000" b="1">
+                <a:solidFill>
+                  <a:srgbClr val="B03A2E"/>
+                </a:solidFill>
+                <a:latin typeface="Arial"/>
+              </a:rPr>
+              <a:t>t</a:t>
+            </a:r>
+          </a:p>
+        </p:txBody>
+      </p:sp>
+      <p:sp>
+        <p:nvSpPr>
+          <p:cNvPr id="15" name="TextBox 14"/>
+          <p:cNvSpPr txBox="1"/>
+          <p:nvPr/>
+        </p:nvSpPr>
+        <p:spPr>
+          <a:xfrm>
+            <a:off x="812800" y="4838700"/>
+            <a:ext cx="2540000" cy="215900"/>
+          </a:xfrm>
+          <a:prstGeom prst="rect">
+            <a:avLst/>
+          </a:prstGeom>
+          <a:noFill/>
+        </p:spPr>
+        <p:txBody>
+          <a:bodyPr wrap="square" lIns="0" rIns="0" tIns="0" bIns="0" anchor="t">
+            <a:spAutoFit/>
+          </a:bodyPr>
+          <a:lstStyle/>
+          <a:p>
+            <a:pPr algn="l">
+              <a:lnSpc>
+                <a:spcPct val="115000"/>
+              </a:lnSpc>
+              <a:spcAft>
+                <a:spcPts val="0"/>
+              </a:spcAft>
+            </a:pPr>
+            <a:r>
+              <a:rPr sz="1500" b="0">
+                <a:solidFill>
+                  <a:srgbClr val="6B7480"/>
+                </a:solidFill>
+                <a:latin typeface="Arial"/>
+              </a:rPr>
+              <a:t>low confidence</a:t>
+            </a:r>
+          </a:p>
+        </p:txBody>
+      </p:sp>
+      <p:sp>
+        <p:nvSpPr>
+          <p:cNvPr id="16" name="TextBox 15"/>
+          <p:cNvSpPr txBox="1"/>
+          <p:nvPr/>
+        </p:nvSpPr>
+        <p:spPr>
+          <a:xfrm>
+            <a:off x="4749800" y="4838700"/>
+            <a:ext cx="1270000" cy="215900"/>
+          </a:xfrm>
+          <a:prstGeom prst="rect">
+            <a:avLst/>
+          </a:prstGeom>
+          <a:noFill/>
+        </p:spPr>
+        <p:txBody>
+          <a:bodyPr wrap="square" lIns="0" rIns="0" tIns="0" bIns="0" anchor="t">
+            <a:spAutoFit/>
+          </a:bodyPr>
+          <a:lstStyle/>
+          <a:p>
+            <a:pPr algn="r">
+              <a:lnSpc>
+                <a:spcPct val="115000"/>
+              </a:lnSpc>
+              <a:spcAft>
+                <a:spcPts val="0"/>
+              </a:spcAft>
+            </a:pPr>
+            <a:r>
+              <a:rPr sz="1500" b="0">
+                <a:solidFill>
+                  <a:srgbClr val="6B7480"/>
+                </a:solidFill>
+                <a:latin typeface="Arial"/>
+              </a:rPr>
+              <a:t>high</a:t>
+            </a:r>
+          </a:p>
+        </p:txBody>
+      </p:sp>
+      <p:sp>
+        <p:nvSpPr>
+          <p:cNvPr id="17" name="TextBox 16"/>
+          <p:cNvSpPr txBox="1"/>
+          <p:nvPr/>
+        </p:nvSpPr>
+        <p:spPr>
+          <a:xfrm>
+            <a:off x="6350000" y="1524000"/>
+            <a:ext cx="5029200" cy="254000"/>
+          </a:xfrm>
+          <a:prstGeom prst="rect">
+            <a:avLst/>
+          </a:prstGeom>
+          <a:noFill/>
+        </p:spPr>
+        <p:txBody>
+          <a:bodyPr wrap="square" lIns="0" rIns="0" tIns="0" bIns="0" anchor="t">
+            <a:spAutoFit/>
+          </a:bodyPr>
+          <a:lstStyle/>
+          <a:p>
+            <a:pPr algn="l">
+              <a:lnSpc>
+                <a:spcPct val="115000"/>
+              </a:lnSpc>
+              <a:spcAft>
+                <a:spcPts val="0"/>
+              </a:spcAft>
+            </a:pPr>
+            <a:r>
+              <a:rPr sz="1800" b="1">
+                <a:solidFill>
+                  <a:srgbClr val="00175A"/>
+                </a:solidFill>
+                <a:latin typeface="Arial"/>
+              </a:rPr>
+              <a:t>Does gain fall with confidence?  Mostly</a:t>
+            </a:r>
+          </a:p>
+        </p:txBody>
+      </p:sp>
+      <p:pic>
+        <p:nvPicPr>
+          <p:cNvPr id="18" name="Picture 17" descr="c_monotone.png"/>
+          <p:cNvPicPr>
+            <a:picLocks noChangeAspect="1"/>
+          </p:cNvPicPr>
+          <p:nvPr/>
+        </p:nvPicPr>
+        <p:blipFill>
+          <a:blip r:embed="rId3"/>
+          <a:stretch>
+            <a:fillRect/>
+          </a:stretch>
+        </p:blipFill>
+        <p:spPr>
+          <a:xfrm>
+            <a:off x="6607907" y="1841500"/>
+            <a:ext cx="4564184" cy="3048000"/>
+          </a:xfrm>
+          <a:prstGeom prst="rect">
+            <a:avLst/>
+          </a:prstGeom>
+        </p:spPr>
+      </p:pic>
+      <p:sp>
+        <p:nvSpPr>
+          <p:cNvPr id="19" name="TextBox 18"/>
+          <p:cNvSpPr txBox="1"/>
+          <p:nvPr/>
+        </p:nvSpPr>
+        <p:spPr>
+          <a:xfrm>
+            <a:off x="6350000" y="4953000"/>
+            <a:ext cx="5029200" cy="444500"/>
+          </a:xfrm>
+          <a:prstGeom prst="rect">
+            <a:avLst/>
+          </a:prstGeom>
+          <a:noFill/>
+        </p:spPr>
+        <p:txBody>
+          <a:bodyPr wrap="square" lIns="0" rIns="0" tIns="0" bIns="0" anchor="t">
+            <a:spAutoFit/>
+          </a:bodyPr>
+          <a:lstStyle/>
+          <a:p>
+            <a:pPr algn="l">
+              <a:lnSpc>
+                <a:spcPct val="115000"/>
+              </a:lnSpc>
+              <a:spcAft>
+                <a:spcPts val="0"/>
+              </a:spcAft>
+            </a:pPr>
+            <a:r>
+              <a:rPr sz="1400" b="0">
+                <a:solidFill>
+                  <a:srgbClr val="6B7480"/>
+                </a:solidFill>
+                <a:latin typeface="Arial"/>
+              </a:rPr>
+              <a:t>9 settings where confidence ranks right. Falls on 8. Gemma’s 3 backwards ones excluded.</a:t>
+            </a:r>
+          </a:p>
+        </p:txBody>
+      </p:sp>
+      <p:sp>
+        <p:nvSpPr>
+          <p:cNvPr id="20" name="Rounded Rectangle 19"/>
+          <p:cNvSpPr/>
+          <p:nvPr/>
+        </p:nvSpPr>
+        <p:spPr>
+          <a:xfrm>
+            <a:off x="812800" y="5588000"/>
+            <a:ext cx="10566400" cy="571500"/>
+          </a:xfrm>
+          <a:prstGeom prst="roundRect">
+            <a:avLst>
+              <a:gd name="adj" fmla="val 10000"/>
+            </a:avLst>
+          </a:prstGeom>
+          <a:solidFill>
+            <a:srgbClr val="00175A"/>
+          </a:solidFill>
+          <a:ln>
+            <a:noFill/>
+          </a:ln>
+          <a:effectLst/>
+        </p:spPr>
+        <p:style>
+          <a:lnRef idx="1">
+            <a:schemeClr val="accent1"/>
+          </a:lnRef>
+          <a:fillRef idx="3">
+            <a:schemeClr val="accent1"/>
+          </a:fillRef>
+          <a:effectRef idx="2">
+            <a:schemeClr val="accent1"/>
+          </a:effectRef>
+          <a:fontRef idx="minor">
+            <a:schemeClr val="lt1"/>
+          </a:fontRef>
+        </p:style>
+        <p:txBody>
+          <a:bodyPr rtlCol="0" anchor="ctr" wrap="square" lIns="63500" rIns="63500" tIns="63500" bIns="63500"/>
+          <a:lstStyle/>
+          <a:p>
+            <a:pPr algn="ctr">
+              <a:lnSpc>
+                <a:spcPct val="115000"/>
+              </a:lnSpc>
+              <a:spcAft>
+                <a:spcPts val="0"/>
+              </a:spcAft>
+            </a:pPr>
+            <a:r>
+              <a:rPr sz="2000" b="0">
+                <a:solidFill>
+                  <a:srgbClr val="F6F8FB"/>
+                </a:solidFill>
+                <a:latin typeface="Arial"/>
+              </a:rPr>
+              <a:t>Theory gives the </a:t>
+            </a:r>
+            <a:r>
+              <a:rPr sz="2000" b="1">
+                <a:solidFill>
+                  <a:srgbClr val="F6F8FB"/>
+                </a:solidFill>
+                <a:latin typeface="Arial"/>
+              </a:rPr>
+              <a:t>form</a:t>
+            </a:r>
+            <a:r>
+              <a:rPr sz="2000" b="0">
+                <a:solidFill>
+                  <a:srgbClr val="F6F8FB"/>
+                </a:solidFill>
+                <a:latin typeface="Arial"/>
+              </a:rPr>
+              <a:t>: a threshold.   Where to put it: </a:t>
+            </a:r>
+            <a:r>
+              <a:rPr sz="2000" b="1">
+                <a:solidFill>
+                  <a:srgbClr val="66B2F0"/>
+                </a:solidFill>
+                <a:latin typeface="Arial"/>
+              </a:rPr>
+              <a:t>the data must decide.</a:t>
+            </a:r>
+          </a:p>
+        </p:txBody>
+      </p:sp>
+      <p:sp>
+        <p:nvSpPr>
+          <p:cNvPr id="21" name="TextBox 20"/>
+          <p:cNvSpPr txBox="1"/>
+          <p:nvPr/>
+        </p:nvSpPr>
+        <p:spPr>
+          <a:xfrm>
+            <a:off x="812800" y="6413500"/>
+            <a:ext cx="10566400" cy="215900"/>
+          </a:xfrm>
+          <a:prstGeom prst="rect">
+            <a:avLst/>
+          </a:prstGeom>
+          <a:noFill/>
+        </p:spPr>
+        <p:txBody>
+          <a:bodyPr wrap="square" lIns="0" rIns="0" tIns="0" bIns="0" anchor="t">
+            <a:spAutoFit/>
+          </a:bodyPr>
+          <a:lstStyle/>
+          <a:p>
+            <a:pPr algn="r">
+              <a:lnSpc>
+                <a:spcPct val="115000"/>
+              </a:lnSpc>
+              <a:spcAft>
+                <a:spcPts val="0"/>
+              </a:spcAft>
+            </a:pPr>
+            <a:r>
+              <a:rPr sz="1200" b="0">
+                <a:solidFill>
+                  <a:srgbClr val="6B7480"/>
+                </a:solidFill>
+                <a:latin typeface="Arial"/>
+              </a:rPr>
+              <a:t>8</a:t>
             </a:r>
           </a:p>
         </p:txBody>
@@ -24225,7 +25341,7 @@
                 </a:solidFill>
                 <a:latin typeface="Arial"/>
               </a:rPr>
-              <a:t>21</a:t>
+              <a:t>22</a:t>
             </a:r>
           </a:p>
         </p:txBody>
@@ -25660,7 +26776,7 @@
                 </a:solidFill>
                 <a:latin typeface="Arial"/>
               </a:rPr>
-              <a:t>22</a:t>
+              <a:t>23</a:t>
             </a:r>
           </a:p>
         </p:txBody>

--- a/slides/CLIMB_talk.pptx
+++ b/slides/CLIMB_talk.pptx
@@ -23311,74 +23311,14 @@
       </p:sp>
       <p:sp>
         <p:nvSpPr>
-          <p:cNvPr id="4" name="Oval 3"/>
-          <p:cNvSpPr/>
-          <p:nvPr/>
-        </p:nvSpPr>
-        <p:spPr>
-          <a:xfrm>
-            <a:off x="812800" y="1587500"/>
-            <a:ext cx="355600" cy="355600"/>
-          </a:xfrm>
-          <a:prstGeom prst="ellipse">
-            <a:avLst/>
-          </a:prstGeom>
-          <a:solidFill>
-            <a:srgbClr val="006FCF"/>
-          </a:solidFill>
-          <a:ln>
-            <a:noFill/>
-          </a:ln>
-          <a:effectLst/>
-        </p:spPr>
-        <p:style>
-          <a:lnRef idx="1">
-            <a:schemeClr val="accent1"/>
-          </a:lnRef>
-          <a:fillRef idx="3">
-            <a:schemeClr val="accent1"/>
-          </a:fillRef>
-          <a:effectRef idx="2">
-            <a:schemeClr val="accent1"/>
-          </a:effectRef>
-          <a:fontRef idx="minor">
-            <a:schemeClr val="lt1"/>
-          </a:fontRef>
-        </p:style>
-        <p:txBody>
-          <a:bodyPr rtlCol="0" anchor="ctr" wrap="square" lIns="0" rIns="0" tIns="0" bIns="0"/>
-          <a:lstStyle/>
-          <a:p>
-            <a:pPr algn="ctr">
-              <a:lnSpc>
-                <a:spcPct val="115000"/>
-              </a:lnSpc>
-              <a:spcAft>
-                <a:spcPts val="0"/>
-              </a:spcAft>
-            </a:pPr>
-            <a:r>
-              <a:rPr sz="2400" b="1">
-                <a:solidFill>
-                  <a:srgbClr val="F6F8FB"/>
-                </a:solidFill>
-                <a:latin typeface="Arial"/>
-              </a:rPr>
-              <a:t>1</a:t>
-            </a:r>
-          </a:p>
-        </p:txBody>
-      </p:sp>
-      <p:sp>
-        <p:nvSpPr>
-          <p:cNvPr id="5" name="TextBox 4"/>
+          <p:cNvPr id="4" name="TextBox 3"/>
           <p:cNvSpPr txBox="1"/>
           <p:nvPr/>
         </p:nvSpPr>
         <p:spPr>
           <a:xfrm>
-            <a:off x="1295400" y="1574800"/>
-            <a:ext cx="4826000" cy="698500"/>
+            <a:off x="812800" y="1714500"/>
+            <a:ext cx="5207000" cy="635000"/>
           </a:xfrm>
           <a:prstGeom prst="rect">
             <a:avLst/>
@@ -23400,27 +23340,27 @@
               </a:spcAft>
             </a:pPr>
             <a:r>
-              <a:rPr sz="1700" b="0">
-                <a:solidFill>
-                  <a:srgbClr val="333B47"/>
-                </a:solidFill>
-                <a:latin typeface="Arial"/>
-              </a:rPr>
-              <a:t>Stopping a task early saves its team tokens, but risks the accuracy the team would add: its </a:t>
-            </a:r>
-            <a:r>
-              <a:rPr sz="1700" b="1">
-                <a:solidFill>
-                  <a:srgbClr val="333B47"/>
-                </a:solidFill>
-                <a:latin typeface="Arial"/>
-              </a:rPr>
-              <a:t>gain</a:t>
-            </a:r>
-            <a:r>
-              <a:rPr sz="1700" b="0">
-                <a:solidFill>
-                  <a:srgbClr val="333B47"/>
+              <a:rPr sz="2200" b="0">
+                <a:solidFill>
+                  <a:srgbClr val="00175A"/>
+                </a:solidFill>
+                <a:latin typeface="Arial"/>
+              </a:rPr>
+              <a:t>Stop the tasks where the team adds </a:t>
+            </a:r>
+            <a:r>
+              <a:rPr sz="2200" b="1">
+                <a:solidFill>
+                  <a:srgbClr val="00175A"/>
+                </a:solidFill>
+                <a:latin typeface="Arial"/>
+              </a:rPr>
+              <a:t>least</a:t>
+            </a:r>
+            <a:r>
+              <a:rPr sz="2200" b="0">
+                <a:solidFill>
+                  <a:srgbClr val="00175A"/>
                 </a:solidFill>
                 <a:latin typeface="Arial"/>
               </a:rPr>
@@ -23431,74 +23371,14 @@
       </p:sp>
       <p:sp>
         <p:nvSpPr>
-          <p:cNvPr id="6" name="Oval 5"/>
-          <p:cNvSpPr/>
-          <p:nvPr/>
-        </p:nvSpPr>
-        <p:spPr>
-          <a:xfrm>
-            <a:off x="812800" y="2317750"/>
-            <a:ext cx="355600" cy="355600"/>
-          </a:xfrm>
-          <a:prstGeom prst="ellipse">
-            <a:avLst/>
-          </a:prstGeom>
-          <a:solidFill>
-            <a:srgbClr val="006FCF"/>
-          </a:solidFill>
-          <a:ln>
-            <a:noFill/>
-          </a:ln>
-          <a:effectLst/>
-        </p:spPr>
-        <p:style>
-          <a:lnRef idx="1">
-            <a:schemeClr val="accent1"/>
-          </a:lnRef>
-          <a:fillRef idx="3">
-            <a:schemeClr val="accent1"/>
-          </a:fillRef>
-          <a:effectRef idx="2">
-            <a:schemeClr val="accent1"/>
-          </a:effectRef>
-          <a:fontRef idx="minor">
-            <a:schemeClr val="lt1"/>
-          </a:fontRef>
-        </p:style>
-        <p:txBody>
-          <a:bodyPr rtlCol="0" anchor="ctr" wrap="square" lIns="0" rIns="0" tIns="0" bIns="0"/>
-          <a:lstStyle/>
-          <a:p>
-            <a:pPr algn="ctr">
-              <a:lnSpc>
-                <a:spcPct val="115000"/>
-              </a:lnSpc>
-              <a:spcAft>
-                <a:spcPts val="0"/>
-              </a:spcAft>
-            </a:pPr>
-            <a:r>
-              <a:rPr sz="2400" b="1">
-                <a:solidFill>
-                  <a:srgbClr val="F6F8FB"/>
-                </a:solidFill>
-                <a:latin typeface="Arial"/>
-              </a:rPr>
-              <a:t>2</a:t>
-            </a:r>
-          </a:p>
-        </p:txBody>
-      </p:sp>
-      <p:sp>
-        <p:nvSpPr>
-          <p:cNvPr id="7" name="TextBox 6"/>
+          <p:cNvPr id="5" name="TextBox 4"/>
           <p:cNvSpPr txBox="1"/>
           <p:nvPr/>
         </p:nvSpPr>
         <p:spPr>
           <a:xfrm>
-            <a:off x="1295400" y="2305050"/>
-            <a:ext cx="4826000" cy="698500"/>
+            <a:off x="812800" y="2540000"/>
+            <a:ext cx="5207000" cy="635000"/>
           </a:xfrm>
           <a:prstGeom prst="rect">
             <a:avLst/>
@@ -23520,105 +23400,45 @@
               </a:spcAft>
             </a:pPr>
             <a:r>
-              <a:rPr sz="1700" b="0">
-                <a:solidFill>
-                  <a:srgbClr val="333B47"/>
-                </a:solidFill>
-                <a:latin typeface="Arial"/>
-              </a:rPr>
-              <a:t>With a risk budget ε, stop first the tasks with the </a:t>
-            </a:r>
-            <a:r>
-              <a:rPr sz="1700" b="1">
-                <a:solidFill>
-                  <a:srgbClr val="333B47"/>
-                </a:solidFill>
-                <a:latin typeface="Arial"/>
-              </a:rPr>
-              <a:t>least gain per token</a:t>
-            </a:r>
-            <a:r>
-              <a:rPr sz="1700" b="0">
-                <a:solidFill>
-                  <a:srgbClr val="333B47"/>
-                </a:solidFill>
-                <a:latin typeface="Arial"/>
-              </a:rPr>
-              <a:t>, like packing a knapsack.</a:t>
-            </a:r>
-          </a:p>
-        </p:txBody>
-      </p:sp>
-      <p:sp>
-        <p:nvSpPr>
-          <p:cNvPr id="8" name="Oval 7"/>
-          <p:cNvSpPr/>
-          <p:nvPr/>
-        </p:nvSpPr>
-        <p:spPr>
-          <a:xfrm>
-            <a:off x="812800" y="3048000"/>
-            <a:ext cx="355600" cy="355600"/>
-          </a:xfrm>
-          <a:prstGeom prst="ellipse">
-            <a:avLst/>
-          </a:prstGeom>
-          <a:solidFill>
-            <a:srgbClr val="006FCF"/>
-          </a:solidFill>
-          <a:ln>
-            <a:noFill/>
-          </a:ln>
-          <a:effectLst/>
-        </p:spPr>
-        <p:style>
-          <a:lnRef idx="1">
-            <a:schemeClr val="accent1"/>
-          </a:lnRef>
-          <a:fillRef idx="3">
-            <a:schemeClr val="accent1"/>
-          </a:fillRef>
-          <a:effectRef idx="2">
-            <a:schemeClr val="accent1"/>
-          </a:effectRef>
-          <a:fontRef idx="minor">
-            <a:schemeClr val="lt1"/>
-          </a:fontRef>
-        </p:style>
-        <p:txBody>
-          <a:bodyPr rtlCol="0" anchor="ctr" wrap="square" lIns="0" rIns="0" tIns="0" bIns="0"/>
-          <a:lstStyle/>
-          <a:p>
-            <a:pPr algn="ctr">
-              <a:lnSpc>
-                <a:spcPct val="115000"/>
-              </a:lnSpc>
-              <a:spcAft>
-                <a:spcPts val="0"/>
-              </a:spcAft>
-            </a:pPr>
-            <a:r>
-              <a:rPr sz="2400" b="1">
-                <a:solidFill>
-                  <a:srgbClr val="F6F8FB"/>
-                </a:solidFill>
-                <a:latin typeface="Arial"/>
-              </a:rPr>
-              <a:t>3</a:t>
-            </a:r>
-          </a:p>
-        </p:txBody>
-      </p:sp>
-      <p:sp>
-        <p:nvSpPr>
-          <p:cNvPr id="9" name="TextBox 8"/>
+              <a:rPr sz="2200" b="0">
+                <a:solidFill>
+                  <a:srgbClr val="00175A"/>
+                </a:solidFill>
+                <a:latin typeface="Arial"/>
+              </a:rPr>
+              <a:t>The team adds least where confidence is </a:t>
+            </a:r>
+            <a:r>
+              <a:rPr sz="2200" b="1">
+                <a:solidFill>
+                  <a:srgbClr val="00175A"/>
+                </a:solidFill>
+                <a:latin typeface="Arial"/>
+              </a:rPr>
+              <a:t>high</a:t>
+            </a:r>
+            <a:r>
+              <a:rPr sz="2200" b="0">
+                <a:solidFill>
+                  <a:srgbClr val="00175A"/>
+                </a:solidFill>
+                <a:latin typeface="Arial"/>
+              </a:rPr>
+              <a:t>.</a:t>
+            </a:r>
+          </a:p>
+        </p:txBody>
+      </p:sp>
+      <p:sp>
+        <p:nvSpPr>
+          <p:cNvPr id="6" name="TextBox 5"/>
           <p:cNvSpPr txBox="1"/>
           <p:nvPr/>
         </p:nvSpPr>
         <p:spPr>
           <a:xfrm>
-            <a:off x="1295400" y="3035300"/>
-            <a:ext cx="4826000" cy="698500"/>
+            <a:off x="812800" y="3556000"/>
+            <a:ext cx="5207000" cy="254000"/>
           </a:xfrm>
           <a:prstGeom prst="rect">
             <a:avLst/>
@@ -23640,87 +23460,27 @@
               </a:spcAft>
             </a:pPr>
             <a:r>
-              <a:rPr sz="1700" b="0">
-                <a:solidFill>
-                  <a:srgbClr val="333B47"/>
-                </a:solidFill>
-                <a:latin typeface="Arial"/>
-              </a:rPr>
-              <a:t>If gain falls as confidence rises, those are the </a:t>
-            </a:r>
-            <a:r>
-              <a:rPr sz="1700" b="1">
-                <a:solidFill>
-                  <a:srgbClr val="333B47"/>
-                </a:solidFill>
-                <a:latin typeface="Arial"/>
-              </a:rPr>
-              <a:t>most confident</a:t>
-            </a:r>
-            <a:r>
-              <a:rPr sz="1700" b="0">
-                <a:solidFill>
-                  <a:srgbClr val="333B47"/>
-                </a:solidFill>
-                <a:latin typeface="Arial"/>
-              </a:rPr>
-              <a:t> tasks.</a:t>
-            </a:r>
-          </a:p>
-        </p:txBody>
-      </p:sp>
-      <p:sp>
-        <p:nvSpPr>
-          <p:cNvPr id="10" name="TextBox 9"/>
-          <p:cNvSpPr txBox="1"/>
-          <p:nvPr/>
-        </p:nvSpPr>
-        <p:spPr>
-          <a:xfrm>
-            <a:off x="812800" y="3810000"/>
-            <a:ext cx="5207000" cy="215900"/>
-          </a:xfrm>
-          <a:prstGeom prst="rect">
-            <a:avLst/>
-          </a:prstGeom>
-          <a:noFill/>
-        </p:spPr>
-        <p:txBody>
-          <a:bodyPr wrap="square" lIns="0" rIns="0" tIns="0" bIns="0" anchor="t">
-            <a:spAutoFit/>
-          </a:bodyPr>
-          <a:lstStyle/>
-          <a:p>
-            <a:pPr algn="l">
-              <a:lnSpc>
-                <a:spcPct val="115000"/>
-              </a:lnSpc>
-              <a:spcAft>
-                <a:spcPts val="0"/>
-              </a:spcAft>
-            </a:pPr>
-            <a:r>
-              <a:rPr sz="1800" b="1">
-                <a:solidFill>
-                  <a:srgbClr val="00175A"/>
-                </a:solidFill>
-                <a:latin typeface="Arial"/>
-              </a:rPr>
-              <a:t>So the best rule:</a:t>
-            </a:r>
-          </a:p>
-        </p:txBody>
-      </p:sp>
-      <p:sp>
-        <p:nvSpPr>
-          <p:cNvPr id="11" name="Rectangle 10"/>
+              <a:rPr sz="2000" b="1">
+                <a:solidFill>
+                  <a:srgbClr val="006FCF"/>
+                </a:solidFill>
+                <a:latin typeface="Arial"/>
+              </a:rPr>
+              <a:t>So the best rule is a threshold:</a:t>
+            </a:r>
+          </a:p>
+        </p:txBody>
+      </p:sp>
+      <p:sp>
+        <p:nvSpPr>
+          <p:cNvPr id="7" name="Rectangle 6"/>
           <p:cNvSpPr/>
           <p:nvPr/>
         </p:nvSpPr>
         <p:spPr>
           <a:xfrm>
-            <a:off x="812800" y="4127500"/>
-            <a:ext cx="2984500" cy="571500"/>
+            <a:off x="812800" y="3937000"/>
+            <a:ext cx="2984500" cy="635000"/>
           </a:xfrm>
           <a:prstGeom prst="rect">
             <a:avLst/>
@@ -23762,7 +23522,7 @@
               </a:spcAft>
             </a:pPr>
             <a:r>
-              <a:rPr sz="1800" b="1">
+              <a:rPr sz="2000" b="1">
                 <a:solidFill>
                   <a:srgbClr val="00175A"/>
                 </a:solidFill>
@@ -23775,14 +23535,14 @@
       </p:sp>
       <p:sp>
         <p:nvSpPr>
-          <p:cNvPr id="12" name="Rectangle 11"/>
+          <p:cNvPr id="8" name="Rectangle 7"/>
           <p:cNvSpPr/>
           <p:nvPr/>
         </p:nvSpPr>
         <p:spPr>
           <a:xfrm>
-            <a:off x="3797300" y="4127500"/>
-            <a:ext cx="2222500" cy="571500"/>
+            <a:off x="3797300" y="3937000"/>
+            <a:ext cx="2222500" cy="635000"/>
           </a:xfrm>
           <a:prstGeom prst="rect">
             <a:avLst/>
@@ -23824,7 +23584,7 @@
               </a:spcAft>
             </a:pPr>
             <a:r>
-              <a:rPr sz="1800" b="1">
+              <a:rPr sz="2000" b="1">
                 <a:solidFill>
                   <a:srgbClr val="2F6B34"/>
                 </a:solidFill>
@@ -23837,14 +23597,14 @@
       </p:sp>
       <p:sp>
         <p:nvSpPr>
-          <p:cNvPr id="13" name="Rectangle 12"/>
+          <p:cNvPr id="9" name="Rectangle 8"/>
           <p:cNvSpPr/>
           <p:nvPr/>
         </p:nvSpPr>
         <p:spPr>
           <a:xfrm>
-            <a:off x="3759200" y="4000500"/>
-            <a:ext cx="76200" cy="825500"/>
+            <a:off x="3759200" y="3810000"/>
+            <a:ext cx="76200" cy="889000"/>
           </a:xfrm>
           <a:prstGeom prst="rect">
             <a:avLst/>
@@ -23881,13 +23641,13 @@
       </p:sp>
       <p:sp>
         <p:nvSpPr>
-          <p:cNvPr id="14" name="TextBox 13"/>
+          <p:cNvPr id="10" name="TextBox 9"/>
           <p:cNvSpPr txBox="1"/>
           <p:nvPr/>
         </p:nvSpPr>
         <p:spPr>
           <a:xfrm>
-            <a:off x="3556000" y="4838700"/>
+            <a:off x="3556000" y="4730750"/>
             <a:ext cx="508000" cy="215900"/>
           </a:xfrm>
           <a:prstGeom prst="rect">
@@ -23910,7 +23670,7 @@
               </a:spcAft>
             </a:pPr>
             <a:r>
-              <a:rPr sz="2000" b="1">
+              <a:rPr sz="2200" b="1">
                 <a:solidFill>
                   <a:srgbClr val="B03A2E"/>
                 </a:solidFill>
@@ -23923,13 +23683,13 @@
       </p:sp>
       <p:sp>
         <p:nvSpPr>
-          <p:cNvPr id="15" name="TextBox 14"/>
+          <p:cNvPr id="11" name="TextBox 10"/>
           <p:cNvSpPr txBox="1"/>
           <p:nvPr/>
         </p:nvSpPr>
         <p:spPr>
           <a:xfrm>
-            <a:off x="812800" y="4838700"/>
+            <a:off x="812800" y="4730750"/>
             <a:ext cx="2540000" cy="215900"/>
           </a:xfrm>
           <a:prstGeom prst="rect">
@@ -23952,7 +23712,7 @@
               </a:spcAft>
             </a:pPr>
             <a:r>
-              <a:rPr sz="1500" b="0">
+              <a:rPr sz="1600" b="0">
                 <a:solidFill>
                   <a:srgbClr val="6B7480"/>
                 </a:solidFill>
@@ -23965,13 +23725,13 @@
       </p:sp>
       <p:sp>
         <p:nvSpPr>
-          <p:cNvPr id="16" name="TextBox 15"/>
+          <p:cNvPr id="12" name="TextBox 11"/>
           <p:cNvSpPr txBox="1"/>
           <p:nvPr/>
         </p:nvSpPr>
         <p:spPr>
           <a:xfrm>
-            <a:off x="4749800" y="4838700"/>
+            <a:off x="4749800" y="4730750"/>
             <a:ext cx="1270000" cy="215900"/>
           </a:xfrm>
           <a:prstGeom prst="rect">
@@ -23994,7 +23754,7 @@
               </a:spcAft>
             </a:pPr>
             <a:r>
-              <a:rPr sz="1500" b="0">
+              <a:rPr sz="1600" b="0">
                 <a:solidFill>
                   <a:srgbClr val="6B7480"/>
                 </a:solidFill>
@@ -24007,7 +23767,7 @@
       </p:sp>
       <p:sp>
         <p:nvSpPr>
-          <p:cNvPr id="17" name="TextBox 16"/>
+          <p:cNvPr id="13" name="TextBox 12"/>
           <p:cNvSpPr txBox="1"/>
           <p:nvPr/>
         </p:nvSpPr>
@@ -24036,20 +23796,20 @@
               </a:spcAft>
             </a:pPr>
             <a:r>
-              <a:rPr sz="1800" b="1">
+              <a:rPr sz="2000" b="1">
                 <a:solidFill>
                   <a:srgbClr val="00175A"/>
                 </a:solidFill>
                 <a:latin typeface="Arial"/>
               </a:rPr>
-              <a:t>Does gain fall with confidence?  Mostly</a:t>
+              <a:t>Gain from the team, by confidence</a:t>
             </a:r>
           </a:p>
         </p:txBody>
       </p:sp>
       <p:pic>
         <p:nvPicPr>
-          <p:cNvPr id="18" name="Picture 17" descr="c_monotone.png"/>
+          <p:cNvPr id="14" name="Picture 13" descr="c_monotone.png"/>
           <p:cNvPicPr>
             <a:picLocks noChangeAspect="1"/>
           </p:cNvPicPr>
@@ -24063,8 +23823,8 @@
         </p:blipFill>
         <p:spPr>
           <a:xfrm>
-            <a:off x="6607907" y="1841500"/>
-            <a:ext cx="4564184" cy="3048000"/>
+            <a:off x="6354298" y="1968500"/>
+            <a:ext cx="5020603" cy="3352800"/>
           </a:xfrm>
           <a:prstGeom prst="rect">
             <a:avLst/>
@@ -24073,55 +23833,13 @@
       </p:pic>
       <p:sp>
         <p:nvSpPr>
-          <p:cNvPr id="19" name="TextBox 18"/>
-          <p:cNvSpPr txBox="1"/>
-          <p:nvPr/>
-        </p:nvSpPr>
-        <p:spPr>
-          <a:xfrm>
-            <a:off x="6350000" y="4953000"/>
-            <a:ext cx="5029200" cy="444500"/>
-          </a:xfrm>
-          <a:prstGeom prst="rect">
-            <a:avLst/>
-          </a:prstGeom>
-          <a:noFill/>
-        </p:spPr>
-        <p:txBody>
-          <a:bodyPr wrap="square" lIns="0" rIns="0" tIns="0" bIns="0" anchor="t">
-            <a:spAutoFit/>
-          </a:bodyPr>
-          <a:lstStyle/>
-          <a:p>
-            <a:pPr algn="l">
-              <a:lnSpc>
-                <a:spcPct val="115000"/>
-              </a:lnSpc>
-              <a:spcAft>
-                <a:spcPts val="0"/>
-              </a:spcAft>
-            </a:pPr>
-            <a:r>
-              <a:rPr sz="1400" b="0">
-                <a:solidFill>
-                  <a:srgbClr val="6B7480"/>
-                </a:solidFill>
-                <a:latin typeface="Arial"/>
-              </a:rPr>
-              <a:t>9 settings where confidence ranks right. Falls on 8. Gemma’s 3 backwards ones excluded.</a:t>
-            </a:r>
-          </a:p>
-        </p:txBody>
-      </p:sp>
-      <p:sp>
-        <p:nvSpPr>
-          <p:cNvPr id="20" name="Rounded Rectangle 19"/>
+          <p:cNvPr id="15" name="Rounded Rectangle 14"/>
           <p:cNvSpPr/>
           <p:nvPr/>
         </p:nvSpPr>
         <p:spPr>
           <a:xfrm>
-            <a:off x="812800" y="5588000"/>
+            <a:off x="812800" y="5524500"/>
             <a:ext cx="10566400" cy="571500"/>
           </a:xfrm>
           <a:prstGeom prst="roundRect">
@@ -24164,7 +23882,7 @@
               </a:spcAft>
             </a:pPr>
             <a:r>
-              <a:rPr sz="2000" b="0">
+              <a:rPr sz="2200" b="0">
                 <a:solidFill>
                   <a:srgbClr val="F6F8FB"/>
                 </a:solidFill>
@@ -24173,7 +23891,7 @@
               <a:t>Theory gives the </a:t>
             </a:r>
             <a:r>
-              <a:rPr sz="2000" b="1">
+              <a:rPr sz="2200" b="1">
                 <a:solidFill>
                   <a:srgbClr val="F6F8FB"/>
                 </a:solidFill>
@@ -24182,29 +23900,29 @@
               <a:t>form</a:t>
             </a:r>
             <a:r>
-              <a:rPr sz="2000" b="0">
+              <a:rPr sz="2200" b="0">
                 <a:solidFill>
                   <a:srgbClr val="F6F8FB"/>
                 </a:solidFill>
                 <a:latin typeface="Arial"/>
               </a:rPr>
-              <a:t>: a threshold.   Where to put it: </a:t>
-            </a:r>
-            <a:r>
-              <a:rPr sz="2000" b="1">
+              <a:t>.  </a:t>
+            </a:r>
+            <a:r>
+              <a:rPr sz="2200" b="1">
                 <a:solidFill>
                   <a:srgbClr val="66B2F0"/>
                 </a:solidFill>
                 <a:latin typeface="Arial"/>
               </a:rPr>
-              <a:t>the data must decide.</a:t>
-            </a:r>
-          </a:p>
-        </p:txBody>
-      </p:sp>
-      <p:sp>
-        <p:nvSpPr>
-          <p:cNvPr id="21" name="TextBox 20"/>
+              <a:t>The data decides where t goes.</a:t>
+            </a:r>
+          </a:p>
+        </p:txBody>
+      </p:sp>
+      <p:sp>
+        <p:nvSpPr>
+          <p:cNvPr id="16" name="TextBox 15"/>
           <p:cNvSpPr txBox="1"/>
           <p:nvPr/>
         </p:nvSpPr>

--- a/slides/CLIMB_talk.pptx
+++ b/slides/CLIMB_talk.pptx
@@ -22,6 +22,7 @@
     <p:sldId id="285" r:id="rId37"/>
     <p:sldId id="271" r:id="rId23"/>
     <p:sldId id="277" r:id="rId29"/>
+    <p:sldId id="287" r:id="rId39"/>
     <p:sldId id="279" r:id="rId31"/>
     <p:sldId id="280" r:id="rId32"/>
     <p:sldId id="281" r:id="rId33"/>
@@ -882,7 +883,7 @@
           <a:lstStyle/>
           <a:p>
             <a:r>
-              <a:t>Why should reaching 20 convince us? Suppose the threshold is actually unsafe, so it loses more than the tolerance. Then every bet loses money on average, so the gambler's average wealth stays at most one dollar. His money can never go negative. If he reached 20 dollars more than 1 time in 20, those cases alone would push his average above one dollar. That is impossible. So an unsafe threshold passes at most 5 percent of the time. Twenty is just one over five percent. Stopping as soon as he reaches 20 is covered too: freeze the money there and the same argument holds. We check two families of rules, each at 5 percent, so 90 percent overall. A pass means we accept the threshold and are wrong at most 5 percent of the time, like a driving test: passing gets you a licence, it does not prove you can drive.</a:t>
+              <a:t>Why should reaching 20 convince us? Suppose the threshold is actually unsafe, so it loses more than the tolerance. Then every bet loses money on average, so the gambler's average wealth stays at most one dollar. His money can never go negative. If he reached 20 dollars more than 1 time in 20, those cases alone would push his average above one dollar. That is impossible. So an unsafe threshold passes at most 5 percent of the time. Twenty is just one over five percent. Stopping as soon as he reaches 20 is covered too: freeze the money there and the same argument holds. How do we get from one test to a threshold we can use? We test the thresholds in a fixed order, strict to loose, and stop at the first failure. Every threshold before that failure is certified. An unsafe threshold can only end up certified if the first unsafe threshold in the order passed its own test, and that happens at most 5 percent of the time. So with one 5 percent budget, every certified threshold is safe with probability at least 95 percent, and we deploy the cheapest of them. We do not need to split the 5 percent across thresholds. We check two families of rules, each at 5 percent, so 90 percent overall. A pass means we accept the threshold and are wrong at most 5 percent of the time, like a driving test: passing gets you a licence, it does not prove you can drive.</a:t>
             </a:r>
           </a:p>
         </p:txBody>
@@ -2213,6 +2214,76 @@
           <a:p>
             <a:r>
               <a:t>Why is the rule a threshold, and not something more complex? Think of it as packing a bag. Stopping a task early saves the team's tokens on it, but risks the accuracy the team would have added, its gain. You can afford a total risk of epsilon. To save the most tokens, you stop first the tasks with the least gain per token saved, exactly like a knapsack. Now, if the gain falls as confidence rises, those are the most confident tasks. So the best rule stops every task above some confidence, and escalates the rest: a threshold. The paper proves this as a proposition. Does the gain fall with confidence? On the right, the gain from calling the team in each fifth of tasks, on the nine settings where confidence ranks answers the right way. It falls from 17 points on the least confident fifth to 4 to 6 on the confident ones, and it falls on eight of the nine. On Gemma's three backwards settings it does not, and there the guarantee still holds, the savings come from agreement. So theory gives the form of the rule. What it cannot give is where the line goes: that depends on the unknown gain, and the data has to decide.</a:t>
+            </a:r>
+          </a:p>
+        </p:txBody>
+      </p:sp>
+      <p:sp>
+        <p:nvSpPr>
+          <p:cNvPr id="4" name="Slide Number Placeholder 3"/>
+          <p:cNvSpPr>
+            <a:spLocks noGrp="1"/>
+          </p:cNvSpPr>
+          <p:nvPr>
+            <p:ph type="sldNum" idx="5" sz="quarter"/>
+          </p:nvPr>
+        </p:nvSpPr>
+        <p:spPr/>
+      </p:sp>
+    </p:spTree>
+  </p:cSld>
+  <p:clrMapOvr>
+    <a:masterClrMapping/>
+  </p:clrMapOvr>
+</p:notes>
+</file>
+
+<file path=ppt/notesSlides/notesSlide32.xml><?xml version="1.0" encoding="utf-8"?>
+<p:notes xmlns:a="http://schemas.openxmlformats.org/drawingml/2006/main" xmlns:p="http://schemas.openxmlformats.org/presentationml/2006/main" xmlns:r="http://schemas.openxmlformats.org/officeDocument/2006/relationships">
+  <p:cSld>
+    <p:spTree>
+      <p:nvGrpSpPr>
+        <p:cNvPr id="1" name=""/>
+        <p:cNvGrpSpPr/>
+        <p:nvPr/>
+      </p:nvGrpSpPr>
+      <p:grpSpPr>
+        <a:xfrm>
+          <a:off x="0" y="0"/>
+          <a:ext cx="0" cy="0"/>
+          <a:chOff x="0" y="0"/>
+          <a:chExt cx="0" cy="0"/>
+        </a:xfrm>
+      </p:grpSpPr>
+      <p:sp>
+        <p:nvSpPr>
+          <p:cNvPr id="2" name="Slide Image Placeholder 1"/>
+          <p:cNvSpPr>
+            <a:spLocks noGrp="1"/>
+          </p:cNvSpPr>
+          <p:nvPr>
+            <p:ph type="sldImg" idx="2"/>
+          </p:nvPr>
+        </p:nvSpPr>
+        <p:spPr/>
+      </p:sp>
+      <p:sp>
+        <p:nvSpPr>
+          <p:cNvPr id="3" name="Notes Placeholder 2"/>
+          <p:cNvSpPr>
+            <a:spLocks noGrp="1"/>
+          </p:cNvSpPr>
+          <p:nvPr>
+            <p:ph type="body" idx="3" sz="quarter"/>
+          </p:nvPr>
+        </p:nvSpPr>
+        <p:spPr/>
+        <p:txBody>
+          <a:bodyPr/>
+          <a:lstStyle/>
+          <a:p>
+            <a:r>
+              <a:t>Does CLIMB really stay inside the loss we allowed? Here is the accuracy itself. Left: always calling the team, in orange, against CLIMB at a 5 point tolerance, in green, on each of the 12 settings. The bars are close. Right: how many points CLIMB loses against the team, averaged over 200 random splits. Allowed 5 points, it loses between 1.1 and 2.8. Allowed 10, between 1.8 and 7.2. Every bar sits below its line. These are averages. Single splits can go above the line, and the previous slide counted how often: at most 2 percent of splits, against the 10 percent the guarantee allows.</a:t>
             </a:r>
           </a:p>
         </p:txBody>
@@ -6154,7 +6225,7 @@
                 </a:solidFill>
                 <a:latin typeface="Arial"/>
               </a:rPr>
-              <a:t>24</a:t>
+              <a:t>25</a:t>
             </a:r>
           </a:p>
         </p:txBody>
@@ -8774,12 +8845,12 @@
         </p:nvSpPr>
         <p:spPr>
           <a:xfrm>
-            <a:off x="812800" y="1778000"/>
-            <a:ext cx="3111500" cy="1397000"/>
+            <a:off x="812800" y="1651000"/>
+            <a:ext cx="3111500" cy="952500"/>
           </a:xfrm>
           <a:prstGeom prst="roundRect">
             <a:avLst>
-              <a:gd name="adj" fmla="val 8181"/>
+              <a:gd name="adj" fmla="val 10000"/>
             </a:avLst>
           </a:prstGeom>
           <a:solidFill>
@@ -8807,7 +8878,7 @@
           </a:fontRef>
         </p:style>
         <p:txBody>
-          <a:bodyPr rtlCol="0" anchor="ctr" wrap="square" lIns="139700" rIns="139700" tIns="139700" bIns="139700"/>
+          <a:bodyPr rtlCol="0" anchor="ctr" wrap="square" lIns="101600" rIns="101600" tIns="101600" bIns="101600"/>
           <a:lstStyle/>
           <a:p>
             <a:pPr algn="ctr">
@@ -8815,11 +8886,11 @@
                 <a:spcPct val="115000"/>
               </a:lnSpc>
               <a:spcAft>
-                <a:spcPts val="1000"/>
-              </a:spcAft>
-            </a:pPr>
-            <a:r>
-              <a:rPr sz="2600" b="1">
+                <a:spcPts val="600"/>
+              </a:spcAft>
+            </a:pPr>
+            <a:r>
+              <a:rPr sz="2400" b="1">
                 <a:solidFill>
                   <a:srgbClr val="B03A2E"/>
                 </a:solidFill>
@@ -8838,7 +8909,7 @@
               </a:spcAft>
             </a:pPr>
             <a:r>
-              <a:rPr sz="1800" b="0">
+              <a:rPr sz="1700" b="0">
                 <a:solidFill>
                   <a:srgbClr val="333B47"/>
                 </a:solidFill>
@@ -8857,7 +8928,7 @@
         </p:nvSpPr>
         <p:spPr>
           <a:xfrm>
-            <a:off x="3987800" y="2317750"/>
+            <a:off x="3987800" y="1968500"/>
             <a:ext cx="419100" cy="317500"/>
           </a:xfrm>
           <a:prstGeom prst="rightArrow">
@@ -8901,12 +8972,12 @@
         </p:nvSpPr>
         <p:spPr>
           <a:xfrm>
-            <a:off x="4464050" y="1778000"/>
-            <a:ext cx="3111500" cy="1397000"/>
+            <a:off x="4464050" y="1651000"/>
+            <a:ext cx="3111500" cy="952500"/>
           </a:xfrm>
           <a:prstGeom prst="roundRect">
             <a:avLst>
-              <a:gd name="adj" fmla="val 8181"/>
+              <a:gd name="adj" fmla="val 10000"/>
             </a:avLst>
           </a:prstGeom>
           <a:solidFill>
@@ -8934,7 +9005,7 @@
           </a:fontRef>
         </p:style>
         <p:txBody>
-          <a:bodyPr rtlCol="0" anchor="ctr" wrap="square" lIns="139700" rIns="139700" tIns="139700" bIns="139700"/>
+          <a:bodyPr rtlCol="0" anchor="ctr" wrap="square" lIns="101600" rIns="101600" tIns="101600" bIns="101600"/>
           <a:lstStyle/>
           <a:p>
             <a:pPr algn="ctr">
@@ -8942,11 +9013,11 @@
                 <a:spcPct val="115000"/>
               </a:lnSpc>
               <a:spcAft>
-                <a:spcPts val="1000"/>
-              </a:spcAft>
-            </a:pPr>
-            <a:r>
-              <a:rPr sz="2600" b="1">
+                <a:spcPts val="600"/>
+              </a:spcAft>
+            </a:pPr>
+            <a:r>
+              <a:rPr sz="2400" b="1">
                 <a:solidFill>
                   <a:srgbClr val="00175A"/>
                 </a:solidFill>
@@ -8965,13 +9036,13 @@
               </a:spcAft>
             </a:pPr>
             <a:r>
-              <a:rPr sz="1800" b="0">
+              <a:rPr sz="1700" b="0">
                 <a:solidFill>
                   <a:srgbClr val="333B47"/>
                 </a:solidFill>
                 <a:latin typeface="Arial"/>
               </a:rPr>
-              <a:t>starts at $1, never grows on average</a:t>
+              <a:t>never grows on average</a:t>
             </a:r>
           </a:p>
         </p:txBody>
@@ -8984,7 +9055,7 @@
         </p:nvSpPr>
         <p:spPr>
           <a:xfrm>
-            <a:off x="7639050" y="2317750"/>
+            <a:off x="7639050" y="1968500"/>
             <a:ext cx="419100" cy="317500"/>
           </a:xfrm>
           <a:prstGeom prst="rightArrow">
@@ -9028,12 +9099,12 @@
         </p:nvSpPr>
         <p:spPr>
           <a:xfrm>
-            <a:off x="8115300" y="1778000"/>
-            <a:ext cx="3111500" cy="1397000"/>
+            <a:off x="8115300" y="1651000"/>
+            <a:ext cx="3111500" cy="952500"/>
           </a:xfrm>
           <a:prstGeom prst="roundRect">
             <a:avLst>
-              <a:gd name="adj" fmla="val 8181"/>
+              <a:gd name="adj" fmla="val 10000"/>
             </a:avLst>
           </a:prstGeom>
           <a:solidFill>
@@ -9061,7 +9132,7 @@
           </a:fontRef>
         </p:style>
         <p:txBody>
-          <a:bodyPr rtlCol="0" anchor="ctr" wrap="square" lIns="139700" rIns="139700" tIns="139700" bIns="139700"/>
+          <a:bodyPr rtlCol="0" anchor="ctr" wrap="square" lIns="101600" rIns="101600" tIns="101600" bIns="101600"/>
           <a:lstStyle/>
           <a:p>
             <a:pPr algn="ctr">
@@ -9069,11 +9140,11 @@
                 <a:spcPct val="115000"/>
               </a:lnSpc>
               <a:spcAft>
-                <a:spcPts val="1000"/>
-              </a:spcAft>
-            </a:pPr>
-            <a:r>
-              <a:rPr sz="2600" b="1">
+                <a:spcPts val="600"/>
+              </a:spcAft>
+            </a:pPr>
+            <a:r>
+              <a:rPr sz="2400" b="1">
                 <a:solidFill>
                   <a:srgbClr val="00175A"/>
                 </a:solidFill>
@@ -9092,13 +9163,13 @@
               </a:spcAft>
             </a:pPr>
             <a:r>
-              <a:rPr sz="1800" b="0">
+              <a:rPr sz="1700" b="0">
                 <a:solidFill>
                   <a:srgbClr val="333B47"/>
                 </a:solidFill>
                 <a:latin typeface="Arial"/>
               </a:rPr>
-              <a:t>a lost answer at most halves it</a:t>
+              <a:t>a loss at most halves it</a:t>
             </a:r>
           </a:p>
         </p:txBody>
@@ -9111,12 +9182,12 @@
         </p:nvSpPr>
         <p:spPr>
           <a:xfrm>
-            <a:off x="812800" y="3492500"/>
-            <a:ext cx="10566400" cy="1270000"/>
+            <a:off x="812800" y="2794000"/>
+            <a:ext cx="10566400" cy="952500"/>
           </a:xfrm>
           <a:prstGeom prst="roundRect">
             <a:avLst>
-              <a:gd name="adj" fmla="val 9000"/>
+              <a:gd name="adj" fmla="val 10000"/>
             </a:avLst>
           </a:prstGeom>
           <a:solidFill>
@@ -9142,7 +9213,7 @@
           </a:fontRef>
         </p:style>
         <p:txBody>
-          <a:bodyPr rtlCol="0" anchor="ctr" wrap="square" lIns="127000" rIns="127000" tIns="127000" bIns="127000"/>
+          <a:bodyPr rtlCol="0" anchor="ctr" wrap="square" lIns="88900" rIns="88900" tIns="88900" bIns="88900"/>
           <a:lstStyle/>
           <a:p>
             <a:pPr algn="ctr">
@@ -9150,11 +9221,11 @@
                 <a:spcPct val="115000"/>
               </a:lnSpc>
               <a:spcAft>
-                <a:spcPts val="1000"/>
-              </a:spcAft>
-            </a:pPr>
-            <a:r>
-              <a:rPr sz="3600" b="1">
+                <a:spcPts val="600"/>
+              </a:spcAft>
+            </a:pPr>
+            <a:r>
+              <a:rPr sz="3000" b="1">
                 <a:solidFill>
                   <a:srgbClr val="F6F8FB"/>
                 </a:solidFill>
@@ -9173,7 +9244,7 @@
               </a:spcAft>
             </a:pPr>
             <a:r>
-              <a:rPr sz="2800" b="1">
+              <a:rPr sz="2400" b="1">
                 <a:solidFill>
                   <a:srgbClr val="F6F8FB"/>
                 </a:solidFill>
@@ -9182,7 +9253,7 @@
               <a:t>so  </a:t>
             </a:r>
             <a:r>
-              <a:rPr sz="2800" b="1">
+              <a:rPr sz="2400" b="1">
                 <a:solidFill>
                   <a:srgbClr val="66B2F0"/>
                 </a:solidFill>
@@ -9195,26 +9266,68 @@
       </p:sp>
       <p:sp>
         <p:nvSpPr>
-          <p:cNvPr id="10" name="Rounded Rectangle 9"/>
+          <p:cNvPr id="10" name="TextBox 9"/>
+          <p:cNvSpPr txBox="1"/>
+          <p:nvPr/>
+        </p:nvSpPr>
+        <p:spPr>
+          <a:xfrm>
+            <a:off x="812800" y="3886200"/>
+            <a:ext cx="10566400" cy="254000"/>
+          </a:xfrm>
+          <a:prstGeom prst="rect">
+            <a:avLst/>
+          </a:prstGeom>
+          <a:noFill/>
+        </p:spPr>
+        <p:txBody>
+          <a:bodyPr wrap="square" lIns="0" rIns="0" tIns="0" bIns="0" anchor="t">
+            <a:spAutoFit/>
+          </a:bodyPr>
+          <a:lstStyle/>
+          <a:p>
+            <a:pPr algn="l">
+              <a:lnSpc>
+                <a:spcPct val="115000"/>
+              </a:lnSpc>
+              <a:spcAft>
+                <a:spcPts val="0"/>
+              </a:spcAft>
+            </a:pPr>
+            <a:r>
+              <a:rPr sz="2000" b="1">
+                <a:solidFill>
+                  <a:srgbClr val="006FCF"/>
+                </a:solidFill>
+                <a:latin typeface="Arial"/>
+              </a:rPr>
+              <a:t>From one test to a threshold we can deploy</a:t>
+            </a:r>
+          </a:p>
+        </p:txBody>
+      </p:sp>
+      <p:sp>
+        <p:nvSpPr>
+          <p:cNvPr id="11" name="Rounded Rectangle 10"/>
           <p:cNvSpPr/>
           <p:nvPr/>
         </p:nvSpPr>
         <p:spPr>
           <a:xfrm>
-            <a:off x="812800" y="5016500"/>
-            <a:ext cx="5080000" cy="1143000"/>
+            <a:off x="812800" y="4254500"/>
+            <a:ext cx="3111500" cy="1841500"/>
           </a:xfrm>
           <a:prstGeom prst="roundRect">
             <a:avLst>
-              <a:gd name="adj" fmla="val 10000"/>
+              <a:gd name="adj" fmla="val 6206"/>
             </a:avLst>
           </a:prstGeom>
           <a:solidFill>
-            <a:srgbClr val="FFFFFF"/>
+            <a:srgbClr val="E9EEF5"/>
           </a:solidFill>
-          <a:ln w="12700">
+          <a:ln w="31750">
             <a:solidFill>
-              <a:srgbClr val="D3DCE8"/>
+              <a:srgbClr val="00175A"/>
             </a:solidFill>
           </a:ln>
           <a:effectLst/>
@@ -9234,29 +9347,29 @@
           </a:fontRef>
         </p:style>
         <p:txBody>
-          <a:bodyPr rtlCol="0" anchor="ctr" wrap="square" lIns="152400" rIns="152400" tIns="152400" bIns="152400"/>
-          <a:lstStyle/>
-          <a:p>
-            <a:pPr algn="l">
-              <a:lnSpc>
-                <a:spcPct val="115000"/>
-              </a:lnSpc>
-              <a:spcAft>
-                <a:spcPts val="600"/>
-              </a:spcAft>
-            </a:pPr>
-            <a:r>
-              <a:rPr sz="2000" b="1">
+          <a:bodyPr rtlCol="0" anchor="ctr" wrap="square" lIns="127000" rIns="127000" tIns="127000" bIns="127000"/>
+          <a:lstStyle/>
+          <a:p>
+            <a:pPr algn="ctr">
+              <a:lnSpc>
+                <a:spcPct val="115000"/>
+              </a:lnSpc>
+              <a:spcAft>
+                <a:spcPts val="1000"/>
+              </a:spcAft>
+            </a:pPr>
+            <a:r>
+              <a:rPr sz="2400" b="1">
                 <a:solidFill>
                   <a:srgbClr val="00175A"/>
                 </a:solidFill>
                 <a:latin typeface="Arial"/>
               </a:rPr>
-              <a:t>100 worlds, $100 in total</a:t>
-            </a:r>
-          </a:p>
-          <a:p>
-            <a:pPr algn="l">
+              <a:t>One threshold</a:t>
+            </a:r>
+          </a:p>
+          <a:p>
+            <a:pPr algn="ctr">
               <a:lnSpc>
                 <a:spcPct val="115000"/>
               </a:lnSpc>
@@ -9267,38 +9380,34 @@
             <a:r>
               <a:rPr sz="1800" b="0">
                 <a:solidFill>
-                  <a:srgbClr val="6B7480"/>
-                </a:solidFill>
-                <a:latin typeface="Arial"/>
-              </a:rPr>
-              <a:t>Each pass holds $20, so at most 5 of 100 pass. $100 line → 1%.</a:t>
-            </a:r>
-          </a:p>
-        </p:txBody>
-      </p:sp>
-      <p:sp>
-        <p:nvSpPr>
-          <p:cNvPr id="11" name="Rounded Rectangle 10"/>
+                  <a:srgbClr val="333B47"/>
+                </a:solidFill>
+                <a:latin typeface="Arial"/>
+              </a:rPr>
+              <a:t>An unsafe one passes ≤ 5%.</a:t>
+            </a:r>
+          </a:p>
+        </p:txBody>
+      </p:sp>
+      <p:sp>
+        <p:nvSpPr>
+          <p:cNvPr id="12" name="Right Arrow 11"/>
           <p:cNvSpPr/>
           <p:nvPr/>
         </p:nvSpPr>
         <p:spPr>
           <a:xfrm>
-            <a:off x="6299200" y="5016500"/>
-            <a:ext cx="5080000" cy="1143000"/>
-          </a:xfrm>
-          <a:prstGeom prst="roundRect">
-            <a:avLst>
-              <a:gd name="adj" fmla="val 10000"/>
-            </a:avLst>
+            <a:off x="3987800" y="5016500"/>
+            <a:ext cx="419100" cy="317500"/>
+          </a:xfrm>
+          <a:prstGeom prst="rightArrow">
+            <a:avLst/>
           </a:prstGeom>
           <a:solidFill>
-            <a:srgbClr val="FFFFFF"/>
+            <a:srgbClr val="6B7480"/>
           </a:solidFill>
-          <a:ln w="12700">
-            <a:solidFill>
-              <a:srgbClr val="D3DCE8"/>
-            </a:solidFill>
+          <a:ln>
+            <a:noFill/>
           </a:ln>
           <a:effectLst/>
         </p:spPr>
@@ -9317,29 +9426,77 @@
           </a:fontRef>
         </p:style>
         <p:txBody>
-          <a:bodyPr rtlCol="0" anchor="ctr" wrap="square" lIns="152400" rIns="152400" tIns="152400" bIns="152400"/>
-          <a:lstStyle/>
-          <a:p>
-            <a:pPr algn="l">
-              <a:lnSpc>
-                <a:spcPct val="115000"/>
-              </a:lnSpc>
-              <a:spcAft>
-                <a:spcPts val="600"/>
-              </a:spcAft>
-            </a:pPr>
-            <a:r>
-              <a:rPr sz="2000" b="1">
+          <a:bodyPr rtlCol="0" anchor="ctr"/>
+          <a:lstStyle/>
+          <a:p>
+            <a:pPr algn="ctr"/>
+          </a:p>
+        </p:txBody>
+      </p:sp>
+      <p:sp>
+        <p:nvSpPr>
+          <p:cNvPr id="13" name="Rounded Rectangle 12"/>
+          <p:cNvSpPr/>
+          <p:nvPr/>
+        </p:nvSpPr>
+        <p:spPr>
+          <a:xfrm>
+            <a:off x="4464050" y="4254500"/>
+            <a:ext cx="3111500" cy="1841500"/>
+          </a:xfrm>
+          <a:prstGeom prst="roundRect">
+            <a:avLst>
+              <a:gd name="adj" fmla="val 6206"/>
+            </a:avLst>
+          </a:prstGeom>
+          <a:solidFill>
+            <a:srgbClr val="E9EEF5"/>
+          </a:solidFill>
+          <a:ln w="31750">
+            <a:solidFill>
+              <a:srgbClr val="00175A"/>
+            </a:solidFill>
+          </a:ln>
+          <a:effectLst/>
+        </p:spPr>
+        <p:style>
+          <a:lnRef idx="1">
+            <a:schemeClr val="accent1"/>
+          </a:lnRef>
+          <a:fillRef idx="3">
+            <a:schemeClr val="accent1"/>
+          </a:fillRef>
+          <a:effectRef idx="2">
+            <a:schemeClr val="accent1"/>
+          </a:effectRef>
+          <a:fontRef idx="minor">
+            <a:schemeClr val="lt1"/>
+          </a:fontRef>
+        </p:style>
+        <p:txBody>
+          <a:bodyPr rtlCol="0" anchor="ctr" wrap="square" lIns="127000" rIns="127000" tIns="127000" bIns="127000"/>
+          <a:lstStyle/>
+          <a:p>
+            <a:pPr algn="ctr">
+              <a:lnSpc>
+                <a:spcPct val="115000"/>
+              </a:lnSpc>
+              <a:spcAft>
+                <a:spcPts val="1000"/>
+              </a:spcAft>
+            </a:pPr>
+            <a:r>
+              <a:rPr sz="2400" b="1">
                 <a:solidFill>
                   <a:srgbClr val="00175A"/>
                 </a:solidFill>
                 <a:latin typeface="Arial"/>
               </a:rPr>
-              <a:t>A pass: accept, wrong ≤ 5% of the time</a:t>
-            </a:r>
-          </a:p>
-          <a:p>
-            <a:pPr algn="l">
+              <a:t>Strict → loose</a:t>
+            </a:r>
+          </a:p>
+          <a:p>
+            <a:pPr algn="ctr">
               <a:lnSpc>
                 <a:spcPct val="115000"/>
               </a:lnSpc>
@@ -9350,18 +9507,163 @@
             <a:r>
               <a:rPr sz="1800" b="0">
                 <a:solidFill>
-                  <a:srgbClr val="6B7480"/>
-                </a:solidFill>
-                <a:latin typeface="Arial"/>
-              </a:rPr>
-              <a:t>Like a driving test, not proof you can drive.</a:t>
-            </a:r>
-          </a:p>
-        </p:txBody>
-      </p:sp>
-      <p:sp>
-        <p:nvSpPr>
-          <p:cNvPr id="12" name="TextBox 11"/>
+                  <a:srgbClr val="333B47"/>
+                </a:solidFill>
+                <a:latin typeface="Arial"/>
+              </a:rPr>
+              <a:t>Stop at the first failure.  An unsafe one gets in only if the </a:t>
+            </a:r>
+            <a:r>
+              <a:rPr sz="1800" b="1">
+                <a:solidFill>
+                  <a:srgbClr val="333B47"/>
+                </a:solidFill>
+                <a:latin typeface="Arial"/>
+              </a:rPr>
+              <a:t>first</a:t>
+            </a:r>
+            <a:r>
+              <a:rPr sz="1800" b="0">
+                <a:solidFill>
+                  <a:srgbClr val="333B47"/>
+                </a:solidFill>
+                <a:latin typeface="Arial"/>
+              </a:rPr>
+              <a:t> unsafe one passes: ≤ 5%.</a:t>
+            </a:r>
+          </a:p>
+        </p:txBody>
+      </p:sp>
+      <p:sp>
+        <p:nvSpPr>
+          <p:cNvPr id="14" name="Right Arrow 13"/>
+          <p:cNvSpPr/>
+          <p:nvPr/>
+        </p:nvSpPr>
+        <p:spPr>
+          <a:xfrm>
+            <a:off x="7639050" y="5016500"/>
+            <a:ext cx="419100" cy="317500"/>
+          </a:xfrm>
+          <a:prstGeom prst="rightArrow">
+            <a:avLst/>
+          </a:prstGeom>
+          <a:solidFill>
+            <a:srgbClr val="6B7480"/>
+          </a:solidFill>
+          <a:ln>
+            <a:noFill/>
+          </a:ln>
+          <a:effectLst/>
+        </p:spPr>
+        <p:style>
+          <a:lnRef idx="1">
+            <a:schemeClr val="accent1"/>
+          </a:lnRef>
+          <a:fillRef idx="3">
+            <a:schemeClr val="accent1"/>
+          </a:fillRef>
+          <a:effectRef idx="2">
+            <a:schemeClr val="accent1"/>
+          </a:effectRef>
+          <a:fontRef idx="minor">
+            <a:schemeClr val="lt1"/>
+          </a:fontRef>
+        </p:style>
+        <p:txBody>
+          <a:bodyPr rtlCol="0" anchor="ctr"/>
+          <a:lstStyle/>
+          <a:p>
+            <a:pPr algn="ctr"/>
+          </a:p>
+        </p:txBody>
+      </p:sp>
+      <p:sp>
+        <p:nvSpPr>
+          <p:cNvPr id="15" name="Rounded Rectangle 14"/>
+          <p:cNvSpPr/>
+          <p:nvPr/>
+        </p:nvSpPr>
+        <p:spPr>
+          <a:xfrm>
+            <a:off x="8115300" y="4254500"/>
+            <a:ext cx="3111500" cy="1841500"/>
+          </a:xfrm>
+          <a:prstGeom prst="roundRect">
+            <a:avLst>
+              <a:gd name="adj" fmla="val 6206"/>
+            </a:avLst>
+          </a:prstGeom>
+          <a:solidFill>
+            <a:srgbClr val="E3ECE2"/>
+          </a:solidFill>
+          <a:ln w="31750">
+            <a:solidFill>
+              <a:srgbClr val="2F6B34"/>
+            </a:solidFill>
+          </a:ln>
+          <a:effectLst/>
+        </p:spPr>
+        <p:style>
+          <a:lnRef idx="1">
+            <a:schemeClr val="accent1"/>
+          </a:lnRef>
+          <a:fillRef idx="3">
+            <a:schemeClr val="accent1"/>
+          </a:fillRef>
+          <a:effectRef idx="2">
+            <a:schemeClr val="accent1"/>
+          </a:effectRef>
+          <a:fontRef idx="minor">
+            <a:schemeClr val="lt1"/>
+          </a:fontRef>
+        </p:style>
+        <p:txBody>
+          <a:bodyPr rtlCol="0" anchor="ctr" wrap="square" lIns="127000" rIns="127000" tIns="127000" bIns="127000"/>
+          <a:lstStyle/>
+          <a:p>
+            <a:pPr algn="ctr">
+              <a:lnSpc>
+                <a:spcPct val="115000"/>
+              </a:lnSpc>
+              <a:spcAft>
+                <a:spcPts val="1000"/>
+              </a:spcAft>
+            </a:pPr>
+            <a:r>
+              <a:rPr sz="2400" b="1">
+                <a:solidFill>
+                  <a:srgbClr val="2F6B34"/>
+                </a:solidFill>
+                <a:latin typeface="Arial"/>
+              </a:rPr>
+              <a:t>Certified set</a:t>
+            </a:r>
+          </a:p>
+          <a:p>
+            <a:pPr algn="ctr">
+              <a:lnSpc>
+                <a:spcPct val="115000"/>
+              </a:lnSpc>
+              <a:spcAft>
+                <a:spcPts val="0"/>
+              </a:spcAft>
+            </a:pPr>
+            <a:r>
+              <a:rPr sz="1800" b="0">
+                <a:solidFill>
+                  <a:srgbClr val="333B47"/>
+                </a:solidFill>
+                <a:latin typeface="Arial"/>
+              </a:rPr>
+              <a:t>All safe with prob. ≥ 95%.  ★ Deploy the cheapest.</a:t>
+            </a:r>
+          </a:p>
+        </p:txBody>
+      </p:sp>
+      <p:sp>
+        <p:nvSpPr>
+          <p:cNvPr id="16" name="TextBox 15"/>
           <p:cNvSpPr txBox="1"/>
           <p:nvPr/>
         </p:nvSpPr>
@@ -9970,7 +10272,7 @@
                 </a:solidFill>
                 <a:latin typeface="Arial"/>
               </a:rPr>
-              <a:t>26</a:t>
+              <a:t>27</a:t>
             </a:r>
           </a:p>
         </p:txBody>
@@ -10531,7 +10833,7 @@
                 </a:solidFill>
                 <a:latin typeface="Arial"/>
               </a:rPr>
-              <a:t>27</a:t>
+              <a:t>28</a:t>
             </a:r>
           </a:p>
         </p:txBody>
@@ -11295,7 +11597,7 @@
                 </a:solidFill>
                 <a:latin typeface="Arial"/>
               </a:rPr>
-              <a:t>28</a:t>
+              <a:t>29</a:t>
             </a:r>
           </a:p>
         </p:txBody>
@@ -12893,7 +13195,7 @@
                 </a:solidFill>
                 <a:latin typeface="Arial"/>
               </a:rPr>
-              <a:t>29</a:t>
+              <a:t>30</a:t>
             </a:r>
           </a:p>
         </p:txBody>
@@ -14409,7 +14711,7 @@
                 </a:solidFill>
                 <a:latin typeface="Arial"/>
               </a:rPr>
-              <a:t>30</a:t>
+              <a:t>31</a:t>
             </a:r>
           </a:p>
         </p:txBody>
@@ -14751,7 +15053,7 @@
                 </a:solidFill>
                 <a:latin typeface="Arial"/>
               </a:rPr>
-              <a:t>31</a:t>
+              <a:t>32</a:t>
             </a:r>
           </a:p>
         </p:txBody>
@@ -15460,7 +15762,7 @@
                 </a:solidFill>
                 <a:latin typeface="Arial"/>
               </a:rPr>
-              <a:t>25</a:t>
+              <a:t>26</a:t>
             </a:r>
           </a:p>
         </p:txBody>
@@ -15969,7 +16271,7 @@
                 </a:solidFill>
                 <a:latin typeface="Arial"/>
               </a:rPr>
-              <a:t>18</a:t>
+              <a:t>19</a:t>
             </a:r>
           </a:p>
         </p:txBody>
@@ -17241,7 +17543,7 @@
                 </a:solidFill>
                 <a:latin typeface="Arial"/>
               </a:rPr>
-              <a:t>19</a:t>
+              <a:t>20</a:t>
             </a:r>
           </a:p>
         </p:txBody>
@@ -17393,7 +17695,7 @@
                 </a:solidFill>
                 <a:latin typeface="Arial"/>
               </a:rPr>
-              <a:t>20</a:t>
+              <a:t>21</a:t>
             </a:r>
           </a:p>
         </p:txBody>
@@ -19821,7 +20123,7 @@
                 </a:solidFill>
                 <a:latin typeface="Arial"/>
               </a:rPr>
-              <a:t>21</a:t>
+              <a:t>22</a:t>
             </a:r>
           </a:p>
         </p:txBody>
@@ -23970,6 +24272,456 @@
 </p:sld>
 </file>
 
+<file path=ppt/slides/slide32.xml><?xml version="1.0" encoding="utf-8"?>
+<p:sld xmlns:a="http://schemas.openxmlformats.org/drawingml/2006/main" xmlns:p="http://schemas.openxmlformats.org/presentationml/2006/main" xmlns:r="http://schemas.openxmlformats.org/officeDocument/2006/relationships">
+  <p:cSld>
+    <p:bg>
+      <p:bgPr>
+        <a:solidFill>
+          <a:srgbClr val="F6F8FB"/>
+        </a:solidFill>
+        <a:effectLst/>
+      </p:bgPr>
+    </p:bg>
+    <p:spTree>
+      <p:nvGrpSpPr>
+        <p:cNvPr id="1" name=""/>
+        <p:cNvGrpSpPr/>
+        <p:nvPr/>
+      </p:nvGrpSpPr>
+      <p:grpSpPr/>
+      <p:sp>
+        <p:nvSpPr>
+          <p:cNvPr id="2" name="TextBox 1"/>
+          <p:cNvSpPr txBox="1"/>
+          <p:nvPr/>
+        </p:nvSpPr>
+        <p:spPr>
+          <a:xfrm>
+            <a:off x="812800" y="635000"/>
+            <a:ext cx="10566400" cy="254000"/>
+          </a:xfrm>
+          <a:prstGeom prst="rect">
+            <a:avLst/>
+          </a:prstGeom>
+          <a:noFill/>
+        </p:spPr>
+        <p:txBody>
+          <a:bodyPr wrap="square" lIns="0" rIns="0" tIns="0" bIns="0" anchor="t">
+            <a:spAutoFit/>
+          </a:bodyPr>
+          <a:lstStyle/>
+          <a:p>
+            <a:pPr algn="l">
+              <a:lnSpc>
+                <a:spcPct val="115000"/>
+              </a:lnSpc>
+              <a:spcAft>
+                <a:spcPts val="0"/>
+              </a:spcAft>
+            </a:pPr>
+            <a:r>
+              <a:rPr sz="1300" b="1">
+                <a:solidFill>
+                  <a:srgbClr val="006FCF"/>
+                </a:solidFill>
+                <a:latin typeface="Arial"/>
+              </a:rPr>
+              <a:t>RESULTS · 3 MODELS × 4 BENCHMARKS, 200 RANDOM SPLITS</a:t>
+            </a:r>
+          </a:p>
+        </p:txBody>
+      </p:sp>
+      <p:sp>
+        <p:nvSpPr>
+          <p:cNvPr id="3" name="TextBox 2"/>
+          <p:cNvSpPr txBox="1"/>
+          <p:nvPr/>
+        </p:nvSpPr>
+        <p:spPr>
+          <a:xfrm>
+            <a:off x="812800" y="889000"/>
+            <a:ext cx="10566400" cy="571500"/>
+          </a:xfrm>
+          <a:prstGeom prst="rect">
+            <a:avLst/>
+          </a:prstGeom>
+          <a:noFill/>
+        </p:spPr>
+        <p:txBody>
+          <a:bodyPr wrap="square" lIns="0" rIns="0" tIns="0" bIns="0" anchor="t">
+            <a:spAutoFit/>
+          </a:bodyPr>
+          <a:lstStyle/>
+          <a:p>
+            <a:pPr algn="l">
+              <a:lnSpc>
+                <a:spcPct val="105000"/>
+              </a:lnSpc>
+              <a:spcAft>
+                <a:spcPts val="0"/>
+              </a:spcAft>
+            </a:pPr>
+            <a:r>
+              <a:rPr sz="3000" b="1">
+                <a:solidFill>
+                  <a:srgbClr val="00175A"/>
+                </a:solidFill>
+                <a:latin typeface="Georgia"/>
+              </a:rPr>
+              <a:t>Accuracy with CLIMB stays within the loss you allow</a:t>
+            </a:r>
+          </a:p>
+        </p:txBody>
+      </p:sp>
+      <p:sp>
+        <p:nvSpPr>
+          <p:cNvPr id="4" name="TextBox 3"/>
+          <p:cNvSpPr txBox="1"/>
+          <p:nvPr/>
+        </p:nvSpPr>
+        <p:spPr>
+          <a:xfrm>
+            <a:off x="812800" y="1587500"/>
+            <a:ext cx="5080000" cy="254000"/>
+          </a:xfrm>
+          <a:prstGeom prst="rect">
+            <a:avLst/>
+          </a:prstGeom>
+          <a:noFill/>
+        </p:spPr>
+        <p:txBody>
+          <a:bodyPr wrap="square" lIns="0" rIns="0" tIns="0" bIns="0" anchor="t">
+            <a:spAutoFit/>
+          </a:bodyPr>
+          <a:lstStyle/>
+          <a:p>
+            <a:pPr algn="l">
+              <a:lnSpc>
+                <a:spcPct val="115000"/>
+              </a:lnSpc>
+              <a:spcAft>
+                <a:spcPts val="0"/>
+              </a:spcAft>
+            </a:pPr>
+            <a:r>
+              <a:rPr sz="2200" b="1">
+                <a:solidFill>
+                  <a:srgbClr val="00175A"/>
+                </a:solidFill>
+                <a:latin typeface="Arial"/>
+              </a:rPr>
+              <a:t>Accuracy (%)</a:t>
+            </a:r>
+          </a:p>
+        </p:txBody>
+      </p:sp>
+      <p:pic>
+        <p:nvPicPr>
+          <p:cNvPr id="5" name="Picture 4" descr="c_acccmp.png"/>
+          <p:cNvPicPr>
+            <a:picLocks noChangeAspect="1"/>
+          </p:cNvPicPr>
+          <p:nvPr/>
+        </p:nvPicPr>
+        <p:blipFill>
+          <a:blip r:embed="rId3"/>
+          <a:stretch>
+            <a:fillRect/>
+          </a:stretch>
+        </p:blipFill>
+        <p:spPr>
+          <a:xfrm>
+            <a:off x="812800" y="1996955"/>
+            <a:ext cx="5080000" cy="2610088"/>
+          </a:xfrm>
+          <a:prstGeom prst="rect">
+            <a:avLst/>
+          </a:prstGeom>
+        </p:spPr>
+      </p:pic>
+      <p:sp>
+        <p:nvSpPr>
+          <p:cNvPr id="6" name="TextBox 5"/>
+          <p:cNvSpPr txBox="1"/>
+          <p:nvPr/>
+        </p:nvSpPr>
+        <p:spPr>
+          <a:xfrm>
+            <a:off x="6299200" y="1587500"/>
+            <a:ext cx="5080000" cy="254000"/>
+          </a:xfrm>
+          <a:prstGeom prst="rect">
+            <a:avLst/>
+          </a:prstGeom>
+          <a:noFill/>
+        </p:spPr>
+        <p:txBody>
+          <a:bodyPr wrap="square" lIns="0" rIns="0" tIns="0" bIns="0" anchor="t">
+            <a:spAutoFit/>
+          </a:bodyPr>
+          <a:lstStyle/>
+          <a:p>
+            <a:pPr algn="l">
+              <a:lnSpc>
+                <a:spcPct val="115000"/>
+              </a:lnSpc>
+              <a:spcAft>
+                <a:spcPts val="0"/>
+              </a:spcAft>
+            </a:pPr>
+            <a:r>
+              <a:rPr sz="2200" b="1">
+                <a:solidFill>
+                  <a:srgbClr val="00175A"/>
+                </a:solidFill>
+                <a:latin typeface="Arial"/>
+              </a:rPr>
+              <a:t>Points lost vs always calling the team</a:t>
+            </a:r>
+          </a:p>
+        </p:txBody>
+      </p:sp>
+      <p:pic>
+        <p:nvPicPr>
+          <p:cNvPr id="7" name="Picture 6" descr="c_drop.png"/>
+          <p:cNvPicPr>
+            <a:picLocks noChangeAspect="1"/>
+          </p:cNvPicPr>
+          <p:nvPr/>
+        </p:nvPicPr>
+        <p:blipFill>
+          <a:blip r:embed="rId4"/>
+          <a:stretch>
+            <a:fillRect/>
+          </a:stretch>
+        </p:blipFill>
+        <p:spPr>
+          <a:xfrm>
+            <a:off x="6299200" y="2021685"/>
+            <a:ext cx="5080000" cy="2560628"/>
+          </a:xfrm>
+          <a:prstGeom prst="rect">
+            <a:avLst/>
+          </a:prstGeom>
+        </p:spPr>
+      </p:pic>
+      <p:sp>
+        <p:nvSpPr>
+          <p:cNvPr id="8" name="Rounded Rectangle 7"/>
+          <p:cNvSpPr/>
+          <p:nvPr/>
+        </p:nvSpPr>
+        <p:spPr>
+          <a:xfrm>
+            <a:off x="812800" y="4826000"/>
+            <a:ext cx="5080000" cy="1270000"/>
+          </a:xfrm>
+          <a:prstGeom prst="roundRect">
+            <a:avLst>
+              <a:gd name="adj" fmla="val 9000"/>
+            </a:avLst>
+          </a:prstGeom>
+          <a:solidFill>
+            <a:srgbClr val="E3ECE2"/>
+          </a:solidFill>
+          <a:ln w="12700">
+            <a:solidFill>
+              <a:srgbClr val="D3DCE8"/>
+            </a:solidFill>
+          </a:ln>
+          <a:effectLst/>
+        </p:spPr>
+        <p:style>
+          <a:lnRef idx="1">
+            <a:schemeClr val="accent1"/>
+          </a:lnRef>
+          <a:fillRef idx="3">
+            <a:schemeClr val="accent1"/>
+          </a:fillRef>
+          <a:effectRef idx="2">
+            <a:schemeClr val="accent1"/>
+          </a:effectRef>
+          <a:fontRef idx="minor">
+            <a:schemeClr val="lt1"/>
+          </a:fontRef>
+        </p:style>
+        <p:txBody>
+          <a:bodyPr rtlCol="0" anchor="ctr" wrap="square" lIns="190500" rIns="190500" tIns="190500" bIns="190500"/>
+          <a:lstStyle/>
+          <a:p>
+            <a:pPr algn="l">
+              <a:lnSpc>
+                <a:spcPct val="100000"/>
+              </a:lnSpc>
+              <a:spcAft>
+                <a:spcPts val="600"/>
+              </a:spcAft>
+            </a:pPr>
+            <a:r>
+              <a:rPr sz="3600" b="1">
+                <a:solidFill>
+                  <a:srgbClr val="2F6B34"/>
+                </a:solidFill>
+                <a:latin typeface="Georgia"/>
+              </a:rPr>
+              <a:t>1.1–2.8 points lost</a:t>
+            </a:r>
+          </a:p>
+          <a:p>
+            <a:pPr algn="l">
+              <a:lnSpc>
+                <a:spcPct val="115000"/>
+              </a:lnSpc>
+              <a:spcAft>
+                <a:spcPts val="0"/>
+              </a:spcAft>
+            </a:pPr>
+            <a:r>
+              <a:rPr sz="1700" b="0">
+                <a:solidFill>
+                  <a:srgbClr val="333B47"/>
+                </a:solidFill>
+                <a:latin typeface="Arial"/>
+              </a:rPr>
+              <a:t>allowed 5, on average over splits</a:t>
+            </a:r>
+          </a:p>
+        </p:txBody>
+      </p:sp>
+      <p:sp>
+        <p:nvSpPr>
+          <p:cNvPr id="9" name="Rounded Rectangle 8"/>
+          <p:cNvSpPr/>
+          <p:nvPr/>
+        </p:nvSpPr>
+        <p:spPr>
+          <a:xfrm>
+            <a:off x="6299200" y="4826000"/>
+            <a:ext cx="5080000" cy="1270000"/>
+          </a:xfrm>
+          <a:prstGeom prst="roundRect">
+            <a:avLst>
+              <a:gd name="adj" fmla="val 9000"/>
+            </a:avLst>
+          </a:prstGeom>
+          <a:solidFill>
+            <a:srgbClr val="E6EBF4"/>
+          </a:solidFill>
+          <a:ln w="12700">
+            <a:solidFill>
+              <a:srgbClr val="D3DCE8"/>
+            </a:solidFill>
+          </a:ln>
+          <a:effectLst/>
+        </p:spPr>
+        <p:style>
+          <a:lnRef idx="1">
+            <a:schemeClr val="accent1"/>
+          </a:lnRef>
+          <a:fillRef idx="3">
+            <a:schemeClr val="accent1"/>
+          </a:fillRef>
+          <a:effectRef idx="2">
+            <a:schemeClr val="accent1"/>
+          </a:effectRef>
+          <a:fontRef idx="minor">
+            <a:schemeClr val="lt1"/>
+          </a:fontRef>
+        </p:style>
+        <p:txBody>
+          <a:bodyPr rtlCol="0" anchor="ctr" wrap="square" lIns="190500" rIns="190500" tIns="190500" bIns="190500"/>
+          <a:lstStyle/>
+          <a:p>
+            <a:pPr algn="l">
+              <a:lnSpc>
+                <a:spcPct val="100000"/>
+              </a:lnSpc>
+              <a:spcAft>
+                <a:spcPts val="600"/>
+              </a:spcAft>
+            </a:pPr>
+            <a:r>
+              <a:rPr sz="3600" b="1">
+                <a:solidFill>
+                  <a:srgbClr val="00175A"/>
+                </a:solidFill>
+                <a:latin typeface="Georgia"/>
+              </a:rPr>
+              <a:t>1.8–7.2 points lost</a:t>
+            </a:r>
+          </a:p>
+          <a:p>
+            <a:pPr algn="l">
+              <a:lnSpc>
+                <a:spcPct val="115000"/>
+              </a:lnSpc>
+              <a:spcAft>
+                <a:spcPts val="0"/>
+              </a:spcAft>
+            </a:pPr>
+            <a:r>
+              <a:rPr sz="1700" b="0">
+                <a:solidFill>
+                  <a:srgbClr val="333B47"/>
+                </a:solidFill>
+                <a:latin typeface="Arial"/>
+              </a:rPr>
+              <a:t>allowed 10, on average over splits</a:t>
+            </a:r>
+          </a:p>
+        </p:txBody>
+      </p:sp>
+      <p:sp>
+        <p:nvSpPr>
+          <p:cNvPr id="10" name="TextBox 9"/>
+          <p:cNvSpPr txBox="1"/>
+          <p:nvPr/>
+        </p:nvSpPr>
+        <p:spPr>
+          <a:xfrm>
+            <a:off x="812800" y="6413500"/>
+            <a:ext cx="10566400" cy="215900"/>
+          </a:xfrm>
+          <a:prstGeom prst="rect">
+            <a:avLst/>
+          </a:prstGeom>
+          <a:noFill/>
+        </p:spPr>
+        <p:txBody>
+          <a:bodyPr wrap="square" lIns="0" rIns="0" tIns="0" bIns="0" anchor="t">
+            <a:spAutoFit/>
+          </a:bodyPr>
+          <a:lstStyle/>
+          <a:p>
+            <a:pPr algn="r">
+              <a:lnSpc>
+                <a:spcPct val="115000"/>
+              </a:lnSpc>
+              <a:spcAft>
+                <a:spcPts val="0"/>
+              </a:spcAft>
+            </a:pPr>
+            <a:r>
+              <a:rPr sz="1200" b="0">
+                <a:solidFill>
+                  <a:srgbClr val="6B7480"/>
+                </a:solidFill>
+                <a:latin typeface="Arial"/>
+              </a:rPr>
+              <a:t>18</a:t>
+            </a:r>
+          </a:p>
+        </p:txBody>
+      </p:sp>
+    </p:spTree>
+  </p:cSld>
+  <p:clrMapOvr>
+    <a:masterClrMapping/>
+  </p:clrMapOvr>
+</p:sld>
+</file>
+
 <file path=ppt/slides/slide4.xml><?xml version="1.0" encoding="utf-8"?>
 <p:sld xmlns:a="http://schemas.openxmlformats.org/drawingml/2006/main" xmlns:p="http://schemas.openxmlformats.org/presentationml/2006/main" xmlns:r="http://schemas.openxmlformats.org/officeDocument/2006/relationships">
   <p:cSld>
@@ -25059,7 +25811,7 @@
                 </a:solidFill>
                 <a:latin typeface="Arial"/>
               </a:rPr>
-              <a:t>22</a:t>
+              <a:t>23</a:t>
             </a:r>
           </a:p>
         </p:txBody>
@@ -26494,7 +27246,7 @@
                 </a:solidFill>
                 <a:latin typeface="Arial"/>
               </a:rPr>
-              <a:t>23</a:t>
+              <a:t>24</a:t>
             </a:r>
           </a:p>
         </p:txBody>
